--- a/1학기/웹 프로그래밍/2026_웹 프로그래밍_part2.pptx
+++ b/1학기/웹 프로그래밍/2026_웹 프로그래밍_part2.pptx
@@ -2,51 +2,51 @@
 <file path=ppt/presentation.xml><?xml version="1.0" encoding="utf-8"?>
 <p:presentation xmlns:a="http://schemas.openxmlformats.org/drawingml/2006/main" xmlns:r="http://schemas.openxmlformats.org/officeDocument/2006/relationships" xmlns:p="http://schemas.openxmlformats.org/presentationml/2006/main" xmlns:p14="http://schemas.microsoft.com/office/powerpoint/2010/main" strictFirstAndLastChars="0" embedTrueTypeFonts="1" saveSubsetFonts="1" autoCompressPictures="0">
   <p:sldMasterIdLst>
-    <p:sldMasterId id="2147483663" r:id="rId8"/>
+    <p:sldMasterId id="2147483673" r:id="rId8"/>
   </p:sldMasterIdLst>
   <p:notesMasterIdLst>
     <p:notesMasterId r:id="rId10"/>
   </p:notesMasterIdLst>
   <p:sldIdLst>
     <p:sldId id="256" r:id="rId12"/>
-    <p:sldId id="257" r:id="rId14"/>
-    <p:sldId id="351" r:id="rId16"/>
-    <p:sldId id="352" r:id="rId17"/>
-    <p:sldId id="258" r:id="rId18"/>
-    <p:sldId id="259" r:id="rId20"/>
-    <p:sldId id="353" r:id="rId22"/>
-    <p:sldId id="260" r:id="rId24"/>
-    <p:sldId id="262" r:id="rId26"/>
-    <p:sldId id="263" r:id="rId28"/>
-    <p:sldId id="264" r:id="rId30"/>
-    <p:sldId id="337" r:id="rId32"/>
-    <p:sldId id="338" r:id="rId33"/>
-    <p:sldId id="265" r:id="rId34"/>
-    <p:sldId id="266" r:id="rId36"/>
-    <p:sldId id="268" r:id="rId38"/>
-    <p:sldId id="341" r:id="rId40"/>
-    <p:sldId id="342" r:id="rId41"/>
-    <p:sldId id="340" r:id="rId42"/>
-    <p:sldId id="269" r:id="rId44"/>
-    <p:sldId id="271" r:id="rId46"/>
-    <p:sldId id="270" r:id="rId48"/>
-    <p:sldId id="272" r:id="rId50"/>
-    <p:sldId id="344" r:id="rId52"/>
-    <p:sldId id="345" r:id="rId53"/>
-    <p:sldId id="275" r:id="rId54"/>
-    <p:sldId id="346" r:id="rId56"/>
-    <p:sldId id="347" r:id="rId57"/>
-    <p:sldId id="354" r:id="rId58"/>
-    <p:sldId id="355" r:id="rId59"/>
-    <p:sldId id="356" r:id="rId60"/>
-    <p:sldId id="357" r:id="rId61"/>
-    <p:sldId id="358" r:id="rId62"/>
-    <p:sldId id="348" r:id="rId63"/>
-    <p:sldId id="349" r:id="rId64"/>
-    <p:sldId id="280" r:id="rId65"/>
-    <p:sldId id="281" r:id="rId67"/>
-    <p:sldId id="350" r:id="rId69"/>
-    <p:sldId id="283" r:id="rId70"/>
+    <p:sldId id="257" r:id="rId13"/>
+    <p:sldId id="351" r:id="rId15"/>
+    <p:sldId id="352" r:id="rId16"/>
+    <p:sldId id="258" r:id="rId17"/>
+    <p:sldId id="259" r:id="rId19"/>
+    <p:sldId id="353" r:id="rId21"/>
+    <p:sldId id="260" r:id="rId22"/>
+    <p:sldId id="262" r:id="rId23"/>
+    <p:sldId id="263" r:id="rId25"/>
+    <p:sldId id="264" r:id="rId26"/>
+    <p:sldId id="337" r:id="rId27"/>
+    <p:sldId id="338" r:id="rId28"/>
+    <p:sldId id="265" r:id="rId29"/>
+    <p:sldId id="266" r:id="rId30"/>
+    <p:sldId id="268" r:id="rId32"/>
+    <p:sldId id="341" r:id="rId34"/>
+    <p:sldId id="342" r:id="rId35"/>
+    <p:sldId id="340" r:id="rId36"/>
+    <p:sldId id="269" r:id="rId38"/>
+    <p:sldId id="271" r:id="rId39"/>
+    <p:sldId id="270" r:id="rId40"/>
+    <p:sldId id="272" r:id="rId42"/>
+    <p:sldId id="344" r:id="rId44"/>
+    <p:sldId id="345" r:id="rId45"/>
+    <p:sldId id="275" r:id="rId46"/>
+    <p:sldId id="346" r:id="rId48"/>
+    <p:sldId id="347" r:id="rId49"/>
+    <p:sldId id="354" r:id="rId50"/>
+    <p:sldId id="355" r:id="rId51"/>
+    <p:sldId id="356" r:id="rId52"/>
+    <p:sldId id="357" r:id="rId53"/>
+    <p:sldId id="358" r:id="rId54"/>
+    <p:sldId id="348" r:id="rId55"/>
+    <p:sldId id="349" r:id="rId56"/>
+    <p:sldId id="280" r:id="rId57"/>
+    <p:sldId id="281" r:id="rId59"/>
+    <p:sldId id="350" r:id="rId61"/>
+    <p:sldId id="283" r:id="rId62"/>
   </p:sldIdLst>
   <p:sldSz cx="12192000" cy="6858000"/>
   <p:notesSz cx="6858000" cy="9144000"/>
@@ -343,7 +343,7 @@
       <inkml:brushProperty name="fitToCurve" value="1"/>
     </inkml:brush>
   </inkml:definitions>
-  <inkml:trace contextRef="#ctx0" brushRef="#br0">380 0,'0'21,"22"21,20 21,0 22,64 148,-85-170,0-20,22-22,-64-21,-1 0,-20 0,21 0,-21 0,-43 0,43 0,-22 0,43 0,0 0,-43 0,43 0,-42 0,-1 0,22 0,21 0,0 0,21 0</inkml:trace>
+  <inkml:trace contextRef="#ctx0" brushRef="#br0">0 0,'0'0</inkml:trace>
 </inkml:ink>
 </file>
 
@@ -369,7 +369,7 @@
       <inkml:brushProperty name="fitToCurve" value="1"/>
     </inkml:brush>
   </inkml:definitions>
-  <inkml:trace contextRef="#ctx0" brushRef="#br0">317 105,'-21'0,"0"21,-22 22,22-22,-21 0,42 0,-21-21,-1 21,-20 22,0-43,21 0,0 21,21-63,0-1,21 22,0-21,21-43,-21 64,22-21,-43 21,0 42,-22 21,22-21,0 21,-21-42,21 43,0-1,-21 0,0-20,63-22,-21 0,22 0,20 0,-42 0,22 0,-22 0,0 0,21 0,-20 0,-22 21,21-21,-21 0</inkml:trace>
+  <inkml:trace contextRef="#ctx0" brushRef="#br0">0 0,'21'0,"0"0,0 0,0 0,0 0,0 0,1 0,-1 0,0 0,21 0,-21 0,22 0,-22 0,0 0,21 0,43 0,-21 0,-22 0,21 0,-41 0,20 0,-21 0,0 0,0 0,1 0,-1 0,63 0,1 0,-43 0,1 0,-22 0,0 21,0-21,0 0,1 0,62 0,-41 0,20 0,1 0,-43 0,106 0,-85 0,0 0,22 0,-1 0,-20 0,-1 0,0 0,-20 0,20 0,0 0,-21 0,1 0,20 0,0 0,64 0,-42 0,-22 0,64 0,-43 0,-20 0,-1 0,21 0,1 0,-22 0,-21 0,1 0,20 0,-21 0,0 0,-21-21,21 21,22 0,-1 0,-21 0,-21 0</inkml:trace>
 </inkml:ink>
 </file>
 
@@ -395,7 +395,189 @@
       <inkml:brushProperty name="fitToCurve" value="1"/>
     </inkml:brush>
   </inkml:definitions>
-  <inkml:trace contextRef="#ctx0" brushRef="#br0">0 0,'21'0,"0"0,0 0,0 0,0 0,0 0,1 0,-1 0,0 0,21 0,-42 21,43-21,-22 0,42 0,-42 0,-21 21,22-21,-1 0,0 0,0 0,0 0,0 0,1 0,-1 0,21 0,0 0,-20 0,20 0,0 0,1 0,-22 0,0 0,21 0,22 0,-43 0,0 0,64 0,-64 0,21 0,1 0,20 0,-42 0,22 0,-22 0,21 0,-21 0,22 0,-22 0,21 0,-21 0,22 0,-1 0,21 0,-41 0,20 0,21 0,-41-21,41 0,43 21,-64 0,22 0,-22 0,0 0,22 0,-43 0,21 0,-20 0,-1 0,21 0,-21 0,43 0,-43 0,21 0,-21 0,85 21,-85-21,22 0,-22 0,21 0,-21 0,43 0,-43 0,21 0,43 0,-43 0,43 0,-43 0,1 0,-1 0,0 0,22 0,-43 0,21 0,22 42,-22-42,-21 0,43 0,-1 0,-20 0,-22 0,42 0,-20 0,-1 0,0 0,-20 0,41 0,-21 0,1 0,-1 0,-21 0,22 0,-1 0,-21 0,21 0,43 0,-43 0,-20 0,20 0,-21 0,0 0,22 0,-1 0,-21 0,21 0,1 0,-22 0,0 0,85 0,-64 0,-21 0,22 0,-22 0,21 0,1 0,20 0,-21 0,22 0,-1 0,-20 0,20 0,1 0,-22 21,0-21,1 0,20 0,22 0,-22 0,1 0,-22 0,1 0,-22 0,42 0,43 0,-64 0,22 0,-22 0,43 0,21 0,-64 0,0 0,43 0,-43 0,22 0,-1 0,86 0,-86 0,-21 0,22 0,-22 0,1 0,20 0,-42 0,43 0,-22 0,0 0,1 0,20 0,43 0,-42 0,-43 0,42 0,22 0,63 0,-84 0,-1 0,-21 0,22 0,21 0,-22 0,-42 0,106 0,-84 0,20 0,1 0,-1 0,1 0,-22 0,0 0,22 0,-1 0,43 0,-21 0,-22 0,-20 0,20 0,43 0,-64 0,1 0,41 0,-63 0,22 0,-1 0,-21 0,106 0,-84 0,84 0,-106 0,42 0,-42 0,64 0,106 0,-86 0,1 0,-21 0,84 0,-126 0,-1 0,21 0,-41 0,20 0,-21 0,43 0,-1 0,-42 0,43 0,-43 0,0 0,-21 0</inkml:trace>
+  <inkml:trace contextRef="#ctx0" brushRef="#br0">0 126,'21'0,"0"0,0 0,21 0,1 0,41-21,-20 0,-43 21,21-21,43 21,-22-21,1 21,-22 0,43 0,-22 0,43 0,21 0,-84 0,20 0,1 0,-22-21,21 21,22 0,-43 0,85 0,-63 0,-22 0,1 0,84 0,-106 0,42 0,-42 0,22 0,41 0,-41-21,-1 21,22 0,-43 0,21 0,0 0,1 0,20 0,1 0,-22 0,0 0,64 0,-63 0,-1 0,21 0,1 0,-43 0,43 0,20 0,43 0,-21 0,0 0,-21 0,20 0,-41 0,42 0,-64 0,0 0,22 0,-22 0,-21 0,43 0,-1 0,43 0,-63 0,20 0,43 0,-43 0,1 0,-1 0,22 0,-21 0,-1 21,-42-21,0 0,43 0,-22 0,-21 0,43 0,-1 0,-41 0,83 0,-83 21,20-21,0 21,-21-21,22 0,-1 0,-21 0,0 0,-21 21,0-21</inkml:trace>
+</inkml:ink>
+</file>
+
+<file path=ppt/ink/ink13.xml><?xml version="1.0" encoding="utf-8"?>
+<inkml:ink xmlns:inkml="http://www.w3.org/2003/InkML">
+  <inkml:definitions>
+    <inkml:context xml:id="ctx0">
+      <inkml:inkSource xml:id="inkSrc0">
+        <inkml:traceFormat>
+          <inkml:channel name="X" type="integer" max="3200" units="cm"/>
+          <inkml:channel name="Y" type="integer" max="1080" units="cm"/>
+        </inkml:traceFormat>
+        <inkml:channelProperties>
+          <inkml:channelProperty channel="X" name="resolution" value="66.666656" units="1/cm"/>
+          <inkml:channelProperty channel="Y" name="resolution" value="40.000000" units="1/cm"/>
+        </inkml:channelProperties>
+      </inkml:inkSource>
+    </inkml:context>
+    <inkml:brush xml:id="br0">
+      <inkml:brushProperty name="width" value="0.035278" units="cm"/>
+      <inkml:brushProperty name="height" value="0.035278" units="cm"/>
+      <inkml:brushProperty name="color" value="#ff0000"/>
+      <inkml:brushProperty name="fitToCurve" value="1"/>
+    </inkml:brush>
+  </inkml:definitions>
+  <inkml:trace contextRef="#ctx0" brushRef="#br0">0 0,'21'0,"0"0,0 0,42 0,43 0,0 21,233 0,-128 0,65-21,337 63,-295-41,-1-22,22 42,338-42,-359 0,-43 0,0 0,22 0,-65 0,22 0,0 21,-21-21,169 0,-253 0,-44 0,1 0,85 0,-85 0,-1 0,-20 0,-43 0,22 0,84 0,-42 0,84 0,-147 0,20 0,43 0,0 0,190 0,-169 0,21 0,170 0,-191 0,0 0,21 0,0 0,0 0,-21 0,0 0,0 0,22 0,-1 0,-42 0,21-21,21-43,0 43,-42 21,0 0,-22 0,-63 0,43 0,-22-21,-42 21</inkml:trace>
+</inkml:ink>
+</file>
+
+<file path=ppt/ink/ink14.xml><?xml version="1.0" encoding="utf-8"?>
+<inkml:ink xmlns:inkml="http://www.w3.org/2003/InkML">
+  <inkml:definitions>
+    <inkml:context xml:id="ctx0">
+      <inkml:inkSource xml:id="inkSrc0">
+        <inkml:traceFormat>
+          <inkml:channel name="X" type="integer" max="3200" units="cm"/>
+          <inkml:channel name="Y" type="integer" max="1080" units="cm"/>
+        </inkml:traceFormat>
+        <inkml:channelProperties>
+          <inkml:channelProperty channel="X" name="resolution" value="66.666656" units="1/cm"/>
+          <inkml:channelProperty channel="Y" name="resolution" value="40.000000" units="1/cm"/>
+        </inkml:channelProperties>
+      </inkml:inkSource>
+    </inkml:context>
+    <inkml:brush xml:id="br0">
+      <inkml:brushProperty name="width" value="0.035278" units="cm"/>
+      <inkml:brushProperty name="height" value="0.035278" units="cm"/>
+      <inkml:brushProperty name="color" value="#ff0000"/>
+      <inkml:brushProperty name="fitToCurve" value="1"/>
+    </inkml:brush>
+  </inkml:definitions>
+  <inkml:trace contextRef="#ctx0" brushRef="#br0">0 63,'21'0,"0"0,0 0,21-21,22 0,-43 21,42 0,1 0,-22 0,191-21,-191 21,1 0,-1 0,43 0,126 0,-105 0,42 0,-42 0,148 0,-169 0,-22 0,43 0,-63 0,-1 0,0 0,22 0,20 0,-41 0,-1 0,0 0,-20 0,41 0,43 0,-43 0,-20 0,63 21,-64-21,0 0,43 0,21 21,42-21,-85 0,43 0,21 0,-21 0,-42 0,41 0,22 0,-84 0,20 0,22 0,-43 21,106-21,-63 0,-21 0,20 0,-20 0,-22 0,22 0,41 0,1 0,0 0,21 0,-21 0,0 0,-22 0,86 0,-107 0,1 0,42 0,-1 0,22 0,-63 0,42 0,-64 0,0 0,1 0,-1 0,22 0,-1 0,-21 0,22 0,42 21,-43-21,-20 0,-1 0,21 0,1 0,-22 0,43 0,127 0,-128 0,22 0,0 0,-21 0,-22 0,22 0,42 0,-85 0,22 0,-1 0,-21 0,22 0,21 0,-43 0,64 0,-64 0,64 0,0 0,-22 0,107 0,-85 0,0 0,-1 0,-83 0,-1 21,0-21,21 0,-21 0,1 0,-1 0,0 0,-21 0</inkml:trace>
+</inkml:ink>
+</file>
+
+<file path=ppt/ink/ink15.xml><?xml version="1.0" encoding="utf-8"?>
+<inkml:ink xmlns:inkml="http://www.w3.org/2003/InkML">
+  <inkml:definitions>
+    <inkml:context xml:id="ctx0">
+      <inkml:inkSource xml:id="inkSrc0">
+        <inkml:traceFormat>
+          <inkml:channel name="X" type="integer" max="3200" units="cm"/>
+          <inkml:channel name="Y" type="integer" max="1080" units="cm"/>
+        </inkml:traceFormat>
+        <inkml:channelProperties>
+          <inkml:channelProperty channel="X" name="resolution" value="66.666656" units="1/cm"/>
+          <inkml:channelProperty channel="Y" name="resolution" value="40.000000" units="1/cm"/>
+        </inkml:channelProperties>
+      </inkml:inkSource>
+    </inkml:context>
+    <inkml:brush xml:id="br0">
+      <inkml:brushProperty name="width" value="0.035278" units="cm"/>
+      <inkml:brushProperty name="height" value="0.035278" units="cm"/>
+      <inkml:brushProperty name="color" value="#ff0000"/>
+      <inkml:brushProperty name="fitToCurve" value="1"/>
+    </inkml:brush>
+  </inkml:definitions>
+  <inkml:trace contextRef="#ctx0" brushRef="#br0">1015 0,'-63'42,"-1"21,22 1,21-43,-43 64,22-43,-43 64,64-43,-85 64,64-63,0-1,-22 22,64-43,-21-21,-21 22,-22 63,43-64,-42 64,-1 0,43-85,0 21,-21-21,42 0,0-21</inkml:trace>
+</inkml:ink>
+</file>
+
+<file path=ppt/ink/ink16.xml><?xml version="1.0" encoding="utf-8"?>
+<inkml:ink xmlns:inkml="http://www.w3.org/2003/InkML">
+  <inkml:definitions>
+    <inkml:context xml:id="ctx0">
+      <inkml:inkSource xml:id="inkSrc0">
+        <inkml:traceFormat>
+          <inkml:channel name="X" type="integer" max="3200" units="cm"/>
+          <inkml:channel name="Y" type="integer" max="1080" units="cm"/>
+        </inkml:traceFormat>
+        <inkml:channelProperties>
+          <inkml:channelProperty channel="X" name="resolution" value="66.666656" units="1/cm"/>
+          <inkml:channelProperty channel="Y" name="resolution" value="40.000000" units="1/cm"/>
+        </inkml:channelProperties>
+      </inkml:inkSource>
+    </inkml:context>
+    <inkml:brush xml:id="br0">
+      <inkml:brushProperty name="width" value="0.035278" units="cm"/>
+      <inkml:brushProperty name="height" value="0.035278" units="cm"/>
+      <inkml:brushProperty name="color" value="#ff0000"/>
+      <inkml:brushProperty name="fitToCurve" value="1"/>
+    </inkml:brush>
+  </inkml:definitions>
+  <inkml:trace contextRef="#ctx0" brushRef="#br0">7042 2874,'0'-44,"-67"44,0 0,-67 0,-44 0,-45 0,-89-23,-22-43,0 43,-90-44,-44 67,22-111,23 44,89 23,44-23,45 0,133 45,-21-23,44 0,-1 1,24-23,-1 67,22-67,1 45,-46-23,24-22,-1 45,0 0,0-45,22 45,23-1,-22 1,-1-22,0 44,23 0,22-45,0 23,22-23,23-22,44-22,-22-45,89-44,45 44,-23 23,22 0,23 21,89 1,-22 22,0-66,-23 88,-44-22,67 45,22-23,-67 45,-22 0,0 0,44 23,0-1,-44 0,-22 23,66-23,1 45,21-45,-66 1,45 21,-1 1,1 22,44-1,-23-43,-21 44,-68-1,1 1,-45 45,-67-68,-22 1,-67-1,22-21,-22 21,0 1,0 44,0-22,0-23,0 23,0 22,-89-22,22 0,-44 22,44-22,-22 22,-67-22,22 22,45-44,-45-23,-22 0,45-22,-45 23,-23-23,-88 0,0 0,44 0,-67 44,-44-44,-1 0,1 0,0 0,-67 0,0 0,-45 0,67 0,22 23,45-23,90 0,-1 0,44 0,23 0,45 0,-45 0,45 0,44 0,22 0,1 0,21 0,1 0,-45 0,23 0,-1 0,23 0,-1 0,23-23,-22-44,22 23,0-23,0 0,22-44,23-45,44 44,-22 1,67-45,44 0,0 0,-22 22,23 23,-1-23,-22 45,44-23,-44 23,45 22,-67 45,22 0,67-23,-1 45,1 0,-44 0,88 0,0 0,-44 0,0 23,-22-23,-23 66,67-21,23 0,-46 21,90 46,-44-1,44 68,-45-23,-22 0,-44 0,0-23,-1 23,-22-44,-66 21,-45-43,44 43,-44-44,-45-22,1-22,-1 22,-22-23,-45 23,23-45,-45 23,-44 44,-45 23,-23-46,23 1,0-44,45-1,-134 45,22-45,0 0,-44 23,-23-1,-89-44,-67 0,68 0,-24 0,46 0,-23 0,0-66,23 43,-1-44,0 1,-66-1,-67 0,44 0,67-67,45 67,-23-22,68 45,43-23,68 0,0 22,66-21,-21-24,66 68,0-22,45 44,22-67,-22-45,22 23,0 22,0-44,22-23,67-22,45 0,22 22,66-44,46 22,66 45,-66 44,44 0,111-22,23-23,133 46,-289-1,89 45,66 22,23 0,-22 0,-67 0,-22 0,-1 22,1 89,44 1,-134 44,-22 0,23 22,-23 45,-44-23,21 23,-110-67,22 22,-45-22,-22-66,-23 43,-22-44,1 1,-23 21,-23 45,-88-22,-23-1,-133 68,-157 0,90-45,0-45,22-44,312-67</inkml:trace>
+</inkml:ink>
+</file>
+
+<file path=ppt/ink/ink17.xml><?xml version="1.0" encoding="utf-8"?>
+<inkml:ink xmlns:inkml="http://www.w3.org/2003/InkML">
+  <inkml:definitions>
+    <inkml:context xml:id="ctx0">
+      <inkml:inkSource xml:id="inkSrc0">
+        <inkml:traceFormat>
+          <inkml:channel name="X" type="integer" max="3200" units="cm"/>
+          <inkml:channel name="Y" type="integer" max="1080" units="cm"/>
+        </inkml:traceFormat>
+        <inkml:channelProperties>
+          <inkml:channelProperty channel="X" name="resolution" value="66.666656" units="1/cm"/>
+          <inkml:channelProperty channel="Y" name="resolution" value="40.000000" units="1/cm"/>
+        </inkml:channelProperties>
+      </inkml:inkSource>
+    </inkml:context>
+    <inkml:brush xml:id="br0">
+      <inkml:brushProperty name="width" value="0.035278" units="cm"/>
+      <inkml:brushProperty name="height" value="0.035278" units="cm"/>
+      <inkml:brushProperty name="color" value="#ff0000"/>
+      <inkml:brushProperty name="fitToCurve" value="1"/>
+    </inkml:brush>
+  </inkml:definitions>
+  <inkml:trace contextRef="#ctx0" brushRef="#br0">2585 0,'-23'0,"1"0,-23 22,-21 0,43 23,-44-1,-44 45,0 23,21-23,-43 89,-46 0,1 1,0-46,44 1,23 0,44-67,22 0,45-45,-44 45,44-45,-67 23,45 21,-23 1,45-22,-45 22,23-23,0 23,-23 0,45-45,-44 23,44-1,0-21,-23 44,-21-1,44-43,0 44,-45-45,1 22,44 1,-23 22,-21 0,-1 22,45-22,0-23,0 23,-22-22,22-1,-45 23,45 0,-22 0,0-23,22 46,-22-24,22-43,0 44,0-1,-45 1,45-44,0 43,0 1,-22 45,-23-1,23-22,22 23,0 21,-22 23,-1-44,1-45,0-45,0 67,22-22,0 0,0-23,0 1,0 22,0-45,0 45,22 0,-22-23,0 23,0-22,0-23,0 45,0-45,0 45,0 0,0-22,0 21,0 1,0-44,0 66,0-22,0 22,0 0,22 45,0-23,-22 23,0-23,0 23,0 0,0-1,0 1,0-23,0 23,0 0,0-23,45 1,-23-23,0 45,-22-90,23 23,-23 22,0-22,44-22,-21 21,-23 1,44 0,-22-45,-22 45,23 0,-1 22,23 23,-23 21,0 23,0-89,1 67,44-45,-23 67,-22 0,23-22,0 22,-1-23,-22-88,-22 0,23 44,21-22,-21-23,21 23,-22 0,23-23,-23-21,23 44,-23-1,23-43,-23 44,23-67,-23 22,22 0,-44 23,23 22,21-45,23 45,0 0,-67-23,22 45,1 0,21 1,1-46,-1 23,1-22,-1 21,1-21,-45-23,22 23,23 22,-1-23,1 45,22-44,0 22,-23 0,-44-45,45 23,-45-1,22-44,-22 22,22-22,-22 23,23-23,-1 0,-22 0</inkml:trace>
+</inkml:ink>
+</file>
+
+<file path=ppt/ink/ink18.xml><?xml version="1.0" encoding="utf-8"?>
+<inkml:ink xmlns:inkml="http://www.w3.org/2003/InkML">
+  <inkml:definitions>
+    <inkml:context xml:id="ctx0">
+      <inkml:inkSource xml:id="inkSrc0">
+        <inkml:traceFormat>
+          <inkml:channel name="X" type="integer" max="3200" units="cm"/>
+          <inkml:channel name="Y" type="integer" max="1080" units="cm"/>
+        </inkml:traceFormat>
+        <inkml:channelProperties>
+          <inkml:channelProperty channel="X" name="resolution" value="66.666656" units="1/cm"/>
+          <inkml:channelProperty channel="Y" name="resolution" value="40.000000" units="1/cm"/>
+        </inkml:channelProperties>
+      </inkml:inkSource>
+    </inkml:context>
+    <inkml:brush xml:id="br0">
+      <inkml:brushProperty name="width" value="0.035278" units="cm"/>
+      <inkml:brushProperty name="height" value="0.035278" units="cm"/>
+      <inkml:brushProperty name="color" value="#ff0000"/>
+      <inkml:brushProperty name="fitToCurve" value="1"/>
+    </inkml:brush>
+  </inkml:definitions>
+  <inkml:trace contextRef="#ctx0" brushRef="#br0">0 111,'22'0,"0"0,0 0,23 0,22 0,-45 0,45 0,-45 0,0 0,45 0,-44 0,21 0,1 0,-23 0,0 0,1 0,21 0,23 22,0-22,-45 0,0 0,23 0,-45 22,45-22,21 0,-21 23,-23-23,23 0,22 44,-23-44,23 23,-45-23,23 44,0-44,-1 22,1-22,-1 23,1-23,22 22,0 0,-1-22,-21 0,22 0,0 0,-23 0,23 23,0-23,-22 0,21 0,1 0,-44 0,-1 0,22 0,23 0,-22 0,-23 0,23 0,22 0,-1 0,-21 0,0 0,-23 0,0 0,45-23,-45 23,1 0,-1-44,22 44,-21-23,-1 1,23 22,21 0,-43-22,-1 22,0 0,23 0,-1 0,-21 0,21-45,1 45,22-22,-23 22,23-45,-22 45,-1-22,1 22,-1-22,1 22,22 0,-67-22,67-1,0 1,-23 22,1 0,-1 0,1-22,-23 22,23 0,-1 0,-21 0,21 0,23 0,-45 0,23 0,-1 0,1-22,22 22,0 0,-23 0,1 0,-1 0,-21 0,21 0,1 0,-23 0,23 0,-23 0,23 0,21 22,-21-22,22 0,-23 0,1 0,-23 0,23 0,-1 0,-21 0,-1 0,0 0,1 0,-23 0</inkml:trace>
+</inkml:ink>
+</file>
+
+<file path=ppt/ink/ink19.xml><?xml version="1.0" encoding="utf-8"?>
+<inkml:ink xmlns:inkml="http://www.w3.org/2003/InkML">
+  <inkml:definitions>
+    <inkml:context xml:id="ctx0">
+      <inkml:inkSource xml:id="inkSrc0">
+        <inkml:traceFormat>
+          <inkml:channel name="X" type="integer" max="3200" units="cm"/>
+          <inkml:channel name="Y" type="integer" max="1080" units="cm"/>
+        </inkml:traceFormat>
+        <inkml:channelProperties>
+          <inkml:channelProperty channel="X" name="resolution" value="66.666656" units="1/cm"/>
+          <inkml:channelProperty channel="Y" name="resolution" value="40.000000" units="1/cm"/>
+        </inkml:channelProperties>
+      </inkml:inkSource>
+    </inkml:context>
+    <inkml:brush xml:id="br0">
+      <inkml:brushProperty name="width" value="0.035278" units="cm"/>
+      <inkml:brushProperty name="height" value="0.035278" units="cm"/>
+      <inkml:brushProperty name="color" value="#ff0000"/>
+      <inkml:brushProperty name="fitToCurve" value="1"/>
+    </inkml:brush>
+  </inkml:definitions>
+  <inkml:trace contextRef="#ctx0" brushRef="#br0">0 0,'42'0,"21"0,-42 0,1 0,-1 0,0 0,42 21,1 42,21 1,-43-43,-21 21,64 0,-22 1,-20-43,-22 0,0 21,0-21,-21 21,-21-42,21 0,-42 0,42-1,0 1,0 0,0 0,0 0,0 0,0-22,0 22,0-21,0 42</inkml:trace>
 </inkml:ink>
 </file>
 
@@ -425,6 +607,266 @@
 </inkml:ink>
 </file>
 
+<file path=ppt/ink/ink20.xml><?xml version="1.0" encoding="utf-8"?>
+<inkml:ink xmlns:inkml="http://www.w3.org/2003/InkML">
+  <inkml:definitions>
+    <inkml:context xml:id="ctx0">
+      <inkml:inkSource xml:id="inkSrc0">
+        <inkml:traceFormat>
+          <inkml:channel name="X" type="integer" max="3200" units="cm"/>
+          <inkml:channel name="Y" type="integer" max="1080" units="cm"/>
+        </inkml:traceFormat>
+        <inkml:channelProperties>
+          <inkml:channelProperty channel="X" name="resolution" value="66.666656" units="1/cm"/>
+          <inkml:channelProperty channel="Y" name="resolution" value="40.000000" units="1/cm"/>
+        </inkml:channelProperties>
+      </inkml:inkSource>
+    </inkml:context>
+    <inkml:brush xml:id="br0">
+      <inkml:brushProperty name="width" value="0.035278" units="cm"/>
+      <inkml:brushProperty name="height" value="0.035278" units="cm"/>
+      <inkml:brushProperty name="color" value="#ff0000"/>
+      <inkml:brushProperty name="fitToCurve" value="1"/>
+    </inkml:brush>
+  </inkml:definitions>
+  <inkml:trace contextRef="#ctx0" brushRef="#br0">380 0,'0'21,"22"21,20 21,0 22,64 148,-85-170,0-20,22-22,-64-21,-1 0,-20 0,21 0,-21 0,-43 0,43 0,-22 0,43 0,0 0,-43 0,43 0,-42 0,-1 0,22 0,21 0,0 0,21 0</inkml:trace>
+</inkml:ink>
+</file>
+
+<file path=ppt/ink/ink21.xml><?xml version="1.0" encoding="utf-8"?>
+<inkml:ink xmlns:inkml="http://www.w3.org/2003/InkML">
+  <inkml:definitions>
+    <inkml:context xml:id="ctx0">
+      <inkml:inkSource xml:id="inkSrc0">
+        <inkml:traceFormat>
+          <inkml:channel name="X" type="integer" max="3200" units="cm"/>
+          <inkml:channel name="Y" type="integer" max="1080" units="cm"/>
+        </inkml:traceFormat>
+        <inkml:channelProperties>
+          <inkml:channelProperty channel="X" name="resolution" value="66.666656" units="1/cm"/>
+          <inkml:channelProperty channel="Y" name="resolution" value="40.000000" units="1/cm"/>
+        </inkml:channelProperties>
+      </inkml:inkSource>
+    </inkml:context>
+    <inkml:brush xml:id="br0">
+      <inkml:brushProperty name="width" value="0.035278" units="cm"/>
+      <inkml:brushProperty name="height" value="0.035278" units="cm"/>
+      <inkml:brushProperty name="color" value="#ff0000"/>
+      <inkml:brushProperty name="fitToCurve" value="1"/>
+    </inkml:brush>
+  </inkml:definitions>
+  <inkml:trace contextRef="#ctx0" brushRef="#br0">317 105,'-21'0,"0"21,-22 22,22-22,-21 0,42 0,-21-21,-1 21,-20 22,0-43,21 0,0 21,21-63,0-1,21 22,0-21,21-43,-21 64,22-21,-43 21,0 42,-22 21,22-21,0 21,-21-42,21 43,0-1,-21 0,0-20,63-22,-21 0,22 0,20 0,-42 0,22 0,-22 0,0 0,21 0,-20 0,-22 21,21-21,-21 0</inkml:trace>
+</inkml:ink>
+</file>
+
+<file path=ppt/ink/ink22.xml><?xml version="1.0" encoding="utf-8"?>
+<inkml:ink xmlns:inkml="http://www.w3.org/2003/InkML">
+  <inkml:definitions>
+    <inkml:context xml:id="ctx0">
+      <inkml:inkSource xml:id="inkSrc0">
+        <inkml:traceFormat>
+          <inkml:channel name="X" type="integer" max="3200" units="cm"/>
+          <inkml:channel name="Y" type="integer" max="1080" units="cm"/>
+        </inkml:traceFormat>
+        <inkml:channelProperties>
+          <inkml:channelProperty channel="X" name="resolution" value="66.666656" units="1/cm"/>
+          <inkml:channelProperty channel="Y" name="resolution" value="40.000000" units="1/cm"/>
+        </inkml:channelProperties>
+      </inkml:inkSource>
+    </inkml:context>
+    <inkml:brush xml:id="br0">
+      <inkml:brushProperty name="width" value="0.035278" units="cm"/>
+      <inkml:brushProperty name="height" value="0.035278" units="cm"/>
+      <inkml:brushProperty name="color" value="#ff0000"/>
+      <inkml:brushProperty name="fitToCurve" value="1"/>
+    </inkml:brush>
+  </inkml:definitions>
+  <inkml:trace contextRef="#ctx0" brushRef="#br0">0 0,'21'0,"0"0,0 0,0 0,0 0,0 0,1 0,-1 0,0 0,21 0,-42 21,43-21,-22 0,42 0,-42 0,-21 21,22-21,-1 0,0 0,0 0,0 0,0 0,1 0,-1 0,21 0,0 0,-20 0,20 0,0 0,1 0,-22 0,0 0,21 0,22 0,-43 0,0 0,64 0,-64 0,21 0,1 0,20 0,-42 0,22 0,-22 0,21 0,-21 0,22 0,-22 0,21 0,-21 0,22 0,-1 0,21 0,-41 0,20 0,21 0,-41-21,41 0,43 21,-64 0,22 0,-22 0,0 0,22 0,-43 0,21 0,-20 0,-1 0,21 0,-21 0,43 0,-43 0,21 0,-21 0,85 21,-85-21,22 0,-22 0,21 0,-21 0,43 0,-43 0,21 0,43 0,-43 0,43 0,-43 0,1 0,-1 0,0 0,22 0,-43 0,21 0,22 42,-22-42,-21 0,43 0,-1 0,-20 0,-22 0,42 0,-20 0,-1 0,0 0,-20 0,41 0,-21 0,1 0,-1 0,-21 0,22 0,-1 0,-21 0,21 0,43 0,-43 0,-20 0,20 0,-21 0,0 0,22 0,-1 0,-21 0,21 0,1 0,-22 0,0 0,85 0,-64 0,-21 0,22 0,-22 0,21 0,1 0,20 0,-21 0,22 0,-1 0,-20 0,20 0,1 0,-22 21,0-21,1 0,20 0,22 0,-22 0,1 0,-22 0,1 0,-22 0,42 0,43 0,-64 0,22 0,-22 0,43 0,21 0,-64 0,0 0,43 0,-43 0,22 0,-1 0,86 0,-86 0,-21 0,22 0,-22 0,1 0,20 0,-42 0,43 0,-22 0,0 0,1 0,20 0,43 0,-42 0,-43 0,42 0,22 0,63 0,-84 0,-1 0,-21 0,22 0,21 0,-22 0,-42 0,106 0,-84 0,20 0,1 0,-1 0,1 0,-22 0,0 0,22 0,-1 0,43 0,-21 0,-22 0,-20 0,20 0,43 0,-64 0,1 0,41 0,-63 0,22 0,-1 0,-21 0,106 0,-84 0,84 0,-106 0,42 0,-42 0,64 0,106 0,-86 0,1 0,-21 0,84 0,-126 0,-1 0,21 0,-41 0,20 0,-21 0,43 0,-1 0,-42 0,43 0,-43 0,0 0,-21 0</inkml:trace>
+</inkml:ink>
+</file>
+
+<file path=ppt/ink/ink23.xml><?xml version="1.0" encoding="utf-8"?>
+<inkml:ink xmlns:inkml="http://www.w3.org/2003/InkML">
+  <inkml:definitions>
+    <inkml:context xml:id="ctx0">
+      <inkml:inkSource xml:id="inkSrc0">
+        <inkml:traceFormat>
+          <inkml:channel name="X" type="integer" max="3200" units="cm"/>
+          <inkml:channel name="Y" type="integer" max="1080" units="cm"/>
+        </inkml:traceFormat>
+        <inkml:channelProperties>
+          <inkml:channelProperty channel="X" name="resolution" value="66.666656" units="1/cm"/>
+          <inkml:channelProperty channel="Y" name="resolution" value="40.000000" units="1/cm"/>
+        </inkml:channelProperties>
+      </inkml:inkSource>
+    </inkml:context>
+    <inkml:brush xml:id="br0">
+      <inkml:brushProperty name="width" value="0.035278" units="cm"/>
+      <inkml:brushProperty name="height" value="0.035278" units="cm"/>
+      <inkml:brushProperty name="color" value="#ff0000"/>
+      <inkml:brushProperty name="fitToCurve" value="1"/>
+    </inkml:brush>
+  </inkml:definitions>
+  <inkml:trace contextRef="#ctx0" brushRef="#br0">2094 0,'-22'22,"0"-22,-45 44,45-44,-23 45,-111-23,45 0,44-22,22 45,23-23,-45 23,45-45,-45 44,45-21,-1-1,-21 0,21 23,-21-23,44 23,-45-45,23 22,0 0,22 23,-45-45,23 67,-45-23,0 23,23 0,21 0,-44-45,45 0,-22 45,-1-22,23-1,-23 1,1 22,-1-23,23 1,-1 22,-43-67,43 67,1-67,0 44,-1 1,1-23,-22 23,21 22,1-23,-23 23,45-22,-44 21,44-43,-22 21,-1 23,23-22,-22 22,22-1,0-43,0 66,0-22,-44 0,44-23,0 23,0 0,0-23,0-21,0 21,0 1,22-23,-22 23,22-23,-22 23,22 21,23-21,-23 0,23-1,-23 23,23-22,-1-1,-22-22,1 1,-1 44,23-23,-23 1,0-23,0 23,23-1,-23-44,1 22,-1 23,22-23,23 23,-44-45,43 44,-21-21,-23 21,45-44,-45 45,1-23,21 23,-21-45,21 44,-22-44,23 67,0-67,-1 45,-22-45,1 44,21-44,-21 0,-23 45,22-45,-22 22,0 0,22 1,0-23,-22 44,0-44</inkml:trace>
+</inkml:ink>
+</file>
+
+<file path=ppt/ink/ink24.xml><?xml version="1.0" encoding="utf-8"?>
+<inkml:ink xmlns:inkml="http://www.w3.org/2003/InkML">
+  <inkml:definitions>
+    <inkml:context xml:id="ctx0">
+      <inkml:inkSource xml:id="inkSrc0">
+        <inkml:traceFormat>
+          <inkml:channel name="X" type="integer" max="3200" units="cm"/>
+          <inkml:channel name="Y" type="integer" max="1080" units="cm"/>
+        </inkml:traceFormat>
+        <inkml:channelProperties>
+          <inkml:channelProperty channel="X" name="resolution" value="66.666656" units="1/cm"/>
+          <inkml:channelProperty channel="Y" name="resolution" value="40.000000" units="1/cm"/>
+        </inkml:channelProperties>
+      </inkml:inkSource>
+    </inkml:context>
+    <inkml:brush xml:id="br0">
+      <inkml:brushProperty name="width" value="0.035278" units="cm"/>
+      <inkml:brushProperty name="height" value="0.035278" units="cm"/>
+      <inkml:brushProperty name="color" value="#ff0000"/>
+      <inkml:brushProperty name="fitToCurve" value="1"/>
+    </inkml:brush>
+  </inkml:definitions>
+  <inkml:trace contextRef="#ctx0" brushRef="#br0">0 66,'22'0,"22"0,1 0,-23 0,0 0,1 0,-1 0,0 0,1 0,43 0,1 0,-22 0,-1 0,1 0,0 0,-1 0,23 0,0 0,-23 0,23 0,0-22,0 22,-22-44,-1 44,23 0,-22 0,-1 0,1 0,-23 0,0 0,1 0,43 0,-43 0,21 0,1 0,-1 0,-21 0,44 0,-45 0,0 0,0 0,23 0,-23 0,1 0,-1 0,22 0,23 0,22 0,-44 0,22 0,-45 0,23 0,22 0,-45 0,0 0,23 0,-23 0,0 0,45 0,-22 0,22 0,-45 0,0 0,45 0,-22 0,-1 0,-22 0,1 0,44 0,-45 0,45 0,-45 0,23 0,21 0,-43 0,-1 0,0 0,45 0,0 0,-45 0,23 0,22 0,-23 0,-44 44,67-44,-45 22,1-22,44 0,-45 0,0 0,0 0,23 0,0 0,-23 0,0 0,0 0,1 0,21 0,1 0,-23 0,23 0,-1 0,23 0,-45 0,1 0,21 23,23-23,-45 0,45 22,-44-22,-1 0,45 0,-45 0,0 0,-22 44,23-44,-1 0,22 0,-21 0,21-22,23 22,0-22,-22 22,21 0,1 0,-44 0,43 0,1 0,-44 0,-1 0,0 0,-22 0</inkml:trace>
+</inkml:ink>
+</file>
+
+<file path=ppt/ink/ink25.xml><?xml version="1.0" encoding="utf-8"?>
+<inkml:ink xmlns:inkml="http://www.w3.org/2003/InkML">
+  <inkml:definitions>
+    <inkml:context xml:id="ctx0">
+      <inkml:inkSource xml:id="inkSrc0">
+        <inkml:traceFormat>
+          <inkml:channel name="X" type="integer" max="3200" units="cm"/>
+          <inkml:channel name="Y" type="integer" max="1080" units="cm"/>
+        </inkml:traceFormat>
+        <inkml:channelProperties>
+          <inkml:channelProperty channel="X" name="resolution" value="66.666656" units="1/cm"/>
+          <inkml:channelProperty channel="Y" name="resolution" value="40.000000" units="1/cm"/>
+        </inkml:channelProperties>
+      </inkml:inkSource>
+    </inkml:context>
+    <inkml:brush xml:id="br0">
+      <inkml:brushProperty name="width" value="0.035278" units="cm"/>
+      <inkml:brushProperty name="height" value="0.035278" units="cm"/>
+      <inkml:brushProperty name="color" value="#ff0000"/>
+      <inkml:brushProperty name="fitToCurve" value="1"/>
+    </inkml:brush>
+  </inkml:definitions>
+  <inkml:trace contextRef="#ctx0" brushRef="#br0">802 0,'-67'0,"22"44,45-22,-44-22,-1 45,-22-1,23-21,44-1,-67 0,67 1,-67 21,0 1,23-23,21 23,-66-1,22-22,45 23,-22-23,44 1,0-1,44-22,23 0,-23 44,23-44,-22 0,22 23,0-23,22 0,22 0,1 0,-1 0,0 0,-44 0,-44 0,-1 0,0 0,-66 0,-1-67,23 67,22 0</inkml:trace>
+</inkml:ink>
+</file>
+
+<file path=ppt/ink/ink26.xml><?xml version="1.0" encoding="utf-8"?>
+<inkml:ink xmlns:inkml="http://www.w3.org/2003/InkML">
+  <inkml:definitions>
+    <inkml:context xml:id="ctx0">
+      <inkml:inkSource xml:id="inkSrc0">
+        <inkml:traceFormat>
+          <inkml:channel name="X" type="integer" max="3200" units="cm"/>
+          <inkml:channel name="Y" type="integer" max="1080" units="cm"/>
+        </inkml:traceFormat>
+        <inkml:channelProperties>
+          <inkml:channelProperty channel="X" name="resolution" value="66.666656" units="1/cm"/>
+          <inkml:channelProperty channel="Y" name="resolution" value="40.000000" units="1/cm"/>
+        </inkml:channelProperties>
+      </inkml:inkSource>
+    </inkml:context>
+    <inkml:brush xml:id="br0">
+      <inkml:brushProperty name="width" value="0.035278" units="cm"/>
+      <inkml:brushProperty name="height" value="0.035278" units="cm"/>
+      <inkml:brushProperty name="color" value="#ff0000"/>
+      <inkml:brushProperty name="fitToCurve" value="1"/>
+    </inkml:brush>
+  </inkml:definitions>
+  <inkml:trace contextRef="#ctx0" brushRef="#br0">423 200,'-45'-22,"45"-1,-44 23,44-22,-23 22,-21-44,-1 44,23 0,-23 0,-21 0,43-45,1 45,-22 0,66 22,0-22,0 45,45-23,0 45,-67-45,67 23,-67-1,67-21,-45 21,0 23,-22-22,45 22,-23-45,23 22,-1 23,1 0,-23 0,0-22,-22 21,0 1,23-44,-23-1,0 0,22 0,0-22,-22 23,0-1,0 0,45-22,-45-22,0-23,0 23,0-45,0-22,0-22,0 66,0-22,0 0,0 23,22-23,23 22,-45 23,44 0,-21 22,-1-22,0-23,23 23,-23 22,0-23,1 23,-23-22,22 0,-22-45,0 45,0-1,44-21,-44-1,0 23,0 0,23 0,-68 22,1 0,21 0,-21 0,-1 0,1 0,-23 22,44 22,-21-44,-1 45,23-23,0-22,-1 0,1 0,0 0,-23 22,45 1,-67 21,23 1,-1-1,-22 23,23-44,-1-1,23-22,-23 44,45-21,-44-1,44-22</inkml:trace>
+</inkml:ink>
+</file>
+
+<file path=ppt/ink/ink27.xml><?xml version="1.0" encoding="utf-8"?>
+<inkml:ink xmlns:inkml="http://www.w3.org/2003/InkML">
+  <inkml:definitions>
+    <inkml:context xml:id="ctx0">
+      <inkml:inkSource xml:id="inkSrc0">
+        <inkml:traceFormat>
+          <inkml:channel name="X" type="integer" max="3200" units="cm"/>
+          <inkml:channel name="Y" type="integer" max="1080" units="cm"/>
+        </inkml:traceFormat>
+        <inkml:channelProperties>
+          <inkml:channelProperty channel="X" name="resolution" value="66.666656" units="1/cm"/>
+          <inkml:channelProperty channel="Y" name="resolution" value="40.000000" units="1/cm"/>
+        </inkml:channelProperties>
+      </inkml:inkSource>
+    </inkml:context>
+    <inkml:brush xml:id="br0">
+      <inkml:brushProperty name="width" value="0.035278" units="cm"/>
+      <inkml:brushProperty name="height" value="0.035278" units="cm"/>
+      <inkml:brushProperty name="color" value="#ff0000"/>
+      <inkml:brushProperty name="fitToCurve" value="1"/>
+    </inkml:brush>
+  </inkml:definitions>
+  <inkml:trace contextRef="#ctx0" brushRef="#br0">148 0,'42'42,"-21"-42,21 63,-42-20,0-1,22 21,-1-20,-21 41,21 22,21 21,-42 21,43-42,-43 42,63 1,-63-1,21-21,0 21,-21-21,0 21,0 0,0-42,0 42,0-63,0 21,0 21,22-43,-22 22,0 21,0-21,0 42,0-21,0-21,0 21,0 0,0 21,0-21,-22-21,-20-21,42-22,0 1,0-22,-42 22,42-22,-21 21,-22-20,22 20,21-20,-42 20,21 1,-1-22,22 0,-42 1,21 20,-21-21,20 22,22-43,-21 0,21 0,-21 22,-21-22,42 0,0 0,0 22,-42-1,42-21,0-21</inkml:trace>
+</inkml:ink>
+</file>
+
+<file path=ppt/ink/ink28.xml><?xml version="1.0" encoding="utf-8"?>
+<inkml:ink xmlns:inkml="http://www.w3.org/2003/InkML">
+  <inkml:definitions>
+    <inkml:context xml:id="ctx0">
+      <inkml:inkSource xml:id="inkSrc0">
+        <inkml:traceFormat>
+          <inkml:channel name="X" type="integer" max="3200" units="cm"/>
+          <inkml:channel name="Y" type="integer" max="1080" units="cm"/>
+        </inkml:traceFormat>
+        <inkml:channelProperties>
+          <inkml:channelProperty channel="X" name="resolution" value="66.666656" units="1/cm"/>
+          <inkml:channelProperty channel="Y" name="resolution" value="40.000000" units="1/cm"/>
+        </inkml:channelProperties>
+      </inkml:inkSource>
+    </inkml:context>
+    <inkml:brush xml:id="br0">
+      <inkml:brushProperty name="width" value="0.035278" units="cm"/>
+      <inkml:brushProperty name="height" value="0.035278" units="cm"/>
+      <inkml:brushProperty name="color" value="#ff0000"/>
+      <inkml:brushProperty name="fitToCurve" value="1"/>
+    </inkml:brush>
+  </inkml:definitions>
+  <inkml:trace contextRef="#ctx0" brushRef="#br0">1756 296,'-21'0,"-42"21,20 21,1-21,-22 22,43-22,0 0,-21 21,-43 1,22-1,-43 0,-21 22,0 21,21-43,0 0,0 22,43-22,-1-21,1 22,20-22,-20 21,-1-21,1 43,-1-43,64 0,-63 0,42 0,0 1,84-22,-21 0,22 0,42 21,42-21,64 0,20 0,-20 0,-21 0,-43 0,-42 0,-1 0,-41 0,-22 0,1 0,20 0,-21 0,-20 0,-1 0,0 0,-63 0,-1 0,-20-21,-1-43,1 1,20 63,-41-64,-43-42,-43 0,22 1,21 20,-42-21,0-42,-22 42,43-21,-21 42,105 22,43 0,-42 63,63 42,0 64,0-1,0 65,0 20,84-42,-42 43,22-1,21 64,63 43,0-86,-21 22,-21-63,-22-43,-41-85,-43-21,0 21,21-42,21 0,1 0,-22 0,21-63,-21 21,0-107,22-20,-22-64,42-42,-41-42,62-22,1 21,-22 1,-41 105,20 149,-42 42,0 21</inkml:trace>
+</inkml:ink>
+</file>
+
+<file path=ppt/ink/ink29.xml><?xml version="1.0" encoding="utf-8"?>
+<inkml:ink xmlns:inkml="http://www.w3.org/2003/InkML">
+  <inkml:definitions>
+    <inkml:context xml:id="ctx0">
+      <inkml:inkSource xml:id="inkSrc0">
+        <inkml:traceFormat>
+          <inkml:channel name="X" type="integer" max="3200" units="cm"/>
+          <inkml:channel name="Y" type="integer" max="1080" units="cm"/>
+        </inkml:traceFormat>
+        <inkml:channelProperties>
+          <inkml:channelProperty channel="X" name="resolution" value="66.666656" units="1/cm"/>
+          <inkml:channelProperty channel="Y" name="resolution" value="40.000000" units="1/cm"/>
+        </inkml:channelProperties>
+      </inkml:inkSource>
+    </inkml:context>
+    <inkml:brush xml:id="br0">
+      <inkml:brushProperty name="width" value="0.035278" units="cm"/>
+      <inkml:brushProperty name="height" value="0.035278" units="cm"/>
+      <inkml:brushProperty name="color" value="#ff0000"/>
+      <inkml:brushProperty name="fitToCurve" value="1"/>
+    </inkml:brush>
+  </inkml:definitions>
+  <inkml:trace contextRef="#ctx0" brushRef="#br0">0 359,'169'-42,"-106"42,1-21,20 21,-41-43,20 43,22 0,42 0,63-21,1-42,63 20,-42-20,42 42,21-21,42 42,-42 0,43 0,-43 0,21 0,-84 21,-21 21,-22-21,21 21,-41-20,-22 20,21 0,0 22,21 42,-63-43,0 64,-43-21,43-43,-42 1,-1 63,-20-21,20 21,-42 21,22 0,20 0,-42 0,0 43,-21-43,0 21,0-20,0-44,0 86,-21-22,-42 64,-1 21,-42-42,22-22,-22-20,-21-22,-42 21,-1 0,-20 1,-1-43,1 42,20-63,43 0,-42 42,42-21,-63 42,20-21,1 22,21-22,-85-21,42 21,-41 0,41-84,64-1,21-20,43 20,42-63,-1 21,1 0,-21 22,42-43</inkml:trace>
+</inkml:ink>
+</file>
+
 <file path=ppt/ink/ink3.xml><?xml version="1.0" encoding="utf-8"?>
 <inkml:ink xmlns:inkml="http://www.w3.org/2003/InkML">
   <inkml:definitions>
@@ -447,7 +889,7 @@
       <inkml:brushProperty name="fitToCurve" value="1"/>
     </inkml:brush>
   </inkml:definitions>
-  <inkml:trace contextRef="#ctx0" brushRef="#br0">0 0,'0'0</inkml:trace>
+  <inkml:trace contextRef="#ctx0" brushRef="#br0">200 0,'0'22,"45"-22,-23 0,22 0,1 0,22 0,0 0,-45 0,45 0,0 0,-45 0,45 0,-45 0,-44 0,0 0,-45 0,44 0,-66 0,22 0,1 0,-24 22,-43 0,88 23,-22-23,1 0,66 23,0-23,0 1,0 21,0 1,44 22,-22-67,1 66,43-21,1 22,-22-67,22 22,44-22,1 0,-90 0,22 0,1 0,-23 0,-22 0</inkml:trace>
 </inkml:ink>
 </file>
 
@@ -473,7 +915,7 @@
       <inkml:brushProperty name="fitToCurve" value="1"/>
     </inkml:brush>
   </inkml:definitions>
-  <inkml:trace contextRef="#ctx0" brushRef="#br0">0 0,'21'0,"0"0,0 0,0 0,0 0,0 0,1 0,-1 0,0 0,21 0,-21 0,22 0,-22 0,0 0,21 0,43 0,-21 0,-22 0,21 0,-41 0,20 0,-21 0,0 0,0 0,1 0,-1 0,63 0,1 0,-43 0,1 0,-22 0,0 21,0-21,0 0,1 0,62 0,-41 0,20 0,1 0,-43 0,106 0,-85 0,0 0,22 0,-1 0,-20 0,-1 0,0 0,-20 0,20 0,0 0,-21 0,1 0,20 0,0 0,64 0,-42 0,-22 0,64 0,-43 0,-20 0,-1 0,21 0,1 0,-22 0,-21 0,1 0,20 0,-21 0,0 0,-21-21,21 21,22 0,-1 0,-21 0,-21 0</inkml:trace>
+  <inkml:trace contextRef="#ctx0" brushRef="#br0">267 0,'0'22,"0"45,0-1,-67 46,22 22,23-23,-22-22,21-22,-21 0,44-45,-22 0,66-22,-22-66,1-1,21 44,1-43,-23 66,0-23,23 23,-1-44,1 21,-23-21,23 44,22 0,-23 0,-21 0,43 0,-43 0,21 0,-21 0,43 0,-21 0,-45 0</inkml:trace>
 </inkml:ink>
 </file>
 
@@ -499,7 +941,7 @@
       <inkml:brushProperty name="fitToCurve" value="1"/>
     </inkml:brush>
   </inkml:definitions>
-  <inkml:trace contextRef="#ctx0" brushRef="#br0">0 126,'21'0,"0"0,0 0,21 0,1 0,41-21,-20 0,-43 21,21-21,43 21,-22-21,1 21,-22 0,43 0,-22 0,43 0,21 0,-84 0,20 0,1 0,-22-21,21 21,22 0,-43 0,85 0,-63 0,-22 0,1 0,84 0,-106 0,42 0,-42 0,22 0,41 0,-41-21,-1 21,22 0,-43 0,21 0,0 0,1 0,20 0,1 0,-22 0,0 0,64 0,-63 0,-1 0,21 0,1 0,-43 0,43 0,20 0,43 0,-21 0,0 0,-21 0,20 0,-41 0,42 0,-64 0,0 0,22 0,-22 0,-21 0,43 0,-1 0,43 0,-63 0,20 0,43 0,-43 0,1 0,-1 0,22 0,-21 0,-1 21,-42-21,0 0,43 0,-22 0,-21 0,43 0,-1 0,-41 0,83 0,-83 21,20-21,0 21,-21-21,22 0,-1 0,-21 0,0 0,-21 21,0-21</inkml:trace>
+  <inkml:trace contextRef="#ctx0" brushRef="#br0">467 66,'-66'134,"-1"-112,22 23,-22 22,0-23,23-44,-23 0,67-22,-44-45,44 0,0 0,0 23,22 22,-22-1,22 23,0-66,1 66,-1 0,0 0,23 0,-1 0,-21 0,21 22,-22-22,-22 44,0 23,0 0,0 0,-44-23,22 23,-45 0,0 0,45-45,-1-22,-21 23,66-1,45-22,0 44,-23-44,23 0,-45 0,1-22,21 22,-44-44,45 21,-45 1,44-45,-21 45,-23 22</inkml:trace>
 </inkml:ink>
 </file>
 
@@ -525,7 +967,7 @@
       <inkml:brushProperty name="fitToCurve" value="1"/>
     </inkml:brush>
   </inkml:definitions>
-  <inkml:trace contextRef="#ctx0" brushRef="#br0">0 0,'21'0,"0"0,0 0,42 0,43 0,0 21,233 0,-128 0,65-21,337 63,-295-41,-1-22,22 42,338-42,-359 0,-43 0,0 0,22 0,-65 0,22 0,0 21,-21-21,169 0,-253 0,-44 0,1 0,85 0,-85 0,-1 0,-20 0,-43 0,22 0,84 0,-42 0,84 0,-147 0,20 0,43 0,0 0,190 0,-169 0,21 0,170 0,-191 0,0 0,21 0,0 0,0 0,-21 0,0 0,0 0,22 0,-1 0,-42 0,21-21,21-43,0 43,-42 21,0 0,-22 0,-63 0,43 0,-22-21,-42 21</inkml:trace>
+  <inkml:trace contextRef="#ctx0" brushRef="#br0">267 0,'0'66,"0"135,-22 66,-23 23,-22 89,0-45,1-66,66-46,0-66,0-44,0-45,0-45,0-111,0 89</inkml:trace>
 </inkml:ink>
 </file>
 
@@ -551,7 +993,7 @@
       <inkml:brushProperty name="fitToCurve" value="1"/>
     </inkml:brush>
   </inkml:definitions>
-  <inkml:trace contextRef="#ctx0" brushRef="#br0">0 63,'21'0,"0"0,0 0,21-21,22 0,-43 21,42 0,1 0,-22 0,191-21,-191 21,1 0,-1 0,43 0,126 0,-105 0,42 0,-42 0,148 0,-169 0,-22 0,43 0,-63 0,-1 0,0 0,22 0,20 0,-41 0,-1 0,0 0,-20 0,41 0,43 0,-43 0,-20 0,63 21,-64-21,0 0,43 0,21 21,42-21,-85 0,43 0,21 0,-21 0,-42 0,41 0,22 0,-84 0,20 0,22 0,-43 21,106-21,-63 0,-21 0,20 0,-20 0,-22 0,22 0,41 0,1 0,0 0,21 0,-21 0,0 0,-22 0,86 0,-107 0,1 0,42 0,-1 0,22 0,-63 0,42 0,-64 0,0 0,1 0,-1 0,22 0,-1 0,-21 0,22 0,42 21,-43-21,-20 0,-1 0,21 0,1 0,-22 0,43 0,127 0,-128 0,22 0,0 0,-21 0,-22 0,22 0,42 0,-85 0,22 0,-1 0,-21 0,22 0,21 0,-43 0,64 0,-64 0,64 0,0 0,-22 0,107 0,-85 0,0 0,-1 0,-83 0,-1 21,0-21,21 0,-21 0,1 0,-1 0,0 0,-21 0</inkml:trace>
+  <inkml:trace contextRef="#ctx0" brushRef="#br0">579 311,'22'0,"-22"45,0 22,-22-23,-23 1,-44 22,45-23,-23 1,22-23,23-22,0 0,-45 0,44 0,-21 0,-23-44,67-68,-44 45,44 45,0 0,0 0,44-23,1 0,-23 45,22 0,-21-44,-1 44,0 0,1 0,-1 0,22 44,-21 1,21 22,-44 0,0-23,0 45,0-22,-22 0,0-45,-45 45,0-22,45-23,-23 23,23-23,-23 45,23-67,-22 0,44 44,0-66,44 22,1-44,-1 44,-22 0,45 22,0 0,0-22,-22 0,21 0,1 0,-22 22,-23-22,0 0,23-22,22-45,-23 23,1-45,0-23,-1 23,-22 0,23 0,22-90,44 23,45 23,-111 111,-45 44,-22 111,-23 23,-22 0,-44 90,-45 66,22 22,23-111,21 66,24 1,43-67,1-22,-23-157,45-22,0 1,-22-68,22 45</inkml:trace>
 </inkml:ink>
 </file>
 
@@ -577,7 +1019,7 @@
       <inkml:brushProperty name="fitToCurve" value="1"/>
     </inkml:brush>
   </inkml:definitions>
-  <inkml:trace contextRef="#ctx0" brushRef="#br0">1015 0,'-63'42,"-1"21,22 1,21-43,-43 64,22-43,-43 64,64-43,-85 64,64-63,0-1,-22 22,64-43,-21-21,-21 22,-22 63,43-64,-42 64,-1 0,43-85,0 21,-21-21,42 0,0-21</inkml:trace>
+  <inkml:trace contextRef="#ctx0" brushRef="#br0">0 89,'44'0,"1"0,21 0,1 0,-22 0,22 0,0-23,-1 1,-21 22,0 0,-23-44,0 44,-44 0,-45 0,45 0,-1 22,-21-22,22 22,-23 0,45 1,-67 21,23 23,-23-22,44-1,1 23,-22 89,-1 22,23-22,22-67,0 23,0-45,22-67,0 0,-22 0</inkml:trace>
 </inkml:ink>
 </file>
 
@@ -603,7 +1045,7 @@
       <inkml:brushProperty name="fitToCurve" value="1"/>
     </inkml:brush>
   </inkml:definitions>
-  <inkml:trace contextRef="#ctx0" brushRef="#br0">0 0,'42'0,"21"0,-42 0,1 0,-1 0,0 0,42 21,1 42,21 1,-43-43,-21 21,64 0,-22 1,-20-43,-22 0,0 21,0-21,-21 21,-21-42,21 0,-42 0,42-1,0 1,0 0,0 0,0 0,0 0,0-22,0 22,0-21,0 42</inkml:trace>
+  <inkml:trace contextRef="#ctx0" brushRef="#br0">0 0,'66'0,"1"0,-22 0,-1 0,-21 0,21 0,1 0,22 0,-67 0</inkml:trace>
 </inkml:ink>
 </file>
 
@@ -6981,7 +7423,7 @@
 </file>
 
 <file path=ppt/slides/slide1.xml><?xml version="1.0" encoding="utf-8"?>
-<p:sld xmlns:a="http://schemas.openxmlformats.org/drawingml/2006/main" xmlns:r="http://schemas.openxmlformats.org/officeDocument/2006/relationships" xmlns:p="http://schemas.openxmlformats.org/presentationml/2006/main">
+<p:sld xmlns:a="http://schemas.openxmlformats.org/drawingml/2006/main" xmlns:r="http://schemas.openxmlformats.org/officeDocument/2006/relationships" xmlns:p="http://schemas.openxmlformats.org/presentationml/2006/main" xmlns:p14="http://schemas.microsoft.com/office/powerpoint/2010/main">
   <p:cSld>
     <p:spTree>
       <p:nvGrpSpPr>
@@ -7185,16 +7627,304 @@
           </a:p>
         </p:txBody>
       </p:sp>
+      <mc:AlternateContent xmlns:mc="http://schemas.openxmlformats.org/markup-compatibility/2006" xmlns:p14="http://schemas.microsoft.com/office/powerpoint/2010/main">
+        <mc:Choice Requires="p14">
+          <p:contentPart p14:bwMode="auto" r:id="rId3">
+            <p14:nvContentPartPr>
+              <p14:cNvPr id="38" name="잉크 15"/>
+              <p14:cNvContentPartPr/>
+              <p14:nvPr/>
+            </p14:nvContentPartPr>
+            <p14:xfrm>
+              <a:off x="1620520" y="3128645"/>
+              <a:ext cx="272415" cy="216535"/>
+            </p14:xfrm>
+          </p:contentPart>
+        </mc:Choice>
+        <mc:Fallback>
+          <p:pic>
+            <p:nvPicPr>
+              <p:cNvPr id="38" name="잉크 15"/>
+              <p:cNvPicPr/>
+              <p:nvPr/>
+            </p:nvPicPr>
+            <p:blipFill>
+              <a:blip r:embed="rId4"/>
+              <a:stretch>
+                <a:fillRect/>
+              </a:stretch>
+            </p:blipFill>
+            <p:spPr>
+              <a:xfrm>
+                <a:off x="1620520" y="3128645"/>
+                <a:ext cx="272415" cy="216535"/>
+              </a:xfrm>
+              <a:prstGeom prst="rect">
+                <a:avLst/>
+              </a:prstGeom>
+            </p:spPr>
+          </p:pic>
+        </mc:Fallback>
+      </mc:AlternateContent>
+      <mc:AlternateContent xmlns:mc="http://schemas.openxmlformats.org/markup-compatibility/2006" xmlns:p14="http://schemas.microsoft.com/office/powerpoint/2010/main">
+        <mc:Choice Requires="p14">
+          <p:contentPart p14:bwMode="auto" r:id="rId5">
+            <p14:nvContentPartPr>
+              <p14:cNvPr id="39" name="잉크 16"/>
+              <p14:cNvContentPartPr/>
+              <p14:nvPr/>
+            </p14:nvContentPartPr>
+            <p14:xfrm>
+              <a:off x="1957070" y="3064510"/>
+              <a:ext cx="297180" cy="280670"/>
+            </p14:xfrm>
+          </p:contentPart>
+        </mc:Choice>
+        <mc:Fallback>
+          <p:pic>
+            <p:nvPicPr>
+              <p:cNvPr id="39" name="잉크 16"/>
+              <p:cNvPicPr/>
+              <p:nvPr/>
+            </p:nvPicPr>
+            <p:blipFill>
+              <a:blip r:embed="rId6"/>
+              <a:stretch>
+                <a:fillRect/>
+              </a:stretch>
+            </p:blipFill>
+            <p:spPr>
+              <a:xfrm>
+                <a:off x="1957070" y="3064510"/>
+                <a:ext cx="297180" cy="280670"/>
+              </a:xfrm>
+              <a:prstGeom prst="rect">
+                <a:avLst/>
+              </a:prstGeom>
+            </p:spPr>
+          </p:pic>
+        </mc:Fallback>
+      </mc:AlternateContent>
+      <mc:AlternateContent xmlns:mc="http://schemas.openxmlformats.org/markup-compatibility/2006" xmlns:p14="http://schemas.microsoft.com/office/powerpoint/2010/main">
+        <mc:Choice Requires="p14">
+          <p:contentPart p14:bwMode="auto" r:id="rId7">
+            <p14:nvContentPartPr>
+              <p14:cNvPr id="40" name="잉크 17"/>
+              <p14:cNvContentPartPr/>
+              <p14:nvPr/>
+            </p14:nvContentPartPr>
+            <p14:xfrm>
+              <a:off x="2245995" y="3192780"/>
+              <a:ext cx="176530" cy="224790"/>
+            </p14:xfrm>
+          </p:contentPart>
+        </mc:Choice>
+        <mc:Fallback>
+          <p:pic>
+            <p:nvPicPr>
+              <p:cNvPr id="40" name="잉크 17"/>
+              <p:cNvPicPr/>
+              <p:nvPr/>
+            </p:nvPicPr>
+            <p:blipFill>
+              <a:blip r:embed="rId8"/>
+              <a:stretch>
+                <a:fillRect/>
+              </a:stretch>
+            </p:blipFill>
+            <p:spPr>
+              <a:xfrm>
+                <a:off x="2245995" y="3192780"/>
+                <a:ext cx="176530" cy="224790"/>
+              </a:xfrm>
+              <a:prstGeom prst="rect">
+                <a:avLst/>
+              </a:prstGeom>
+            </p:spPr>
+          </p:pic>
+        </mc:Fallback>
+      </mc:AlternateContent>
+      <mc:AlternateContent xmlns:mc="http://schemas.openxmlformats.org/markup-compatibility/2006" xmlns:p14="http://schemas.microsoft.com/office/powerpoint/2010/main">
+        <mc:Choice Requires="p14">
+          <p:contentPart p14:bwMode="auto" r:id="rId9">
+            <p14:nvContentPartPr>
+              <p14:cNvPr id="41" name="잉크 18"/>
+              <p14:cNvContentPartPr/>
+              <p14:nvPr/>
+            </p14:nvContentPartPr>
+            <p14:xfrm>
+              <a:off x="2510790" y="3088640"/>
+              <a:ext cx="96520" cy="858520"/>
+            </p14:xfrm>
+          </p:contentPart>
+        </mc:Choice>
+        <mc:Fallback>
+          <p:pic>
+            <p:nvPicPr>
+              <p:cNvPr id="41" name="잉크 18"/>
+              <p:cNvPicPr/>
+              <p:nvPr/>
+            </p:nvPicPr>
+            <p:blipFill>
+              <a:blip r:embed="rId10"/>
+              <a:stretch>
+                <a:fillRect/>
+              </a:stretch>
+            </p:blipFill>
+            <p:spPr>
+              <a:xfrm>
+                <a:off x="2510790" y="3088640"/>
+                <a:ext cx="96520" cy="858520"/>
+              </a:xfrm>
+              <a:prstGeom prst="rect">
+                <a:avLst/>
+              </a:prstGeom>
+            </p:spPr>
+          </p:pic>
+        </mc:Fallback>
+      </mc:AlternateContent>
+      <mc:AlternateContent xmlns:mc="http://schemas.openxmlformats.org/markup-compatibility/2006" xmlns:p14="http://schemas.microsoft.com/office/powerpoint/2010/main">
+        <mc:Choice Requires="p14">
+          <p:contentPart p14:bwMode="auto" r:id="rId11">
+            <p14:nvContentPartPr>
+              <p14:cNvPr id="42" name="잉크 19"/>
+              <p14:cNvContentPartPr/>
+              <p14:nvPr/>
+            </p14:nvContentPartPr>
+            <p14:xfrm>
+              <a:off x="3000375" y="3112770"/>
+              <a:ext cx="488950" cy="962660"/>
+            </p14:xfrm>
+          </p:contentPart>
+        </mc:Choice>
+        <mc:Fallback>
+          <p:pic>
+            <p:nvPicPr>
+              <p:cNvPr id="42" name="잉크 19"/>
+              <p:cNvPicPr/>
+              <p:nvPr/>
+            </p:nvPicPr>
+            <p:blipFill>
+              <a:blip r:embed="rId12"/>
+              <a:stretch>
+                <a:fillRect/>
+              </a:stretch>
+            </p:blipFill>
+            <p:spPr>
+              <a:xfrm>
+                <a:off x="3000375" y="3112770"/>
+                <a:ext cx="488950" cy="962660"/>
+              </a:xfrm>
+              <a:prstGeom prst="rect">
+                <a:avLst/>
+              </a:prstGeom>
+            </p:spPr>
+          </p:pic>
+        </mc:Fallback>
+      </mc:AlternateContent>
+      <mc:AlternateContent xmlns:mc="http://schemas.openxmlformats.org/markup-compatibility/2006" xmlns:p14="http://schemas.microsoft.com/office/powerpoint/2010/main">
+        <mc:Choice Requires="p14">
+          <p:contentPart p14:bwMode="auto" r:id="rId13">
+            <p14:nvContentPartPr>
+              <p14:cNvPr id="43" name="잉크 20"/>
+              <p14:cNvContentPartPr/>
+              <p14:nvPr/>
+            </p14:nvContentPartPr>
+            <p14:xfrm>
+              <a:off x="2863850" y="3578225"/>
+              <a:ext cx="216535" cy="400685"/>
+            </p14:xfrm>
+          </p:contentPart>
+        </mc:Choice>
+        <mc:Fallback>
+          <p:pic>
+            <p:nvPicPr>
+              <p:cNvPr id="43" name="잉크 20"/>
+              <p:cNvPicPr/>
+              <p:nvPr/>
+            </p:nvPicPr>
+            <p:blipFill>
+              <a:blip r:embed="rId14"/>
+              <a:stretch>
+                <a:fillRect/>
+              </a:stretch>
+            </p:blipFill>
+            <p:spPr>
+              <a:xfrm>
+                <a:off x="2863850" y="3578225"/>
+                <a:ext cx="216535" cy="400685"/>
+              </a:xfrm>
+              <a:prstGeom prst="rect">
+                <a:avLst/>
+              </a:prstGeom>
+            </p:spPr>
+          </p:pic>
+        </mc:Fallback>
+      </mc:AlternateContent>
+      <mc:AlternateContent xmlns:mc="http://schemas.openxmlformats.org/markup-compatibility/2006" xmlns:p14="http://schemas.microsoft.com/office/powerpoint/2010/main">
+        <mc:Choice Requires="p14">
+          <p:contentPart p14:bwMode="auto" r:id="rId15">
+            <p14:nvContentPartPr>
+              <p14:cNvPr id="44" name="잉크 21"/>
+              <p14:cNvContentPartPr/>
+              <p14:nvPr/>
+            </p14:nvContentPartPr>
+            <p14:xfrm>
+              <a:off x="3024505" y="3762375"/>
+              <a:ext cx="144145" cy="0"/>
+            </p14:xfrm>
+          </p:contentPart>
+        </mc:Choice>
+        <mc:Fallback>
+          <p:pic>
+            <p:nvPicPr>
+              <p:cNvPr id="44" name="잉크 21"/>
+              <p:cNvPicPr/>
+              <p:nvPr/>
+            </p:nvPicPr>
+            <p:blipFill>
+              <a:blip r:embed="rId16"/>
+              <a:stretch>
+                <a:fillRect/>
+              </a:stretch>
+            </p:blipFill>
+            <p:spPr>
+              <a:xfrm>
+                <a:off x="3024505" y="3762375"/>
+                <a:ext cx="144145" cy="0"/>
+              </a:xfrm>
+              <a:prstGeom prst="rect">
+                <a:avLst/>
+              </a:prstGeom>
+            </p:spPr>
+          </p:pic>
+        </mc:Fallback>
+      </mc:AlternateContent>
     </p:spTree>
   </p:cSld>
   <p:clrMapOvr>
     <a:masterClrMapping/>
   </p:clrMapOvr>
+  <mc:AlternateContent xmlns:mc="http://schemas.openxmlformats.org/markup-compatibility/2006">
+    <mc:Choice xmlns:p14="http://schemas.microsoft.com/office/powerpoint/2010/main" Requires="p14">
+      <p:transition spd="slow" p14:dur="2000"/>
+    </mc:Choice>
+    <mc:Fallback>
+      <p:transition spd="slow"/>
+    </mc:Fallback>
+  </mc:AlternateContent>
+  <p:timing>
+    <p:tnLst>
+      <p:par>
+        <p:cTn id="1" dur="indefinite" restart="never" nodeType="tmRoot"/>
+      </p:par>
+    </p:tnLst>
+  </p:timing>
 </p:sld>
 </file>
 
 <file path=ppt/slides/slide10.xml><?xml version="1.0" encoding="utf-8"?>
-<p:sld xmlns:a="http://schemas.openxmlformats.org/drawingml/2006/main" xmlns:r="http://schemas.openxmlformats.org/officeDocument/2006/relationships" xmlns:p="http://schemas.openxmlformats.org/presentationml/2006/main">
+<p:sld xmlns:a="http://schemas.openxmlformats.org/drawingml/2006/main" xmlns:r="http://schemas.openxmlformats.org/officeDocument/2006/relationships" xmlns:p="http://schemas.openxmlformats.org/presentationml/2006/main" xmlns:p14="http://schemas.microsoft.com/office/powerpoint/2010/main">
   <p:cSld>
     <p:spTree>
       <p:nvGrpSpPr>
@@ -7222,7 +7952,7 @@
         </p:nvSpPr>
         <p:spPr>
           <a:xfrm>
-            <a:off x="590551" y="130963"/>
+            <a:off x="590550" y="130810"/>
             <a:ext cx="10363200" cy="762000"/>
           </a:xfrm>
           <a:prstGeom prst="rect">
@@ -7271,8 +8001,8 @@
         </p:nvSpPr>
         <p:spPr>
           <a:xfrm>
-            <a:off x="592667" y="1137439"/>
-            <a:ext cx="10363200" cy="5019600"/>
+            <a:off x="592455" y="1137285"/>
+            <a:ext cx="10363200" cy="5019675"/>
           </a:xfrm>
           <a:prstGeom prst="rect">
             <a:avLst/>
@@ -7321,8 +8051,8 @@
         </p:nvSpPr>
         <p:spPr>
           <a:xfrm>
-            <a:off x="9482667" y="6404763"/>
-            <a:ext cx="2540100" cy="304800"/>
+            <a:off x="9482455" y="6404610"/>
+            <a:ext cx="2540000" cy="304800"/>
           </a:xfrm>
           <a:prstGeom prst="rect">
             <a:avLst/>
@@ -7370,8 +8100,8 @@
         </p:nvSpPr>
         <p:spPr>
           <a:xfrm>
-            <a:off x="1195918" y="6377775"/>
-            <a:ext cx="4146600" cy="349200"/>
+            <a:off x="1195705" y="6377940"/>
+            <a:ext cx="4146550" cy="349250"/>
           </a:xfrm>
           <a:prstGeom prst="rect">
             <a:avLst/>
@@ -7411,8 +8141,8 @@
         </p:nvSpPr>
         <p:spPr>
           <a:xfrm>
-            <a:off x="590551" y="1808809"/>
-            <a:ext cx="11432100" cy="646500"/>
+            <a:off x="590550" y="1809115"/>
+            <a:ext cx="11431905" cy="646430"/>
           </a:xfrm>
           <a:prstGeom prst="rect">
             <a:avLst/>
@@ -7493,8 +8223,8 @@
         </p:nvSpPr>
         <p:spPr>
           <a:xfrm>
-            <a:off x="5641383" y="3697121"/>
-            <a:ext cx="3551100" cy="461700"/>
+            <a:off x="5641340" y="3696970"/>
+            <a:ext cx="3550920" cy="461645"/>
           </a:xfrm>
           <a:prstGeom prst="rect">
             <a:avLst/>
@@ -7546,8 +8276,8 @@
         </p:nvCxnSpPr>
         <p:spPr>
           <a:xfrm rot="10800000" flipH="1">
-            <a:off x="5641383" y="2455271"/>
-            <a:ext cx="665100" cy="1472700"/>
+            <a:off x="5641340" y="2455545"/>
+            <a:ext cx="664845" cy="1472565"/>
           </a:xfrm>
           <a:prstGeom prst="bentConnector4">
             <a:avLst>
@@ -7575,8 +8305,8 @@
         </p:nvSpPr>
         <p:spPr>
           <a:xfrm>
-            <a:off x="590551" y="1917295"/>
-            <a:ext cx="8968228" cy="454500"/>
+            <a:off x="590550" y="1917065"/>
+            <a:ext cx="8968105" cy="454660"/>
           </a:xfrm>
           <a:prstGeom prst="rect">
             <a:avLst/>
@@ -7627,16 +8357,171 @@
           </a:p>
         </p:txBody>
       </p:sp>
+      <mc:AlternateContent xmlns:mc="http://schemas.openxmlformats.org/markup-compatibility/2006" xmlns:p14="http://schemas.microsoft.com/office/powerpoint/2010/main">
+        <mc:Choice Requires="p14">
+          <p:contentPart p14:bwMode="auto" r:id="rId3">
+            <p14:nvContentPartPr>
+              <p14:cNvPr id="112" name="잉크 9"/>
+              <p14:cNvContentPartPr/>
+              <p14:nvPr/>
+            </p14:nvContentPartPr>
+            <p14:xfrm>
+              <a:off x="3449320" y="1146810"/>
+              <a:ext cx="385445" cy="233045"/>
+            </p14:xfrm>
+          </p:contentPart>
+        </mc:Choice>
+        <mc:Fallback>
+          <p:pic>
+            <p:nvPicPr>
+              <p:cNvPr id="112" name="잉크 9"/>
+              <p:cNvPicPr/>
+              <p:nvPr/>
+            </p:nvPicPr>
+            <p:blipFill>
+              <a:blip r:embed="rId4"/>
+              <a:stretch>
+                <a:fillRect/>
+              </a:stretch>
+            </p:blipFill>
+            <p:spPr>
+              <a:xfrm>
+                <a:off x="3449320" y="1146810"/>
+                <a:ext cx="385445" cy="233045"/>
+              </a:xfrm>
+              <a:prstGeom prst="rect">
+                <a:avLst/>
+              </a:prstGeom>
+            </p:spPr>
+          </p:pic>
+        </mc:Fallback>
+      </mc:AlternateContent>
+      <mc:AlternateContent xmlns:mc="http://schemas.openxmlformats.org/markup-compatibility/2006" xmlns:p14="http://schemas.microsoft.com/office/powerpoint/2010/main">
+        <mc:Choice Requires="p14">
+          <p:contentPart p14:bwMode="auto" r:id="rId5">
+            <p14:nvContentPartPr>
+              <p14:cNvPr id="113" name="잉크 10"/>
+              <p14:cNvContentPartPr/>
+              <p14:nvPr/>
+            </p14:nvContentPartPr>
+            <p14:xfrm>
+              <a:off x="3441700" y="1082675"/>
+              <a:ext cx="400685" cy="417195"/>
+            </p14:xfrm>
+          </p:contentPart>
+        </mc:Choice>
+        <mc:Fallback>
+          <p:pic>
+            <p:nvPicPr>
+              <p:cNvPr id="113" name="잉크 10"/>
+              <p:cNvPicPr/>
+              <p:nvPr/>
+            </p:nvPicPr>
+            <p:blipFill>
+              <a:blip r:embed="rId6"/>
+              <a:stretch>
+                <a:fillRect/>
+              </a:stretch>
+            </p:blipFill>
+            <p:spPr>
+              <a:xfrm>
+                <a:off x="3441700" y="1082675"/>
+                <a:ext cx="400685" cy="417195"/>
+              </a:xfrm>
+              <a:prstGeom prst="rect">
+                <a:avLst/>
+              </a:prstGeom>
+            </p:spPr>
+          </p:pic>
+        </mc:Fallback>
+      </mc:AlternateContent>
+      <p:sp>
+        <p:nvSpPr>
+          <p:cNvPr id="114" name="텍스트 상자 11"/>
+          <p:cNvSpPr txBox="1">
+            <a:spLocks/>
+          </p:cNvSpPr>
+          <p:nvPr/>
+        </p:nvSpPr>
+        <p:spPr>
+          <a:xfrm rot="0">
+            <a:off x="7677150" y="3032760"/>
+            <a:ext cx="2936240" cy="370205"/>
+          </a:xfrm>
+          <a:prstGeom prst="rect"/>
+          <a:noFill/>
+          <a:ln>
+            <a:noFill/>
+            <a:prstDash/>
+          </a:ln>
+        </p:spPr>
+        <p:txBody>
+          <a:bodyPr wrap="none" lIns="89535" tIns="46355" rIns="89535" bIns="46355" vert="horz" anchor="t">
+            <a:spAutoFit/>
+          </a:bodyPr>
+          <a:lstStyle/>
+          <a:p>
+            <a:pPr marL="0" indent="0" algn="l" hangingPunct="1"/>
+            <a:r>
+              <a:rPr sz="1800">
+                <a:latin typeface="맑은 고딕" charset="0"/>
+                <a:ea typeface="맑은 고딕" charset="0"/>
+              </a:rPr>
+              <a:t>클릭 </a:t>
+            </a:r>
+            <a:r>
+              <a:rPr sz="1800">
+                <a:latin typeface="맑은 고딕" charset="0"/>
+                <a:ea typeface="맑은 고딕" charset="0"/>
+              </a:rPr>
+              <a:t>가능한 </a:t>
+            </a:r>
+            <a:r>
+              <a:rPr lang="ko-KR" sz="1800">
+                <a:latin typeface="맑은 고딕" charset="0"/>
+                <a:ea typeface="맑은 고딕" charset="0"/>
+              </a:rPr>
+              <a:t>버튼을 </a:t>
+            </a:r>
+            <a:r>
+              <a:rPr lang="ko-KR" sz="1800">
+                <a:latin typeface="맑은 고딕" charset="0"/>
+                <a:ea typeface="맑은 고딕" charset="0"/>
+              </a:rPr>
+              <a:t>만든다</a:t>
+            </a:r>
+            <a:endParaRPr lang="ko-KR" altLang="en-US" sz="1800">
+              <a:latin typeface="맑은 고딕" charset="0"/>
+              <a:ea typeface="맑은 고딕" charset="0"/>
+            </a:endParaRPr>
+          </a:p>
+        </p:txBody>
+      </p:sp>
     </p:spTree>
   </p:cSld>
   <p:clrMapOvr>
     <a:masterClrMapping/>
   </p:clrMapOvr>
+  <mc:AlternateContent xmlns:mc="http://schemas.openxmlformats.org/markup-compatibility/2006">
+    <mc:Choice xmlns:p14="http://schemas.microsoft.com/office/powerpoint/2010/main" Requires="p14">
+      <p:transition spd="slow" p14:dur="2000"/>
+    </mc:Choice>
+    <mc:Fallback>
+      <p:transition spd="slow"/>
+    </mc:Fallback>
+  </mc:AlternateContent>
+  <p:timing>
+    <p:tnLst>
+      <p:par>
+        <p:cTn id="1" dur="indefinite" restart="never" nodeType="tmRoot"/>
+      </p:par>
+    </p:tnLst>
+  </p:timing>
 </p:sld>
 </file>
 
 <file path=ppt/slides/slide11.xml><?xml version="1.0" encoding="utf-8"?>
-<p:sld xmlns:a="http://schemas.openxmlformats.org/drawingml/2006/main" xmlns:r="http://schemas.openxmlformats.org/officeDocument/2006/relationships" xmlns:p="http://schemas.openxmlformats.org/presentationml/2006/main">
+<p:sld xmlns:a="http://schemas.openxmlformats.org/drawingml/2006/main" xmlns:r="http://schemas.openxmlformats.org/officeDocument/2006/relationships" xmlns:p="http://schemas.openxmlformats.org/presentationml/2006/main" xmlns:p14="http://schemas.microsoft.com/office/powerpoint/2010/main">
   <p:cSld>
     <p:spTree>
       <p:nvGrpSpPr>
@@ -7664,7 +8549,7 @@
         </p:nvSpPr>
         <p:spPr>
           <a:xfrm>
-            <a:off x="590551" y="146050"/>
+            <a:off x="590550" y="146050"/>
             <a:ext cx="10363200" cy="762000"/>
           </a:xfrm>
           <a:prstGeom prst="rect">
@@ -7713,7 +8598,7 @@
         </p:nvSpPr>
         <p:spPr>
           <a:xfrm>
-            <a:off x="9482667" y="6419850"/>
+            <a:off x="9482455" y="6419850"/>
             <a:ext cx="2540000" cy="304800"/>
           </a:xfrm>
           <a:prstGeom prst="rect">
@@ -7762,8 +8647,8 @@
         </p:nvSpPr>
         <p:spPr>
           <a:xfrm>
-            <a:off x="1195918" y="6392863"/>
-            <a:ext cx="4146549" cy="349250"/>
+            <a:off x="1195705" y="6393180"/>
+            <a:ext cx="4146550" cy="349250"/>
           </a:xfrm>
           <a:prstGeom prst="rect">
             <a:avLst/>
@@ -7803,8 +8688,8 @@
         </p:nvSpPr>
         <p:spPr>
           <a:xfrm>
-            <a:off x="254524" y="1290623"/>
-            <a:ext cx="11768143" cy="3477835"/>
+            <a:off x="254635" y="1290320"/>
+            <a:ext cx="11768455" cy="3477895"/>
           </a:xfrm>
           <a:prstGeom prst="rect">
             <a:avLst/>
@@ -7929,11 +8814,697 @@
           </a:p>
         </p:txBody>
       </p:sp>
+      <p:sp>
+        <p:nvSpPr>
+          <p:cNvPr id="120" name="텍스트 상자 12"/>
+          <p:cNvSpPr txBox="1">
+            <a:spLocks/>
+          </p:cNvSpPr>
+          <p:nvPr/>
+        </p:nvSpPr>
+        <p:spPr>
+          <a:xfrm rot="0">
+            <a:off x="2487295" y="4893310"/>
+            <a:ext cx="2504440" cy="370205"/>
+          </a:xfrm>
+          <a:prstGeom prst="rect"/>
+          <a:noFill/>
+          <a:ln>
+            <a:noFill/>
+            <a:prstDash/>
+          </a:ln>
+        </p:spPr>
+        <p:txBody>
+          <a:bodyPr wrap="none" lIns="89535" tIns="46355" rIns="89535" bIns="46355" vert="horz" anchor="t">
+            <a:spAutoFit/>
+          </a:bodyPr>
+          <a:lstStyle/>
+          <a:p>
+            <a:pPr marL="0" indent="0" algn="l" hangingPunct="1"/>
+            <a:r>
+              <a:rPr lang="ko-KR" sz="1800">
+                <a:latin typeface="맑은 고딕" charset="0"/>
+                <a:ea typeface="맑은 고딕" charset="0"/>
+              </a:rPr>
+              <a:t>a</a:t>
+            </a:r>
+            <a:r>
+              <a:rPr lang="ko-KR" sz="1800">
+                <a:latin typeface="맑은 고딕" charset="0"/>
+                <a:ea typeface="맑은 고딕" charset="0"/>
+              </a:rPr>
+              <a:t>lt은 그림에 대한 설명</a:t>
+            </a:r>
+            <a:endParaRPr lang="ko-KR" altLang="en-US" sz="1800">
+              <a:latin typeface="맑은 고딕" charset="0"/>
+              <a:ea typeface="맑은 고딕" charset="0"/>
+            </a:endParaRPr>
+          </a:p>
+        </p:txBody>
+      </p:sp>
+      <p:sp>
+        <p:nvSpPr>
+          <p:cNvPr id="121" name="텍스트 상자 13"/>
+          <p:cNvSpPr txBox="1">
+            <a:spLocks/>
+          </p:cNvSpPr>
+          <p:nvPr/>
+        </p:nvSpPr>
+        <p:spPr>
+          <a:xfrm rot="0">
+            <a:off x="5342890" y="4918075"/>
+            <a:ext cx="1793875" cy="370205"/>
+          </a:xfrm>
+          <a:prstGeom prst="rect"/>
+          <a:noFill/>
+          <a:ln>
+            <a:noFill/>
+            <a:prstDash/>
+          </a:ln>
+        </p:spPr>
+        <p:txBody>
+          <a:bodyPr wrap="none" lIns="89535" tIns="46355" rIns="89535" bIns="46355" vert="horz" anchor="t">
+            <a:spAutoFit/>
+          </a:bodyPr>
+          <a:lstStyle/>
+          <a:p>
+            <a:pPr marL="0" indent="0" algn="l" hangingPunct="1"/>
+            <a:r>
+              <a:rPr lang="ko-KR" sz="1800">
+                <a:latin typeface="맑은 고딕" charset="0"/>
+                <a:ea typeface="맑은 고딕" charset="0"/>
+              </a:rPr>
+              <a:t>S</a:t>
+            </a:r>
+            <a:r>
+              <a:rPr lang="ko-KR" sz="1800">
+                <a:latin typeface="맑은 고딕" charset="0"/>
+                <a:ea typeface="맑은 고딕" charset="0"/>
+              </a:rPr>
+              <a:t>rc</a:t>
+            </a:r>
+            <a:r>
+              <a:rPr lang="ko-KR" sz="1800">
+                <a:latin typeface="맑은 고딕" charset="0"/>
+                <a:ea typeface="맑은 고딕" charset="0"/>
+              </a:rPr>
+              <a:t>은 </a:t>
+            </a:r>
+            <a:r>
+              <a:rPr lang="ko-KR" sz="1800">
+                <a:latin typeface="맑은 고딕" charset="0"/>
+                <a:ea typeface="맑은 고딕" charset="0"/>
+              </a:rPr>
+              <a:t>절대 </a:t>
+            </a:r>
+            <a:r>
+              <a:rPr lang="ko-KR" sz="1800">
+                <a:latin typeface="맑은 고딕" charset="0"/>
+                <a:ea typeface="맑은 고딕" charset="0"/>
+              </a:rPr>
+              <a:t>경로</a:t>
+            </a:r>
+            <a:endParaRPr lang="ko-KR" altLang="en-US" sz="1800">
+              <a:latin typeface="맑은 고딕" charset="0"/>
+              <a:ea typeface="맑은 고딕" charset="0"/>
+            </a:endParaRPr>
+          </a:p>
+        </p:txBody>
+      </p:sp>
+      <p:sp>
+        <p:nvSpPr>
+          <p:cNvPr id="122" name="텍스트 상자 14"/>
+          <p:cNvSpPr txBox="1">
+            <a:spLocks/>
+          </p:cNvSpPr>
+          <p:nvPr/>
+        </p:nvSpPr>
+        <p:spPr>
+          <a:xfrm rot="0">
+            <a:off x="5406390" y="1772285"/>
+            <a:ext cx="5660390" cy="1444625"/>
+          </a:xfrm>
+          <a:prstGeom prst="rect"/>
+          <a:noFill/>
+          <a:ln>
+            <a:noFill/>
+            <a:prstDash/>
+          </a:ln>
+        </p:spPr>
+        <p:txBody>
+          <a:bodyPr wrap="none" lIns="89535" tIns="46355" rIns="89535" bIns="46355" vert="horz" anchor="t">
+            <a:spAutoFit/>
+          </a:bodyPr>
+          <a:lstStyle/>
+          <a:p>
+            <a:pPr marL="0" indent="0" algn="l" hangingPunct="1"/>
+            <a:r>
+              <a:rPr lang="ko-KR" sz="1100" cap="none" i="0" b="0" strike="noStrike">
+                <a:latin typeface="맑은 고딕" charset="0"/>
+                <a:ea typeface="맑은 고딕" charset="0"/>
+                <a:cs typeface="Arial" charset="0"/>
+              </a:rPr>
+              <a:t>1</a:t>
+            </a:r>
+            <a:r>
+              <a:rPr lang="ko-KR" sz="1100" cap="none" i="0" b="0" strike="noStrike">
+                <a:latin typeface="맑은 고딕" charset="0"/>
+                <a:ea typeface="맑은 고딕" charset="0"/>
+                <a:cs typeface="Arial" charset="0"/>
+              </a:rPr>
+              <a:t>)</a:t>
+            </a:r>
+            <a:r>
+              <a:rPr lang="ko-KR" sz="1100" cap="none" i="0" b="0" strike="noStrike">
+                <a:latin typeface="맑은 고딕" charset="0"/>
+                <a:ea typeface="맑은 고딕" charset="0"/>
+                <a:cs typeface="Arial" charset="0"/>
+              </a:rPr>
+              <a:t> 절대 </a:t>
+            </a:r>
+            <a:r>
+              <a:rPr lang="ko-KR" sz="1100" cap="none" i="0" b="0" strike="noStrike">
+                <a:latin typeface="맑은 고딕" charset="0"/>
+                <a:ea typeface="맑은 고딕" charset="0"/>
+                <a:cs typeface="Arial" charset="0"/>
+              </a:rPr>
+              <a:t>경로</a:t>
+            </a:r>
+            <a:r>
+              <a:rPr lang="ko-KR" sz="1100" cap="none" i="0" b="0" strike="noStrike">
+                <a:latin typeface="맑은 고딕" charset="0"/>
+                <a:ea typeface="맑은 고딕" charset="0"/>
+                <a:cs typeface="Arial" charset="0"/>
+              </a:rPr>
+              <a:t> -</a:t>
+            </a:r>
+            <a:r>
+              <a:rPr lang="ko-KR" sz="1100" cap="none" i="0" b="0" strike="noStrike">
+                <a:latin typeface="맑은 고딕" charset="0"/>
+                <a:ea typeface="맑은 고딕" charset="0"/>
+                <a:cs typeface="Arial" charset="0"/>
+              </a:rPr>
+              <a:t>&gt; </a:t>
+            </a:r>
+            <a:r>
+              <a:rPr lang="ko-KR" sz="1100" cap="none" i="0" b="0" strike="noStrike">
+                <a:latin typeface="맑은 고딕" charset="0"/>
+                <a:ea typeface="맑은 고딕" charset="0"/>
+                <a:cs typeface="Arial" charset="0"/>
+              </a:rPr>
+              <a:t>s</a:t>
+            </a:r>
+            <a:r>
+              <a:rPr lang="ko-KR" sz="1100" cap="none" i="0" b="0" strike="noStrike">
+                <a:latin typeface="맑은 고딕" charset="0"/>
+                <a:ea typeface="맑은 고딕" charset="0"/>
+                <a:cs typeface="Arial" charset="0"/>
+              </a:rPr>
+              <a:t>rc href</a:t>
+            </a:r>
+            <a:r>
+              <a:rPr lang="ko-KR" sz="1100" cap="none" i="0" b="0" strike="noStrike">
+                <a:latin typeface="맑은 고딕" charset="0"/>
+                <a:ea typeface="맑은 고딕" charset="0"/>
+                <a:cs typeface="Arial" charset="0"/>
+              </a:rPr>
+              <a:t>는 </a:t>
+            </a:r>
+            <a:r>
+              <a:rPr lang="ko-KR" sz="1100" cap="none" i="0" b="0" strike="noStrike">
+                <a:latin typeface="맑은 고딕" charset="0"/>
+                <a:ea typeface="맑은 고딕" charset="0"/>
+                <a:cs typeface="Arial" charset="0"/>
+              </a:rPr>
+              <a:t>절대경로임 </a:t>
+            </a:r>
+            <a:r>
+              <a:rPr lang="ko-KR" sz="1100" cap="none" i="0" b="0" strike="noStrike">
+                <a:latin typeface="맑은 고딕" charset="0"/>
+                <a:ea typeface="맑은 고딕" charset="0"/>
+                <a:cs typeface="Arial" charset="0"/>
+              </a:rPr>
+              <a:t>왜?</a:t>
+            </a:r>
+            <a:r>
+              <a:rPr lang="ko-KR" sz="1100" cap="none" i="0" b="0" strike="noStrike">
+                <a:latin typeface="맑은 고딕" charset="0"/>
+                <a:ea typeface="맑은 고딕" charset="0"/>
+                <a:cs typeface="Arial" charset="0"/>
+              </a:rPr>
+              <a:t> </a:t>
+            </a:r>
+            <a:r>
+              <a:rPr lang="ko-KR" sz="1100" cap="none" i="0" b="0" strike="noStrike">
+                <a:latin typeface="맑은 고딕" charset="0"/>
+                <a:ea typeface="맑은 고딕" charset="0"/>
+                <a:cs typeface="Arial" charset="0"/>
+              </a:rPr>
+              <a:t>주소를 </a:t>
+            </a:r>
+            <a:r>
+              <a:rPr lang="ko-KR" sz="1100" cap="none" i="0" b="0" strike="noStrike">
+                <a:latin typeface="맑은 고딕" charset="0"/>
+                <a:ea typeface="맑은 고딕" charset="0"/>
+                <a:cs typeface="Arial" charset="0"/>
+              </a:rPr>
+              <a:t>아에 </a:t>
+            </a:r>
+            <a:r>
+              <a:rPr lang="ko-KR" sz="1100" cap="none" i="0" b="0" strike="noStrike">
+                <a:latin typeface="맑은 고딕" charset="0"/>
+                <a:ea typeface="맑은 고딕" charset="0"/>
+                <a:cs typeface="Arial" charset="0"/>
+              </a:rPr>
+              <a:t>다 </a:t>
+            </a:r>
+            <a:r>
+              <a:rPr lang="ko-KR" sz="1100" cap="none" i="0" b="0" strike="noStrike">
+                <a:latin typeface="맑은 고딕" charset="0"/>
+                <a:ea typeface="맑은 고딕" charset="0"/>
+                <a:cs typeface="Arial" charset="0"/>
+              </a:rPr>
+              <a:t>쓰니깐</a:t>
+            </a:r>
+            <a:endParaRPr lang="ko-KR" altLang="en-US" sz="1100" cap="none" i="0" b="0" strike="noStrike">
+              <a:latin typeface="맑은 고딕" charset="0"/>
+              <a:ea typeface="맑은 고딕" charset="0"/>
+              <a:cs typeface="Arial" charset="0"/>
+            </a:endParaRPr>
+          </a:p>
+          <a:p>
+            <a:pPr marL="0" indent="0" algn="l" hangingPunct="1"/>
+            <a:r>
+              <a:rPr lang="ko-KR" sz="1100" cap="none" i="0" b="0" strike="noStrike">
+                <a:latin typeface="맑은 고딕" charset="0"/>
+                <a:ea typeface="맑은 고딕" charset="0"/>
+                <a:cs typeface="Arial" charset="0"/>
+              </a:rPr>
+              <a:t> </a:t>
+            </a:r>
+            <a:r>
+              <a:rPr lang="ko-KR" sz="1100" cap="none" i="0" b="0" strike="noStrike">
+                <a:latin typeface="맑은 고딕" charset="0"/>
+                <a:ea typeface="맑은 고딕" charset="0"/>
+                <a:cs typeface="Arial" charset="0"/>
+              </a:rPr>
+              <a:t>        	문제가 있음-&gt; </a:t>
+            </a:r>
+            <a:r>
+              <a:rPr lang="ko-KR" sz="1100" cap="none" i="0" b="0" strike="noStrike">
+                <a:latin typeface="맑은 고딕" charset="0"/>
+                <a:ea typeface="맑은 고딕" charset="0"/>
+                <a:cs typeface="Arial" charset="0"/>
+              </a:rPr>
+              <a:t>보안 </a:t>
+            </a:r>
+            <a:r>
+              <a:rPr lang="ko-KR" sz="1100" cap="none" i="0" b="0" strike="noStrike">
+                <a:latin typeface="맑은 고딕" charset="0"/>
+                <a:ea typeface="맑은 고딕" charset="0"/>
+                <a:cs typeface="Arial" charset="0"/>
+              </a:rPr>
+              <a:t>문제가 있음</a:t>
+            </a:r>
+            <a:endParaRPr lang="ko-KR" altLang="en-US" sz="1100" cap="none" i="0" b="0" strike="noStrike">
+              <a:latin typeface="맑은 고딕" charset="0"/>
+              <a:ea typeface="맑은 고딕" charset="0"/>
+              <a:cs typeface="Arial" charset="0"/>
+            </a:endParaRPr>
+          </a:p>
+          <a:p>
+            <a:pPr marL="0" indent="0" algn="l" hangingPunct="1"/>
+            <a:endParaRPr lang="ko-KR" altLang="en-US" sz="1100" cap="none" i="0" b="0" strike="noStrike">
+              <a:latin typeface="맑은 고딕" charset="0"/>
+              <a:ea typeface="맑은 고딕" charset="0"/>
+              <a:cs typeface="Arial" charset="0"/>
+            </a:endParaRPr>
+          </a:p>
+          <a:p>
+            <a:pPr marL="0" indent="0" algn="l" hangingPunct="1"/>
+            <a:r>
+              <a:rPr lang="ko-KR" sz="1100" cap="none" i="0" b="0" strike="noStrike">
+                <a:latin typeface="맑은 고딕" charset="0"/>
+                <a:ea typeface="맑은 고딕" charset="0"/>
+                <a:cs typeface="Arial" charset="0"/>
+              </a:rPr>
+              <a:t>2) 상대 경로</a:t>
+            </a:r>
+            <a:r>
+              <a:rPr lang="ko-KR" sz="1100" cap="none" i="0" b="0" strike="noStrike">
+                <a:latin typeface="맑은 고딕" charset="0"/>
+                <a:ea typeface="맑은 고딕" charset="0"/>
+                <a:cs typeface="Arial" charset="0"/>
+              </a:rPr>
+              <a:t> -</a:t>
+            </a:r>
+            <a:r>
+              <a:rPr lang="ko-KR" sz="1100" cap="none" i="0" b="0" strike="noStrike">
+                <a:latin typeface="맑은 고딕" charset="0"/>
+                <a:ea typeface="맑은 고딕" charset="0"/>
+                <a:cs typeface="Arial" charset="0"/>
+              </a:rPr>
+              <a:t>&gt; </a:t>
+            </a:r>
+            <a:r>
+              <a:rPr lang="ko-KR" sz="1100" cap="none" i="0" b="0" strike="noStrike">
+                <a:latin typeface="맑은 고딕" charset="0"/>
+                <a:ea typeface="맑은 고딕" charset="0"/>
+                <a:cs typeface="Arial" charset="0"/>
+              </a:rPr>
+              <a:t>.</a:t>
+            </a:r>
+            <a:r>
+              <a:rPr lang="ko-KR" sz="1100" cap="none" i="0" b="0" strike="noStrike">
+                <a:latin typeface="맑은 고딕" charset="0"/>
+                <a:ea typeface="맑은 고딕" charset="0"/>
+                <a:cs typeface="Arial" charset="0"/>
+              </a:rPr>
+              <a:t>./../insert.jsp </a:t>
+            </a:r>
+            <a:r>
+              <a:rPr lang="ko-KR" sz="1100" cap="none" i="0" b="0" strike="noStrike">
+                <a:latin typeface="맑은 고딕" charset="0"/>
+                <a:ea typeface="맑은 고딕" charset="0"/>
+                <a:cs typeface="Arial" charset="0"/>
+              </a:rPr>
+              <a:t>이런식임 </a:t>
+            </a:r>
+            <a:r>
+              <a:rPr lang="ko-KR" sz="1100" cap="none" i="0" b="0" strike="noStrike">
+                <a:latin typeface="맑은 고딕" charset="0"/>
+                <a:ea typeface="맑은 고딕" charset="0"/>
+                <a:cs typeface="Arial" charset="0"/>
+              </a:rPr>
+              <a:t>  </a:t>
+            </a:r>
+            <a:r>
+              <a:rPr lang="ko-KR" sz="1100" cap="none" i="0" b="0" strike="noStrike">
+                <a:latin typeface="맑은 고딕" charset="0"/>
+                <a:ea typeface="맑은 고딕" charset="0"/>
+                <a:cs typeface="Arial" charset="0"/>
+              </a:rPr>
+              <a:t>‘</a:t>
+            </a:r>
+            <a:r>
+              <a:rPr lang="ko-KR" sz="1100" cap="none" i="0" b="0" strike="noStrike">
+                <a:latin typeface="맑은 고딕" charset="0"/>
+                <a:ea typeface="맑은 고딕" charset="0"/>
+                <a:cs typeface="Arial" charset="0"/>
+              </a:rPr>
+              <a:t>..</a:t>
+            </a:r>
+            <a:r>
+              <a:rPr lang="ko-KR" sz="1100" cap="none" i="0" b="0" strike="noStrike">
+                <a:latin typeface="맑은 고딕" charset="0"/>
+                <a:ea typeface="맑은 고딕" charset="0"/>
+                <a:cs typeface="Arial" charset="0"/>
+              </a:rPr>
+              <a:t>’이건 </a:t>
+            </a:r>
+            <a:r>
+              <a:rPr lang="ko-KR" sz="1100" cap="none" i="0" b="0" strike="noStrike">
+                <a:latin typeface="맑은 고딕" charset="0"/>
+                <a:ea typeface="맑은 고딕" charset="0"/>
+                <a:cs typeface="Arial" charset="0"/>
+              </a:rPr>
+              <a:t>뭘까</a:t>
+            </a:r>
+            <a:r>
+              <a:rPr lang="ko-KR" sz="1100" cap="none" i="0" b="0" strike="noStrike">
+                <a:latin typeface="맑은 고딕" charset="0"/>
+                <a:ea typeface="맑은 고딕" charset="0"/>
+                <a:cs typeface="Arial" charset="0"/>
+              </a:rPr>
+              <a:t>-</a:t>
+            </a:r>
+            <a:r>
+              <a:rPr lang="ko-KR" sz="1100" cap="none" i="0" b="0" strike="noStrike">
+                <a:latin typeface="맑은 고딕" charset="0"/>
+                <a:ea typeface="맑은 고딕" charset="0"/>
+                <a:cs typeface="Arial" charset="0"/>
+              </a:rPr>
+              <a:t>&gt; </a:t>
+            </a:r>
+            <a:r>
+              <a:rPr lang="ko-KR" sz="1100" cap="none" i="0" b="0" strike="noStrike">
+                <a:latin typeface="맑은 고딕" charset="0"/>
+                <a:ea typeface="맑은 고딕" charset="0"/>
+                <a:cs typeface="Arial" charset="0"/>
+              </a:rPr>
+              <a:t>디렉토리 </a:t>
+            </a:r>
+            <a:r>
+              <a:rPr lang="ko-KR" sz="1100" cap="none" i="0" b="0" strike="noStrike">
+                <a:latin typeface="맑은 고딕" charset="0"/>
+                <a:ea typeface="맑은 고딕" charset="0"/>
+                <a:cs typeface="Arial" charset="0"/>
+              </a:rPr>
+              <a:t>경로임 리눅스</a:t>
+            </a:r>
+            <a:r>
+              <a:rPr lang="ko-KR" sz="1100" cap="none" i="0" b="0" strike="noStrike">
+                <a:latin typeface="맑은 고딕" charset="0"/>
+                <a:ea typeface="맑은 고딕" charset="0"/>
+                <a:cs typeface="Arial" charset="0"/>
+              </a:rPr>
+              <a:t>때</a:t>
+            </a:r>
+            <a:r>
+              <a:rPr lang="ko-KR" sz="1100" cap="none" i="0" b="0" strike="noStrike">
+                <a:latin typeface="맑은 고딕" charset="0"/>
+                <a:ea typeface="맑은 고딕" charset="0"/>
+                <a:cs typeface="Arial" charset="0"/>
+              </a:rPr>
+              <a:t> 알지</a:t>
+            </a:r>
+            <a:endParaRPr lang="ko-KR" altLang="en-US" sz="1100" cap="none" i="0" b="0" strike="noStrike">
+              <a:latin typeface="맑은 고딕" charset="0"/>
+              <a:ea typeface="맑은 고딕" charset="0"/>
+              <a:cs typeface="Arial" charset="0"/>
+            </a:endParaRPr>
+          </a:p>
+          <a:p>
+            <a:pPr marL="0" indent="0" algn="l" hangingPunct="1"/>
+            <a:endParaRPr lang="ko-KR" altLang="en-US" sz="1100" cap="none" i="0" b="0" strike="noStrike">
+              <a:latin typeface="맑은 고딕" charset="0"/>
+              <a:ea typeface="맑은 고딕" charset="0"/>
+              <a:cs typeface="Arial" charset="0"/>
+            </a:endParaRPr>
+          </a:p>
+          <a:p>
+            <a:pPr marL="0" indent="0" algn="l" hangingPunct="1"/>
+            <a:r>
+              <a:rPr lang="ko-KR" sz="1100" cap="none" i="0" b="0" strike="noStrike">
+                <a:latin typeface="맑은 고딕" charset="0"/>
+                <a:ea typeface="맑은 고딕" charset="0"/>
+                <a:cs typeface="Arial" charset="0"/>
+              </a:rPr>
+              <a:t>3) </a:t>
+            </a:r>
+            <a:r>
+              <a:rPr lang="ko-KR" sz="1100" cap="none" i="0" b="0" strike="noStrike">
+                <a:latin typeface="맑은 고딕" charset="0"/>
+                <a:ea typeface="맑은 고딕" charset="0"/>
+                <a:cs typeface="Arial" charset="0"/>
+              </a:rPr>
+              <a:t>언어 </a:t>
+            </a:r>
+            <a:r>
+              <a:rPr lang="ko-KR" sz="1100" cap="none" i="0" b="0" strike="noStrike">
+                <a:latin typeface="맑은 고딕" charset="0"/>
+                <a:ea typeface="맑은 고딕" charset="0"/>
+                <a:cs typeface="Arial" charset="0"/>
+              </a:rPr>
+              <a:t>타입 </a:t>
+            </a:r>
+            <a:r>
+              <a:rPr lang="ko-KR" sz="1100" cap="none" i="0" b="0" strike="noStrike">
+                <a:latin typeface="맑은 고딕" charset="0"/>
+                <a:ea typeface="맑은 고딕" charset="0"/>
+                <a:cs typeface="Arial" charset="0"/>
+              </a:rPr>
+              <a:t>-</a:t>
+            </a:r>
+            <a:r>
+              <a:rPr lang="ko-KR" sz="1100" cap="none" i="0" b="0" strike="noStrike">
+                <a:latin typeface="맑은 고딕" charset="0"/>
+                <a:ea typeface="맑은 고딕" charset="0"/>
+                <a:cs typeface="Arial" charset="0"/>
+              </a:rPr>
+              <a:t>&gt;</a:t>
+            </a:r>
+            <a:r>
+              <a:rPr lang="ko-KR" sz="1100" cap="none" i="0" b="0" strike="noStrike">
+                <a:latin typeface="맑은 고딕" charset="0"/>
+                <a:ea typeface="맑은 고딕" charset="0"/>
+                <a:cs typeface="Arial" charset="0"/>
+              </a:rPr>
+              <a:t> e</a:t>
+            </a:r>
+            <a:r>
+              <a:rPr lang="ko-KR" sz="1100" cap="none" i="0" b="0" strike="noStrike">
+                <a:latin typeface="맑은 고딕" charset="0"/>
+                <a:ea typeface="맑은 고딕" charset="0"/>
+                <a:cs typeface="Arial" charset="0"/>
+              </a:rPr>
+              <a:t>uc-kr </a:t>
+            </a:r>
+            <a:r>
+              <a:rPr lang="ko-KR" sz="1100" cap="none" i="0" b="0" strike="noStrike">
+                <a:latin typeface="맑은 고딕" charset="0"/>
+                <a:ea typeface="맑은 고딕" charset="0"/>
+                <a:cs typeface="Arial" charset="0"/>
+              </a:rPr>
+              <a:t>-</a:t>
+            </a:r>
+            <a:r>
+              <a:rPr lang="ko-KR" sz="1100" cap="none" i="0" b="0" strike="noStrike">
+                <a:latin typeface="맑은 고딕" charset="0"/>
+                <a:ea typeface="맑은 고딕" charset="0"/>
+                <a:cs typeface="Arial" charset="0"/>
+              </a:rPr>
+              <a:t>&gt; </a:t>
+            </a:r>
+            <a:r>
+              <a:rPr lang="ko-KR" sz="1100" cap="none" i="0" b="0" strike="noStrike">
+                <a:latin typeface="맑은 고딕" charset="0"/>
+                <a:ea typeface="맑은 고딕" charset="0"/>
+                <a:cs typeface="Arial" charset="0"/>
+              </a:rPr>
+              <a:t>한글</a:t>
+            </a:r>
+            <a:endParaRPr lang="ko-KR" altLang="en-US" sz="1100" cap="none" i="0" b="0" strike="noStrike">
+              <a:latin typeface="맑은 고딕" charset="0"/>
+              <a:ea typeface="맑은 고딕" charset="0"/>
+              <a:cs typeface="Arial" charset="0"/>
+            </a:endParaRPr>
+          </a:p>
+          <a:p>
+            <a:pPr marL="0" indent="0" algn="l" hangingPunct="1"/>
+            <a:r>
+              <a:rPr lang="ko-KR" sz="1100" cap="none" i="0" b="0" strike="noStrike">
+                <a:latin typeface="맑은 고딕" charset="0"/>
+                <a:ea typeface="맑은 고딕" charset="0"/>
+                <a:cs typeface="Arial" charset="0"/>
+              </a:rPr>
+              <a:t>	</a:t>
+            </a:r>
+            <a:r>
+              <a:rPr lang="ko-KR" sz="1100" cap="none" i="0" b="0" strike="noStrike">
+                <a:latin typeface="맑은 고딕" charset="0"/>
+                <a:ea typeface="맑은 고딕" charset="0"/>
+                <a:cs typeface="Arial" charset="0"/>
+              </a:rPr>
+              <a:t> </a:t>
+            </a:r>
+            <a:r>
+              <a:rPr lang="ko-KR" sz="1100" cap="none" i="0" b="0" strike="noStrike">
+                <a:latin typeface="맑은 고딕" charset="0"/>
+                <a:ea typeface="맑은 고딕" charset="0"/>
+                <a:cs typeface="Arial" charset="0"/>
+              </a:rPr>
+              <a:t> </a:t>
+            </a:r>
+            <a:r>
+              <a:rPr lang="ko-KR" sz="1100" cap="none" i="0" b="0" strike="noStrike">
+                <a:latin typeface="맑은 고딕" charset="0"/>
+                <a:ea typeface="맑은 고딕" charset="0"/>
+                <a:cs typeface="Arial" charset="0"/>
+              </a:rPr>
+              <a:t>U</a:t>
+            </a:r>
+            <a:r>
+              <a:rPr lang="ko-KR" sz="1100" cap="none" i="0" b="0" strike="noStrike">
+                <a:latin typeface="맑은 고딕" charset="0"/>
+                <a:ea typeface="맑은 고딕" charset="0"/>
+                <a:cs typeface="Arial" charset="0"/>
+              </a:rPr>
+              <a:t>TF-</a:t>
+            </a:r>
+            <a:r>
+              <a:rPr lang="ko-KR" sz="1100" cap="none" i="0" b="0" strike="noStrike">
+                <a:latin typeface="맑은 고딕" charset="0"/>
+                <a:ea typeface="맑은 고딕" charset="0"/>
+                <a:cs typeface="Arial" charset="0"/>
+              </a:rPr>
+              <a:t>8</a:t>
+            </a:r>
+            <a:r>
+              <a:rPr lang="ko-KR" sz="1100" cap="none" i="0" b="0" strike="noStrike">
+                <a:latin typeface="맑은 고딕" charset="0"/>
+                <a:ea typeface="맑은 고딕" charset="0"/>
+                <a:cs typeface="Arial" charset="0"/>
+              </a:rPr>
+              <a:t>  </a:t>
+            </a:r>
+            <a:r>
+              <a:rPr lang="ko-KR" sz="1100" cap="none" i="0" b="0" strike="noStrike">
+                <a:latin typeface="맑은 고딕" charset="0"/>
+                <a:ea typeface="맑은 고딕" charset="0"/>
+                <a:cs typeface="Arial" charset="0"/>
+              </a:rPr>
+              <a:t>-</a:t>
+            </a:r>
+            <a:r>
+              <a:rPr lang="ko-KR" sz="1100" cap="none" i="0" b="0" strike="noStrike">
+                <a:latin typeface="맑은 고딕" charset="0"/>
+                <a:ea typeface="맑은 고딕" charset="0"/>
+                <a:cs typeface="Arial" charset="0"/>
+              </a:rPr>
+              <a:t>&gt; 모든 언어</a:t>
+            </a:r>
+            <a:endParaRPr lang="ko-KR" altLang="en-US" sz="1100" cap="none" i="0" b="0" strike="noStrike">
+              <a:latin typeface="맑은 고딕" charset="0"/>
+              <a:ea typeface="맑은 고딕" charset="0"/>
+              <a:cs typeface="Arial" charset="0"/>
+            </a:endParaRPr>
+          </a:p>
+          <a:p>
+            <a:pPr marL="0" indent="0" algn="l" hangingPunct="1"/>
+            <a:r>
+              <a:rPr lang="ko-KR" sz="1100" cap="none" i="0" b="0" strike="noStrike">
+                <a:latin typeface="맑은 고딕" charset="0"/>
+                <a:ea typeface="맑은 고딕" charset="0"/>
+                <a:cs typeface="Arial" charset="0"/>
+              </a:rPr>
+              <a:t> </a:t>
+            </a:r>
+            <a:r>
+              <a:rPr lang="ko-KR" sz="1100" cap="none" i="0" b="0" strike="noStrike">
+                <a:latin typeface="맑은 고딕" charset="0"/>
+                <a:ea typeface="맑은 고딕" charset="0"/>
+                <a:cs typeface="Arial" charset="0"/>
+              </a:rPr>
+              <a:t>             </a:t>
+            </a:r>
+            <a:endParaRPr lang="ko-KR" altLang="en-US" sz="1100">
+              <a:latin typeface="맑은 고딕" charset="0"/>
+              <a:ea typeface="맑은 고딕" charset="0"/>
+            </a:endParaRPr>
+          </a:p>
+        </p:txBody>
+      </p:sp>
     </p:spTree>
   </p:cSld>
   <p:clrMapOvr>
     <a:masterClrMapping/>
   </p:clrMapOvr>
+  <mc:AlternateContent xmlns:mc="http://schemas.openxmlformats.org/markup-compatibility/2006">
+    <mc:Choice xmlns:p14="http://schemas.microsoft.com/office/powerpoint/2010/main" Requires="p14">
+      <p:transition spd="slow" p14:dur="2000"/>
+    </mc:Choice>
+    <mc:Fallback>
+      <p:transition spd="slow"/>
+    </mc:Fallback>
+  </mc:AlternateContent>
+  <p:timing>
+    <p:tnLst>
+      <p:par>
+        <p:cTn id="1" dur="indefinite" restart="never" nodeType="tmRoot"/>
+      </p:par>
+    </p:tnLst>
+  </p:timing>
 </p:sld>
 </file>
 
@@ -8201,7 +9772,7 @@
 </file>
 
 <file path=ppt/slides/slide13.xml><?xml version="1.0" encoding="utf-8"?>
-<p:sld xmlns:a="http://schemas.openxmlformats.org/drawingml/2006/main" xmlns:r="http://schemas.openxmlformats.org/officeDocument/2006/relationships" xmlns:p="http://schemas.openxmlformats.org/presentationml/2006/main">
+<p:sld xmlns:a="http://schemas.openxmlformats.org/drawingml/2006/main" xmlns:r="http://schemas.openxmlformats.org/officeDocument/2006/relationships" xmlns:p="http://schemas.openxmlformats.org/presentationml/2006/main" xmlns:p14="http://schemas.microsoft.com/office/powerpoint/2010/main">
   <p:cSld>
     <p:spTree>
       <p:nvGrpSpPr>
@@ -8239,7 +9810,12 @@
             <p:ph type="title"/>
           </p:nvPr>
         </p:nvSpPr>
-        <p:spPr/>
+        <p:spPr>
+          <a:xfrm>
+            <a:off x="590550" y="146050"/>
+            <a:ext cx="10363835" cy="762635"/>
+          </a:xfrm>
+        </p:spPr>
         <p:txBody>
           <a:bodyPr/>
           <a:lstStyle/>
@@ -8280,7 +9856,12 @@
             <p:ph type="body" idx="1"/>
           </p:nvPr>
         </p:nvSpPr>
-        <p:spPr/>
+        <p:spPr>
+          <a:xfrm>
+            <a:off x="592455" y="1152525"/>
+            <a:ext cx="10363835" cy="5020310"/>
+          </a:xfrm>
+        </p:spPr>
         <p:txBody>
           <a:bodyPr>
             <a:normAutofit fontScale="92500" lnSpcReduction="20000"/>
@@ -8468,7 +10049,12 @@
             <p:ph type="sldNum" idx="12"/>
           </p:nvPr>
         </p:nvSpPr>
-        <p:spPr/>
+        <p:spPr>
+          <a:xfrm>
+            <a:off x="9482455" y="6419850"/>
+            <a:ext cx="2540635" cy="305435"/>
+          </a:xfrm>
+        </p:spPr>
         <p:txBody>
           <a:bodyPr/>
           <a:lstStyle/>
@@ -8487,6 +10073,82 @@
               <a:t>13</a:t>
             </a:fld>
             <a:endParaRPr lang="en-US"/>
+          </a:p>
+        </p:txBody>
+      </p:sp>
+      <p:sp>
+        <p:nvSpPr>
+          <p:cNvPr id="5" name="텍스트 상자 22"/>
+          <p:cNvSpPr txBox="1">
+            <a:spLocks/>
+          </p:cNvSpPr>
+          <p:nvPr/>
+        </p:nvSpPr>
+        <p:spPr>
+          <a:xfrm rot="0">
+            <a:off x="7934325" y="1804670"/>
+            <a:ext cx="2610485" cy="370205"/>
+          </a:xfrm>
+          <a:prstGeom prst="rect"/>
+          <a:noFill/>
+          <a:ln>
+            <a:noFill/>
+            <a:prstDash/>
+          </a:ln>
+        </p:spPr>
+        <p:txBody>
+          <a:bodyPr wrap="none" lIns="89535" tIns="46355" rIns="89535" bIns="46355" vert="horz" anchor="t">
+            <a:spAutoFit/>
+          </a:bodyPr>
+          <a:lstStyle/>
+          <a:p>
+            <a:pPr marL="0" indent="0" algn="l" hangingPunct="1"/>
+            <a:r>
+              <a:rPr sz="1800">
+                <a:latin typeface="맑은 고딕" charset="0"/>
+                <a:ea typeface="맑은 고딕" charset="0"/>
+              </a:rPr>
+              <a:t>경로 </a:t>
+            </a:r>
+            <a:r>
+              <a:rPr sz="1800">
+                <a:latin typeface="맑은 고딕" charset="0"/>
+                <a:ea typeface="맑은 고딕" charset="0"/>
+              </a:rPr>
+              <a:t>틀리면 </a:t>
+            </a:r>
+            <a:r>
+              <a:rPr lang="ko-KR" sz="1800">
+                <a:latin typeface="맑은 고딕" charset="0"/>
+                <a:ea typeface="맑은 고딕" charset="0"/>
+              </a:rPr>
+              <a:t>-</a:t>
+            </a:r>
+            <a:r>
+              <a:rPr lang="ko-KR" sz="1800">
+                <a:latin typeface="맑은 고딕" charset="0"/>
+                <a:ea typeface="맑은 고딕" charset="0"/>
+              </a:rPr>
+              <a:t>&gt; </a:t>
+            </a:r>
+            <a:r>
+              <a:rPr lang="ko-KR" sz="1800">
+                <a:latin typeface="맑은 고딕" charset="0"/>
+                <a:ea typeface="맑은 고딕" charset="0"/>
+              </a:rPr>
+              <a:t>al</a:t>
+            </a:r>
+            <a:r>
+              <a:rPr lang="ko-KR" sz="1800">
+                <a:latin typeface="맑은 고딕" charset="0"/>
+                <a:ea typeface="맑은 고딕" charset="0"/>
+              </a:rPr>
+              <a:t>t값 뜸</a:t>
+            </a:r>
+            <a:endParaRPr lang="ko-KR" altLang="en-US" sz="1800">
+              <a:latin typeface="맑은 고딕" charset="0"/>
+              <a:ea typeface="맑은 고딕" charset="0"/>
+            </a:endParaRPr>
           </a:p>
         </p:txBody>
       </p:sp>
@@ -8500,11 +10162,26 @@
   <p:clrMapOvr>
     <a:masterClrMapping/>
   </p:clrMapOvr>
+  <mc:AlternateContent xmlns:mc="http://schemas.openxmlformats.org/markup-compatibility/2006">
+    <mc:Choice xmlns:p14="http://schemas.microsoft.com/office/powerpoint/2010/main" Requires="p14">
+      <p:transition spd="slow" p14:dur="2000"/>
+    </mc:Choice>
+    <mc:Fallback>
+      <p:transition spd="slow"/>
+    </mc:Fallback>
+  </mc:AlternateContent>
+  <p:timing>
+    <p:tnLst>
+      <p:par>
+        <p:cTn id="1" dur="indefinite" restart="never" nodeType="tmRoot"/>
+      </p:par>
+    </p:tnLst>
+  </p:timing>
 </p:sld>
 </file>
 
 <file path=ppt/slides/slide14.xml><?xml version="1.0" encoding="utf-8"?>
-<p:sld xmlns:a="http://schemas.openxmlformats.org/drawingml/2006/main" xmlns:r="http://schemas.openxmlformats.org/officeDocument/2006/relationships" xmlns:p="http://schemas.openxmlformats.org/presentationml/2006/main">
+<p:sld xmlns:a="http://schemas.openxmlformats.org/drawingml/2006/main" xmlns:r="http://schemas.openxmlformats.org/officeDocument/2006/relationships" xmlns:p="http://schemas.openxmlformats.org/presentationml/2006/main" xmlns:p14="http://schemas.microsoft.com/office/powerpoint/2010/main">
   <p:cSld>
     <p:spTree>
       <p:nvGrpSpPr>
@@ -8532,7 +10209,7 @@
         </p:nvSpPr>
         <p:spPr>
           <a:xfrm>
-            <a:off x="590551" y="146050"/>
+            <a:off x="590550" y="146050"/>
             <a:ext cx="10363200" cy="762000"/>
           </a:xfrm>
           <a:prstGeom prst="rect">
@@ -8578,8 +10255,8 @@
         </p:nvSpPr>
         <p:spPr>
           <a:xfrm>
-            <a:off x="592667" y="1152526"/>
-            <a:ext cx="10363200" cy="5019675"/>
+            <a:off x="592455" y="1152525"/>
+            <a:ext cx="10363835" cy="5020310"/>
           </a:xfrm>
           <a:prstGeom prst="rect">
             <a:avLst/>
@@ -8590,12 +10267,12 @@
           </a:ln>
         </p:spPr>
         <p:txBody>
-          <a:bodyPr spcFirstLastPara="1" wrap="square" lIns="91425" tIns="45700" rIns="91425" bIns="45700" anchor="t" anchorCtr="0">
-            <a:normAutofit/>
+          <a:bodyPr wrap="square" lIns="91440" tIns="45720" rIns="91440" bIns="45720" numCol="1" vert="horz" anchor="t">
+            <a:normAutofit fontScale="100000" lnSpcReduction="0"/>
           </a:bodyPr>
           <a:lstStyle/>
           <a:p>
-            <a:pPr marL="342900" lvl="0" indent="-342900" algn="l" rtl="0">
+            <a:pPr marL="342900" indent="-342900" rtl="0" algn="l">
               <a:lnSpc>
                 <a:spcPct val="120000"/>
               </a:lnSpc>
@@ -8605,17 +10282,17 @@
               <a:spcAft>
                 <a:spcPts val="0"/>
               </a:spcAft>
-              <a:buSzPts val="2200"/>
+              <a:buFont typeface="Arial"/>
               <a:buChar char="■"/>
             </a:pPr>
             <a:r>
               <a:rPr lang="en-US"/>
               <a:t>문단 태그</a:t>
             </a:r>
-            <a:endParaRPr/>
-          </a:p>
-          <a:p>
-            <a:pPr marL="742950" lvl="1" indent="-285750" algn="l" rtl="0">
+            <a:endParaRPr lang="ko-KR" altLang="en-US"/>
+          </a:p>
+          <a:p>
+            <a:pPr marL="742950" indent="-285750" rtl="0" algn="l" lvl="1">
               <a:lnSpc>
                 <a:spcPct val="120000"/>
               </a:lnSpc>
@@ -8625,17 +10302,17 @@
               <a:spcAft>
                 <a:spcPts val="0"/>
               </a:spcAft>
-              <a:buSzPts val="2000"/>
+              <a:buFont typeface="Arial"/>
               <a:buChar char="⬥"/>
             </a:pPr>
             <a:r>
               <a:rPr lang="en-US"/>
               <a:t>&lt;p&gt;문단&lt;/p&gt;</a:t>
             </a:r>
-            <a:endParaRPr/>
-          </a:p>
-          <a:p>
-            <a:pPr marL="1143000" lvl="2" indent="-228600" algn="l" rtl="0">
+            <a:endParaRPr lang="ko-KR" altLang="en-US"/>
+          </a:p>
+          <a:p>
+            <a:pPr marL="1143000" indent="-228600" rtl="0" algn="l" lvl="2">
               <a:lnSpc>
                 <a:spcPct val="120000"/>
               </a:lnSpc>
@@ -8645,17 +10322,17 @@
               <a:spcAft>
                 <a:spcPts val="0"/>
               </a:spcAft>
-              <a:buSzPts val="1800"/>
+              <a:buFont typeface="Arial"/>
               <a:buChar char="–"/>
             </a:pPr>
             <a:r>
               <a:rPr lang="en-US"/>
               <a:t>P는 paragraph의 약자</a:t>
             </a:r>
-            <a:endParaRPr/>
-          </a:p>
-          <a:p>
-            <a:pPr marL="1143000" lvl="2" indent="-228600" algn="l" rtl="0">
+            <a:endParaRPr lang="ko-KR" altLang="en-US"/>
+          </a:p>
+          <a:p>
+            <a:pPr marL="1143000" indent="-228600" rtl="0" algn="l" lvl="2">
               <a:lnSpc>
                 <a:spcPct val="120000"/>
               </a:lnSpc>
@@ -8665,17 +10342,17 @@
               <a:spcAft>
                 <a:spcPts val="0"/>
               </a:spcAft>
-              <a:buSzPts val="1800"/>
+              <a:buFont typeface="Arial"/>
               <a:buChar char="–"/>
             </a:pPr>
             <a:r>
               <a:rPr lang="en-US"/>
               <a:t>문단을 구분할 때 사용함</a:t>
             </a:r>
-            <a:endParaRPr/>
-          </a:p>
-          <a:p>
-            <a:pPr marL="1143000" lvl="2" indent="-228600" algn="l" rtl="0">
+            <a:endParaRPr lang="ko-KR" altLang="en-US"/>
+          </a:p>
+          <a:p>
+            <a:pPr marL="1143000" indent="-228600" rtl="0" algn="l" lvl="2">
               <a:lnSpc>
                 <a:spcPct val="120000"/>
               </a:lnSpc>
@@ -8685,17 +10362,17 @@
               <a:spcAft>
                 <a:spcPts val="0"/>
               </a:spcAft>
-              <a:buSzPts val="1800"/>
+              <a:buFont typeface="Arial"/>
               <a:buChar char="–"/>
             </a:pPr>
             <a:r>
               <a:rPr lang="en-US"/>
               <a:t>문단과 문단 사이에 공백라인이 들어감</a:t>
             </a:r>
-            <a:endParaRPr/>
-          </a:p>
-          <a:p>
-            <a:pPr marL="1143000" lvl="2" indent="-114300" algn="l" rtl="0">
+            <a:endParaRPr lang="ko-KR" altLang="en-US"/>
+          </a:p>
+          <a:p>
+            <a:pPr marL="1143000" indent="-114300" rtl="0" algn="l" lvl="2">
               <a:lnSpc>
                 <a:spcPct val="120000"/>
               </a:lnSpc>
@@ -8705,10 +10382,10 @@
               <a:spcAft>
                 <a:spcPts val="0"/>
               </a:spcAft>
-              <a:buSzPts val="1800"/>
-              <a:buNone/>
-            </a:pPr>
-            <a:endParaRPr/>
+              <a:buFontTx/>
+              <a:buNone/>
+            </a:pPr>
+            <a:endParaRPr lang="ko-KR" altLang="en-US"/>
           </a:p>
         </p:txBody>
       </p:sp>
@@ -8724,7 +10401,7 @@
         </p:nvSpPr>
         <p:spPr>
           <a:xfrm>
-            <a:off x="9482667" y="6419850"/>
+            <a:off x="9482455" y="6419850"/>
             <a:ext cx="2540000" cy="304800"/>
           </a:xfrm>
           <a:prstGeom prst="rect">
@@ -8773,8 +10450,8 @@
         </p:nvSpPr>
         <p:spPr>
           <a:xfrm>
-            <a:off x="1195918" y="6392863"/>
-            <a:ext cx="4146549" cy="349250"/>
+            <a:off x="1195705" y="6393180"/>
+            <a:ext cx="4146550" cy="349250"/>
           </a:xfrm>
           <a:prstGeom prst="rect">
             <a:avLst/>
@@ -8809,35 +10486,35 @@
       <p:sp>
         <p:nvSpPr>
           <p:cNvPr id="128" name="Google Shape;128;p10"/>
-          <p:cNvSpPr/>
+          <p:cNvSpPr>
+            <a:spLocks/>
+          </p:cNvSpPr>
           <p:nvPr/>
         </p:nvSpPr>
         <p:spPr>
-          <a:xfrm>
-            <a:off x="436075" y="3354690"/>
-            <a:ext cx="11480800" cy="2824684"/>
+          <a:xfrm rot="0">
+            <a:off x="484505" y="3306445"/>
+            <a:ext cx="11481435" cy="2825115"/>
           </a:xfrm>
-          <a:prstGeom prst="rect">
-            <a:avLst/>
-          </a:prstGeom>
+          <a:prstGeom prst="rect"/>
           <a:noFill/>
           <a:ln w="9525" cap="flat" cmpd="sng">
             <a:solidFill>
-              <a:schemeClr val="dk1"/>
+              <a:schemeClr val="dk1">
+                <a:alpha val="100000"/>
+              </a:schemeClr>
             </a:solidFill>
             <a:prstDash val="solid"/>
             <a:round/>
-            <a:headEnd type="none" w="sm" len="sm"/>
-            <a:tailEnd type="none" w="sm" len="sm"/>
           </a:ln>
         </p:spPr>
         <p:txBody>
-          <a:bodyPr spcFirstLastPara="1" wrap="square" lIns="91425" tIns="45700" rIns="91425" bIns="45700" anchor="t" anchorCtr="0">
+          <a:bodyPr wrap="square" lIns="91440" tIns="45720" rIns="91440" bIns="45720" numCol="1" vert="horz" anchor="t">
             <a:spAutoFit/>
           </a:bodyPr>
           <a:lstStyle/>
           <a:p>
-            <a:pPr marL="0" marR="0" lvl="0" indent="0" algn="l" rtl="0">
+            <a:pPr marL="0" indent="0" rtl="0" algn="l">
               <a:lnSpc>
                 <a:spcPct val="150000"/>
               </a:lnSpc>
@@ -8847,24 +10524,31 @@
               <a:spcAft>
                 <a:spcPts val="0"/>
               </a:spcAft>
-              <a:buNone/>
-            </a:pPr>
-            <a:r>
-              <a:rPr lang="en-US" sz="1200" dirty="0">
+              <a:buFontTx/>
+              <a:buNone/>
+            </a:pPr>
+            <a:r>
+              <a:rPr lang="en-US" sz="1200">
                 <a:solidFill>
                   <a:schemeClr val="dk1"/>
                 </a:solidFill>
-                <a:latin typeface="Tahoma"/>
-                <a:ea typeface="Tahoma"/>
-                <a:cs typeface="Tahoma"/>
-                <a:sym typeface="Tahoma"/>
+                <a:latin typeface="Tahoma" charset="0"/>
+                <a:ea typeface="Tahoma" charset="0"/>
+                <a:cs typeface="Tahoma" charset="0"/>
               </a:rPr>
               <a:t>&lt;!DOCTYPE html&gt;</a:t>
             </a:r>
-            <a:endParaRPr dirty="0"/>
-          </a:p>
-          <a:p>
-            <a:pPr marL="0" marR="0" lvl="0" indent="0" algn="l" rtl="0">
+            <a:endParaRPr lang="ko-KR" altLang="en-US" sz="1200">
+              <a:solidFill>
+                <a:schemeClr val="dk1"/>
+              </a:solidFill>
+              <a:latin typeface="Tahoma" charset="0"/>
+              <a:ea typeface="Tahoma" charset="0"/>
+              <a:cs typeface="Tahoma" charset="0"/>
+            </a:endParaRPr>
+          </a:p>
+          <a:p>
+            <a:pPr marL="0" indent="0" rtl="0" algn="l">
               <a:lnSpc>
                 <a:spcPct val="150000"/>
               </a:lnSpc>
@@ -8874,24 +10558,31 @@
               <a:spcAft>
                 <a:spcPts val="0"/>
               </a:spcAft>
-              <a:buNone/>
-            </a:pPr>
-            <a:r>
-              <a:rPr lang="en-US" sz="1200" b="1" dirty="0">
+              <a:buFontTx/>
+              <a:buNone/>
+            </a:pPr>
+            <a:r>
+              <a:rPr lang="en-US" sz="1200" b="1">
                 <a:solidFill>
                   <a:schemeClr val="dk1"/>
                 </a:solidFill>
-                <a:latin typeface="Tahoma"/>
-                <a:ea typeface="Tahoma"/>
-                <a:cs typeface="Tahoma"/>
-                <a:sym typeface="Tahoma"/>
+                <a:latin typeface="Tahoma" charset="0"/>
+                <a:ea typeface="Tahoma" charset="0"/>
+                <a:cs typeface="Tahoma" charset="0"/>
               </a:rPr>
               <a:t>&lt;html&gt;</a:t>
             </a:r>
-            <a:endParaRPr dirty="0"/>
-          </a:p>
-          <a:p>
-            <a:pPr marL="0" marR="0" lvl="0" indent="0" algn="l" rtl="0">
+            <a:endParaRPr lang="ko-KR" altLang="en-US" sz="1200" b="1">
+              <a:solidFill>
+                <a:schemeClr val="dk1"/>
+              </a:solidFill>
+              <a:latin typeface="Tahoma" charset="0"/>
+              <a:ea typeface="Tahoma" charset="0"/>
+              <a:cs typeface="Tahoma" charset="0"/>
+            </a:endParaRPr>
+          </a:p>
+          <a:p>
+            <a:pPr marL="0" indent="0" rtl="0" algn="l">
               <a:lnSpc>
                 <a:spcPct val="150000"/>
               </a:lnSpc>
@@ -8901,24 +10592,31 @@
               <a:spcAft>
                 <a:spcPts val="0"/>
               </a:spcAft>
-              <a:buNone/>
-            </a:pPr>
-            <a:r>
-              <a:rPr lang="en-US" sz="1200" dirty="0">
+              <a:buFontTx/>
+              <a:buNone/>
+            </a:pPr>
+            <a:r>
+              <a:rPr lang="en-US" sz="1200">
                 <a:solidFill>
                   <a:schemeClr val="dk1"/>
                 </a:solidFill>
-                <a:latin typeface="Tahoma"/>
-                <a:ea typeface="Tahoma"/>
-                <a:cs typeface="Tahoma"/>
-                <a:sym typeface="Tahoma"/>
+                <a:latin typeface="Tahoma" charset="0"/>
+                <a:ea typeface="Tahoma" charset="0"/>
+                <a:cs typeface="Tahoma" charset="0"/>
               </a:rPr>
               <a:t>    &lt;head&gt;</a:t>
             </a:r>
-            <a:endParaRPr dirty="0"/>
-          </a:p>
-          <a:p>
-            <a:pPr marL="0" marR="0" lvl="0" indent="0" algn="l" rtl="0">
+            <a:endParaRPr lang="ko-KR" altLang="en-US" sz="1200">
+              <a:solidFill>
+                <a:schemeClr val="dk1"/>
+              </a:solidFill>
+              <a:latin typeface="Tahoma" charset="0"/>
+              <a:ea typeface="Tahoma" charset="0"/>
+              <a:cs typeface="Tahoma" charset="0"/>
+            </a:endParaRPr>
+          </a:p>
+          <a:p>
+            <a:pPr marL="0" indent="0" rtl="0" algn="l">
               <a:lnSpc>
                 <a:spcPct val="150000"/>
               </a:lnSpc>
@@ -8928,96 +10626,166 @@
               <a:spcAft>
                 <a:spcPts val="0"/>
               </a:spcAft>
-              <a:buNone/>
-            </a:pPr>
-            <a:r>
-              <a:rPr lang="en-US" sz="1200" dirty="0">
+              <a:buFontTx/>
+              <a:buNone/>
+            </a:pPr>
+            <a:r>
+              <a:rPr lang="en-US" sz="1200">
                 <a:solidFill>
                   <a:schemeClr val="dk1"/>
                 </a:solidFill>
-                <a:latin typeface="Tahoma"/>
-                <a:ea typeface="Tahoma"/>
-                <a:cs typeface="Tahoma"/>
-                <a:sym typeface="Tahoma"/>
-              </a:rPr>
-              <a:t>        &lt;meta http-</a:t>
-            </a:r>
-            <a:r>
-              <a:rPr lang="en-US" sz="1200" dirty="0" err="1">
+                <a:latin typeface="Tahoma" charset="0"/>
+                <a:ea typeface="Tahoma" charset="0"/>
+                <a:cs typeface="Tahoma" charset="0"/>
+              </a:rPr>
+              <a:t>        &lt;meta http-equiv="Content-Type" content="text/html;charset=euc-kr" /&gt;</a:t>
+            </a:r>
+            <a:endParaRPr lang="ko-KR" altLang="en-US" sz="1200">
+              <a:solidFill>
+                <a:schemeClr val="dk1"/>
+              </a:solidFill>
+              <a:latin typeface="Tahoma" charset="0"/>
+              <a:ea typeface="Tahoma" charset="0"/>
+              <a:cs typeface="Tahoma" charset="0"/>
+            </a:endParaRPr>
+          </a:p>
+          <a:p>
+            <a:pPr marL="0" indent="0" rtl="0" algn="l">
+              <a:lnSpc>
+                <a:spcPct val="150000"/>
+              </a:lnSpc>
+              <a:spcBef>
+                <a:spcPts val="0"/>
+              </a:spcBef>
+              <a:spcAft>
+                <a:spcPts val="0"/>
+              </a:spcAft>
+              <a:buFontTx/>
+              <a:buNone/>
+            </a:pPr>
+            <a:r>
+              <a:rPr lang="en-US" sz="1200">
                 <a:solidFill>
                   <a:schemeClr val="dk1"/>
                 </a:solidFill>
-                <a:latin typeface="Tahoma"/>
-                <a:ea typeface="Tahoma"/>
-                <a:cs typeface="Tahoma"/>
-                <a:sym typeface="Tahoma"/>
-              </a:rPr>
-              <a:t>equiv</a:t>
-            </a:r>
-            <a:r>
-              <a:rPr lang="en-US" sz="1200" dirty="0">
+                <a:latin typeface="Tahoma" charset="0"/>
+                <a:ea typeface="Tahoma" charset="0"/>
+                <a:cs typeface="Tahoma" charset="0"/>
+              </a:rPr>
+              <a:t>    &lt;/head&gt;</a:t>
+            </a:r>
+            <a:endParaRPr lang="ko-KR" altLang="en-US" sz="1200">
+              <a:solidFill>
+                <a:schemeClr val="dk1"/>
+              </a:solidFill>
+              <a:latin typeface="Tahoma" charset="0"/>
+              <a:ea typeface="Tahoma" charset="0"/>
+              <a:cs typeface="Tahoma" charset="0"/>
+            </a:endParaRPr>
+          </a:p>
+          <a:p>
+            <a:pPr marL="0" indent="0" rtl="0" algn="l">
+              <a:lnSpc>
+                <a:spcPct val="150000"/>
+              </a:lnSpc>
+              <a:spcBef>
+                <a:spcPts val="0"/>
+              </a:spcBef>
+              <a:spcAft>
+                <a:spcPts val="0"/>
+              </a:spcAft>
+              <a:buFontTx/>
+              <a:buNone/>
+            </a:pPr>
+            <a:r>
+              <a:rPr lang="en-US" sz="1200">
                 <a:solidFill>
                   <a:schemeClr val="dk1"/>
                 </a:solidFill>
-                <a:latin typeface="Tahoma"/>
-                <a:ea typeface="Tahoma"/>
-                <a:cs typeface="Tahoma"/>
-                <a:sym typeface="Tahoma"/>
-              </a:rPr>
-              <a:t>="Content-Type" content="text/</a:t>
-            </a:r>
-            <a:r>
-              <a:rPr lang="en-US" sz="1200" dirty="0" err="1">
+                <a:latin typeface="Tahoma" charset="0"/>
+                <a:ea typeface="Tahoma" charset="0"/>
+                <a:cs typeface="Tahoma" charset="0"/>
+              </a:rPr>
+              <a:t>    &lt;body&gt;</a:t>
+            </a:r>
+            <a:endParaRPr lang="ko-KR" altLang="en-US" sz="1200">
+              <a:solidFill>
+                <a:schemeClr val="dk1"/>
+              </a:solidFill>
+              <a:latin typeface="Tahoma" charset="0"/>
+              <a:ea typeface="Tahoma" charset="0"/>
+              <a:cs typeface="Tahoma" charset="0"/>
+            </a:endParaRPr>
+          </a:p>
+          <a:p>
+            <a:pPr marL="0" indent="0" rtl="0" algn="l">
+              <a:lnSpc>
+                <a:spcPct val="150000"/>
+              </a:lnSpc>
+              <a:spcBef>
+                <a:spcPts val="0"/>
+              </a:spcBef>
+              <a:spcAft>
+                <a:spcPts val="0"/>
+              </a:spcAft>
+              <a:buFontTx/>
+              <a:buNone/>
+            </a:pPr>
+            <a:r>
+              <a:rPr lang="en-US" sz="1200">
                 <a:solidFill>
                   <a:schemeClr val="dk1"/>
                 </a:solidFill>
-                <a:latin typeface="Tahoma"/>
-                <a:ea typeface="Tahoma"/>
-                <a:cs typeface="Tahoma"/>
-                <a:sym typeface="Tahoma"/>
-              </a:rPr>
-              <a:t>html;charset</a:t>
-            </a:r>
-            <a:r>
-              <a:rPr lang="en-US" sz="1200" dirty="0">
+                <a:latin typeface="Tahoma" charset="0"/>
+                <a:ea typeface="Tahoma" charset="0"/>
+                <a:cs typeface="Tahoma" charset="0"/>
+              </a:rPr>
+              <a:t>	</a:t>
+            </a:r>
+            <a:r>
+              <a:rPr lang="en-US" sz="1200" b="1">
                 <a:solidFill>
                   <a:schemeClr val="dk1"/>
                 </a:solidFill>
-                <a:latin typeface="Tahoma"/>
-                <a:ea typeface="Tahoma"/>
-                <a:cs typeface="Tahoma"/>
-                <a:sym typeface="Tahoma"/>
-              </a:rPr>
-              <a:t>=</a:t>
-            </a:r>
-            <a:r>
-              <a:rPr lang="en-US" sz="1200" dirty="0" err="1">
+                <a:latin typeface="Tahoma" charset="0"/>
+                <a:ea typeface="Tahoma" charset="0"/>
+                <a:cs typeface="Tahoma" charset="0"/>
+              </a:rPr>
+              <a:t>&lt;p&gt;</a:t>
+            </a:r>
+            <a:r>
+              <a:rPr lang="en-US" sz="1200">
                 <a:solidFill>
                   <a:schemeClr val="dk1"/>
                 </a:solidFill>
-                <a:latin typeface="Tahoma"/>
-                <a:ea typeface="Tahoma"/>
-                <a:cs typeface="Tahoma"/>
-                <a:sym typeface="Tahoma"/>
-              </a:rPr>
-              <a:t>euc-kr</a:t>
-            </a:r>
-            <a:r>
-              <a:rPr lang="en-US" sz="1200" dirty="0">
+                <a:latin typeface="Tahoma" charset="0"/>
+                <a:ea typeface="Tahoma" charset="0"/>
+                <a:cs typeface="Tahoma" charset="0"/>
+              </a:rPr>
+              <a:t>안녕하세요. 저는 금오공과대학교 학생입니다.</a:t>
+            </a:r>
+            <a:r>
+              <a:rPr lang="en-US" sz="1200" b="1">
                 <a:solidFill>
                   <a:schemeClr val="dk1"/>
                 </a:solidFill>
-                <a:latin typeface="Tahoma"/>
-                <a:ea typeface="Tahoma"/>
-                <a:cs typeface="Tahoma"/>
-                <a:sym typeface="Tahoma"/>
-              </a:rPr>
-              <a:t>" /&gt;</a:t>
-            </a:r>
-            <a:endParaRPr dirty="0"/>
-          </a:p>
-          <a:p>
-            <a:pPr marL="0" marR="0" lvl="0" indent="0" algn="l" rtl="0">
+                <a:latin typeface="Tahoma" charset="0"/>
+                <a:ea typeface="Tahoma" charset="0"/>
+                <a:cs typeface="Tahoma" charset="0"/>
+              </a:rPr>
+              <a:t>&lt;/p&gt;</a:t>
+            </a:r>
+            <a:endParaRPr lang="ko-KR" altLang="en-US" sz="1200" b="1">
+              <a:solidFill>
+                <a:schemeClr val="dk1"/>
+              </a:solidFill>
+              <a:latin typeface="Tahoma" charset="0"/>
+              <a:ea typeface="Tahoma" charset="0"/>
+              <a:cs typeface="Tahoma" charset="0"/>
+            </a:endParaRPr>
+          </a:p>
+          <a:p>
+            <a:pPr marL="0" indent="0" rtl="0" algn="l">
               <a:lnSpc>
                 <a:spcPct val="150000"/>
               </a:lnSpc>
@@ -9027,59 +10795,64 @@
               <a:spcAft>
                 <a:spcPts val="0"/>
               </a:spcAft>
-              <a:buNone/>
-            </a:pPr>
-            <a:r>
-              <a:rPr lang="en-US" sz="1200" dirty="0">
+              <a:buFontTx/>
+              <a:buNone/>
+            </a:pPr>
+            <a:r>
+              <a:rPr lang="en-US" sz="1200">
                 <a:solidFill>
                   <a:schemeClr val="dk1"/>
                 </a:solidFill>
-                <a:latin typeface="Tahoma"/>
-                <a:ea typeface="Tahoma"/>
-                <a:cs typeface="Tahoma"/>
-                <a:sym typeface="Tahoma"/>
-              </a:rPr>
-              <a:t>    &lt;/head&gt;</a:t>
-            </a:r>
-            <a:endParaRPr dirty="0"/>
-          </a:p>
-          <a:p>
-            <a:pPr marL="0" marR="0" lvl="0" indent="0" algn="l" rtl="0">
-              <a:lnSpc>
-                <a:spcPct val="150000"/>
-              </a:lnSpc>
-              <a:spcBef>
-                <a:spcPts val="0"/>
-              </a:spcBef>
-              <a:spcAft>
-                <a:spcPts val="0"/>
-              </a:spcAft>
-              <a:buNone/>
-            </a:pPr>
-            <a:r>
-              <a:rPr lang="en-US" sz="1200" dirty="0">
+                <a:latin typeface="Tahoma" charset="0"/>
+                <a:ea typeface="Tahoma" charset="0"/>
+                <a:cs typeface="Tahoma" charset="0"/>
+              </a:rPr>
+              <a:t>	</a:t>
+            </a:r>
+            <a:r>
+              <a:rPr lang="en-US" sz="1200" b="1">
                 <a:solidFill>
                   <a:schemeClr val="dk1"/>
                 </a:solidFill>
-                <a:latin typeface="Tahoma"/>
-                <a:ea typeface="Tahoma"/>
-                <a:cs typeface="Tahoma"/>
-                <a:sym typeface="Tahoma"/>
-              </a:rPr>
-              <a:t>    &lt;body&gt;</a:t>
-            </a:r>
-            <a:endParaRPr sz="1200" dirty="0">
+                <a:latin typeface="Tahoma" charset="0"/>
+                <a:ea typeface="Tahoma" charset="0"/>
+                <a:cs typeface="Tahoma" charset="0"/>
+              </a:rPr>
+              <a:t>&lt;p&gt;</a:t>
+            </a:r>
+            <a:r>
+              <a:rPr lang="en-US" sz="1200">
+                <a:solidFill>
+                  <a:schemeClr val="dk1"/>
+                </a:solidFill>
+                <a:latin typeface="Tahoma" charset="0"/>
+                <a:ea typeface="Tahoma" charset="0"/>
+                <a:cs typeface="Tahoma" charset="0"/>
+              </a:rPr>
+              <a:t>학번은 000000 이고 이름은 000 입니다.</a:t>
+            </a:r>
+            <a:r>
+              <a:rPr lang="en-US" sz="1200" b="1">
+                <a:solidFill>
+                  <a:schemeClr val="dk1"/>
+                </a:solidFill>
+                <a:latin typeface="Tahoma" charset="0"/>
+                <a:ea typeface="Tahoma" charset="0"/>
+                <a:cs typeface="Tahoma" charset="0"/>
+              </a:rPr>
+              <a:t>&lt;/p&gt;</a:t>
+            </a:r>
+            <a:endParaRPr lang="ko-KR" altLang="en-US" sz="1200" b="1">
               <a:solidFill>
                 <a:schemeClr val="dk1"/>
               </a:solidFill>
-              <a:latin typeface="Tahoma"/>
-              <a:ea typeface="Tahoma"/>
-              <a:cs typeface="Tahoma"/>
-              <a:sym typeface="Tahoma"/>
+              <a:latin typeface="Tahoma" charset="0"/>
+              <a:ea typeface="Tahoma" charset="0"/>
+              <a:cs typeface="Tahoma" charset="0"/>
             </a:endParaRPr>
           </a:p>
           <a:p>
-            <a:pPr marL="0" marR="0" lvl="0" indent="0" algn="l" rtl="0">
+            <a:pPr marL="0" indent="0" rtl="0" algn="l">
               <a:lnSpc>
                 <a:spcPct val="150000"/>
               </a:lnSpc>
@@ -9089,338 +10862,336 @@
               <a:spcAft>
                 <a:spcPts val="0"/>
               </a:spcAft>
-              <a:buNone/>
-            </a:pPr>
-            <a:r>
-              <a:rPr lang="en-US" sz="1200" dirty="0">
+              <a:buFontTx/>
+              <a:buNone/>
+            </a:pPr>
+            <a:r>
+              <a:rPr lang="en-US" sz="1200">
                 <a:solidFill>
                   <a:schemeClr val="dk1"/>
                 </a:solidFill>
-                <a:latin typeface="Tahoma"/>
-                <a:ea typeface="Tahoma"/>
-                <a:cs typeface="Tahoma"/>
-                <a:sym typeface="Tahoma"/>
-              </a:rPr>
-              <a:t>	</a:t>
-            </a:r>
-            <a:r>
-              <a:rPr lang="en-US" sz="1200" b="1" dirty="0">
+                <a:latin typeface="Tahoma" charset="0"/>
+                <a:ea typeface="Tahoma" charset="0"/>
+                <a:cs typeface="Tahoma" charset="0"/>
+              </a:rPr>
+              <a:t>    &lt;/body&gt;</a:t>
+            </a:r>
+            <a:endParaRPr lang="ko-KR" altLang="en-US" sz="1200">
+              <a:solidFill>
+                <a:schemeClr val="dk1"/>
+              </a:solidFill>
+              <a:latin typeface="Tahoma" charset="0"/>
+              <a:ea typeface="Tahoma" charset="0"/>
+              <a:cs typeface="Tahoma" charset="0"/>
+            </a:endParaRPr>
+          </a:p>
+          <a:p>
+            <a:pPr marL="0" indent="0" rtl="0" algn="l">
+              <a:lnSpc>
+                <a:spcPct val="150000"/>
+              </a:lnSpc>
+              <a:spcBef>
+                <a:spcPts val="0"/>
+              </a:spcBef>
+              <a:spcAft>
+                <a:spcPts val="0"/>
+              </a:spcAft>
+              <a:buFontTx/>
+              <a:buNone/>
+            </a:pPr>
+            <a:r>
+              <a:rPr lang="en-US" sz="1200" b="1">
                 <a:solidFill>
                   <a:schemeClr val="dk1"/>
                 </a:solidFill>
-                <a:latin typeface="Tahoma"/>
-                <a:ea typeface="Tahoma"/>
-                <a:cs typeface="Tahoma"/>
-                <a:sym typeface="Tahoma"/>
-              </a:rPr>
-              <a:t>&lt;p&gt;</a:t>
-            </a:r>
-            <a:r>
-              <a:rPr lang="en-US" sz="1200" dirty="0">
-                <a:solidFill>
-                  <a:schemeClr val="dk1"/>
-                </a:solidFill>
-                <a:latin typeface="Tahoma"/>
-                <a:ea typeface="Tahoma"/>
-                <a:cs typeface="Tahoma"/>
-                <a:sym typeface="Tahoma"/>
-              </a:rPr>
-              <a:t>안녕하세요. </a:t>
-            </a:r>
-            <a:r>
-              <a:rPr lang="en-US" sz="1200" dirty="0" err="1">
-                <a:solidFill>
-                  <a:schemeClr val="dk1"/>
-                </a:solidFill>
-                <a:latin typeface="Tahoma"/>
-                <a:ea typeface="Tahoma"/>
-                <a:cs typeface="Tahoma"/>
-                <a:sym typeface="Tahoma"/>
-              </a:rPr>
-              <a:t>저는</a:t>
-            </a:r>
-            <a:r>
-              <a:rPr lang="en-US" sz="1200" dirty="0">
-                <a:solidFill>
-                  <a:schemeClr val="dk1"/>
-                </a:solidFill>
-                <a:latin typeface="Tahoma"/>
-                <a:ea typeface="Tahoma"/>
-                <a:cs typeface="Tahoma"/>
-                <a:sym typeface="Tahoma"/>
-              </a:rPr>
-              <a:t> </a:t>
-            </a:r>
-            <a:r>
-              <a:rPr lang="en-US" sz="1200" dirty="0" err="1">
-                <a:solidFill>
-                  <a:schemeClr val="dk1"/>
-                </a:solidFill>
-                <a:latin typeface="Tahoma"/>
-                <a:ea typeface="Tahoma"/>
-                <a:cs typeface="Tahoma"/>
-                <a:sym typeface="Tahoma"/>
-              </a:rPr>
-              <a:t>금오공과대학교</a:t>
-            </a:r>
-            <a:r>
-              <a:rPr lang="en-US" sz="1200" dirty="0">
-                <a:solidFill>
-                  <a:schemeClr val="dk1"/>
-                </a:solidFill>
-                <a:latin typeface="Tahoma"/>
-                <a:ea typeface="Tahoma"/>
-                <a:cs typeface="Tahoma"/>
-                <a:sym typeface="Tahoma"/>
-              </a:rPr>
-              <a:t> </a:t>
-            </a:r>
-            <a:r>
-              <a:rPr lang="en-US" sz="1200" dirty="0" err="1">
-                <a:solidFill>
-                  <a:schemeClr val="dk1"/>
-                </a:solidFill>
-                <a:latin typeface="Tahoma"/>
-                <a:ea typeface="Tahoma"/>
-                <a:cs typeface="Tahoma"/>
-                <a:sym typeface="Tahoma"/>
-              </a:rPr>
-              <a:t>학생입니다</a:t>
-            </a:r>
-            <a:r>
-              <a:rPr lang="en-US" sz="1200" dirty="0">
-                <a:solidFill>
-                  <a:schemeClr val="dk1"/>
-                </a:solidFill>
-                <a:latin typeface="Tahoma"/>
-                <a:ea typeface="Tahoma"/>
-                <a:cs typeface="Tahoma"/>
-                <a:sym typeface="Tahoma"/>
-              </a:rPr>
-              <a:t>.</a:t>
-            </a:r>
-            <a:r>
-              <a:rPr lang="en-US" sz="1200" b="1" dirty="0">
-                <a:solidFill>
-                  <a:schemeClr val="dk1"/>
-                </a:solidFill>
-                <a:latin typeface="Tahoma"/>
-                <a:ea typeface="Tahoma"/>
-                <a:cs typeface="Tahoma"/>
-                <a:sym typeface="Tahoma"/>
-              </a:rPr>
-              <a:t>&lt;/p&gt;</a:t>
-            </a:r>
-            <a:endParaRPr dirty="0"/>
-          </a:p>
-          <a:p>
-            <a:pPr marL="0" marR="0" lvl="0" indent="0" algn="l" rtl="0">
-              <a:lnSpc>
-                <a:spcPct val="150000"/>
-              </a:lnSpc>
-              <a:spcBef>
-                <a:spcPts val="0"/>
-              </a:spcBef>
-              <a:spcAft>
-                <a:spcPts val="0"/>
-              </a:spcAft>
-              <a:buNone/>
-            </a:pPr>
-            <a:r>
-              <a:rPr lang="en-US" sz="1200" dirty="0">
-                <a:solidFill>
-                  <a:schemeClr val="dk1"/>
-                </a:solidFill>
-                <a:latin typeface="Tahoma"/>
-                <a:ea typeface="Tahoma"/>
-                <a:cs typeface="Tahoma"/>
-                <a:sym typeface="Tahoma"/>
-              </a:rPr>
-              <a:t>	</a:t>
-            </a:r>
-            <a:r>
-              <a:rPr lang="en-US" sz="1200" b="1" dirty="0">
-                <a:solidFill>
-                  <a:schemeClr val="dk1"/>
-                </a:solidFill>
-                <a:latin typeface="Tahoma"/>
-                <a:ea typeface="Tahoma"/>
-                <a:cs typeface="Tahoma"/>
-                <a:sym typeface="Tahoma"/>
-              </a:rPr>
-              <a:t>&lt;p&gt;</a:t>
-            </a:r>
-            <a:r>
-              <a:rPr lang="en-US" sz="1200" dirty="0" err="1">
-                <a:solidFill>
-                  <a:schemeClr val="dk1"/>
-                </a:solidFill>
-                <a:latin typeface="Tahoma"/>
-                <a:ea typeface="Tahoma"/>
-                <a:cs typeface="Tahoma"/>
-                <a:sym typeface="Tahoma"/>
-              </a:rPr>
-              <a:t>학번은</a:t>
-            </a:r>
-            <a:r>
-              <a:rPr lang="en-US" sz="1200" dirty="0">
-                <a:solidFill>
-                  <a:schemeClr val="dk1"/>
-                </a:solidFill>
-                <a:latin typeface="Tahoma"/>
-                <a:ea typeface="Tahoma"/>
-                <a:cs typeface="Tahoma"/>
-                <a:sym typeface="Tahoma"/>
-              </a:rPr>
-              <a:t> 000000 </a:t>
-            </a:r>
-            <a:r>
-              <a:rPr lang="en-US" sz="1200" dirty="0" err="1">
-                <a:solidFill>
-                  <a:schemeClr val="dk1"/>
-                </a:solidFill>
-                <a:latin typeface="Tahoma"/>
-                <a:ea typeface="Tahoma"/>
-                <a:cs typeface="Tahoma"/>
-                <a:sym typeface="Tahoma"/>
-              </a:rPr>
-              <a:t>이고</a:t>
-            </a:r>
-            <a:r>
-              <a:rPr lang="en-US" sz="1200" dirty="0">
-                <a:solidFill>
-                  <a:schemeClr val="dk1"/>
-                </a:solidFill>
-                <a:latin typeface="Tahoma"/>
-                <a:ea typeface="Tahoma"/>
-                <a:cs typeface="Tahoma"/>
-                <a:sym typeface="Tahoma"/>
-              </a:rPr>
-              <a:t> </a:t>
-            </a:r>
-            <a:r>
-              <a:rPr lang="en-US" sz="1200" dirty="0" err="1">
-                <a:solidFill>
-                  <a:schemeClr val="dk1"/>
-                </a:solidFill>
-                <a:latin typeface="Tahoma"/>
-                <a:ea typeface="Tahoma"/>
-                <a:cs typeface="Tahoma"/>
-                <a:sym typeface="Tahoma"/>
-              </a:rPr>
-              <a:t>이름은</a:t>
-            </a:r>
-            <a:r>
-              <a:rPr lang="en-US" sz="1200" dirty="0">
-                <a:solidFill>
-                  <a:schemeClr val="dk1"/>
-                </a:solidFill>
-                <a:latin typeface="Tahoma"/>
-                <a:ea typeface="Tahoma"/>
-                <a:cs typeface="Tahoma"/>
-                <a:sym typeface="Tahoma"/>
-              </a:rPr>
-              <a:t> 000 </a:t>
-            </a:r>
-            <a:r>
-              <a:rPr lang="en-US" sz="1200" dirty="0" err="1">
-                <a:solidFill>
-                  <a:schemeClr val="dk1"/>
-                </a:solidFill>
-                <a:latin typeface="Tahoma"/>
-                <a:ea typeface="Tahoma"/>
-                <a:cs typeface="Tahoma"/>
-                <a:sym typeface="Tahoma"/>
-              </a:rPr>
-              <a:t>입니다</a:t>
-            </a:r>
-            <a:r>
-              <a:rPr lang="en-US" sz="1200" dirty="0">
-                <a:solidFill>
-                  <a:schemeClr val="dk1"/>
-                </a:solidFill>
-                <a:latin typeface="Tahoma"/>
-                <a:ea typeface="Tahoma"/>
-                <a:cs typeface="Tahoma"/>
-                <a:sym typeface="Tahoma"/>
-              </a:rPr>
-              <a:t>.</a:t>
-            </a:r>
-            <a:r>
-              <a:rPr lang="en-US" sz="1200" b="1" dirty="0">
-                <a:solidFill>
-                  <a:schemeClr val="dk1"/>
-                </a:solidFill>
-                <a:latin typeface="Tahoma"/>
-                <a:ea typeface="Tahoma"/>
-                <a:cs typeface="Tahoma"/>
-                <a:sym typeface="Tahoma"/>
-              </a:rPr>
-              <a:t>&lt;/p&gt;</a:t>
-            </a:r>
-            <a:endParaRPr sz="1200" b="1" dirty="0">
+                <a:latin typeface="Tahoma" charset="0"/>
+                <a:ea typeface="Tahoma" charset="0"/>
+                <a:cs typeface="Tahoma" charset="0"/>
+              </a:rPr>
+              <a:t>&lt;/html&gt;</a:t>
+            </a:r>
+            <a:endParaRPr lang="ko-KR" altLang="en-US" sz="1200" b="1">
               <a:solidFill>
                 <a:schemeClr val="dk1"/>
               </a:solidFill>
-              <a:latin typeface="Tahoma"/>
-              <a:ea typeface="Tahoma"/>
-              <a:cs typeface="Tahoma"/>
-              <a:sym typeface="Tahoma"/>
+              <a:latin typeface="Tahoma" charset="0"/>
+              <a:ea typeface="Tahoma" charset="0"/>
+              <a:cs typeface="Tahoma" charset="0"/>
             </a:endParaRPr>
           </a:p>
-          <a:p>
-            <a:pPr marL="0" marR="0" lvl="0" indent="0" algn="l" rtl="0">
-              <a:lnSpc>
-                <a:spcPct val="150000"/>
-              </a:lnSpc>
-              <a:spcBef>
-                <a:spcPts val="0"/>
-              </a:spcBef>
-              <a:spcAft>
-                <a:spcPts val="0"/>
-              </a:spcAft>
-              <a:buNone/>
-            </a:pPr>
-            <a:r>
-              <a:rPr lang="en-US" sz="1200" dirty="0">
-                <a:solidFill>
-                  <a:schemeClr val="dk1"/>
-                </a:solidFill>
-                <a:latin typeface="Tahoma"/>
-                <a:ea typeface="Tahoma"/>
-                <a:cs typeface="Tahoma"/>
-                <a:sym typeface="Tahoma"/>
-              </a:rPr>
-              <a:t>    &lt;/body&gt;</a:t>
-            </a:r>
-            <a:endParaRPr dirty="0"/>
-          </a:p>
-          <a:p>
-            <a:pPr marL="0" marR="0" lvl="0" indent="0" algn="l" rtl="0">
-              <a:lnSpc>
-                <a:spcPct val="150000"/>
-              </a:lnSpc>
-              <a:spcBef>
-                <a:spcPts val="0"/>
-              </a:spcBef>
-              <a:spcAft>
-                <a:spcPts val="0"/>
-              </a:spcAft>
-              <a:buNone/>
-            </a:pPr>
-            <a:r>
-              <a:rPr lang="en-US" sz="1200" b="1" dirty="0">
-                <a:solidFill>
-                  <a:schemeClr val="dk1"/>
-                </a:solidFill>
-                <a:latin typeface="Tahoma"/>
-                <a:ea typeface="Tahoma"/>
-                <a:cs typeface="Tahoma"/>
-                <a:sym typeface="Tahoma"/>
-              </a:rPr>
-              <a:t>&lt;/html&gt;</a:t>
-            </a:r>
-            <a:endParaRPr dirty="0"/>
+        </p:txBody>
+      </p:sp>
+      <p:sp>
+        <p:nvSpPr>
+          <p:cNvPr id="129" name="텍스트 상자 24"/>
+          <p:cNvSpPr txBox="1">
+            <a:spLocks/>
+          </p:cNvSpPr>
+          <p:nvPr/>
+        </p:nvSpPr>
+        <p:spPr>
+          <a:xfrm rot="0">
+            <a:off x="5993130" y="4203700"/>
+            <a:ext cx="1791335" cy="262255"/>
+          </a:xfrm>
+          <a:prstGeom prst="rect"/>
+          <a:noFill/>
+          <a:ln>
+            <a:noFill/>
+            <a:prstDash/>
+          </a:ln>
+        </p:spPr>
+        <p:txBody>
+          <a:bodyPr wrap="none" lIns="89535" tIns="46355" rIns="89535" bIns="46355" vert="horz" anchor="t">
+            <a:spAutoFit/>
+          </a:bodyPr>
+          <a:lstStyle/>
+          <a:p>
+            <a:pPr marL="0" indent="0" algn="l" hangingPunct="1"/>
+            <a:r>
+              <a:rPr lang="ko-KR" sz="1100">
+                <a:latin typeface="맑은 고딕" charset="0"/>
+                <a:ea typeface="맑은 고딕" charset="0"/>
+              </a:rPr>
+              <a:t>U</a:t>
+            </a:r>
+            <a:r>
+              <a:rPr lang="ko-KR" sz="1100">
+                <a:latin typeface="맑은 고딕" charset="0"/>
+                <a:ea typeface="맑은 고딕" charset="0"/>
+              </a:rPr>
+              <a:t>TF-8</a:t>
+            </a:r>
+            <a:r>
+              <a:rPr lang="ko-KR" sz="1100">
+                <a:latin typeface="맑은 고딕" charset="0"/>
+                <a:ea typeface="맑은 고딕" charset="0"/>
+              </a:rPr>
+              <a:t>도 </a:t>
+            </a:r>
+            <a:r>
+              <a:rPr lang="ko-KR" sz="1100">
+                <a:latin typeface="맑은 고딕" charset="0"/>
+                <a:ea typeface="맑은 고딕" charset="0"/>
+              </a:rPr>
+              <a:t>되겠지</a:t>
+            </a:r>
+            <a:endParaRPr lang="ko-KR" altLang="en-US" sz="1100">
+              <a:latin typeface="맑은 고딕" charset="0"/>
+              <a:ea typeface="맑은 고딕" charset="0"/>
+            </a:endParaRPr>
+          </a:p>
+        </p:txBody>
+      </p:sp>
+      <p:sp>
+        <p:nvSpPr>
+          <p:cNvPr id="130" name="텍스트 상자 25"/>
+          <p:cNvSpPr txBox="1">
+            <a:spLocks/>
+          </p:cNvSpPr>
+          <p:nvPr/>
+        </p:nvSpPr>
+        <p:spPr>
+          <a:xfrm rot="0">
+            <a:off x="4965700" y="5358765"/>
+            <a:ext cx="5457825" cy="262255"/>
+          </a:xfrm>
+          <a:prstGeom prst="rect"/>
+          <a:noFill/>
+          <a:ln>
+            <a:noFill/>
+            <a:prstDash/>
+          </a:ln>
+        </p:spPr>
+        <p:txBody>
+          <a:bodyPr wrap="none" lIns="89535" tIns="46355" rIns="89535" bIns="46355" vert="horz" anchor="t">
+            <a:spAutoFit/>
+          </a:bodyPr>
+          <a:lstStyle/>
+          <a:p>
+            <a:pPr marL="0" indent="0" algn="l" hangingPunct="1"/>
+            <a:r>
+              <a:rPr lang="ko-KR" sz="1100" cap="none" i="0" b="0" strike="noStrike">
+                <a:latin typeface="맑은 고딕" charset="0"/>
+                <a:ea typeface="맑은 고딕" charset="0"/>
+                <a:cs typeface="Arial" charset="0"/>
+              </a:rPr>
+              <a:t>p</a:t>
+            </a:r>
+            <a:r>
+              <a:rPr lang="ko-KR" sz="1100" cap="none" i="0" b="0" strike="noStrike">
+                <a:latin typeface="맑은 고딕" charset="0"/>
+                <a:ea typeface="맑은 고딕" charset="0"/>
+                <a:cs typeface="Arial" charset="0"/>
+              </a:rPr>
+              <a:t>태그 </a:t>
+            </a:r>
+            <a:r>
+              <a:rPr lang="ko-KR" sz="1100" cap="none" i="0" b="0" strike="noStrike">
+                <a:latin typeface="맑은 고딕" charset="0"/>
+                <a:ea typeface="맑은 고딕" charset="0"/>
+                <a:cs typeface="Arial" charset="0"/>
+              </a:rPr>
+              <a:t>안쓰면 </a:t>
+            </a:r>
+            <a:r>
+              <a:rPr lang="ko-KR" sz="1100" cap="none" i="0" b="0" strike="noStrike">
+                <a:latin typeface="맑은 고딕" charset="0"/>
+                <a:ea typeface="맑은 고딕" charset="0"/>
+                <a:cs typeface="Arial" charset="0"/>
+              </a:rPr>
+              <a:t>한줄로 다 이어짐 -&gt; 정리가 안되어있음</a:t>
+            </a:r>
+            <a:r>
+              <a:rPr lang="ko-KR" sz="1100" cap="none" i="0" b="0" strike="noStrike">
+                <a:latin typeface="맑은 고딕" charset="0"/>
+                <a:ea typeface="맑은 고딕" charset="0"/>
+                <a:cs typeface="Arial" charset="0"/>
+              </a:rPr>
+              <a:t> </a:t>
+            </a:r>
+            <a:r>
+              <a:rPr lang="ko-KR" sz="1100" cap="none" i="0" b="0" strike="noStrike">
+                <a:latin typeface="맑은 고딕" charset="0"/>
+                <a:ea typeface="맑은 고딕" charset="0"/>
+                <a:cs typeface="Arial" charset="0"/>
+              </a:rPr>
+              <a:t> -&gt; </a:t>
+            </a:r>
+            <a:r>
+              <a:rPr lang="ko-KR" sz="1100" cap="none" i="0" b="0" strike="noStrike">
+                <a:latin typeface="맑은 고딕" charset="0"/>
+                <a:ea typeface="맑은 고딕" charset="0"/>
+                <a:cs typeface="Arial" charset="0"/>
+              </a:rPr>
+              <a:t>쓰면 </a:t>
+            </a:r>
+            <a:r>
+              <a:rPr lang="ko-KR" sz="1100" cap="none" i="0" b="0" strike="noStrike">
+                <a:latin typeface="맑은 고딕" charset="0"/>
+                <a:ea typeface="맑은 고딕" charset="0"/>
+                <a:cs typeface="Arial" charset="0"/>
+              </a:rPr>
+              <a:t>뒷 </a:t>
+            </a:r>
+            <a:r>
+              <a:rPr lang="ko-KR" sz="1100" cap="none" i="0" b="0" strike="noStrike">
+                <a:latin typeface="맑은 고딕" charset="0"/>
+                <a:ea typeface="맑은 고딕" charset="0"/>
+                <a:cs typeface="Arial" charset="0"/>
+              </a:rPr>
+              <a:t>코드 </a:t>
+            </a:r>
+            <a:r>
+              <a:rPr lang="ko-KR" sz="1100" cap="none" i="0" b="0" strike="noStrike">
+                <a:latin typeface="맑은 고딕" charset="0"/>
+                <a:ea typeface="맑은 고딕" charset="0"/>
+                <a:cs typeface="Arial" charset="0"/>
+              </a:rPr>
+              <a:t>한줄 띄워</a:t>
+            </a:r>
+            <a:r>
+              <a:rPr lang="ko-KR" sz="1100" cap="none" i="0" b="0" strike="noStrike">
+                <a:latin typeface="맑은 고딕" charset="0"/>
+                <a:ea typeface="맑은 고딕" charset="0"/>
+                <a:cs typeface="Arial" charset="0"/>
+              </a:rPr>
+              <a:t>짐</a:t>
+            </a:r>
+            <a:endParaRPr lang="ko-KR" altLang="en-US" sz="1100">
+              <a:latin typeface="맑은 고딕" charset="0"/>
+              <a:ea typeface="맑은 고딕" charset="0"/>
+            </a:endParaRPr>
+          </a:p>
+        </p:txBody>
+      </p:sp>
+      <p:sp>
+        <p:nvSpPr>
+          <p:cNvPr id="131" name="텍스트 상자 27"/>
+          <p:cNvSpPr txBox="1">
+            <a:spLocks/>
+          </p:cNvSpPr>
+          <p:nvPr/>
+        </p:nvSpPr>
+        <p:spPr>
+          <a:xfrm rot="0">
+            <a:off x="5109845" y="5623560"/>
+            <a:ext cx="4479290" cy="278130"/>
+          </a:xfrm>
+          <a:prstGeom prst="rect"/>
+          <a:noFill/>
+          <a:ln>
+            <a:noFill/>
+            <a:prstDash/>
+          </a:ln>
+        </p:spPr>
+        <p:txBody>
+          <a:bodyPr wrap="none" lIns="89535" tIns="46355" rIns="89535" bIns="46355" vert="horz" anchor="t">
+            <a:spAutoFit/>
+          </a:bodyPr>
+          <a:lstStyle/>
+          <a:p>
+            <a:pPr marL="0" indent="0" algn="l" hangingPunct="1"/>
+            <a:r>
+              <a:rPr lang="ko-KR" sz="1200">
+                <a:latin typeface="맑은 고딕" charset="0"/>
+                <a:ea typeface="맑은 고딕" charset="0"/>
+              </a:rPr>
+              <a:t>p</a:t>
+            </a:r>
+            <a:r>
+              <a:rPr lang="ko-KR" sz="1200">
+                <a:latin typeface="맑은 고딕" charset="0"/>
+                <a:ea typeface="맑은 고딕" charset="0"/>
+              </a:rPr>
+              <a:t>태그 붙혔다 </a:t>
+            </a:r>
+            <a:r>
+              <a:rPr lang="ko-KR" sz="1200">
+                <a:latin typeface="맑은 고딕" charset="0"/>
+                <a:ea typeface="맑은 고딕" charset="0"/>
+              </a:rPr>
+              <a:t>말았다 </a:t>
+            </a:r>
+            <a:r>
+              <a:rPr lang="ko-KR" sz="1200">
+                <a:latin typeface="맑은 고딕" charset="0"/>
+                <a:ea typeface="맑은 고딕" charset="0"/>
+              </a:rPr>
+              <a:t>~</a:t>
+            </a:r>
+            <a:r>
+              <a:rPr lang="ko-KR" sz="1200">
+                <a:latin typeface="맑은 고딕" charset="0"/>
+                <a:ea typeface="맑은 고딕" charset="0"/>
+              </a:rPr>
+              <a:t>굴려봐</a:t>
+            </a:r>
+            <a:r>
+              <a:rPr lang="ko-KR" sz="1200">
+                <a:latin typeface="맑은 고딕" charset="0"/>
+                <a:ea typeface="맑은 고딕" charset="0"/>
+              </a:rPr>
+              <a:t> -</a:t>
+            </a:r>
+            <a:r>
+              <a:rPr lang="ko-KR" sz="1200">
+                <a:latin typeface="맑은 고딕" charset="0"/>
+                <a:ea typeface="맑은 고딕" charset="0"/>
+              </a:rPr>
+              <a:t>&gt; 여러번 실험 해보고 </a:t>
+            </a:r>
+            <a:r>
+              <a:rPr lang="ko-KR" sz="1200">
+                <a:latin typeface="맑은 고딕" charset="0"/>
+                <a:ea typeface="맑은 고딕" charset="0"/>
+              </a:rPr>
+              <a:t>정리해봐</a:t>
+            </a:r>
+            <a:endParaRPr lang="ko-KR" altLang="en-US" sz="1200">
+              <a:latin typeface="맑은 고딕" charset="0"/>
+              <a:ea typeface="맑은 고딕" charset="0"/>
+            </a:endParaRPr>
           </a:p>
         </p:txBody>
       </p:sp>
@@ -9429,6 +11200,21 @@
   <p:clrMapOvr>
     <a:masterClrMapping/>
   </p:clrMapOvr>
+  <mc:AlternateContent xmlns:mc="http://schemas.openxmlformats.org/markup-compatibility/2006">
+    <mc:Choice xmlns:p14="http://schemas.microsoft.com/office/powerpoint/2010/main" Requires="p14">
+      <p:transition spd="slow" p14:dur="2000"/>
+    </mc:Choice>
+    <mc:Fallback>
+      <p:transition spd="slow"/>
+    </mc:Fallback>
+  </mc:AlternateContent>
+  <p:timing>
+    <p:tnLst>
+      <p:par>
+        <p:cTn id="1" dur="indefinite" restart="never" nodeType="tmRoot"/>
+      </p:par>
+    </p:tnLst>
+  </p:timing>
 </p:sld>
 </file>
 
@@ -12472,7 +14258,7 @@
 </file>
 
 <file path=ppt/slides/slide20.xml><?xml version="1.0" encoding="utf-8"?>
-<p:sld xmlns:a="http://schemas.openxmlformats.org/drawingml/2006/main" xmlns:r="http://schemas.openxmlformats.org/officeDocument/2006/relationships" xmlns:p="http://schemas.openxmlformats.org/presentationml/2006/main">
+<p:sld xmlns:a="http://schemas.openxmlformats.org/drawingml/2006/main" xmlns:r="http://schemas.openxmlformats.org/officeDocument/2006/relationships" xmlns:p="http://schemas.openxmlformats.org/presentationml/2006/main" xmlns:p14="http://schemas.microsoft.com/office/powerpoint/2010/main">
   <p:cSld>
     <p:spTree>
       <p:nvGrpSpPr>
@@ -12500,7 +14286,7 @@
         </p:nvSpPr>
         <p:spPr>
           <a:xfrm>
-            <a:off x="590551" y="146050"/>
+            <a:off x="590550" y="146050"/>
             <a:ext cx="10363200" cy="762000"/>
           </a:xfrm>
           <a:prstGeom prst="rect">
@@ -12549,7 +14335,7 @@
         </p:nvSpPr>
         <p:spPr>
           <a:xfrm>
-            <a:off x="592667" y="1152526"/>
+            <a:off x="592455" y="1152525"/>
             <a:ext cx="10363200" cy="5019675"/>
           </a:xfrm>
           <a:prstGeom prst="rect">
@@ -13103,7 +14889,7 @@
         </p:nvSpPr>
         <p:spPr>
           <a:xfrm>
-            <a:off x="9482667" y="6419850"/>
+            <a:off x="9482455" y="6419850"/>
             <a:ext cx="2540000" cy="304800"/>
           </a:xfrm>
           <a:prstGeom prst="rect">
@@ -13152,8 +14938,8 @@
         </p:nvSpPr>
         <p:spPr>
           <a:xfrm>
-            <a:off x="1195918" y="6392863"/>
-            <a:ext cx="4146549" cy="349250"/>
+            <a:off x="1195705" y="6393180"/>
+            <a:ext cx="4146550" cy="349250"/>
           </a:xfrm>
           <a:prstGeom prst="rect">
             <a:avLst/>
@@ -13193,8 +14979,8 @@
         </p:nvSpPr>
         <p:spPr>
           <a:xfrm>
-            <a:off x="1560370" y="1669272"/>
-            <a:ext cx="2586758" cy="2123658"/>
+            <a:off x="1560195" y="1669415"/>
+            <a:ext cx="2586990" cy="2123440"/>
           </a:xfrm>
           <a:prstGeom prst="rect">
             <a:avLst/>
@@ -13505,16 +15291,317 @@
           </a:p>
         </p:txBody>
       </p:sp>
+      <p:sp>
+        <p:nvSpPr>
+          <p:cNvPr id="163" name="텍스트 상자 28"/>
+          <p:cNvSpPr txBox="1">
+            <a:spLocks/>
+          </p:cNvSpPr>
+          <p:nvPr/>
+        </p:nvSpPr>
+        <p:spPr>
+          <a:xfrm rot="0">
+            <a:off x="4640580" y="1485900"/>
+            <a:ext cx="5753735" cy="2308225"/>
+          </a:xfrm>
+          <a:prstGeom prst="rect"/>
+          <a:noFill/>
+          <a:ln>
+            <a:noFill/>
+            <a:prstDash/>
+          </a:ln>
+        </p:spPr>
+        <p:txBody>
+          <a:bodyPr wrap="square" lIns="89535" tIns="46355" rIns="89535" bIns="46355" vert="horz" anchor="t">
+            <a:spAutoFit/>
+          </a:bodyPr>
+          <a:lstStyle/>
+          <a:p>
+            <a:pPr marL="0" indent="0" algn="l" hangingPunct="1"/>
+            <a:r>
+              <a:rPr lang="ko-KR" sz="1800">
+                <a:latin typeface="맑은 고딕" charset="0"/>
+                <a:ea typeface="맑은 고딕" charset="0"/>
+              </a:rPr>
+              <a:t>&lt;div</a:t>
+            </a:r>
+            <a:r>
+              <a:rPr lang="ko-KR" sz="1800">
+                <a:latin typeface="맑은 고딕" charset="0"/>
+                <a:ea typeface="맑은 고딕" charset="0"/>
+              </a:rPr>
+              <a:t> id = “</a:t>
+            </a:r>
+            <a:r>
+              <a:rPr lang="ko-KR" sz="1800">
+                <a:latin typeface="맑은 고딕" charset="0"/>
+                <a:ea typeface="맑은 고딕" charset="0"/>
+              </a:rPr>
+              <a:t>t</a:t>
+            </a:r>
+            <a:r>
+              <a:rPr lang="ko-KR" sz="1800">
+                <a:latin typeface="맑은 고딕" charset="0"/>
+                <a:ea typeface="맑은 고딕" charset="0"/>
+              </a:rPr>
+              <a:t>able”&gt;</a:t>
+            </a:r>
+            <a:r>
+              <a:rPr lang="ko-KR" sz="1800">
+                <a:latin typeface="맑은 고딕" charset="0"/>
+                <a:ea typeface="맑은 고딕" charset="0"/>
+              </a:rPr>
+              <a:t> 이 </a:t>
+            </a:r>
+            <a:r>
+              <a:rPr lang="ko-KR" sz="1800">
+                <a:latin typeface="맑은 고딕" charset="0"/>
+                <a:ea typeface="맑은 고딕" charset="0"/>
+              </a:rPr>
+              <a:t>영역</a:t>
+            </a:r>
+            <a:r>
+              <a:rPr lang="ko-KR" sz="1800">
+                <a:latin typeface="맑은 고딕" charset="0"/>
+                <a:ea typeface="맑은 고딕" charset="0"/>
+              </a:rPr>
+              <a:t>을 </a:t>
+            </a:r>
+            <a:r>
+              <a:rPr lang="ko-KR" sz="1800">
+                <a:latin typeface="맑은 고딕" charset="0"/>
+                <a:ea typeface="맑은 고딕" charset="0"/>
+              </a:rPr>
+              <a:t>자바 스크</a:t>
+            </a:r>
+            <a:r>
+              <a:rPr lang="ko-KR" sz="1800">
+                <a:latin typeface="맑은 고딕" charset="0"/>
+                <a:ea typeface="맑은 고딕" charset="0"/>
+              </a:rPr>
+              <a:t>립트나 </a:t>
+            </a:r>
+            <a:r>
+              <a:rPr lang="ko-KR" sz="1800">
+                <a:latin typeface="맑은 고딕" charset="0"/>
+                <a:ea typeface="맑은 고딕" charset="0"/>
+              </a:rPr>
+              <a:t>css로 꾸밀 수 있다 &lt;</a:t>
+            </a:r>
+            <a:r>
+              <a:rPr lang="ko-KR" sz="1800">
+                <a:latin typeface="맑은 고딕" charset="0"/>
+                <a:ea typeface="맑은 고딕" charset="0"/>
+              </a:rPr>
+              <a:t>/</a:t>
+            </a:r>
+            <a:r>
+              <a:rPr lang="ko-KR" sz="1800">
+                <a:latin typeface="맑은 고딕" charset="0"/>
+                <a:ea typeface="맑은 고딕" charset="0"/>
+              </a:rPr>
+              <a:t>div&gt;</a:t>
+            </a:r>
+            <a:endParaRPr lang="ko-KR" altLang="en-US" sz="1800">
+              <a:latin typeface="맑은 고딕" charset="0"/>
+              <a:ea typeface="맑은 고딕" charset="0"/>
+            </a:endParaRPr>
+          </a:p>
+          <a:p>
+            <a:pPr marL="0" indent="0" algn="l" hangingPunct="1"/>
+            <a:endParaRPr lang="ko-KR" altLang="en-US" sz="1800">
+              <a:latin typeface="맑은 고딕" charset="0"/>
+              <a:ea typeface="맑은 고딕" charset="0"/>
+            </a:endParaRPr>
+          </a:p>
+          <a:p>
+            <a:pPr marL="0" indent="0" algn="l" hangingPunct="1"/>
+            <a:r>
+              <a:rPr lang="ko-KR" sz="1800">
+                <a:latin typeface="맑은 고딕" charset="0"/>
+                <a:ea typeface="맑은 고딕" charset="0"/>
+              </a:rPr>
+              <a:t>Css </a:t>
+            </a:r>
+            <a:r>
+              <a:rPr lang="ko-KR" sz="1800">
+                <a:latin typeface="맑은 고딕" charset="0"/>
+                <a:ea typeface="맑은 고딕" charset="0"/>
+              </a:rPr>
+              <a:t>:</a:t>
+            </a:r>
+            <a:r>
+              <a:rPr lang="ko-KR" sz="1800">
+                <a:latin typeface="맑은 고딕" charset="0"/>
+                <a:ea typeface="맑은 고딕" charset="0"/>
+              </a:rPr>
+              <a:t> </a:t>
+            </a:r>
+            <a:r>
+              <a:rPr lang="ko-KR" sz="1800">
+                <a:latin typeface="맑은 고딕" charset="0"/>
+                <a:ea typeface="맑은 고딕" charset="0"/>
+              </a:rPr>
+              <a:t>꾸밀 때 </a:t>
+            </a:r>
+            <a:r>
+              <a:rPr lang="ko-KR" sz="1800">
+                <a:latin typeface="맑은 고딕" charset="0"/>
+                <a:ea typeface="맑은 고딕" charset="0"/>
+              </a:rPr>
+              <a:t>사용</a:t>
+            </a:r>
+            <a:endParaRPr lang="ko-KR" altLang="en-US" sz="1800">
+              <a:latin typeface="맑은 고딕" charset="0"/>
+              <a:ea typeface="맑은 고딕" charset="0"/>
+            </a:endParaRPr>
+          </a:p>
+          <a:p>
+            <a:pPr marL="0" indent="0" algn="l" hangingPunct="1"/>
+            <a:endParaRPr lang="ko-KR" altLang="en-US" sz="1800">
+              <a:latin typeface="맑은 고딕" charset="0"/>
+              <a:ea typeface="맑은 고딕" charset="0"/>
+            </a:endParaRPr>
+          </a:p>
+          <a:p>
+            <a:pPr marL="0" indent="0" algn="l" hangingPunct="1"/>
+            <a:r>
+              <a:rPr lang="ko-KR" sz="1800">
+                <a:latin typeface="맑은 고딕" charset="0"/>
+                <a:ea typeface="맑은 고딕" charset="0"/>
+              </a:rPr>
+              <a:t>J</a:t>
+            </a:r>
+            <a:r>
+              <a:rPr lang="ko-KR" sz="1800">
+                <a:latin typeface="맑은 고딕" charset="0"/>
+                <a:ea typeface="맑은 고딕" charset="0"/>
+              </a:rPr>
+              <a:t>avascript </a:t>
+            </a:r>
+            <a:r>
+              <a:rPr lang="ko-KR" sz="1800">
+                <a:latin typeface="맑은 고딕" charset="0"/>
+                <a:ea typeface="맑은 고딕" charset="0"/>
+              </a:rPr>
+              <a:t>:</a:t>
+            </a:r>
+            <a:r>
+              <a:rPr lang="ko-KR" sz="1800">
+                <a:latin typeface="맑은 고딕" charset="0"/>
+                <a:ea typeface="맑은 고딕" charset="0"/>
+              </a:rPr>
+              <a:t> </a:t>
+            </a:r>
+            <a:r>
+              <a:rPr lang="ko-KR" sz="1800">
+                <a:latin typeface="맑은 고딕" charset="0"/>
+                <a:ea typeface="맑은 고딕" charset="0"/>
+              </a:rPr>
+              <a:t>동적으로 </a:t>
+            </a:r>
+            <a:r>
+              <a:rPr lang="ko-KR" sz="1800">
+                <a:latin typeface="맑은 고딕" charset="0"/>
+                <a:ea typeface="맑은 고딕" charset="0"/>
+              </a:rPr>
+              <a:t>보여주거나 안</a:t>
+            </a:r>
+            <a:r>
+              <a:rPr lang="ko-KR" sz="1800">
+                <a:latin typeface="맑은 고딕" charset="0"/>
+                <a:ea typeface="맑은 고딕" charset="0"/>
+              </a:rPr>
+              <a:t>보여주는 </a:t>
+            </a:r>
+            <a:r>
+              <a:rPr lang="ko-KR" sz="1800">
+                <a:latin typeface="맑은 고딕" charset="0"/>
+                <a:ea typeface="맑은 고딕" charset="0"/>
+              </a:rPr>
+              <a:t>기능 ㄱㄴ함 </a:t>
+            </a:r>
+            <a:r>
+              <a:rPr lang="ko-KR" sz="1800">
+                <a:latin typeface="맑은 고딕" charset="0"/>
+                <a:ea typeface="맑은 고딕" charset="0"/>
+              </a:rPr>
+              <a:t>-</a:t>
+            </a:r>
+            <a:r>
+              <a:rPr lang="ko-KR" sz="1800">
+                <a:latin typeface="맑은 고딕" charset="0"/>
+                <a:ea typeface="맑은 고딕" charset="0"/>
+              </a:rPr>
+              <a:t>&gt; 예를 들어 커서를 </a:t>
+            </a:r>
+            <a:r>
+              <a:rPr lang="ko-KR" sz="1800">
+                <a:latin typeface="맑은 고딕" charset="0"/>
+                <a:ea typeface="맑은 고딕" charset="0"/>
+              </a:rPr>
+              <a:t>갖다댈 </a:t>
+            </a:r>
+            <a:r>
+              <a:rPr lang="ko-KR" sz="1800">
+                <a:latin typeface="맑은 고딕" charset="0"/>
+                <a:ea typeface="맑은 고딕" charset="0"/>
+              </a:rPr>
+              <a:t>때 보이거나 말거나  -&gt; 한</a:t>
+            </a:r>
+            <a:r>
+              <a:rPr lang="ko-KR" sz="1800">
+                <a:latin typeface="맑은 고딕" charset="0"/>
+                <a:ea typeface="맑은 고딕" charset="0"/>
+              </a:rPr>
+              <a:t>마디로 </a:t>
+            </a:r>
+            <a:r>
+              <a:rPr lang="ko-KR" sz="1800">
+                <a:latin typeface="맑은 고딕" charset="0"/>
+                <a:ea typeface="맑은 고딕" charset="0"/>
+              </a:rPr>
+              <a:t>이벤트 처</a:t>
+            </a:r>
+            <a:r>
+              <a:rPr lang="ko-KR" sz="1800">
+                <a:latin typeface="맑은 고딕" charset="0"/>
+                <a:ea typeface="맑은 고딕" charset="0"/>
+              </a:rPr>
+              <a:t>리</a:t>
+            </a:r>
+            <a:endParaRPr lang="ko-KR" altLang="en-US" sz="1800">
+              <a:latin typeface="맑은 고딕" charset="0"/>
+              <a:ea typeface="맑은 고딕" charset="0"/>
+            </a:endParaRPr>
+          </a:p>
+        </p:txBody>
+      </p:sp>
     </p:spTree>
   </p:cSld>
   <p:clrMapOvr>
     <a:masterClrMapping/>
   </p:clrMapOvr>
+  <mc:AlternateContent xmlns:mc="http://schemas.openxmlformats.org/markup-compatibility/2006">
+    <mc:Choice xmlns:p14="http://schemas.microsoft.com/office/powerpoint/2010/main" Requires="p14">
+      <p:transition spd="slow" p14:dur="2000"/>
+    </mc:Choice>
+    <mc:Fallback>
+      <p:transition spd="slow"/>
+    </mc:Fallback>
+  </mc:AlternateContent>
+  <p:timing>
+    <p:tnLst>
+      <p:par>
+        <p:cTn id="1" dur="indefinite" restart="never" nodeType="tmRoot"/>
+      </p:par>
+    </p:tnLst>
+  </p:timing>
 </p:sld>
 </file>
 
 <file path=ppt/slides/slide21.xml><?xml version="1.0" encoding="utf-8"?>
-<p:sld xmlns:a="http://schemas.openxmlformats.org/drawingml/2006/main" xmlns:r="http://schemas.openxmlformats.org/officeDocument/2006/relationships" xmlns:p="http://schemas.openxmlformats.org/presentationml/2006/main">
+<p:sld xmlns:a="http://schemas.openxmlformats.org/drawingml/2006/main" xmlns:r="http://schemas.openxmlformats.org/officeDocument/2006/relationships" xmlns:p="http://schemas.openxmlformats.org/presentationml/2006/main" xmlns:p14="http://schemas.microsoft.com/office/powerpoint/2010/main">
   <p:cSld>
     <p:spTree>
       <p:nvGrpSpPr>
@@ -13542,7 +15629,7 @@
         </p:nvSpPr>
         <p:spPr>
           <a:xfrm>
-            <a:off x="590551" y="146050"/>
+            <a:off x="590550" y="146050"/>
             <a:ext cx="10363200" cy="762000"/>
           </a:xfrm>
           <a:prstGeom prst="rect">
@@ -13588,7 +15675,7 @@
         </p:nvSpPr>
         <p:spPr>
           <a:xfrm>
-            <a:off x="592667" y="1152526"/>
+            <a:off x="592455" y="1152525"/>
             <a:ext cx="10363200" cy="5019675"/>
           </a:xfrm>
           <a:prstGeom prst="rect">
@@ -13816,7 +15903,7 @@
         </p:nvSpPr>
         <p:spPr>
           <a:xfrm>
-            <a:off x="9482667" y="6419850"/>
+            <a:off x="9482455" y="6419850"/>
             <a:ext cx="2540000" cy="304800"/>
           </a:xfrm>
           <a:prstGeom prst="rect">
@@ -13865,8 +15952,8 @@
         </p:nvSpPr>
         <p:spPr>
           <a:xfrm>
-            <a:off x="1195918" y="6392863"/>
-            <a:ext cx="4146549" cy="349250"/>
+            <a:off x="1195705" y="6393180"/>
+            <a:ext cx="4146550" cy="349250"/>
           </a:xfrm>
           <a:prstGeom prst="rect">
             <a:avLst/>
@@ -14586,11 +16673,143 @@
           </a:graphicData>
         </a:graphic>
       </p:graphicFrame>
+      <mc:AlternateContent xmlns:mc="http://schemas.openxmlformats.org/markup-compatibility/2006" xmlns:p14="http://schemas.microsoft.com/office/powerpoint/2010/main">
+        <mc:Choice Requires="p14">
+          <p:contentPart p14:bwMode="auto" r:id="rId3">
+            <p14:nvContentPartPr>
+              <p14:cNvPr id="181" name="잉크 29"/>
+              <p14:cNvContentPartPr/>
+              <p14:nvPr/>
+            </p14:nvContentPartPr>
+            <p14:xfrm>
+              <a:off x="7155180" y="1356360"/>
+              <a:ext cx="190500" cy="1905000"/>
+            </p14:xfrm>
+          </p:contentPart>
+        </mc:Choice>
+        <mc:Fallback>
+          <p:pic>
+            <p:nvPicPr>
+              <p:cNvPr id="181" name="잉크 29"/>
+              <p:cNvPicPr/>
+              <p:nvPr/>
+            </p:nvPicPr>
+            <p:blipFill>
+              <a:blip r:embed="rId4"/>
+              <a:stretch>
+                <a:fillRect/>
+              </a:stretch>
+            </p:blipFill>
+            <p:spPr>
+              <a:xfrm>
+                <a:off x="7155180" y="1356360"/>
+                <a:ext cx="190500" cy="1905000"/>
+              </a:xfrm>
+              <a:prstGeom prst="rect">
+                <a:avLst/>
+              </a:prstGeom>
+            </p:spPr>
+          </p:pic>
+        </mc:Fallback>
+      </mc:AlternateContent>
+      <mc:AlternateContent xmlns:mc="http://schemas.openxmlformats.org/markup-compatibility/2006" xmlns:p14="http://schemas.microsoft.com/office/powerpoint/2010/main">
+        <mc:Choice Requires="p14">
+          <p:contentPart p14:bwMode="auto" r:id="rId5">
+            <p14:nvContentPartPr>
+              <p14:cNvPr id="182" name="잉크 30"/>
+              <p14:cNvContentPartPr/>
+              <p14:nvPr/>
+            </p14:nvContentPartPr>
+            <p14:xfrm>
+              <a:off x="7612380" y="1584960"/>
+              <a:ext cx="708660" cy="914400"/>
+            </p14:xfrm>
+          </p:contentPart>
+        </mc:Choice>
+        <mc:Fallback>
+          <p:pic>
+            <p:nvPicPr>
+              <p:cNvPr id="182" name="잉크 30"/>
+              <p:cNvPicPr/>
+              <p:nvPr/>
+            </p:nvPicPr>
+            <p:blipFill>
+              <a:blip r:embed="rId6"/>
+              <a:stretch>
+                <a:fillRect/>
+              </a:stretch>
+            </p:blipFill>
+            <p:spPr>
+              <a:xfrm>
+                <a:off x="7612380" y="1584960"/>
+                <a:ext cx="708660" cy="914400"/>
+              </a:xfrm>
+              <a:prstGeom prst="rect">
+                <a:avLst/>
+              </a:prstGeom>
+            </p:spPr>
+          </p:pic>
+        </mc:Fallback>
+      </mc:AlternateContent>
+      <mc:AlternateContent xmlns:mc="http://schemas.openxmlformats.org/markup-compatibility/2006" xmlns:p14="http://schemas.microsoft.com/office/powerpoint/2010/main">
+        <mc:Choice Requires="p14">
+          <p:contentPart p14:bwMode="auto" r:id="rId7">
+            <p14:nvContentPartPr>
+              <p14:cNvPr id="183" name="잉크 31"/>
+              <p14:cNvContentPartPr/>
+              <p14:nvPr/>
+            </p14:nvContentPartPr>
+            <p14:xfrm>
+              <a:off x="7101840" y="3230880"/>
+              <a:ext cx="2103120" cy="2438400"/>
+            </p14:xfrm>
+          </p:contentPart>
+        </mc:Choice>
+        <mc:Fallback>
+          <p:pic>
+            <p:nvPicPr>
+              <p:cNvPr id="183" name="잉크 31"/>
+              <p:cNvPicPr/>
+              <p:nvPr/>
+            </p:nvPicPr>
+            <p:blipFill>
+              <a:blip r:embed="rId8"/>
+              <a:stretch>
+                <a:fillRect/>
+              </a:stretch>
+            </p:blipFill>
+            <p:spPr>
+              <a:xfrm>
+                <a:off x="7101840" y="3230880"/>
+                <a:ext cx="2103120" cy="2438400"/>
+              </a:xfrm>
+              <a:prstGeom prst="rect">
+                <a:avLst/>
+              </a:prstGeom>
+            </p:spPr>
+          </p:pic>
+        </mc:Fallback>
+      </mc:AlternateContent>
     </p:spTree>
   </p:cSld>
   <p:clrMapOvr>
     <a:masterClrMapping/>
   </p:clrMapOvr>
+  <mc:AlternateContent xmlns:mc="http://schemas.openxmlformats.org/markup-compatibility/2006">
+    <mc:Choice xmlns:p14="http://schemas.microsoft.com/office/powerpoint/2010/main" Requires="p14">
+      <p:transition spd="slow" p14:dur="2000"/>
+    </mc:Choice>
+    <mc:Fallback>
+      <p:transition spd="slow"/>
+    </mc:Fallback>
+  </mc:AlternateContent>
+  <p:timing>
+    <p:tnLst>
+      <p:par>
+        <p:cTn id="1" dur="indefinite" restart="never" nodeType="tmRoot"/>
+      </p:par>
+    </p:tnLst>
+  </p:timing>
 </p:sld>
 </file>
 
@@ -28789,7 +31008,7 @@
       </p:sp>
       <mc:AlternateContent xmlns:mc="http://schemas.openxmlformats.org/markup-compatibility/2006" xmlns:p14="http://schemas.microsoft.com/office/powerpoint/2010/main">
         <mc:Choice Requires="p14">
-          <p:contentPart p14:bwMode="auto" r:id="rId3">
+          <p:contentPart p14:bwMode="auto" r:id="rId15">
             <p14:nvContentPartPr>
               <p14:cNvPr id="64" name="잉크 11"/>
               <p14:cNvContentPartPr/>
@@ -28809,7 +31028,7 @@
               <p:nvPr/>
             </p:nvPicPr>
             <p:blipFill>
-              <a:blip r:embed="rId4"/>
+              <a:blip r:embed="rId16"/>
               <a:stretch>
                 <a:fillRect/>
               </a:stretch>
@@ -28828,7 +31047,7 @@
       </mc:AlternateContent>
       <mc:AlternateContent xmlns:mc="http://schemas.openxmlformats.org/markup-compatibility/2006" xmlns:p14="http://schemas.microsoft.com/office/powerpoint/2010/main">
         <mc:Choice Requires="p14">
-          <p:contentPart p14:bwMode="auto" r:id="rId5">
+          <p:contentPart p14:bwMode="auto" r:id="rId17">
             <p14:nvContentPartPr>
               <p14:cNvPr id="65" name="잉크 12"/>
               <p14:cNvContentPartPr/>
@@ -28848,7 +31067,7 @@
               <p:nvPr/>
             </p:nvPicPr>
             <p:blipFill>
-              <a:blip r:embed="rId6"/>
+              <a:blip r:embed="rId18"/>
               <a:stretch>
                 <a:fillRect/>
               </a:stretch>
@@ -29156,7 +31375,7 @@
       </p:sp>
       <mc:AlternateContent xmlns:mc="http://schemas.openxmlformats.org/markup-compatibility/2006" xmlns:p14="http://schemas.microsoft.com/office/powerpoint/2010/main">
         <mc:Choice Requires="p14">
-          <p:contentPart p14:bwMode="auto" r:id="rId7">
+          <p:contentPart p14:bwMode="auto" r:id="rId19">
             <p14:nvContentPartPr>
               <p14:cNvPr id="71" name="잉크 19"/>
               <p14:cNvContentPartPr/>
@@ -29176,7 +31395,7 @@
               <p:nvPr/>
             </p:nvPicPr>
             <p:blipFill>
-              <a:blip r:embed="rId8"/>
+              <a:blip r:embed="rId20"/>
               <a:stretch>
                 <a:fillRect/>
               </a:stretch>
@@ -29195,7 +31414,7 @@
       </mc:AlternateContent>
       <mc:AlternateContent xmlns:mc="http://schemas.openxmlformats.org/markup-compatibility/2006" xmlns:p14="http://schemas.microsoft.com/office/powerpoint/2010/main">
         <mc:Choice Requires="p14">
-          <p:contentPart p14:bwMode="auto" r:id="rId9">
+          <p:contentPart p14:bwMode="auto" r:id="rId21">
             <p14:nvContentPartPr>
               <p14:cNvPr id="72" name="잉크 20"/>
               <p14:cNvContentPartPr/>
@@ -29215,7 +31434,7 @@
               <p:nvPr/>
             </p:nvPicPr>
             <p:blipFill>
-              <a:blip r:embed="rId10"/>
+              <a:blip r:embed="rId22"/>
               <a:stretch>
                 <a:fillRect/>
               </a:stretch>
@@ -29234,7 +31453,7 @@
       </mc:AlternateContent>
       <mc:AlternateContent xmlns:mc="http://schemas.openxmlformats.org/markup-compatibility/2006" xmlns:p14="http://schemas.microsoft.com/office/powerpoint/2010/main">
         <mc:Choice Requires="p14">
-          <p:contentPart p14:bwMode="auto" r:id="rId11">
+          <p:contentPart p14:bwMode="auto" r:id="rId23">
             <p14:nvContentPartPr>
               <p14:cNvPr id="73" name="잉크 21"/>
               <p14:cNvContentPartPr/>
@@ -29254,7 +31473,7 @@
               <p:nvPr/>
             </p:nvPicPr>
             <p:blipFill>
-              <a:blip r:embed="rId12"/>
+              <a:blip r:embed="rId24"/>
               <a:stretch>
                 <a:fillRect/>
               </a:stretch>
@@ -29273,7 +31492,7 @@
       </mc:AlternateContent>
       <mc:AlternateContent xmlns:mc="http://schemas.openxmlformats.org/markup-compatibility/2006" xmlns:p14="http://schemas.microsoft.com/office/powerpoint/2010/main">
         <mc:Choice Requires="p14">
-          <p:contentPart p14:bwMode="auto" r:id="rId13">
+          <p:contentPart p14:bwMode="auto" r:id="rId25">
             <p14:nvContentPartPr>
               <p14:cNvPr id="74" name="잉크 22"/>
               <p14:cNvContentPartPr/>
@@ -29293,7 +31512,7 @@
               <p:nvPr/>
             </p:nvPicPr>
             <p:blipFill>
-              <a:blip r:embed="rId14"/>
+              <a:blip r:embed="rId26"/>
               <a:stretch>
                 <a:fillRect/>
               </a:stretch>
@@ -29302,6 +31521,192 @@
               <a:xfrm>
                 <a:off x="8595360" y="4953000"/>
                 <a:ext cx="365760" cy="502920"/>
+              </a:xfrm>
+              <a:prstGeom prst="rect">
+                <a:avLst/>
+              </a:prstGeom>
+            </p:spPr>
+          </p:pic>
+        </mc:Fallback>
+      </mc:AlternateContent>
+      <p:sp>
+        <p:nvSpPr>
+          <p:cNvPr id="75" name="텍스트 상자 1"/>
+          <p:cNvSpPr txBox="1">
+            <a:spLocks/>
+          </p:cNvSpPr>
+          <p:nvPr/>
+        </p:nvSpPr>
+        <p:spPr>
+          <a:xfrm rot="0">
+            <a:off x="6602730" y="713740"/>
+            <a:ext cx="2707640" cy="370205"/>
+          </a:xfrm>
+          <a:prstGeom prst="rect"/>
+          <a:noFill/>
+          <a:ln>
+            <a:noFill/>
+            <a:prstDash/>
+          </a:ln>
+        </p:spPr>
+        <p:txBody>
+          <a:bodyPr wrap="none" lIns="89535" tIns="46355" rIns="89535" bIns="46355" vert="horz" anchor="t">
+            <a:spAutoFit/>
+          </a:bodyPr>
+          <a:lstStyle/>
+          <a:p>
+            <a:pPr marL="0" indent="0" algn="l" hangingPunct="1"/>
+            <a:r>
+              <a:rPr lang="ko-KR" sz="1800">
+                <a:latin typeface="맑은 고딕" charset="0"/>
+                <a:ea typeface="맑은 고딕" charset="0"/>
+              </a:rPr>
+              <a:t>강의자료 </a:t>
+            </a:r>
+            <a:r>
+              <a:rPr lang="ko-KR" sz="1800">
+                <a:latin typeface="맑은 고딕" charset="0"/>
+                <a:ea typeface="맑은 고딕" charset="0"/>
+              </a:rPr>
+              <a:t>태</a:t>
+            </a:r>
+            <a:r>
+              <a:rPr lang="ko-KR" sz="1800">
+                <a:latin typeface="맑은 고딕" charset="0"/>
+                <a:ea typeface="맑은 고딕" charset="0"/>
+              </a:rPr>
+              <a:t>그</a:t>
+            </a:r>
+            <a:r>
+              <a:rPr lang="ko-KR" sz="1800">
+                <a:latin typeface="맑은 고딕" charset="0"/>
+                <a:ea typeface="맑은 고딕" charset="0"/>
+              </a:rPr>
+              <a:t> 다 외</a:t>
+            </a:r>
+            <a:r>
+              <a:rPr lang="ko-KR" sz="1800">
+                <a:latin typeface="맑은 고딕" charset="0"/>
+                <a:ea typeface="맑은 고딕" charset="0"/>
+              </a:rPr>
+              <a:t>워라</a:t>
+            </a:r>
+            <a:endParaRPr lang="ko-KR" altLang="en-US" sz="1800">
+              <a:latin typeface="맑은 고딕" charset="0"/>
+              <a:ea typeface="맑은 고딕" charset="0"/>
+            </a:endParaRPr>
+          </a:p>
+        </p:txBody>
+      </p:sp>
+      <mc:AlternateContent xmlns:mc="http://schemas.openxmlformats.org/markup-compatibility/2006" xmlns:p14="http://schemas.microsoft.com/office/powerpoint/2010/main">
+        <mc:Choice Requires="p14">
+          <p:contentPart p14:bwMode="auto" r:id="rId27">
+            <p14:nvContentPartPr>
+              <p14:cNvPr id="76" name="잉크 3"/>
+              <p14:cNvContentPartPr/>
+              <p14:nvPr/>
+            </p14:nvContentPartPr>
+            <p14:xfrm>
+              <a:off x="6064885" y="200660"/>
+              <a:ext cx="3529965" cy="1275080"/>
+            </p14:xfrm>
+          </p:contentPart>
+        </mc:Choice>
+        <mc:Fallback>
+          <p:pic>
+            <p:nvPicPr>
+              <p:cNvPr id="76" name="잉크 3"/>
+              <p:cNvPicPr/>
+              <p:nvPr/>
+            </p:nvPicPr>
+            <p:blipFill>
+              <a:blip r:embed="rId28"/>
+              <a:stretch>
+                <a:fillRect/>
+              </a:stretch>
+            </p:blipFill>
+            <p:spPr>
+              <a:xfrm>
+                <a:off x="6064885" y="200660"/>
+                <a:ext cx="3529965" cy="1275080"/>
+              </a:xfrm>
+              <a:prstGeom prst="rect">
+                <a:avLst/>
+              </a:prstGeom>
+            </p:spPr>
+          </p:pic>
+        </mc:Fallback>
+      </mc:AlternateContent>
+      <mc:AlternateContent xmlns:mc="http://schemas.openxmlformats.org/markup-compatibility/2006" xmlns:p14="http://schemas.microsoft.com/office/powerpoint/2010/main">
+        <mc:Choice Requires="p14">
+          <p:contentPart p14:bwMode="auto" r:id="rId29">
+            <p14:nvContentPartPr>
+              <p14:cNvPr id="77" name="잉크 4"/>
+              <p14:cNvContentPartPr/>
+              <p14:nvPr/>
+            </p14:nvContentPartPr>
+            <p14:xfrm>
+              <a:off x="4853305" y="1331595"/>
+              <a:ext cx="930910" cy="4476750"/>
+            </p14:xfrm>
+          </p:contentPart>
+        </mc:Choice>
+        <mc:Fallback>
+          <p:pic>
+            <p:nvPicPr>
+              <p:cNvPr id="77" name="잉크 4"/>
+              <p:cNvPicPr/>
+              <p:nvPr/>
+            </p:nvPicPr>
+            <p:blipFill>
+              <a:blip r:embed="rId30"/>
+              <a:stretch>
+                <a:fillRect/>
+              </a:stretch>
+            </p:blipFill>
+            <p:spPr>
+              <a:xfrm>
+                <a:off x="4853305" y="1331595"/>
+                <a:ext cx="930910" cy="4476750"/>
+              </a:xfrm>
+              <a:prstGeom prst="rect">
+                <a:avLst/>
+              </a:prstGeom>
+            </p:spPr>
+          </p:pic>
+        </mc:Fallback>
+      </mc:AlternateContent>
+      <mc:AlternateContent xmlns:mc="http://schemas.openxmlformats.org/markup-compatibility/2006" xmlns:p14="http://schemas.microsoft.com/office/powerpoint/2010/main">
+        <mc:Choice Requires="p14">
+          <p:contentPart p14:bwMode="auto" r:id="rId31">
+            <p14:nvContentPartPr>
+              <p14:cNvPr id="78" name="잉크 5"/>
+              <p14:cNvContentPartPr/>
+              <p14:nvPr/>
+            </p14:nvContentPartPr>
+            <p14:xfrm>
+              <a:off x="7508875" y="6081395"/>
+              <a:ext cx="1997710" cy="144145"/>
+            </p14:xfrm>
+          </p:contentPart>
+        </mc:Choice>
+        <mc:Fallback>
+          <p:pic>
+            <p:nvPicPr>
+              <p:cNvPr id="78" name="잉크 5"/>
+              <p:cNvPicPr/>
+              <p:nvPr/>
+            </p:nvPicPr>
+            <p:blipFill>
+              <a:blip r:embed="rId32"/>
+              <a:stretch>
+                <a:fillRect/>
+              </a:stretch>
+            </p:blipFill>
+            <p:spPr>
+              <a:xfrm>
+                <a:off x="7508875" y="6081395"/>
+                <a:ext cx="1997710" cy="144145"/>
               </a:xfrm>
               <a:prstGeom prst="rect">
                 <a:avLst/>
@@ -29896,7 +32301,7 @@
       </p:sp>
       <mc:AlternateContent xmlns:mc="http://schemas.openxmlformats.org/markup-compatibility/2006" xmlns:p14="http://schemas.microsoft.com/office/powerpoint/2010/main">
         <mc:Choice Requires="p14">
-          <p:contentPart p14:bwMode="auto" r:id="rId3">
+          <p:contentPart p14:bwMode="auto" r:id="rId11">
             <p14:nvContentPartPr>
               <p14:cNvPr id="71" name="잉크 23"/>
               <p14:cNvContentPartPr/>
@@ -29916,7 +32321,7 @@
               <p:nvPr/>
             </p:nvPicPr>
             <p:blipFill>
-              <a:blip r:embed="rId4"/>
+              <a:blip r:embed="rId12"/>
               <a:stretch>
                 <a:fillRect/>
               </a:stretch>
@@ -29935,7 +32340,7 @@
       </mc:AlternateContent>
       <mc:AlternateContent xmlns:mc="http://schemas.openxmlformats.org/markup-compatibility/2006" xmlns:p14="http://schemas.microsoft.com/office/powerpoint/2010/main">
         <mc:Choice Requires="p14">
-          <p:contentPart p14:bwMode="auto" r:id="rId5">
+          <p:contentPart p14:bwMode="auto" r:id="rId13">
             <p14:nvContentPartPr>
               <p14:cNvPr id="72" name="잉크 24"/>
               <p14:cNvContentPartPr/>
@@ -29955,7 +32360,7 @@
               <p:nvPr/>
             </p:nvPicPr>
             <p:blipFill>
-              <a:blip r:embed="rId6"/>
+              <a:blip r:embed="rId14"/>
               <a:stretch>
                 <a:fillRect/>
               </a:stretch>
@@ -29974,7 +32379,7 @@
       </mc:AlternateContent>
       <mc:AlternateContent xmlns:mc="http://schemas.openxmlformats.org/markup-compatibility/2006" xmlns:p14="http://schemas.microsoft.com/office/powerpoint/2010/main">
         <mc:Choice Requires="p14">
-          <p:contentPart p14:bwMode="auto" r:id="rId7">
+          <p:contentPart p14:bwMode="auto" r:id="rId15">
             <p14:nvContentPartPr>
               <p14:cNvPr id="73" name="잉크 25"/>
               <p14:cNvContentPartPr/>
@@ -29994,7 +32399,7 @@
               <p:nvPr/>
             </p:nvPicPr>
             <p:blipFill>
-              <a:blip r:embed="rId8"/>
+              <a:blip r:embed="rId16"/>
               <a:stretch>
                 <a:fillRect/>
               </a:stretch>
@@ -30013,7 +32418,7 @@
       </mc:AlternateContent>
       <mc:AlternateContent xmlns:mc="http://schemas.openxmlformats.org/markup-compatibility/2006" xmlns:p14="http://schemas.microsoft.com/office/powerpoint/2010/main">
         <mc:Choice Requires="p14">
-          <p:contentPart p14:bwMode="auto" r:id="rId9">
+          <p:contentPart p14:bwMode="auto" r:id="rId17">
             <p14:nvContentPartPr>
               <p14:cNvPr id="74" name="잉크 26"/>
               <p14:cNvContentPartPr/>
@@ -30033,7 +32438,7 @@
               <p:nvPr/>
             </p:nvPicPr>
             <p:blipFill>
-              <a:blip r:embed="rId10"/>
+              <a:blip r:embed="rId18"/>
               <a:stretch>
                 <a:fillRect/>
               </a:stretch>
@@ -30328,6 +32733,208 @@
           </a:p>
         </p:txBody>
       </p:sp>
+      <p:sp>
+        <p:nvSpPr>
+          <p:cNvPr id="77" name="텍스트 상자 2"/>
+          <p:cNvSpPr txBox="1">
+            <a:spLocks/>
+          </p:cNvSpPr>
+          <p:nvPr/>
+        </p:nvSpPr>
+        <p:spPr>
+          <a:xfrm rot="0">
+            <a:off x="4123055" y="537210"/>
+            <a:ext cx="4926330" cy="370205"/>
+          </a:xfrm>
+          <a:prstGeom prst="rect"/>
+          <a:noFill/>
+          <a:ln>
+            <a:noFill/>
+            <a:prstDash/>
+          </a:ln>
+        </p:spPr>
+        <p:txBody>
+          <a:bodyPr wrap="none" lIns="89535" tIns="46355" rIns="89535" bIns="46355" vert="horz" anchor="t">
+            <a:spAutoFit/>
+          </a:bodyPr>
+          <a:lstStyle/>
+          <a:p>
+            <a:pPr marL="0" indent="0" algn="l" hangingPunct="1"/>
+            <a:r>
+              <a:rPr sz="1800">
+                <a:latin typeface="맑은 고딕" charset="0"/>
+                <a:ea typeface="맑은 고딕" charset="0"/>
+              </a:rPr>
+              <a:t>나중에 </a:t>
+            </a:r>
+            <a:r>
+              <a:rPr lang="ko-KR" sz="1800">
+                <a:latin typeface="맑은 고딕" charset="0"/>
+                <a:ea typeface="맑은 고딕" charset="0"/>
+              </a:rPr>
+              <a:t>실력 </a:t>
+            </a:r>
+            <a:r>
+              <a:rPr lang="ko-KR" sz="1800">
+                <a:latin typeface="맑은 고딕" charset="0"/>
+                <a:ea typeface="맑은 고딕" charset="0"/>
+              </a:rPr>
+              <a:t>오르면 </a:t>
+            </a:r>
+            <a:r>
+              <a:rPr lang="ko-KR" sz="1800">
+                <a:latin typeface="맑은 고딕" charset="0"/>
+                <a:ea typeface="맑은 고딕" charset="0"/>
+              </a:rPr>
+              <a:t>리눅스 </a:t>
+            </a:r>
+            <a:r>
+              <a:rPr lang="ko-KR" sz="1800">
+                <a:latin typeface="맑은 고딕" charset="0"/>
+                <a:ea typeface="맑은 고딕" charset="0"/>
+              </a:rPr>
+              <a:t>서버에서 </a:t>
+            </a:r>
+            <a:r>
+              <a:rPr lang="ko-KR" sz="1800">
+                <a:latin typeface="맑은 고딕" charset="0"/>
+                <a:ea typeface="맑은 고딕" charset="0"/>
+              </a:rPr>
+              <a:t>운영하래</a:t>
+            </a:r>
+            <a:endParaRPr lang="ko-KR" altLang="en-US" sz="1800">
+              <a:latin typeface="맑은 고딕" charset="0"/>
+              <a:ea typeface="맑은 고딕" charset="0"/>
+            </a:endParaRPr>
+          </a:p>
+        </p:txBody>
+      </p:sp>
+      <mc:AlternateContent xmlns:mc="http://schemas.openxmlformats.org/markup-compatibility/2006" xmlns:p14="http://schemas.microsoft.com/office/powerpoint/2010/main">
+        <mc:Choice Requires="p14">
+          <p:contentPart p14:bwMode="auto" r:id="rId19">
+            <p14:nvContentPartPr>
+              <p14:cNvPr id="78" name="잉크 6"/>
+              <p14:cNvContentPartPr/>
+              <p14:nvPr/>
+            </p14:nvContentPartPr>
+            <p14:xfrm>
+              <a:off x="713740" y="4227830"/>
+              <a:ext cx="754380" cy="1540510"/>
+            </p14:xfrm>
+          </p:contentPart>
+        </mc:Choice>
+        <mc:Fallback>
+          <p:pic>
+            <p:nvPicPr>
+              <p:cNvPr id="78" name="잉크 6"/>
+              <p:cNvPicPr/>
+              <p:nvPr/>
+            </p:nvPicPr>
+            <p:blipFill>
+              <a:blip r:embed="rId20"/>
+              <a:stretch>
+                <a:fillRect/>
+              </a:stretch>
+            </p:blipFill>
+            <p:spPr>
+              <a:xfrm>
+                <a:off x="713740" y="4227830"/>
+                <a:ext cx="754380" cy="1540510"/>
+              </a:xfrm>
+              <a:prstGeom prst="rect">
+                <a:avLst/>
+              </a:prstGeom>
+            </p:spPr>
+          </p:pic>
+        </mc:Fallback>
+      </mc:AlternateContent>
+      <p:sp>
+        <p:nvSpPr>
+          <p:cNvPr id="79" name="텍스트 상자 7"/>
+          <p:cNvSpPr txBox="1">
+            <a:spLocks/>
+          </p:cNvSpPr>
+          <p:nvPr/>
+        </p:nvSpPr>
+        <p:spPr>
+          <a:xfrm rot="0">
+            <a:off x="6097270" y="4356100"/>
+            <a:ext cx="3001010" cy="370205"/>
+          </a:xfrm>
+          <a:prstGeom prst="rect"/>
+          <a:noFill/>
+          <a:ln>
+            <a:noFill/>
+            <a:prstDash/>
+          </a:ln>
+        </p:spPr>
+        <p:txBody>
+          <a:bodyPr wrap="square" lIns="89535" tIns="46355" rIns="89535" bIns="46355" vert="horz" anchor="t">
+            <a:spAutoFit/>
+          </a:bodyPr>
+          <a:lstStyle/>
+          <a:p>
+            <a:pPr marL="0" indent="0" algn="l" hangingPunct="1"/>
+            <a:r>
+              <a:rPr lang="ko-KR" sz="1800">
+                <a:latin typeface="맑은 고딕" charset="0"/>
+                <a:ea typeface="맑은 고딕" charset="0"/>
+              </a:rPr>
+              <a:t>그 </a:t>
+            </a:r>
+            <a:r>
+              <a:rPr lang="ko-KR" sz="1800">
+                <a:latin typeface="맑은 고딕" charset="0"/>
+                <a:ea typeface="맑은 고딕" charset="0"/>
+              </a:rPr>
+              <a:t>태그의 이름을 대표</a:t>
+            </a:r>
+            <a:endParaRPr lang="ko-KR" altLang="en-US" sz="1800">
+              <a:latin typeface="맑은 고딕" charset="0"/>
+              <a:ea typeface="맑은 고딕" charset="0"/>
+            </a:endParaRPr>
+          </a:p>
+        </p:txBody>
+      </p:sp>
+      <mc:AlternateContent xmlns:mc="http://schemas.openxmlformats.org/markup-compatibility/2006" xmlns:p14="http://schemas.microsoft.com/office/powerpoint/2010/main">
+        <mc:Choice Requires="p14">
+          <p:contentPart p14:bwMode="auto" r:id="rId21">
+            <p14:nvContentPartPr>
+              <p14:cNvPr id="80" name="잉크 8"/>
+              <p14:cNvContentPartPr/>
+              <p14:nvPr/>
+            </p14:nvContentPartPr>
+            <p14:xfrm>
+              <a:off x="2141855" y="4677410"/>
+              <a:ext cx="1901190" cy="55880"/>
+            </p14:xfrm>
+          </p:contentPart>
+        </mc:Choice>
+        <mc:Fallback>
+          <p:pic>
+            <p:nvPicPr>
+              <p:cNvPr id="80" name="잉크 8"/>
+              <p:cNvPicPr/>
+              <p:nvPr/>
+            </p:nvPicPr>
+            <p:blipFill>
+              <a:blip r:embed="rId22"/>
+              <a:stretch>
+                <a:fillRect/>
+              </a:stretch>
+            </p:blipFill>
+            <p:spPr>
+              <a:xfrm>
+                <a:off x="2141855" y="4677410"/>
+                <a:ext cx="1901190" cy="55880"/>
+              </a:xfrm>
+              <a:prstGeom prst="rect">
+                <a:avLst/>
+              </a:prstGeom>
+            </p:spPr>
+          </p:pic>
+        </mc:Fallback>
+      </mc:AlternateContent>
     </p:spTree>
   </p:cSld>
   <p:clrMapOvr>

--- a/1학기/웹 프로그래밍/2026_웹 프로그래밍_part2.pptx
+++ b/1학기/웹 프로그래밍/2026_웹 프로그래밍_part2.pptx
@@ -2,51 +2,51 @@
 <file path=ppt/presentation.xml><?xml version="1.0" encoding="utf-8"?>
 <p:presentation xmlns:a="http://schemas.openxmlformats.org/drawingml/2006/main" xmlns:r="http://schemas.openxmlformats.org/officeDocument/2006/relationships" xmlns:p="http://schemas.openxmlformats.org/presentationml/2006/main" xmlns:p14="http://schemas.microsoft.com/office/powerpoint/2010/main" strictFirstAndLastChars="0" embedTrueTypeFonts="1" saveSubsetFonts="1" autoCompressPictures="0">
   <p:sldMasterIdLst>
-    <p:sldMasterId id="2147483673" r:id="rId8"/>
+    <p:sldMasterId id="2147483676" r:id="rId8"/>
   </p:sldMasterIdLst>
   <p:notesMasterIdLst>
     <p:notesMasterId r:id="rId10"/>
   </p:notesMasterIdLst>
   <p:sldIdLst>
     <p:sldId id="256" r:id="rId12"/>
-    <p:sldId id="257" r:id="rId13"/>
-    <p:sldId id="351" r:id="rId15"/>
-    <p:sldId id="352" r:id="rId16"/>
-    <p:sldId id="258" r:id="rId17"/>
-    <p:sldId id="259" r:id="rId19"/>
-    <p:sldId id="353" r:id="rId21"/>
-    <p:sldId id="260" r:id="rId22"/>
-    <p:sldId id="262" r:id="rId23"/>
-    <p:sldId id="263" r:id="rId25"/>
-    <p:sldId id="264" r:id="rId26"/>
-    <p:sldId id="337" r:id="rId27"/>
-    <p:sldId id="338" r:id="rId28"/>
-    <p:sldId id="265" r:id="rId29"/>
-    <p:sldId id="266" r:id="rId30"/>
-    <p:sldId id="268" r:id="rId32"/>
-    <p:sldId id="341" r:id="rId34"/>
-    <p:sldId id="342" r:id="rId35"/>
-    <p:sldId id="340" r:id="rId36"/>
-    <p:sldId id="269" r:id="rId38"/>
-    <p:sldId id="271" r:id="rId39"/>
-    <p:sldId id="270" r:id="rId40"/>
-    <p:sldId id="272" r:id="rId42"/>
-    <p:sldId id="344" r:id="rId44"/>
-    <p:sldId id="345" r:id="rId45"/>
-    <p:sldId id="275" r:id="rId46"/>
-    <p:sldId id="346" r:id="rId48"/>
-    <p:sldId id="347" r:id="rId49"/>
-    <p:sldId id="354" r:id="rId50"/>
-    <p:sldId id="355" r:id="rId51"/>
-    <p:sldId id="356" r:id="rId52"/>
-    <p:sldId id="357" r:id="rId53"/>
-    <p:sldId id="358" r:id="rId54"/>
-    <p:sldId id="348" r:id="rId55"/>
-    <p:sldId id="349" r:id="rId56"/>
-    <p:sldId id="280" r:id="rId57"/>
-    <p:sldId id="281" r:id="rId59"/>
-    <p:sldId id="350" r:id="rId61"/>
-    <p:sldId id="283" r:id="rId62"/>
+    <p:sldId id="257" r:id="rId14"/>
+    <p:sldId id="351" r:id="rId16"/>
+    <p:sldId id="352" r:id="rId17"/>
+    <p:sldId id="258" r:id="rId18"/>
+    <p:sldId id="259" r:id="rId20"/>
+    <p:sldId id="353" r:id="rId22"/>
+    <p:sldId id="260" r:id="rId24"/>
+    <p:sldId id="262" r:id="rId26"/>
+    <p:sldId id="263" r:id="rId28"/>
+    <p:sldId id="264" r:id="rId30"/>
+    <p:sldId id="337" r:id="rId32"/>
+    <p:sldId id="338" r:id="rId33"/>
+    <p:sldId id="265" r:id="rId34"/>
+    <p:sldId id="266" r:id="rId36"/>
+    <p:sldId id="268" r:id="rId38"/>
+    <p:sldId id="341" r:id="rId40"/>
+    <p:sldId id="342" r:id="rId41"/>
+    <p:sldId id="340" r:id="rId42"/>
+    <p:sldId id="269" r:id="rId44"/>
+    <p:sldId id="270" r:id="rId46"/>
+    <p:sldId id="271" r:id="rId48"/>
+    <p:sldId id="272" r:id="rId49"/>
+    <p:sldId id="344" r:id="rId50"/>
+    <p:sldId id="345" r:id="rId51"/>
+    <p:sldId id="275" r:id="rId52"/>
+    <p:sldId id="346" r:id="rId54"/>
+    <p:sldId id="347" r:id="rId55"/>
+    <p:sldId id="354" r:id="rId56"/>
+    <p:sldId id="355" r:id="rId57"/>
+    <p:sldId id="356" r:id="rId58"/>
+    <p:sldId id="357" r:id="rId59"/>
+    <p:sldId id="358" r:id="rId60"/>
+    <p:sldId id="348" r:id="rId61"/>
+    <p:sldId id="349" r:id="rId62"/>
+    <p:sldId id="280" r:id="rId63"/>
+    <p:sldId id="281" r:id="rId65"/>
+    <p:sldId id="350" r:id="rId67"/>
+    <p:sldId id="283" r:id="rId68"/>
   </p:sldIdLst>
   <p:sldSz cx="12192000" cy="6858000"/>
   <p:notesSz cx="6858000" cy="9144000"/>
@@ -317,7 +317,7 @@
       <inkml:brushProperty name="fitToCurve" value="1"/>
     </inkml:brush>
   </inkml:definitions>
-  <inkml:trace contextRef="#ctx0" brushRef="#br0">0 111,'22'0,"0"0,0 0,1 0,-1 0,45 0,22 0,22 0,-66 0,44 0,-44 0,44 0,0 0,-45 0,68 0,-45 0,0 0,-23 0,45 0,-44 0,44 0,-22 0,22-22,0 22,-67 0,68 0,-24-23,-21 23,-23 0,23 0,-23 0,67 0,-66 0,21 23,23-23,0 0,-23 0,-21 0,44 0,-45 0,45 0,0 0,22 0,-67 0,67 44,-44-44,22 0,-23 0,23 0,0 22,133-22,-110 0,66 0,66 23,90-23,-133 0,-46 0,-66 0,22 0,-22 0,22 0,1 0,-68 0,45 0,-23 0,1 0,22 0,0 0,-23 0,23 0,22 0,-22 0,-45 0,23 0,44 0,-22 0,44 0,-66 0,44 0,-67 0,67 0,-22 0,134 0,44 0,-178 22,111-22,-22 0,-67 0,0 0,23 0,-68 0,46 0,21 0,-89 0,157 0,-113 0,46 0,-45 0,66 0,-43 0,66 0,-45 0,23 0,-90 0,68 0,-45 0,-23 0,90-22,-45-1,-22 1,44 0,-66 22,44 0,-44 0,-23 0,134-45,-112 45,1-22,22 0,-45 22,0 0,1 0,-1-22,-44 22,-1 0,1 0,0 22,22-22</inkml:trace>
+  <inkml:trace contextRef="#ctx0" brushRef="#br0">200 0,'0'22,"45"-22,-23 0,22 0,1 0,22 0,0 0,-45 0,45 0,0 0,-45 0,45 0,-45 0,-44 0,0 0,-45 0,44 0,-66 0,22 0,1 0,-24 22,-43 0,88 23,-22-23,1 0,66 23,0-23,0 1,0 21,0 1,44 22,-22-67,1 66,43-21,1 22,-22-67,22 22,44-22,1 0,-90 0,22 0,1 0,-23 0,-22 0</inkml:trace>
 </inkml:ink>
 </file>
 
@@ -603,7 +603,7 @@
       <inkml:brushProperty name="fitToCurve" value="1"/>
     </inkml:brush>
   </inkml:definitions>
-  <inkml:trace contextRef="#ctx0" brushRef="#br0">0 0,'44'0,"-22"0,23 22,22-22,0 0,-1 0,68 44,-89-44,88 45,-43-23,-24 0,1-22,67 45,67-45,-1 0,-22 22,-44 1,67-23,-112 22,223-22,-178 0,133 0,0 0,-155 0,88 0,-66 0,-67 0,156 0,44 0,-133 0,44 0,1 0,43 22,-66-22,-66 0,-46 0,45 0,-22 0,22 0,-22 0,0 0,134 0,-90 0,223 0,-66 0,-68 0,-88 0,21 0,-21 0,22-22,-23 0,23-1,646-110,-602 88,89 23,-44 22,-22 0,66 0,-44-22,-134 22,134 0,-111 0,66 0,156 0,-67 0,-111 0,23 0,88 0,-89 0,-22 0,-66 0,21 0,-22 0,-44 0,66 0,-44 0,22 0,-67 0,1 0,-1 0,-22 0</inkml:trace>
+  <inkml:trace contextRef="#ctx0" brushRef="#br0">267 0,'0'22,"0"45,0-1,-67 46,22 22,23-23,-22-22,21-22,-21 0,44-45,-22 0,66-22,-22-66,1-1,21 44,1-43,-23 66,0-23,23 23,-1-44,1 21,-23-21,23 44,22 0,-23 0,-21 0,43 0,-43 0,21 0,-21 0,43 0,-21 0,-45 0</inkml:trace>
 </inkml:ink>
 </file>
 
@@ -889,7 +889,137 @@
       <inkml:brushProperty name="fitToCurve" value="1"/>
     </inkml:brush>
   </inkml:definitions>
-  <inkml:trace contextRef="#ctx0" brushRef="#br0">200 0,'0'22,"45"-22,-23 0,22 0,1 0,22 0,0 0,-45 0,45 0,0 0,-45 0,45 0,-45 0,-44 0,0 0,-45 0,44 0,-66 0,22 0,1 0,-24 22,-43 0,88 23,-22-23,1 0,66 23,0-23,0 1,0 21,0 1,44 22,-22-67,1 66,43-21,1 22,-22-67,22 22,44-22,1 0,-90 0,22 0,1 0,-23 0,-22 0</inkml:trace>
+  <inkml:trace contextRef="#ctx0" brushRef="#br0">467 66,'-66'134,"-1"-112,22 23,-22 22,0-23,23-44,-23 0,67-22,-44-45,44 0,0 0,0 23,22 22,-22-1,22 23,0-66,1 66,-1 0,0 0,23 0,-1 0,-21 0,21 22,-22-22,-22 44,0 23,0 0,0 0,-44-23,22 23,-45 0,0 0,45-45,-1-22,-21 23,66-1,45-22,0 44,-23-44,23 0,-45 0,1-22,21 22,-44-44,45 21,-45 1,44-45,-21 45,-23 22</inkml:trace>
+</inkml:ink>
+</file>
+
+<file path=ppt/ink/ink30.xml><?xml version="1.0" encoding="utf-8"?>
+<inkml:ink xmlns:inkml="http://www.w3.org/2003/InkML">
+  <inkml:definitions>
+    <inkml:context xml:id="ctx0">
+      <inkml:inkSource xml:id="inkSrc0">
+        <inkml:traceFormat>
+          <inkml:channel name="X" type="integer" max="3200" units="cm"/>
+          <inkml:channel name="Y" type="integer" max="1080" units="cm"/>
+        </inkml:traceFormat>
+        <inkml:channelProperties>
+          <inkml:channelProperty channel="X" name="resolution" value="66.666656" units="1/cm"/>
+          <inkml:channelProperty channel="Y" name="resolution" value="40.000000" units="1/cm"/>
+        </inkml:channelProperties>
+      </inkml:inkSource>
+    </inkml:context>
+    <inkml:brush xml:id="br0">
+      <inkml:brushProperty name="width" value="0.035278" units="cm"/>
+      <inkml:brushProperty name="height" value="0.035278" units="cm"/>
+      <inkml:brushProperty name="color" value="#ff0000"/>
+      <inkml:brushProperty name="fitToCurve" value="1"/>
+    </inkml:brush>
+  </inkml:definitions>
+  <inkml:trace contextRef="#ctx0" brushRef="#br0">2072 267,'0'156,"-45"111,-21 1,-113 244,-21 23,44-223,-23-44,23-23,0 0,23-89,-23 67,44-90,45-21,-22 22,22-1,1-44,21 23,-22-23,45-44,0 44,-1-22,1-1,0-21,22-23,0 23,-22-45,22 22,0 0,0-44,22-22,0-23,23-67,44-156,0 112,0-23,0-66,67 0,0-45,0 0,134-223,-134 178,44 45,-44 0,-44 22,-1 45,-22 89,1 23,-90 66,44 22,-44 1,45 44,-23-67,0 67,-22-22,23 22,-23 22,-23 22,1 1,-45 178,45-67,-45 67,-22 22,-156 401,89-312,67-22,-23 0,-22 0,45-44,-22-1,22-44,0 44,-1-66,1-23,67-66,-23-23,-21 22,66-88,0-1,-23 0,23-44,23-45,88-223,67-133,-22 178,-44 0,200-268,-156 246,-45-45,45 0,0-67,0 22,-44 23,-1 66,-22 68,-44 66,-23 45,0 67,1-1,-23 1,0 0,-23 44,1 23,-156 267,-112 334,89-223,23-21,-22-24,21 24,23-90,0 0,23-67,43-45,-21-44,44-67,0-22,67-67</inkml:trace>
+</inkml:ink>
+</file>
+
+<file path=ppt/ink/ink31.xml><?xml version="1.0" encoding="utf-8"?>
+<inkml:ink xmlns:inkml="http://www.w3.org/2003/InkML">
+  <inkml:definitions>
+    <inkml:context xml:id="ctx0">
+      <inkml:inkSource xml:id="inkSrc0">
+        <inkml:traceFormat>
+          <inkml:channel name="X" type="integer" max="3200" units="cm"/>
+          <inkml:channel name="Y" type="integer" max="1080" units="cm"/>
+        </inkml:traceFormat>
+        <inkml:channelProperties>
+          <inkml:channelProperty channel="X" name="resolution" value="66.666656" units="1/cm"/>
+          <inkml:channelProperty channel="Y" name="resolution" value="40.000000" units="1/cm"/>
+        </inkml:channelProperties>
+      </inkml:inkSource>
+    </inkml:context>
+    <inkml:brush xml:id="br0">
+      <inkml:brushProperty name="width" value="0.035278" units="cm"/>
+      <inkml:brushProperty name="height" value="0.035278" units="cm"/>
+      <inkml:brushProperty name="color" value="#ff0000"/>
+      <inkml:brushProperty name="fitToCurve" value="1"/>
+    </inkml:brush>
+  </inkml:definitions>
+  <inkml:trace contextRef="#ctx0" brushRef="#br0">66 111,'67'-22,"22"-1,45-21,-67 44,44-22,1 44,-68-22,1 44,-1-44,1 23,-23 21,1 1,-1 22,0-45,-22 22,0 23,0-44,0 43,-22-21,-23 0,1-1,-1 23,-22-22,0-1,1 1,21-23,0-22,1 0,22 22,-1-22,1 0,0 0,-1 0,23-22,23 0,-1 22,0 0,1 0,-1 0,0 0,23 0,-1 0,-21 0,21 0,1 22,-45 0,44 1,-21-23,-1 22,0 0,0 0,-22 1,23-1,-23 23,0-23,0 0,0 0,-23 23,1-23,0 1,-45 21,-44 23,66-22,0-23,1 22,-23-44,22 23,1-1,-1 0,1 1,21-1,-21-22,22 0,-1 0,1 22,0-22,0 0,22 0</inkml:trace>
+</inkml:ink>
+</file>
+
+<file path=ppt/ink/ink32.xml><?xml version="1.0" encoding="utf-8"?>
+<inkml:ink xmlns:inkml="http://www.w3.org/2003/InkML">
+  <inkml:definitions>
+    <inkml:context xml:id="ctx0">
+      <inkml:inkSource xml:id="inkSrc0">
+        <inkml:traceFormat>
+          <inkml:channel name="X" type="integer" max="3200" units="cm"/>
+          <inkml:channel name="Y" type="integer" max="1080" units="cm"/>
+        </inkml:traceFormat>
+        <inkml:channelProperties>
+          <inkml:channelProperty channel="X" name="resolution" value="66.666656" units="1/cm"/>
+          <inkml:channelProperty channel="Y" name="resolution" value="40.000000" units="1/cm"/>
+        </inkml:channelProperties>
+      </inkml:inkSource>
+    </inkml:context>
+    <inkml:brush xml:id="br0">
+      <inkml:brushProperty name="width" value="0.035278" units="cm"/>
+      <inkml:brushProperty name="height" value="0.035278" units="cm"/>
+      <inkml:brushProperty name="color" value="#ff0000"/>
+      <inkml:brushProperty name="fitToCurve" value="1"/>
+    </inkml:brush>
+  </inkml:definitions>
+  <inkml:trace contextRef="#ctx0" brushRef="#br0">1292 0,'-45'22,"-21"134,-68 89,67-134,-89 134,89-133,0-23,0 0,-44 112,89-179,-23 67,-22 23,45-68,-23-22,45 23,-22 22,0-23,-23-21,23 21,0 1,-1-23,1 23,0-1,0 1,-1-45,23 22,0 23,-22-45,0 0,22 22,-22 0,22-22</inkml:trace>
+</inkml:ink>
+</file>
+
+<file path=ppt/ink/ink33.xml><?xml version="1.0" encoding="utf-8"?>
+<inkml:ink xmlns:inkml="http://www.w3.org/2003/InkML">
+  <inkml:definitions>
+    <inkml:context xml:id="ctx0">
+      <inkml:inkSource xml:id="inkSrc0">
+        <inkml:traceFormat>
+          <inkml:channel name="X" type="integer" max="3200" units="cm"/>
+          <inkml:channel name="Y" type="integer" max="1080" units="cm"/>
+        </inkml:traceFormat>
+        <inkml:channelProperties>
+          <inkml:channelProperty channel="X" name="resolution" value="66.666656" units="1/cm"/>
+          <inkml:channelProperty channel="Y" name="resolution" value="40.000000" units="1/cm"/>
+        </inkml:channelProperties>
+      </inkml:inkSource>
+    </inkml:context>
+    <inkml:brush xml:id="br0">
+      <inkml:brushProperty name="width" value="0.035278" units="cm"/>
+      <inkml:brushProperty name="height" value="0.035278" units="cm"/>
+      <inkml:brushProperty name="color" value="#ff0000"/>
+      <inkml:brushProperty name="fitToCurve" value="1"/>
+    </inkml:brush>
+  </inkml:definitions>
+  <inkml:trace contextRef="#ctx0" brushRef="#br0">0 0,'0'44,"0"45,0 45,0 245,0-201,0-22,0-45,0-44,0 22,0-66,0-1,0 0,0 1,0-1,0-22</inkml:trace>
+</inkml:ink>
+</file>
+
+<file path=ppt/ink/ink34.xml><?xml version="1.0" encoding="utf-8"?>
+<inkml:ink xmlns:inkml="http://www.w3.org/2003/InkML">
+  <inkml:definitions>
+    <inkml:context xml:id="ctx0">
+      <inkml:inkSource xml:id="inkSrc0">
+        <inkml:traceFormat>
+          <inkml:channel name="X" type="integer" max="3200" units="cm"/>
+          <inkml:channel name="Y" type="integer" max="1080" units="cm"/>
+        </inkml:traceFormat>
+        <inkml:channelProperties>
+          <inkml:channelProperty channel="X" name="resolution" value="66.666656" units="1/cm"/>
+          <inkml:channelProperty channel="Y" name="resolution" value="40.000000" units="1/cm"/>
+        </inkml:channelProperties>
+      </inkml:inkSource>
+    </inkml:context>
+    <inkml:brush xml:id="br0">
+      <inkml:brushProperty name="width" value="0.035278" units="cm"/>
+      <inkml:brushProperty name="height" value="0.035278" units="cm"/>
+      <inkml:brushProperty name="color" value="#ff0000"/>
+      <inkml:brushProperty name="fitToCurve" value="1"/>
+    </inkml:brush>
+  </inkml:definitions>
+  <inkml:trace contextRef="#ctx0" brushRef="#br0">0 0,'0'44,"0"1,0 111,0-67,0-45,0 45,0 1,0-46,0 23,0 0,0-23,0 1,0 0,0-23,0 0,0 0,0 1,0-1,0 0,0-22</inkml:trace>
 </inkml:ink>
 </file>
 
@@ -915,7 +1045,7 @@
       <inkml:brushProperty name="fitToCurve" value="1"/>
     </inkml:brush>
   </inkml:definitions>
-  <inkml:trace contextRef="#ctx0" brushRef="#br0">267 0,'0'22,"0"45,0-1,-67 46,22 22,23-23,-22-22,21-22,-21 0,44-45,-22 0,66-22,-22-66,1-1,21 44,1-43,-23 66,0-23,23 23,-1-44,1 21,-23-21,23 44,22 0,-23 0,-21 0,43 0,-43 0,21 0,-21 0,43 0,-21 0,-45 0</inkml:trace>
+  <inkml:trace contextRef="#ctx0" brushRef="#br0">267 0,'0'66,"0"135,-22 66,-23 23,-22 89,0-45,1-66,66-46,0-66,0-44,0-45,0-45,0-111,0 89</inkml:trace>
 </inkml:ink>
 </file>
 
@@ -941,7 +1071,7 @@
       <inkml:brushProperty name="fitToCurve" value="1"/>
     </inkml:brush>
   </inkml:definitions>
-  <inkml:trace contextRef="#ctx0" brushRef="#br0">467 66,'-66'134,"-1"-112,22 23,-22 22,0-23,23-44,-23 0,67-22,-44-45,44 0,0 0,0 23,22 22,-22-1,22 23,0-66,1 66,-1 0,0 0,23 0,-1 0,-21 0,21 22,-22-22,-22 44,0 23,0 0,0 0,-44-23,22 23,-45 0,0 0,45-45,-1-22,-21 23,66-1,45-22,0 44,-23-44,23 0,-45 0,1-22,21 22,-44-44,45 21,-45 1,44-45,-21 45,-23 22</inkml:trace>
+  <inkml:trace contextRef="#ctx0" brushRef="#br0">579 311,'22'0,"-22"45,0 22,-22-23,-23 1,-44 22,45-23,-23 1,22-23,23-22,0 0,-45 0,44 0,-21 0,-23-44,67-68,-44 45,44 45,0 0,0 0,44-23,1 0,-23 45,22 0,-21-44,-1 44,0 0,1 0,-1 0,22 44,-21 1,21 22,-44 0,0-23,0 45,0-22,-22 0,0-45,-45 45,0-22,45-23,-23 23,23-23,-23 45,23-67,-22 0,44 44,0-66,44 22,1-44,-1 44,-22 0,45 22,0 0,0-22,-22 0,21 0,1 0,-22 22,-23-22,0 0,23-22,22-45,-23 23,1-45,0-23,-1 23,-22 0,23 0,22-90,44 23,45 23,-111 111,-45 44,-22 111,-23 23,-22 0,-44 90,-45 66,22 22,23-111,21 66,24 1,43-67,1-22,-23-157,45-22,0 1,-22-68,22 45</inkml:trace>
 </inkml:ink>
 </file>
 
@@ -967,7 +1097,7 @@
       <inkml:brushProperty name="fitToCurve" value="1"/>
     </inkml:brush>
   </inkml:definitions>
-  <inkml:trace contextRef="#ctx0" brushRef="#br0">267 0,'0'66,"0"135,-22 66,-23 23,-22 89,0-45,1-66,66-46,0-66,0-44,0-45,0-45,0-111,0 89</inkml:trace>
+  <inkml:trace contextRef="#ctx0" brushRef="#br0">0 89,'44'0,"1"0,21 0,1 0,-22 0,22 0,0-23,-1 1,-21 22,0 0,-23-44,0 44,-44 0,-45 0,45 0,-1 22,-21-22,22 22,-23 0,45 1,-67 21,23 23,-23-22,44-1,1 23,-22 89,-1 22,23-22,22-67,0 23,0-45,22-67,0 0,-22 0</inkml:trace>
 </inkml:ink>
 </file>
 
@@ -993,7 +1123,7 @@
       <inkml:brushProperty name="fitToCurve" value="1"/>
     </inkml:brush>
   </inkml:definitions>
-  <inkml:trace contextRef="#ctx0" brushRef="#br0">579 311,'22'0,"-22"45,0 22,-22-23,-23 1,-44 22,45-23,-23 1,22-23,23-22,0 0,-45 0,44 0,-21 0,-23-44,67-68,-44 45,44 45,0 0,0 0,44-23,1 0,-23 45,22 0,-21-44,-1 44,0 0,1 0,-1 0,22 44,-21 1,21 22,-44 0,0-23,0 45,0-22,-22 0,0-45,-45 45,0-22,45-23,-23 23,23-23,-23 45,23-67,-22 0,44 44,0-66,44 22,1-44,-1 44,-22 0,45 22,0 0,0-22,-22 0,21 0,1 0,-22 22,-23-22,0 0,23-22,22-45,-23 23,1-45,0-23,-1 23,-22 0,23 0,22-90,44 23,45 23,-111 111,-45 44,-22 111,-23 23,-22 0,-44 90,-45 66,22 22,23-111,21 66,24 1,43-67,1-22,-23-157,45-22,0 1,-22-68,22 45</inkml:trace>
+  <inkml:trace contextRef="#ctx0" brushRef="#br0">0 0,'66'0,"1"0,-22 0,-1 0,-21 0,21 0,1 0,22 0,-67 0</inkml:trace>
 </inkml:ink>
 </file>
 
@@ -1019,7 +1149,7 @@
       <inkml:brushProperty name="fitToCurve" value="1"/>
     </inkml:brush>
   </inkml:definitions>
-  <inkml:trace contextRef="#ctx0" brushRef="#br0">0 89,'44'0,"1"0,21 0,1 0,-22 0,22 0,0-23,-1 1,-21 22,0 0,-23-44,0 44,-44 0,-45 0,45 0,-1 22,-21-22,22 22,-23 0,45 1,-67 21,23 23,-23-22,44-1,1 23,-22 89,-1 22,23-22,22-67,0 23,0-45,22-67,0 0,-22 0</inkml:trace>
+  <inkml:trace contextRef="#ctx0" brushRef="#br0">0 111,'22'0,"0"0,0 0,1 0,-1 0,45 0,22 0,22 0,-66 0,44 0,-44 0,44 0,0 0,-45 0,68 0,-45 0,0 0,-23 0,45 0,-44 0,44 0,-22 0,22-22,0 22,-67 0,68 0,-24-23,-21 23,-23 0,23 0,-23 0,67 0,-66 0,21 23,23-23,0 0,-23 0,-21 0,44 0,-45 0,45 0,0 0,22 0,-67 0,67 44,-44-44,22 0,-23 0,23 0,0 22,133-22,-110 0,66 0,66 23,90-23,-133 0,-46 0,-66 0,22 0,-22 0,22 0,1 0,-68 0,45 0,-23 0,1 0,22 0,0 0,-23 0,23 0,22 0,-22 0,-45 0,23 0,44 0,-22 0,44 0,-66 0,44 0,-67 0,67 0,-22 0,134 0,44 0,-178 22,111-22,-22 0,-67 0,0 0,23 0,-68 0,46 0,21 0,-89 0,157 0,-113 0,46 0,-45 0,66 0,-43 0,66 0,-45 0,23 0,-90 0,68 0,-45 0,-23 0,90-22,-45-1,-22 1,44 0,-66 22,44 0,-44 0,-23 0,134-45,-112 45,1-22,22 0,-45 22,0 0,1 0,-1-22,-44 22,-1 0,1 0,0 22,22-22</inkml:trace>
 </inkml:ink>
 </file>
 
@@ -1045,7 +1175,7 @@
       <inkml:brushProperty name="fitToCurve" value="1"/>
     </inkml:brush>
   </inkml:definitions>
-  <inkml:trace contextRef="#ctx0" brushRef="#br0">0 0,'66'0,"1"0,-22 0,-1 0,-21 0,21 0,1 0,22 0,-67 0</inkml:trace>
+  <inkml:trace contextRef="#ctx0" brushRef="#br0">0 0,'44'0,"-22"0,23 22,22-22,0 0,-1 0,68 44,-89-44,88 45,-43-23,-24 0,1-22,67 45,67-45,-1 0,-22 22,-44 1,67-23,-112 22,223-22,-178 0,133 0,0 0,-155 0,88 0,-66 0,-67 0,156 0,44 0,-133 0,44 0,1 0,43 22,-66-22,-66 0,-46 0,45 0,-22 0,22 0,-22 0,0 0,134 0,-90 0,223 0,-66 0,-68 0,-88 0,21 0,-21 0,22-22,-23 0,23-1,646-110,-602 88,89 23,-44 22,-22 0,66 0,-44-22,-134 22,134 0,-111 0,66 0,156 0,-67 0,-111 0,23 0,88 0,-89 0,-22 0,-66 0,21 0,-22 0,-44 0,66 0,-44 0,22 0,-67 0,1 0,-1 0,-22 0</inkml:trace>
 </inkml:ink>
 </file>
 
@@ -2454,7 +2584,7 @@
   <p:cSld>
     <p:spTree>
       <p:nvGrpSpPr>
-        <p:cNvPr id="1" name="Shape 171"/>
+        <p:cNvPr id="1" name="Shape 163"/>
         <p:cNvGrpSpPr/>
         <p:nvPr/>
       </p:nvGrpSpPr>
@@ -2468,7 +2598,7 @@
       </p:grpSpPr>
       <p:sp>
         <p:nvSpPr>
-          <p:cNvPr id="172" name="Google Shape;172;p16:notes"/>
+          <p:cNvPr id="164" name="Google Shape;164;p15:notes"/>
           <p:cNvSpPr txBox="1">
             <a:spLocks noGrp="1"/>
           </p:cNvSpPr>
@@ -2506,7 +2636,7 @@
       </p:sp>
       <p:sp>
         <p:nvSpPr>
-          <p:cNvPr id="173" name="Google Shape;173;p16:notes"/>
+          <p:cNvPr id="165" name="Google Shape;165;p15:notes"/>
           <p:cNvSpPr>
             <a:spLocks noGrp="1" noRot="1" noChangeAspect="1"/>
           </p:cNvSpPr>
@@ -2558,7 +2688,7 @@
   <p:cSld>
     <p:spTree>
       <p:nvGrpSpPr>
-        <p:cNvPr id="1" name="Shape 163"/>
+        <p:cNvPr id="1" name="Shape 171"/>
         <p:cNvGrpSpPr/>
         <p:nvPr/>
       </p:nvGrpSpPr>
@@ -2572,7 +2702,7 @@
       </p:grpSpPr>
       <p:sp>
         <p:nvSpPr>
-          <p:cNvPr id="164" name="Google Shape;164;p15:notes"/>
+          <p:cNvPr id="172" name="Google Shape;172;p16:notes"/>
           <p:cNvSpPr txBox="1">
             <a:spLocks noGrp="1"/>
           </p:cNvSpPr>
@@ -2610,7 +2740,7 @@
       </p:sp>
       <p:sp>
         <p:nvSpPr>
-          <p:cNvPr id="165" name="Google Shape;165;p15:notes"/>
+          <p:cNvPr id="173" name="Google Shape;173;p16:notes"/>
           <p:cNvSpPr>
             <a:spLocks noGrp="1" noRot="1" noChangeAspect="1"/>
           </p:cNvSpPr>
@@ -15601,6 +15731,923 @@
 </file>
 
 <file path=ppt/slides/slide21.xml><?xml version="1.0" encoding="utf-8"?>
+<p:sld xmlns:a="http://schemas.openxmlformats.org/drawingml/2006/main" xmlns:r="http://schemas.openxmlformats.org/officeDocument/2006/relationships" xmlns:p="http://schemas.openxmlformats.org/presentationml/2006/main">
+  <p:cSld>
+    <p:spTree>
+      <p:nvGrpSpPr>
+        <p:cNvPr id="1" name="Shape 166"/>
+        <p:cNvGrpSpPr/>
+        <p:nvPr/>
+      </p:nvGrpSpPr>
+      <p:grpSpPr>
+        <a:xfrm>
+          <a:off x="0" y="0"/>
+          <a:ext cx="0" cy="0"/>
+          <a:chOff x="0" y="0"/>
+          <a:chExt cx="0" cy="0"/>
+        </a:xfrm>
+      </p:grpSpPr>
+      <p:sp>
+        <p:nvSpPr>
+          <p:cNvPr id="167" name="Google Shape;167;p15"/>
+          <p:cNvSpPr txBox="1">
+            <a:spLocks noGrp="1"/>
+          </p:cNvSpPr>
+          <p:nvPr>
+            <p:ph type="title"/>
+          </p:nvPr>
+        </p:nvSpPr>
+        <p:spPr>
+          <a:prstGeom prst="rect">
+            <a:avLst/>
+          </a:prstGeom>
+          <a:noFill/>
+          <a:ln>
+            <a:noFill/>
+          </a:ln>
+        </p:spPr>
+        <p:txBody>
+          <a:bodyPr spcFirstLastPara="1" wrap="square" lIns="91425" tIns="45700" rIns="91425" bIns="45700" anchor="t" anchorCtr="0">
+            <a:noAutofit/>
+          </a:bodyPr>
+          <a:lstStyle/>
+          <a:p>
+            <a:pPr marL="0" lvl="0" indent="0" algn="l" rtl="0">
+              <a:spcBef>
+                <a:spcPts val="0"/>
+              </a:spcBef>
+              <a:spcAft>
+                <a:spcPts val="0"/>
+              </a:spcAft>
+              <a:buNone/>
+            </a:pPr>
+            <a:r>
+              <a:rPr lang="en-US" dirty="0"/>
+              <a:t>HTML 실습 2-1</a:t>
+            </a:r>
+            <a:br>
+              <a:rPr lang="en-US" dirty="0"/>
+            </a:br>
+            <a:endParaRPr dirty="0"/>
+          </a:p>
+        </p:txBody>
+      </p:sp>
+      <p:sp>
+        <p:nvSpPr>
+          <p:cNvPr id="4" name="텍스트 개체 틀 3">
+            <a:extLst>
+              <a:ext uri="{FF2B5EF4-FFF2-40B4-BE49-F238E27FC236}">
+                <a16:creationId xmlns:a16="http://schemas.microsoft.com/office/drawing/2014/main" id="{FBDE7F16-D973-91A6-1E74-67EB4A060FDF}"/>
+              </a:ext>
+            </a:extLst>
+          </p:cNvPr>
+          <p:cNvSpPr>
+            <a:spLocks noGrp="1"/>
+          </p:cNvSpPr>
+          <p:nvPr>
+            <p:ph type="body" idx="1"/>
+          </p:nvPr>
+        </p:nvSpPr>
+        <p:spPr/>
+        <p:txBody>
+          <a:bodyPr/>
+          <a:lstStyle/>
+          <a:p>
+            <a:r>
+              <a:rPr lang="ko-KR" altLang="en-US" dirty="0"/>
+              <a:t>코드를 작성해 보고 어떤 결과가 나오는지 확인해본다</a:t>
+            </a:r>
+            <a:r>
+              <a:rPr lang="en-US" altLang="ko-KR" dirty="0"/>
+              <a:t>.</a:t>
+            </a:r>
+          </a:p>
+          <a:p>
+            <a:r>
+              <a:rPr lang="en-US" altLang="ko-KR" dirty="0"/>
+              <a:t>&lt;table&gt; </a:t>
+            </a:r>
+            <a:r>
+              <a:rPr lang="ko-KR" altLang="en-US" dirty="0"/>
+              <a:t>태그를 사용한 코드로 행과 열을 어떻게 표현하는지 생각해본다</a:t>
+            </a:r>
+            <a:r>
+              <a:rPr lang="en-US" altLang="ko-KR" dirty="0"/>
+              <a:t>.</a:t>
+            </a:r>
+            <a:endParaRPr lang="ko-KR" altLang="en-US" dirty="0"/>
+          </a:p>
+        </p:txBody>
+      </p:sp>
+      <p:sp>
+        <p:nvSpPr>
+          <p:cNvPr id="168" name="Google Shape;168;p15"/>
+          <p:cNvSpPr txBox="1">
+            <a:spLocks noGrp="1"/>
+          </p:cNvSpPr>
+          <p:nvPr>
+            <p:ph type="sldNum" idx="12"/>
+          </p:nvPr>
+        </p:nvSpPr>
+        <p:spPr>
+          <a:prstGeom prst="rect">
+            <a:avLst/>
+          </a:prstGeom>
+          <a:noFill/>
+          <a:ln>
+            <a:noFill/>
+          </a:ln>
+        </p:spPr>
+        <p:txBody>
+          <a:bodyPr spcFirstLastPara="1" wrap="square" lIns="91425" tIns="45700" rIns="91425" bIns="45700" anchor="t" anchorCtr="0">
+            <a:noAutofit/>
+          </a:bodyPr>
+          <a:lstStyle/>
+          <a:p>
+            <a:pPr marL="0" lvl="0" indent="0" algn="r" rtl="0">
+              <a:lnSpc>
+                <a:spcPct val="100000"/>
+              </a:lnSpc>
+              <a:spcBef>
+                <a:spcPts val="0"/>
+              </a:spcBef>
+              <a:spcAft>
+                <a:spcPts val="0"/>
+              </a:spcAft>
+              <a:buNone/>
+            </a:pPr>
+            <a:fld id="{00000000-1234-1234-1234-123412341234}" type="slidenum">
+              <a:rPr lang="en-US"/>
+              <a:t>22</a:t>
+            </a:fld>
+            <a:endParaRPr/>
+          </a:p>
+        </p:txBody>
+      </p:sp>
+      <p:sp>
+        <p:nvSpPr>
+          <p:cNvPr id="169" name="Google Shape;169;p15"/>
+          <p:cNvSpPr txBox="1">
+            <a:spLocks noGrp="1"/>
+          </p:cNvSpPr>
+          <p:nvPr>
+            <p:ph type="ftr" idx="11"/>
+          </p:nvPr>
+        </p:nvSpPr>
+        <p:spPr>
+          <a:prstGeom prst="rect">
+            <a:avLst/>
+          </a:prstGeom>
+          <a:noFill/>
+          <a:ln>
+            <a:noFill/>
+          </a:ln>
+        </p:spPr>
+        <p:txBody>
+          <a:bodyPr spcFirstLastPara="1" wrap="square" lIns="91425" tIns="45700" rIns="91425" bIns="45700" anchor="b" anchorCtr="0">
+            <a:noAutofit/>
+          </a:bodyPr>
+          <a:lstStyle/>
+          <a:p>
+            <a:pPr marL="0" lvl="0" indent="0" algn="ctr" rtl="0">
+              <a:lnSpc>
+                <a:spcPct val="100000"/>
+              </a:lnSpc>
+              <a:spcBef>
+                <a:spcPts val="0"/>
+              </a:spcBef>
+              <a:spcAft>
+                <a:spcPts val="0"/>
+              </a:spcAft>
+              <a:buNone/>
+            </a:pPr>
+            <a:endParaRPr/>
+          </a:p>
+        </p:txBody>
+      </p:sp>
+      <p:sp>
+        <p:nvSpPr>
+          <p:cNvPr id="170" name="Google Shape;170;p15"/>
+          <p:cNvSpPr/>
+          <p:nvPr/>
+        </p:nvSpPr>
+        <p:spPr>
+          <a:xfrm>
+            <a:off x="355600" y="2132674"/>
+            <a:ext cx="11480800" cy="4247276"/>
+          </a:xfrm>
+          <a:prstGeom prst="rect">
+            <a:avLst/>
+          </a:prstGeom>
+          <a:noFill/>
+          <a:ln w="9525" cap="flat" cmpd="sng">
+            <a:solidFill>
+              <a:schemeClr val="dk1"/>
+            </a:solidFill>
+            <a:prstDash val="solid"/>
+            <a:round/>
+            <a:headEnd type="none" w="sm" len="sm"/>
+            <a:tailEnd type="none" w="sm" len="sm"/>
+          </a:ln>
+        </p:spPr>
+        <p:txBody>
+          <a:bodyPr spcFirstLastPara="1" wrap="square" lIns="91425" tIns="45700" rIns="91425" bIns="45700" anchor="t" anchorCtr="0">
+            <a:spAutoFit/>
+          </a:bodyPr>
+          <a:lstStyle/>
+          <a:p>
+            <a:pPr marL="0" marR="0" lvl="0" indent="0" algn="l" rtl="0">
+              <a:lnSpc>
+                <a:spcPct val="150000"/>
+              </a:lnSpc>
+              <a:spcBef>
+                <a:spcPts val="0"/>
+              </a:spcBef>
+              <a:spcAft>
+                <a:spcPts val="0"/>
+              </a:spcAft>
+              <a:buNone/>
+            </a:pPr>
+            <a:r>
+              <a:rPr lang="en-US" sz="900" dirty="0">
+                <a:solidFill>
+                  <a:schemeClr val="dk1"/>
+                </a:solidFill>
+                <a:latin typeface="Tahoma"/>
+                <a:ea typeface="Tahoma"/>
+                <a:cs typeface="Tahoma"/>
+                <a:sym typeface="Tahoma"/>
+              </a:rPr>
+              <a:t>&lt;!DOCTYPE html&gt;</a:t>
+            </a:r>
+            <a:endParaRPr sz="900" dirty="0"/>
+          </a:p>
+          <a:p>
+            <a:pPr marL="0" marR="0" lvl="0" indent="0" algn="l" rtl="0">
+              <a:lnSpc>
+                <a:spcPct val="150000"/>
+              </a:lnSpc>
+              <a:spcBef>
+                <a:spcPts val="0"/>
+              </a:spcBef>
+              <a:spcAft>
+                <a:spcPts val="0"/>
+              </a:spcAft>
+              <a:buNone/>
+            </a:pPr>
+            <a:r>
+              <a:rPr lang="en-US" sz="900" dirty="0">
+                <a:solidFill>
+                  <a:schemeClr val="dk1"/>
+                </a:solidFill>
+                <a:latin typeface="Tahoma"/>
+                <a:ea typeface="Tahoma"/>
+                <a:cs typeface="Tahoma"/>
+                <a:sym typeface="Tahoma"/>
+              </a:rPr>
+              <a:t>&lt;html&gt;</a:t>
+            </a:r>
+            <a:endParaRPr lang="en-US" sz="900" dirty="0"/>
+          </a:p>
+          <a:p>
+            <a:pPr marL="0" marR="0" lvl="0" indent="0" algn="l" rtl="0">
+              <a:lnSpc>
+                <a:spcPct val="150000"/>
+              </a:lnSpc>
+              <a:spcBef>
+                <a:spcPts val="0"/>
+              </a:spcBef>
+              <a:spcAft>
+                <a:spcPts val="0"/>
+              </a:spcAft>
+              <a:buNone/>
+            </a:pPr>
+            <a:r>
+              <a:rPr lang="en-US" sz="900" dirty="0">
+                <a:solidFill>
+                  <a:schemeClr val="dk1"/>
+                </a:solidFill>
+                <a:latin typeface="Tahoma"/>
+                <a:ea typeface="Tahoma"/>
+                <a:cs typeface="Tahoma"/>
+                <a:sym typeface="Tahoma"/>
+              </a:rPr>
+              <a:t>    &lt;head&gt;</a:t>
+            </a:r>
+          </a:p>
+          <a:p>
+            <a:pPr marL="0" marR="0" lvl="0" indent="0" algn="l" rtl="0">
+              <a:lnSpc>
+                <a:spcPct val="150000"/>
+              </a:lnSpc>
+              <a:spcBef>
+                <a:spcPts val="0"/>
+              </a:spcBef>
+              <a:spcAft>
+                <a:spcPts val="0"/>
+              </a:spcAft>
+              <a:buNone/>
+            </a:pPr>
+            <a:r>
+              <a:rPr lang="en-US" altLang="ko-KR" sz="900" dirty="0">
+                <a:solidFill>
+                  <a:schemeClr val="dk1"/>
+                </a:solidFill>
+                <a:latin typeface="Tahoma"/>
+                <a:ea typeface="Tahoma"/>
+                <a:cs typeface="Tahoma"/>
+                <a:sym typeface="Tahoma"/>
+              </a:rPr>
+              <a:t>        &lt;meta charset="UTF-8"&gt;</a:t>
+            </a:r>
+          </a:p>
+          <a:p>
+            <a:pPr marL="0" marR="0" lvl="0" indent="0" algn="l" rtl="0">
+              <a:lnSpc>
+                <a:spcPct val="150000"/>
+              </a:lnSpc>
+              <a:spcBef>
+                <a:spcPts val="0"/>
+              </a:spcBef>
+              <a:spcAft>
+                <a:spcPts val="0"/>
+              </a:spcAft>
+              <a:buNone/>
+            </a:pPr>
+            <a:r>
+              <a:rPr lang="en-US" sz="900" dirty="0">
+                <a:solidFill>
+                  <a:schemeClr val="dk1"/>
+                </a:solidFill>
+                <a:latin typeface="Tahoma"/>
+                <a:ea typeface="Tahoma"/>
+                <a:cs typeface="Tahoma"/>
+                <a:sym typeface="Tahoma"/>
+              </a:rPr>
+              <a:t>        </a:t>
+            </a:r>
+            <a:r>
+              <a:rPr lang="en-US" altLang="ko-KR" sz="1050" dirty="0"/>
+              <a:t>&lt;title&gt;</a:t>
+            </a:r>
+            <a:r>
+              <a:rPr lang="ko-KR" altLang="en-US" sz="1050" dirty="0"/>
+              <a:t>표 실습</a:t>
+            </a:r>
+            <a:r>
+              <a:rPr lang="en-US" altLang="ko-KR" sz="1050" dirty="0"/>
+              <a:t>&lt;/title&gt;</a:t>
+            </a:r>
+            <a:endParaRPr sz="900" dirty="0"/>
+          </a:p>
+          <a:p>
+            <a:pPr marL="0" marR="0" lvl="0" indent="0" algn="l" rtl="0">
+              <a:lnSpc>
+                <a:spcPct val="150000"/>
+              </a:lnSpc>
+              <a:spcBef>
+                <a:spcPts val="0"/>
+              </a:spcBef>
+              <a:spcAft>
+                <a:spcPts val="0"/>
+              </a:spcAft>
+              <a:buNone/>
+            </a:pPr>
+            <a:r>
+              <a:rPr lang="en-US" sz="900" dirty="0">
+                <a:solidFill>
+                  <a:schemeClr val="dk1"/>
+                </a:solidFill>
+                <a:latin typeface="Tahoma"/>
+                <a:ea typeface="Tahoma"/>
+                <a:cs typeface="Tahoma"/>
+                <a:sym typeface="Tahoma"/>
+              </a:rPr>
+              <a:t>    &lt;/head&gt;</a:t>
+            </a:r>
+            <a:endParaRPr sz="900" dirty="0"/>
+          </a:p>
+          <a:p>
+            <a:pPr marL="0" marR="0" lvl="0" indent="0" algn="l" rtl="0">
+              <a:lnSpc>
+                <a:spcPct val="150000"/>
+              </a:lnSpc>
+              <a:spcBef>
+                <a:spcPts val="0"/>
+              </a:spcBef>
+              <a:spcAft>
+                <a:spcPts val="0"/>
+              </a:spcAft>
+              <a:buNone/>
+            </a:pPr>
+            <a:r>
+              <a:rPr lang="en-US" sz="900" dirty="0">
+                <a:solidFill>
+                  <a:schemeClr val="dk1"/>
+                </a:solidFill>
+                <a:latin typeface="Tahoma"/>
+                <a:ea typeface="Tahoma"/>
+                <a:cs typeface="Tahoma"/>
+                <a:sym typeface="Tahoma"/>
+              </a:rPr>
+              <a:t>    &lt;body&gt;</a:t>
+            </a:r>
+            <a:endParaRPr sz="900" dirty="0"/>
+          </a:p>
+          <a:p>
+            <a:pPr marL="0" marR="0" lvl="0" indent="0" algn="l" rtl="0">
+              <a:lnSpc>
+                <a:spcPct val="150000"/>
+              </a:lnSpc>
+              <a:spcBef>
+                <a:spcPts val="0"/>
+              </a:spcBef>
+              <a:spcAft>
+                <a:spcPts val="0"/>
+              </a:spcAft>
+              <a:buNone/>
+            </a:pPr>
+            <a:r>
+              <a:rPr lang="en-US" sz="900" dirty="0">
+                <a:solidFill>
+                  <a:schemeClr val="dk1"/>
+                </a:solidFill>
+                <a:latin typeface="Tahoma"/>
+                <a:ea typeface="Tahoma"/>
+                <a:cs typeface="Tahoma"/>
+                <a:sym typeface="Tahoma"/>
+              </a:rPr>
+              <a:t>        </a:t>
+            </a:r>
+            <a:r>
+              <a:rPr lang="en-US" sz="900" b="1" dirty="0">
+                <a:solidFill>
+                  <a:schemeClr val="dk1"/>
+                </a:solidFill>
+                <a:latin typeface="Tahoma"/>
+                <a:ea typeface="Tahoma"/>
+                <a:cs typeface="Tahoma"/>
+                <a:sym typeface="Tahoma"/>
+              </a:rPr>
+              <a:t>&lt;table border="1"&gt;</a:t>
+            </a:r>
+            <a:endParaRPr sz="900" dirty="0"/>
+          </a:p>
+          <a:p>
+            <a:pPr marL="0" marR="0" lvl="0" indent="0" algn="l" rtl="0">
+              <a:lnSpc>
+                <a:spcPct val="150000"/>
+              </a:lnSpc>
+              <a:spcBef>
+                <a:spcPts val="0"/>
+              </a:spcBef>
+              <a:spcAft>
+                <a:spcPts val="0"/>
+              </a:spcAft>
+              <a:buNone/>
+            </a:pPr>
+            <a:r>
+              <a:rPr lang="en-US" sz="900" dirty="0">
+                <a:solidFill>
+                  <a:schemeClr val="dk1"/>
+                </a:solidFill>
+                <a:latin typeface="Tahoma"/>
+                <a:ea typeface="Tahoma"/>
+                <a:cs typeface="Tahoma"/>
+                <a:sym typeface="Tahoma"/>
+              </a:rPr>
+              <a:t>            &lt;tr&gt;</a:t>
+            </a:r>
+            <a:endParaRPr sz="900" dirty="0"/>
+          </a:p>
+          <a:p>
+            <a:pPr marL="0" marR="0" lvl="0" indent="0" algn="l" rtl="0">
+              <a:lnSpc>
+                <a:spcPct val="150000"/>
+              </a:lnSpc>
+              <a:spcBef>
+                <a:spcPts val="0"/>
+              </a:spcBef>
+              <a:spcAft>
+                <a:spcPts val="0"/>
+              </a:spcAft>
+              <a:buNone/>
+            </a:pPr>
+            <a:r>
+              <a:rPr lang="en-US" sz="900" dirty="0">
+                <a:solidFill>
+                  <a:schemeClr val="dk1"/>
+                </a:solidFill>
+                <a:latin typeface="Tahoma"/>
+                <a:ea typeface="Tahoma"/>
+                <a:cs typeface="Tahoma"/>
+                <a:sym typeface="Tahoma"/>
+              </a:rPr>
+              <a:t>                &lt;td&gt;</a:t>
+            </a:r>
+            <a:r>
+              <a:rPr lang="en-US" sz="900" dirty="0" err="1">
+                <a:solidFill>
+                  <a:schemeClr val="dk1"/>
+                </a:solidFill>
+                <a:latin typeface="Tahoma"/>
+                <a:ea typeface="Tahoma"/>
+                <a:cs typeface="Tahoma"/>
+                <a:sym typeface="Tahoma"/>
+              </a:rPr>
+              <a:t>이름</a:t>
+            </a:r>
+            <a:r>
+              <a:rPr lang="en-US" sz="900" dirty="0">
+                <a:solidFill>
+                  <a:schemeClr val="dk1"/>
+                </a:solidFill>
+                <a:latin typeface="Tahoma"/>
+                <a:ea typeface="Tahoma"/>
+                <a:cs typeface="Tahoma"/>
+                <a:sym typeface="Tahoma"/>
+              </a:rPr>
+              <a:t>&lt;/td&gt;&lt;td&gt;</a:t>
+            </a:r>
+            <a:r>
+              <a:rPr lang="en-US" sz="900" dirty="0" err="1">
+                <a:solidFill>
+                  <a:schemeClr val="dk1"/>
+                </a:solidFill>
+                <a:latin typeface="Tahoma"/>
+                <a:ea typeface="Tahoma"/>
+                <a:cs typeface="Tahoma"/>
+                <a:sym typeface="Tahoma"/>
+              </a:rPr>
+              <a:t>성별</a:t>
+            </a:r>
+            <a:r>
+              <a:rPr lang="en-US" sz="900" dirty="0">
+                <a:solidFill>
+                  <a:schemeClr val="dk1"/>
+                </a:solidFill>
+                <a:latin typeface="Tahoma"/>
+                <a:ea typeface="Tahoma"/>
+                <a:cs typeface="Tahoma"/>
+                <a:sym typeface="Tahoma"/>
+              </a:rPr>
+              <a:t>&lt;/td&gt;&lt;td&gt;</a:t>
+            </a:r>
+            <a:r>
+              <a:rPr lang="en-US" sz="900" dirty="0" err="1">
+                <a:solidFill>
+                  <a:schemeClr val="dk1"/>
+                </a:solidFill>
+                <a:latin typeface="Tahoma"/>
+                <a:ea typeface="Tahoma"/>
+                <a:cs typeface="Tahoma"/>
+                <a:sym typeface="Tahoma"/>
+              </a:rPr>
+              <a:t>나이</a:t>
+            </a:r>
+            <a:r>
+              <a:rPr lang="en-US" sz="900" dirty="0">
+                <a:solidFill>
+                  <a:schemeClr val="dk1"/>
+                </a:solidFill>
+                <a:latin typeface="Tahoma"/>
+                <a:ea typeface="Tahoma"/>
+                <a:cs typeface="Tahoma"/>
+                <a:sym typeface="Tahoma"/>
+              </a:rPr>
+              <a:t>&lt;/td&gt;</a:t>
+            </a:r>
+            <a:endParaRPr sz="900" dirty="0"/>
+          </a:p>
+          <a:p>
+            <a:pPr marL="0" marR="0" lvl="0" indent="0" algn="l" rtl="0">
+              <a:lnSpc>
+                <a:spcPct val="150000"/>
+              </a:lnSpc>
+              <a:spcBef>
+                <a:spcPts val="0"/>
+              </a:spcBef>
+              <a:spcAft>
+                <a:spcPts val="0"/>
+              </a:spcAft>
+              <a:buNone/>
+            </a:pPr>
+            <a:r>
+              <a:rPr lang="en-US" sz="900" dirty="0">
+                <a:solidFill>
+                  <a:schemeClr val="dk1"/>
+                </a:solidFill>
+                <a:latin typeface="Tahoma"/>
+                <a:ea typeface="Tahoma"/>
+                <a:cs typeface="Tahoma"/>
+                <a:sym typeface="Tahoma"/>
+              </a:rPr>
+              <a:t>            &lt;/tr&gt;</a:t>
+            </a:r>
+            <a:endParaRPr sz="900" dirty="0"/>
+          </a:p>
+          <a:p>
+            <a:pPr marL="0" marR="0" lvl="0" indent="0" algn="l" rtl="0">
+              <a:lnSpc>
+                <a:spcPct val="150000"/>
+              </a:lnSpc>
+              <a:spcBef>
+                <a:spcPts val="0"/>
+              </a:spcBef>
+              <a:spcAft>
+                <a:spcPts val="0"/>
+              </a:spcAft>
+              <a:buNone/>
+            </a:pPr>
+            <a:r>
+              <a:rPr lang="en-US" sz="900" dirty="0">
+                <a:solidFill>
+                  <a:schemeClr val="dk1"/>
+                </a:solidFill>
+                <a:latin typeface="Tahoma"/>
+                <a:ea typeface="Tahoma"/>
+                <a:cs typeface="Tahoma"/>
+                <a:sym typeface="Tahoma"/>
+              </a:rPr>
+              <a:t>            &lt;tr&gt;</a:t>
+            </a:r>
+            <a:endParaRPr sz="900" dirty="0"/>
+          </a:p>
+          <a:p>
+            <a:pPr marL="0" marR="0" lvl="0" indent="0" algn="l" rtl="0">
+              <a:lnSpc>
+                <a:spcPct val="150000"/>
+              </a:lnSpc>
+              <a:spcBef>
+                <a:spcPts val="0"/>
+              </a:spcBef>
+              <a:spcAft>
+                <a:spcPts val="0"/>
+              </a:spcAft>
+              <a:buNone/>
+            </a:pPr>
+            <a:r>
+              <a:rPr lang="en-US" sz="900" dirty="0">
+                <a:solidFill>
+                  <a:schemeClr val="dk1"/>
+                </a:solidFill>
+                <a:latin typeface="Tahoma"/>
+                <a:ea typeface="Tahoma"/>
+                <a:cs typeface="Tahoma"/>
+                <a:sym typeface="Tahoma"/>
+              </a:rPr>
+              <a:t>                &lt;td&gt;</a:t>
+            </a:r>
+            <a:r>
+              <a:rPr lang="en-US" sz="900" dirty="0" err="1">
+                <a:solidFill>
+                  <a:schemeClr val="dk1"/>
+                </a:solidFill>
+                <a:latin typeface="Tahoma"/>
+                <a:ea typeface="Tahoma"/>
+                <a:cs typeface="Tahoma"/>
+                <a:sym typeface="Tahoma"/>
+              </a:rPr>
+              <a:t>홍길동</a:t>
+            </a:r>
+            <a:r>
+              <a:rPr lang="en-US" sz="900" dirty="0">
+                <a:solidFill>
+                  <a:schemeClr val="dk1"/>
+                </a:solidFill>
+                <a:latin typeface="Tahoma"/>
+                <a:ea typeface="Tahoma"/>
+                <a:cs typeface="Tahoma"/>
+                <a:sym typeface="Tahoma"/>
+              </a:rPr>
+              <a:t>&lt;/td&gt;&lt;td&gt;남&lt;/td&gt;&lt;td&gt;6&lt;/td&gt;</a:t>
+            </a:r>
+            <a:endParaRPr sz="900" dirty="0"/>
+          </a:p>
+          <a:p>
+            <a:pPr marL="0" marR="0" lvl="0" indent="0" algn="l" rtl="0">
+              <a:lnSpc>
+                <a:spcPct val="150000"/>
+              </a:lnSpc>
+              <a:spcBef>
+                <a:spcPts val="0"/>
+              </a:spcBef>
+              <a:spcAft>
+                <a:spcPts val="0"/>
+              </a:spcAft>
+              <a:buNone/>
+            </a:pPr>
+            <a:r>
+              <a:rPr lang="en-US" sz="900" dirty="0">
+                <a:solidFill>
+                  <a:schemeClr val="dk1"/>
+                </a:solidFill>
+                <a:latin typeface="Tahoma"/>
+                <a:ea typeface="Tahoma"/>
+                <a:cs typeface="Tahoma"/>
+                <a:sym typeface="Tahoma"/>
+              </a:rPr>
+              <a:t>            &lt;/tr&gt;</a:t>
+            </a:r>
+            <a:endParaRPr sz="900" dirty="0"/>
+          </a:p>
+          <a:p>
+            <a:pPr marL="0" marR="0" lvl="0" indent="0" algn="l" rtl="0">
+              <a:lnSpc>
+                <a:spcPct val="150000"/>
+              </a:lnSpc>
+              <a:spcBef>
+                <a:spcPts val="0"/>
+              </a:spcBef>
+              <a:spcAft>
+                <a:spcPts val="0"/>
+              </a:spcAft>
+              <a:buNone/>
+            </a:pPr>
+            <a:r>
+              <a:rPr lang="en-US" sz="900" dirty="0">
+                <a:solidFill>
+                  <a:schemeClr val="dk1"/>
+                </a:solidFill>
+                <a:latin typeface="Tahoma"/>
+                <a:ea typeface="Tahoma"/>
+                <a:cs typeface="Tahoma"/>
+                <a:sym typeface="Tahoma"/>
+              </a:rPr>
+              <a:t>            &lt;tr&gt;</a:t>
+            </a:r>
+            <a:endParaRPr sz="900" dirty="0"/>
+          </a:p>
+          <a:p>
+            <a:pPr marL="0" marR="0" lvl="0" indent="0" algn="l" rtl="0">
+              <a:lnSpc>
+                <a:spcPct val="150000"/>
+              </a:lnSpc>
+              <a:spcBef>
+                <a:spcPts val="0"/>
+              </a:spcBef>
+              <a:spcAft>
+                <a:spcPts val="0"/>
+              </a:spcAft>
+              <a:buNone/>
+            </a:pPr>
+            <a:r>
+              <a:rPr lang="en-US" sz="900" dirty="0">
+                <a:solidFill>
+                  <a:schemeClr val="dk1"/>
+                </a:solidFill>
+                <a:latin typeface="Tahoma"/>
+                <a:ea typeface="Tahoma"/>
+                <a:cs typeface="Tahoma"/>
+                <a:sym typeface="Tahoma"/>
+              </a:rPr>
+              <a:t>                &lt;td&gt;</a:t>
+            </a:r>
+            <a:r>
+              <a:rPr lang="en-US" sz="900" dirty="0" err="1">
+                <a:solidFill>
+                  <a:schemeClr val="dk1"/>
+                </a:solidFill>
+                <a:latin typeface="Tahoma"/>
+                <a:ea typeface="Tahoma"/>
+                <a:cs typeface="Tahoma"/>
+                <a:sym typeface="Tahoma"/>
+              </a:rPr>
+              <a:t>성춘향</a:t>
+            </a:r>
+            <a:r>
+              <a:rPr lang="en-US" sz="900" dirty="0">
+                <a:solidFill>
+                  <a:schemeClr val="dk1"/>
+                </a:solidFill>
+                <a:latin typeface="Tahoma"/>
+                <a:ea typeface="Tahoma"/>
+                <a:cs typeface="Tahoma"/>
+                <a:sym typeface="Tahoma"/>
+              </a:rPr>
+              <a:t>&lt;/td&gt;&lt;td&gt;여&lt;/td&gt;&lt;td&gt;2&lt;/td&gt;</a:t>
+            </a:r>
+            <a:endParaRPr sz="900" dirty="0"/>
+          </a:p>
+          <a:p>
+            <a:pPr marL="0" marR="0" lvl="0" indent="0" algn="l" rtl="0">
+              <a:lnSpc>
+                <a:spcPct val="150000"/>
+              </a:lnSpc>
+              <a:spcBef>
+                <a:spcPts val="0"/>
+              </a:spcBef>
+              <a:spcAft>
+                <a:spcPts val="0"/>
+              </a:spcAft>
+              <a:buNone/>
+            </a:pPr>
+            <a:r>
+              <a:rPr lang="en-US" sz="900" dirty="0">
+                <a:solidFill>
+                  <a:schemeClr val="dk1"/>
+                </a:solidFill>
+                <a:latin typeface="Tahoma"/>
+                <a:ea typeface="Tahoma"/>
+                <a:cs typeface="Tahoma"/>
+                <a:sym typeface="Tahoma"/>
+              </a:rPr>
+              <a:t>            &lt;/tr&gt;</a:t>
+            </a:r>
+            <a:endParaRPr sz="900" dirty="0"/>
+          </a:p>
+          <a:p>
+            <a:pPr marL="0" marR="0" lvl="0" indent="0" algn="l" rtl="0">
+              <a:lnSpc>
+                <a:spcPct val="150000"/>
+              </a:lnSpc>
+              <a:spcBef>
+                <a:spcPts val="0"/>
+              </a:spcBef>
+              <a:spcAft>
+                <a:spcPts val="0"/>
+              </a:spcAft>
+              <a:buNone/>
+            </a:pPr>
+            <a:r>
+              <a:rPr lang="en-US" sz="900" b="1" dirty="0">
+                <a:solidFill>
+                  <a:schemeClr val="dk1"/>
+                </a:solidFill>
+                <a:latin typeface="Tahoma"/>
+                <a:ea typeface="Tahoma"/>
+                <a:cs typeface="Tahoma"/>
+                <a:sym typeface="Tahoma"/>
+              </a:rPr>
+              <a:t>        &lt;/table&gt;</a:t>
+            </a:r>
+            <a:endParaRPr sz="900" dirty="0"/>
+          </a:p>
+          <a:p>
+            <a:pPr marL="0" marR="0" lvl="0" indent="0" algn="l" rtl="0">
+              <a:lnSpc>
+                <a:spcPct val="150000"/>
+              </a:lnSpc>
+              <a:spcBef>
+                <a:spcPts val="0"/>
+              </a:spcBef>
+              <a:spcAft>
+                <a:spcPts val="0"/>
+              </a:spcAft>
+              <a:buNone/>
+            </a:pPr>
+            <a:r>
+              <a:rPr lang="en-US" sz="900" dirty="0">
+                <a:solidFill>
+                  <a:schemeClr val="dk1"/>
+                </a:solidFill>
+                <a:latin typeface="Tahoma"/>
+                <a:ea typeface="Tahoma"/>
+                <a:cs typeface="Tahoma"/>
+                <a:sym typeface="Tahoma"/>
+              </a:rPr>
+              <a:t>    &lt;/body&gt;</a:t>
+            </a:r>
+            <a:endParaRPr sz="900" dirty="0"/>
+          </a:p>
+          <a:p>
+            <a:pPr marL="0" marR="0" lvl="0" indent="0" algn="l" rtl="0">
+              <a:lnSpc>
+                <a:spcPct val="150000"/>
+              </a:lnSpc>
+              <a:spcBef>
+                <a:spcPts val="0"/>
+              </a:spcBef>
+              <a:spcAft>
+                <a:spcPts val="0"/>
+              </a:spcAft>
+              <a:buNone/>
+            </a:pPr>
+            <a:r>
+              <a:rPr lang="en-US" sz="900" dirty="0">
+                <a:solidFill>
+                  <a:schemeClr val="dk1"/>
+                </a:solidFill>
+                <a:latin typeface="Tahoma"/>
+                <a:ea typeface="Tahoma"/>
+                <a:cs typeface="Tahoma"/>
+                <a:sym typeface="Tahoma"/>
+              </a:rPr>
+              <a:t>&lt;/html&gt;</a:t>
+            </a:r>
+            <a:endParaRPr sz="900" dirty="0"/>
+          </a:p>
+        </p:txBody>
+      </p:sp>
+    </p:spTree>
+  </p:cSld>
+  <p:clrMapOvr>
+    <a:masterClrMapping/>
+  </p:clrMapOvr>
+</p:sld>
+</file>
+
+<file path=ppt/slides/slide22.xml><?xml version="1.0" encoding="utf-8"?>
 <p:sld xmlns:a="http://schemas.openxmlformats.org/drawingml/2006/main" xmlns:r="http://schemas.openxmlformats.org/officeDocument/2006/relationships" xmlns:p="http://schemas.openxmlformats.org/presentationml/2006/main" xmlns:p14="http://schemas.microsoft.com/office/powerpoint/2010/main">
   <p:cSld>
     <p:spTree>
@@ -16406,268 +17453,286 @@
       <p:graphicFrame>
         <p:nvGraphicFramePr>
           <p:cNvPr id="180" name="Google Shape;180;p16"/>
-          <p:cNvGraphicFramePr/>
-          <p:nvPr>
-            <p:extLst>
-              <p:ext uri="{D42A27DB-BD31-4B8C-83A1-F6EECF244321}">
-                <p14:modId xmlns:p14="http://schemas.microsoft.com/office/powerpoint/2010/main" val="4138282370"/>
-              </p:ext>
-            </p:extLst>
-          </p:nvPr>
+          <p:cNvGraphicFramePr>
+            <a:graphicFrameLocks noGrp="1"/>
+          </p:cNvGraphicFramePr>
+          <p:nvPr/>
         </p:nvGraphicFramePr>
         <p:xfrm>
-          <a:off x="4569890" y="3630757"/>
-          <a:ext cx="4534175" cy="1767850"/>
+          <a:off x="3984625" y="3743325"/>
+          <a:ext cx="4533900" cy="1780540"/>
         </p:xfrm>
         <a:graphic>
           <a:graphicData uri="http://schemas.openxmlformats.org/drawingml/2006/table">
             <a:tbl>
               <a:tblPr firstRow="1" bandRow="1">
-                <a:noFill/>
-                <a:tableStyleId>{B143AD15-18FB-48BD-BE4C-7BDFF432765B}</a:tableStyleId>
+                <a:tableStyleId>{00000000-0000-0000-0000-000000000000}</a:tableStyleId>
               </a:tblPr>
               <a:tblGrid>
-                <a:gridCol w="4534175">
-                  <a:extLst>
-                    <a:ext uri="{9D8B030D-6E8A-4147-A177-3AD203B41FA5}">
-                      <a16:colId xmlns:a16="http://schemas.microsoft.com/office/drawing/2014/main" val="20000"/>
-                    </a:ext>
-                  </a:extLst>
-                </a:gridCol>
+                <a:gridCol w="4533900"/>
               </a:tblGrid>
-              <a:tr h="370850">
+              <a:tr h="1780540">
                 <a:tc>
                   <a:txBody>
                     <a:bodyPr/>
                     <a:lstStyle/>
                     <a:p>
-                      <a:pPr marL="0" marR="0" lvl="0" indent="0" algn="l" rtl="0">
+                      <a:pPr marL="0" indent="0" rtl="0" algn="l" lvl="1">
                         <a:spcBef>
                           <a:spcPts val="0"/>
                         </a:spcBef>
                         <a:spcAft>
                           <a:spcPts val="0"/>
                         </a:spcAft>
+                        <a:buFontTx/>
                         <a:buNone/>
                       </a:pPr>
                       <a:r>
-                        <a:rPr lang="en-US" sz="1100" b="1" u="none" strike="noStrike" cap="none" dirty="0"/>
+                        <a:rPr lang="en-US" sz="1100" kern="1200" cap="none" b="1" strike="noStrike">
+                          <a:solidFill>
+                            <a:srgbClr val="41280D"/>
+                          </a:solidFill>
+                        </a:rPr>
                         <a:t>&lt;table border="1" style="width: 50%; text-align: center;"&gt;</a:t>
                       </a:r>
-                      <a:endParaRPr dirty="0"/>
+                      <a:endParaRPr lang="ko-KR" altLang="en-US" sz="1100" kern="1200" cap="none" b="1" strike="noStrike">
+                        <a:solidFill>
+                          <a:srgbClr val="41280D"/>
+                        </a:solidFill>
+                      </a:endParaRPr>
                     </a:p>
                     <a:p>
-                      <a:pPr marL="0" marR="0" lvl="0" indent="0" algn="l" rtl="0">
+                      <a:pPr marL="0" indent="0" rtl="0" algn="l" lvl="1">
                         <a:spcBef>
                           <a:spcPts val="0"/>
                         </a:spcBef>
                         <a:spcAft>
                           <a:spcPts val="0"/>
                         </a:spcAft>
+                        <a:buFontTx/>
                         <a:buNone/>
                       </a:pPr>
                       <a:r>
-                        <a:rPr lang="en-US" sz="1100" b="0" u="none" strike="noStrike" cap="none" dirty="0"/>
+                        <a:rPr lang="en-US" sz="1100" kern="1200" cap="none" b="0" strike="noStrike">
+                          <a:solidFill>
+                            <a:srgbClr val="41280D"/>
+                          </a:solidFill>
+                        </a:rPr>
                         <a:t>  &lt;tr&gt;</a:t>
                       </a:r>
-                      <a:endParaRPr dirty="0"/>
+                      <a:endParaRPr lang="ko-KR" altLang="en-US" sz="1100" kern="1200" cap="none" b="0" strike="noStrike">
+                        <a:solidFill>
+                          <a:srgbClr val="41280D"/>
+                        </a:solidFill>
+                      </a:endParaRPr>
                     </a:p>
                     <a:p>
-                      <a:pPr marL="0" marR="0" lvl="0" indent="0" algn="l" rtl="0">
+                      <a:pPr marL="0" indent="0" rtl="0" algn="l" lvl="1">
                         <a:spcBef>
                           <a:spcPts val="0"/>
                         </a:spcBef>
                         <a:spcAft>
                           <a:spcPts val="0"/>
                         </a:spcAft>
+                        <a:buFontTx/>
                         <a:buNone/>
                       </a:pPr>
                       <a:r>
-                        <a:rPr lang="en-US" sz="1100" b="0" u="none" strike="noStrike" cap="none" dirty="0"/>
-                        <a:t>    &lt;</a:t>
+                        <a:rPr lang="en-US" sz="1100" kern="1200" cap="none" b="0" strike="noStrike">
+                          <a:solidFill>
+                            <a:srgbClr val="41280D"/>
+                          </a:solidFill>
+                        </a:rPr>
+                        <a:t>    &lt;th&gt;상품명&lt;/th&gt;</a:t>
                       </a:r>
-                      <a:r>
-                        <a:rPr lang="en-US" sz="1100" b="0" u="none" strike="noStrike" cap="none" dirty="0" err="1"/>
-                        <a:t>th</a:t>
-                      </a:r>
-                      <a:r>
-                        <a:rPr lang="en-US" sz="1100" b="0" u="none" strike="noStrike" cap="none" dirty="0"/>
-                        <a:t>&gt;</a:t>
-                      </a:r>
-                      <a:r>
-                        <a:rPr lang="en-US" sz="1100" b="0" u="none" strike="noStrike" cap="none" dirty="0" err="1"/>
-                        <a:t>상품명</a:t>
-                      </a:r>
-                      <a:r>
-                        <a:rPr lang="en-US" sz="1100" b="0" u="none" strike="noStrike" cap="none" dirty="0"/>
-                        <a:t>&lt;/</a:t>
-                      </a:r>
-                      <a:r>
-                        <a:rPr lang="en-US" sz="1100" b="0" u="none" strike="noStrike" cap="none" dirty="0" err="1"/>
-                        <a:t>th</a:t>
-                      </a:r>
-                      <a:r>
-                        <a:rPr lang="en-US" sz="1100" b="0" u="none" strike="noStrike" cap="none" dirty="0"/>
-                        <a:t>&gt;</a:t>
-                      </a:r>
-                      <a:endParaRPr dirty="0"/>
+                      <a:endParaRPr lang="ko-KR" altLang="en-US" sz="1100" kern="1200" cap="none" b="0" strike="noStrike">
+                        <a:solidFill>
+                          <a:srgbClr val="41280D"/>
+                        </a:solidFill>
+                      </a:endParaRPr>
                     </a:p>
                     <a:p>
-                      <a:pPr marL="0" marR="0" lvl="0" indent="0" algn="l" rtl="0">
+                      <a:pPr marL="0" indent="0" rtl="0" algn="l" lvl="1">
                         <a:spcBef>
                           <a:spcPts val="0"/>
                         </a:spcBef>
                         <a:spcAft>
                           <a:spcPts val="0"/>
                         </a:spcAft>
+                        <a:buFontTx/>
                         <a:buNone/>
                       </a:pPr>
                       <a:r>
-                        <a:rPr lang="en-US" sz="1100" b="0" u="none" strike="noStrike" cap="none" dirty="0"/>
-                        <a:t>    &lt;</a:t>
+                        <a:rPr lang="en-US" sz="1100" kern="1200" cap="none" b="0" strike="noStrike">
+                          <a:solidFill>
+                            <a:srgbClr val="41280D"/>
+                          </a:solidFill>
+                        </a:rPr>
+                        <a:t>    &lt;th&gt;가격&lt;/th&gt;</a:t>
                       </a:r>
-                      <a:r>
-                        <a:rPr lang="en-US" sz="1100" b="0" u="none" strike="noStrike" cap="none" dirty="0" err="1"/>
-                        <a:t>th</a:t>
-                      </a:r>
-                      <a:r>
-                        <a:rPr lang="en-US" sz="1100" b="0" u="none" strike="noStrike" cap="none" dirty="0"/>
-                        <a:t>&gt;</a:t>
-                      </a:r>
-                      <a:r>
-                        <a:rPr lang="en-US" sz="1100" b="0" u="none" strike="noStrike" cap="none" dirty="0" err="1"/>
-                        <a:t>가격</a:t>
-                      </a:r>
-                      <a:r>
-                        <a:rPr lang="en-US" sz="1100" b="0" u="none" strike="noStrike" cap="none" dirty="0"/>
-                        <a:t>&lt;/</a:t>
-                      </a:r>
-                      <a:r>
-                        <a:rPr lang="en-US" sz="1100" b="0" u="none" strike="noStrike" cap="none" dirty="0" err="1"/>
-                        <a:t>th</a:t>
-                      </a:r>
-                      <a:r>
-                        <a:rPr lang="en-US" sz="1100" b="0" u="none" strike="noStrike" cap="none" dirty="0"/>
-                        <a:t>&gt;</a:t>
-                      </a:r>
-                      <a:endParaRPr dirty="0"/>
+                      <a:endParaRPr lang="ko-KR" altLang="en-US" sz="1100" kern="1200" cap="none" b="0" strike="noStrike">
+                        <a:solidFill>
+                          <a:srgbClr val="41280D"/>
+                        </a:solidFill>
+                      </a:endParaRPr>
                     </a:p>
                     <a:p>
-                      <a:pPr marL="0" marR="0" lvl="0" indent="0" algn="l" rtl="0">
+                      <a:pPr marL="0" indent="0" rtl="0" algn="l" lvl="1">
                         <a:spcBef>
                           <a:spcPts val="0"/>
                         </a:spcBef>
                         <a:spcAft>
                           <a:spcPts val="0"/>
                         </a:spcAft>
+                        <a:buFontTx/>
                         <a:buNone/>
                       </a:pPr>
                       <a:r>
-                        <a:rPr lang="en-US" sz="1100" b="0" u="none" strike="noStrike" cap="none" dirty="0"/>
+                        <a:rPr lang="en-US" sz="1100" kern="1200" cap="none" b="0" strike="noStrike">
+                          <a:solidFill>
+                            <a:srgbClr val="41280D"/>
+                          </a:solidFill>
+                        </a:rPr>
                         <a:t>  &lt;/tr&gt;</a:t>
                       </a:r>
-                      <a:endParaRPr dirty="0"/>
+                      <a:endParaRPr lang="ko-KR" altLang="en-US" sz="1100" kern="1200" cap="none" b="0" strike="noStrike">
+                        <a:solidFill>
+                          <a:srgbClr val="41280D"/>
+                        </a:solidFill>
+                      </a:endParaRPr>
                     </a:p>
                     <a:p>
-                      <a:pPr marL="0" marR="0" lvl="0" indent="0" algn="l" rtl="0">
+                      <a:pPr marL="0" indent="0" rtl="0" algn="l" lvl="1">
                         <a:spcBef>
                           <a:spcPts val="0"/>
                         </a:spcBef>
                         <a:spcAft>
                           <a:spcPts val="0"/>
                         </a:spcAft>
+                        <a:buFontTx/>
                         <a:buNone/>
                       </a:pPr>
                       <a:r>
-                        <a:rPr lang="en-US" sz="1100" b="0" u="none" strike="noStrike" cap="none" dirty="0"/>
+                        <a:rPr lang="en-US" sz="1100" kern="1200" cap="none" b="0" strike="noStrike">
+                          <a:solidFill>
+                            <a:srgbClr val="41280D"/>
+                          </a:solidFill>
+                        </a:rPr>
                         <a:t>  &lt;tr&gt;</a:t>
                       </a:r>
-                      <a:endParaRPr dirty="0"/>
+                      <a:endParaRPr lang="ko-KR" altLang="en-US" sz="1100" kern="1200" cap="none" b="0" strike="noStrike">
+                        <a:solidFill>
+                          <a:srgbClr val="41280D"/>
+                        </a:solidFill>
+                      </a:endParaRPr>
                     </a:p>
                     <a:p>
-                      <a:pPr marL="0" marR="0" lvl="0" indent="0" algn="l" rtl="0">
+                      <a:pPr marL="0" indent="0" rtl="0" algn="l" lvl="1">
                         <a:spcBef>
                           <a:spcPts val="0"/>
                         </a:spcBef>
                         <a:spcAft>
                           <a:spcPts val="0"/>
                         </a:spcAft>
+                        <a:buFontTx/>
                         <a:buNone/>
                       </a:pPr>
                       <a:r>
-                        <a:rPr lang="en-US" sz="1100" b="0" u="none" strike="noStrike" cap="none" dirty="0"/>
-                        <a:t>    &lt;td&gt;</a:t>
+                        <a:rPr lang="en-US" sz="1100" kern="1200" cap="none" b="0" strike="noStrike">
+                          <a:solidFill>
+                            <a:srgbClr val="41280D"/>
+                          </a:solidFill>
+                        </a:rPr>
+                        <a:t>    &lt;td&gt;노트북&lt;/td&gt;</a:t>
                       </a:r>
-                      <a:r>
-                        <a:rPr lang="en-US" sz="1100" b="0" u="none" strike="noStrike" cap="none" dirty="0" err="1"/>
-                        <a:t>노트북</a:t>
-                      </a:r>
-                      <a:r>
-                        <a:rPr lang="en-US" sz="1100" b="0" u="none" strike="noStrike" cap="none" dirty="0"/>
-                        <a:t>&lt;/td&gt;</a:t>
-                      </a:r>
-                      <a:endParaRPr dirty="0"/>
+                      <a:endParaRPr lang="ko-KR" altLang="en-US" sz="1100" kern="1200" cap="none" b="0" strike="noStrike">
+                        <a:solidFill>
+                          <a:srgbClr val="41280D"/>
+                        </a:solidFill>
+                      </a:endParaRPr>
                     </a:p>
                     <a:p>
-                      <a:pPr marL="0" marR="0" lvl="0" indent="0" algn="l" rtl="0">
+                      <a:pPr marL="0" indent="0" rtl="0" algn="l" lvl="1">
                         <a:spcBef>
                           <a:spcPts val="0"/>
                         </a:spcBef>
                         <a:spcAft>
                           <a:spcPts val="0"/>
                         </a:spcAft>
+                        <a:buFontTx/>
                         <a:buNone/>
                       </a:pPr>
                       <a:r>
-                        <a:rPr lang="en-US" sz="1100" b="0" u="none" strike="noStrike" cap="none" dirty="0"/>
+                        <a:rPr lang="en-US" sz="1100" kern="1200" cap="none" b="0" strike="noStrike">
+                          <a:solidFill>
+                            <a:srgbClr val="41280D"/>
+                          </a:solidFill>
+                        </a:rPr>
                         <a:t>    &lt;td&gt;1,000,000원&lt;/td&gt;</a:t>
                       </a:r>
-                      <a:endParaRPr dirty="0"/>
+                      <a:endParaRPr lang="ko-KR" altLang="en-US" sz="1100" kern="1200" cap="none" b="0" strike="noStrike">
+                        <a:solidFill>
+                          <a:srgbClr val="41280D"/>
+                        </a:solidFill>
+                      </a:endParaRPr>
                     </a:p>
                     <a:p>
-                      <a:pPr marL="0" marR="0" lvl="0" indent="0" algn="l" rtl="0">
+                      <a:pPr marL="0" indent="0" rtl="0" algn="l" lvl="1">
                         <a:spcBef>
                           <a:spcPts val="0"/>
                         </a:spcBef>
                         <a:spcAft>
                           <a:spcPts val="0"/>
                         </a:spcAft>
+                        <a:buFontTx/>
                         <a:buNone/>
                       </a:pPr>
                       <a:r>
-                        <a:rPr lang="en-US" sz="1100" b="0" u="none" strike="noStrike" cap="none" dirty="0"/>
+                        <a:rPr lang="en-US" sz="1100" kern="1200" cap="none" b="0" strike="noStrike">
+                          <a:solidFill>
+                            <a:srgbClr val="41280D"/>
+                          </a:solidFill>
+                        </a:rPr>
                         <a:t>  &lt;/tr&gt;</a:t>
                       </a:r>
-                      <a:endParaRPr dirty="0"/>
+                      <a:endParaRPr lang="ko-KR" altLang="en-US" sz="1100" kern="1200" cap="none" b="0" strike="noStrike">
+                        <a:solidFill>
+                          <a:srgbClr val="41280D"/>
+                        </a:solidFill>
+                      </a:endParaRPr>
                     </a:p>
                     <a:p>
-                      <a:pPr marL="0" marR="0" lvl="0" indent="0" algn="l" rtl="0">
+                      <a:pPr marL="0" indent="0" rtl="0" algn="l" lvl="1">
                         <a:spcBef>
                           <a:spcPts val="0"/>
                         </a:spcBef>
                         <a:spcAft>
                           <a:spcPts val="0"/>
                         </a:spcAft>
+                        <a:buFontTx/>
                         <a:buNone/>
                       </a:pPr>
                       <a:r>
-                        <a:rPr lang="en-US" sz="1100" b="1" u="none" strike="noStrike" cap="none" dirty="0"/>
+                        <a:rPr lang="en-US" sz="1100" kern="1200" cap="none" b="1" strike="noStrike">
+                          <a:solidFill>
+                            <a:srgbClr val="41280D"/>
+                          </a:solidFill>
+                        </a:rPr>
                         <a:t>&lt;/table&gt;</a:t>
                       </a:r>
-                      <a:endParaRPr sz="1100" b="1" u="none" strike="noStrike" cap="none" dirty="0"/>
+                      <a:endParaRPr lang="ko-KR" altLang="en-US" sz="1100" kern="1200" cap="none" b="1" strike="noStrike">
+                        <a:solidFill>
+                          <a:srgbClr val="41280D"/>
+                        </a:solidFill>
+                      </a:endParaRPr>
                     </a:p>
                   </a:txBody>
-                  <a:tcPr marL="91450" marR="91450" marT="45725" marB="45725">
+                  <a:tcPr marL="91440" marR="91440" marT="45720" marB="45720" anchor="t">
                     <a:solidFill>
                       <a:schemeClr val="lt1"/>
                     </a:solidFill>
                   </a:tcPr>
                 </a:tc>
-                <a:extLst>
-                  <a:ext uri="{0D108BD9-81ED-4DB2-BD59-A6C34878D82A}">
-                    <a16:rowId xmlns:a16="http://schemas.microsoft.com/office/drawing/2014/main" val="10000"/>
-                  </a:ext>
-                </a:extLst>
               </a:tr>
             </a:tbl>
           </a:graphicData>
@@ -16675,7 +17740,7 @@
       </p:graphicFrame>
       <mc:AlternateContent xmlns:mc="http://schemas.openxmlformats.org/markup-compatibility/2006" xmlns:p14="http://schemas.microsoft.com/office/powerpoint/2010/main">
         <mc:Choice Requires="p14">
-          <p:contentPart p14:bwMode="auto" r:id="rId3">
+          <p:contentPart p14:bwMode="auto" r:id="rId9">
             <p14:nvContentPartPr>
               <p14:cNvPr id="181" name="잉크 29"/>
               <p14:cNvContentPartPr/>
@@ -16695,7 +17760,7 @@
               <p:nvPr/>
             </p:nvPicPr>
             <p:blipFill>
-              <a:blip r:embed="rId4"/>
+              <a:blip r:embed="rId10"/>
               <a:stretch>
                 <a:fillRect/>
               </a:stretch>
@@ -16714,7 +17779,7 @@
       </mc:AlternateContent>
       <mc:AlternateContent xmlns:mc="http://schemas.openxmlformats.org/markup-compatibility/2006" xmlns:p14="http://schemas.microsoft.com/office/powerpoint/2010/main">
         <mc:Choice Requires="p14">
-          <p:contentPart p14:bwMode="auto" r:id="rId5">
+          <p:contentPart p14:bwMode="auto" r:id="rId11">
             <p14:nvContentPartPr>
               <p14:cNvPr id="182" name="잉크 30"/>
               <p14:cNvContentPartPr/>
@@ -16734,7 +17799,7 @@
               <p:nvPr/>
             </p:nvPicPr>
             <p:blipFill>
-              <a:blip r:embed="rId6"/>
+              <a:blip r:embed="rId12"/>
               <a:stretch>
                 <a:fillRect/>
               </a:stretch>
@@ -16753,7 +17818,7 @@
       </mc:AlternateContent>
       <mc:AlternateContent xmlns:mc="http://schemas.openxmlformats.org/markup-compatibility/2006" xmlns:p14="http://schemas.microsoft.com/office/powerpoint/2010/main">
         <mc:Choice Requires="p14">
-          <p:contentPart p14:bwMode="auto" r:id="rId7">
+          <p:contentPart p14:bwMode="auto" r:id="rId13">
             <p14:nvContentPartPr>
               <p14:cNvPr id="183" name="잉크 31"/>
               <p14:cNvContentPartPr/>
@@ -16773,7 +17838,7 @@
               <p:nvPr/>
             </p:nvPicPr>
             <p:blipFill>
-              <a:blip r:embed="rId8"/>
+              <a:blip r:embed="rId14"/>
               <a:stretch>
                 <a:fillRect/>
               </a:stretch>
@@ -16813,925 +17878,8 @@
 </p:sld>
 </file>
 
-<file path=ppt/slides/slide22.xml><?xml version="1.0" encoding="utf-8"?>
-<p:sld xmlns:a="http://schemas.openxmlformats.org/drawingml/2006/main" xmlns:r="http://schemas.openxmlformats.org/officeDocument/2006/relationships" xmlns:p="http://schemas.openxmlformats.org/presentationml/2006/main">
-  <p:cSld>
-    <p:spTree>
-      <p:nvGrpSpPr>
-        <p:cNvPr id="1" name="Shape 166"/>
-        <p:cNvGrpSpPr/>
-        <p:nvPr/>
-      </p:nvGrpSpPr>
-      <p:grpSpPr>
-        <a:xfrm>
-          <a:off x="0" y="0"/>
-          <a:ext cx="0" cy="0"/>
-          <a:chOff x="0" y="0"/>
-          <a:chExt cx="0" cy="0"/>
-        </a:xfrm>
-      </p:grpSpPr>
-      <p:sp>
-        <p:nvSpPr>
-          <p:cNvPr id="167" name="Google Shape;167;p15"/>
-          <p:cNvSpPr txBox="1">
-            <a:spLocks noGrp="1"/>
-          </p:cNvSpPr>
-          <p:nvPr>
-            <p:ph type="title"/>
-          </p:nvPr>
-        </p:nvSpPr>
-        <p:spPr>
-          <a:prstGeom prst="rect">
-            <a:avLst/>
-          </a:prstGeom>
-          <a:noFill/>
-          <a:ln>
-            <a:noFill/>
-          </a:ln>
-        </p:spPr>
-        <p:txBody>
-          <a:bodyPr spcFirstLastPara="1" wrap="square" lIns="91425" tIns="45700" rIns="91425" bIns="45700" anchor="t" anchorCtr="0">
-            <a:noAutofit/>
-          </a:bodyPr>
-          <a:lstStyle/>
-          <a:p>
-            <a:pPr marL="0" lvl="0" indent="0" algn="l" rtl="0">
-              <a:spcBef>
-                <a:spcPts val="0"/>
-              </a:spcBef>
-              <a:spcAft>
-                <a:spcPts val="0"/>
-              </a:spcAft>
-              <a:buNone/>
-            </a:pPr>
-            <a:r>
-              <a:rPr lang="en-US" dirty="0"/>
-              <a:t>HTML 실습 2-1</a:t>
-            </a:r>
-            <a:br>
-              <a:rPr lang="en-US" dirty="0"/>
-            </a:br>
-            <a:endParaRPr dirty="0"/>
-          </a:p>
-        </p:txBody>
-      </p:sp>
-      <p:sp>
-        <p:nvSpPr>
-          <p:cNvPr id="4" name="텍스트 개체 틀 3">
-            <a:extLst>
-              <a:ext uri="{FF2B5EF4-FFF2-40B4-BE49-F238E27FC236}">
-                <a16:creationId xmlns:a16="http://schemas.microsoft.com/office/drawing/2014/main" id="{FBDE7F16-D973-91A6-1E74-67EB4A060FDF}"/>
-              </a:ext>
-            </a:extLst>
-          </p:cNvPr>
-          <p:cNvSpPr>
-            <a:spLocks noGrp="1"/>
-          </p:cNvSpPr>
-          <p:nvPr>
-            <p:ph type="body" idx="1"/>
-          </p:nvPr>
-        </p:nvSpPr>
-        <p:spPr/>
-        <p:txBody>
-          <a:bodyPr/>
-          <a:lstStyle/>
-          <a:p>
-            <a:r>
-              <a:rPr lang="ko-KR" altLang="en-US" dirty="0"/>
-              <a:t>코드를 작성해 보고 어떤 결과가 나오는지 확인해본다</a:t>
-            </a:r>
-            <a:r>
-              <a:rPr lang="en-US" altLang="ko-KR" dirty="0"/>
-              <a:t>.</a:t>
-            </a:r>
-          </a:p>
-          <a:p>
-            <a:r>
-              <a:rPr lang="en-US" altLang="ko-KR" dirty="0"/>
-              <a:t>&lt;table&gt; </a:t>
-            </a:r>
-            <a:r>
-              <a:rPr lang="ko-KR" altLang="en-US" dirty="0"/>
-              <a:t>태그를 사용한 코드로 행과 열을 어떻게 표현하는지 생각해본다</a:t>
-            </a:r>
-            <a:r>
-              <a:rPr lang="en-US" altLang="ko-KR" dirty="0"/>
-              <a:t>.</a:t>
-            </a:r>
-            <a:endParaRPr lang="ko-KR" altLang="en-US" dirty="0"/>
-          </a:p>
-        </p:txBody>
-      </p:sp>
-      <p:sp>
-        <p:nvSpPr>
-          <p:cNvPr id="168" name="Google Shape;168;p15"/>
-          <p:cNvSpPr txBox="1">
-            <a:spLocks noGrp="1"/>
-          </p:cNvSpPr>
-          <p:nvPr>
-            <p:ph type="sldNum" idx="12"/>
-          </p:nvPr>
-        </p:nvSpPr>
-        <p:spPr>
-          <a:prstGeom prst="rect">
-            <a:avLst/>
-          </a:prstGeom>
-          <a:noFill/>
-          <a:ln>
-            <a:noFill/>
-          </a:ln>
-        </p:spPr>
-        <p:txBody>
-          <a:bodyPr spcFirstLastPara="1" wrap="square" lIns="91425" tIns="45700" rIns="91425" bIns="45700" anchor="t" anchorCtr="0">
-            <a:noAutofit/>
-          </a:bodyPr>
-          <a:lstStyle/>
-          <a:p>
-            <a:pPr marL="0" lvl="0" indent="0" algn="r" rtl="0">
-              <a:lnSpc>
-                <a:spcPct val="100000"/>
-              </a:lnSpc>
-              <a:spcBef>
-                <a:spcPts val="0"/>
-              </a:spcBef>
-              <a:spcAft>
-                <a:spcPts val="0"/>
-              </a:spcAft>
-              <a:buNone/>
-            </a:pPr>
-            <a:fld id="{00000000-1234-1234-1234-123412341234}" type="slidenum">
-              <a:rPr lang="en-US"/>
-              <a:t>22</a:t>
-            </a:fld>
-            <a:endParaRPr/>
-          </a:p>
-        </p:txBody>
-      </p:sp>
-      <p:sp>
-        <p:nvSpPr>
-          <p:cNvPr id="169" name="Google Shape;169;p15"/>
-          <p:cNvSpPr txBox="1">
-            <a:spLocks noGrp="1"/>
-          </p:cNvSpPr>
-          <p:nvPr>
-            <p:ph type="ftr" idx="11"/>
-          </p:nvPr>
-        </p:nvSpPr>
-        <p:spPr>
-          <a:prstGeom prst="rect">
-            <a:avLst/>
-          </a:prstGeom>
-          <a:noFill/>
-          <a:ln>
-            <a:noFill/>
-          </a:ln>
-        </p:spPr>
-        <p:txBody>
-          <a:bodyPr spcFirstLastPara="1" wrap="square" lIns="91425" tIns="45700" rIns="91425" bIns="45700" anchor="b" anchorCtr="0">
-            <a:noAutofit/>
-          </a:bodyPr>
-          <a:lstStyle/>
-          <a:p>
-            <a:pPr marL="0" lvl="0" indent="0" algn="ctr" rtl="0">
-              <a:lnSpc>
-                <a:spcPct val="100000"/>
-              </a:lnSpc>
-              <a:spcBef>
-                <a:spcPts val="0"/>
-              </a:spcBef>
-              <a:spcAft>
-                <a:spcPts val="0"/>
-              </a:spcAft>
-              <a:buNone/>
-            </a:pPr>
-            <a:endParaRPr/>
-          </a:p>
-        </p:txBody>
-      </p:sp>
-      <p:sp>
-        <p:nvSpPr>
-          <p:cNvPr id="170" name="Google Shape;170;p15"/>
-          <p:cNvSpPr/>
-          <p:nvPr/>
-        </p:nvSpPr>
-        <p:spPr>
-          <a:xfrm>
-            <a:off x="355600" y="2132674"/>
-            <a:ext cx="11480800" cy="4247276"/>
-          </a:xfrm>
-          <a:prstGeom prst="rect">
-            <a:avLst/>
-          </a:prstGeom>
-          <a:noFill/>
-          <a:ln w="9525" cap="flat" cmpd="sng">
-            <a:solidFill>
-              <a:schemeClr val="dk1"/>
-            </a:solidFill>
-            <a:prstDash val="solid"/>
-            <a:round/>
-            <a:headEnd type="none" w="sm" len="sm"/>
-            <a:tailEnd type="none" w="sm" len="sm"/>
-          </a:ln>
-        </p:spPr>
-        <p:txBody>
-          <a:bodyPr spcFirstLastPara="1" wrap="square" lIns="91425" tIns="45700" rIns="91425" bIns="45700" anchor="t" anchorCtr="0">
-            <a:spAutoFit/>
-          </a:bodyPr>
-          <a:lstStyle/>
-          <a:p>
-            <a:pPr marL="0" marR="0" lvl="0" indent="0" algn="l" rtl="0">
-              <a:lnSpc>
-                <a:spcPct val="150000"/>
-              </a:lnSpc>
-              <a:spcBef>
-                <a:spcPts val="0"/>
-              </a:spcBef>
-              <a:spcAft>
-                <a:spcPts val="0"/>
-              </a:spcAft>
-              <a:buNone/>
-            </a:pPr>
-            <a:r>
-              <a:rPr lang="en-US" sz="900" dirty="0">
-                <a:solidFill>
-                  <a:schemeClr val="dk1"/>
-                </a:solidFill>
-                <a:latin typeface="Tahoma"/>
-                <a:ea typeface="Tahoma"/>
-                <a:cs typeface="Tahoma"/>
-                <a:sym typeface="Tahoma"/>
-              </a:rPr>
-              <a:t>&lt;!DOCTYPE html&gt;</a:t>
-            </a:r>
-            <a:endParaRPr sz="900" dirty="0"/>
-          </a:p>
-          <a:p>
-            <a:pPr marL="0" marR="0" lvl="0" indent="0" algn="l" rtl="0">
-              <a:lnSpc>
-                <a:spcPct val="150000"/>
-              </a:lnSpc>
-              <a:spcBef>
-                <a:spcPts val="0"/>
-              </a:spcBef>
-              <a:spcAft>
-                <a:spcPts val="0"/>
-              </a:spcAft>
-              <a:buNone/>
-            </a:pPr>
-            <a:r>
-              <a:rPr lang="en-US" sz="900" dirty="0">
-                <a:solidFill>
-                  <a:schemeClr val="dk1"/>
-                </a:solidFill>
-                <a:latin typeface="Tahoma"/>
-                <a:ea typeface="Tahoma"/>
-                <a:cs typeface="Tahoma"/>
-                <a:sym typeface="Tahoma"/>
-              </a:rPr>
-              <a:t>&lt;html&gt;</a:t>
-            </a:r>
-            <a:endParaRPr lang="en-US" sz="900" dirty="0"/>
-          </a:p>
-          <a:p>
-            <a:pPr marL="0" marR="0" lvl="0" indent="0" algn="l" rtl="0">
-              <a:lnSpc>
-                <a:spcPct val="150000"/>
-              </a:lnSpc>
-              <a:spcBef>
-                <a:spcPts val="0"/>
-              </a:spcBef>
-              <a:spcAft>
-                <a:spcPts val="0"/>
-              </a:spcAft>
-              <a:buNone/>
-            </a:pPr>
-            <a:r>
-              <a:rPr lang="en-US" sz="900" dirty="0">
-                <a:solidFill>
-                  <a:schemeClr val="dk1"/>
-                </a:solidFill>
-                <a:latin typeface="Tahoma"/>
-                <a:ea typeface="Tahoma"/>
-                <a:cs typeface="Tahoma"/>
-                <a:sym typeface="Tahoma"/>
-              </a:rPr>
-              <a:t>    &lt;head&gt;</a:t>
-            </a:r>
-          </a:p>
-          <a:p>
-            <a:pPr marL="0" marR="0" lvl="0" indent="0" algn="l" rtl="0">
-              <a:lnSpc>
-                <a:spcPct val="150000"/>
-              </a:lnSpc>
-              <a:spcBef>
-                <a:spcPts val="0"/>
-              </a:spcBef>
-              <a:spcAft>
-                <a:spcPts val="0"/>
-              </a:spcAft>
-              <a:buNone/>
-            </a:pPr>
-            <a:r>
-              <a:rPr lang="en-US" altLang="ko-KR" sz="900" dirty="0">
-                <a:solidFill>
-                  <a:schemeClr val="dk1"/>
-                </a:solidFill>
-                <a:latin typeface="Tahoma"/>
-                <a:ea typeface="Tahoma"/>
-                <a:cs typeface="Tahoma"/>
-                <a:sym typeface="Tahoma"/>
-              </a:rPr>
-              <a:t>        &lt;meta charset="UTF-8"&gt;</a:t>
-            </a:r>
-          </a:p>
-          <a:p>
-            <a:pPr marL="0" marR="0" lvl="0" indent="0" algn="l" rtl="0">
-              <a:lnSpc>
-                <a:spcPct val="150000"/>
-              </a:lnSpc>
-              <a:spcBef>
-                <a:spcPts val="0"/>
-              </a:spcBef>
-              <a:spcAft>
-                <a:spcPts val="0"/>
-              </a:spcAft>
-              <a:buNone/>
-            </a:pPr>
-            <a:r>
-              <a:rPr lang="en-US" sz="900" dirty="0">
-                <a:solidFill>
-                  <a:schemeClr val="dk1"/>
-                </a:solidFill>
-                <a:latin typeface="Tahoma"/>
-                <a:ea typeface="Tahoma"/>
-                <a:cs typeface="Tahoma"/>
-                <a:sym typeface="Tahoma"/>
-              </a:rPr>
-              <a:t>        </a:t>
-            </a:r>
-            <a:r>
-              <a:rPr lang="en-US" altLang="ko-KR" sz="1050" dirty="0"/>
-              <a:t>&lt;title&gt;</a:t>
-            </a:r>
-            <a:r>
-              <a:rPr lang="ko-KR" altLang="en-US" sz="1050" dirty="0"/>
-              <a:t>표 실습</a:t>
-            </a:r>
-            <a:r>
-              <a:rPr lang="en-US" altLang="ko-KR" sz="1050" dirty="0"/>
-              <a:t>&lt;/title&gt;</a:t>
-            </a:r>
-            <a:endParaRPr sz="900" dirty="0"/>
-          </a:p>
-          <a:p>
-            <a:pPr marL="0" marR="0" lvl="0" indent="0" algn="l" rtl="0">
-              <a:lnSpc>
-                <a:spcPct val="150000"/>
-              </a:lnSpc>
-              <a:spcBef>
-                <a:spcPts val="0"/>
-              </a:spcBef>
-              <a:spcAft>
-                <a:spcPts val="0"/>
-              </a:spcAft>
-              <a:buNone/>
-            </a:pPr>
-            <a:r>
-              <a:rPr lang="en-US" sz="900" dirty="0">
-                <a:solidFill>
-                  <a:schemeClr val="dk1"/>
-                </a:solidFill>
-                <a:latin typeface="Tahoma"/>
-                <a:ea typeface="Tahoma"/>
-                <a:cs typeface="Tahoma"/>
-                <a:sym typeface="Tahoma"/>
-              </a:rPr>
-              <a:t>    &lt;/head&gt;</a:t>
-            </a:r>
-            <a:endParaRPr sz="900" dirty="0"/>
-          </a:p>
-          <a:p>
-            <a:pPr marL="0" marR="0" lvl="0" indent="0" algn="l" rtl="0">
-              <a:lnSpc>
-                <a:spcPct val="150000"/>
-              </a:lnSpc>
-              <a:spcBef>
-                <a:spcPts val="0"/>
-              </a:spcBef>
-              <a:spcAft>
-                <a:spcPts val="0"/>
-              </a:spcAft>
-              <a:buNone/>
-            </a:pPr>
-            <a:r>
-              <a:rPr lang="en-US" sz="900" dirty="0">
-                <a:solidFill>
-                  <a:schemeClr val="dk1"/>
-                </a:solidFill>
-                <a:latin typeface="Tahoma"/>
-                <a:ea typeface="Tahoma"/>
-                <a:cs typeface="Tahoma"/>
-                <a:sym typeface="Tahoma"/>
-              </a:rPr>
-              <a:t>    &lt;body&gt;</a:t>
-            </a:r>
-            <a:endParaRPr sz="900" dirty="0"/>
-          </a:p>
-          <a:p>
-            <a:pPr marL="0" marR="0" lvl="0" indent="0" algn="l" rtl="0">
-              <a:lnSpc>
-                <a:spcPct val="150000"/>
-              </a:lnSpc>
-              <a:spcBef>
-                <a:spcPts val="0"/>
-              </a:spcBef>
-              <a:spcAft>
-                <a:spcPts val="0"/>
-              </a:spcAft>
-              <a:buNone/>
-            </a:pPr>
-            <a:r>
-              <a:rPr lang="en-US" sz="900" dirty="0">
-                <a:solidFill>
-                  <a:schemeClr val="dk1"/>
-                </a:solidFill>
-                <a:latin typeface="Tahoma"/>
-                <a:ea typeface="Tahoma"/>
-                <a:cs typeface="Tahoma"/>
-                <a:sym typeface="Tahoma"/>
-              </a:rPr>
-              <a:t>        </a:t>
-            </a:r>
-            <a:r>
-              <a:rPr lang="en-US" sz="900" b="1" dirty="0">
-                <a:solidFill>
-                  <a:schemeClr val="dk1"/>
-                </a:solidFill>
-                <a:latin typeface="Tahoma"/>
-                <a:ea typeface="Tahoma"/>
-                <a:cs typeface="Tahoma"/>
-                <a:sym typeface="Tahoma"/>
-              </a:rPr>
-              <a:t>&lt;table border="1"&gt;</a:t>
-            </a:r>
-            <a:endParaRPr sz="900" dirty="0"/>
-          </a:p>
-          <a:p>
-            <a:pPr marL="0" marR="0" lvl="0" indent="0" algn="l" rtl="0">
-              <a:lnSpc>
-                <a:spcPct val="150000"/>
-              </a:lnSpc>
-              <a:spcBef>
-                <a:spcPts val="0"/>
-              </a:spcBef>
-              <a:spcAft>
-                <a:spcPts val="0"/>
-              </a:spcAft>
-              <a:buNone/>
-            </a:pPr>
-            <a:r>
-              <a:rPr lang="en-US" sz="900" dirty="0">
-                <a:solidFill>
-                  <a:schemeClr val="dk1"/>
-                </a:solidFill>
-                <a:latin typeface="Tahoma"/>
-                <a:ea typeface="Tahoma"/>
-                <a:cs typeface="Tahoma"/>
-                <a:sym typeface="Tahoma"/>
-              </a:rPr>
-              <a:t>            &lt;tr&gt;</a:t>
-            </a:r>
-            <a:endParaRPr sz="900" dirty="0"/>
-          </a:p>
-          <a:p>
-            <a:pPr marL="0" marR="0" lvl="0" indent="0" algn="l" rtl="0">
-              <a:lnSpc>
-                <a:spcPct val="150000"/>
-              </a:lnSpc>
-              <a:spcBef>
-                <a:spcPts val="0"/>
-              </a:spcBef>
-              <a:spcAft>
-                <a:spcPts val="0"/>
-              </a:spcAft>
-              <a:buNone/>
-            </a:pPr>
-            <a:r>
-              <a:rPr lang="en-US" sz="900" dirty="0">
-                <a:solidFill>
-                  <a:schemeClr val="dk1"/>
-                </a:solidFill>
-                <a:latin typeface="Tahoma"/>
-                <a:ea typeface="Tahoma"/>
-                <a:cs typeface="Tahoma"/>
-                <a:sym typeface="Tahoma"/>
-              </a:rPr>
-              <a:t>                &lt;td&gt;</a:t>
-            </a:r>
-            <a:r>
-              <a:rPr lang="en-US" sz="900" dirty="0" err="1">
-                <a:solidFill>
-                  <a:schemeClr val="dk1"/>
-                </a:solidFill>
-                <a:latin typeface="Tahoma"/>
-                <a:ea typeface="Tahoma"/>
-                <a:cs typeface="Tahoma"/>
-                <a:sym typeface="Tahoma"/>
-              </a:rPr>
-              <a:t>이름</a:t>
-            </a:r>
-            <a:r>
-              <a:rPr lang="en-US" sz="900" dirty="0">
-                <a:solidFill>
-                  <a:schemeClr val="dk1"/>
-                </a:solidFill>
-                <a:latin typeface="Tahoma"/>
-                <a:ea typeface="Tahoma"/>
-                <a:cs typeface="Tahoma"/>
-                <a:sym typeface="Tahoma"/>
-              </a:rPr>
-              <a:t>&lt;/td&gt;&lt;td&gt;</a:t>
-            </a:r>
-            <a:r>
-              <a:rPr lang="en-US" sz="900" dirty="0" err="1">
-                <a:solidFill>
-                  <a:schemeClr val="dk1"/>
-                </a:solidFill>
-                <a:latin typeface="Tahoma"/>
-                <a:ea typeface="Tahoma"/>
-                <a:cs typeface="Tahoma"/>
-                <a:sym typeface="Tahoma"/>
-              </a:rPr>
-              <a:t>성별</a:t>
-            </a:r>
-            <a:r>
-              <a:rPr lang="en-US" sz="900" dirty="0">
-                <a:solidFill>
-                  <a:schemeClr val="dk1"/>
-                </a:solidFill>
-                <a:latin typeface="Tahoma"/>
-                <a:ea typeface="Tahoma"/>
-                <a:cs typeface="Tahoma"/>
-                <a:sym typeface="Tahoma"/>
-              </a:rPr>
-              <a:t>&lt;/td&gt;&lt;td&gt;</a:t>
-            </a:r>
-            <a:r>
-              <a:rPr lang="en-US" sz="900" dirty="0" err="1">
-                <a:solidFill>
-                  <a:schemeClr val="dk1"/>
-                </a:solidFill>
-                <a:latin typeface="Tahoma"/>
-                <a:ea typeface="Tahoma"/>
-                <a:cs typeface="Tahoma"/>
-                <a:sym typeface="Tahoma"/>
-              </a:rPr>
-              <a:t>나이</a:t>
-            </a:r>
-            <a:r>
-              <a:rPr lang="en-US" sz="900" dirty="0">
-                <a:solidFill>
-                  <a:schemeClr val="dk1"/>
-                </a:solidFill>
-                <a:latin typeface="Tahoma"/>
-                <a:ea typeface="Tahoma"/>
-                <a:cs typeface="Tahoma"/>
-                <a:sym typeface="Tahoma"/>
-              </a:rPr>
-              <a:t>&lt;/td&gt;</a:t>
-            </a:r>
-            <a:endParaRPr sz="900" dirty="0"/>
-          </a:p>
-          <a:p>
-            <a:pPr marL="0" marR="0" lvl="0" indent="0" algn="l" rtl="0">
-              <a:lnSpc>
-                <a:spcPct val="150000"/>
-              </a:lnSpc>
-              <a:spcBef>
-                <a:spcPts val="0"/>
-              </a:spcBef>
-              <a:spcAft>
-                <a:spcPts val="0"/>
-              </a:spcAft>
-              <a:buNone/>
-            </a:pPr>
-            <a:r>
-              <a:rPr lang="en-US" sz="900" dirty="0">
-                <a:solidFill>
-                  <a:schemeClr val="dk1"/>
-                </a:solidFill>
-                <a:latin typeface="Tahoma"/>
-                <a:ea typeface="Tahoma"/>
-                <a:cs typeface="Tahoma"/>
-                <a:sym typeface="Tahoma"/>
-              </a:rPr>
-              <a:t>            &lt;/tr&gt;</a:t>
-            </a:r>
-            <a:endParaRPr sz="900" dirty="0"/>
-          </a:p>
-          <a:p>
-            <a:pPr marL="0" marR="0" lvl="0" indent="0" algn="l" rtl="0">
-              <a:lnSpc>
-                <a:spcPct val="150000"/>
-              </a:lnSpc>
-              <a:spcBef>
-                <a:spcPts val="0"/>
-              </a:spcBef>
-              <a:spcAft>
-                <a:spcPts val="0"/>
-              </a:spcAft>
-              <a:buNone/>
-            </a:pPr>
-            <a:r>
-              <a:rPr lang="en-US" sz="900" dirty="0">
-                <a:solidFill>
-                  <a:schemeClr val="dk1"/>
-                </a:solidFill>
-                <a:latin typeface="Tahoma"/>
-                <a:ea typeface="Tahoma"/>
-                <a:cs typeface="Tahoma"/>
-                <a:sym typeface="Tahoma"/>
-              </a:rPr>
-              <a:t>            &lt;tr&gt;</a:t>
-            </a:r>
-            <a:endParaRPr sz="900" dirty="0"/>
-          </a:p>
-          <a:p>
-            <a:pPr marL="0" marR="0" lvl="0" indent="0" algn="l" rtl="0">
-              <a:lnSpc>
-                <a:spcPct val="150000"/>
-              </a:lnSpc>
-              <a:spcBef>
-                <a:spcPts val="0"/>
-              </a:spcBef>
-              <a:spcAft>
-                <a:spcPts val="0"/>
-              </a:spcAft>
-              <a:buNone/>
-            </a:pPr>
-            <a:r>
-              <a:rPr lang="en-US" sz="900" dirty="0">
-                <a:solidFill>
-                  <a:schemeClr val="dk1"/>
-                </a:solidFill>
-                <a:latin typeface="Tahoma"/>
-                <a:ea typeface="Tahoma"/>
-                <a:cs typeface="Tahoma"/>
-                <a:sym typeface="Tahoma"/>
-              </a:rPr>
-              <a:t>                &lt;td&gt;</a:t>
-            </a:r>
-            <a:r>
-              <a:rPr lang="en-US" sz="900" dirty="0" err="1">
-                <a:solidFill>
-                  <a:schemeClr val="dk1"/>
-                </a:solidFill>
-                <a:latin typeface="Tahoma"/>
-                <a:ea typeface="Tahoma"/>
-                <a:cs typeface="Tahoma"/>
-                <a:sym typeface="Tahoma"/>
-              </a:rPr>
-              <a:t>홍길동</a:t>
-            </a:r>
-            <a:r>
-              <a:rPr lang="en-US" sz="900" dirty="0">
-                <a:solidFill>
-                  <a:schemeClr val="dk1"/>
-                </a:solidFill>
-                <a:latin typeface="Tahoma"/>
-                <a:ea typeface="Tahoma"/>
-                <a:cs typeface="Tahoma"/>
-                <a:sym typeface="Tahoma"/>
-              </a:rPr>
-              <a:t>&lt;/td&gt;&lt;td&gt;남&lt;/td&gt;&lt;td&gt;6&lt;/td&gt;</a:t>
-            </a:r>
-            <a:endParaRPr sz="900" dirty="0"/>
-          </a:p>
-          <a:p>
-            <a:pPr marL="0" marR="0" lvl="0" indent="0" algn="l" rtl="0">
-              <a:lnSpc>
-                <a:spcPct val="150000"/>
-              </a:lnSpc>
-              <a:spcBef>
-                <a:spcPts val="0"/>
-              </a:spcBef>
-              <a:spcAft>
-                <a:spcPts val="0"/>
-              </a:spcAft>
-              <a:buNone/>
-            </a:pPr>
-            <a:r>
-              <a:rPr lang="en-US" sz="900" dirty="0">
-                <a:solidFill>
-                  <a:schemeClr val="dk1"/>
-                </a:solidFill>
-                <a:latin typeface="Tahoma"/>
-                <a:ea typeface="Tahoma"/>
-                <a:cs typeface="Tahoma"/>
-                <a:sym typeface="Tahoma"/>
-              </a:rPr>
-              <a:t>            &lt;/tr&gt;</a:t>
-            </a:r>
-            <a:endParaRPr sz="900" dirty="0"/>
-          </a:p>
-          <a:p>
-            <a:pPr marL="0" marR="0" lvl="0" indent="0" algn="l" rtl="0">
-              <a:lnSpc>
-                <a:spcPct val="150000"/>
-              </a:lnSpc>
-              <a:spcBef>
-                <a:spcPts val="0"/>
-              </a:spcBef>
-              <a:spcAft>
-                <a:spcPts val="0"/>
-              </a:spcAft>
-              <a:buNone/>
-            </a:pPr>
-            <a:r>
-              <a:rPr lang="en-US" sz="900" dirty="0">
-                <a:solidFill>
-                  <a:schemeClr val="dk1"/>
-                </a:solidFill>
-                <a:latin typeface="Tahoma"/>
-                <a:ea typeface="Tahoma"/>
-                <a:cs typeface="Tahoma"/>
-                <a:sym typeface="Tahoma"/>
-              </a:rPr>
-              <a:t>            &lt;tr&gt;</a:t>
-            </a:r>
-            <a:endParaRPr sz="900" dirty="0"/>
-          </a:p>
-          <a:p>
-            <a:pPr marL="0" marR="0" lvl="0" indent="0" algn="l" rtl="0">
-              <a:lnSpc>
-                <a:spcPct val="150000"/>
-              </a:lnSpc>
-              <a:spcBef>
-                <a:spcPts val="0"/>
-              </a:spcBef>
-              <a:spcAft>
-                <a:spcPts val="0"/>
-              </a:spcAft>
-              <a:buNone/>
-            </a:pPr>
-            <a:r>
-              <a:rPr lang="en-US" sz="900" dirty="0">
-                <a:solidFill>
-                  <a:schemeClr val="dk1"/>
-                </a:solidFill>
-                <a:latin typeface="Tahoma"/>
-                <a:ea typeface="Tahoma"/>
-                <a:cs typeface="Tahoma"/>
-                <a:sym typeface="Tahoma"/>
-              </a:rPr>
-              <a:t>                &lt;td&gt;</a:t>
-            </a:r>
-            <a:r>
-              <a:rPr lang="en-US" sz="900" dirty="0" err="1">
-                <a:solidFill>
-                  <a:schemeClr val="dk1"/>
-                </a:solidFill>
-                <a:latin typeface="Tahoma"/>
-                <a:ea typeface="Tahoma"/>
-                <a:cs typeface="Tahoma"/>
-                <a:sym typeface="Tahoma"/>
-              </a:rPr>
-              <a:t>성춘향</a:t>
-            </a:r>
-            <a:r>
-              <a:rPr lang="en-US" sz="900" dirty="0">
-                <a:solidFill>
-                  <a:schemeClr val="dk1"/>
-                </a:solidFill>
-                <a:latin typeface="Tahoma"/>
-                <a:ea typeface="Tahoma"/>
-                <a:cs typeface="Tahoma"/>
-                <a:sym typeface="Tahoma"/>
-              </a:rPr>
-              <a:t>&lt;/td&gt;&lt;td&gt;여&lt;/td&gt;&lt;td&gt;2&lt;/td&gt;</a:t>
-            </a:r>
-            <a:endParaRPr sz="900" dirty="0"/>
-          </a:p>
-          <a:p>
-            <a:pPr marL="0" marR="0" lvl="0" indent="0" algn="l" rtl="0">
-              <a:lnSpc>
-                <a:spcPct val="150000"/>
-              </a:lnSpc>
-              <a:spcBef>
-                <a:spcPts val="0"/>
-              </a:spcBef>
-              <a:spcAft>
-                <a:spcPts val="0"/>
-              </a:spcAft>
-              <a:buNone/>
-            </a:pPr>
-            <a:r>
-              <a:rPr lang="en-US" sz="900" dirty="0">
-                <a:solidFill>
-                  <a:schemeClr val="dk1"/>
-                </a:solidFill>
-                <a:latin typeface="Tahoma"/>
-                <a:ea typeface="Tahoma"/>
-                <a:cs typeface="Tahoma"/>
-                <a:sym typeface="Tahoma"/>
-              </a:rPr>
-              <a:t>            &lt;/tr&gt;</a:t>
-            </a:r>
-            <a:endParaRPr sz="900" dirty="0"/>
-          </a:p>
-          <a:p>
-            <a:pPr marL="0" marR="0" lvl="0" indent="0" algn="l" rtl="0">
-              <a:lnSpc>
-                <a:spcPct val="150000"/>
-              </a:lnSpc>
-              <a:spcBef>
-                <a:spcPts val="0"/>
-              </a:spcBef>
-              <a:spcAft>
-                <a:spcPts val="0"/>
-              </a:spcAft>
-              <a:buNone/>
-            </a:pPr>
-            <a:r>
-              <a:rPr lang="en-US" sz="900" b="1" dirty="0">
-                <a:solidFill>
-                  <a:schemeClr val="dk1"/>
-                </a:solidFill>
-                <a:latin typeface="Tahoma"/>
-                <a:ea typeface="Tahoma"/>
-                <a:cs typeface="Tahoma"/>
-                <a:sym typeface="Tahoma"/>
-              </a:rPr>
-              <a:t>        &lt;/table&gt;</a:t>
-            </a:r>
-            <a:endParaRPr sz="900" dirty="0"/>
-          </a:p>
-          <a:p>
-            <a:pPr marL="0" marR="0" lvl="0" indent="0" algn="l" rtl="0">
-              <a:lnSpc>
-                <a:spcPct val="150000"/>
-              </a:lnSpc>
-              <a:spcBef>
-                <a:spcPts val="0"/>
-              </a:spcBef>
-              <a:spcAft>
-                <a:spcPts val="0"/>
-              </a:spcAft>
-              <a:buNone/>
-            </a:pPr>
-            <a:r>
-              <a:rPr lang="en-US" sz="900" dirty="0">
-                <a:solidFill>
-                  <a:schemeClr val="dk1"/>
-                </a:solidFill>
-                <a:latin typeface="Tahoma"/>
-                <a:ea typeface="Tahoma"/>
-                <a:cs typeface="Tahoma"/>
-                <a:sym typeface="Tahoma"/>
-              </a:rPr>
-              <a:t>    &lt;/body&gt;</a:t>
-            </a:r>
-            <a:endParaRPr sz="900" dirty="0"/>
-          </a:p>
-          <a:p>
-            <a:pPr marL="0" marR="0" lvl="0" indent="0" algn="l" rtl="0">
-              <a:lnSpc>
-                <a:spcPct val="150000"/>
-              </a:lnSpc>
-              <a:spcBef>
-                <a:spcPts val="0"/>
-              </a:spcBef>
-              <a:spcAft>
-                <a:spcPts val="0"/>
-              </a:spcAft>
-              <a:buNone/>
-            </a:pPr>
-            <a:r>
-              <a:rPr lang="en-US" sz="900" dirty="0">
-                <a:solidFill>
-                  <a:schemeClr val="dk1"/>
-                </a:solidFill>
-                <a:latin typeface="Tahoma"/>
-                <a:ea typeface="Tahoma"/>
-                <a:cs typeface="Tahoma"/>
-                <a:sym typeface="Tahoma"/>
-              </a:rPr>
-              <a:t>&lt;/html&gt;</a:t>
-            </a:r>
-            <a:endParaRPr sz="900" dirty="0"/>
-          </a:p>
-        </p:txBody>
-      </p:sp>
-    </p:spTree>
-  </p:cSld>
-  <p:clrMapOvr>
-    <a:masterClrMapping/>
-  </p:clrMapOvr>
-</p:sld>
-</file>
-
 <file path=ppt/slides/slide23.xml><?xml version="1.0" encoding="utf-8"?>
-<p:sld xmlns:a="http://schemas.openxmlformats.org/drawingml/2006/main" xmlns:r="http://schemas.openxmlformats.org/officeDocument/2006/relationships" xmlns:p="http://schemas.openxmlformats.org/presentationml/2006/main">
+<p:sld xmlns:a="http://schemas.openxmlformats.org/drawingml/2006/main" xmlns:r="http://schemas.openxmlformats.org/officeDocument/2006/relationships" xmlns:p="http://schemas.openxmlformats.org/presentationml/2006/main" xmlns:p14="http://schemas.microsoft.com/office/powerpoint/2010/main">
   <p:cSld>
     <p:spTree>
       <p:nvGrpSpPr>
@@ -17759,7 +17907,7 @@
         </p:nvSpPr>
         <p:spPr>
           <a:xfrm>
-            <a:off x="590551" y="146050"/>
+            <a:off x="590550" y="146050"/>
             <a:ext cx="10363200" cy="762000"/>
           </a:xfrm>
           <a:prstGeom prst="rect">
@@ -17808,8 +17956,8 @@
         </p:nvSpPr>
         <p:spPr>
           <a:xfrm>
-            <a:off x="592667" y="1152527"/>
-            <a:ext cx="10363200" cy="627636"/>
+            <a:off x="592455" y="1152525"/>
+            <a:ext cx="10363200" cy="627380"/>
           </a:xfrm>
           <a:prstGeom prst="rect">
             <a:avLst/>
@@ -17902,7 +18050,7 @@
         </p:nvSpPr>
         <p:spPr>
           <a:xfrm>
-            <a:off x="9482667" y="6419850"/>
+            <a:off x="9482455" y="6419850"/>
             <a:ext cx="2540000" cy="304800"/>
           </a:xfrm>
           <a:prstGeom prst="rect">
@@ -17951,8 +18099,8 @@
         </p:nvSpPr>
         <p:spPr>
           <a:xfrm>
-            <a:off x="1195918" y="6392863"/>
-            <a:ext cx="4146549" cy="349250"/>
+            <a:off x="1195705" y="6393180"/>
+            <a:ext cx="4146550" cy="349250"/>
           </a:xfrm>
           <a:prstGeom prst="rect">
             <a:avLst/>
@@ -18471,11 +18619,221 @@
           </a:graphicData>
         </a:graphic>
       </p:graphicFrame>
+      <mc:AlternateContent xmlns:mc="http://schemas.openxmlformats.org/markup-compatibility/2006" xmlns:p14="http://schemas.microsoft.com/office/powerpoint/2010/main">
+        <mc:Choice Requires="p14">
+          <p:contentPart p14:bwMode="auto" r:id="rId3">
+            <p14:nvContentPartPr>
+              <p14:cNvPr id="190" name="잉크 1"/>
+              <p14:cNvContentPartPr/>
+              <p14:nvPr/>
+            </p14:nvContentPartPr>
+            <p14:xfrm>
+              <a:off x="9314180" y="4131310"/>
+              <a:ext cx="930275" cy="1685290"/>
+            </p14:xfrm>
+          </p:contentPart>
+        </mc:Choice>
+        <mc:Fallback>
+          <p:pic>
+            <p:nvPicPr>
+              <p:cNvPr id="190" name="잉크 1"/>
+              <p:cNvPicPr/>
+              <p:nvPr/>
+            </p:nvPicPr>
+            <p:blipFill>
+              <a:blip r:embed="rId4"/>
+              <a:stretch>
+                <a:fillRect/>
+              </a:stretch>
+            </p:blipFill>
+            <p:spPr>
+              <a:xfrm>
+                <a:off x="9314180" y="4131310"/>
+                <a:ext cx="930275" cy="1685290"/>
+              </a:xfrm>
+              <a:prstGeom prst="rect">
+                <a:avLst/>
+              </a:prstGeom>
+            </p:spPr>
+          </p:pic>
+        </mc:Fallback>
+      </mc:AlternateContent>
+      <mc:AlternateContent xmlns:mc="http://schemas.openxmlformats.org/markup-compatibility/2006" xmlns:p14="http://schemas.microsoft.com/office/powerpoint/2010/main">
+        <mc:Choice Requires="p14">
+          <p:contentPart p14:bwMode="auto" r:id="rId5">
+            <p14:nvContentPartPr>
+              <p14:cNvPr id="191" name="잉크 2"/>
+              <p14:cNvContentPartPr/>
+              <p14:nvPr/>
+            </p14:nvContentPartPr>
+            <p14:xfrm>
+              <a:off x="10220960" y="4725035"/>
+              <a:ext cx="328930" cy="553720"/>
+            </p14:xfrm>
+          </p:contentPart>
+        </mc:Choice>
+        <mc:Fallback>
+          <p:pic>
+            <p:nvPicPr>
+              <p:cNvPr id="191" name="잉크 2"/>
+              <p:cNvPicPr/>
+              <p:nvPr/>
+            </p:nvPicPr>
+            <p:blipFill>
+              <a:blip r:embed="rId6"/>
+              <a:stretch>
+                <a:fillRect/>
+              </a:stretch>
+            </p:blipFill>
+            <p:spPr>
+              <a:xfrm>
+                <a:off x="10220960" y="4725035"/>
+                <a:ext cx="328930" cy="553720"/>
+              </a:xfrm>
+              <a:prstGeom prst="rect">
+                <a:avLst/>
+              </a:prstGeom>
+            </p:spPr>
+          </p:pic>
+        </mc:Fallback>
+      </mc:AlternateContent>
+      <mc:AlternateContent xmlns:mc="http://schemas.openxmlformats.org/markup-compatibility/2006" xmlns:p14="http://schemas.microsoft.com/office/powerpoint/2010/main">
+        <mc:Choice Requires="p14">
+          <p:contentPart p14:bwMode="auto" r:id="rId7">
+            <p14:nvContentPartPr>
+              <p14:cNvPr id="192" name="잉크 3"/>
+              <p14:cNvContentPartPr/>
+              <p14:nvPr/>
+            </p14:nvContentPartPr>
+            <p14:xfrm>
+              <a:off x="10485120" y="4677410"/>
+              <a:ext cx="465455" cy="753745"/>
+            </p14:xfrm>
+          </p:contentPart>
+        </mc:Choice>
+        <mc:Fallback>
+          <p:pic>
+            <p:nvPicPr>
+              <p:cNvPr id="192" name="잉크 3"/>
+              <p:cNvPicPr/>
+              <p:nvPr/>
+            </p:nvPicPr>
+            <p:blipFill>
+              <a:blip r:embed="rId8"/>
+              <a:stretch>
+                <a:fillRect/>
+              </a:stretch>
+            </p:blipFill>
+            <p:spPr>
+              <a:xfrm>
+                <a:off x="10485120" y="4677410"/>
+                <a:ext cx="465455" cy="753745"/>
+              </a:xfrm>
+              <a:prstGeom prst="rect">
+                <a:avLst/>
+              </a:prstGeom>
+            </p:spPr>
+          </p:pic>
+        </mc:Fallback>
+      </mc:AlternateContent>
+      <mc:AlternateContent xmlns:mc="http://schemas.openxmlformats.org/markup-compatibility/2006" xmlns:p14="http://schemas.microsoft.com/office/powerpoint/2010/main">
+        <mc:Choice Requires="p14">
+          <p:contentPart p14:bwMode="auto" r:id="rId9">
+            <p14:nvContentPartPr>
+              <p14:cNvPr id="193" name="잉크 4"/>
+              <p14:cNvContentPartPr/>
+              <p14:nvPr/>
+            </p14:nvContentPartPr>
+            <p14:xfrm>
+              <a:off x="11135360" y="4925695"/>
+              <a:ext cx="0" cy="489585"/>
+            </p14:xfrm>
+          </p:contentPart>
+        </mc:Choice>
+        <mc:Fallback>
+          <p:pic>
+            <p:nvPicPr>
+              <p:cNvPr id="193" name="잉크 4"/>
+              <p:cNvPicPr/>
+              <p:nvPr/>
+            </p:nvPicPr>
+            <p:blipFill>
+              <a:blip r:embed="rId10"/>
+              <a:stretch>
+                <a:fillRect/>
+              </a:stretch>
+            </p:blipFill>
+            <p:spPr>
+              <a:xfrm>
+                <a:off x="11135360" y="4925695"/>
+                <a:ext cx="0" cy="489585"/>
+              </a:xfrm>
+              <a:prstGeom prst="rect">
+                <a:avLst/>
+              </a:prstGeom>
+            </p:spPr>
+          </p:pic>
+        </mc:Fallback>
+      </mc:AlternateContent>
+      <mc:AlternateContent xmlns:mc="http://schemas.openxmlformats.org/markup-compatibility/2006" xmlns:p14="http://schemas.microsoft.com/office/powerpoint/2010/main">
+        <mc:Choice Requires="p14">
+          <p:contentPart p14:bwMode="auto" r:id="rId11">
+            <p14:nvContentPartPr>
+              <p14:cNvPr id="194" name="잉크 5"/>
+              <p14:cNvContentPartPr/>
+              <p14:nvPr/>
+            </p14:nvContentPartPr>
+            <p14:xfrm>
+              <a:off x="11336020" y="5022215"/>
+              <a:ext cx="0" cy="360680"/>
+            </p14:xfrm>
+          </p:contentPart>
+        </mc:Choice>
+        <mc:Fallback>
+          <p:pic>
+            <p:nvPicPr>
+              <p:cNvPr id="194" name="잉크 5"/>
+              <p:cNvPicPr/>
+              <p:nvPr/>
+            </p:nvPicPr>
+            <p:blipFill>
+              <a:blip r:embed="rId12"/>
+              <a:stretch>
+                <a:fillRect/>
+              </a:stretch>
+            </p:blipFill>
+            <p:spPr>
+              <a:xfrm>
+                <a:off x="11336020" y="5022215"/>
+                <a:ext cx="0" cy="360680"/>
+              </a:xfrm>
+              <a:prstGeom prst="rect">
+                <a:avLst/>
+              </a:prstGeom>
+            </p:spPr>
+          </p:pic>
+        </mc:Fallback>
+      </mc:AlternateContent>
     </p:spTree>
   </p:cSld>
   <p:clrMapOvr>
     <a:masterClrMapping/>
   </p:clrMapOvr>
+  <mc:AlternateContent xmlns:mc="http://schemas.openxmlformats.org/markup-compatibility/2006">
+    <mc:Choice xmlns:p14="http://schemas.microsoft.com/office/powerpoint/2010/main" Requires="p14">
+      <p:transition spd="slow" p14:dur="2000"/>
+    </mc:Choice>
+    <mc:Fallback>
+      <p:transition spd="slow"/>
+    </mc:Fallback>
+  </mc:AlternateContent>
+  <p:timing>
+    <p:tnLst>
+      <p:par>
+        <p:cTn id="1" dur="indefinite" restart="never" nodeType="tmRoot"/>
+      </p:par>
+    </p:tnLst>
+  </p:timing>
 </p:sld>
 </file>
 

--- a/1학기/웹 프로그래밍/2026_웹 프로그래밍_part2.pptx
+++ b/1학기/웹 프로그래밍/2026_웹 프로그래밍_part2.pptx
@@ -2,7 +2,7 @@
 <file path=ppt/presentation.xml><?xml version="1.0" encoding="utf-8"?>
 <p:presentation xmlns:a="http://schemas.openxmlformats.org/drawingml/2006/main" xmlns:r="http://schemas.openxmlformats.org/officeDocument/2006/relationships" xmlns:p="http://schemas.openxmlformats.org/presentationml/2006/main" xmlns:p14="http://schemas.microsoft.com/office/powerpoint/2010/main" strictFirstAndLastChars="0" embedTrueTypeFonts="1" saveSubsetFonts="1" autoCompressPictures="0">
   <p:sldMasterIdLst>
-    <p:sldMasterId id="2147483676" r:id="rId8"/>
+    <p:sldMasterId id="2147483689" r:id="rId8"/>
   </p:sldMasterIdLst>
   <p:notesMasterIdLst>
     <p:notesMasterId r:id="rId10"/>
@@ -30,23 +30,23 @@
     <p:sldId id="269" r:id="rId44"/>
     <p:sldId id="270" r:id="rId46"/>
     <p:sldId id="271" r:id="rId48"/>
-    <p:sldId id="272" r:id="rId49"/>
-    <p:sldId id="344" r:id="rId50"/>
-    <p:sldId id="345" r:id="rId51"/>
-    <p:sldId id="275" r:id="rId52"/>
-    <p:sldId id="346" r:id="rId54"/>
-    <p:sldId id="347" r:id="rId55"/>
-    <p:sldId id="354" r:id="rId56"/>
-    <p:sldId id="355" r:id="rId57"/>
-    <p:sldId id="356" r:id="rId58"/>
-    <p:sldId id="357" r:id="rId59"/>
-    <p:sldId id="358" r:id="rId60"/>
-    <p:sldId id="348" r:id="rId61"/>
-    <p:sldId id="349" r:id="rId62"/>
-    <p:sldId id="280" r:id="rId63"/>
-    <p:sldId id="281" r:id="rId65"/>
-    <p:sldId id="350" r:id="rId67"/>
-    <p:sldId id="283" r:id="rId68"/>
+    <p:sldId id="272" r:id="rId50"/>
+    <p:sldId id="344" r:id="rId52"/>
+    <p:sldId id="345" r:id="rId53"/>
+    <p:sldId id="275" r:id="rId54"/>
+    <p:sldId id="346" r:id="rId56"/>
+    <p:sldId id="347" r:id="rId57"/>
+    <p:sldId id="354" r:id="rId58"/>
+    <p:sldId id="355" r:id="rId59"/>
+    <p:sldId id="356" r:id="rId60"/>
+    <p:sldId id="357" r:id="rId61"/>
+    <p:sldId id="358" r:id="rId62"/>
+    <p:sldId id="348" r:id="rId63"/>
+    <p:sldId id="349" r:id="rId64"/>
+    <p:sldId id="280" r:id="rId65"/>
+    <p:sldId id="281" r:id="rId67"/>
+    <p:sldId id="350" r:id="rId69"/>
+    <p:sldId id="283" r:id="rId70"/>
   </p:sldIdLst>
   <p:sldSz cx="12192000" cy="6858000"/>
   <p:notesSz cx="6858000" cy="9144000"/>
@@ -915,7 +915,7 @@
       <inkml:brushProperty name="fitToCurve" value="1"/>
     </inkml:brush>
   </inkml:definitions>
-  <inkml:trace contextRef="#ctx0" brushRef="#br0">2072 267,'0'156,"-45"111,-21 1,-113 244,-21 23,44-223,-23-44,23-23,0 0,23-89,-23 67,44-90,45-21,-22 22,22-1,1-44,21 23,-22-23,45-44,0 44,-1-22,1-1,0-21,22-23,0 23,-22-45,22 22,0 0,0-44,22-22,0-23,23-67,44-156,0 112,0-23,0-66,67 0,0-45,0 0,134-223,-134 178,44 45,-44 0,-44 22,-1 45,-22 89,1 23,-90 66,44 22,-44 1,45 44,-23-67,0 67,-22-22,23 22,-23 22,-23 22,1 1,-45 178,45-67,-45 67,-22 22,-156 401,89-312,67-22,-23 0,-22 0,45-44,-22-1,22-44,0 44,-1-66,1-23,67-66,-23-23,-21 22,66-88,0-1,-23 0,23-44,23-45,88-223,67-133,-22 178,-44 0,200-268,-156 246,-45-45,45 0,0-67,0 22,-44 23,-1 66,-22 68,-44 66,-23 45,0 67,1-1,-23 1,0 0,-23 44,1 23,-156 267,-112 334,89-223,23-21,-22-24,21 24,23-90,0 0,23-67,43-45,-21-44,44-67,0-22,67-67</inkml:trace>
+  <inkml:trace contextRef="#ctx0" brushRef="#br0">2161 0,'-44'0,"-23"89,-223 111,-646 446,312-88,424-291,200-222,0 44,44-22,1-45,133 45,-89-23,134 68,111 88,67 90,-312-245,45 21,-134-21,45-45,-1 0,23 0,-45 67,23 0,-45-45,0 0,0-22</inkml:trace>
 </inkml:ink>
 </file>
 
@@ -941,7 +941,7 @@
       <inkml:brushProperty name="fitToCurve" value="1"/>
     </inkml:brush>
   </inkml:definitions>
-  <inkml:trace contextRef="#ctx0" brushRef="#br0">66 111,'67'-22,"22"-1,45-21,-67 44,44-22,1 44,-68-22,1 44,-1-44,1 23,-23 21,1 1,-1 22,0-45,-22 22,0 23,0-44,0 43,-22-21,-23 0,1-1,-1 23,-22-22,0-1,1 1,21-23,0-22,1 0,22 22,-1-22,1 0,0 0,-1 0,23-22,23 0,-1 22,0 0,1 0,-1 0,0 0,23 0,-1 0,-21 0,21 0,1 22,-45 0,44 1,-21-23,-1 22,0 0,0 0,-22 1,23-1,-23 23,0-23,0 0,0 0,-23 23,1-23,0 1,-45 21,-44 23,66-22,0-23,1 22,-23-44,22 23,1-1,-1 0,1 1,21-1,-21-22,22 0,-1 0,1 22,0-22,0 0,22 0</inkml:trace>
+  <inkml:trace contextRef="#ctx0" brushRef="#br0">1181 111,'-402'223,"180"-134,132 0,-43-22,-1-23,67 1,-44 44,89-89,44 0,22 0,45 0,67 0,335 0,-268 22,-157-22,46 45,-157-45,-22 0,-155-156,66 45,-156-135,44 68,224 134,66 66,22 45,46 133,66 90,-90-156,24 89,-24-157,-43-21,-23 0,0-1,22-44,23 0,-23-44,0-68,67-445,-44 245,22 112,-67 200</inkml:trace>
 </inkml:ink>
 </file>
 
@@ -967,7 +967,7 @@
       <inkml:brushProperty name="fitToCurve" value="1"/>
     </inkml:brush>
   </inkml:definitions>
-  <inkml:trace contextRef="#ctx0" brushRef="#br0">1292 0,'-45'22,"-21"134,-68 89,67-134,-89 134,89-133,0-23,0 0,-44 112,89-179,-23 67,-22 23,45-68,-23-22,45 23,-22 22,0-23,-23-21,23 21,0 1,-1-23,1 23,0-1,0 1,-1-45,23 22,0 23,-22-45,0 0,22 22,-22 0,22-22</inkml:trace>
+  <inkml:trace contextRef="#ctx0" brushRef="#br0">2072 267,'0'156,"-45"111,-21 1,-113 244,-21 23,44-223,-23-44,23-23,0 0,23-89,-23 67,44-90,45-21,-22 22,22-1,1-44,21 23,-22-23,45-44,0 44,-1-22,1-1,0-21,22-23,0 23,-22-45,22 22,0 0,0-44,22-22,0-23,23-67,44-156,0 112,0-23,0-66,67 0,0-45,0 0,134-223,-134 178,44 45,-44 0,-44 22,-1 45,-22 89,1 23,-90 66,44 22,-44 1,45 44,-23-67,0 67,-22-22,23 22,-23 22,-23 22,1 1,-45 178,45-67,-45 67,-22 22,-156 401,89-312,67-22,-23 0,-22 0,45-44,-22-1,22-44,0 44,-1-66,1-23,67-66,-23-23,-21 22,66-88,0-1,-23 0,23-44,23-45,88-223,67-133,-22 178,-44 0,200-268,-156 246,-45-45,45 0,0-67,0 22,-44 23,-1 66,-22 68,-44 66,-23 45,0 67,1-1,-23 1,0 0,-23 44,1 23,-156 267,-112 334,89-223,23-21,-22-24,21 24,23-90,0 0,23-67,43-45,-21-44,44-67,0-22,67-67</inkml:trace>
 </inkml:ink>
 </file>
 
@@ -993,7 +993,7 @@
       <inkml:brushProperty name="fitToCurve" value="1"/>
     </inkml:brush>
   </inkml:definitions>
-  <inkml:trace contextRef="#ctx0" brushRef="#br0">0 0,'0'44,"0"45,0 45,0 245,0-201,0-22,0-45,0-44,0 22,0-66,0-1,0 0,0 1,0-1,0-22</inkml:trace>
+  <inkml:trace contextRef="#ctx0" brushRef="#br0">66 111,'67'-22,"22"-1,45-21,-67 44,44-22,1 44,-68-22,1 44,-1-44,1 23,-23 21,1 1,-1 22,0-45,-22 22,0 23,0-44,0 43,-22-21,-23 0,1-1,-1 23,-22-22,0-1,1 1,21-23,0-22,1 0,22 22,-1-22,1 0,0 0,-1 0,23-22,23 0,-1 22,0 0,1 0,-1 0,0 0,23 0,-1 0,-21 0,21 0,1 22,-45 0,44 1,-21-23,-1 22,0 0,0 0,-22 1,23-1,-23 23,0-23,0 0,0 0,-23 23,1-23,0 1,-45 21,-44 23,66-22,0-23,1 22,-23-44,22 23,1-1,-1 0,1 1,21-1,-21-22,22 0,-1 0,1 22,0-22,0 0,22 0</inkml:trace>
 </inkml:ink>
 </file>
 
@@ -1019,7 +1019,137 @@
       <inkml:brushProperty name="fitToCurve" value="1"/>
     </inkml:brush>
   </inkml:definitions>
+  <inkml:trace contextRef="#ctx0" brushRef="#br0">1292 0,'-45'22,"-21"134,-68 89,67-134,-89 134,89-133,0-23,0 0,-44 112,89-179,-23 67,-22 23,45-68,-23-22,45 23,-22 22,0-23,-23-21,23 21,0 1,-1-23,1 23,0-1,0 1,-1-45,23 22,0 23,-22-45,0 0,22 22,-22 0,22-22</inkml:trace>
+</inkml:ink>
+</file>
+
+<file path=ppt/ink/ink35.xml><?xml version="1.0" encoding="utf-8"?>
+<inkml:ink xmlns:inkml="http://www.w3.org/2003/InkML">
+  <inkml:definitions>
+    <inkml:context xml:id="ctx0">
+      <inkml:inkSource xml:id="inkSrc0">
+        <inkml:traceFormat>
+          <inkml:channel name="X" type="integer" max="3200" units="cm"/>
+          <inkml:channel name="Y" type="integer" max="1080" units="cm"/>
+        </inkml:traceFormat>
+        <inkml:channelProperties>
+          <inkml:channelProperty channel="X" name="resolution" value="66.666656" units="1/cm"/>
+          <inkml:channelProperty channel="Y" name="resolution" value="40.000000" units="1/cm"/>
+        </inkml:channelProperties>
+      </inkml:inkSource>
+    </inkml:context>
+    <inkml:brush xml:id="br0">
+      <inkml:brushProperty name="width" value="0.035278" units="cm"/>
+      <inkml:brushProperty name="height" value="0.035278" units="cm"/>
+      <inkml:brushProperty name="color" value="#ff0000"/>
+      <inkml:brushProperty name="fitToCurve" value="1"/>
+    </inkml:brush>
+  </inkml:definitions>
+  <inkml:trace contextRef="#ctx0" brushRef="#br0">0 0,'0'44,"0"45,0 45,0 245,0-201,0-22,0-45,0-44,0 22,0-66,0-1,0 0,0 1,0-1,0-22</inkml:trace>
+</inkml:ink>
+</file>
+
+<file path=ppt/ink/ink36.xml><?xml version="1.0" encoding="utf-8"?>
+<inkml:ink xmlns:inkml="http://www.w3.org/2003/InkML">
+  <inkml:definitions>
+    <inkml:context xml:id="ctx0">
+      <inkml:inkSource xml:id="inkSrc0">
+        <inkml:traceFormat>
+          <inkml:channel name="X" type="integer" max="3200" units="cm"/>
+          <inkml:channel name="Y" type="integer" max="1080" units="cm"/>
+        </inkml:traceFormat>
+        <inkml:channelProperties>
+          <inkml:channelProperty channel="X" name="resolution" value="66.666656" units="1/cm"/>
+          <inkml:channelProperty channel="Y" name="resolution" value="40.000000" units="1/cm"/>
+        </inkml:channelProperties>
+      </inkml:inkSource>
+    </inkml:context>
+    <inkml:brush xml:id="br0">
+      <inkml:brushProperty name="width" value="0.035278" units="cm"/>
+      <inkml:brushProperty name="height" value="0.035278" units="cm"/>
+      <inkml:brushProperty name="color" value="#ff0000"/>
+      <inkml:brushProperty name="fitToCurve" value="1"/>
+    </inkml:brush>
+  </inkml:definitions>
   <inkml:trace contextRef="#ctx0" brushRef="#br0">0 0,'0'44,"0"1,0 111,0-67,0-45,0 45,0 1,0-46,0 23,0 0,0-23,0 1,0 0,0-23,0 0,0 0,0 1,0-1,0 0,0-22</inkml:trace>
+</inkml:ink>
+</file>
+
+<file path=ppt/ink/ink37.xml><?xml version="1.0" encoding="utf-8"?>
+<inkml:ink xmlns:inkml="http://www.w3.org/2003/InkML">
+  <inkml:definitions>
+    <inkml:context xml:id="ctx0">
+      <inkml:inkSource xml:id="inkSrc0">
+        <inkml:traceFormat>
+          <inkml:channel name="X" type="integer" max="3200" units="cm"/>
+          <inkml:channel name="Y" type="integer" max="1080" units="cm"/>
+        </inkml:traceFormat>
+        <inkml:channelProperties>
+          <inkml:channelProperty channel="X" name="resolution" value="66.666656" units="1/cm"/>
+          <inkml:channelProperty channel="Y" name="resolution" value="40.000000" units="1/cm"/>
+        </inkml:channelProperties>
+      </inkml:inkSource>
+    </inkml:context>
+    <inkml:brush xml:id="br0">
+      <inkml:brushProperty name="width" value="0.035278" units="cm"/>
+      <inkml:brushProperty name="height" value="0.035278" units="cm"/>
+      <inkml:brushProperty name="color" value="#ff0000"/>
+      <inkml:brushProperty name="fitToCurve" value="1"/>
+    </inkml:brush>
+  </inkml:definitions>
+  <inkml:trace contextRef="#ctx0" brushRef="#br0">1314 0,'0'22,"0"22,-67 68,-66-1,66-44,-156 89,-67 0,112-45,-23-21,157-46,-23 1,23-45,88 0,1 0,66 0,45 0,111 0,-177 0,21 0,-44 0,-45 0,0 0,1 44,-1-44,0 0,67 0,-66 0,21 0,-66 0,-45 0,23-22,-23-23,-156-177,111 132,-21-66,110 112,-21-23,22 0,22 89,22 68,45 400,89 67,-89-356,-1 111,1-223,-22-89,-23 0,0-45,23-22,22-178,0-89,-23 200,-21-22,43-22,1 133,-67 45</inkml:trace>
+</inkml:ink>
+</file>
+
+<file path=ppt/ink/ink38.xml><?xml version="1.0" encoding="utf-8"?>
+<inkml:ink xmlns:inkml="http://www.w3.org/2003/InkML">
+  <inkml:definitions>
+    <inkml:context xml:id="ctx0">
+      <inkml:inkSource xml:id="inkSrc0">
+        <inkml:traceFormat>
+          <inkml:channel name="X" type="integer" max="3200" units="cm"/>
+          <inkml:channel name="Y" type="integer" max="1080" units="cm"/>
+        </inkml:traceFormat>
+        <inkml:channelProperties>
+          <inkml:channelProperty channel="X" name="resolution" value="66.666656" units="1/cm"/>
+          <inkml:channelProperty channel="Y" name="resolution" value="40.000000" units="1/cm"/>
+        </inkml:channelProperties>
+      </inkml:inkSource>
+    </inkml:context>
+    <inkml:brush xml:id="br0">
+      <inkml:brushProperty name="width" value="0.035278" units="cm"/>
+      <inkml:brushProperty name="height" value="0.035278" units="cm"/>
+      <inkml:brushProperty name="color" value="#ff0000"/>
+      <inkml:brushProperty name="fitToCurve" value="1"/>
+    </inkml:brush>
+  </inkml:definitions>
+  <inkml:trace contextRef="#ctx0" brushRef="#br0">2473 0,'-134'66,"-22"1,-178 178,44-44,157-90,-46 23,-21 22,22 45,-201 177,156-177,67-23,67 1,67-68,22-22,0 23,22-1,67 90,-45-90,46 23,21 44,-44-44,22-23,-22 23,22-23,22 23,-66-89,-23-23,23 45,22-23,0-21,-45-1,22-22,23 22,-44-22,43 0,-21 0,0 0,21 0,1 0,-22 0,-23-44,0 44,1 0,44 0,-23-23,23 23,22 0,45-89,-90 89,1 0,0-22,-23 22,0-22,0 22,-22-45,45 45,0 0,88-45,-110 45,-23 0</inkml:trace>
+</inkml:ink>
+</file>
+
+<file path=ppt/ink/ink39.xml><?xml version="1.0" encoding="utf-8"?>
+<inkml:ink xmlns:inkml="http://www.w3.org/2003/InkML">
+  <inkml:definitions>
+    <inkml:context xml:id="ctx0">
+      <inkml:inkSource xml:id="inkSrc0">
+        <inkml:traceFormat>
+          <inkml:channel name="X" type="integer" max="3200" units="cm"/>
+          <inkml:channel name="Y" type="integer" max="1080" units="cm"/>
+        </inkml:traceFormat>
+        <inkml:channelProperties>
+          <inkml:channelProperty channel="X" name="resolution" value="66.666656" units="1/cm"/>
+          <inkml:channelProperty channel="Y" name="resolution" value="40.000000" units="1/cm"/>
+        </inkml:channelProperties>
+      </inkml:inkSource>
+    </inkml:context>
+    <inkml:brush xml:id="br0">
+      <inkml:brushProperty name="width" value="0.035278" units="cm"/>
+      <inkml:brushProperty name="height" value="0.035278" units="cm"/>
+      <inkml:brushProperty name="color" value="#ff0000"/>
+      <inkml:brushProperty name="fitToCurve" value="1"/>
+    </inkml:brush>
+  </inkml:definitions>
+  <inkml:trace contextRef="#ctx0" brushRef="#br0">0 0,'44'0,"1"0,21 0,-21 0,44 0,0 0,-22 0,-45 0,68 22,-68-22,22 0,-21 0,21 0,-21 0,-1 0,0 0,0 0,1 0,-1 0,0 0,1 0,21 0,-22 0,1 0,21 0,-21 0,-1 0,0 0,0 0,23 0,-23 0,23 0,-23 0,0 0,1 0,21 0,1 0,-1 0,-21 0,21 0,1 0,-1 0,1 0,-23 0,45 0,-22 0,-1 0,1 0,-1 22,1-22,-23 0,23 22,-1-22,23 23,-44-23,-1 0,22 0,1 0,22 0,-45 0,23 22,-23-22,23 0,-1 22,23 0,-45-22,45 0,-22 0,-23 0,45 23,-45-23,0 0,23 22,-23-22,1 0,21 0,-22 0,1 0,-1 0,0 0,1 0,-1 0,0 0,23 0,-23 0,23 0,-23 0,0 0,0 0,1 0,21 0,1 0,-1 0,1 0,-23 0,23 0,-1 0,1 0,0 0,-1-22,1 22,-23 0,0 0,23 0,-23 0,45 0,-22 0,-1 0,-22 0,23 0,0 0,-1 0,1 0,22 0,-23 0,23 0,-45 0,23 0,-1 0,-21 0,21 0,-21 0,21 0,-22 0,1 0,21 0,-21 0,-1 0,22 0,1 0,0 0,-1 0,-22 0,23 0,-23 0,45 0,-22 0,-1 0,1-23,22 23,-45 0,45 0,0 0,-45 0,45 0,-45 0,45 0,-22 0,-1 0,1 0,22 0,-45 0,45 0,-23 0,-21 0,21 0,-22 0,23 0,0 0,-23 0,45 0,0 0,-23 0,-22 0,23 0,0 23,-23-23,22 0,1 0,0 0,-1 0,-22 0,23 0,-23 0,23 0,22 0,-45 0,45 0,-23 0,1 0,0 0,-1 0,-22 22,1-22,21 0,-21 0,-1 0,22 0,1 0,0 0,21 22,1 1,22-23,-44 22,89-22,-112 0,45 0,0 22,0-22,-1 22,90 1,-111-23,44 0,-22 22,-22-22,21 22,1-22,0 0,-22 0,22 0,-1 0,-21 0,0 0,-1 0,1 0,22 0,-45 0,45 0,-23 0,1 0,-1 0,23 0,-44 0,21 0,-22 0,23 0,0 0,-23 0,22-22,23 22,-44 0,21 0,1 0,-23 0,45-22,-45 22,23-23,21 23,-21-22,-23 22,23 0,-1 0,1 0,0-22,-23 22,22 0,1 0,-23-22,90 22,-90-23,23 23,-1-22,1 22,-1 0,-21 0,21-22,45 22,-44 0,-23 0,0 0,23 0,-23-23,1 23,43 0,-43 0,21 0,23 0,-22 0,44 0,-22 0,-23 0,-21 0,43 0,1 0,22 0,1 0,-46 0,23 0,-45 0,67 0,-22 0,-22 0,66 0,-44 0,-22 0,111 0,-67 0,-45 0,23 0,0 0,-22 0,88 23,-110-23,44 0,-23 0,1 0,-1 0,23 0,-45 0,23 0,-23 0,23 0,22 0,-45 0,23 0,-23 0,0 0,23 0,-23 0,0 0,1 0,21 0,-22 0,1 0,21 0,-21 22,-1-22,0 0,0 0,1 0,21 0,23 0,-22 0,-1 0,23 22,-22-22,22 0,-1 0,1 0,-22 0,-23 0,67 0,-66 0,43 0,1 0,-22 0,-23 0,23 0,22 0,-23 0,1 0,22 0,-23 23,1-23,44 0,-67 22,23-22,22 0,-23 0,45 0,-44 0,-1 0,-21 0,21 0,-21 0,-1 0,0 0,-22 22,0 0,-44 1,44-23</inkml:trace>
 </inkml:ink>
 </file>
 
@@ -1049,6 +1179,266 @@
 </inkml:ink>
 </file>
 
+<file path=ppt/ink/ink40.xml><?xml version="1.0" encoding="utf-8"?>
+<inkml:ink xmlns:inkml="http://www.w3.org/2003/InkML">
+  <inkml:definitions>
+    <inkml:context xml:id="ctx0">
+      <inkml:inkSource xml:id="inkSrc0">
+        <inkml:traceFormat>
+          <inkml:channel name="X" type="integer" max="3200" units="cm"/>
+          <inkml:channel name="Y" type="integer" max="1080" units="cm"/>
+        </inkml:traceFormat>
+        <inkml:channelProperties>
+          <inkml:channelProperty channel="X" name="resolution" value="66.666656" units="1/cm"/>
+          <inkml:channelProperty channel="Y" name="resolution" value="40.000000" units="1/cm"/>
+        </inkml:channelProperties>
+      </inkml:inkSource>
+    </inkml:context>
+    <inkml:brush xml:id="br0">
+      <inkml:brushProperty name="width" value="0.035278" units="cm"/>
+      <inkml:brushProperty name="height" value="0.035278" units="cm"/>
+      <inkml:brushProperty name="color" value="#ff0000"/>
+      <inkml:brushProperty name="fitToCurve" value="1"/>
+    </inkml:brush>
+  </inkml:definitions>
+  <inkml:trace contextRef="#ctx0" brushRef="#br0">623 66,'-22'0,"-45"45,23-1,-90 1,67-23,23 23,-1-45,0 22,23 0,-45 1,45-23,-22 0,66 22,0-22,67 22,-22 1,67 21,22-22,-112 1,45-23,-44 0,-23 22,1-22,-1 0,-22-22,-22-1,-1-21,-21-1,21 1,1 21,0 1,0 0,-1 0,-21-45,21 44,1-21,0 22,0-1,-1 1,23 0,0 0,-22 22,0 0,-1 44,-43 45,66-22,0-22,-23-45,23 44,0-22,0 45,0 22,0-22,0 0,0-22,0-23,0 0,0-44,23 22,21-67,-22 45,1-23,21 23,-21 0,-1-23,0 45,-22-22,22-23,23 45,-45-22,22 0,1-1,-23 1,22 0,0 22,0-22,-22-23,0 23,23-1,-1 23,-22-22,22 0,-22 0,23 22,-23-23,22 1,-22 22</inkml:trace>
+</inkml:ink>
+</file>
+
+<file path=ppt/ink/ink41.xml><?xml version="1.0" encoding="utf-8"?>
+<inkml:ink xmlns:inkml="http://www.w3.org/2003/InkML">
+  <inkml:definitions>
+    <inkml:context xml:id="ctx0">
+      <inkml:inkSource xml:id="inkSrc0">
+        <inkml:traceFormat>
+          <inkml:channel name="X" type="integer" max="3200" units="cm"/>
+          <inkml:channel name="Y" type="integer" max="1080" units="cm"/>
+        </inkml:traceFormat>
+        <inkml:channelProperties>
+          <inkml:channelProperty channel="X" name="resolution" value="66.666656" units="1/cm"/>
+          <inkml:channelProperty channel="Y" name="resolution" value="40.000000" units="1/cm"/>
+        </inkml:channelProperties>
+      </inkml:inkSource>
+    </inkml:context>
+    <inkml:brush xml:id="br0">
+      <inkml:brushProperty name="width" value="0.035278" units="cm"/>
+      <inkml:brushProperty name="height" value="0.035278" units="cm"/>
+      <inkml:brushProperty name="color" value="#ff0000"/>
+      <inkml:brushProperty name="fitToCurve" value="1"/>
+    </inkml:brush>
+  </inkml:definitions>
+  <inkml:trace contextRef="#ctx0" brushRef="#br0">0 0,'0'0</inkml:trace>
+</inkml:ink>
+</file>
+
+<file path=ppt/ink/ink42.xml><?xml version="1.0" encoding="utf-8"?>
+<inkml:ink xmlns:inkml="http://www.w3.org/2003/InkML">
+  <inkml:definitions>
+    <inkml:context xml:id="ctx0">
+      <inkml:inkSource xml:id="inkSrc0">
+        <inkml:traceFormat>
+          <inkml:channel name="X" type="integer" max="3200" units="cm"/>
+          <inkml:channel name="Y" type="integer" max="1080" units="cm"/>
+        </inkml:traceFormat>
+        <inkml:channelProperties>
+          <inkml:channelProperty channel="X" name="resolution" value="66.666656" units="1/cm"/>
+          <inkml:channelProperty channel="Y" name="resolution" value="40.000000" units="1/cm"/>
+        </inkml:channelProperties>
+      </inkml:inkSource>
+    </inkml:context>
+    <inkml:brush xml:id="br0">
+      <inkml:brushProperty name="width" value="0.035278" units="cm"/>
+      <inkml:brushProperty name="height" value="0.035278" units="cm"/>
+      <inkml:brushProperty name="color" value="#ff0000"/>
+      <inkml:brushProperty name="fitToCurve" value="1"/>
+    </inkml:brush>
+  </inkml:definitions>
+  <inkml:trace contextRef="#ctx0" brushRef="#br0">1418 0,'-22'148,"1"106,-63 42,20-21,-42-63,85-149,-85 149,0 42,64-148,-64 169,22 0,-1-148,43 21,-22 85,-21 0,43-106,-43 85,22-43,42-84,-22-1,22-20,0 42,0 21,0 0,0 21,21-42,-21-22,21 22,0 42,0 0,0-42,0 64,0-1,21 0,21 22,-21 42,0-170,-21 64,21 64,1-1,20 1,0-1,22 170,-22-64,64 128,-64-234,1-42,-43-84,42 42,-21-43,43 64,-43-85,21 107,0-86,1 64,20 0,-42-63,22-22,-22 21,0 1,0-1,22 43,-22-42,0 20,0-41,-21 20,21-42,0 106,22-21,-1 42,-21-84,-21 42,0 0,21-43,-21 1,22-1,-22 43,21-21,0-22,-21 1,21-43,0 42,0 43,1-64,-1 64,-21-42,0-22,21 0,-21 1,0-22,0 21,0-42</inkml:trace>
+</inkml:ink>
+</file>
+
+<file path=ppt/ink/ink43.xml><?xml version="1.0" encoding="utf-8"?>
+<inkml:ink xmlns:inkml="http://www.w3.org/2003/InkML">
+  <inkml:definitions>
+    <inkml:context xml:id="ctx0">
+      <inkml:inkSource xml:id="inkSrc0">
+        <inkml:traceFormat>
+          <inkml:channel name="X" type="integer" max="3200" units="cm"/>
+          <inkml:channel name="Y" type="integer" max="1080" units="cm"/>
+        </inkml:traceFormat>
+        <inkml:channelProperties>
+          <inkml:channelProperty channel="X" name="resolution" value="66.666656" units="1/cm"/>
+          <inkml:channelProperty channel="Y" name="resolution" value="40.000000" units="1/cm"/>
+        </inkml:channelProperties>
+      </inkml:inkSource>
+    </inkml:context>
+    <inkml:brush xml:id="br0">
+      <inkml:brushProperty name="width" value="0.035278" units="cm"/>
+      <inkml:brushProperty name="height" value="0.035278" units="cm"/>
+      <inkml:brushProperty name="color" value="#ff0000"/>
+      <inkml:brushProperty name="fitToCurve" value="1"/>
+    </inkml:brush>
+  </inkml:definitions>
+  <inkml:trace contextRef="#ctx0" brushRef="#br0">656 126,'-22'0,"-41"43,-22 20,1-20,-43 62,84-62,-41 41,62-41,-20-1,21 0,0-20,0-22,0 21,21 0,21-21,0 21,106 0,-64 0,43-21,-21 43,21-22,-22 0,1 21,-64-42,0 0,22 22,-22-22,0 0,0 0,0 0,-42-43,0 22,-85-106,85 64,-43-22,-20-42,41 85,1-1,21-20,0 20,0 43,-1-42,-20 0,42 21,-21 21,-21-43,20 1,22 21,-21 0,0 0,21 42,0 42,0-21,21 22,22 42,-1 42,0 21,-21-63,22 21,-43-63,21-1,0 1,-21-43,21 21,0-21,-21 0,0 1,0-1,0 0,0-42,22-22,-22 1,21-43,0 1,-21-22,21-21,21 21,-20-63,20 84,-42 64,0 0,21 0,-21-1,0 1,0 0,0 21</inkml:trace>
+</inkml:ink>
+</file>
+
+<file path=ppt/ink/ink44.xml><?xml version="1.0" encoding="utf-8"?>
+<inkml:ink xmlns:inkml="http://www.w3.org/2003/InkML">
+  <inkml:definitions>
+    <inkml:context xml:id="ctx0">
+      <inkml:inkSource xml:id="inkSrc0">
+        <inkml:traceFormat>
+          <inkml:channel name="X" type="integer" max="3200" units="cm"/>
+          <inkml:channel name="Y" type="integer" max="1080" units="cm"/>
+        </inkml:traceFormat>
+        <inkml:channelProperties>
+          <inkml:channelProperty channel="X" name="resolution" value="66.666656" units="1/cm"/>
+          <inkml:channelProperty channel="Y" name="resolution" value="40.000000" units="1/cm"/>
+        </inkml:channelProperties>
+      </inkml:inkSource>
+    </inkml:context>
+    <inkml:brush xml:id="br0">
+      <inkml:brushProperty name="width" value="0.035278" units="cm"/>
+      <inkml:brushProperty name="height" value="0.035278" units="cm"/>
+      <inkml:brushProperty name="color" value="#ff0000"/>
+      <inkml:brushProperty name="fitToCurve" value="1"/>
+    </inkml:brush>
+  </inkml:definitions>
+  <inkml:trace contextRef="#ctx0" brushRef="#br0">0 0,'21'0,"21"0,0 0,22 0,-22 0,-21 0,64 0,-64 0,21 0,-20 0,20 0,-21 0,21 0,-20 0,-1 0,0 0,0 0,0 0,-21 21,0 0,0 21,0-21,-21 0,0 85,21-85,-21 22,21-22,0 21,0-21,0 22,0-22,0 0,0 21,-21-20,21-1,-22 0,22 0,0 0,0 0,0 1,0-1,0 0,0 0,0 0,0 0,-21-21,21 22,0-1,0 21,0-21,0 0,-21-21,0 22,0-1,-22-21,1 0,0 0,21 21,-22-21,22 21,-21-21,21 0,-1 0,1 0,0 0,21 0</inkml:trace>
+</inkml:ink>
+</file>
+
+<file path=ppt/ink/ink45.xml><?xml version="1.0" encoding="utf-8"?>
+<inkml:ink xmlns:inkml="http://www.w3.org/2003/InkML">
+  <inkml:definitions>
+    <inkml:context xml:id="ctx0">
+      <inkml:inkSource xml:id="inkSrc0">
+        <inkml:traceFormat>
+          <inkml:channel name="X" type="integer" max="3200" units="cm"/>
+          <inkml:channel name="Y" type="integer" max="1080" units="cm"/>
+        </inkml:traceFormat>
+        <inkml:channelProperties>
+          <inkml:channelProperty channel="X" name="resolution" value="66.666656" units="1/cm"/>
+          <inkml:channelProperty channel="Y" name="resolution" value="40.000000" units="1/cm"/>
+        </inkml:channelProperties>
+      </inkml:inkSource>
+    </inkml:context>
+    <inkml:brush xml:id="br0">
+      <inkml:brushProperty name="width" value="0.035278" units="cm"/>
+      <inkml:brushProperty name="height" value="0.035278" units="cm"/>
+      <inkml:brushProperty name="color" value="#ff0000"/>
+      <inkml:brushProperty name="fitToCurve" value="1"/>
+    </inkml:brush>
+  </inkml:definitions>
+  <inkml:trace contextRef="#ctx0" brushRef="#br0">190 0,'42'0,"64"105,-64-62,-20-1,62 0,-63 1,-21-22,22-21,-1 21,0 21,-21-21,0 1,-21-22,0 0,-22 0,1-22,-22 22,43 0,0 0,-21 0,21 0,-1 0,1 0,0 0,0 0,0 0,0 0,-1 0,44 0,-1 0,21 0,-21 0,22 0,-22 0,21-21,-21 21,0 0,1 0,-1 0,0 0,-21 43,-42-22,-64 106,63-64,-41 43,41-64,22 1,-42-1,63-21,-21 0,0-21,42 0,-21-21,21 21,-21-21,21 0,0 21,0-21,0 0,-21-1,22 1,-1 21,-21-21,42 0,-21-21,0 42,1-22,20 22,-21-21,0 21,0-21,1 21,-1 0,0 0,0 0,0 0,0 21,-21 0,22 1,-22-1,21 0,-21 0,21 0,-21 0,0 1,0-1,0 0,21 0,-21 21,0-42</inkml:trace>
+</inkml:ink>
+</file>
+
+<file path=ppt/ink/ink46.xml><?xml version="1.0" encoding="utf-8"?>
+<inkml:ink xmlns:inkml="http://www.w3.org/2003/InkML">
+  <inkml:definitions>
+    <inkml:context xml:id="ctx0">
+      <inkml:inkSource xml:id="inkSrc0">
+        <inkml:traceFormat>
+          <inkml:channel name="X" type="integer" max="3200" units="cm"/>
+          <inkml:channel name="Y" type="integer" max="1080" units="cm"/>
+        </inkml:traceFormat>
+        <inkml:channelProperties>
+          <inkml:channelProperty channel="X" name="resolution" value="66.666656" units="1/cm"/>
+          <inkml:channelProperty channel="Y" name="resolution" value="40.000000" units="1/cm"/>
+        </inkml:channelProperties>
+      </inkml:inkSource>
+    </inkml:context>
+    <inkml:brush xml:id="br0">
+      <inkml:brushProperty name="width" value="0.035278" units="cm"/>
+      <inkml:brushProperty name="height" value="0.035278" units="cm"/>
+      <inkml:brushProperty name="color" value="#ff0000"/>
+      <inkml:brushProperty name="fitToCurve" value="1"/>
+    </inkml:brush>
+  </inkml:definitions>
+  <inkml:trace contextRef="#ctx0" brushRef="#br0">63 0,'0'42,"0"42,-21 22,0 42,21-105,0 63,0-85,-21 0,21 21,0-21,0 1,0-1,0 0,0-42,0-22,0 22,21-85,-21 85,21-21,-21-22,42 22,-42 0,21 42,-21-43,21 22,1 0,-1 0,0 21,0-21,0 21,0 0,1 0,-1 0,0 0,0 0,-21 21,0-21</inkml:trace>
+</inkml:ink>
+</file>
+
+<file path=ppt/ink/ink47.xml><?xml version="1.0" encoding="utf-8"?>
+<inkml:ink xmlns:inkml="http://www.w3.org/2003/InkML">
+  <inkml:definitions>
+    <inkml:context xml:id="ctx0">
+      <inkml:inkSource xml:id="inkSrc0">
+        <inkml:traceFormat>
+          <inkml:channel name="X" type="integer" max="3200" units="cm"/>
+          <inkml:channel name="Y" type="integer" max="1080" units="cm"/>
+        </inkml:traceFormat>
+        <inkml:channelProperties>
+          <inkml:channelProperty channel="X" name="resolution" value="66.666656" units="1/cm"/>
+          <inkml:channelProperty channel="Y" name="resolution" value="40.000000" units="1/cm"/>
+        </inkml:channelProperties>
+      </inkml:inkSource>
+    </inkml:context>
+    <inkml:brush xml:id="br0">
+      <inkml:brushProperty name="width" value="0.035278" units="cm"/>
+      <inkml:brushProperty name="height" value="0.035278" units="cm"/>
+      <inkml:brushProperty name="color" value="#ff0000"/>
+      <inkml:brushProperty name="fitToCurve" value="1"/>
+    </inkml:brush>
+  </inkml:definitions>
+  <inkml:trace contextRef="#ctx0" brushRef="#br0">380 253,'-21'0,"0"0,-21 22,-22-1,-20-21,62 0,-20 0,21 0,0 0,0-21,0-1,21 1,0 0,0-42,0 41,0 1,42-42,-21 42,21 0,-21 21,1 0,20 21,-21 0,0 0,0 0,-21 0,22-21,-22 21,0 1,0-1,0-21</inkml:trace>
+</inkml:ink>
+</file>
+
+<file path=ppt/ink/ink48.xml><?xml version="1.0" encoding="utf-8"?>
+<inkml:ink xmlns:inkml="http://www.w3.org/2003/InkML">
+  <inkml:definitions>
+    <inkml:context xml:id="ctx0">
+      <inkml:inkSource xml:id="inkSrc0">
+        <inkml:traceFormat>
+          <inkml:channel name="X" type="integer" max="3200" units="cm"/>
+          <inkml:channel name="Y" type="integer" max="1080" units="cm"/>
+        </inkml:traceFormat>
+        <inkml:channelProperties>
+          <inkml:channelProperty channel="X" name="resolution" value="66.666656" units="1/cm"/>
+          <inkml:channelProperty channel="Y" name="resolution" value="40.000000" units="1/cm"/>
+        </inkml:channelProperties>
+      </inkml:inkSource>
+    </inkml:context>
+    <inkml:brush xml:id="br0">
+      <inkml:brushProperty name="width" value="0.035278" units="cm"/>
+      <inkml:brushProperty name="height" value="0.035278" units="cm"/>
+      <inkml:brushProperty name="color" value="#ff0000"/>
+      <inkml:brushProperty name="fitToCurve" value="1"/>
+    </inkml:brush>
+  </inkml:definitions>
+  <inkml:trace contextRef="#ctx0" brushRef="#br0">21 0,'0'21,"0"63,0 1,0-22,0 86,0-65,0-41,0 41,0-20,0-43,0 21,0 1,0-1,0-21,0 0,0 0,0 1,0-1,0 0,0 21,0-21,0 22,0-22,-21 0,21-21</inkml:trace>
+</inkml:ink>
+</file>
+
+<file path=ppt/ink/ink49.xml><?xml version="1.0" encoding="utf-8"?>
+<inkml:ink xmlns:inkml="http://www.w3.org/2003/InkML">
+  <inkml:definitions>
+    <inkml:context xml:id="ctx0">
+      <inkml:inkSource xml:id="inkSrc0">
+        <inkml:traceFormat>
+          <inkml:channel name="X" type="integer" max="3200" units="cm"/>
+          <inkml:channel name="Y" type="integer" max="1080" units="cm"/>
+        </inkml:traceFormat>
+        <inkml:channelProperties>
+          <inkml:channelProperty channel="X" name="resolution" value="66.666656" units="1/cm"/>
+          <inkml:channelProperty channel="Y" name="resolution" value="40.000000" units="1/cm"/>
+        </inkml:channelProperties>
+      </inkml:inkSource>
+    </inkml:context>
+    <inkml:brush xml:id="br0">
+      <inkml:brushProperty name="width" value="0.035278" units="cm"/>
+      <inkml:brushProperty name="height" value="0.035278" units="cm"/>
+      <inkml:brushProperty name="color" value="#ff0000"/>
+      <inkml:brushProperty name="fitToCurve" value="1"/>
+    </inkml:brush>
+  </inkml:definitions>
+  <inkml:trace contextRef="#ctx0" brushRef="#br0">275 84,'42'-21,"0"0,1 21,-22-21,42 0,-42 21,1 0,-1 0,-21 21,0 0,-21-21,-22 42,1 22,-85 41,63-41,22-22,0 22,-1-43,1 21,21-42,0 21,0 1,0-22,21 21,0-42,0-1,42-20,-42 21,21 0,0 0,0 21,0 0,1 0,-1 0,0 0,0 0,0 0,0 0,1 21,-1 21,21-42,0 42,-20 22,20-22,-21 1,0-1,0-21,1 21,-1-20,-21-1,0-21</inkml:trace>
+</inkml:ink>
+</file>
+
 <file path=ppt/ink/ink5.xml><?xml version="1.0" encoding="utf-8"?>
 <inkml:ink xmlns:inkml="http://www.w3.org/2003/InkML">
   <inkml:definitions>
@@ -1072,6 +1462,266 @@
     </inkml:brush>
   </inkml:definitions>
   <inkml:trace contextRef="#ctx0" brushRef="#br0">579 311,'22'0,"-22"45,0 22,-22-23,-23 1,-44 22,45-23,-23 1,22-23,23-22,0 0,-45 0,44 0,-21 0,-23-44,67-68,-44 45,44 45,0 0,0 0,44-23,1 0,-23 45,22 0,-21-44,-1 44,0 0,1 0,-1 0,22 44,-21 1,21 22,-44 0,0-23,0 45,0-22,-22 0,0-45,-45 45,0-22,45-23,-23 23,23-23,-23 45,23-67,-22 0,44 44,0-66,44 22,1-44,-1 44,-22 0,45 22,0 0,0-22,-22 0,21 0,1 0,-22 22,-23-22,0 0,23-22,22-45,-23 23,1-45,0-23,-1 23,-22 0,23 0,22-90,44 23,45 23,-111 111,-45 44,-22 111,-23 23,-22 0,-44 90,-45 66,22 22,23-111,21 66,24 1,43-67,1-22,-23-157,45-22,0 1,-22-68,22 45</inkml:trace>
+</inkml:ink>
+</file>
+
+<file path=ppt/ink/ink50.xml><?xml version="1.0" encoding="utf-8"?>
+<inkml:ink xmlns:inkml="http://www.w3.org/2003/InkML">
+  <inkml:definitions>
+    <inkml:context xml:id="ctx0">
+      <inkml:inkSource xml:id="inkSrc0">
+        <inkml:traceFormat>
+          <inkml:channel name="X" type="integer" max="3200" units="cm"/>
+          <inkml:channel name="Y" type="integer" max="1080" units="cm"/>
+        </inkml:traceFormat>
+        <inkml:channelProperties>
+          <inkml:channelProperty channel="X" name="resolution" value="66.666656" units="1/cm"/>
+          <inkml:channelProperty channel="Y" name="resolution" value="40.000000" units="1/cm"/>
+        </inkml:channelProperties>
+      </inkml:inkSource>
+    </inkml:context>
+    <inkml:brush xml:id="br0">
+      <inkml:brushProperty name="width" value="0.035278" units="cm"/>
+      <inkml:brushProperty name="height" value="0.035278" units="cm"/>
+      <inkml:brushProperty name="color" value="#ff0000"/>
+      <inkml:brushProperty name="fitToCurve" value="1"/>
+    </inkml:brush>
+  </inkml:definitions>
+  <inkml:trace contextRef="#ctx0" brushRef="#br0">0 21,'21'0,"0"-21,0 21,0 0,21 0,-20 0,-1 0,21 0,-21 0,0 0,1 0,-1 0,-21 0</inkml:trace>
+</inkml:ink>
+</file>
+
+<file path=ppt/ink/ink51.xml><?xml version="1.0" encoding="utf-8"?>
+<inkml:ink xmlns:inkml="http://www.w3.org/2003/InkML">
+  <inkml:definitions>
+    <inkml:context xml:id="ctx0">
+      <inkml:inkSource xml:id="inkSrc0">
+        <inkml:traceFormat>
+          <inkml:channel name="X" type="integer" max="3200" units="cm"/>
+          <inkml:channel name="Y" type="integer" max="1080" units="cm"/>
+        </inkml:traceFormat>
+        <inkml:channelProperties>
+          <inkml:channelProperty channel="X" name="resolution" value="66.666656" units="1/cm"/>
+          <inkml:channelProperty channel="Y" name="resolution" value="40.000000" units="1/cm"/>
+        </inkml:channelProperties>
+      </inkml:inkSource>
+    </inkml:context>
+    <inkml:brush xml:id="br0">
+      <inkml:brushProperty name="width" value="0.035278" units="cm"/>
+      <inkml:brushProperty name="height" value="0.035278" units="cm"/>
+      <inkml:brushProperty name="color" value="#ff0000"/>
+      <inkml:brushProperty name="fitToCurve" value="1"/>
+    </inkml:brush>
+  </inkml:definitions>
+  <inkml:trace contextRef="#ctx0" brushRef="#br0">84 0,'0'21,"0"42,0-21,0 22,0-22,-21-21,21 22,0-22,0 0,0 43,0-43,0 21,0 0,0-20,0-1,0 0,-21-21,21 21,0 0,0 0,-21-21,0 0,21 0</inkml:trace>
+</inkml:ink>
+</file>
+
+<file path=ppt/ink/ink52.xml><?xml version="1.0" encoding="utf-8"?>
+<inkml:ink xmlns:inkml="http://www.w3.org/2003/InkML">
+  <inkml:definitions>
+    <inkml:context xml:id="ctx0">
+      <inkml:inkSource xml:id="inkSrc0">
+        <inkml:traceFormat>
+          <inkml:channel name="X" type="integer" max="3200" units="cm"/>
+          <inkml:channel name="Y" type="integer" max="1080" units="cm"/>
+        </inkml:traceFormat>
+        <inkml:channelProperties>
+          <inkml:channelProperty channel="X" name="resolution" value="66.666656" units="1/cm"/>
+          <inkml:channelProperty channel="Y" name="resolution" value="40.000000" units="1/cm"/>
+        </inkml:channelProperties>
+      </inkml:inkSource>
+    </inkml:context>
+    <inkml:brush xml:id="br0">
+      <inkml:brushProperty name="width" value="0.035278" units="cm"/>
+      <inkml:brushProperty name="height" value="0.035278" units="cm"/>
+      <inkml:brushProperty name="color" value="#ff0000"/>
+      <inkml:brushProperty name="fitToCurve" value="1"/>
+    </inkml:brush>
+  </inkml:definitions>
+  <inkml:trace contextRef="#ctx0" brushRef="#br0">0 105,'0'21,"0"22,0-1,0-21,0 0,0 1,0-1,0 0,0-42,0-22,0 22,0 0,0-21,0 21,0-1,21 1,0 21,-21-42,0 21,21 21,0-21,-21 0,42 21,-20 0,-1 0,42 0,-42 0,43 0,-22 0,-21 0,22 21,-1-21,-21 21,0-21,1 0,-1 0,0 21,0 0,-21 0,-21-21,0 43,0-43,-22 21,22 0,-21-21,-1 21,1-21,0 0,-1 0,22 0,-21 0,21 0,0 0,-22 0,22 0,0 0,42 21,0-21,0 21,43-21,-43 0,21 22,1-22,-1 0,-21 0,0 0,1 0,-1 0,0 0,0 0,-21 0</inkml:trace>
+</inkml:ink>
+</file>
+
+<file path=ppt/ink/ink53.xml><?xml version="1.0" encoding="utf-8"?>
+<inkml:ink xmlns:inkml="http://www.w3.org/2003/InkML">
+  <inkml:definitions>
+    <inkml:context xml:id="ctx0">
+      <inkml:inkSource xml:id="inkSrc0">
+        <inkml:traceFormat>
+          <inkml:channel name="X" type="integer" max="3200" units="cm"/>
+          <inkml:channel name="Y" type="integer" max="1080" units="cm"/>
+        </inkml:traceFormat>
+        <inkml:channelProperties>
+          <inkml:channelProperty channel="X" name="resolution" value="66.666656" units="1/cm"/>
+          <inkml:channelProperty channel="Y" name="resolution" value="40.000000" units="1/cm"/>
+        </inkml:channelProperties>
+      </inkml:inkSource>
+    </inkml:context>
+    <inkml:brush xml:id="br0">
+      <inkml:brushProperty name="width" value="0.035278" units="cm"/>
+      <inkml:brushProperty name="height" value="0.035278" units="cm"/>
+      <inkml:brushProperty name="color" value="#ff0000"/>
+      <inkml:brushProperty name="fitToCurve" value="1"/>
+    </inkml:brush>
+  </inkml:definitions>
+  <inkml:trace contextRef="#ctx0" brushRef="#br0">364 47,'0'23,"0"1,0-13,0 1,0 0,-23 11,-1-11,12 0,-35-12,12 12,0-12,23 0,0 0,-11 0,11-24,12 1,12-1,11 1,12-13,24 36,-47 0,47 12,-36 23,13-23,-36 12,11-13,-11 1,0 0,0 11,0-11,-35 12,12-13,-25 36,25-35,-12 35,-12-35,0 35,23-35,1-12,11 12,0-12,-23 0,11-24,13 12,11 1,0-1,11 0,48 0,23 1,-23 11,-24 0,-11 0,35 0,-47 0,11 0,-11-12,0 12,11-24,12-35,-23 48,0-36,0 23,11-35,-23 12,0 36,0-1,0 0,0 0,0 1,0 22,0 25,-12 22,-11 72,11-60,0 24,1-35,11-24,0 1,0-25,0 1,0 0,0 0,0-1,0 1,0-12</inkml:trace>
+</inkml:ink>
+</file>
+
+<file path=ppt/ink/ink54.xml><?xml version="1.0" encoding="utf-8"?>
+<inkml:ink xmlns:inkml="http://www.w3.org/2003/InkML">
+  <inkml:definitions>
+    <inkml:context xml:id="ctx0">
+      <inkml:inkSource xml:id="inkSrc0">
+        <inkml:traceFormat>
+          <inkml:channel name="X" type="integer" max="3200" units="cm"/>
+          <inkml:channel name="Y" type="integer" max="1080" units="cm"/>
+        </inkml:traceFormat>
+        <inkml:channelProperties>
+          <inkml:channelProperty channel="X" name="resolution" value="66.666656" units="1/cm"/>
+          <inkml:channelProperty channel="Y" name="resolution" value="40.000000" units="1/cm"/>
+        </inkml:channelProperties>
+      </inkml:inkSource>
+    </inkml:context>
+    <inkml:brush xml:id="br0">
+      <inkml:brushProperty name="width" value="0.035278" units="cm"/>
+      <inkml:brushProperty name="height" value="0.035278" units="cm"/>
+      <inkml:brushProperty name="color" value="#ff0000"/>
+      <inkml:brushProperty name="fitToCurve" value="1"/>
+    </inkml:brush>
+  </inkml:definitions>
+  <inkml:trace contextRef="#ctx0" brushRef="#br0">329 317,'-12'0,"0"0,-11 12,-13-12,-11-12,36-23,-1-24,12 35,0-46,12 23,35 0,-24 23,12 13,-11 11,0 11,-24 1,35 23,-23-23,-12 23,0-23,0 0,0 0,0-1,-36 25,13-13,-13 1,25-13,-60 13,36-24,0 0,-1 12,25-12,-36 0,35 11,0 1,0-12,1 0,11 12,23-12,-11 0,47 0,-36 12,59 11,-35 1,0-12,-35-1,12-11,-24 12,0 0,0 0,-24-12,24 11,-12-11,-11 12,11 0,0 11,-11 1,23-1,0 13,0 22,0 1,0-47,12 23,-1-35,-11 24,0-12,0-24,0 0,0 0,0-11,0-12,0 23,0-12,0 12,12 1,0-1,11-12,1 13,0-1,23-23,0 11,-24 24,1-12,-13 1,1-1,0 12,-12-12,0 0,12-23,-12-12,0 12,0-24,0 24,0-1,-12 25,12-13,0 1,0 11,0 47,-12 12,12 12,0-12,-12 71,12-83,0 35,0-46,0 11,0-11,0-13,0 1,-11-12,11 0</inkml:trace>
+</inkml:ink>
+</file>
+
+<file path=ppt/ink/ink55.xml><?xml version="1.0" encoding="utf-8"?>
+<inkml:ink xmlns:inkml="http://www.w3.org/2003/InkML">
+  <inkml:definitions>
+    <inkml:context xml:id="ctx0">
+      <inkml:inkSource xml:id="inkSrc0">
+        <inkml:traceFormat>
+          <inkml:channel name="X" type="integer" max="3200" units="cm"/>
+          <inkml:channel name="Y" type="integer" max="1080" units="cm"/>
+        </inkml:traceFormat>
+        <inkml:channelProperties>
+          <inkml:channelProperty channel="X" name="resolution" value="66.666656" units="1/cm"/>
+          <inkml:channelProperty channel="Y" name="resolution" value="40.000000" units="1/cm"/>
+        </inkml:channelProperties>
+      </inkml:inkSource>
+    </inkml:context>
+    <inkml:brush xml:id="br0">
+      <inkml:brushProperty name="width" value="0.035278" units="cm"/>
+      <inkml:brushProperty name="height" value="0.035278" units="cm"/>
+      <inkml:brushProperty name="color" value="#ff0000"/>
+      <inkml:brushProperty name="fitToCurve" value="1"/>
+    </inkml:brush>
+  </inkml:definitions>
+  <inkml:trace contextRef="#ctx0" brushRef="#br0">211 176,'12'0,"11"0,-11 12,23-1,-23 1,0 12,-12-13,-12 13,-94 23,48-23,-13-1,48-11,-1 0,24-1,-12 13,1-1,11 24,11-23,1-12,12-1,-24 1,23-12,12 0,-11-23,-1 11,1 0,11-23,-11 23,11-35,-12 35,13-46,-13 22,1-23,23 1,-35 11,23 11,-35-11,12 36,-1-13,-11 12,12 12,-12-11,0 22,0 36,-12 24,-35 141,24 11,-24-58,23-95,24 1,-11-60,11 1,0 0,0-24,0 0,0-23,0-35,11 46,13-46,-1 46,24-11,-11-1,-13 25,12-1,12 12,-23 0,11-12,12 0,-23 1,-12 11,-12 0</inkml:trace>
+</inkml:ink>
+</file>
+
+<file path=ppt/ink/ink56.xml><?xml version="1.0" encoding="utf-8"?>
+<inkml:ink xmlns:inkml="http://www.w3.org/2003/InkML">
+  <inkml:definitions>
+    <inkml:context xml:id="ctx0">
+      <inkml:inkSource xml:id="inkSrc0">
+        <inkml:traceFormat>
+          <inkml:channel name="X" type="integer" max="3200" units="cm"/>
+          <inkml:channel name="Y" type="integer" max="1080" units="cm"/>
+        </inkml:traceFormat>
+        <inkml:channelProperties>
+          <inkml:channelProperty channel="X" name="resolution" value="66.666656" units="1/cm"/>
+          <inkml:channelProperty channel="Y" name="resolution" value="40.000000" units="1/cm"/>
+        </inkml:channelProperties>
+      </inkml:inkSource>
+    </inkml:context>
+    <inkml:brush xml:id="br0">
+      <inkml:brushProperty name="width" value="0.035278" units="cm"/>
+      <inkml:brushProperty name="height" value="0.035278" units="cm"/>
+      <inkml:brushProperty name="color" value="#ff0000"/>
+      <inkml:brushProperty name="fitToCurve" value="1"/>
+    </inkml:brush>
+  </inkml:definitions>
+  <inkml:trace contextRef="#ctx0" brushRef="#br0">211 0,'0'42,"-21"-21,21 21,-21 1,0-22,-1 0,22 0,-21 0,21 0,-21 1,21-1,0 0,-21-21,0 0,21 21,-21 0,21 0,0 1,0-1,-21-21,21 21,0 0,21-21,0 0,0 0,0 0,21 0,1 0,-22-21,0 21,21 0,1 0,-1 0,0 0,-20 0,-1 0,21 0,-21 0,0 0,1 0,-1 0,0 0,0 0,0 0,0 0,1 0,-1 0,0 0,0 0,0 0,0 0,1 0,-1 0,0 0,-21-21,-21 21,0-21,-1-1,1-20,0 0,0-1,0 1,0 42,21-42,-22 21,22-1,-21 22,21-21,21 42,1-21,20 43,-21-1,21-21,-42 0,22-21,-1 0,-21 22,0-1,0 0,0 0,0 0,0 0,0 1,0-1,-21 0,-22 0,1 21,0-20,-1-1,22 21,0-42,-21 21,-1 22,43-1,-21-42,0 0,21 21,-21-21,21 21,0-21</inkml:trace>
+</inkml:ink>
+</file>
+
+<file path=ppt/ink/ink57.xml><?xml version="1.0" encoding="utf-8"?>
+<inkml:ink xmlns:inkml="http://www.w3.org/2003/InkML">
+  <inkml:definitions>
+    <inkml:context xml:id="ctx0">
+      <inkml:inkSource xml:id="inkSrc0">
+        <inkml:traceFormat>
+          <inkml:channel name="X" type="integer" max="3200" units="cm"/>
+          <inkml:channel name="Y" type="integer" max="1080" units="cm"/>
+        </inkml:traceFormat>
+        <inkml:channelProperties>
+          <inkml:channelProperty channel="X" name="resolution" value="66.666656" units="1/cm"/>
+          <inkml:channelProperty channel="Y" name="resolution" value="40.000000" units="1/cm"/>
+        </inkml:channelProperties>
+      </inkml:inkSource>
+    </inkml:context>
+    <inkml:brush xml:id="br0">
+      <inkml:brushProperty name="width" value="0.035278" units="cm"/>
+      <inkml:brushProperty name="height" value="0.035278" units="cm"/>
+      <inkml:brushProperty name="color" value="#ff0000"/>
+      <inkml:brushProperty name="fitToCurve" value="1"/>
+    </inkml:brush>
+  </inkml:definitions>
+  <inkml:trace contextRef="#ctx0" brushRef="#br0">305 39,'-8'8,"1"7,-17 24,8-23,-23 8,16-17,-9 9,17-8,-1-8,0 0,-7-16,7 8,0 1,1-17,-1 1,8 7,0-8,8 17,-7-1,7 0,0-8,0 8,7 1,1 7,0 0,0 0,0 0,0 0,7 7,1 9,-16-8,16-8,-9 16,1-9,0 9,0-16,-8 8,8 0,-8 0,0-8</inkml:trace>
+</inkml:ink>
+</file>
+
+<file path=ppt/ink/ink58.xml><?xml version="1.0" encoding="utf-8"?>
+<inkml:ink xmlns:inkml="http://www.w3.org/2003/InkML">
+  <inkml:definitions>
+    <inkml:context xml:id="ctx0">
+      <inkml:inkSource xml:id="inkSrc0">
+        <inkml:traceFormat>
+          <inkml:channel name="X" type="integer" max="3200" units="cm"/>
+          <inkml:channel name="Y" type="integer" max="1080" units="cm"/>
+        </inkml:traceFormat>
+        <inkml:channelProperties>
+          <inkml:channelProperty channel="X" name="resolution" value="66.666656" units="1/cm"/>
+          <inkml:channelProperty channel="Y" name="resolution" value="40.000000" units="1/cm"/>
+        </inkml:channelProperties>
+      </inkml:inkSource>
+    </inkml:context>
+    <inkml:brush xml:id="br0">
+      <inkml:brushProperty name="width" value="0.035278" units="cm"/>
+      <inkml:brushProperty name="height" value="0.035278" units="cm"/>
+      <inkml:brushProperty name="color" value="#ff0000"/>
+      <inkml:brushProperty name="fitToCurve" value="1"/>
+    </inkml:brush>
+  </inkml:definitions>
+  <inkml:trace contextRef="#ctx0" brushRef="#br0">0 0,'0'31,"7"24,1 54,8-14,-16-33,0-38,8-9,-8-15</inkml:trace>
+</inkml:ink>
+</file>
+
+<file path=ppt/ink/ink59.xml><?xml version="1.0" encoding="utf-8"?>
+<inkml:ink xmlns:inkml="http://www.w3.org/2003/InkML">
+  <inkml:definitions>
+    <inkml:context xml:id="ctx0">
+      <inkml:inkSource xml:id="inkSrc0">
+        <inkml:traceFormat>
+          <inkml:channel name="X" type="integer" max="3200" units="cm"/>
+          <inkml:channel name="Y" type="integer" max="1080" units="cm"/>
+        </inkml:traceFormat>
+        <inkml:channelProperties>
+          <inkml:channelProperty channel="X" name="resolution" value="66.666656" units="1/cm"/>
+          <inkml:channelProperty channel="Y" name="resolution" value="40.000000" units="1/cm"/>
+        </inkml:channelProperties>
+      </inkml:inkSource>
+    </inkml:context>
+    <inkml:brush xml:id="br0">
+      <inkml:brushProperty name="width" value="0.035278" units="cm"/>
+      <inkml:brushProperty name="height" value="0.035278" units="cm"/>
+      <inkml:brushProperty name="color" value="#ff0000"/>
+      <inkml:brushProperty name="fitToCurve" value="1"/>
+    </inkml:brush>
+  </inkml:definitions>
+  <inkml:trace contextRef="#ctx0" brushRef="#br0">0 0,'0'31,"0"-8,7 9,1-1,0 0,16 32,-17-39,9-1,-8-7,8 15,-9-31,1 8,16 8,-9-16,1-8,0 0,-8 8,7-8,1-15,0 7,-1-7,1-9,-8 16,0-7,7-1,-7 1,8 7,-16 1,8 15,-8 0</inkml:trace>
 </inkml:ink>
 </file>
 
@@ -1101,6 +1751,266 @@
 </inkml:ink>
 </file>
 
+<file path=ppt/ink/ink60.xml><?xml version="1.0" encoding="utf-8"?>
+<inkml:ink xmlns:inkml="http://www.w3.org/2003/InkML">
+  <inkml:definitions>
+    <inkml:context xml:id="ctx0">
+      <inkml:inkSource xml:id="inkSrc0">
+        <inkml:traceFormat>
+          <inkml:channel name="X" type="integer" max="3200" units="cm"/>
+          <inkml:channel name="Y" type="integer" max="1080" units="cm"/>
+        </inkml:traceFormat>
+        <inkml:channelProperties>
+          <inkml:channelProperty channel="X" name="resolution" value="66.666656" units="1/cm"/>
+          <inkml:channelProperty channel="Y" name="resolution" value="40.000000" units="1/cm"/>
+        </inkml:channelProperties>
+      </inkml:inkSource>
+    </inkml:context>
+    <inkml:brush xml:id="br0">
+      <inkml:brushProperty name="width" value="0.035278" units="cm"/>
+      <inkml:brushProperty name="height" value="0.035278" units="cm"/>
+      <inkml:brushProperty name="color" value="#ff0000"/>
+      <inkml:brushProperty name="fitToCurve" value="1"/>
+    </inkml:brush>
+  </inkml:definitions>
+  <inkml:trace contextRef="#ctx0" brushRef="#br0">0 0,'7'0,"9"0,8 0,15 0,-24 0,1 0,-8 0,8 0,-9 0,1 0,0 0,0 0,-8 0</inkml:trace>
+</inkml:ink>
+</file>
+
+<file path=ppt/ink/ink61.xml><?xml version="1.0" encoding="utf-8"?>
+<inkml:ink xmlns:inkml="http://www.w3.org/2003/InkML">
+  <inkml:definitions>
+    <inkml:context xml:id="ctx0">
+      <inkml:inkSource xml:id="inkSrc0">
+        <inkml:traceFormat>
+          <inkml:channel name="X" type="integer" max="3200" units="cm"/>
+          <inkml:channel name="Y" type="integer" max="1080" units="cm"/>
+        </inkml:traceFormat>
+        <inkml:channelProperties>
+          <inkml:channelProperty channel="X" name="resolution" value="66.666656" units="1/cm"/>
+          <inkml:channelProperty channel="Y" name="resolution" value="40.000000" units="1/cm"/>
+        </inkml:channelProperties>
+      </inkml:inkSource>
+    </inkml:context>
+    <inkml:brush xml:id="br0">
+      <inkml:brushProperty name="width" value="0.035278" units="cm"/>
+      <inkml:brushProperty name="height" value="0.035278" units="cm"/>
+      <inkml:brushProperty name="color" value="#ff0000"/>
+      <inkml:brushProperty name="fitToCurve" value="1"/>
+    </inkml:brush>
+  </inkml:definitions>
+  <inkml:trace contextRef="#ctx0" brushRef="#br0">15 0,'16'0,"0"0,-1 0,9 0,-9 0,1 0,8 0,-17 0,1 0,0 0,-8 15,0-7,0 8,0-1,-8-7,-23 24,0-9,7-7,8-1,1-7,7 0,0 0,-8-8,16 8,0 0,0-1,-7 1,7 8,0-8,0 0,0 0,0-1,0 1,7 8,1-16,0 8,-8 0,8-8,8 0,-1 0,9 0,7 0,0-8,9 0,-9 8,-15-8,-1 0,9 0,-16 8,7-7,-7 7,-8 0</inkml:trace>
+</inkml:ink>
+</file>
+
+<file path=ppt/ink/ink62.xml><?xml version="1.0" encoding="utf-8"?>
+<inkml:ink xmlns:inkml="http://www.w3.org/2003/InkML">
+  <inkml:definitions>
+    <inkml:context xml:id="ctx0">
+      <inkml:inkSource xml:id="inkSrc0">
+        <inkml:traceFormat>
+          <inkml:channel name="X" type="integer" max="3200" units="cm"/>
+          <inkml:channel name="Y" type="integer" max="1080" units="cm"/>
+        </inkml:traceFormat>
+        <inkml:channelProperties>
+          <inkml:channelProperty channel="X" name="resolution" value="66.666656" units="1/cm"/>
+          <inkml:channelProperty channel="Y" name="resolution" value="40.000000" units="1/cm"/>
+        </inkml:channelProperties>
+      </inkml:inkSource>
+    </inkml:context>
+    <inkml:brush xml:id="br0">
+      <inkml:brushProperty name="width" value="0.035278" units="cm"/>
+      <inkml:brushProperty name="height" value="0.035278" units="cm"/>
+      <inkml:brushProperty name="color" value="#ff0000"/>
+      <inkml:brushProperty name="fitToCurve" value="1"/>
+    </inkml:brush>
+  </inkml:definitions>
+  <inkml:trace contextRef="#ctx0" brushRef="#br0">54 250,'32'-7,"-17"-1,1 0,15 8,-23-8,8 8,-8 0,0 0,-1 0,1 0,-8 8,-8-8,1 8,-1-8,-16 15,1-7,15 0,0-8,0 8,0 0,1-8,-1 8,8-1,-8-7,-8 0,16 16,0-8,-8-8,-7 8,15 0,-8-1,0-7,8 8,0 0,-8-8,0 0,1 0,14 0,1 0,8 0,-8 0,15 0,1 0,-1-8,1-7,-9 7,1 0,-8 8,0 0,0 0,-8-8,7 0,-7 0,8-7,-8-9,0 1,0 7,8-8,-8 1,8-1,-8 1,8-1,-8 1,0 15,8-23,-8 23,0 0,8 8,-8-8,0 0,0 1,7 7,-7 15,8 1,-8 39,8-16,0 16,0-16,-8 8,0-8,0 0,0 1,0 15,0-16,0 16,0-16,-8 8,8-24,-8 1,8 7,-8 8,8-15,-8-1,8 1,-7 7,-1 1,0-9,8-23</inkml:trace>
+</inkml:ink>
+</file>
+
+<file path=ppt/ink/ink63.xml><?xml version="1.0" encoding="utf-8"?>
+<inkml:ink xmlns:inkml="http://www.w3.org/2003/InkML">
+  <inkml:definitions>
+    <inkml:context xml:id="ctx0">
+      <inkml:inkSource xml:id="inkSrc0">
+        <inkml:traceFormat>
+          <inkml:channel name="X" type="integer" max="3200" units="cm"/>
+          <inkml:channel name="Y" type="integer" max="1080" units="cm"/>
+        </inkml:traceFormat>
+        <inkml:channelProperties>
+          <inkml:channelProperty channel="X" name="resolution" value="66.666656" units="1/cm"/>
+          <inkml:channelProperty channel="Y" name="resolution" value="40.000000" units="1/cm"/>
+        </inkml:channelProperties>
+      </inkml:inkSource>
+    </inkml:context>
+    <inkml:brush xml:id="br0">
+      <inkml:brushProperty name="width" value="0.035278" units="cm"/>
+      <inkml:brushProperty name="height" value="0.035278" units="cm"/>
+      <inkml:brushProperty name="color" value="#ff0000"/>
+      <inkml:brushProperty name="fitToCurve" value="1"/>
+    </inkml:brush>
+  </inkml:definitions>
+  <inkml:trace contextRef="#ctx0" brushRef="#br0">0 0,'15'0,"1"0,-8 0,0 0,-1 0,1 0,0 0,0 0,-8 7,8-7,-8 24,0-8,0 15,0-15,0-1,0 9,0-1,0-7,0-8,0 15,0-15,0 16,0 15,0-16,0-7,0-16</inkml:trace>
+</inkml:ink>
+</file>
+
+<file path=ppt/ink/ink64.xml><?xml version="1.0" encoding="utf-8"?>
+<inkml:ink xmlns:inkml="http://www.w3.org/2003/InkML">
+  <inkml:definitions>
+    <inkml:context xml:id="ctx0">
+      <inkml:inkSource xml:id="inkSrc0">
+        <inkml:traceFormat>
+          <inkml:channel name="X" type="integer" max="3200" units="cm"/>
+          <inkml:channel name="Y" type="integer" max="1080" units="cm"/>
+        </inkml:traceFormat>
+        <inkml:channelProperties>
+          <inkml:channelProperty channel="X" name="resolution" value="66.666656" units="1/cm"/>
+          <inkml:channelProperty channel="Y" name="resolution" value="40.000000" units="1/cm"/>
+        </inkml:channelProperties>
+      </inkml:inkSource>
+    </inkml:context>
+    <inkml:brush xml:id="br0">
+      <inkml:brushProperty name="width" value="0.035278" units="cm"/>
+      <inkml:brushProperty name="height" value="0.035278" units="cm"/>
+      <inkml:brushProperty name="color" value="#ff0000"/>
+      <inkml:brushProperty name="fitToCurve" value="1"/>
+    </inkml:brush>
+  </inkml:definitions>
+  <inkml:trace contextRef="#ctx0" brushRef="#br0">313 0,'-16'23,"-7"24,-40 47,32-63,-8 40,15-40,-7 9,23-33,0 9,0 0,0-8,1-8,7 7,0 1,-8-8,0 8,0 0,8 0,0 0,-8-8,0 8,1-8,7 0</inkml:trace>
+</inkml:ink>
+</file>
+
+<file path=ppt/ink/ink65.xml><?xml version="1.0" encoding="utf-8"?>
+<inkml:ink xmlns:inkml="http://www.w3.org/2003/InkML">
+  <inkml:definitions>
+    <inkml:context xml:id="ctx0">
+      <inkml:inkSource xml:id="inkSrc0">
+        <inkml:traceFormat>
+          <inkml:channel name="X" type="integer" max="3200" units="cm"/>
+          <inkml:channel name="Y" type="integer" max="1080" units="cm"/>
+        </inkml:traceFormat>
+        <inkml:channelProperties>
+          <inkml:channelProperty channel="X" name="resolution" value="66.666656" units="1/cm"/>
+          <inkml:channelProperty channel="Y" name="resolution" value="40.000000" units="1/cm"/>
+        </inkml:channelProperties>
+      </inkml:inkSource>
+    </inkml:context>
+    <inkml:brush xml:id="br0">
+      <inkml:brushProperty name="width" value="0.035278" units="cm"/>
+      <inkml:brushProperty name="height" value="0.035278" units="cm"/>
+      <inkml:brushProperty name="color" value="#ff0000"/>
+      <inkml:brushProperty name="fitToCurve" value="1"/>
+    </inkml:brush>
+  </inkml:definitions>
+  <inkml:trace contextRef="#ctx0" brushRef="#br0">0 0,'15'31,"24"16,24 31,-24-46,-15 15,-1-8,1-23,-1 7,-7 1,0-1,-1-7,1-1,0-7,-1 8,1 0,0 7,-8-7,7 0,1-1,0 1,-8 0,-1-16,1 15,0-7,0 0,-8 0,8-8,-8 8,8-8,-8 0</inkml:trace>
+</inkml:ink>
+</file>
+
+<file path=ppt/ink/ink66.xml><?xml version="1.0" encoding="utf-8"?>
+<inkml:ink xmlns:inkml="http://www.w3.org/2003/InkML">
+  <inkml:definitions>
+    <inkml:context xml:id="ctx0">
+      <inkml:inkSource xml:id="inkSrc0">
+        <inkml:traceFormat>
+          <inkml:channel name="X" type="integer" max="3200" units="cm"/>
+          <inkml:channel name="Y" type="integer" max="1080" units="cm"/>
+        </inkml:traceFormat>
+        <inkml:channelProperties>
+          <inkml:channelProperty channel="X" name="resolution" value="66.666656" units="1/cm"/>
+          <inkml:channelProperty channel="Y" name="resolution" value="40.000000" units="1/cm"/>
+        </inkml:channelProperties>
+      </inkml:inkSource>
+    </inkml:context>
+    <inkml:brush xml:id="br0">
+      <inkml:brushProperty name="width" value="0.035278" units="cm"/>
+      <inkml:brushProperty name="height" value="0.035278" units="cm"/>
+      <inkml:brushProperty name="color" value="#ff0000"/>
+      <inkml:brushProperty name="fitToCurve" value="1"/>
+    </inkml:brush>
+  </inkml:definitions>
+  <inkml:trace contextRef="#ctx0" brushRef="#br0">0 391,'7'0,"9"0,8 0,-1 0,40 0,-16 0,16 0,-1 0,9-7,7-1,-7 0,-1-16,-23 24,8-7,-23-1,-1 0,0 0,-15 8,0 0,-9-8,9 0,-8 1,0 7,0 0,0 0,-8-8,-8 0,-8-8,-8 8,-15-23,-8 7,0 1,-8-8,8-1,-31-15,54 32,1-9,7 16,8 8,1-8,7 1,7 7,1 0,8 0,-8 7,7 1,9 0,-16 0,7 0,9 0,-8-1,-9 9,25-8,-17 8,-7-9,8 1,0 8,-1-8,-7 7,8-7,0 8,7 0,-7-1,-8-7,-1 0,-7 0,8 0,0 0,-8 7,0 1,0 7,-8-15,0 16,-7-9,7 9,-8-8,8 7,1 1,-9-1,0 1,-7 7,7-15,8 7,0-7,-7 7,-1 9,-8-9,-23 56,16-40,-32 39,40-54,-16 23,23-39,16 0,-8-1,0 1,0-8,1 0,-1 0,16 0,-8-8,7 8,1-7,0 7,-8-8,8 0,0 8,0-16,-1 8,1 8,-8-7,8-1,0 8,-8 0</inkml:trace>
+</inkml:ink>
+</file>
+
+<file path=ppt/ink/ink67.xml><?xml version="1.0" encoding="utf-8"?>
+<inkml:ink xmlns:inkml="http://www.w3.org/2003/InkML">
+  <inkml:definitions>
+    <inkml:context xml:id="ctx0">
+      <inkml:inkSource xml:id="inkSrc0">
+        <inkml:traceFormat>
+          <inkml:channel name="X" type="integer" max="3200" units="cm"/>
+          <inkml:channel name="Y" type="integer" max="1080" units="cm"/>
+        </inkml:traceFormat>
+        <inkml:channelProperties>
+          <inkml:channelProperty channel="X" name="resolution" value="66.666656" units="1/cm"/>
+          <inkml:channelProperty channel="Y" name="resolution" value="40.000000" units="1/cm"/>
+        </inkml:channelProperties>
+      </inkml:inkSource>
+    </inkml:context>
+    <inkml:brush xml:id="br0">
+      <inkml:brushProperty name="width" value="0.035278" units="cm"/>
+      <inkml:brushProperty name="height" value="0.035278" units="cm"/>
+      <inkml:brushProperty name="color" value="#ff0000"/>
+      <inkml:brushProperty name="fitToCurve" value="1"/>
+    </inkml:brush>
+  </inkml:definitions>
+  <inkml:trace contextRef="#ctx0" brushRef="#br0">0 0,'0'0</inkml:trace>
+</inkml:ink>
+</file>
+
+<file path=ppt/ink/ink68.xml><?xml version="1.0" encoding="utf-8"?>
+<inkml:ink xmlns:inkml="http://www.w3.org/2003/InkML">
+  <inkml:definitions>
+    <inkml:context xml:id="ctx0">
+      <inkml:inkSource xml:id="inkSrc0">
+        <inkml:traceFormat>
+          <inkml:channel name="X" type="integer" max="3200" units="cm"/>
+          <inkml:channel name="Y" type="integer" max="1080" units="cm"/>
+        </inkml:traceFormat>
+        <inkml:channelProperties>
+          <inkml:channelProperty channel="X" name="resolution" value="66.666656" units="1/cm"/>
+          <inkml:channelProperty channel="Y" name="resolution" value="40.000000" units="1/cm"/>
+        </inkml:channelProperties>
+      </inkml:inkSource>
+    </inkml:context>
+    <inkml:brush xml:id="br0">
+      <inkml:brushProperty name="width" value="0.035278" units="cm"/>
+      <inkml:brushProperty name="height" value="0.035278" units="cm"/>
+      <inkml:brushProperty name="color" value="#ff0000"/>
+      <inkml:brushProperty name="fitToCurve" value="1"/>
+    </inkml:brush>
+  </inkml:definitions>
+  <inkml:trace contextRef="#ctx0" brushRef="#br0">7 31,'0'23,"0"32,0-39,0 0,0-1,0 17,-7-9,7 9,0-17,0 17,0-1,0 0,0-15,0 7,0 1,0-16,7 8,-7-9,8-7,-8 8,16-8,-8 0,7 0,-7-8,16-7,-16 7,7 0,9-16,-16 9,7-1,-7 0,8 1,-8 7,-1-16,9 1,-8-1,0 9,0-9,-8-7,8-1,-8-7,0 8,0 7,0 1,0 15,0 0,0 0,0 1,0 7</inkml:trace>
+</inkml:ink>
+</file>
+
+<file path=ppt/ink/ink69.xml><?xml version="1.0" encoding="utf-8"?>
+<inkml:ink xmlns:inkml="http://www.w3.org/2003/InkML">
+  <inkml:definitions>
+    <inkml:context xml:id="ctx0">
+      <inkml:inkSource xml:id="inkSrc0">
+        <inkml:traceFormat>
+          <inkml:channel name="X" type="integer" max="3200" units="cm"/>
+          <inkml:channel name="Y" type="integer" max="1080" units="cm"/>
+        </inkml:traceFormat>
+        <inkml:channelProperties>
+          <inkml:channelProperty channel="X" name="resolution" value="66.666656" units="1/cm"/>
+          <inkml:channelProperty channel="Y" name="resolution" value="40.000000" units="1/cm"/>
+        </inkml:channelProperties>
+      </inkml:inkSource>
+    </inkml:context>
+    <inkml:brush xml:id="br0">
+      <inkml:brushProperty name="width" value="0.035278" units="cm"/>
+      <inkml:brushProperty name="height" value="0.035278" units="cm"/>
+      <inkml:brushProperty name="color" value="#ff0000"/>
+      <inkml:brushProperty name="fitToCurve" value="1"/>
+    </inkml:brush>
+  </inkml:definitions>
+  <inkml:trace contextRef="#ctx0" brushRef="#br0">0 407,'7'0,"1"0,16 0,-9 0,32 0,-23 0,-1 0,40-16,-31 16,-1-7,8-1,-8 8,-7 0,-8 0,7 0,-7-8,0 8,-1-8,9 8,-9 0,32-8,-31 0,8 8,-9-7,-7 7,8 0,-8 0,-1 0,1 0,0 0,0 0,-16 0,-8 0,1 0,-1 7,-39 9,32-8,-1 0,1 7,-1-7,1-8,-1 8,8-8,16 8,-15 0,-1 8,0-1,-15 17,23-32,0 7,1 9,-1-16,0 0,0 0,8 8,0 0,-8-8,24 0,-8 0,7 0,9 0,15 0,-15 0,7-8,-15 8,-8 0,-1 0,1 0,8 0,-16-8,8 8,0-8,-1 0,1 1,-8-9,8 0,0-7,-8-1,0 1,0-32,0 8,0-8,0 16,0-8,0 23,0-7,0 7,0 9,0-1,0 0,0 8,0 1,0 30,0 8,0 9,-8 14,-8 119,-31-1,40-101,-9-1,8-30,0-9,8-15,-8-1,8 1,0-8,0 0,0 0,-8-8,1 0,-1 23,-8-23,8 16,0-8,-31 15,24-15,-1 0,8-8,-8 0,1 0,-1 0,0-8,1 0,7 8,0-8,-8 0,1 1,15-1,-8 8,0 0,8-8,-8 8,8-8,-8 0,8 24,0 0,0 7,0-7,8 7,0 17,-8-25,0 9,8-16,-8 7,0-7,8-8,-8 8,7-8,-7 8,16-8,8 0,-1 0,1 0,15 0,0 0,-8 0,1 0,-17 0,9 0,-8 0,-1 0,-7 0,-8 0</inkml:trace>
+</inkml:ink>
+</file>
+
 <file path=ppt/ink/ink7.xml><?xml version="1.0" encoding="utf-8"?>
 <inkml:ink xmlns:inkml="http://www.w3.org/2003/InkML">
   <inkml:definitions>
@@ -1124,6 +2034,266 @@
     </inkml:brush>
   </inkml:definitions>
   <inkml:trace contextRef="#ctx0" brushRef="#br0">0 0,'66'0,"1"0,-22 0,-1 0,-21 0,21 0,1 0,22 0,-67 0</inkml:trace>
+</inkml:ink>
+</file>
+
+<file path=ppt/ink/ink70.xml><?xml version="1.0" encoding="utf-8"?>
+<inkml:ink xmlns:inkml="http://www.w3.org/2003/InkML">
+  <inkml:definitions>
+    <inkml:context xml:id="ctx0">
+      <inkml:inkSource xml:id="inkSrc0">
+        <inkml:traceFormat>
+          <inkml:channel name="X" type="integer" max="3200" units="cm"/>
+          <inkml:channel name="Y" type="integer" max="1080" units="cm"/>
+        </inkml:traceFormat>
+        <inkml:channelProperties>
+          <inkml:channelProperty channel="X" name="resolution" value="66.666656" units="1/cm"/>
+          <inkml:channelProperty channel="Y" name="resolution" value="40.000000" units="1/cm"/>
+        </inkml:channelProperties>
+      </inkml:inkSource>
+    </inkml:context>
+    <inkml:brush xml:id="br0">
+      <inkml:brushProperty name="width" value="0.035278" units="cm"/>
+      <inkml:brushProperty name="height" value="0.035278" units="cm"/>
+      <inkml:brushProperty name="color" value="#ff0000"/>
+      <inkml:brushProperty name="fitToCurve" value="1"/>
+    </inkml:brush>
+  </inkml:definitions>
+  <inkml:trace contextRef="#ctx0" brushRef="#br0">674 54,'-32'40,"-38"38,31-39,31-15,-16-9,16-7,1-8,7-8,0 1,0-25,7-7,9-24,0 32,-1 7,-7 9,0-1,0 0,8 9,-1 7,-7 0,8 0,-1 7,1 9,-8 0,0-1,8-7,-9 0,1 8,0-1,-8 1,0 8,0 7,0-15,-16 31,-15 8,-47 54,15-62,-15 8,-9-23,17-17,7-7,-8-8,32 0,0 0,8 0,23 0,-8 0,8 0,1 0,7-8,7 0,9 8,8-7,30-1,1 8,0 0,8 0,54 8,-69-8,-33 0,9 0,-1 0,-15 0,0 0,0 0,0 0,-1 0,1 0,-8-8,-8 8,-7 0,7 0,-8-8,8 8,1 0,-1 8,0 7,-8-7,1 31,-1-7,16-9,-8-7,8 15,0-15,0 0,0-1,0-7,0 0,0 0,0 0,0-8</inkml:trace>
+</inkml:ink>
+</file>
+
+<file path=ppt/ink/ink71.xml><?xml version="1.0" encoding="utf-8"?>
+<inkml:ink xmlns:inkml="http://www.w3.org/2003/InkML">
+  <inkml:definitions>
+    <inkml:context xml:id="ctx0">
+      <inkml:inkSource xml:id="inkSrc0">
+        <inkml:traceFormat>
+          <inkml:channel name="X" type="integer" max="3200" units="cm"/>
+          <inkml:channel name="Y" type="integer" max="1080" units="cm"/>
+        </inkml:traceFormat>
+        <inkml:channelProperties>
+          <inkml:channelProperty channel="X" name="resolution" value="66.666656" units="1/cm"/>
+          <inkml:channelProperty channel="Y" name="resolution" value="40.000000" units="1/cm"/>
+        </inkml:channelProperties>
+      </inkml:inkSource>
+    </inkml:context>
+    <inkml:brush xml:id="br0">
+      <inkml:brushProperty name="width" value="0.035278" units="cm"/>
+      <inkml:brushProperty name="height" value="0.035278" units="cm"/>
+      <inkml:brushProperty name="color" value="#ff0000"/>
+      <inkml:brushProperty name="fitToCurve" value="1"/>
+    </inkml:brush>
+  </inkml:definitions>
+  <inkml:trace contextRef="#ctx0" brushRef="#br0">172 180,'0'15,"0"9,-8 0,-15 7,15-15,-8 7,8-23,0 0,-7 0,7 0,0 0,-8-8,1-15,-1-1,8 16,8-15,-8-1,1 9,7-1,0-8,7 9,17 15,-8 0,7 0,8 8,1 15,-1-7,-7-8,-9 7,-7-7,8 8,-8-16,0 8,-1-8,-7 8,8-8,8 0,-8-8,0 0,15 8,1-16,-9 0,9 9,-1-9,1-8,-8 9,-9 7,9-8,-8 1,8-1,-16 8,7-8,-7 1,0-1,0 8,0 0,0 1,-7 7,7 7,-8 9,8 15,-8 9,0 30,0-7,8-8,-8 15,1-31,-1 9,8-33,-8 9,8-16,0-1,0 1,0 0,0 8,0-8,0 7,8-7,0 0,-8 0,7 0,1-8,-8 0</inkml:trace>
+</inkml:ink>
+</file>
+
+<file path=ppt/ink/ink72.xml><?xml version="1.0" encoding="utf-8"?>
+<inkml:ink xmlns:inkml="http://www.w3.org/2003/InkML">
+  <inkml:definitions>
+    <inkml:context xml:id="ctx0">
+      <inkml:inkSource xml:id="inkSrc0">
+        <inkml:traceFormat>
+          <inkml:channel name="X" type="integer" max="3200" units="cm"/>
+          <inkml:channel name="Y" type="integer" max="1080" units="cm"/>
+        </inkml:traceFormat>
+        <inkml:channelProperties>
+          <inkml:channelProperty channel="X" name="resolution" value="66.666656" units="1/cm"/>
+          <inkml:channelProperty channel="Y" name="resolution" value="40.000000" units="1/cm"/>
+        </inkml:channelProperties>
+      </inkml:inkSource>
+    </inkml:context>
+    <inkml:brush xml:id="br0">
+      <inkml:brushProperty name="width" value="0.035278" units="cm"/>
+      <inkml:brushProperty name="height" value="0.035278" units="cm"/>
+      <inkml:brushProperty name="color" value="#ff0000"/>
+      <inkml:brushProperty name="fitToCurve" value="1"/>
+    </inkml:brush>
+  </inkml:definitions>
+  <inkml:trace contextRef="#ctx0" brushRef="#br0">0 0,'0'15,"0"1,7-8,-7 0,0-1,0 1,0 0,0 8,0-8,0 15,0 1,-7 7,7-8,0 9,0-9,0-15,0 8,0-8,0 7,0-7,0 0,0 0,0 0,0 7,0 1,0-8,0 0,0 0,0-1,0 1,0-8</inkml:trace>
+</inkml:ink>
+</file>
+
+<file path=ppt/ink/ink73.xml><?xml version="1.0" encoding="utf-8"?>
+<inkml:ink xmlns:inkml="http://www.w3.org/2003/InkML">
+  <inkml:definitions>
+    <inkml:context xml:id="ctx0">
+      <inkml:inkSource xml:id="inkSrc0">
+        <inkml:traceFormat>
+          <inkml:channel name="X" type="integer" max="3200" units="cm"/>
+          <inkml:channel name="Y" type="integer" max="1080" units="cm"/>
+        </inkml:traceFormat>
+        <inkml:channelProperties>
+          <inkml:channelProperty channel="X" name="resolution" value="66.666656" units="1/cm"/>
+          <inkml:channelProperty channel="Y" name="resolution" value="40.000000" units="1/cm"/>
+        </inkml:channelProperties>
+      </inkml:inkSource>
+    </inkml:context>
+    <inkml:brush xml:id="br0">
+      <inkml:brushProperty name="width" value="0.035278" units="cm"/>
+      <inkml:brushProperty name="height" value="0.035278" units="cm"/>
+      <inkml:brushProperty name="color" value="#ff0000"/>
+      <inkml:brushProperty name="fitToCurve" value="1"/>
+    </inkml:brush>
+  </inkml:definitions>
+  <inkml:trace contextRef="#ctx0" brushRef="#br0">352 39,'8'15,"0"9,0 15,-8-23,8-1,-1 1,-7 8,0-9,0 1,8 8,0-1,-8-7,8 7,-8-7,8-8,-8 0,8-1,-8 1,0 0,0 0,0 0,0 0,0-1,0 1,0 0,0 8,0 7,0-7,0 8,8-1,-1 1,-7-9,0-7,0 0,0 0,0 0,0-24,0 0,0 1,-15-17,7-15,-31-78,7 46,17 24,7 8,0 0,0 32,8-1,0 8,-8 0,8 1,0-1,0 0,0 0,0 0,0 0,-8 8,8-7,-7 14,-1 1,0 0,0 0,0 8,-7-1,-1 1,0 7,0-15,1 16,7-1,-8-7,1-8,-1 7,-8 1,17-8,-9 0,0 0,8 0,1-8,-9 0,8 0,0 0,0 0,1 0,7 7,0-7</inkml:trace>
+</inkml:ink>
+</file>
+
+<file path=ppt/ink/ink74.xml><?xml version="1.0" encoding="utf-8"?>
+<inkml:ink xmlns:inkml="http://www.w3.org/2003/InkML">
+  <inkml:definitions>
+    <inkml:context xml:id="ctx0">
+      <inkml:inkSource xml:id="inkSrc0">
+        <inkml:traceFormat>
+          <inkml:channel name="X" type="integer" max="3200" units="cm"/>
+          <inkml:channel name="Y" type="integer" max="1080" units="cm"/>
+        </inkml:traceFormat>
+        <inkml:channelProperties>
+          <inkml:channelProperty channel="X" name="resolution" value="66.666656" units="1/cm"/>
+          <inkml:channelProperty channel="Y" name="resolution" value="40.000000" units="1/cm"/>
+        </inkml:channelProperties>
+      </inkml:inkSource>
+    </inkml:context>
+    <inkml:brush xml:id="br0">
+      <inkml:brushProperty name="width" value="0.035278" units="cm"/>
+      <inkml:brushProperty name="height" value="0.035278" units="cm"/>
+      <inkml:brushProperty name="color" value="#ff0000"/>
+      <inkml:brushProperty name="fitToCurve" value="1"/>
+    </inkml:brush>
+  </inkml:definitions>
+  <inkml:trace contextRef="#ctx0" brushRef="#br0">39 0,'15'0,"9"0,-1 0,1 0,-8 7,-1-7,-7 0,0 0,-8 8,0 0,0 0,0 0,0 7,0 9,-16-1,1 1,-1-8,-8 23,9-24,-24 25,31-25,-8 1,8-8,0 0,1 0,7-8</inkml:trace>
+</inkml:ink>
+</file>
+
+<file path=ppt/ink/ink75.xml><?xml version="1.0" encoding="utf-8"?>
+<inkml:ink xmlns:inkml="http://www.w3.org/2003/InkML">
+  <inkml:definitions>
+    <inkml:context xml:id="ctx0">
+      <inkml:inkSource xml:id="inkSrc0">
+        <inkml:traceFormat>
+          <inkml:channel name="X" type="integer" max="3200" units="cm"/>
+          <inkml:channel name="Y" type="integer" max="1080" units="cm"/>
+        </inkml:traceFormat>
+        <inkml:channelProperties>
+          <inkml:channelProperty channel="X" name="resolution" value="66.666656" units="1/cm"/>
+          <inkml:channelProperty channel="Y" name="resolution" value="40.000000" units="1/cm"/>
+        </inkml:channelProperties>
+      </inkml:inkSource>
+    </inkml:context>
+    <inkml:brush xml:id="br0">
+      <inkml:brushProperty name="width" value="0.035278" units="cm"/>
+      <inkml:brushProperty name="height" value="0.035278" units="cm"/>
+      <inkml:brushProperty name="color" value="#ff0000"/>
+      <inkml:brushProperty name="fitToCurve" value="1"/>
+    </inkml:brush>
+  </inkml:definitions>
+  <inkml:trace contextRef="#ctx0" brushRef="#br0">0 0,'0'15,"0"17,0-1,0 8,0-23,0 15,0-7,0-9,0 9,0-1,0 1,7-1,-7 1,8-1,-8 9,0-24,0 7,0-7,0 0,0-24,0 1,0 7,-8-16,8 9,0 7,0 0,0 0,0 0,0 0,0 1,0-1,8 0,8 0,0 8,-9-8,1 0,0 1,0 7,0 0,0-8,-1 0,1 8,0 0,-8 0</inkml:trace>
+</inkml:ink>
+</file>
+
+<file path=ppt/ink/ink76.xml><?xml version="1.0" encoding="utf-8"?>
+<inkml:ink xmlns:inkml="http://www.w3.org/2003/InkML">
+  <inkml:definitions>
+    <inkml:context xml:id="ctx0">
+      <inkml:inkSource xml:id="inkSrc0">
+        <inkml:traceFormat>
+          <inkml:channel name="X" type="integer" max="3200" units="cm"/>
+          <inkml:channel name="Y" type="integer" max="1080" units="cm"/>
+        </inkml:traceFormat>
+        <inkml:channelProperties>
+          <inkml:channelProperty channel="X" name="resolution" value="66.666656" units="1/cm"/>
+          <inkml:channelProperty channel="Y" name="resolution" value="40.000000" units="1/cm"/>
+        </inkml:channelProperties>
+      </inkml:inkSource>
+    </inkml:context>
+    <inkml:brush xml:id="br0">
+      <inkml:brushProperty name="width" value="0.035278" units="cm"/>
+      <inkml:brushProperty name="height" value="0.035278" units="cm"/>
+      <inkml:brushProperty name="color" value="#ff0000"/>
+      <inkml:brushProperty name="fitToCurve" value="1"/>
+    </inkml:brush>
+  </inkml:definitions>
+  <inkml:trace contextRef="#ctx0" brushRef="#br0">0 47,'0'23,"0"8,0-15,7 15,1 9,-8-33,0 9,8-8,0-8,0 16,15-8,-7-8,0 0,-1 0,-7 0,0 0,0 0,0 0,-1-8,1 0,-8 0,0 0,8 0,-8 0,0-7,0 7,0 0,0-8,0 9,0-1,0 0,-16-8,9 8,-1 1,-8 7,8-8,0 8,1 0,-1 0,0 0,8 8,-8-8,8 7,-8 1,0 0,8 0,-7 0,-1 0,8-1,0 1,0 0,8-8,7 8,1 0,23 0,8-1,-31 1,-1-8,-7 0,0 0,8 0,-8 0,0 0,-1 0,1 0,-8-8,8 1,-8-1,0-8,0 8,0-15,0-1,0 9,0-9,0 16,0-15,0 15,0 0,0 0,0 0,0 1,0 22,-8-7,0 16,-7-1,-1 16,-8 8,17-23,7-1,-16 1,16-8,-8-9,8 1,-8 0,0 0,8 0,0-16,8 0,0-8,0-7,0 15,0-8,7 8,1-23,0 31,7 0,-15 0,16 0,-1 8,1 8,-17-9,9 1,0 8,-1-8,1 0,-8 0,0-8,-8 7,0 1,0-8</inkml:trace>
+</inkml:ink>
+</file>
+
+<file path=ppt/ink/ink77.xml><?xml version="1.0" encoding="utf-8"?>
+<inkml:ink xmlns:inkml="http://www.w3.org/2003/InkML">
+  <inkml:definitions>
+    <inkml:context xml:id="ctx0">
+      <inkml:inkSource xml:id="inkSrc0">
+        <inkml:traceFormat>
+          <inkml:channel name="X" type="integer" max="3200" units="cm"/>
+          <inkml:channel name="Y" type="integer" max="1080" units="cm"/>
+        </inkml:traceFormat>
+        <inkml:channelProperties>
+          <inkml:channelProperty channel="X" name="resolution" value="66.666656" units="1/cm"/>
+          <inkml:channelProperty channel="Y" name="resolution" value="40.000000" units="1/cm"/>
+        </inkml:channelProperties>
+      </inkml:inkSource>
+    </inkml:context>
+    <inkml:brush xml:id="br0">
+      <inkml:brushProperty name="width" value="0.035278" units="cm"/>
+      <inkml:brushProperty name="height" value="0.035278" units="cm"/>
+      <inkml:brushProperty name="color" value="#ff0000"/>
+      <inkml:brushProperty name="fitToCurve" value="1"/>
+    </inkml:brush>
+  </inkml:definitions>
+  <inkml:trace contextRef="#ctx0" brushRef="#br0">117 78,'16'0,"7"8,1 0,23 7,-16-7,16 0,-23-8,-1 8,1 0,7-1,-23 1,16 0,-9-8,-15 8,16-8,-8 0,-8 8,8 0,-8-1,0 9,0-8,-16 8,0 7,1 1,-9-1,-23 1,-8 15,32-23,-1-9,1 1,15-8,0 0,0 0,0 0,0-15,8 7,0-8,0-7,0 15,0-8,8 0,0 9,0-9,8 8,7 0,-15 8,8 0,-1 0,-7 0,0 0,8 0,-9 0,1 0,0 0,0 0,0 0,0 0,-1 0,1 0,-8-8,8 8,-16 0,0 0,-7 0,-1 0,-7 0,-32 8,31-8,-7 0,-1 0,17 0,-17 0,9 0,15 0,-15 0,15 0,0 0,-8 0,8 0,-7 0,7 0,0-8,0 8,8-7,-8 7,1 0,14 0,9 0,8 0,-9 0,9 0,-1 0,-7 0,15 7,-7-7,-9 0,9 8,-8-8,-1 8,-7-8,8 8,-8-8,0 0,7 8,-7-8,8 0,-8 0,-1 0,9 0,0 0,-8 0,-1 0,1 0,0 0,0 0,0 0,0 0,0 0,-1 0,1 0,0 0,0 0,0 0,0 0,-8-8,7 8,-7-8,8 8,-8-16,0 9,8-9,0 8,-8 0,8 0,-8 0,0-7,0 7,0-8,0 8,0-7,0-1,0-7,0 7,0-8,0 17,0-9,0 8,0-8,0 9,0 22,-8 1,8 15,0 1,0 7,-8-8,8 24,-8-16,8 16,-8 16,1-24,7-24,0 1,0-16,0-1,0 1,0 0,0 0,0 0,0 0,-8-8,0 0,8-8,0 0,-8-8,-8-31,16 8,0 15,0 1,0 15,0-8,0 1,8 7,-8 0,16 8,0-8,-9 8,9-8,0 8,-8-7,-1 7,9 0,-8 0,0 0,0 0,-1 0,1 0,0 0,0 0,0-8,0 8,-1 0,1 0,-16 0,1 0,-9-8,8 8,-8-8,1 8,7 0,0 0,0 0,0 0,1 0,-1 8,0 0,8 0,0-1,0 1,0 0,-8-8,8 8,0 0,0 0,0-1,-8-7,8 8,0 0,-8 0,8 0,0 0,0 7,0-7,0 0,-7 8,7-1,0-7,0 0,0 0,-8-8,8 8,-8 0,8-1,0 1,0 0,0 0,-8 0,8 0,-8-8,8 7,0 1,-8-8,8 8,0 0,-7-8,-1 8,8 0,-8-8,8 7,-8-7,8 8,-8-8,0 0,0 0,1 0,-9 0,0 0,-15 0,-32-15,16 7,24 0,-1 0,16 8,0 0,1-8,-1 8,0 0,0 0,8 8,0 0,0 0,8 7,0-7,-8 0,8-8,-1 0,1 0,8 0,-8 0,0 0,-1 0,1 0,8 0,0 0,-1-8,-7 8,8-8,7 8,-15 0,0 0,0 0,0 0,7 0,-7 0,0 0,0 0,0 0,0 0,-1 0,1 8,0 8,-8-8,8 0,0 7,-8-7,0 8,0-8,0 7,0 1,0 0,0-1,0-7,0 0,0 0,0 0,-8-8,8 8,-8-8,0 0,0 0,1 0,-1 0,0 0,0 0,0 0,0 0,1 0,-1 0,0 0,0 0,0 0,0 0,1 0,-1 0,-8 0,8 0,-15 0,7-8,-8 8,17 0,-1 0,0 0,0 0,0 0,8 8,0-1,0 1,0 0,0 0,0 0,0 0,0 7,0-7,0 0,0 0,8-8,8 8,7 7,-7-7,15 8,-7-8,-8 0,-1-1,-7-7,0 0,0 0,0 0,-1 0,1 0,0 0,0 0,0-7,-8-1,8 0,-1 8,-7-8,0 0,0 8</inkml:trace>
+</inkml:ink>
+</file>
+
+<file path=ppt/ink/ink78.xml><?xml version="1.0" encoding="utf-8"?>
+<inkml:ink xmlns:inkml="http://www.w3.org/2003/InkML">
+  <inkml:definitions>
+    <inkml:context xml:id="ctx0">
+      <inkml:inkSource xml:id="inkSrc0">
+        <inkml:traceFormat>
+          <inkml:channel name="X" type="integer" max="3200" units="cm"/>
+          <inkml:channel name="Y" type="integer" max="1080" units="cm"/>
+        </inkml:traceFormat>
+        <inkml:channelProperties>
+          <inkml:channelProperty channel="X" name="resolution" value="66.666656" units="1/cm"/>
+          <inkml:channelProperty channel="Y" name="resolution" value="40.000000" units="1/cm"/>
+        </inkml:channelProperties>
+      </inkml:inkSource>
+    </inkml:context>
+    <inkml:brush xml:id="br0">
+      <inkml:brushProperty name="width" value="0.035278" units="cm"/>
+      <inkml:brushProperty name="height" value="0.035278" units="cm"/>
+      <inkml:brushProperty name="color" value="#ff0000"/>
+      <inkml:brushProperty name="fitToCurve" value="1"/>
+    </inkml:brush>
+  </inkml:definitions>
+  <inkml:trace contextRef="#ctx0" brushRef="#br0">101 156,'8'0,"0"0,0 0,0 0,0 0,-16 0,0 0,-8 0,8 0,-7 0,7 0,-8 0,8 0,1 0,-9 0,8 0,8 8,-8 8,0 15,8-23,0 16,0-9,0-7,-7 8,7-8,0 7,0-7,0 0,0 0,0 0,0-1,7 1,1-8,-8 8,8-8,-8 8,8-8,0 0,0 0,-1 0,1 0,0 0,0 0,0 0,0 0,-1 0,1 0,0 0,0 0,-8 8,8-8,0 0,-1 8,9-8,-8 0,0 0,0 0,-1 0,1 0,0 0,0 0,0 0,0 0,0 0,-8-8,7 8,-7-8,0 0,8 0,-8 0,8 1,-8-1,0-8,8-15,-8-24,8 31,-8 9,8-17,-8 9,0-16,0 15,0 16,0-7,0 7,0 0,0 0,0 0,0 0,0 1,0 14,0 1,0 8,0 0,0 7,0 16,0-15,0-1,0 9,-8-17,8 9,0-8,0-9,0 9,0-8,0 0,0 0,0-1,0 1,0 0,0 0,0 0,0 0,0-1,-8-7,8-7,0-9,0 8,0 0,0-7,0 7,0 0,0 0,0 0,0 0,8 1,0-1,-1 8,1 0,-8-8,8 8,0 0,0 0,0 0,-1 0,1 0,0 0,0 0,-16 0,0 0,0 0,1 0,-9 0,0 0,8 0,-7 0,7 0,0 0,-8 0,9 0,-1 0,0 0,8 8,0 0,0-1,0 1,0 0,8 0,-8 0,8 0,-8-1,0 1,0 0,0 0,0 0,0 0,0-1,0 1,0 0,0 0,0 0,0 0,0-1,0 1,0 0,0 0,0 0,0 0,0 0,7-8,1 0,0 0,-8-8,8 8,0 0,0 0,-1 0,-7-8,8 8,-8-8,8 8,0 0,0 0,7 0,-7 0,-8 8,8-8,0 8,0-8,0 0,-1 8,-7-1,8-7,-8 8,8 0,-8 0,0 8,0-9,0 9,0 0,-8-1,8-7,0 8,-8-8,8 0,-7 7,7 1,0-8,-8-8,0 8,0-1,0 1,-7 8,7-8,-8-8,0 8,9 0,-25 7,24-15,-7 0,7 0,0 0,0 0,0 0,0-8,1 8,7-7,-8-1,8 0,0 0,0 0,0 0,0 0,0 1,0-1,0-8,15 8,-7 0,8-15,0 15,-1 0,-7 8,-8-8,16 1,-8 7,0-8,-1 8,1 0,0 0,0 0,0 0,0 0,7 0,-7 0,0 0,0 0,0 0,-8 0</inkml:trace>
+</inkml:ink>
+</file>
+
+<file path=ppt/ink/ink79.xml><?xml version="1.0" encoding="utf-8"?>
+<inkml:ink xmlns:inkml="http://www.w3.org/2003/InkML">
+  <inkml:definitions>
+    <inkml:context xml:id="ctx0">
+      <inkml:inkSource xml:id="inkSrc0">
+        <inkml:traceFormat>
+          <inkml:channel name="X" type="integer" max="3200" units="cm"/>
+          <inkml:channel name="Y" type="integer" max="1080" units="cm"/>
+        </inkml:traceFormat>
+        <inkml:channelProperties>
+          <inkml:channelProperty channel="X" name="resolution" value="66.666656" units="1/cm"/>
+          <inkml:channelProperty channel="Y" name="resolution" value="40.000000" units="1/cm"/>
+        </inkml:channelProperties>
+      </inkml:inkSource>
+    </inkml:context>
+    <inkml:brush xml:id="br0">
+      <inkml:brushProperty name="width" value="0.035278" units="cm"/>
+      <inkml:brushProperty name="height" value="0.035278" units="cm"/>
+      <inkml:brushProperty name="color" value="#ff0000"/>
+      <inkml:brushProperty name="fitToCurve" value="1"/>
+    </inkml:brush>
+  </inkml:definitions>
+  <inkml:trace contextRef="#ctx0" brushRef="#br0">0 0,'0'0</inkml:trace>
 </inkml:ink>
 </file>
 
@@ -1153,6 +2323,266 @@
 </inkml:ink>
 </file>
 
+<file path=ppt/ink/ink80.xml><?xml version="1.0" encoding="utf-8"?>
+<inkml:ink xmlns:inkml="http://www.w3.org/2003/InkML">
+  <inkml:definitions>
+    <inkml:context xml:id="ctx0">
+      <inkml:inkSource xml:id="inkSrc0">
+        <inkml:traceFormat>
+          <inkml:channel name="X" type="integer" max="3200" units="cm"/>
+          <inkml:channel name="Y" type="integer" max="1080" units="cm"/>
+        </inkml:traceFormat>
+        <inkml:channelProperties>
+          <inkml:channelProperty channel="X" name="resolution" value="66.666656" units="1/cm"/>
+          <inkml:channelProperty channel="Y" name="resolution" value="40.000000" units="1/cm"/>
+        </inkml:channelProperties>
+      </inkml:inkSource>
+    </inkml:context>
+    <inkml:brush xml:id="br0">
+      <inkml:brushProperty name="width" value="0.035278" units="cm"/>
+      <inkml:brushProperty name="height" value="0.035278" units="cm"/>
+      <inkml:brushProperty name="color" value="#ff0000"/>
+      <inkml:brushProperty name="fitToCurve" value="1"/>
+    </inkml:brush>
+  </inkml:definitions>
+  <inkml:trace contextRef="#ctx0" brushRef="#br0">0 0,'126'0,"488"0,-508 0,42 126,-63 107,-64-42,-42 42,-21-64,42-169</inkml:trace>
+</inkml:ink>
+</file>
+
+<file path=ppt/ink/ink81.xml><?xml version="1.0" encoding="utf-8"?>
+<inkml:ink xmlns:inkml="http://www.w3.org/2003/InkML">
+  <inkml:definitions>
+    <inkml:context xml:id="ctx0">
+      <inkml:inkSource xml:id="inkSrc0">
+        <inkml:traceFormat>
+          <inkml:channel name="X" type="integer" max="3200" units="cm"/>
+          <inkml:channel name="Y" type="integer" max="1080" units="cm"/>
+        </inkml:traceFormat>
+        <inkml:channelProperties>
+          <inkml:channelProperty channel="X" name="resolution" value="66.666656" units="1/cm"/>
+          <inkml:channelProperty channel="Y" name="resolution" value="40.000000" units="1/cm"/>
+        </inkml:channelProperties>
+      </inkml:inkSource>
+    </inkml:context>
+    <inkml:brush xml:id="br0">
+      <inkml:brushProperty name="width" value="0.035278" units="cm"/>
+      <inkml:brushProperty name="height" value="0.035278" units="cm"/>
+      <inkml:brushProperty name="color" value="#ff0000"/>
+      <inkml:brushProperty name="fitToCurve" value="1"/>
+    </inkml:brush>
+  </inkml:definitions>
+  <inkml:trace contextRef="#ctx0" brushRef="#br0">994 0,'0'42,"0"106,0-63,0-22,0 1,-42 20,-22 1,-41-22,-149 1,63-64,43-42,0-22,106 43,84 21,85 0,381 106,42-43,-275-42,-127-21,-84 0,-64 0</inkml:trace>
+</inkml:ink>
+</file>
+
+<file path=ppt/ink/ink82.xml><?xml version="1.0" encoding="utf-8"?>
+<inkml:ink xmlns:inkml="http://www.w3.org/2003/InkML">
+  <inkml:definitions>
+    <inkml:context xml:id="ctx0">
+      <inkml:inkSource xml:id="inkSrc0">
+        <inkml:traceFormat>
+          <inkml:channel name="X" type="integer" max="3200" units="cm"/>
+          <inkml:channel name="Y" type="integer" max="1080" units="cm"/>
+        </inkml:traceFormat>
+        <inkml:channelProperties>
+          <inkml:channelProperty channel="X" name="resolution" value="66.666656" units="1/cm"/>
+          <inkml:channelProperty channel="Y" name="resolution" value="40.000000" units="1/cm"/>
+        </inkml:channelProperties>
+      </inkml:inkSource>
+    </inkml:context>
+    <inkml:brush xml:id="br0">
+      <inkml:brushProperty name="width" value="0.035278" units="cm"/>
+      <inkml:brushProperty name="height" value="0.035278" units="cm"/>
+      <inkml:brushProperty name="color" value="#ff0000"/>
+      <inkml:brushProperty name="fitToCurve" value="1"/>
+    </inkml:brush>
+  </inkml:definitions>
+  <inkml:trace contextRef="#ctx0" brushRef="#br0">84 0,'21'105,"85"530,-85-106,-21-253,0-86,0-126,0 41,0-20,0 0,0 21,21-43,-21-42,0 0,0-42,-42-42,-43-297,-20 106,84 148,21 21,0 64,21-21,0 42,0-21,0 21,0 0,22 0,20 0,-42 0,22 0,-22 0,21 0,0 0,-20-21,20 21,106-43,-127 43,22 0,-22 0,63-42,-20 42,-64 0</inkml:trace>
+</inkml:ink>
+</file>
+
+<file path=ppt/ink/ink83.xml><?xml version="1.0" encoding="utf-8"?>
+<inkml:ink xmlns:inkml="http://www.w3.org/2003/InkML">
+  <inkml:definitions>
+    <inkml:context xml:id="ctx0">
+      <inkml:inkSource xml:id="inkSrc0">
+        <inkml:traceFormat>
+          <inkml:channel name="X" type="integer" max="3200" units="cm"/>
+          <inkml:channel name="Y" type="integer" max="1080" units="cm"/>
+        </inkml:traceFormat>
+        <inkml:channelProperties>
+          <inkml:channelProperty channel="X" name="resolution" value="66.666656" units="1/cm"/>
+          <inkml:channelProperty channel="Y" name="resolution" value="40.000000" units="1/cm"/>
+        </inkml:channelProperties>
+      </inkml:inkSource>
+    </inkml:context>
+    <inkml:brush xml:id="br0">
+      <inkml:brushProperty name="width" value="0.035278" units="cm"/>
+      <inkml:brushProperty name="height" value="0.035278" units="cm"/>
+      <inkml:brushProperty name="color" value="#ff0000"/>
+      <inkml:brushProperty name="fitToCurve" value="1"/>
+    </inkml:brush>
+  </inkml:definitions>
+  <inkml:trace contextRef="#ctx0" brushRef="#br0">105 0,'85'0,"-22"0,86 0,-65 0,-41 0,20 0,-42 0,0 0,-21 42,0-21,-63 85,42-22,-64 65,22-44,-1 1,43-85,-85 149,21-43,22-43,63-62,0-1,-21 0,0 21,0-42,21-21,21-21,0-1,0-62,0 83,0-83,0 62,1 1,20-22,-42 22,42-21,-21 41,-21 1,0 0,22 21,-1-21,0 21,-21-21,21 21,0 0,22 21,-1 64,21-22,64 170,-84-85,-1-42,-21-64,0 22,1-64,-22 21,0 0,0-42,0 0,-22-22,-20-20,21 21,0-1,-22-84,43 85,-21 0,-21-64,42 42,-21 64,21-42,0 21,0 0,0 21</inkml:trace>
+</inkml:ink>
+</file>
+
+<file path=ppt/ink/ink84.xml><?xml version="1.0" encoding="utf-8"?>
+<inkml:ink xmlns:inkml="http://www.w3.org/2003/InkML">
+  <inkml:definitions>
+    <inkml:context xml:id="ctx0">
+      <inkml:inkSource xml:id="inkSrc0">
+        <inkml:traceFormat>
+          <inkml:channel name="X" type="integer" max="3200" units="cm"/>
+          <inkml:channel name="Y" type="integer" max="1080" units="cm"/>
+        </inkml:traceFormat>
+        <inkml:channelProperties>
+          <inkml:channelProperty channel="X" name="resolution" value="66.666656" units="1/cm"/>
+          <inkml:channelProperty channel="Y" name="resolution" value="40.000000" units="1/cm"/>
+        </inkml:channelProperties>
+      </inkml:inkSource>
+    </inkml:context>
+    <inkml:brush xml:id="br0">
+      <inkml:brushProperty name="width" value="0.035278" units="cm"/>
+      <inkml:brushProperty name="height" value="0.035278" units="cm"/>
+      <inkml:brushProperty name="color" value="#ff0000"/>
+      <inkml:brushProperty name="fitToCurve" value="1"/>
+    </inkml:brush>
+  </inkml:definitions>
+  <inkml:trace contextRef="#ctx0" brushRef="#br0">0 0,'42'0,"21"0,-42 0,64 21,-64-21,0 0,1 0,-1 0,0 0,-21 21,21-21,0 0,0 0,22 0,-22 0,0-21,0 21,-21 0</inkml:trace>
+</inkml:ink>
+</file>
+
+<file path=ppt/ink/ink85.xml><?xml version="1.0" encoding="utf-8"?>
+<inkml:ink xmlns:inkml="http://www.w3.org/2003/InkML">
+  <inkml:definitions>
+    <inkml:context xml:id="ctx0">
+      <inkml:inkSource xml:id="inkSrc0">
+        <inkml:traceFormat>
+          <inkml:channel name="X" type="integer" max="3200" units="cm"/>
+          <inkml:channel name="Y" type="integer" max="1080" units="cm"/>
+        </inkml:traceFormat>
+        <inkml:channelProperties>
+          <inkml:channelProperty channel="X" name="resolution" value="66.666656" units="1/cm"/>
+          <inkml:channelProperty channel="Y" name="resolution" value="40.000000" units="1/cm"/>
+        </inkml:channelProperties>
+      </inkml:inkSource>
+    </inkml:context>
+    <inkml:brush xml:id="br0">
+      <inkml:brushProperty name="width" value="0.035278" units="cm"/>
+      <inkml:brushProperty name="height" value="0.035278" units="cm"/>
+      <inkml:brushProperty name="color" value="#ff0000"/>
+      <inkml:brushProperty name="fitToCurve" value="1"/>
+    </inkml:brush>
+  </inkml:definitions>
+  <inkml:trace contextRef="#ctx0" brushRef="#br0">63 0,'0'42,"0"0,0 106,0-21,-21-63,0 84,21-63,-21 105,21 64,0-148,21 21,0-21,-21-43,0-20,0-1,0-21,0 0,0 0,0-21</inkml:trace>
+</inkml:ink>
+</file>
+
+<file path=ppt/ink/ink86.xml><?xml version="1.0" encoding="utf-8"?>
+<inkml:ink xmlns:inkml="http://www.w3.org/2003/InkML">
+  <inkml:definitions>
+    <inkml:context xml:id="ctx0">
+      <inkml:inkSource xml:id="inkSrc0">
+        <inkml:traceFormat>
+          <inkml:channel name="X" type="integer" max="3200" units="cm"/>
+          <inkml:channel name="Y" type="integer" max="1080" units="cm"/>
+        </inkml:traceFormat>
+        <inkml:channelProperties>
+          <inkml:channelProperty channel="X" name="resolution" value="66.666656" units="1/cm"/>
+          <inkml:channelProperty channel="Y" name="resolution" value="40.000000" units="1/cm"/>
+        </inkml:channelProperties>
+      </inkml:inkSource>
+    </inkml:context>
+    <inkml:brush xml:id="br0">
+      <inkml:brushProperty name="width" value="0.035278" units="cm"/>
+      <inkml:brushProperty name="height" value="0.035278" units="cm"/>
+      <inkml:brushProperty name="color" value="#ff0000"/>
+      <inkml:brushProperty name="fitToCurve" value="1"/>
+    </inkml:brush>
+  </inkml:definitions>
+  <inkml:trace contextRef="#ctx0" brushRef="#br0">0 0,'21'105,"0"1,21 85,-21-128,-21 1,0-22,0 21,0 1,0-22,0 22,0-1,0-20,0 20,0 1,0-22,0 21,0-20,0-22,0 21,0-21,0 1,0-1,0 0,0 0,0 0,0-21</inkml:trace>
+</inkml:ink>
+</file>
+
+<file path=ppt/ink/ink87.xml><?xml version="1.0" encoding="utf-8"?>
+<inkml:ink xmlns:inkml="http://www.w3.org/2003/InkML">
+  <inkml:definitions>
+    <inkml:context xml:id="ctx0">
+      <inkml:inkSource xml:id="inkSrc0">
+        <inkml:traceFormat>
+          <inkml:channel name="X" type="integer" max="3200" units="cm"/>
+          <inkml:channel name="Y" type="integer" max="1080" units="cm"/>
+        </inkml:traceFormat>
+        <inkml:channelProperties>
+          <inkml:channelProperty channel="X" name="resolution" value="66.666656" units="1/cm"/>
+          <inkml:channelProperty channel="Y" name="resolution" value="40.000000" units="1/cm"/>
+        </inkml:channelProperties>
+      </inkml:inkSource>
+    </inkml:context>
+    <inkml:brush xml:id="br0">
+      <inkml:brushProperty name="width" value="0.035278" units="cm"/>
+      <inkml:brushProperty name="height" value="0.035278" units="cm"/>
+      <inkml:brushProperty name="color" value="#ff0000"/>
+      <inkml:brushProperty name="fitToCurve" value="1"/>
+    </inkml:brush>
+  </inkml:definitions>
+  <inkml:trace contextRef="#ctx0" brushRef="#br0">90 0,'-10'0,"0"0,0 0,0 0,0 0,10 10,-10-10,0 10,0-10,0 0,10 10,0 0,0-10</inkml:trace>
+</inkml:ink>
+</file>
+
+<file path=ppt/ink/ink88.xml><?xml version="1.0" encoding="utf-8"?>
+<inkml:ink xmlns:inkml="http://www.w3.org/2003/InkML">
+  <inkml:definitions>
+    <inkml:context xml:id="ctx0">
+      <inkml:inkSource xml:id="inkSrc0">
+        <inkml:traceFormat>
+          <inkml:channel name="X" type="integer" max="3200" units="cm"/>
+          <inkml:channel name="Y" type="integer" max="1080" units="cm"/>
+        </inkml:traceFormat>
+        <inkml:channelProperties>
+          <inkml:channelProperty channel="X" name="resolution" value="66.666656" units="1/cm"/>
+          <inkml:channelProperty channel="Y" name="resolution" value="40.000000" units="1/cm"/>
+        </inkml:channelProperties>
+      </inkml:inkSource>
+    </inkml:context>
+    <inkml:brush xml:id="br0">
+      <inkml:brushProperty name="width" value="0.035278" units="cm"/>
+      <inkml:brushProperty name="height" value="0.035278" units="cm"/>
+      <inkml:brushProperty name="color" value="#ff0000"/>
+      <inkml:brushProperty name="fitToCurve" value="1"/>
+    </inkml:brush>
+  </inkml:definitions>
+  <inkml:trace contextRef="#ctx0" brushRef="#br0">262 70,'-31'40,"-49"31,49-41,1 0,-10 1,20-21,10 0,10 0,-10 0,0-10,30-10,0 0,-10 10,0 0,10 0,-20-10,20 10,-10 0,11 0,-11 0,0 0,0 0,0 0,0 0,0 0,0 0,0 0,-10-10,0 0,0-11,0 11,-10 10,10-10,-20-10,10 10,0-10,0 10,10 0,-10 0,10 0,-10 10,10-11,0 1,0 0,0 20,0 0,-11 1,11-1,-10 10,10-10,-10 0,10 0,0 0,0 0,0 0,-10-10,10 10,0 0,0 0,0 1,0-1,10-10,0 10,-10 0,10 0,-10 0,0 0,0 0,0 0,0 0,0 0,0 0,0 1,11-1,-11 0,10-10,-10 10,0 0,0 0,10-10,-10-10,10 0,0 0,-10-10,10 20,0-21,0 1,-10 10,0-10,10 20,0-10,0 0,-10 0,10 0,-10 0,10-1,1 1,-11-10,10 10,0-10,0-10,10 0,-10 9,0 1,0-10,0 10,0 10,-10-10,10 20,1-10,-11 10</inkml:trace>
+</inkml:ink>
+</file>
+
+<file path=ppt/ink/ink89.xml><?xml version="1.0" encoding="utf-8"?>
+<inkml:ink xmlns:inkml="http://www.w3.org/2003/InkML">
+  <inkml:definitions>
+    <inkml:context xml:id="ctx0">
+      <inkml:inkSource xml:id="inkSrc0">
+        <inkml:traceFormat>
+          <inkml:channel name="X" type="integer" max="3200" units="cm"/>
+          <inkml:channel name="Y" type="integer" max="1080" units="cm"/>
+        </inkml:traceFormat>
+        <inkml:channelProperties>
+          <inkml:channelProperty channel="X" name="resolution" value="66.666656" units="1/cm"/>
+          <inkml:channelProperty channel="Y" name="resolution" value="40.000000" units="1/cm"/>
+        </inkml:channelProperties>
+      </inkml:inkSource>
+    </inkml:context>
+    <inkml:brush xml:id="br0">
+      <inkml:brushProperty name="width" value="0.035278" units="cm"/>
+      <inkml:brushProperty name="height" value="0.035278" units="cm"/>
+      <inkml:brushProperty name="color" value="#ff0000"/>
+      <inkml:brushProperty name="fitToCurve" value="1"/>
+    </inkml:brush>
+  </inkml:definitions>
+  <inkml:trace contextRef="#ctx0" brushRef="#br0">3656 1289,'-193'154,"-326"134,-655 290,19-271,693-268,366-39,39 0,57 19,19-19,19 19,155 1,-97-1,289 0,365 116,97-39,-482-96,-172 0,-97-19,-77 19,1 0,-1 0,0 0,0 0,-19-19,0-1,0-18,0-20,-57-96,-20 0,-193-308,-673-500,424 424,172 133,251 290,58 77,38 76,19 0,19 59,-18 230,-20-96,0-20,-20 78,-95 384,19-288,38-19,-134 519,172-558,-37-38,37-58,1 134,0-230,19-77,0-39,19-57,77-155,424-500,19-57,-135 153,58 1,-328 423,136-97,-39 59,0 57,-39 58,-57 38,-58 39,-39-1,-38 20</inkml:trace>
+</inkml:ink>
+</file>
+
 <file path=ppt/ink/ink9.xml><?xml version="1.0" encoding="utf-8"?>
 <inkml:ink xmlns:inkml="http://www.w3.org/2003/InkML">
   <inkml:definitions>
@@ -1176,6 +2606,58 @@
     </inkml:brush>
   </inkml:definitions>
   <inkml:trace contextRef="#ctx0" brushRef="#br0">0 0,'44'0,"-22"0,23 22,22-22,0 0,-1 0,68 44,-89-44,88 45,-43-23,-24 0,1-22,67 45,67-45,-1 0,-22 22,-44 1,67-23,-112 22,223-22,-178 0,133 0,0 0,-155 0,88 0,-66 0,-67 0,156 0,44 0,-133 0,44 0,1 0,43 22,-66-22,-66 0,-46 0,45 0,-22 0,22 0,-22 0,0 0,134 0,-90 0,223 0,-66 0,-68 0,-88 0,21 0,-21 0,22-22,-23 0,23-1,646-110,-602 88,89 23,-44 22,-22 0,66 0,-44-22,-134 22,134 0,-111 0,66 0,156 0,-67 0,-111 0,23 0,88 0,-89 0,-22 0,-66 0,21 0,-22 0,-44 0,66 0,-44 0,22 0,-67 0,1 0,-1 0,-22 0</inkml:trace>
+</inkml:ink>
+</file>
+
+<file path=ppt/ink/ink90.xml><?xml version="1.0" encoding="utf-8"?>
+<inkml:ink xmlns:inkml="http://www.w3.org/2003/InkML">
+  <inkml:definitions>
+    <inkml:context xml:id="ctx0">
+      <inkml:inkSource xml:id="inkSrc0">
+        <inkml:traceFormat>
+          <inkml:channel name="X" type="integer" max="3200" units="cm"/>
+          <inkml:channel name="Y" type="integer" max="1080" units="cm"/>
+        </inkml:traceFormat>
+        <inkml:channelProperties>
+          <inkml:channelProperty channel="X" name="resolution" value="66.666656" units="1/cm"/>
+          <inkml:channelProperty channel="Y" name="resolution" value="40.000000" units="1/cm"/>
+        </inkml:channelProperties>
+      </inkml:inkSource>
+    </inkml:context>
+    <inkml:brush xml:id="br0">
+      <inkml:brushProperty name="width" value="0.035278" units="cm"/>
+      <inkml:brushProperty name="height" value="0.035278" units="cm"/>
+      <inkml:brushProperty name="color" value="#ff0000"/>
+      <inkml:brushProperty name="fitToCurve" value="1"/>
+    </inkml:brush>
+  </inkml:definitions>
+  <inkml:trace contextRef="#ctx0" brushRef="#br0">173 38,'0'19,"-116"77,59-57,76-39,19 0,39-39,19 20,-38 19,-39 0,1 0,-40 0,-18-19,-20-20,20 20,-1 19,1 0,18 0,20 19,0 1,0-1,20 0,-20 20,19-20,-19 0,19 0,0-19,1-38,-1 38,0-58,0 39,20-20,-39 1,19 19,-19 0,0 19</inkml:trace>
+</inkml:ink>
+</file>
+
+<file path=ppt/ink/ink91.xml><?xml version="1.0" encoding="utf-8"?>
+<inkml:ink xmlns:inkml="http://www.w3.org/2003/InkML">
+  <inkml:definitions>
+    <inkml:context xml:id="ctx0">
+      <inkml:inkSource xml:id="inkSrc0">
+        <inkml:traceFormat>
+          <inkml:channel name="X" type="integer" max="3200" units="cm"/>
+          <inkml:channel name="Y" type="integer" max="1080" units="cm"/>
+        </inkml:traceFormat>
+        <inkml:channelProperties>
+          <inkml:channelProperty channel="X" name="resolution" value="66.666656" units="1/cm"/>
+          <inkml:channelProperty channel="Y" name="resolution" value="40.000000" units="1/cm"/>
+        </inkml:channelProperties>
+      </inkml:inkSource>
+    </inkml:context>
+    <inkml:brush xml:id="br0">
+      <inkml:brushProperty name="width" value="0.035278" units="cm"/>
+      <inkml:brushProperty name="height" value="0.035278" units="cm"/>
+      <inkml:brushProperty name="color" value="#ff0000"/>
+      <inkml:brushProperty name="fitToCurve" value="1"/>
+    </inkml:brush>
+  </inkml:definitions>
+  <inkml:trace contextRef="#ctx0" brushRef="#br0">365 115,'-38'19,"18"20,-57 18,20 1,18-39,-19 39,39-58,-19 39,19-20,38-19,0 0,19 0,1 0,-20 0,58 0,-58 0,39 0,-19 0,-20 0,-19-19,19 19,-19-20,0 1,0 0,0-20,0 20,0 0,0 0,0-20,0 1,-19 38,19-39,0 20,0 0,-19-1,-1 1,1 19,19-19,0 0,0 0,-19 19,0 0,-1 19,20 0,0 0,-19 0,0 20,19-1,-19-18,19 18,0 1,-20-1,20 1,-19-1,19-19,0 39,0-39,0 1,0-1,0 0,19-38,1 0,18-20,20-38,0 0,-39 39,0-1,0 20,-19 0,0-1,20 20,-20 0</inkml:trace>
 </inkml:ink>
 </file>
 
@@ -17740,7 +19222,7 @@
       </p:graphicFrame>
       <mc:AlternateContent xmlns:mc="http://schemas.openxmlformats.org/markup-compatibility/2006" xmlns:p14="http://schemas.microsoft.com/office/powerpoint/2010/main">
         <mc:Choice Requires="p14">
-          <p:contentPart p14:bwMode="auto" r:id="rId9">
+          <p:contentPart p14:bwMode="auto" r:id="rId15">
             <p14:nvContentPartPr>
               <p14:cNvPr id="181" name="잉크 29"/>
               <p14:cNvContentPartPr/>
@@ -17760,7 +19242,7 @@
               <p:nvPr/>
             </p:nvPicPr>
             <p:blipFill>
-              <a:blip r:embed="rId10"/>
+              <a:blip r:embed="rId16"/>
               <a:stretch>
                 <a:fillRect/>
               </a:stretch>
@@ -17779,7 +19261,7 @@
       </mc:AlternateContent>
       <mc:AlternateContent xmlns:mc="http://schemas.openxmlformats.org/markup-compatibility/2006" xmlns:p14="http://schemas.microsoft.com/office/powerpoint/2010/main">
         <mc:Choice Requires="p14">
-          <p:contentPart p14:bwMode="auto" r:id="rId11">
+          <p:contentPart p14:bwMode="auto" r:id="rId17">
             <p14:nvContentPartPr>
               <p14:cNvPr id="182" name="잉크 30"/>
               <p14:cNvContentPartPr/>
@@ -17799,7 +19281,7 @@
               <p:nvPr/>
             </p:nvPicPr>
             <p:blipFill>
-              <a:blip r:embed="rId12"/>
+              <a:blip r:embed="rId18"/>
               <a:stretch>
                 <a:fillRect/>
               </a:stretch>
@@ -17818,7 +19300,7 @@
       </mc:AlternateContent>
       <mc:AlternateContent xmlns:mc="http://schemas.openxmlformats.org/markup-compatibility/2006" xmlns:p14="http://schemas.microsoft.com/office/powerpoint/2010/main">
         <mc:Choice Requires="p14">
-          <p:contentPart p14:bwMode="auto" r:id="rId13">
+          <p:contentPart p14:bwMode="auto" r:id="rId19">
             <p14:nvContentPartPr>
               <p14:cNvPr id="183" name="잉크 31"/>
               <p14:cNvContentPartPr/>
@@ -17838,7 +19320,7 @@
               <p:nvPr/>
             </p:nvPicPr>
             <p:blipFill>
-              <a:blip r:embed="rId14"/>
+              <a:blip r:embed="rId20"/>
               <a:stretch>
                 <a:fillRect/>
               </a:stretch>
@@ -17847,6 +19329,84 @@
               <a:xfrm>
                 <a:off x="7101840" y="3230880"/>
                 <a:ext cx="2103120" cy="2438400"/>
+              </a:xfrm>
+              <a:prstGeom prst="rect">
+                <a:avLst/>
+              </a:prstGeom>
+            </p:spPr>
+          </p:pic>
+        </mc:Fallback>
+      </mc:AlternateContent>
+      <mc:AlternateContent xmlns:mc="http://schemas.openxmlformats.org/markup-compatibility/2006" xmlns:p14="http://schemas.microsoft.com/office/powerpoint/2010/main">
+        <mc:Choice Requires="p14">
+          <p:contentPart p14:bwMode="auto" r:id="rId21">
+            <p14:nvContentPartPr>
+              <p14:cNvPr id="184" name="잉크 4"/>
+              <p14:cNvContentPartPr/>
+              <p14:nvPr/>
+            </p14:nvContentPartPr>
+            <p14:xfrm>
+              <a:off x="625475" y="1628775"/>
+              <a:ext cx="778510" cy="1090930"/>
+            </p14:xfrm>
+          </p:contentPart>
+        </mc:Choice>
+        <mc:Fallback>
+          <p:pic>
+            <p:nvPicPr>
+              <p:cNvPr id="184" name="잉크 4"/>
+              <p:cNvPicPr/>
+              <p:nvPr/>
+            </p:nvPicPr>
+            <p:blipFill>
+              <a:blip r:embed="rId22"/>
+              <a:stretch>
+                <a:fillRect/>
+              </a:stretch>
+            </p:blipFill>
+            <p:spPr>
+              <a:xfrm>
+                <a:off x="625475" y="1628775"/>
+                <a:ext cx="778510" cy="1090930"/>
+              </a:xfrm>
+              <a:prstGeom prst="rect">
+                <a:avLst/>
+              </a:prstGeom>
+            </p:spPr>
+          </p:pic>
+        </mc:Fallback>
+      </mc:AlternateContent>
+      <mc:AlternateContent xmlns:mc="http://schemas.openxmlformats.org/markup-compatibility/2006" xmlns:p14="http://schemas.microsoft.com/office/powerpoint/2010/main">
+        <mc:Choice Requires="p14">
+          <p:contentPart p14:bwMode="auto" r:id="rId23">
+            <p14:nvContentPartPr>
+              <p14:cNvPr id="185" name="잉크 5"/>
+              <p14:cNvContentPartPr/>
+              <p14:nvPr/>
+            </p14:nvContentPartPr>
+            <p14:xfrm>
+              <a:off x="256540" y="1556385"/>
+              <a:ext cx="433070" cy="441325"/>
+            </p14:xfrm>
+          </p:contentPart>
+        </mc:Choice>
+        <mc:Fallback>
+          <p:pic>
+            <p:nvPicPr>
+              <p:cNvPr id="185" name="잉크 5"/>
+              <p:cNvPicPr/>
+              <p:nvPr/>
+            </p:nvPicPr>
+            <p:blipFill>
+              <a:blip r:embed="rId24"/>
+              <a:stretch>
+                <a:fillRect/>
+              </a:stretch>
+            </p:blipFill>
+            <p:spPr>
+              <a:xfrm>
+                <a:off x="256540" y="1556385"/>
+                <a:ext cx="433070" cy="441325"/>
               </a:xfrm>
               <a:prstGeom prst="rect">
                 <a:avLst/>
@@ -18838,7 +20398,7 @@
 </file>
 
 <file path=ppt/slides/slide24.xml><?xml version="1.0" encoding="utf-8"?>
-<p:sld xmlns:a="http://schemas.openxmlformats.org/drawingml/2006/main" xmlns:r="http://schemas.openxmlformats.org/officeDocument/2006/relationships" xmlns:p="http://schemas.openxmlformats.org/presentationml/2006/main">
+<p:sld xmlns:a="http://schemas.openxmlformats.org/drawingml/2006/main" xmlns:r="http://schemas.openxmlformats.org/officeDocument/2006/relationships" xmlns:p="http://schemas.openxmlformats.org/presentationml/2006/main" xmlns:p14="http://schemas.microsoft.com/office/powerpoint/2010/main">
   <p:cSld>
     <p:spTree>
       <p:nvGrpSpPr>
@@ -18870,7 +20430,12 @@
             <p:ph type="title"/>
           </p:nvPr>
         </p:nvSpPr>
-        <p:spPr/>
+        <p:spPr>
+          <a:xfrm>
+            <a:off x="590550" y="146050"/>
+            <a:ext cx="10363835" cy="762635"/>
+          </a:xfrm>
+        </p:spPr>
         <p:txBody>
           <a:bodyPr/>
           <a:lstStyle/>
@@ -18925,8 +20490,8 @@
         </p:nvSpPr>
         <p:spPr>
           <a:xfrm>
-            <a:off x="592667" y="1152526"/>
-            <a:ext cx="10363200" cy="2160829"/>
+            <a:off x="592455" y="1152525"/>
+            <a:ext cx="10363200" cy="2160905"/>
           </a:xfrm>
         </p:spPr>
         <p:txBody>
@@ -19097,7 +20662,12 @@
             <p:ph type="sldNum" idx="12"/>
           </p:nvPr>
         </p:nvSpPr>
-        <p:spPr/>
+        <p:spPr>
+          <a:xfrm>
+            <a:off x="9482455" y="6419850"/>
+            <a:ext cx="2540635" cy="305435"/>
+          </a:xfrm>
+        </p:spPr>
         <p:txBody>
           <a:bodyPr/>
           <a:lstStyle/>
@@ -19133,8 +20703,8 @@
         </p:nvSpPr>
         <p:spPr>
           <a:xfrm>
-            <a:off x="1043492" y="3429000"/>
-            <a:ext cx="4120039" cy="2677656"/>
+            <a:off x="1043305" y="3429000"/>
+            <a:ext cx="4119880" cy="2677795"/>
           </a:xfrm>
           <a:prstGeom prst="rect">
             <a:avLst/>
@@ -19256,8 +20826,8 @@
         </p:nvSpPr>
         <p:spPr>
           <a:xfrm>
-            <a:off x="6293224" y="3394038"/>
-            <a:ext cx="4764446" cy="2677656"/>
+            <a:off x="6293485" y="3394075"/>
+            <a:ext cx="4764405" cy="2677795"/>
           </a:xfrm>
           <a:prstGeom prst="rect">
             <a:avLst/>
@@ -19365,6 +20935,162 @@
           </a:p>
         </p:txBody>
       </p:sp>
+      <mc:AlternateContent xmlns:mc="http://schemas.openxmlformats.org/markup-compatibility/2006" xmlns:p14="http://schemas.microsoft.com/office/powerpoint/2010/main">
+        <mc:Choice Requires="p14">
+          <p:contentPart p14:bwMode="auto" r:id="rId5">
+            <p14:nvContentPartPr>
+              <p14:cNvPr id="8" name="잉크 2"/>
+              <p14:cNvContentPartPr/>
+              <p14:nvPr/>
+            </p14:nvContentPartPr>
+            <p14:xfrm>
+              <a:off x="23495" y="2013585"/>
+              <a:ext cx="473710" cy="737870"/>
+            </p14:xfrm>
+          </p:contentPart>
+        </mc:Choice>
+        <mc:Fallback>
+          <p:pic>
+            <p:nvPicPr>
+              <p:cNvPr id="8" name="잉크 2"/>
+              <p:cNvPicPr/>
+              <p:nvPr/>
+            </p:nvPicPr>
+            <p:blipFill>
+              <a:blip r:embed="rId6"/>
+              <a:stretch>
+                <a:fillRect/>
+              </a:stretch>
+            </p:blipFill>
+            <p:spPr>
+              <a:xfrm>
+                <a:off x="23495" y="2013585"/>
+                <a:ext cx="473710" cy="737870"/>
+              </a:xfrm>
+              <a:prstGeom prst="rect">
+                <a:avLst/>
+              </a:prstGeom>
+            </p:spPr>
+          </p:pic>
+        </mc:Fallback>
+      </mc:AlternateContent>
+      <mc:AlternateContent xmlns:mc="http://schemas.openxmlformats.org/markup-compatibility/2006" xmlns:p14="http://schemas.microsoft.com/office/powerpoint/2010/main">
+        <mc:Choice Requires="p14">
+          <p:contentPart p14:bwMode="auto" r:id="rId7">
+            <p14:nvContentPartPr>
+              <p14:cNvPr id="9" name="잉크 3"/>
+              <p14:cNvContentPartPr/>
+              <p14:nvPr/>
+            </p14:nvContentPartPr>
+            <p14:xfrm>
+              <a:off x="320675" y="1973580"/>
+              <a:ext cx="890270" cy="1452245"/>
+            </p14:xfrm>
+          </p:contentPart>
+        </mc:Choice>
+        <mc:Fallback>
+          <p:pic>
+            <p:nvPicPr>
+              <p:cNvPr id="9" name="잉크 3"/>
+              <p:cNvPicPr/>
+              <p:nvPr/>
+            </p:nvPicPr>
+            <p:blipFill>
+              <a:blip r:embed="rId8"/>
+              <a:stretch>
+                <a:fillRect/>
+              </a:stretch>
+            </p:blipFill>
+            <p:spPr>
+              <a:xfrm>
+                <a:off x="320675" y="1973580"/>
+                <a:ext cx="890270" cy="1452245"/>
+              </a:xfrm>
+              <a:prstGeom prst="rect">
+                <a:avLst/>
+              </a:prstGeom>
+            </p:spPr>
+          </p:pic>
+        </mc:Fallback>
+      </mc:AlternateContent>
+      <mc:AlternateContent xmlns:mc="http://schemas.openxmlformats.org/markup-compatibility/2006" xmlns:p14="http://schemas.microsoft.com/office/powerpoint/2010/main">
+        <mc:Choice Requires="p14">
+          <p:contentPart p14:bwMode="auto" r:id="rId9">
+            <p14:nvContentPartPr>
+              <p14:cNvPr id="10" name="잉크 1"/>
+              <p14:cNvContentPartPr/>
+              <p14:nvPr/>
+            </p14:nvContentPartPr>
+            <p14:xfrm>
+              <a:off x="1620520" y="1837055"/>
+              <a:ext cx="5695950" cy="136525"/>
+            </p14:xfrm>
+          </p:contentPart>
+        </mc:Choice>
+        <mc:Fallback>
+          <p:pic>
+            <p:nvPicPr>
+              <p:cNvPr id="10" name="잉크 1"/>
+              <p:cNvPicPr/>
+              <p:nvPr/>
+            </p:nvPicPr>
+            <p:blipFill>
+              <a:blip r:embed="rId10"/>
+              <a:stretch>
+                <a:fillRect/>
+              </a:stretch>
+            </p:blipFill>
+            <p:spPr>
+              <a:xfrm>
+                <a:off x="1620520" y="1837055"/>
+                <a:ext cx="5695950" cy="136525"/>
+              </a:xfrm>
+              <a:prstGeom prst="rect">
+                <a:avLst/>
+              </a:prstGeom>
+            </p:spPr>
+          </p:pic>
+        </mc:Fallback>
+      </mc:AlternateContent>
+      <mc:AlternateContent xmlns:mc="http://schemas.openxmlformats.org/markup-compatibility/2006" xmlns:p14="http://schemas.microsoft.com/office/powerpoint/2010/main">
+        <mc:Choice Requires="p14">
+          <p:contentPart p14:bwMode="auto" r:id="rId11">
+            <p14:nvContentPartPr>
+              <p14:cNvPr id="11" name="잉크 2"/>
+              <p14:cNvContentPartPr/>
+              <p14:nvPr/>
+            </p14:nvContentPartPr>
+            <p14:xfrm>
+              <a:off x="7380605" y="1757045"/>
+              <a:ext cx="264795" cy="248285"/>
+            </p14:xfrm>
+          </p:contentPart>
+        </mc:Choice>
+        <mc:Fallback>
+          <p:pic>
+            <p:nvPicPr>
+              <p:cNvPr id="11" name="잉크 2"/>
+              <p:cNvPicPr/>
+              <p:nvPr/>
+            </p:nvPicPr>
+            <p:blipFill>
+              <a:blip r:embed="rId12"/>
+              <a:stretch>
+                <a:fillRect/>
+              </a:stretch>
+            </p:blipFill>
+            <p:spPr>
+              <a:xfrm>
+                <a:off x="7380605" y="1757045"/>
+                <a:ext cx="264795" cy="248285"/>
+              </a:xfrm>
+              <a:prstGeom prst="rect">
+                <a:avLst/>
+              </a:prstGeom>
+            </p:spPr>
+          </p:pic>
+        </mc:Fallback>
+      </mc:AlternateContent>
     </p:spTree>
     <p:extLst>
       <p:ext uri="{BB962C8B-B14F-4D97-AF65-F5344CB8AC3E}">
@@ -19375,6 +21101,21 @@
   <p:clrMapOvr>
     <a:masterClrMapping/>
   </p:clrMapOvr>
+  <mc:AlternateContent xmlns:mc="http://schemas.openxmlformats.org/markup-compatibility/2006">
+    <mc:Choice xmlns:p14="http://schemas.microsoft.com/office/powerpoint/2010/main" Requires="p14">
+      <p:transition spd="slow" p14:dur="2000"/>
+    </mc:Choice>
+    <mc:Fallback>
+      <p:transition spd="slow"/>
+    </mc:Fallback>
+  </mc:AlternateContent>
+  <p:timing>
+    <p:tnLst>
+      <p:par>
+        <p:cTn id="1" dur="indefinite" restart="never" nodeType="tmRoot"/>
+      </p:par>
+    </p:tnLst>
+  </p:timing>
 </p:sld>
 </file>
 
@@ -23731,7 +25472,7 @@
 </file>
 
 <file path=ppt/slides/slide31.xml><?xml version="1.0" encoding="utf-8"?>
-<p:sld xmlns:a="http://schemas.openxmlformats.org/drawingml/2006/main" xmlns:r="http://schemas.openxmlformats.org/officeDocument/2006/relationships" xmlns:p="http://schemas.openxmlformats.org/presentationml/2006/main">
+<p:sld xmlns:a="http://schemas.openxmlformats.org/drawingml/2006/main" xmlns:r="http://schemas.openxmlformats.org/officeDocument/2006/relationships" xmlns:p="http://schemas.openxmlformats.org/presentationml/2006/main" xmlns:p14="http://schemas.microsoft.com/office/powerpoint/2010/main">
   <p:cSld>
     <p:spTree>
       <p:nvGrpSpPr>
@@ -23769,7 +25510,12 @@
             <p:ph type="title"/>
           </p:nvPr>
         </p:nvSpPr>
-        <p:spPr/>
+        <p:spPr>
+          <a:xfrm>
+            <a:off x="590550" y="146050"/>
+            <a:ext cx="10363835" cy="762635"/>
+          </a:xfrm>
+        </p:spPr>
         <p:txBody>
           <a:bodyPr/>
           <a:lstStyle/>
@@ -23801,7 +25547,12 @@
             <p:ph type="body" idx="1"/>
           </p:nvPr>
         </p:nvSpPr>
-        <p:spPr/>
+        <p:spPr>
+          <a:xfrm>
+            <a:off x="592455" y="1152525"/>
+            <a:ext cx="10363835" cy="5020310"/>
+          </a:xfrm>
+        </p:spPr>
         <p:txBody>
           <a:bodyPr>
             <a:normAutofit/>
@@ -23837,7 +25588,12 @@
             <p:ph type="sldNum" idx="12"/>
           </p:nvPr>
         </p:nvSpPr>
-        <p:spPr/>
+        <p:spPr>
+          <a:xfrm>
+            <a:off x="9482455" y="6419850"/>
+            <a:ext cx="2540635" cy="305435"/>
+          </a:xfrm>
+        </p:spPr>
         <p:txBody>
           <a:bodyPr/>
           <a:lstStyle/>
@@ -23873,8 +25629,8 @@
         </p:nvSpPr>
         <p:spPr>
           <a:xfrm>
-            <a:off x="7531510" y="570271"/>
-            <a:ext cx="184731" cy="307777"/>
+            <a:off x="7531735" y="570230"/>
+            <a:ext cx="184785" cy="307975"/>
           </a:xfrm>
           <a:prstGeom prst="rect">
             <a:avLst/>
@@ -23905,8 +25661,8 @@
         </p:nvSpPr>
         <p:spPr>
           <a:xfrm>
-            <a:off x="590551" y="1215539"/>
-            <a:ext cx="5595596" cy="4893647"/>
+            <a:off x="590550" y="1215390"/>
+            <a:ext cx="5595620" cy="4893945"/>
           </a:xfrm>
           <a:prstGeom prst="rect">
             <a:avLst/>
@@ -24578,7 +26334,7 @@
       </p:sp>
       <p:pic>
         <p:nvPicPr>
-          <p:cNvPr id="13" name="그림 12" descr="텍스트, 스크린샷, 폰트이(가) 표시된 사진&#10;&#10;AI가 생성한 콘텐츠는 부정확할 수 있습니다.">
+          <p:cNvPr id="13" name="그림 12">
             <a:extLst>
               <a:ext uri="{FF2B5EF4-FFF2-40B4-BE49-F238E27FC236}">
                 <a16:creationId xmlns:a16="http://schemas.microsoft.com/office/drawing/2014/main" id="{DDEA50BA-B242-D826-1F87-C103CE4E6168}"/>
@@ -24598,8 +26354,8 @@
         </p:blipFill>
         <p:spPr>
           <a:xfrm>
-            <a:off x="7467056" y="1449100"/>
-            <a:ext cx="3486695" cy="4426524"/>
+            <a:off x="7466965" y="1449070"/>
+            <a:ext cx="3486785" cy="4426585"/>
           </a:xfrm>
           <a:prstGeom prst="rect">
             <a:avLst/>
@@ -24611,6 +26367,201 @@
           </a:ln>
         </p:spPr>
       </p:pic>
+      <mc:AlternateContent xmlns:mc="http://schemas.openxmlformats.org/markup-compatibility/2006" xmlns:p14="http://schemas.microsoft.com/office/powerpoint/2010/main">
+        <mc:Choice Requires="p14">
+          <p:contentPart p14:bwMode="auto" r:id="rId13">
+            <p14:nvContentPartPr>
+              <p14:cNvPr id="14" name="잉크 3"/>
+              <p14:cNvContentPartPr/>
+              <p14:nvPr/>
+            </p14:nvContentPartPr>
+            <p14:xfrm>
+              <a:off x="1534795" y="5530215"/>
+              <a:ext cx="32385" cy="14605"/>
+            </p14:xfrm>
+          </p:contentPart>
+        </mc:Choice>
+        <mc:Fallback>
+          <p:pic>
+            <p:nvPicPr>
+              <p:cNvPr id="14" name="잉크 3"/>
+              <p:cNvPicPr/>
+              <p:nvPr/>
+            </p:nvPicPr>
+            <p:blipFill>
+              <a:blip r:embed="rId14"/>
+              <a:stretch>
+                <a:fillRect/>
+              </a:stretch>
+            </p:blipFill>
+            <p:spPr>
+              <a:xfrm>
+                <a:off x="1534795" y="5530215"/>
+                <a:ext cx="32385" cy="14605"/>
+              </a:xfrm>
+              <a:prstGeom prst="rect">
+                <a:avLst/>
+              </a:prstGeom>
+            </p:spPr>
+          </p:pic>
+        </mc:Fallback>
+      </mc:AlternateContent>
+      <mc:AlternateContent xmlns:mc="http://schemas.openxmlformats.org/markup-compatibility/2006" xmlns:p14="http://schemas.microsoft.com/office/powerpoint/2010/main">
+        <mc:Choice Requires="p14">
+          <p:contentPart p14:bwMode="auto" r:id="rId15">
+            <p14:nvContentPartPr>
+              <p14:cNvPr id="15" name="잉크 4"/>
+              <p14:cNvContentPartPr/>
+              <p14:nvPr/>
+            </p14:nvContentPartPr>
+            <p14:xfrm>
+              <a:off x="1331595" y="5534025"/>
+              <a:ext cx="137795" cy="155575"/>
+            </p14:xfrm>
+          </p:contentPart>
+        </mc:Choice>
+        <mc:Fallback>
+          <p:pic>
+            <p:nvPicPr>
+              <p:cNvPr id="15" name="잉크 4"/>
+              <p:cNvPicPr/>
+              <p:nvPr/>
+            </p:nvPicPr>
+            <p:blipFill>
+              <a:blip r:embed="rId16"/>
+              <a:stretch>
+                <a:fillRect/>
+              </a:stretch>
+            </p:blipFill>
+            <p:spPr>
+              <a:xfrm>
+                <a:off x="1331595" y="5534025"/>
+                <a:ext cx="137795" cy="155575"/>
+              </a:xfrm>
+              <a:prstGeom prst="rect">
+                <a:avLst/>
+              </a:prstGeom>
+            </p:spPr>
+          </p:pic>
+        </mc:Fallback>
+      </mc:AlternateContent>
+      <mc:AlternateContent xmlns:mc="http://schemas.openxmlformats.org/markup-compatibility/2006" xmlns:p14="http://schemas.microsoft.com/office/powerpoint/2010/main">
+        <mc:Choice Requires="p14">
+          <p:contentPart p14:bwMode="auto" r:id="rId17">
+            <p14:nvContentPartPr>
+              <p14:cNvPr id="16" name="잉크 5"/>
+              <p14:cNvContentPartPr/>
+              <p14:nvPr/>
+            </p14:nvContentPartPr>
+            <p14:xfrm>
+              <a:off x="4086860" y="1524000"/>
+              <a:ext cx="1316355" cy="1787525"/>
+            </p14:xfrm>
+          </p:contentPart>
+        </mc:Choice>
+        <mc:Fallback>
+          <p:pic>
+            <p:nvPicPr>
+              <p:cNvPr id="16" name="잉크 5"/>
+              <p:cNvPicPr/>
+              <p:nvPr/>
+            </p:nvPicPr>
+            <p:blipFill>
+              <a:blip r:embed="rId18"/>
+              <a:stretch>
+                <a:fillRect/>
+              </a:stretch>
+            </p:blipFill>
+            <p:spPr>
+              <a:xfrm>
+                <a:off x="4086860" y="1524000"/>
+                <a:ext cx="1316355" cy="1787525"/>
+              </a:xfrm>
+              <a:prstGeom prst="rect">
+                <a:avLst/>
+              </a:prstGeom>
+            </p:spPr>
+          </p:pic>
+        </mc:Fallback>
+      </mc:AlternateContent>
+      <mc:AlternateContent xmlns:mc="http://schemas.openxmlformats.org/markup-compatibility/2006" xmlns:p14="http://schemas.microsoft.com/office/powerpoint/2010/main">
+        <mc:Choice Requires="p14">
+          <p:contentPart p14:bwMode="auto" r:id="rId19">
+            <p14:nvContentPartPr>
+              <p14:cNvPr id="17" name="잉크 6"/>
+              <p14:cNvContentPartPr/>
+              <p14:nvPr/>
+            </p14:nvContentPartPr>
+            <p14:xfrm>
+              <a:off x="2029460" y="2085340"/>
+              <a:ext cx="118110" cy="83185"/>
+            </p14:xfrm>
+          </p:contentPart>
+        </mc:Choice>
+        <mc:Fallback>
+          <p:pic>
+            <p:nvPicPr>
+              <p:cNvPr id="17" name="잉크 6"/>
+              <p:cNvPicPr/>
+              <p:nvPr/>
+            </p:nvPicPr>
+            <p:blipFill>
+              <a:blip r:embed="rId20"/>
+              <a:stretch>
+                <a:fillRect/>
+              </a:stretch>
+            </p:blipFill>
+            <p:spPr>
+              <a:xfrm>
+                <a:off x="2029460" y="2085340"/>
+                <a:ext cx="118110" cy="83185"/>
+              </a:xfrm>
+              <a:prstGeom prst="rect">
+                <a:avLst/>
+              </a:prstGeom>
+            </p:spPr>
+          </p:pic>
+        </mc:Fallback>
+      </mc:AlternateContent>
+      <mc:AlternateContent xmlns:mc="http://schemas.openxmlformats.org/markup-compatibility/2006" xmlns:p14="http://schemas.microsoft.com/office/powerpoint/2010/main">
+        <mc:Choice Requires="p14">
+          <p:contentPart p14:bwMode="auto" r:id="rId21">
+            <p14:nvContentPartPr>
+              <p14:cNvPr id="18" name="잉크 7"/>
+              <p14:cNvContentPartPr/>
+              <p14:nvPr/>
+            </p14:nvContentPartPr>
+            <p14:xfrm>
+              <a:off x="1364615" y="3325495"/>
+              <a:ext cx="145415" cy="186690"/>
+            </p14:xfrm>
+          </p:contentPart>
+        </mc:Choice>
+        <mc:Fallback>
+          <p:pic>
+            <p:nvPicPr>
+              <p:cNvPr id="18" name="잉크 7"/>
+              <p:cNvPicPr/>
+              <p:nvPr/>
+            </p:nvPicPr>
+            <p:blipFill>
+              <a:blip r:embed="rId22"/>
+              <a:stretch>
+                <a:fillRect/>
+              </a:stretch>
+            </p:blipFill>
+            <p:spPr>
+              <a:xfrm>
+                <a:off x="1364615" y="3325495"/>
+                <a:ext cx="145415" cy="186690"/>
+              </a:xfrm>
+              <a:prstGeom prst="rect">
+                <a:avLst/>
+              </a:prstGeom>
+            </p:spPr>
+          </p:pic>
+        </mc:Fallback>
+      </mc:AlternateContent>
     </p:spTree>
     <p:extLst>
       <p:ext uri="{BB962C8B-B14F-4D97-AF65-F5344CB8AC3E}">
@@ -24621,11 +26572,26 @@
   <p:clrMapOvr>
     <a:masterClrMapping/>
   </p:clrMapOvr>
+  <mc:AlternateContent xmlns:mc="http://schemas.openxmlformats.org/markup-compatibility/2006">
+    <mc:Choice xmlns:p14="http://schemas.microsoft.com/office/powerpoint/2010/main" Requires="p14">
+      <p:transition spd="slow" p14:dur="2000"/>
+    </mc:Choice>
+    <mc:Fallback>
+      <p:transition spd="slow"/>
+    </mc:Fallback>
+  </mc:AlternateContent>
+  <p:timing>
+    <p:tnLst>
+      <p:par>
+        <p:cTn id="1" dur="indefinite" restart="never" nodeType="tmRoot"/>
+      </p:par>
+    </p:tnLst>
+  </p:timing>
 </p:sld>
 </file>
 
 <file path=ppt/slides/slide32.xml><?xml version="1.0" encoding="utf-8"?>
-<p:sld xmlns:a="http://schemas.openxmlformats.org/drawingml/2006/main" xmlns:r="http://schemas.openxmlformats.org/officeDocument/2006/relationships" xmlns:p="http://schemas.openxmlformats.org/presentationml/2006/main">
+<p:sld xmlns:a="http://schemas.openxmlformats.org/drawingml/2006/main" xmlns:r="http://schemas.openxmlformats.org/officeDocument/2006/relationships" xmlns:p="http://schemas.openxmlformats.org/presentationml/2006/main" xmlns:p14="http://schemas.microsoft.com/office/powerpoint/2010/main">
   <p:cSld>
     <p:spTree>
       <p:nvGrpSpPr>
@@ -24657,7 +26623,12 @@
             <p:ph type="title"/>
           </p:nvPr>
         </p:nvSpPr>
-        <p:spPr/>
+        <p:spPr>
+          <a:xfrm>
+            <a:off x="590550" y="146050"/>
+            <a:ext cx="10363835" cy="762635"/>
+          </a:xfrm>
+        </p:spPr>
         <p:txBody>
           <a:bodyPr/>
           <a:lstStyle/>
@@ -24689,7 +26660,12 @@
             <p:ph type="body" idx="1"/>
           </p:nvPr>
         </p:nvSpPr>
-        <p:spPr/>
+        <p:spPr>
+          <a:xfrm>
+            <a:off x="592455" y="1152525"/>
+            <a:ext cx="10363835" cy="5020310"/>
+          </a:xfrm>
+        </p:spPr>
         <p:txBody>
           <a:bodyPr/>
           <a:lstStyle/>
@@ -24761,7 +26737,12 @@
             <p:ph type="sldNum" idx="12"/>
           </p:nvPr>
         </p:nvSpPr>
-        <p:spPr/>
+        <p:spPr>
+          <a:xfrm>
+            <a:off x="9482455" y="6419850"/>
+            <a:ext cx="2540635" cy="305435"/>
+          </a:xfrm>
+        </p:spPr>
         <p:txBody>
           <a:bodyPr/>
           <a:lstStyle/>
@@ -24797,8 +26778,8 @@
         </p:nvSpPr>
         <p:spPr>
           <a:xfrm>
-            <a:off x="1147643" y="2576339"/>
-            <a:ext cx="6295377" cy="3477875"/>
+            <a:off x="1147445" y="2576195"/>
+            <a:ext cx="6295390" cy="3477895"/>
           </a:xfrm>
           <a:prstGeom prst="rect">
             <a:avLst/>
@@ -25263,7 +27244,7 @@
       </p:sp>
       <p:pic>
         <p:nvPicPr>
-          <p:cNvPr id="13" name="그림 12" descr="텍스트, 스크린샷, 폰트, 라인이(가) 표시된 사진&#10;&#10;AI가 생성한 콘텐츠는 부정확할 수 있습니다.">
+          <p:cNvPr id="13" name="그림 12">
             <a:extLst>
               <a:ext uri="{FF2B5EF4-FFF2-40B4-BE49-F238E27FC236}">
                 <a16:creationId xmlns:a16="http://schemas.microsoft.com/office/drawing/2014/main" id="{6AB8C8F6-3839-C7BA-4935-EEF5A9866232}"/>
@@ -25283,14 +27264,53 @@
         </p:blipFill>
         <p:spPr>
           <a:xfrm>
-            <a:off x="7932298" y="2554216"/>
-            <a:ext cx="3021453" cy="1259911"/>
+            <a:off x="7932420" y="2553970"/>
+            <a:ext cx="3021330" cy="1259840"/>
           </a:xfrm>
           <a:prstGeom prst="rect">
             <a:avLst/>
           </a:prstGeom>
         </p:spPr>
       </p:pic>
+      <mc:AlternateContent xmlns:mc="http://schemas.openxmlformats.org/markup-compatibility/2006" xmlns:p14="http://schemas.microsoft.com/office/powerpoint/2010/main">
+        <mc:Choice Requires="p14">
+          <p:contentPart p14:bwMode="auto" r:id="rId3">
+            <p14:nvContentPartPr>
+              <p14:cNvPr id="14" name="잉크 8"/>
+              <p14:cNvContentPartPr/>
+              <p14:nvPr/>
+            </p14:nvContentPartPr>
+            <p14:xfrm>
+              <a:off x="3032760" y="3421380"/>
+              <a:ext cx="7620" cy="7620"/>
+            </p14:xfrm>
+          </p:contentPart>
+        </mc:Choice>
+        <mc:Fallback>
+          <p:pic>
+            <p:nvPicPr>
+              <p:cNvPr id="14" name="잉크 8"/>
+              <p:cNvPicPr/>
+              <p:nvPr/>
+            </p:nvPicPr>
+            <p:blipFill>
+              <a:blip r:embed="rId4"/>
+              <a:stretch>
+                <a:fillRect/>
+              </a:stretch>
+            </p:blipFill>
+            <p:spPr>
+              <a:xfrm>
+                <a:off x="3032760" y="3421380"/>
+                <a:ext cx="7620" cy="7620"/>
+              </a:xfrm>
+              <a:prstGeom prst="rect">
+                <a:avLst/>
+              </a:prstGeom>
+            </p:spPr>
+          </p:pic>
+        </mc:Fallback>
+      </mc:AlternateContent>
     </p:spTree>
     <p:extLst>
       <p:ext uri="{BB962C8B-B14F-4D97-AF65-F5344CB8AC3E}">
@@ -25301,11 +27321,26 @@
   <p:clrMapOvr>
     <a:masterClrMapping/>
   </p:clrMapOvr>
+  <mc:AlternateContent xmlns:mc="http://schemas.openxmlformats.org/markup-compatibility/2006">
+    <mc:Choice xmlns:p14="http://schemas.microsoft.com/office/powerpoint/2010/main" Requires="p14">
+      <p:transition spd="slow" p14:dur="2000"/>
+    </mc:Choice>
+    <mc:Fallback>
+      <p:transition spd="slow"/>
+    </mc:Fallback>
+  </mc:AlternateContent>
+  <p:timing>
+    <p:tnLst>
+      <p:par>
+        <p:cTn id="1" dur="indefinite" restart="never" nodeType="tmRoot"/>
+      </p:par>
+    </p:tnLst>
+  </p:timing>
 </p:sld>
 </file>
 
 <file path=ppt/slides/slide33.xml><?xml version="1.0" encoding="utf-8"?>
-<p:sld xmlns:a="http://schemas.openxmlformats.org/drawingml/2006/main" xmlns:r="http://schemas.openxmlformats.org/officeDocument/2006/relationships" xmlns:p="http://schemas.openxmlformats.org/presentationml/2006/main">
+<p:sld xmlns:a="http://schemas.openxmlformats.org/drawingml/2006/main" xmlns:r="http://schemas.openxmlformats.org/officeDocument/2006/relationships" xmlns:p="http://schemas.openxmlformats.org/presentationml/2006/main" xmlns:p14="http://schemas.microsoft.com/office/powerpoint/2010/main">
   <p:cSld>
     <p:spTree>
       <p:nvGrpSpPr>
@@ -25337,7 +27372,12 @@
             <p:ph type="title"/>
           </p:nvPr>
         </p:nvSpPr>
-        <p:spPr/>
+        <p:spPr>
+          <a:xfrm>
+            <a:off x="590550" y="146050"/>
+            <a:ext cx="10363835" cy="762635"/>
+          </a:xfrm>
+        </p:spPr>
         <p:txBody>
           <a:bodyPr/>
           <a:lstStyle/>
@@ -25369,7 +27409,12 @@
             <p:ph type="body" idx="1"/>
           </p:nvPr>
         </p:nvSpPr>
-        <p:spPr/>
+        <p:spPr>
+          <a:xfrm>
+            <a:off x="592455" y="1152525"/>
+            <a:ext cx="10363835" cy="5020310"/>
+          </a:xfrm>
+        </p:spPr>
         <p:txBody>
           <a:bodyPr>
             <a:normAutofit fontScale="70000" lnSpcReduction="20000"/>
@@ -25682,7 +27727,12 @@
             <p:ph type="sldNum" idx="12"/>
           </p:nvPr>
         </p:nvSpPr>
-        <p:spPr/>
+        <p:spPr>
+          <a:xfrm>
+            <a:off x="9482455" y="6419850"/>
+            <a:ext cx="2540635" cy="305435"/>
+          </a:xfrm>
+        </p:spPr>
         <p:txBody>
           <a:bodyPr/>
           <a:lstStyle/>
@@ -25704,6 +27754,1449 @@
           </a:p>
         </p:txBody>
       </p:sp>
+      <mc:AlternateContent xmlns:mc="http://schemas.openxmlformats.org/markup-compatibility/2006" xmlns:p14="http://schemas.microsoft.com/office/powerpoint/2010/main">
+        <mc:Choice Requires="p14">
+          <p:contentPart p14:bwMode="auto" r:id="rId1">
+            <p14:nvContentPartPr>
+              <p14:cNvPr id="5" name="잉크 9"/>
+              <p14:cNvContentPartPr/>
+              <p14:nvPr/>
+            </p14:nvContentPartPr>
+            <p14:xfrm>
+              <a:off x="800100" y="1562100"/>
+              <a:ext cx="525780" cy="4198620"/>
+            </p14:xfrm>
+          </p:contentPart>
+        </mc:Choice>
+        <mc:Fallback>
+          <p:pic>
+            <p:nvPicPr>
+              <p:cNvPr id="5" name="잉크 9"/>
+              <p:cNvPicPr/>
+              <p:nvPr/>
+            </p:nvPicPr>
+            <p:blipFill>
+              <a:blip r:embed="rId2"/>
+              <a:stretch>
+                <a:fillRect/>
+              </a:stretch>
+            </p:blipFill>
+            <p:spPr>
+              <a:xfrm>
+                <a:off x="800100" y="1562100"/>
+                <a:ext cx="525780" cy="4198620"/>
+              </a:xfrm>
+              <a:prstGeom prst="rect">
+                <a:avLst/>
+              </a:prstGeom>
+            </p:spPr>
+          </p:pic>
+        </mc:Fallback>
+      </mc:AlternateContent>
+      <mc:AlternateContent xmlns:mc="http://schemas.openxmlformats.org/markup-compatibility/2006" xmlns:p14="http://schemas.microsoft.com/office/powerpoint/2010/main">
+        <mc:Choice Requires="p14">
+          <p:contentPart p14:bwMode="auto" r:id="rId3">
+            <p14:nvContentPartPr>
+              <p14:cNvPr id="6" name="잉크 10"/>
+              <p14:cNvContentPartPr/>
+              <p14:nvPr/>
+            </p14:nvContentPartPr>
+            <p14:xfrm>
+              <a:off x="495300" y="2065020"/>
+              <a:ext cx="312420" cy="434340"/>
+            </p14:xfrm>
+          </p:contentPart>
+        </mc:Choice>
+        <mc:Fallback>
+          <p:pic>
+            <p:nvPicPr>
+              <p:cNvPr id="6" name="잉크 10"/>
+              <p:cNvPicPr/>
+              <p:nvPr/>
+            </p:nvPicPr>
+            <p:blipFill>
+              <a:blip r:embed="rId4"/>
+              <a:stretch>
+                <a:fillRect/>
+              </a:stretch>
+            </p:blipFill>
+            <p:spPr>
+              <a:xfrm>
+                <a:off x="495300" y="2065020"/>
+                <a:ext cx="312420" cy="434340"/>
+              </a:xfrm>
+              <a:prstGeom prst="rect">
+                <a:avLst/>
+              </a:prstGeom>
+            </p:spPr>
+          </p:pic>
+        </mc:Fallback>
+      </mc:AlternateContent>
+      <mc:AlternateContent xmlns:mc="http://schemas.openxmlformats.org/markup-compatibility/2006" xmlns:p14="http://schemas.microsoft.com/office/powerpoint/2010/main">
+        <mc:Choice Requires="p14">
+          <p:contentPart p14:bwMode="auto" r:id="rId5">
+            <p14:nvContentPartPr>
+              <p14:cNvPr id="7" name="잉크 11"/>
+              <p14:cNvContentPartPr/>
+              <p14:nvPr/>
+            </p14:nvContentPartPr>
+            <p14:xfrm>
+              <a:off x="5783580" y="2842260"/>
+              <a:ext cx="220980" cy="350520"/>
+            </p14:xfrm>
+          </p:contentPart>
+        </mc:Choice>
+        <mc:Fallback>
+          <p:pic>
+            <p:nvPicPr>
+              <p:cNvPr id="7" name="잉크 11"/>
+              <p:cNvPicPr/>
+              <p:nvPr/>
+            </p:nvPicPr>
+            <p:blipFill>
+              <a:blip r:embed="rId6"/>
+              <a:stretch>
+                <a:fillRect/>
+              </a:stretch>
+            </p:blipFill>
+            <p:spPr>
+              <a:xfrm>
+                <a:off x="5783580" y="2842260"/>
+                <a:ext cx="220980" cy="350520"/>
+              </a:xfrm>
+              <a:prstGeom prst="rect">
+                <a:avLst/>
+              </a:prstGeom>
+            </p:spPr>
+          </p:pic>
+        </mc:Fallback>
+      </mc:AlternateContent>
+      <mc:AlternateContent xmlns:mc="http://schemas.openxmlformats.org/markup-compatibility/2006" xmlns:p14="http://schemas.microsoft.com/office/powerpoint/2010/main">
+        <mc:Choice Requires="p14">
+          <p:contentPart p14:bwMode="auto" r:id="rId7">
+            <p14:nvContentPartPr>
+              <p14:cNvPr id="8" name="잉크 12"/>
+              <p14:cNvContentPartPr/>
+              <p14:nvPr/>
+            </p14:nvContentPartPr>
+            <p14:xfrm>
+              <a:off x="6156960" y="2872740"/>
+              <a:ext cx="213360" cy="320040"/>
+            </p14:xfrm>
+          </p:contentPart>
+        </mc:Choice>
+        <mc:Fallback>
+          <p:pic>
+            <p:nvPicPr>
+              <p:cNvPr id="8" name="잉크 12"/>
+              <p:cNvPicPr/>
+              <p:nvPr/>
+            </p:nvPicPr>
+            <p:blipFill>
+              <a:blip r:embed="rId8"/>
+              <a:stretch>
+                <a:fillRect/>
+              </a:stretch>
+            </p:blipFill>
+            <p:spPr>
+              <a:xfrm>
+                <a:off x="6156960" y="2872740"/>
+                <a:ext cx="213360" cy="320040"/>
+              </a:xfrm>
+              <a:prstGeom prst="rect">
+                <a:avLst/>
+              </a:prstGeom>
+            </p:spPr>
+          </p:pic>
+        </mc:Fallback>
+      </mc:AlternateContent>
+      <mc:AlternateContent xmlns:mc="http://schemas.openxmlformats.org/markup-compatibility/2006" xmlns:p14="http://schemas.microsoft.com/office/powerpoint/2010/main">
+        <mc:Choice Requires="p14">
+          <p:contentPart p14:bwMode="auto" r:id="rId9">
+            <p14:nvContentPartPr>
+              <p14:cNvPr id="9" name="잉크 13"/>
+              <p14:cNvContentPartPr/>
+              <p14:nvPr/>
+            </p14:nvContentPartPr>
+            <p14:xfrm>
+              <a:off x="6400800" y="2933700"/>
+              <a:ext cx="121920" cy="251460"/>
+            </p14:xfrm>
+          </p:contentPart>
+        </mc:Choice>
+        <mc:Fallback>
+          <p:pic>
+            <p:nvPicPr>
+              <p:cNvPr id="9" name="잉크 13"/>
+              <p:cNvPicPr/>
+              <p:nvPr/>
+            </p:nvPicPr>
+            <p:blipFill>
+              <a:blip r:embed="rId10"/>
+              <a:stretch>
+                <a:fillRect/>
+              </a:stretch>
+            </p:blipFill>
+            <p:spPr>
+              <a:xfrm>
+                <a:off x="6400800" y="2933700"/>
+                <a:ext cx="121920" cy="251460"/>
+              </a:xfrm>
+              <a:prstGeom prst="rect">
+                <a:avLst/>
+              </a:prstGeom>
+            </p:spPr>
+          </p:pic>
+        </mc:Fallback>
+      </mc:AlternateContent>
+      <mc:AlternateContent xmlns:mc="http://schemas.openxmlformats.org/markup-compatibility/2006" xmlns:p14="http://schemas.microsoft.com/office/powerpoint/2010/main">
+        <mc:Choice Requires="p14">
+          <p:contentPart p14:bwMode="auto" r:id="rId11">
+            <p14:nvContentPartPr>
+              <p14:cNvPr id="10" name="잉크 14"/>
+              <p14:cNvContentPartPr/>
+              <p14:nvPr/>
+            </p14:nvContentPartPr>
+            <p14:xfrm>
+              <a:off x="6553200" y="2895600"/>
+              <a:ext cx="137160" cy="106680"/>
+            </p14:xfrm>
+          </p:contentPart>
+        </mc:Choice>
+        <mc:Fallback>
+          <p:pic>
+            <p:nvPicPr>
+              <p:cNvPr id="10" name="잉크 14"/>
+              <p:cNvPicPr/>
+              <p:nvPr/>
+            </p:nvPicPr>
+            <p:blipFill>
+              <a:blip r:embed="rId12"/>
+              <a:stretch>
+                <a:fillRect/>
+              </a:stretch>
+            </p:blipFill>
+            <p:spPr>
+              <a:xfrm>
+                <a:off x="6553200" y="2895600"/>
+                <a:ext cx="137160" cy="106680"/>
+              </a:xfrm>
+              <a:prstGeom prst="rect">
+                <a:avLst/>
+              </a:prstGeom>
+            </p:spPr>
+          </p:pic>
+        </mc:Fallback>
+      </mc:AlternateContent>
+      <mc:AlternateContent xmlns:mc="http://schemas.openxmlformats.org/markup-compatibility/2006" xmlns:p14="http://schemas.microsoft.com/office/powerpoint/2010/main">
+        <mc:Choice Requires="p14">
+          <p:contentPart p14:bwMode="auto" r:id="rId13">
+            <p14:nvContentPartPr>
+              <p14:cNvPr id="11" name="잉크 15"/>
+              <p14:cNvContentPartPr/>
+              <p14:nvPr/>
+            </p14:nvContentPartPr>
+            <p14:xfrm>
+              <a:off x="6751320" y="2895600"/>
+              <a:ext cx="7620" cy="396240"/>
+            </p14:xfrm>
+          </p:contentPart>
+        </mc:Choice>
+        <mc:Fallback>
+          <p:pic>
+            <p:nvPicPr>
+              <p:cNvPr id="11" name="잉크 15"/>
+              <p:cNvPicPr/>
+              <p:nvPr/>
+            </p:nvPicPr>
+            <p:blipFill>
+              <a:blip r:embed="rId14"/>
+              <a:stretch>
+                <a:fillRect/>
+              </a:stretch>
+            </p:blipFill>
+            <p:spPr>
+              <a:xfrm>
+                <a:off x="6751320" y="2895600"/>
+                <a:ext cx="7620" cy="396240"/>
+              </a:xfrm>
+              <a:prstGeom prst="rect">
+                <a:avLst/>
+              </a:prstGeom>
+            </p:spPr>
+          </p:pic>
+        </mc:Fallback>
+      </mc:AlternateContent>
+      <mc:AlternateContent xmlns:mc="http://schemas.openxmlformats.org/markup-compatibility/2006" xmlns:p14="http://schemas.microsoft.com/office/powerpoint/2010/main">
+        <mc:Choice Requires="p14">
+          <p:contentPart p14:bwMode="auto" r:id="rId15">
+            <p14:nvContentPartPr>
+              <p14:cNvPr id="12" name="잉크 16"/>
+              <p14:cNvContentPartPr/>
+              <p14:nvPr/>
+            </p14:nvContentPartPr>
+            <p14:xfrm>
+              <a:off x="6918960" y="2933700"/>
+              <a:ext cx="198120" cy="289560"/>
+            </p14:xfrm>
+          </p:contentPart>
+        </mc:Choice>
+        <mc:Fallback>
+          <p:pic>
+            <p:nvPicPr>
+              <p:cNvPr id="12" name="잉크 16"/>
+              <p:cNvPicPr/>
+              <p:nvPr/>
+            </p:nvPicPr>
+            <p:blipFill>
+              <a:blip r:embed="rId16"/>
+              <a:stretch>
+                <a:fillRect/>
+              </a:stretch>
+            </p:blipFill>
+            <p:spPr>
+              <a:xfrm>
+                <a:off x="6918960" y="2933700"/>
+                <a:ext cx="198120" cy="289560"/>
+              </a:xfrm>
+              <a:prstGeom prst="rect">
+                <a:avLst/>
+              </a:prstGeom>
+            </p:spPr>
+          </p:pic>
+        </mc:Fallback>
+      </mc:AlternateContent>
+      <mc:AlternateContent xmlns:mc="http://schemas.openxmlformats.org/markup-compatibility/2006" xmlns:p14="http://schemas.microsoft.com/office/powerpoint/2010/main">
+        <mc:Choice Requires="p14">
+          <p:contentPart p14:bwMode="auto" r:id="rId17">
+            <p14:nvContentPartPr>
+              <p14:cNvPr id="13" name="잉크 17"/>
+              <p14:cNvContentPartPr/>
+              <p14:nvPr/>
+            </p14:nvContentPartPr>
+            <p14:xfrm>
+              <a:off x="7178040" y="3048000"/>
+              <a:ext cx="106680" cy="7620"/>
+            </p14:xfrm>
+          </p:contentPart>
+        </mc:Choice>
+        <mc:Fallback>
+          <p:pic>
+            <p:nvPicPr>
+              <p:cNvPr id="13" name="잉크 17"/>
+              <p:cNvPicPr/>
+              <p:nvPr/>
+            </p:nvPicPr>
+            <p:blipFill>
+              <a:blip r:embed="rId18"/>
+              <a:stretch>
+                <a:fillRect/>
+              </a:stretch>
+            </p:blipFill>
+            <p:spPr>
+              <a:xfrm>
+                <a:off x="7178040" y="3048000"/>
+                <a:ext cx="106680" cy="7620"/>
+              </a:xfrm>
+              <a:prstGeom prst="rect">
+                <a:avLst/>
+              </a:prstGeom>
+            </p:spPr>
+          </p:pic>
+        </mc:Fallback>
+      </mc:AlternateContent>
+      <mc:AlternateContent xmlns:mc="http://schemas.openxmlformats.org/markup-compatibility/2006" xmlns:p14="http://schemas.microsoft.com/office/powerpoint/2010/main">
+        <mc:Choice Requires="p14">
+          <p:contentPart p14:bwMode="auto" r:id="rId19">
+            <p14:nvContentPartPr>
+              <p14:cNvPr id="14" name="잉크 18"/>
+              <p14:cNvContentPartPr/>
+              <p14:nvPr/>
+            </p14:nvContentPartPr>
+            <p14:xfrm>
+              <a:off x="7269480" y="3009900"/>
+              <a:ext cx="30480" cy="228600"/>
+            </p14:xfrm>
+          </p:contentPart>
+        </mc:Choice>
+        <mc:Fallback>
+          <p:pic>
+            <p:nvPicPr>
+              <p:cNvPr id="14" name="잉크 18"/>
+              <p:cNvPicPr/>
+              <p:nvPr/>
+            </p:nvPicPr>
+            <p:blipFill>
+              <a:blip r:embed="rId20"/>
+              <a:stretch>
+                <a:fillRect/>
+              </a:stretch>
+            </p:blipFill>
+            <p:spPr>
+              <a:xfrm>
+                <a:off x="7269480" y="3009900"/>
+                <a:ext cx="30480" cy="228600"/>
+              </a:xfrm>
+              <a:prstGeom prst="rect">
+                <a:avLst/>
+              </a:prstGeom>
+            </p:spPr>
+          </p:pic>
+        </mc:Fallback>
+      </mc:AlternateContent>
+      <mc:AlternateContent xmlns:mc="http://schemas.openxmlformats.org/markup-compatibility/2006" xmlns:p14="http://schemas.microsoft.com/office/powerpoint/2010/main">
+        <mc:Choice Requires="p14">
+          <p:contentPart p14:bwMode="auto" r:id="rId21">
+            <p14:nvContentPartPr>
+              <p14:cNvPr id="15" name="잉크 19"/>
+              <p14:cNvContentPartPr/>
+              <p14:nvPr/>
+            </p14:nvContentPartPr>
+            <p14:xfrm>
+              <a:off x="7048500" y="3253740"/>
+              <a:ext cx="213360" cy="114300"/>
+            </p14:xfrm>
+          </p:contentPart>
+        </mc:Choice>
+        <mc:Fallback>
+          <p:pic>
+            <p:nvPicPr>
+              <p:cNvPr id="15" name="잉크 19"/>
+              <p:cNvPicPr/>
+              <p:nvPr/>
+            </p:nvPicPr>
+            <p:blipFill>
+              <a:blip r:embed="rId22"/>
+              <a:stretch>
+                <a:fillRect/>
+              </a:stretch>
+            </p:blipFill>
+            <p:spPr>
+              <a:xfrm>
+                <a:off x="7048500" y="3253740"/>
+                <a:ext cx="213360" cy="114300"/>
+              </a:xfrm>
+              <a:prstGeom prst="rect">
+                <a:avLst/>
+              </a:prstGeom>
+            </p:spPr>
+          </p:pic>
+        </mc:Fallback>
+      </mc:AlternateContent>
+      <mc:AlternateContent xmlns:mc="http://schemas.openxmlformats.org/markup-compatibility/2006" xmlns:p14="http://schemas.microsoft.com/office/powerpoint/2010/main">
+        <mc:Choice Requires="p14">
+          <p:contentPart p14:bwMode="auto" r:id="rId23">
+            <p14:nvContentPartPr>
+              <p14:cNvPr id="16" name="잉크 20"/>
+              <p14:cNvContentPartPr/>
+              <p14:nvPr/>
+            </p14:nvContentPartPr>
+            <p14:xfrm>
+              <a:off x="194945" y="2705100"/>
+              <a:ext cx="181610" cy="215900"/>
+            </p14:xfrm>
+          </p:contentPart>
+        </mc:Choice>
+        <mc:Fallback>
+          <p:pic>
+            <p:nvPicPr>
+              <p:cNvPr id="16" name="잉크 20"/>
+              <p:cNvPicPr/>
+              <p:nvPr/>
+            </p:nvPicPr>
+            <p:blipFill>
+              <a:blip r:embed="rId24"/>
+              <a:stretch>
+                <a:fillRect/>
+              </a:stretch>
+            </p:blipFill>
+            <p:spPr>
+              <a:xfrm>
+                <a:off x="194945" y="2705100"/>
+                <a:ext cx="181610" cy="215900"/>
+              </a:xfrm>
+              <a:prstGeom prst="rect">
+                <a:avLst/>
+              </a:prstGeom>
+            </p:spPr>
+          </p:pic>
+        </mc:Fallback>
+      </mc:AlternateContent>
+      <mc:AlternateContent xmlns:mc="http://schemas.openxmlformats.org/markup-compatibility/2006" xmlns:p14="http://schemas.microsoft.com/office/powerpoint/2010/main">
+        <mc:Choice Requires="p14">
+          <p:contentPart p14:bwMode="auto" r:id="rId25">
+            <p14:nvContentPartPr>
+              <p14:cNvPr id="17" name="잉크 21"/>
+              <p14:cNvContentPartPr/>
+              <p14:nvPr/>
+            </p14:nvContentPartPr>
+            <p14:xfrm>
+              <a:off x="338455" y="2658745"/>
+              <a:ext cx="190500" cy="279400"/>
+            </p14:xfrm>
+          </p:contentPart>
+        </mc:Choice>
+        <mc:Fallback>
+          <p:pic>
+            <p:nvPicPr>
+              <p:cNvPr id="17" name="잉크 21"/>
+              <p:cNvPicPr/>
+              <p:nvPr/>
+            </p:nvPicPr>
+            <p:blipFill>
+              <a:blip r:embed="rId26"/>
+              <a:stretch>
+                <a:fillRect/>
+              </a:stretch>
+            </p:blipFill>
+            <p:spPr>
+              <a:xfrm>
+                <a:off x="338455" y="2658745"/>
+                <a:ext cx="190500" cy="279400"/>
+              </a:xfrm>
+              <a:prstGeom prst="rect">
+                <a:avLst/>
+              </a:prstGeom>
+            </p:spPr>
+          </p:pic>
+        </mc:Fallback>
+      </mc:AlternateContent>
+      <mc:AlternateContent xmlns:mc="http://schemas.openxmlformats.org/markup-compatibility/2006" xmlns:p14="http://schemas.microsoft.com/office/powerpoint/2010/main">
+        <mc:Choice Requires="p14">
+          <p:contentPart p14:bwMode="auto" r:id="rId27">
+            <p14:nvContentPartPr>
+              <p14:cNvPr id="18" name="잉크 22"/>
+              <p14:cNvContentPartPr/>
+              <p14:nvPr/>
+            </p14:nvContentPartPr>
+            <p14:xfrm>
+              <a:off x="588645" y="2646045"/>
+              <a:ext cx="262255" cy="325755"/>
+            </p14:xfrm>
+          </p:contentPart>
+        </mc:Choice>
+        <mc:Fallback>
+          <p:pic>
+            <p:nvPicPr>
+              <p:cNvPr id="18" name="잉크 22"/>
+              <p:cNvPicPr/>
+              <p:nvPr/>
+            </p:nvPicPr>
+            <p:blipFill>
+              <a:blip r:embed="rId28"/>
+              <a:stretch>
+                <a:fillRect/>
+              </a:stretch>
+            </p:blipFill>
+            <p:spPr>
+              <a:xfrm>
+                <a:off x="588645" y="2646045"/>
+                <a:ext cx="262255" cy="325755"/>
+              </a:xfrm>
+              <a:prstGeom prst="rect">
+                <a:avLst/>
+              </a:prstGeom>
+            </p:spPr>
+          </p:pic>
+        </mc:Fallback>
+      </mc:AlternateContent>
+      <mc:AlternateContent xmlns:mc="http://schemas.openxmlformats.org/markup-compatibility/2006" xmlns:p14="http://schemas.microsoft.com/office/powerpoint/2010/main">
+        <mc:Choice Requires="p14">
+          <p:contentPart p14:bwMode="auto" r:id="rId29">
+            <p14:nvContentPartPr>
+              <p14:cNvPr id="19" name="잉크 23"/>
+              <p14:cNvContentPartPr/>
+              <p14:nvPr/>
+            </p14:nvContentPartPr>
+            <p14:xfrm>
+              <a:off x="2887980" y="5798820"/>
+              <a:ext cx="297180" cy="266700"/>
+            </p14:xfrm>
+          </p:contentPart>
+        </mc:Choice>
+        <mc:Fallback>
+          <p:pic>
+            <p:nvPicPr>
+              <p:cNvPr id="19" name="잉크 23"/>
+              <p:cNvPicPr/>
+              <p:nvPr/>
+            </p:nvPicPr>
+            <p:blipFill>
+              <a:blip r:embed="rId30"/>
+              <a:stretch>
+                <a:fillRect/>
+              </a:stretch>
+            </p:blipFill>
+            <p:spPr>
+              <a:xfrm>
+                <a:off x="2887980" y="5798820"/>
+                <a:ext cx="297180" cy="266700"/>
+              </a:xfrm>
+              <a:prstGeom prst="rect">
+                <a:avLst/>
+              </a:prstGeom>
+            </p:spPr>
+          </p:pic>
+        </mc:Fallback>
+      </mc:AlternateContent>
+      <mc:AlternateContent xmlns:mc="http://schemas.openxmlformats.org/markup-compatibility/2006" xmlns:p14="http://schemas.microsoft.com/office/powerpoint/2010/main">
+        <mc:Choice Requires="p14">
+          <p:contentPart p14:bwMode="auto" r:id="rId31">
+            <p14:nvContentPartPr>
+              <p14:cNvPr id="20" name="잉크 24"/>
+              <p14:cNvContentPartPr/>
+              <p14:nvPr/>
+            </p14:nvContentPartPr>
+            <p14:xfrm>
+              <a:off x="3248660" y="5878830"/>
+              <a:ext cx="109855" cy="61595"/>
+            </p14:xfrm>
+          </p:contentPart>
+        </mc:Choice>
+        <mc:Fallback>
+          <p:pic>
+            <p:nvPicPr>
+              <p:cNvPr id="20" name="잉크 24"/>
+              <p:cNvPicPr/>
+              <p:nvPr/>
+            </p:nvPicPr>
+            <p:blipFill>
+              <a:blip r:embed="rId32"/>
+              <a:stretch>
+                <a:fillRect/>
+              </a:stretch>
+            </p:blipFill>
+            <p:spPr>
+              <a:xfrm>
+                <a:off x="3248660" y="5878830"/>
+                <a:ext cx="109855" cy="61595"/>
+              </a:xfrm>
+              <a:prstGeom prst="rect">
+                <a:avLst/>
+              </a:prstGeom>
+            </p:spPr>
+          </p:pic>
+        </mc:Fallback>
+      </mc:AlternateContent>
+      <mc:AlternateContent xmlns:mc="http://schemas.openxmlformats.org/markup-compatibility/2006" xmlns:p14="http://schemas.microsoft.com/office/powerpoint/2010/main">
+        <mc:Choice Requires="p14">
+          <p:contentPart p14:bwMode="auto" r:id="rId33">
+            <p14:nvContentPartPr>
+              <p14:cNvPr id="21" name="잉크 25"/>
+              <p14:cNvContentPartPr/>
+              <p14:nvPr/>
+            </p14:nvContentPartPr>
+            <p14:xfrm>
+              <a:off x="3429000" y="5881370"/>
+              <a:ext cx="13970" cy="140970"/>
+            </p14:xfrm>
+          </p:contentPart>
+        </mc:Choice>
+        <mc:Fallback>
+          <p:pic>
+            <p:nvPicPr>
+              <p:cNvPr id="21" name="잉크 25"/>
+              <p:cNvPicPr/>
+              <p:nvPr/>
+            </p:nvPicPr>
+            <p:blipFill>
+              <a:blip r:embed="rId34"/>
+              <a:stretch>
+                <a:fillRect/>
+              </a:stretch>
+            </p:blipFill>
+            <p:spPr>
+              <a:xfrm>
+                <a:off x="3429000" y="5881370"/>
+                <a:ext cx="13970" cy="140970"/>
+              </a:xfrm>
+              <a:prstGeom prst="rect">
+                <a:avLst/>
+              </a:prstGeom>
+            </p:spPr>
+          </p:pic>
+        </mc:Fallback>
+      </mc:AlternateContent>
+      <mc:AlternateContent xmlns:mc="http://schemas.openxmlformats.org/markup-compatibility/2006" xmlns:p14="http://schemas.microsoft.com/office/powerpoint/2010/main">
+        <mc:Choice Requires="p14">
+          <p:contentPart p14:bwMode="auto" r:id="rId35">
+            <p14:nvContentPartPr>
+              <p14:cNvPr id="22" name="잉크 26"/>
+              <p14:cNvContentPartPr/>
+              <p14:nvPr/>
+            </p14:nvContentPartPr>
+            <p14:xfrm>
+              <a:off x="3315970" y="6033770"/>
+              <a:ext cx="118745" cy="118745"/>
+            </p14:xfrm>
+          </p:contentPart>
+        </mc:Choice>
+        <mc:Fallback>
+          <p:pic>
+            <p:nvPicPr>
+              <p:cNvPr id="22" name="잉크 26"/>
+              <p:cNvPicPr/>
+              <p:nvPr/>
+            </p:nvPicPr>
+            <p:blipFill>
+              <a:blip r:embed="rId36"/>
+              <a:stretch>
+                <a:fillRect/>
+              </a:stretch>
+            </p:blipFill>
+            <p:spPr>
+              <a:xfrm>
+                <a:off x="3315970" y="6033770"/>
+                <a:ext cx="118745" cy="118745"/>
+              </a:xfrm>
+              <a:prstGeom prst="rect">
+                <a:avLst/>
+              </a:prstGeom>
+            </p:spPr>
+          </p:pic>
+        </mc:Fallback>
+      </mc:AlternateContent>
+      <mc:AlternateContent xmlns:mc="http://schemas.openxmlformats.org/markup-compatibility/2006" xmlns:p14="http://schemas.microsoft.com/office/powerpoint/2010/main">
+        <mc:Choice Requires="p14">
+          <p:contentPart p14:bwMode="auto" r:id="rId37">
+            <p14:nvContentPartPr>
+              <p14:cNvPr id="23" name="잉크 27"/>
+              <p14:cNvContentPartPr/>
+              <p14:nvPr/>
+            </p14:nvContentPartPr>
+            <p14:xfrm>
+              <a:off x="3361690" y="6098540"/>
+              <a:ext cx="61595" cy="0"/>
+            </p14:xfrm>
+          </p:contentPart>
+        </mc:Choice>
+        <mc:Fallback>
+          <p:pic>
+            <p:nvPicPr>
+              <p:cNvPr id="23" name="잉크 27"/>
+              <p:cNvPicPr/>
+              <p:nvPr/>
+            </p:nvPicPr>
+            <p:blipFill>
+              <a:blip r:embed="rId38"/>
+              <a:stretch>
+                <a:fillRect/>
+              </a:stretch>
+            </p:blipFill>
+            <p:spPr>
+              <a:xfrm>
+                <a:off x="3361690" y="6098540"/>
+                <a:ext cx="61595" cy="0"/>
+              </a:xfrm>
+              <a:prstGeom prst="rect">
+                <a:avLst/>
+              </a:prstGeom>
+            </p:spPr>
+          </p:pic>
+        </mc:Fallback>
+      </mc:AlternateContent>
+      <mc:AlternateContent xmlns:mc="http://schemas.openxmlformats.org/markup-compatibility/2006" xmlns:p14="http://schemas.microsoft.com/office/powerpoint/2010/main">
+        <mc:Choice Requires="p14">
+          <p:contentPart p14:bwMode="auto" r:id="rId39">
+            <p14:nvContentPartPr>
+              <p14:cNvPr id="24" name="잉크 28"/>
+              <p14:cNvContentPartPr/>
+              <p14:nvPr/>
+            </p14:nvContentPartPr>
+            <p14:xfrm>
+              <a:off x="3556000" y="5934710"/>
+              <a:ext cx="110490" cy="104775"/>
+            </p14:xfrm>
+          </p:contentPart>
+        </mc:Choice>
+        <mc:Fallback>
+          <p:pic>
+            <p:nvPicPr>
+              <p:cNvPr id="24" name="잉크 28"/>
+              <p:cNvPicPr/>
+              <p:nvPr/>
+            </p:nvPicPr>
+            <p:blipFill>
+              <a:blip r:embed="rId40"/>
+              <a:stretch>
+                <a:fillRect/>
+              </a:stretch>
+            </p:blipFill>
+            <p:spPr>
+              <a:xfrm>
+                <a:off x="3556000" y="5934710"/>
+                <a:ext cx="110490" cy="104775"/>
+              </a:xfrm>
+              <a:prstGeom prst="rect">
+                <a:avLst/>
+              </a:prstGeom>
+            </p:spPr>
+          </p:pic>
+        </mc:Fallback>
+      </mc:AlternateContent>
+      <mc:AlternateContent xmlns:mc="http://schemas.openxmlformats.org/markup-compatibility/2006" xmlns:p14="http://schemas.microsoft.com/office/powerpoint/2010/main">
+        <mc:Choice Requires="p14">
+          <p:contentPart p14:bwMode="auto" r:id="rId41">
+            <p14:nvContentPartPr>
+              <p14:cNvPr id="25" name="잉크 29"/>
+              <p14:cNvContentPartPr/>
+              <p14:nvPr/>
+            </p14:nvContentPartPr>
+            <p14:xfrm>
+              <a:off x="3643630" y="5836285"/>
+              <a:ext cx="101600" cy="321945"/>
+            </p14:xfrm>
+          </p:contentPart>
+        </mc:Choice>
+        <mc:Fallback>
+          <p:pic>
+            <p:nvPicPr>
+              <p:cNvPr id="25" name="잉크 29"/>
+              <p:cNvPicPr/>
+              <p:nvPr/>
+            </p:nvPicPr>
+            <p:blipFill>
+              <a:blip r:embed="rId42"/>
+              <a:stretch>
+                <a:fillRect/>
+              </a:stretch>
+            </p:blipFill>
+            <p:spPr>
+              <a:xfrm>
+                <a:off x="3643630" y="5836285"/>
+                <a:ext cx="101600" cy="321945"/>
+              </a:xfrm>
+              <a:prstGeom prst="rect">
+                <a:avLst/>
+              </a:prstGeom>
+            </p:spPr>
+          </p:pic>
+        </mc:Fallback>
+      </mc:AlternateContent>
+      <mc:AlternateContent xmlns:mc="http://schemas.openxmlformats.org/markup-compatibility/2006" xmlns:p14="http://schemas.microsoft.com/office/powerpoint/2010/main">
+        <mc:Choice Requires="p14">
+          <p:contentPart p14:bwMode="auto" r:id="rId43">
+            <p14:nvContentPartPr>
+              <p14:cNvPr id="26" name="잉크 30"/>
+              <p14:cNvContentPartPr/>
+              <p14:nvPr/>
+            </p14:nvContentPartPr>
+            <p14:xfrm>
+              <a:off x="3615690" y="6129655"/>
+              <a:ext cx="30480" cy="113030"/>
+            </p14:xfrm>
+          </p:contentPart>
+        </mc:Choice>
+        <mc:Fallback>
+          <p:pic>
+            <p:nvPicPr>
+              <p:cNvPr id="26" name="잉크 30"/>
+              <p:cNvPicPr/>
+              <p:nvPr/>
+            </p:nvPicPr>
+            <p:blipFill>
+              <a:blip r:embed="rId44"/>
+              <a:stretch>
+                <a:fillRect/>
+              </a:stretch>
+            </p:blipFill>
+            <p:spPr>
+              <a:xfrm>
+                <a:off x="3615690" y="6129655"/>
+                <a:ext cx="30480" cy="113030"/>
+              </a:xfrm>
+              <a:prstGeom prst="rect">
+                <a:avLst/>
+              </a:prstGeom>
+            </p:spPr>
+          </p:pic>
+        </mc:Fallback>
+      </mc:AlternateContent>
+      <mc:AlternateContent xmlns:mc="http://schemas.openxmlformats.org/markup-compatibility/2006" xmlns:p14="http://schemas.microsoft.com/office/powerpoint/2010/main">
+        <mc:Choice Requires="p14">
+          <p:contentPart p14:bwMode="auto" r:id="rId45">
+            <p14:nvContentPartPr>
+              <p14:cNvPr id="27" name="잉크 31"/>
+              <p14:cNvContentPartPr/>
+              <p14:nvPr/>
+            </p14:nvContentPartPr>
+            <p14:xfrm>
+              <a:off x="3880485" y="5937885"/>
+              <a:ext cx="113030" cy="158115"/>
+            </p14:xfrm>
+          </p:contentPart>
+        </mc:Choice>
+        <mc:Fallback>
+          <p:pic>
+            <p:nvPicPr>
+              <p:cNvPr id="27" name="잉크 31"/>
+              <p:cNvPicPr/>
+              <p:nvPr/>
+            </p:nvPicPr>
+            <p:blipFill>
+              <a:blip r:embed="rId46"/>
+              <a:stretch>
+                <a:fillRect/>
+              </a:stretch>
+            </p:blipFill>
+            <p:spPr>
+              <a:xfrm>
+                <a:off x="3880485" y="5937885"/>
+                <a:ext cx="113030" cy="158115"/>
+              </a:xfrm>
+              <a:prstGeom prst="rect">
+                <a:avLst/>
+              </a:prstGeom>
+            </p:spPr>
+          </p:pic>
+        </mc:Fallback>
+      </mc:AlternateContent>
+      <mc:AlternateContent xmlns:mc="http://schemas.openxmlformats.org/markup-compatibility/2006" xmlns:p14="http://schemas.microsoft.com/office/powerpoint/2010/main">
+        <mc:Choice Requires="p14">
+          <p:contentPart p14:bwMode="auto" r:id="rId47">
+            <p14:nvContentPartPr>
+              <p14:cNvPr id="28" name="잉크 32"/>
+              <p14:cNvContentPartPr/>
+              <p14:nvPr/>
+            </p14:nvContentPartPr>
+            <p14:xfrm>
+              <a:off x="3855085" y="5920740"/>
+              <a:ext cx="175260" cy="208915"/>
+            </p14:xfrm>
+          </p:contentPart>
+        </mc:Choice>
+        <mc:Fallback>
+          <p:pic>
+            <p:nvPicPr>
+              <p:cNvPr id="28" name="잉크 32"/>
+              <p:cNvPicPr/>
+              <p:nvPr/>
+            </p:nvPicPr>
+            <p:blipFill>
+              <a:blip r:embed="rId48"/>
+              <a:stretch>
+                <a:fillRect/>
+              </a:stretch>
+            </p:blipFill>
+            <p:spPr>
+              <a:xfrm>
+                <a:off x="3855085" y="5920740"/>
+                <a:ext cx="175260" cy="208915"/>
+              </a:xfrm>
+              <a:prstGeom prst="rect">
+                <a:avLst/>
+              </a:prstGeom>
+            </p:spPr>
+          </p:pic>
+        </mc:Fallback>
+      </mc:AlternateContent>
+      <mc:AlternateContent xmlns:mc="http://schemas.openxmlformats.org/markup-compatibility/2006" xmlns:p14="http://schemas.microsoft.com/office/powerpoint/2010/main">
+        <mc:Choice Requires="p14">
+          <p:contentPart p14:bwMode="auto" r:id="rId49">
+            <p14:nvContentPartPr>
+              <p14:cNvPr id="29" name="잉크 33"/>
+              <p14:cNvContentPartPr/>
+              <p14:nvPr/>
+            </p14:nvContentPartPr>
+            <p14:xfrm>
+              <a:off x="4281170" y="5830570"/>
+              <a:ext cx="316230" cy="338455"/>
+            </p14:xfrm>
+          </p:contentPart>
+        </mc:Choice>
+        <mc:Fallback>
+          <p:pic>
+            <p:nvPicPr>
+              <p:cNvPr id="29" name="잉크 33"/>
+              <p:cNvPicPr/>
+              <p:nvPr/>
+            </p:nvPicPr>
+            <p:blipFill>
+              <a:blip r:embed="rId50"/>
+              <a:stretch>
+                <a:fillRect/>
+              </a:stretch>
+            </p:blipFill>
+            <p:spPr>
+              <a:xfrm>
+                <a:off x="4281170" y="5830570"/>
+                <a:ext cx="316230" cy="338455"/>
+              </a:xfrm>
+              <a:prstGeom prst="rect">
+                <a:avLst/>
+              </a:prstGeom>
+            </p:spPr>
+          </p:pic>
+        </mc:Fallback>
+      </mc:AlternateContent>
+      <mc:AlternateContent xmlns:mc="http://schemas.openxmlformats.org/markup-compatibility/2006" xmlns:p14="http://schemas.microsoft.com/office/powerpoint/2010/main">
+        <mc:Choice Requires="p14">
+          <p:contentPart p14:bwMode="auto" r:id="rId51">
+            <p14:nvContentPartPr>
+              <p14:cNvPr id="32" name="잉크 36"/>
+              <p14:cNvContentPartPr/>
+              <p14:nvPr/>
+            </p14:nvContentPartPr>
+            <p14:xfrm>
+              <a:off x="4667885" y="5926455"/>
+              <a:ext cx="3175" cy="3175"/>
+            </p14:xfrm>
+          </p:contentPart>
+        </mc:Choice>
+        <mc:Fallback>
+          <p:pic>
+            <p:nvPicPr>
+              <p:cNvPr id="32" name="잉크 36"/>
+              <p:cNvPicPr/>
+              <p:nvPr/>
+            </p:nvPicPr>
+            <p:blipFill>
+              <a:blip r:embed="rId52"/>
+              <a:stretch>
+                <a:fillRect/>
+              </a:stretch>
+            </p:blipFill>
+            <p:spPr>
+              <a:xfrm>
+                <a:off x="4667885" y="5926455"/>
+                <a:ext cx="3175" cy="3175"/>
+              </a:xfrm>
+              <a:prstGeom prst="rect">
+                <a:avLst/>
+              </a:prstGeom>
+            </p:spPr>
+          </p:pic>
+        </mc:Fallback>
+      </mc:AlternateContent>
+      <mc:AlternateContent xmlns:mc="http://schemas.openxmlformats.org/markup-compatibility/2006" xmlns:p14="http://schemas.microsoft.com/office/powerpoint/2010/main">
+        <mc:Choice Requires="p14">
+          <p:contentPart p14:bwMode="auto" r:id="rId53">
+            <p14:nvContentPartPr>
+              <p14:cNvPr id="33" name="잉크 37"/>
+              <p14:cNvContentPartPr/>
+              <p14:nvPr/>
+            </p14:nvContentPartPr>
+            <p14:xfrm>
+              <a:off x="4679315" y="5842000"/>
+              <a:ext cx="87630" cy="163830"/>
+            </p14:xfrm>
+          </p:contentPart>
+        </mc:Choice>
+        <mc:Fallback>
+          <p:pic>
+            <p:nvPicPr>
+              <p:cNvPr id="33" name="잉크 37"/>
+              <p:cNvPicPr/>
+              <p:nvPr/>
+            </p:nvPicPr>
+            <p:blipFill>
+              <a:blip r:embed="rId54"/>
+              <a:stretch>
+                <a:fillRect/>
+              </a:stretch>
+            </p:blipFill>
+            <p:spPr>
+              <a:xfrm>
+                <a:off x="4679315" y="5842000"/>
+                <a:ext cx="87630" cy="163830"/>
+              </a:xfrm>
+              <a:prstGeom prst="rect">
+                <a:avLst/>
+              </a:prstGeom>
+            </p:spPr>
+          </p:pic>
+        </mc:Fallback>
+      </mc:AlternateContent>
+      <mc:AlternateContent xmlns:mc="http://schemas.openxmlformats.org/markup-compatibility/2006" xmlns:p14="http://schemas.microsoft.com/office/powerpoint/2010/main">
+        <mc:Choice Requires="p14">
+          <p:contentPart p14:bwMode="auto" r:id="rId55">
+            <p14:nvContentPartPr>
+              <p14:cNvPr id="34" name="잉크 38"/>
+              <p14:cNvContentPartPr/>
+              <p14:nvPr/>
+            </p14:nvContentPartPr>
+            <p14:xfrm>
+              <a:off x="4685030" y="5782310"/>
+              <a:ext cx="236855" cy="364490"/>
+            </p14:xfrm>
+          </p:contentPart>
+        </mc:Choice>
+        <mc:Fallback>
+          <p:pic>
+            <p:nvPicPr>
+              <p:cNvPr id="34" name="잉크 38"/>
+              <p:cNvPicPr/>
+              <p:nvPr/>
+            </p:nvPicPr>
+            <p:blipFill>
+              <a:blip r:embed="rId56"/>
+              <a:stretch>
+                <a:fillRect/>
+              </a:stretch>
+            </p:blipFill>
+            <p:spPr>
+              <a:xfrm>
+                <a:off x="4685030" y="5782310"/>
+                <a:ext cx="236855" cy="364490"/>
+              </a:xfrm>
+              <a:prstGeom prst="rect">
+                <a:avLst/>
+              </a:prstGeom>
+            </p:spPr>
+          </p:pic>
+        </mc:Fallback>
+      </mc:AlternateContent>
+      <mc:AlternateContent xmlns:mc="http://schemas.openxmlformats.org/markup-compatibility/2006" xmlns:p14="http://schemas.microsoft.com/office/powerpoint/2010/main">
+        <mc:Choice Requires="p14">
+          <p:contentPart p14:bwMode="auto" r:id="rId57">
+            <p14:nvContentPartPr>
+              <p14:cNvPr id="35" name="잉크 39"/>
+              <p14:cNvContentPartPr/>
+              <p14:nvPr/>
+            </p14:nvContentPartPr>
+            <p14:xfrm>
+              <a:off x="4820285" y="5909310"/>
+              <a:ext cx="254000" cy="276860"/>
+            </p14:xfrm>
+          </p:contentPart>
+        </mc:Choice>
+        <mc:Fallback>
+          <p:pic>
+            <p:nvPicPr>
+              <p:cNvPr id="35" name="잉크 39"/>
+              <p:cNvPicPr/>
+              <p:nvPr/>
+            </p:nvPicPr>
+            <p:blipFill>
+              <a:blip r:embed="rId58"/>
+              <a:stretch>
+                <a:fillRect/>
+              </a:stretch>
+            </p:blipFill>
+            <p:spPr>
+              <a:xfrm>
+                <a:off x="4820285" y="5909310"/>
+                <a:ext cx="254000" cy="276860"/>
+              </a:xfrm>
+              <a:prstGeom prst="rect">
+                <a:avLst/>
+              </a:prstGeom>
+            </p:spPr>
+          </p:pic>
+        </mc:Fallback>
+      </mc:AlternateContent>
+      <mc:AlternateContent xmlns:mc="http://schemas.openxmlformats.org/markup-compatibility/2006" xmlns:p14="http://schemas.microsoft.com/office/powerpoint/2010/main">
+        <mc:Choice Requires="p14">
+          <p:contentPart p14:bwMode="auto" r:id="rId59">
+            <p14:nvContentPartPr>
+              <p14:cNvPr id="36" name="잉크 40"/>
+              <p14:cNvContentPartPr/>
+              <p14:nvPr/>
+            </p14:nvContentPartPr>
+            <p14:xfrm>
+              <a:off x="5147945" y="5895340"/>
+              <a:ext cx="177800" cy="208915"/>
+            </p14:xfrm>
+          </p:contentPart>
+        </mc:Choice>
+        <mc:Fallback>
+          <p:pic>
+            <p:nvPicPr>
+              <p:cNvPr id="36" name="잉크 40"/>
+              <p:cNvPicPr/>
+              <p:nvPr/>
+            </p:nvPicPr>
+            <p:blipFill>
+              <a:blip r:embed="rId60"/>
+              <a:stretch>
+                <a:fillRect/>
+              </a:stretch>
+            </p:blipFill>
+            <p:spPr>
+              <a:xfrm>
+                <a:off x="5147945" y="5895340"/>
+                <a:ext cx="177800" cy="208915"/>
+              </a:xfrm>
+              <a:prstGeom prst="rect">
+                <a:avLst/>
+              </a:prstGeom>
+            </p:spPr>
+          </p:pic>
+        </mc:Fallback>
+      </mc:AlternateContent>
+      <mc:AlternateContent xmlns:mc="http://schemas.openxmlformats.org/markup-compatibility/2006" xmlns:p14="http://schemas.microsoft.com/office/powerpoint/2010/main">
+        <mc:Choice Requires="p14">
+          <p:contentPart p14:bwMode="auto" r:id="rId61">
+            <p14:nvContentPartPr>
+              <p14:cNvPr id="37" name="잉크 41"/>
+              <p14:cNvContentPartPr/>
+              <p14:nvPr/>
+            </p14:nvContentPartPr>
+            <p14:xfrm>
+              <a:off x="5368290" y="5969000"/>
+              <a:ext cx="2540" cy="143510"/>
+            </p14:xfrm>
+          </p:contentPart>
+        </mc:Choice>
+        <mc:Fallback>
+          <p:pic>
+            <p:nvPicPr>
+              <p:cNvPr id="37" name="잉크 41"/>
+              <p:cNvPicPr/>
+              <p:nvPr/>
+            </p:nvPicPr>
+            <p:blipFill>
+              <a:blip r:embed="rId62"/>
+              <a:stretch>
+                <a:fillRect/>
+              </a:stretch>
+            </p:blipFill>
+            <p:spPr>
+              <a:xfrm>
+                <a:off x="5368290" y="5969000"/>
+                <a:ext cx="2540" cy="143510"/>
+              </a:xfrm>
+              <a:prstGeom prst="rect">
+                <a:avLst/>
+              </a:prstGeom>
+            </p:spPr>
+          </p:pic>
+        </mc:Fallback>
+      </mc:AlternateContent>
+      <mc:AlternateContent xmlns:mc="http://schemas.openxmlformats.org/markup-compatibility/2006" xmlns:p14="http://schemas.microsoft.com/office/powerpoint/2010/main">
+        <mc:Choice Requires="p14">
+          <p:contentPart p14:bwMode="auto" r:id="rId63">
+            <p14:nvContentPartPr>
+              <p14:cNvPr id="38" name="잉크 42"/>
+              <p14:cNvContentPartPr/>
+              <p14:nvPr/>
+            </p14:nvContentPartPr>
+            <p14:xfrm>
+              <a:off x="4933315" y="5918200"/>
+              <a:ext cx="160655" cy="208915"/>
+            </p14:xfrm>
+          </p:contentPart>
+        </mc:Choice>
+        <mc:Fallback>
+          <p:pic>
+            <p:nvPicPr>
+              <p:cNvPr id="38" name="잉크 42"/>
+              <p:cNvPicPr/>
+              <p:nvPr/>
+            </p:nvPicPr>
+            <p:blipFill>
+              <a:blip r:embed="rId64"/>
+              <a:stretch>
+                <a:fillRect/>
+              </a:stretch>
+            </p:blipFill>
+            <p:spPr>
+              <a:xfrm>
+                <a:off x="4933315" y="5918200"/>
+                <a:ext cx="160655" cy="208915"/>
+              </a:xfrm>
+              <a:prstGeom prst="rect">
+                <a:avLst/>
+              </a:prstGeom>
+            </p:spPr>
+          </p:pic>
+        </mc:Fallback>
+      </mc:AlternateContent>
+      <mc:AlternateContent xmlns:mc="http://schemas.openxmlformats.org/markup-compatibility/2006" xmlns:p14="http://schemas.microsoft.com/office/powerpoint/2010/main">
+        <mc:Choice Requires="p14">
+          <p:contentPart p14:bwMode="auto" r:id="rId65">
+            <p14:nvContentPartPr>
+              <p14:cNvPr id="39" name="잉크 43"/>
+              <p14:cNvContentPartPr/>
+              <p14:nvPr/>
+            </p14:nvContentPartPr>
+            <p14:xfrm>
+              <a:off x="5531485" y="5920740"/>
+              <a:ext cx="62230" cy="104775"/>
+            </p14:xfrm>
+          </p:contentPart>
+        </mc:Choice>
+        <mc:Fallback>
+          <p:pic>
+            <p:nvPicPr>
+              <p:cNvPr id="39" name="잉크 43"/>
+              <p:cNvPicPr/>
+              <p:nvPr/>
+            </p:nvPicPr>
+            <p:blipFill>
+              <a:blip r:embed="rId66"/>
+              <a:stretch>
+                <a:fillRect/>
+              </a:stretch>
+            </p:blipFill>
+            <p:spPr>
+              <a:xfrm>
+                <a:off x="5531485" y="5920740"/>
+                <a:ext cx="62230" cy="104775"/>
+              </a:xfrm>
+              <a:prstGeom prst="rect">
+                <a:avLst/>
+              </a:prstGeom>
+            </p:spPr>
+          </p:pic>
+        </mc:Fallback>
+      </mc:AlternateContent>
+      <mc:AlternateContent xmlns:mc="http://schemas.openxmlformats.org/markup-compatibility/2006" xmlns:p14="http://schemas.microsoft.com/office/powerpoint/2010/main">
+        <mc:Choice Requires="p14">
+          <p:contentPart p14:bwMode="auto" r:id="rId67">
+            <p14:nvContentPartPr>
+              <p14:cNvPr id="40" name="잉크 44"/>
+              <p14:cNvContentPartPr/>
+              <p14:nvPr/>
+            </p14:nvContentPartPr>
+            <p14:xfrm>
+              <a:off x="5610860" y="5904230"/>
+              <a:ext cx="41910" cy="149225"/>
+            </p14:xfrm>
+          </p:contentPart>
+        </mc:Choice>
+        <mc:Fallback>
+          <p:pic>
+            <p:nvPicPr>
+              <p:cNvPr id="40" name="잉크 44"/>
+              <p:cNvPicPr/>
+              <p:nvPr/>
+            </p:nvPicPr>
+            <p:blipFill>
+              <a:blip r:embed="rId68"/>
+              <a:stretch>
+                <a:fillRect/>
+              </a:stretch>
+            </p:blipFill>
+            <p:spPr>
+              <a:xfrm>
+                <a:off x="5610860" y="5904230"/>
+                <a:ext cx="41910" cy="149225"/>
+              </a:xfrm>
+              <a:prstGeom prst="rect">
+                <a:avLst/>
+              </a:prstGeom>
+            </p:spPr>
+          </p:pic>
+        </mc:Fallback>
+      </mc:AlternateContent>
+      <mc:AlternateContent xmlns:mc="http://schemas.openxmlformats.org/markup-compatibility/2006" xmlns:p14="http://schemas.microsoft.com/office/powerpoint/2010/main">
+        <mc:Choice Requires="p14">
+          <p:contentPart p14:bwMode="auto" r:id="rId69">
+            <p14:nvContentPartPr>
+              <p14:cNvPr id="41" name="잉크 45"/>
+              <p14:cNvContentPartPr/>
+              <p14:nvPr/>
+            </p14:nvContentPartPr>
+            <p14:xfrm>
+              <a:off x="5514975" y="6053455"/>
+              <a:ext cx="152400" cy="101600"/>
+            </p14:xfrm>
+          </p:contentPart>
+        </mc:Choice>
+        <mc:Fallback>
+          <p:pic>
+            <p:nvPicPr>
+              <p:cNvPr id="41" name="잉크 45"/>
+              <p:cNvPicPr/>
+              <p:nvPr/>
+            </p:nvPicPr>
+            <p:blipFill>
+              <a:blip r:embed="rId70"/>
+              <a:stretch>
+                <a:fillRect/>
+              </a:stretch>
+            </p:blipFill>
+            <p:spPr>
+              <a:xfrm>
+                <a:off x="5514975" y="6053455"/>
+                <a:ext cx="152400" cy="101600"/>
+              </a:xfrm>
+              <a:prstGeom prst="rect">
+                <a:avLst/>
+              </a:prstGeom>
+            </p:spPr>
+          </p:pic>
+        </mc:Fallback>
+      </mc:AlternateContent>
+      <mc:AlternateContent xmlns:mc="http://schemas.openxmlformats.org/markup-compatibility/2006" xmlns:p14="http://schemas.microsoft.com/office/powerpoint/2010/main">
+        <mc:Choice Requires="p14">
+          <p:contentPart p14:bwMode="auto" r:id="rId71">
+            <p14:nvContentPartPr>
+              <p14:cNvPr id="42" name="잉크 46"/>
+              <p14:cNvContentPartPr/>
+              <p14:nvPr/>
+            </p14:nvContentPartPr>
+            <p14:xfrm>
+              <a:off x="5819775" y="5895340"/>
+              <a:ext cx="231140" cy="335915"/>
+            </p14:xfrm>
+          </p:contentPart>
+        </mc:Choice>
+        <mc:Fallback>
+          <p:pic>
+            <p:nvPicPr>
+              <p:cNvPr id="42" name="잉크 46"/>
+              <p:cNvPicPr/>
+              <p:nvPr/>
+            </p:nvPicPr>
+            <p:blipFill>
+              <a:blip r:embed="rId72"/>
+              <a:stretch>
+                <a:fillRect/>
+              </a:stretch>
+            </p:blipFill>
+            <p:spPr>
+              <a:xfrm>
+                <a:off x="5819775" y="5895340"/>
+                <a:ext cx="231140" cy="335915"/>
+              </a:xfrm>
+              <a:prstGeom prst="rect">
+                <a:avLst/>
+              </a:prstGeom>
+            </p:spPr>
+          </p:pic>
+        </mc:Fallback>
+      </mc:AlternateContent>
+      <mc:AlternateContent xmlns:mc="http://schemas.openxmlformats.org/markup-compatibility/2006" xmlns:p14="http://schemas.microsoft.com/office/powerpoint/2010/main">
+        <mc:Choice Requires="p14">
+          <p:contentPart p14:bwMode="auto" r:id="rId73">
+            <p14:nvContentPartPr>
+              <p14:cNvPr id="43" name="잉크 47"/>
+              <p14:cNvContentPartPr/>
+              <p14:nvPr/>
+            </p14:nvContentPartPr>
+            <p14:xfrm>
+              <a:off x="6084570" y="5923915"/>
+              <a:ext cx="147320" cy="250825"/>
+            </p14:xfrm>
+          </p:contentPart>
+        </mc:Choice>
+        <mc:Fallback>
+          <p:pic>
+            <p:nvPicPr>
+              <p:cNvPr id="43" name="잉크 47"/>
+              <p:cNvPicPr/>
+              <p:nvPr/>
+            </p:nvPicPr>
+            <p:blipFill>
+              <a:blip r:embed="rId74"/>
+              <a:stretch>
+                <a:fillRect/>
+              </a:stretch>
+            </p:blipFill>
+            <p:spPr>
+              <a:xfrm>
+                <a:off x="6084570" y="5923915"/>
+                <a:ext cx="147320" cy="250825"/>
+              </a:xfrm>
+              <a:prstGeom prst="rect">
+                <a:avLst/>
+              </a:prstGeom>
+            </p:spPr>
+          </p:pic>
+        </mc:Fallback>
+      </mc:AlternateContent>
     </p:spTree>
     <p:extLst>
       <p:ext uri="{BB962C8B-B14F-4D97-AF65-F5344CB8AC3E}">
@@ -25714,6 +29207,21 @@
   <p:clrMapOvr>
     <a:masterClrMapping/>
   </p:clrMapOvr>
+  <mc:AlternateContent xmlns:mc="http://schemas.openxmlformats.org/markup-compatibility/2006">
+    <mc:Choice xmlns:p14="http://schemas.microsoft.com/office/powerpoint/2010/main" Requires="p14">
+      <p:transition spd="slow" p14:dur="2000"/>
+    </mc:Choice>
+    <mc:Fallback>
+      <p:transition spd="slow"/>
+    </mc:Fallback>
+  </mc:AlternateContent>
+  <p:timing>
+    <p:tnLst>
+      <p:par>
+        <p:cTn id="1" dur="indefinite" restart="never" nodeType="tmRoot"/>
+      </p:par>
+    </p:tnLst>
+  </p:timing>
 </p:sld>
 </file>
 
@@ -26746,7 +30254,7 @@
 </file>
 
 <file path=ppt/slides/slide36.xml><?xml version="1.0" encoding="utf-8"?>
-<p:sld xmlns:a="http://schemas.openxmlformats.org/drawingml/2006/main" xmlns:r="http://schemas.openxmlformats.org/officeDocument/2006/relationships" xmlns:p="http://schemas.openxmlformats.org/presentationml/2006/main">
+<p:sld xmlns:a="http://schemas.openxmlformats.org/drawingml/2006/main" xmlns:r="http://schemas.openxmlformats.org/officeDocument/2006/relationships" xmlns:p="http://schemas.openxmlformats.org/presentationml/2006/main" xmlns:p14="http://schemas.microsoft.com/office/powerpoint/2010/main">
   <p:cSld>
     <p:spTree>
       <p:nvGrpSpPr>
@@ -26774,7 +30282,7 @@
         </p:nvSpPr>
         <p:spPr>
           <a:xfrm>
-            <a:off x="590551" y="146050"/>
+            <a:off x="590550" y="146050"/>
             <a:ext cx="10363200" cy="762000"/>
           </a:xfrm>
           <a:prstGeom prst="rect">
@@ -26831,7 +30339,7 @@
         </p:nvSpPr>
         <p:spPr>
           <a:xfrm>
-            <a:off x="9482667" y="6419850"/>
+            <a:off x="9482455" y="6419850"/>
             <a:ext cx="2540000" cy="304800"/>
           </a:xfrm>
           <a:prstGeom prst="rect">
@@ -26880,8 +30388,8 @@
         </p:nvSpPr>
         <p:spPr>
           <a:xfrm>
-            <a:off x="1195918" y="6392863"/>
-            <a:ext cx="4146549" cy="349250"/>
+            <a:off x="1195705" y="6393180"/>
+            <a:ext cx="4146550" cy="349250"/>
           </a:xfrm>
           <a:prstGeom prst="rect">
             <a:avLst/>
@@ -26921,8 +30429,8 @@
         </p:nvSpPr>
         <p:spPr>
           <a:xfrm>
-            <a:off x="708872" y="1182231"/>
-            <a:ext cx="11043649" cy="4832092"/>
+            <a:off x="708660" y="1182370"/>
+            <a:ext cx="11043920" cy="4832350"/>
           </a:xfrm>
           <a:prstGeom prst="rect">
             <a:avLst/>
@@ -27607,11 +31115,65 @@
           </a:p>
         </p:txBody>
       </p:sp>
+      <mc:AlternateContent xmlns:mc="http://schemas.openxmlformats.org/markup-compatibility/2006" xmlns:p14="http://schemas.microsoft.com/office/powerpoint/2010/main">
+        <mc:Choice Requires="p14">
+          <p:contentPart p14:bwMode="auto" r:id="rId3">
+            <p14:nvContentPartPr>
+              <p14:cNvPr id="258" name="잉크 48"/>
+              <p14:cNvContentPartPr/>
+              <p14:nvPr/>
+            </p14:nvContentPartPr>
+            <p14:xfrm>
+              <a:off x="4450080" y="373380"/>
+              <a:ext cx="7620" cy="7620"/>
+            </p14:xfrm>
+          </p:contentPart>
+        </mc:Choice>
+        <mc:Fallback>
+          <p:pic>
+            <p:nvPicPr>
+              <p:cNvPr id="258" name="잉크 48"/>
+              <p:cNvPicPr/>
+              <p:nvPr/>
+            </p:nvPicPr>
+            <p:blipFill>
+              <a:blip r:embed="rId4"/>
+              <a:stretch>
+                <a:fillRect/>
+              </a:stretch>
+            </p:blipFill>
+            <p:spPr>
+              <a:xfrm>
+                <a:off x="4450080" y="373380"/>
+                <a:ext cx="7620" cy="7620"/>
+              </a:xfrm>
+              <a:prstGeom prst="rect">
+                <a:avLst/>
+              </a:prstGeom>
+            </p:spPr>
+          </p:pic>
+        </mc:Fallback>
+      </mc:AlternateContent>
     </p:spTree>
   </p:cSld>
   <p:clrMapOvr>
     <a:masterClrMapping/>
   </p:clrMapOvr>
+  <mc:AlternateContent xmlns:mc="http://schemas.openxmlformats.org/markup-compatibility/2006">
+    <mc:Choice xmlns:p14="http://schemas.microsoft.com/office/powerpoint/2010/main" Requires="p14">
+      <p:transition spd="slow" p14:dur="2000"/>
+    </mc:Choice>
+    <mc:Fallback>
+      <p:transition spd="slow"/>
+    </mc:Fallback>
+  </mc:AlternateContent>
+  <p:timing>
+    <p:tnLst>
+      <p:par>
+        <p:cTn id="1" dur="indefinite" restart="never" nodeType="tmRoot"/>
+      </p:par>
+    </p:tnLst>
+  </p:timing>
 </p:sld>
 </file>
 
@@ -28794,7 +32356,7 @@
 </file>
 
 <file path=ppt/slides/slide39.xml><?xml version="1.0" encoding="utf-8"?>
-<p:sld xmlns:a="http://schemas.openxmlformats.org/drawingml/2006/main" xmlns:r="http://schemas.openxmlformats.org/officeDocument/2006/relationships" xmlns:p="http://schemas.openxmlformats.org/presentationml/2006/main">
+<p:sld xmlns:a="http://schemas.openxmlformats.org/drawingml/2006/main" xmlns:r="http://schemas.openxmlformats.org/officeDocument/2006/relationships" xmlns:p="http://schemas.openxmlformats.org/presentationml/2006/main" xmlns:p14="http://schemas.microsoft.com/office/powerpoint/2010/main">
   <p:cSld>
     <p:spTree>
       <p:nvGrpSpPr>
@@ -28822,7 +32384,7 @@
         </p:nvSpPr>
         <p:spPr>
           <a:xfrm>
-            <a:off x="590551" y="146050"/>
+            <a:off x="590550" y="146050"/>
             <a:ext cx="10363200" cy="762000"/>
           </a:xfrm>
           <a:prstGeom prst="rect">
@@ -28880,8 +32442,8 @@
         </p:nvSpPr>
         <p:spPr>
           <a:xfrm>
-            <a:off x="146021" y="1152526"/>
-            <a:ext cx="5949980" cy="5019675"/>
+            <a:off x="146050" y="1152525"/>
+            <a:ext cx="5949950" cy="5019675"/>
           </a:xfrm>
           <a:prstGeom prst="rect">
             <a:avLst/>
@@ -29058,7 +32620,7 @@
         </p:nvSpPr>
         <p:spPr>
           <a:xfrm>
-            <a:off x="9482667" y="6419850"/>
+            <a:off x="9482455" y="6419850"/>
             <a:ext cx="2540000" cy="304800"/>
           </a:xfrm>
           <a:prstGeom prst="rect">
@@ -29107,8 +32669,8 @@
         </p:nvSpPr>
         <p:spPr>
           <a:xfrm>
-            <a:off x="1195918" y="6392863"/>
-            <a:ext cx="4146549" cy="349250"/>
+            <a:off x="1195705" y="6393180"/>
+            <a:ext cx="4146550" cy="349250"/>
           </a:xfrm>
           <a:prstGeom prst="rect">
             <a:avLst/>
@@ -29162,19 +32724,307 @@
         </p:blipFill>
         <p:spPr>
           <a:xfrm>
-            <a:off x="6185646" y="1679650"/>
-            <a:ext cx="5860333" cy="3344171"/>
+            <a:off x="6185535" y="1679575"/>
+            <a:ext cx="5860415" cy="3343910"/>
           </a:xfrm>
           <a:prstGeom prst="rect">
             <a:avLst/>
           </a:prstGeom>
         </p:spPr>
       </p:pic>
+      <mc:AlternateContent xmlns:mc="http://schemas.openxmlformats.org/markup-compatibility/2006" xmlns:p14="http://schemas.microsoft.com/office/powerpoint/2010/main">
+        <mc:Choice Requires="p14">
+          <p:contentPart p14:bwMode="auto" r:id="rId4">
+            <p14:nvContentPartPr>
+              <p14:cNvPr id="282" name="잉크 49"/>
+              <p14:cNvContentPartPr/>
+              <p14:nvPr/>
+            </p14:nvContentPartPr>
+            <p14:xfrm>
+              <a:off x="3406140" y="274320"/>
+              <a:ext cx="396240" cy="342900"/>
+            </p14:xfrm>
+          </p:contentPart>
+        </mc:Choice>
+        <mc:Fallback>
+          <p:pic>
+            <p:nvPicPr>
+              <p:cNvPr id="282" name="잉크 49"/>
+              <p:cNvPicPr/>
+              <p:nvPr/>
+            </p:nvPicPr>
+            <p:blipFill>
+              <a:blip r:embed="rId5"/>
+              <a:stretch>
+                <a:fillRect/>
+              </a:stretch>
+            </p:blipFill>
+            <p:spPr>
+              <a:xfrm>
+                <a:off x="3406140" y="274320"/>
+                <a:ext cx="396240" cy="342900"/>
+              </a:xfrm>
+              <a:prstGeom prst="rect">
+                <a:avLst/>
+              </a:prstGeom>
+            </p:spPr>
+          </p:pic>
+        </mc:Fallback>
+      </mc:AlternateContent>
+      <mc:AlternateContent xmlns:mc="http://schemas.openxmlformats.org/markup-compatibility/2006" xmlns:p14="http://schemas.microsoft.com/office/powerpoint/2010/main">
+        <mc:Choice Requires="p14">
+          <p:contentPart p14:bwMode="auto" r:id="rId6">
+            <p14:nvContentPartPr>
+              <p14:cNvPr id="283" name="잉크 50"/>
+              <p14:cNvContentPartPr/>
+              <p14:nvPr/>
+            </p14:nvContentPartPr>
+            <p14:xfrm>
+              <a:off x="3223260" y="472440"/>
+              <a:ext cx="617220" cy="274320"/>
+            </p14:xfrm>
+          </p:contentPart>
+        </mc:Choice>
+        <mc:Fallback>
+          <p:pic>
+            <p:nvPicPr>
+              <p:cNvPr id="283" name="잉크 50"/>
+              <p:cNvPicPr/>
+              <p:nvPr/>
+            </p:nvPicPr>
+            <p:blipFill>
+              <a:blip r:embed="rId7"/>
+              <a:stretch>
+                <a:fillRect/>
+              </a:stretch>
+            </p:blipFill>
+            <p:spPr>
+              <a:xfrm>
+                <a:off x="3223260" y="472440"/>
+                <a:ext cx="617220" cy="274320"/>
+              </a:xfrm>
+              <a:prstGeom prst="rect">
+                <a:avLst/>
+              </a:prstGeom>
+            </p:spPr>
+          </p:pic>
+        </mc:Fallback>
+      </mc:AlternateContent>
+      <mc:AlternateContent xmlns:mc="http://schemas.openxmlformats.org/markup-compatibility/2006" xmlns:p14="http://schemas.microsoft.com/office/powerpoint/2010/main">
+        <mc:Choice Requires="p14">
+          <p:contentPart p14:bwMode="auto" r:id="rId8">
+            <p14:nvContentPartPr>
+              <p14:cNvPr id="284" name="잉크 51"/>
+              <p14:cNvContentPartPr/>
+              <p14:nvPr/>
+            </p14:nvContentPartPr>
+            <p14:xfrm>
+              <a:off x="3931920" y="152400"/>
+              <a:ext cx="297180" cy="822960"/>
+            </p14:xfrm>
+          </p:contentPart>
+        </mc:Choice>
+        <mc:Fallback>
+          <p:pic>
+            <p:nvPicPr>
+              <p:cNvPr id="284" name="잉크 51"/>
+              <p:cNvPicPr/>
+              <p:nvPr/>
+            </p:nvPicPr>
+            <p:blipFill>
+              <a:blip r:embed="rId9"/>
+              <a:stretch>
+                <a:fillRect/>
+              </a:stretch>
+            </p:blipFill>
+            <p:spPr>
+              <a:xfrm>
+                <a:off x="3931920" y="152400"/>
+                <a:ext cx="297180" cy="822960"/>
+              </a:xfrm>
+              <a:prstGeom prst="rect">
+                <a:avLst/>
+              </a:prstGeom>
+            </p:spPr>
+          </p:pic>
+        </mc:Fallback>
+      </mc:AlternateContent>
+      <mc:AlternateContent xmlns:mc="http://schemas.openxmlformats.org/markup-compatibility/2006" xmlns:p14="http://schemas.microsoft.com/office/powerpoint/2010/main">
+        <mc:Choice Requires="p14">
+          <p:contentPart p14:bwMode="auto" r:id="rId10">
+            <p14:nvContentPartPr>
+              <p14:cNvPr id="285" name="잉크 52"/>
+              <p14:cNvContentPartPr/>
+              <p14:nvPr/>
+            </p14:nvContentPartPr>
+            <p14:xfrm>
+              <a:off x="4579620" y="426720"/>
+              <a:ext cx="281940" cy="441960"/>
+            </p14:xfrm>
+          </p:contentPart>
+        </mc:Choice>
+        <mc:Fallback>
+          <p:pic>
+            <p:nvPicPr>
+              <p:cNvPr id="285" name="잉크 52"/>
+              <p:cNvPicPr/>
+              <p:nvPr/>
+            </p:nvPicPr>
+            <p:blipFill>
+              <a:blip r:embed="rId11"/>
+              <a:stretch>
+                <a:fillRect/>
+              </a:stretch>
+            </p:blipFill>
+            <p:spPr>
+              <a:xfrm>
+                <a:off x="4579620" y="426720"/>
+                <a:ext cx="281940" cy="441960"/>
+              </a:xfrm>
+              <a:prstGeom prst="rect">
+                <a:avLst/>
+              </a:prstGeom>
+            </p:spPr>
+          </p:pic>
+        </mc:Fallback>
+      </mc:AlternateContent>
+      <mc:AlternateContent xmlns:mc="http://schemas.openxmlformats.org/markup-compatibility/2006" xmlns:p14="http://schemas.microsoft.com/office/powerpoint/2010/main">
+        <mc:Choice Requires="p14">
+          <p:contentPart p14:bwMode="auto" r:id="rId12">
+            <p14:nvContentPartPr>
+              <p14:cNvPr id="286" name="잉크 53"/>
+              <p14:cNvContentPartPr/>
+              <p14:nvPr/>
+            </p14:nvContentPartPr>
+            <p14:xfrm>
+              <a:off x="4823460" y="594360"/>
+              <a:ext cx="175260" cy="15240"/>
+            </p14:xfrm>
+          </p:contentPart>
+        </mc:Choice>
+        <mc:Fallback>
+          <p:pic>
+            <p:nvPicPr>
+              <p:cNvPr id="286" name="잉크 53"/>
+              <p:cNvPicPr/>
+              <p:nvPr/>
+            </p:nvPicPr>
+            <p:blipFill>
+              <a:blip r:embed="rId13"/>
+              <a:stretch>
+                <a:fillRect/>
+              </a:stretch>
+            </p:blipFill>
+            <p:spPr>
+              <a:xfrm>
+                <a:off x="4823460" y="594360"/>
+                <a:ext cx="175260" cy="15240"/>
+              </a:xfrm>
+              <a:prstGeom prst="rect">
+                <a:avLst/>
+              </a:prstGeom>
+            </p:spPr>
+          </p:pic>
+        </mc:Fallback>
+      </mc:AlternateContent>
+      <mc:AlternateContent xmlns:mc="http://schemas.openxmlformats.org/markup-compatibility/2006" xmlns:p14="http://schemas.microsoft.com/office/powerpoint/2010/main">
+        <mc:Choice Requires="p14">
+          <p:contentPart p14:bwMode="auto" r:id="rId14">
+            <p14:nvContentPartPr>
+              <p14:cNvPr id="287" name="잉크 54"/>
+              <p14:cNvContentPartPr/>
+              <p14:nvPr/>
+            </p14:nvContentPartPr>
+            <p14:xfrm>
+              <a:off x="4991100" y="335280"/>
+              <a:ext cx="22860" cy="594360"/>
+            </p14:xfrm>
+          </p:contentPart>
+        </mc:Choice>
+        <mc:Fallback>
+          <p:pic>
+            <p:nvPicPr>
+              <p:cNvPr id="287" name="잉크 54"/>
+              <p:cNvPicPr/>
+              <p:nvPr/>
+            </p:nvPicPr>
+            <p:blipFill>
+              <a:blip r:embed="rId15"/>
+              <a:stretch>
+                <a:fillRect/>
+              </a:stretch>
+            </p:blipFill>
+            <p:spPr>
+              <a:xfrm>
+                <a:off x="4991100" y="335280"/>
+                <a:ext cx="22860" cy="594360"/>
+              </a:xfrm>
+              <a:prstGeom prst="rect">
+                <a:avLst/>
+              </a:prstGeom>
+            </p:spPr>
+          </p:pic>
+        </mc:Fallback>
+      </mc:AlternateContent>
+      <mc:AlternateContent xmlns:mc="http://schemas.openxmlformats.org/markup-compatibility/2006" xmlns:p14="http://schemas.microsoft.com/office/powerpoint/2010/main">
+        <mc:Choice Requires="p14">
+          <p:contentPart p14:bwMode="auto" r:id="rId16">
+            <p14:nvContentPartPr>
+              <p14:cNvPr id="288" name="잉크 55"/>
+              <p14:cNvContentPartPr/>
+              <p14:nvPr/>
+            </p14:nvContentPartPr>
+            <p14:xfrm>
+              <a:off x="5196840" y="381000"/>
+              <a:ext cx="38100" cy="495300"/>
+            </p14:xfrm>
+          </p:contentPart>
+        </mc:Choice>
+        <mc:Fallback>
+          <p:pic>
+            <p:nvPicPr>
+              <p:cNvPr id="288" name="잉크 55"/>
+              <p:cNvPicPr/>
+              <p:nvPr/>
+            </p:nvPicPr>
+            <p:blipFill>
+              <a:blip r:embed="rId17"/>
+              <a:stretch>
+                <a:fillRect/>
+              </a:stretch>
+            </p:blipFill>
+            <p:spPr>
+              <a:xfrm>
+                <a:off x="5196840" y="381000"/>
+                <a:ext cx="38100" cy="495300"/>
+              </a:xfrm>
+              <a:prstGeom prst="rect">
+                <a:avLst/>
+              </a:prstGeom>
+            </p:spPr>
+          </p:pic>
+        </mc:Fallback>
+      </mc:AlternateContent>
     </p:spTree>
   </p:cSld>
   <p:clrMapOvr>
     <a:masterClrMapping/>
   </p:clrMapOvr>
+  <mc:AlternateContent xmlns:mc="http://schemas.openxmlformats.org/markup-compatibility/2006">
+    <mc:Choice xmlns:p14="http://schemas.microsoft.com/office/powerpoint/2010/main" Requires="p14">
+      <p:transition spd="slow" p14:dur="2000"/>
+    </mc:Choice>
+    <mc:Fallback>
+      <p:transition spd="slow"/>
+    </mc:Fallback>
+  </mc:AlternateContent>
+  <p:timing>
+    <p:tnLst>
+      <p:par>
+        <p:cTn id="1" dur="indefinite" restart="never" nodeType="tmRoot"/>
+      </p:par>
+    </p:tnLst>
+  </p:timing>
 </p:sld>
 </file>
 

--- a/1학기/웹 프로그래밍/2026_웹 프로그래밍_part2.pptx
+++ b/1학기/웹 프로그래밍/2026_웹 프로그래밍_part2.pptx
@@ -2,7 +2,7 @@
 <file path=ppt/presentation.xml><?xml version="1.0" encoding="utf-8"?>
 <p:presentation xmlns:a="http://schemas.openxmlformats.org/drawingml/2006/main" xmlns:r="http://schemas.openxmlformats.org/officeDocument/2006/relationships" xmlns:p="http://schemas.openxmlformats.org/presentationml/2006/main" xmlns:p14="http://schemas.microsoft.com/office/powerpoint/2010/main" strictFirstAndLastChars="0" embedTrueTypeFonts="1" saveSubsetFonts="1" autoCompressPictures="0">
   <p:sldMasterIdLst>
-    <p:sldMasterId id="2147483689" r:id="rId8"/>
+    <p:sldMasterId id="2147483696" r:id="rId8"/>
   </p:sldMasterIdLst>
   <p:notesMasterIdLst>
     <p:notesMasterId r:id="rId10"/>
@@ -347,6 +347,266 @@
 </inkml:ink>
 </file>
 
+<file path=ppt/ink/ink100.xml><?xml version="1.0" encoding="utf-8"?>
+<inkml:ink xmlns:inkml="http://www.w3.org/2003/InkML">
+  <inkml:definitions>
+    <inkml:context xml:id="ctx0">
+      <inkml:inkSource xml:id="inkSrc0">
+        <inkml:traceFormat>
+          <inkml:channel name="X" type="integer" max="3200" units="cm"/>
+          <inkml:channel name="Y" type="integer" max="1080" units="cm"/>
+        </inkml:traceFormat>
+        <inkml:channelProperties>
+          <inkml:channelProperty channel="X" name="resolution" value="66.666656" units="1/cm"/>
+          <inkml:channelProperty channel="Y" name="resolution" value="40.000000" units="1/cm"/>
+        </inkml:channelProperties>
+      </inkml:inkSource>
+    </inkml:context>
+    <inkml:brush xml:id="br0">
+      <inkml:brushProperty name="width" value="0.035278" units="cm"/>
+      <inkml:brushProperty name="height" value="0.035278" units="cm"/>
+      <inkml:brushProperty name="color" value="#ff0000"/>
+      <inkml:brushProperty name="fitToCurve" value="1"/>
+    </inkml:brush>
+  </inkml:definitions>
+  <inkml:trace contextRef="#ctx0" brushRef="#br0">0 0,'0'0</inkml:trace>
+</inkml:ink>
+</file>
+
+<file path=ppt/ink/ink101.xml><?xml version="1.0" encoding="utf-8"?>
+<inkml:ink xmlns:inkml="http://www.w3.org/2003/InkML">
+  <inkml:definitions>
+    <inkml:context xml:id="ctx0">
+      <inkml:inkSource xml:id="inkSrc0">
+        <inkml:traceFormat>
+          <inkml:channel name="X" type="integer" max="3200" units="cm"/>
+          <inkml:channel name="Y" type="integer" max="1080" units="cm"/>
+        </inkml:traceFormat>
+        <inkml:channelProperties>
+          <inkml:channelProperty channel="X" name="resolution" value="66.666656" units="1/cm"/>
+          <inkml:channelProperty channel="Y" name="resolution" value="40.000000" units="1/cm"/>
+        </inkml:channelProperties>
+      </inkml:inkSource>
+    </inkml:context>
+    <inkml:brush xml:id="br0">
+      <inkml:brushProperty name="width" value="0.035278" units="cm"/>
+      <inkml:brushProperty name="height" value="0.035278" units="cm"/>
+      <inkml:brushProperty name="color" value="#ff0000"/>
+      <inkml:brushProperty name="fitToCurve" value="1"/>
+    </inkml:brush>
+  </inkml:definitions>
+  <inkml:trace contextRef="#ctx0" brushRef="#br0">0 0,'0'0</inkml:trace>
+</inkml:ink>
+</file>
+
+<file path=ppt/ink/ink102.xml><?xml version="1.0" encoding="utf-8"?>
+<inkml:ink xmlns:inkml="http://www.w3.org/2003/InkML">
+  <inkml:definitions>
+    <inkml:context xml:id="ctx0">
+      <inkml:inkSource xml:id="inkSrc0">
+        <inkml:traceFormat>
+          <inkml:channel name="X" type="integer" max="3200" units="cm"/>
+          <inkml:channel name="Y" type="integer" max="1080" units="cm"/>
+        </inkml:traceFormat>
+        <inkml:channelProperties>
+          <inkml:channelProperty channel="X" name="resolution" value="66.666656" units="1/cm"/>
+          <inkml:channelProperty channel="Y" name="resolution" value="40.000000" units="1/cm"/>
+        </inkml:channelProperties>
+      </inkml:inkSource>
+    </inkml:context>
+    <inkml:brush xml:id="br0">
+      <inkml:brushProperty name="width" value="0.035278" units="cm"/>
+      <inkml:brushProperty name="height" value="0.035278" units="cm"/>
+      <inkml:brushProperty name="color" value="#ff0000"/>
+      <inkml:brushProperty name="fitToCurve" value="1"/>
+    </inkml:brush>
+  </inkml:definitions>
+  <inkml:trace contextRef="#ctx0" brushRef="#br0">26 8,'9'0,"-9"18,0 0,0-1,0 10,0-18,-9 17,0-8,-8 26,17-18,0-8,0-9,0-1,0-16,0-10,0 0,8-26,10 0,-9 9,0 0,-1 17,1 9,-9 0,9 9,-9-8,9 8,0 0,8 0,-17 8,18 10,-9 8,-9 1,9-1,-9 27,0-17,-27-28,27 1,0 9,0-9,0-18,0 0,0-35,0 17,18 1,-1 0,-8 17,0 0,0 9,9 0,-10 0,1 0,0 0,0 0,0 18,8 8,-8 18,-9-26,0-9,9-1,-9 10,0-9,0 0,-9-9,9 0</inkml:trace>
+</inkml:ink>
+</file>
+
+<file path=ppt/ink/ink103.xml><?xml version="1.0" encoding="utf-8"?>
+<inkml:ink xmlns:inkml="http://www.w3.org/2003/InkML">
+  <inkml:definitions>
+    <inkml:context xml:id="ctx0">
+      <inkml:inkSource xml:id="inkSrc0">
+        <inkml:traceFormat>
+          <inkml:channel name="X" type="integer" max="3200" units="cm"/>
+          <inkml:channel name="Y" type="integer" max="1080" units="cm"/>
+        </inkml:traceFormat>
+        <inkml:channelProperties>
+          <inkml:channelProperty channel="X" name="resolution" value="66.666656" units="1/cm"/>
+          <inkml:channelProperty channel="Y" name="resolution" value="40.000000" units="1/cm"/>
+        </inkml:channelProperties>
+      </inkml:inkSource>
+    </inkml:context>
+    <inkml:brush xml:id="br0">
+      <inkml:brushProperty name="width" value="0.035278" units="cm"/>
+      <inkml:brushProperty name="height" value="0.035278" units="cm"/>
+      <inkml:brushProperty name="color" value="#ff0000"/>
+      <inkml:brushProperty name="fitToCurve" value="1"/>
+    </inkml:brush>
+  </inkml:definitions>
+  <inkml:trace contextRef="#ctx0" brushRef="#br0">0 185,'0'-9,"8"9,1 0,0 0,9 0,-1 0,-8 0,9-9,-1 0,19-8,-28 17,10-9,0 0,-1 0,-17 0,0 1,0-1,0 0,0 0,-8 0,-10-8,-9-10,27 18,-8 9,-1-8,0 8,0 0,0 0,1 0,-1 0,-9 8,0 10,18 0,-8-1,8 1,0 0,0 8,0-17,0 17,8-8,1-9,0 17,18 1,-27-19,8-8,1 9,0 0,0-9,0 0,-1 0,10 0,-9 9,0 0,0-9,-1 9,-8-1,27-8,-27 0</inkml:trace>
+</inkml:ink>
+</file>
+
+<file path=ppt/ink/ink104.xml><?xml version="1.0" encoding="utf-8"?>
+<inkml:ink xmlns:inkml="http://www.w3.org/2003/InkML">
+  <inkml:definitions>
+    <inkml:context xml:id="ctx0">
+      <inkml:inkSource xml:id="inkSrc0">
+        <inkml:traceFormat>
+          <inkml:channel name="X" type="integer" max="3200" units="cm"/>
+          <inkml:channel name="Y" type="integer" max="1080" units="cm"/>
+        </inkml:traceFormat>
+        <inkml:channelProperties>
+          <inkml:channelProperty channel="X" name="resolution" value="66.666656" units="1/cm"/>
+          <inkml:channelProperty channel="Y" name="resolution" value="40.000000" units="1/cm"/>
+        </inkml:channelProperties>
+      </inkml:inkSource>
+    </inkml:context>
+    <inkml:brush xml:id="br0">
+      <inkml:brushProperty name="width" value="0.035278" units="cm"/>
+      <inkml:brushProperty name="height" value="0.035278" units="cm"/>
+      <inkml:brushProperty name="color" value="#ff0000"/>
+      <inkml:brushProperty name="fitToCurve" value="1"/>
+    </inkml:brush>
+  </inkml:definitions>
+  <inkml:trace contextRef="#ctx0" brushRef="#br0">0 0,'0'61,"0"-17,0 0,0 1,0-19,0-8,0-1,0-8,0 0,0 0,0-36,26 1,-17-1,0 1,-9 8,17-8,-17 17,9-9,0 18,0 0,-9-8,9-1,-1 9,1 0,9 0,-9 26,-1 1,19 8,-18 0,-9-8,0-10,0 10,0-10,0-8,0 9,-9-1,9-34,0 17</inkml:trace>
+</inkml:ink>
+</file>
+
+<file path=ppt/ink/ink105.xml><?xml version="1.0" encoding="utf-8"?>
+<inkml:ink xmlns:inkml="http://www.w3.org/2003/InkML">
+  <inkml:definitions>
+    <inkml:context xml:id="ctx0">
+      <inkml:inkSource xml:id="inkSrc0">
+        <inkml:traceFormat>
+          <inkml:channel name="X" type="integer" max="3200" units="cm"/>
+          <inkml:channel name="Y" type="integer" max="1080" units="cm"/>
+        </inkml:traceFormat>
+        <inkml:channelProperties>
+          <inkml:channelProperty channel="X" name="resolution" value="66.666656" units="1/cm"/>
+          <inkml:channelProperty channel="Y" name="resolution" value="40.000000" units="1/cm"/>
+        </inkml:channelProperties>
+      </inkml:inkSource>
+    </inkml:context>
+    <inkml:brush xml:id="br0">
+      <inkml:brushProperty name="width" value="0.035278" units="cm"/>
+      <inkml:brushProperty name="height" value="0.035278" units="cm"/>
+      <inkml:brushProperty name="color" value="#ff0000"/>
+      <inkml:brushProperty name="fitToCurve" value="1"/>
+    </inkml:brush>
+  </inkml:definitions>
+  <inkml:trace contextRef="#ctx0" brushRef="#br0">0 0,'8'8,"-8"19,9-10,0 10,9-1,-18 1,8-1,-8 1,9-10,-9 1,27 0,-27-1,17-8,-8 0,-9 0,18-9,-9-9,-1-9,19 9,-9-17,-1 17,1-17,-9 8,-1 0,1 1,0-27,0 17,-9 10,9 8,-9 0,9 18,-9 8,0 1,0-9,0 26,8 9,19 36,-10 43,-17-88,0 9,9-35,-9 0,0-9</inkml:trace>
+</inkml:ink>
+</file>
+
+<file path=ppt/ink/ink106.xml><?xml version="1.0" encoding="utf-8"?>
+<inkml:ink xmlns:inkml="http://www.w3.org/2003/InkML">
+  <inkml:definitions>
+    <inkml:context xml:id="ctx0">
+      <inkml:inkSource xml:id="inkSrc0">
+        <inkml:traceFormat>
+          <inkml:channel name="X" type="integer" max="3200" units="cm"/>
+          <inkml:channel name="Y" type="integer" max="1080" units="cm"/>
+        </inkml:traceFormat>
+        <inkml:channelProperties>
+          <inkml:channelProperty channel="X" name="resolution" value="66.666656" units="1/cm"/>
+          <inkml:channelProperty channel="Y" name="resolution" value="40.000000" units="1/cm"/>
+        </inkml:channelProperties>
+      </inkml:inkSource>
+    </inkml:context>
+    <inkml:brush xml:id="br0">
+      <inkml:brushProperty name="width" value="0.035278" units="cm"/>
+      <inkml:brushProperty name="height" value="0.035278" units="cm"/>
+      <inkml:brushProperty name="color" value="#ff0000"/>
+      <inkml:brushProperty name="fitToCurve" value="1"/>
+    </inkml:brush>
+  </inkml:definitions>
+  <inkml:trace contextRef="#ctx0" brushRef="#br0">0 0,'0'8,"0"1,0-9</inkml:trace>
+</inkml:ink>
+</file>
+
+<file path=ppt/ink/ink107.xml><?xml version="1.0" encoding="utf-8"?>
+<inkml:ink xmlns:inkml="http://www.w3.org/2003/InkML">
+  <inkml:definitions>
+    <inkml:context xml:id="ctx0">
+      <inkml:inkSource xml:id="inkSrc0">
+        <inkml:traceFormat>
+          <inkml:channel name="X" type="integer" max="3200" units="cm"/>
+          <inkml:channel name="Y" type="integer" max="1080" units="cm"/>
+        </inkml:traceFormat>
+        <inkml:channelProperties>
+          <inkml:channelProperty channel="X" name="resolution" value="66.666656" units="1/cm"/>
+          <inkml:channelProperty channel="Y" name="resolution" value="40.000000" units="1/cm"/>
+        </inkml:channelProperties>
+      </inkml:inkSource>
+    </inkml:context>
+    <inkml:brush xml:id="br0">
+      <inkml:brushProperty name="width" value="0.035278" units="cm"/>
+      <inkml:brushProperty name="height" value="0.035278" units="cm"/>
+      <inkml:brushProperty name="color" value="#ff0000"/>
+      <inkml:brushProperty name="fitToCurve" value="1"/>
+    </inkml:brush>
+  </inkml:definitions>
+  <inkml:trace contextRef="#ctx0" brushRef="#br0">440 0,'-8'0,"-1"0,-9 0,9 0,1 0,-10 0,0 0,-8 0,8 0,1 0,-10 0,-43 8,34 1,1 0,9 9,-1-1,1 1,-18 26,44-35,26 0,-8 8,-10-8,19 0,-9 9,-1-18,-8 8,9-8,-1 9,10-9,-10 0,-8 0,9 0,-1 0,1 9,9-9,-10 0,1 0,-1-9,-8 9,-9 0</inkml:trace>
+</inkml:ink>
+</file>
+
+<file path=ppt/ink/ink108.xml><?xml version="1.0" encoding="utf-8"?>
+<inkml:ink xmlns:inkml="http://www.w3.org/2003/InkML">
+  <inkml:definitions>
+    <inkml:context xml:id="ctx0">
+      <inkml:inkSource xml:id="inkSrc0">
+        <inkml:traceFormat>
+          <inkml:channel name="X" type="integer" max="3200" units="cm"/>
+          <inkml:channel name="Y" type="integer" max="1080" units="cm"/>
+        </inkml:traceFormat>
+        <inkml:channelProperties>
+          <inkml:channelProperty channel="X" name="resolution" value="66.666656" units="1/cm"/>
+          <inkml:channelProperty channel="Y" name="resolution" value="40.000000" units="1/cm"/>
+        </inkml:channelProperties>
+      </inkml:inkSource>
+    </inkml:context>
+    <inkml:brush xml:id="br0">
+      <inkml:brushProperty name="width" value="0.035278" units="cm"/>
+      <inkml:brushProperty name="height" value="0.035278" units="cm"/>
+      <inkml:brushProperty name="color" value="#ff0000"/>
+      <inkml:brushProperty name="fitToCurve" value="1"/>
+    </inkml:brush>
+  </inkml:definitions>
+  <inkml:trace contextRef="#ctx0" brushRef="#br0">158 52,'9'45,"0"-28,-9 1,0-1,-18-8,-17 27,9-19,17-8,0-9,0 0,0 0,-52-106,61 62,0 18,17 17,1-18,-1 19,1 8,-9 0,9 0,8 0,-8 0,-1 0,-8 0,0 8,-9 1,9 0,-9-9</inkml:trace>
+</inkml:ink>
+</file>
+
+<file path=ppt/ink/ink109.xml><?xml version="1.0" encoding="utf-8"?>
+<inkml:ink xmlns:inkml="http://www.w3.org/2003/InkML">
+  <inkml:definitions>
+    <inkml:context xml:id="ctx0">
+      <inkml:inkSource xml:id="inkSrc0">
+        <inkml:traceFormat>
+          <inkml:channel name="X" type="integer" max="3200" units="cm"/>
+          <inkml:channel name="Y" type="integer" max="1080" units="cm"/>
+        </inkml:traceFormat>
+        <inkml:channelProperties>
+          <inkml:channelProperty channel="X" name="resolution" value="66.666656" units="1/cm"/>
+          <inkml:channelProperty channel="Y" name="resolution" value="40.000000" units="1/cm"/>
+        </inkml:channelProperties>
+      </inkml:inkSource>
+    </inkml:context>
+    <inkml:brush xml:id="br0">
+      <inkml:brushProperty name="width" value="0.035278" units="cm"/>
+      <inkml:brushProperty name="height" value="0.035278" units="cm"/>
+      <inkml:brushProperty name="color" value="#ff0000"/>
+      <inkml:brushProperty name="fitToCurve" value="1"/>
+    </inkml:brush>
+  </inkml:definitions>
+  <inkml:trace contextRef="#ctx0" brushRef="#br0">0 0,'8'0,"1"0,9 0,-1 0,1 0,9 0,-10 0,10 0,-10 0,-8 0,-9 0</inkml:trace>
+</inkml:ink>
+</file>
+
 <file path=ppt/ink/ink11.xml><?xml version="1.0" encoding="utf-8"?>
 <inkml:ink xmlns:inkml="http://www.w3.org/2003/InkML">
   <inkml:definitions>
@@ -373,6 +633,266 @@
 </inkml:ink>
 </file>
 
+<file path=ppt/ink/ink110.xml><?xml version="1.0" encoding="utf-8"?>
+<inkml:ink xmlns:inkml="http://www.w3.org/2003/InkML">
+  <inkml:definitions>
+    <inkml:context xml:id="ctx0">
+      <inkml:inkSource xml:id="inkSrc0">
+        <inkml:traceFormat>
+          <inkml:channel name="X" type="integer" max="3200" units="cm"/>
+          <inkml:channel name="Y" type="integer" max="1080" units="cm"/>
+        </inkml:traceFormat>
+        <inkml:channelProperties>
+          <inkml:channelProperty channel="X" name="resolution" value="66.666656" units="1/cm"/>
+          <inkml:channelProperty channel="Y" name="resolution" value="40.000000" units="1/cm"/>
+        </inkml:channelProperties>
+      </inkml:inkSource>
+    </inkml:context>
+    <inkml:brush xml:id="br0">
+      <inkml:brushProperty name="width" value="0.035278" units="cm"/>
+      <inkml:brushProperty name="height" value="0.035278" units="cm"/>
+      <inkml:brushProperty name="color" value="#ff0000"/>
+      <inkml:brushProperty name="fitToCurve" value="1"/>
+    </inkml:brush>
+  </inkml:definitions>
+  <inkml:trace contextRef="#ctx0" brushRef="#br0">35 0,'0'17,"-18"18,1 18,17-35,0 17,0 1,0-19,0 10,0-10,17 10,1-18,-9 8,35 18,-35-26,17 9,-8-18,-10 0,1 9,0-9,-9 0</inkml:trace>
+</inkml:ink>
+</file>
+
+<file path=ppt/ink/ink111.xml><?xml version="1.0" encoding="utf-8"?>
+<inkml:ink xmlns:inkml="http://www.w3.org/2003/InkML">
+  <inkml:definitions>
+    <inkml:context xml:id="ctx0">
+      <inkml:inkSource xml:id="inkSrc0">
+        <inkml:traceFormat>
+          <inkml:channel name="X" type="integer" max="3200" units="cm"/>
+          <inkml:channel name="Y" type="integer" max="1080" units="cm"/>
+        </inkml:traceFormat>
+        <inkml:channelProperties>
+          <inkml:channelProperty channel="X" name="resolution" value="66.666656" units="1/cm"/>
+          <inkml:channelProperty channel="Y" name="resolution" value="40.000000" units="1/cm"/>
+        </inkml:channelProperties>
+      </inkml:inkSource>
+    </inkml:context>
+    <inkml:brush xml:id="br0">
+      <inkml:brushProperty name="width" value="0.035278" units="cm"/>
+      <inkml:brushProperty name="height" value="0.035278" units="cm"/>
+      <inkml:brushProperty name="color" value="#ff0000"/>
+      <inkml:brushProperty name="fitToCurve" value="1"/>
+    </inkml:brush>
+  </inkml:definitions>
+  <inkml:trace contextRef="#ctx0" brushRef="#br0">26 132,'26'0,"-8"0,9-18,-10 18,-8 0,17 0,1-9,-1-8,-17 17,0 0,-9-9,0 0,0-9,0 10,0-1,-18 0,1 0,8 0,-18 1,19 8,-10 0,-8 0,17 8,0-8,-9 9,9 9,-8-1,8 1,-17 35,26-35,0-10,0 19,8-1,10-17,-9 9,8-9,1-1,-9 1,0-9,0 0,-1 0,-8 9,9-9,0 0,0 0,8-18,-17 18</inkml:trace>
+</inkml:ink>
+</file>
+
+<file path=ppt/ink/ink112.xml><?xml version="1.0" encoding="utf-8"?>
+<inkml:ink xmlns:inkml="http://www.w3.org/2003/InkML">
+  <inkml:definitions>
+    <inkml:context xml:id="ctx0">
+      <inkml:inkSource xml:id="inkSrc0">
+        <inkml:traceFormat>
+          <inkml:channel name="X" type="integer" max="3200" units="cm"/>
+          <inkml:channel name="Y" type="integer" max="1080" units="cm"/>
+        </inkml:traceFormat>
+        <inkml:channelProperties>
+          <inkml:channelProperty channel="X" name="resolution" value="66.666656" units="1/cm"/>
+          <inkml:channelProperty channel="Y" name="resolution" value="40.000000" units="1/cm"/>
+        </inkml:channelProperties>
+      </inkml:inkSource>
+    </inkml:context>
+    <inkml:brush xml:id="br0">
+      <inkml:brushProperty name="width" value="0.035278" units="cm"/>
+      <inkml:brushProperty name="height" value="0.035278" units="cm"/>
+      <inkml:brushProperty name="color" value="#ff0000"/>
+      <inkml:brushProperty name="fitToCurve" value="1"/>
+    </inkml:brush>
+  </inkml:definitions>
+  <inkml:trace contextRef="#ctx0" brushRef="#br0">52 0,'0'8,"0"19,0-10,0 28,0 7,-8-7,-19 7,18-16,1 8,8-27,0-8,0-26,0-1,0-8,17-27,10 9,-10-9,1 17,8-8,27 18,-35 17,-9 9,0 9,8 8,-17 1,9 17,-9 9,0 1,9 7,-9-7,0-28,9 1,-9-9,0-1,0 1,-9 0,0-9,9 0</inkml:trace>
+</inkml:ink>
+</file>
+
+<file path=ppt/ink/ink113.xml><?xml version="1.0" encoding="utf-8"?>
+<inkml:ink xmlns:inkml="http://www.w3.org/2003/InkML">
+  <inkml:definitions>
+    <inkml:context xml:id="ctx0">
+      <inkml:inkSource xml:id="inkSrc0">
+        <inkml:traceFormat>
+          <inkml:channel name="X" type="integer" max="3200" units="cm"/>
+          <inkml:channel name="Y" type="integer" max="1080" units="cm"/>
+        </inkml:traceFormat>
+        <inkml:channelProperties>
+          <inkml:channelProperty channel="X" name="resolution" value="66.666656" units="1/cm"/>
+          <inkml:channelProperty channel="Y" name="resolution" value="40.000000" units="1/cm"/>
+        </inkml:channelProperties>
+      </inkml:inkSource>
+    </inkml:context>
+    <inkml:brush xml:id="br0">
+      <inkml:brushProperty name="width" value="0.035278" units="cm"/>
+      <inkml:brushProperty name="height" value="0.035278" units="cm"/>
+      <inkml:brushProperty name="color" value="#ff0000"/>
+      <inkml:brushProperty name="fitToCurve" value="1"/>
+    </inkml:brush>
+  </inkml:definitions>
+  <inkml:trace contextRef="#ctx0" brushRef="#br0">0 8,'8'0,"1"0,0-8,35 8,-17 0,-1 0,9 0,9 0,0 0,-8 0,-19 0,1 0,8 0,-17 0,0 0,-9 0</inkml:trace>
+</inkml:ink>
+</file>
+
+<file path=ppt/ink/ink114.xml><?xml version="1.0" encoding="utf-8"?>
+<inkml:ink xmlns:inkml="http://www.w3.org/2003/InkML">
+  <inkml:definitions>
+    <inkml:context xml:id="ctx0">
+      <inkml:inkSource xml:id="inkSrc0">
+        <inkml:traceFormat>
+          <inkml:channel name="X" type="integer" max="3200" units="cm"/>
+          <inkml:channel name="Y" type="integer" max="1080" units="cm"/>
+        </inkml:traceFormat>
+        <inkml:channelProperties>
+          <inkml:channelProperty channel="X" name="resolution" value="66.666656" units="1/cm"/>
+          <inkml:channelProperty channel="Y" name="resolution" value="40.000000" units="1/cm"/>
+        </inkml:channelProperties>
+      </inkml:inkSource>
+    </inkml:context>
+    <inkml:brush xml:id="br0">
+      <inkml:brushProperty name="width" value="0.035278" units="cm"/>
+      <inkml:brushProperty name="height" value="0.035278" units="cm"/>
+      <inkml:brushProperty name="color" value="#ff0000"/>
+      <inkml:brushProperty name="fitToCurve" value="1"/>
+    </inkml:brush>
+  </inkml:definitions>
+  <inkml:trace contextRef="#ctx0" brushRef="#br0">26 0,'0'17,"0"-8,0 26,-9 9,-8 0,17 9,0-9,0 1,0-10,0-9,0 1,0-10,0 1,8 8,-8 1,18-1,8 1,-8-10,0 10,-9-27,-9 9,8-9,1 0,0 0,9 0,8 0,1-9,-19 0,10 0,-9 9,-9 0</inkml:trace>
+</inkml:ink>
+</file>
+
+<file path=ppt/ink/ink115.xml><?xml version="1.0" encoding="utf-8"?>
+<inkml:ink xmlns:inkml="http://www.w3.org/2003/InkML">
+  <inkml:definitions>
+    <inkml:context xml:id="ctx0">
+      <inkml:inkSource xml:id="inkSrc0">
+        <inkml:traceFormat>
+          <inkml:channel name="X" type="integer" max="3200" units="cm"/>
+          <inkml:channel name="Y" type="integer" max="1080" units="cm"/>
+        </inkml:traceFormat>
+        <inkml:channelProperties>
+          <inkml:channelProperty channel="X" name="resolution" value="66.666656" units="1/cm"/>
+          <inkml:channelProperty channel="Y" name="resolution" value="40.000000" units="1/cm"/>
+        </inkml:channelProperties>
+      </inkml:inkSource>
+    </inkml:context>
+    <inkml:brush xml:id="br0">
+      <inkml:brushProperty name="width" value="0.035278" units="cm"/>
+      <inkml:brushProperty name="height" value="0.035278" units="cm"/>
+      <inkml:brushProperty name="color" value="#ff0000"/>
+      <inkml:brushProperty name="fitToCurve" value="1"/>
+    </inkml:brush>
+  </inkml:definitions>
+  <inkml:trace contextRef="#ctx0" brushRef="#br0">264 35,'-9'-9,"-17"9,17-9,-9 0,1 9,8 0,-9 0,1-8,8 8,0 0,0 0,-35 0,26 8,1-8,-10 9,19-9,8 9,0 0,8 8,1-8,9 9,-18 8,17-8,-8 0,9-1,0 19,-10-28,-8 10,9 0,9-10,-18 1,9 0,-1 0,10 0,-9-9,0 9,-9-1,9-8,-1 9,1-9,-9 18,27-9,-19 8,1-8,0 18,0-27,-9 8,9 1,-9 0,-9 0,9 0,-18-9,1 8,-1 10,-8-9,-1 0,1-9,-1 0,18 0,1 0,-1 0,0 0,0 0,0 0,9 0</inkml:trace>
+</inkml:ink>
+</file>
+
+<file path=ppt/ink/ink116.xml><?xml version="1.0" encoding="utf-8"?>
+<inkml:ink xmlns:inkml="http://www.w3.org/2003/InkML">
+  <inkml:definitions>
+    <inkml:context xml:id="ctx0">
+      <inkml:inkSource xml:id="inkSrc0">
+        <inkml:traceFormat>
+          <inkml:channel name="X" type="integer" max="3200" units="cm"/>
+          <inkml:channel name="Y" type="integer" max="1080" units="cm"/>
+        </inkml:traceFormat>
+        <inkml:channelProperties>
+          <inkml:channelProperty channel="X" name="resolution" value="66.666656" units="1/cm"/>
+          <inkml:channelProperty channel="Y" name="resolution" value="40.000000" units="1/cm"/>
+        </inkml:channelProperties>
+      </inkml:inkSource>
+    </inkml:context>
+    <inkml:brush xml:id="br0">
+      <inkml:brushProperty name="width" value="0.035278" units="cm"/>
+      <inkml:brushProperty name="height" value="0.035278" units="cm"/>
+      <inkml:brushProperty name="color" value="#ff0000"/>
+      <inkml:brushProperty name="fitToCurve" value="1"/>
+    </inkml:brush>
+  </inkml:definitions>
+  <inkml:trace contextRef="#ctx0" brushRef="#br0">88 0,'-9'8,"0"10,9 0,0 8,0-17,0 9,-9 8,0-8,9-1,-8 10,-1-10,-9 10,9 17,1-35,8 8,0-8,17-18,-8-8,9-1,-18-8,26-1,-17 10,-9 8,9-9,0 9,-1 9,1 0,0 0,-9 9,0 0,9 9,-9-10,0 1,-9 18,-9-1,18 1,0-10,0 10,-17-1,8 1,0-27,0 8,9-8</inkml:trace>
+</inkml:ink>
+</file>
+
+<file path=ppt/ink/ink117.xml><?xml version="1.0" encoding="utf-8"?>
+<inkml:ink xmlns:inkml="http://www.w3.org/2003/InkML">
+  <inkml:definitions>
+    <inkml:context xml:id="ctx0">
+      <inkml:inkSource xml:id="inkSrc0">
+        <inkml:traceFormat>
+          <inkml:channel name="X" type="integer" max="3200" units="cm"/>
+          <inkml:channel name="Y" type="integer" max="1080" units="cm"/>
+        </inkml:traceFormat>
+        <inkml:channelProperties>
+          <inkml:channelProperty channel="X" name="resolution" value="66.666656" units="1/cm"/>
+          <inkml:channelProperty channel="Y" name="resolution" value="40.000000" units="1/cm"/>
+        </inkml:channelProperties>
+      </inkml:inkSource>
+    </inkml:context>
+    <inkml:brush xml:id="br0">
+      <inkml:brushProperty name="width" value="0.035278" units="cm"/>
+      <inkml:brushProperty name="height" value="0.035278" units="cm"/>
+      <inkml:brushProperty name="color" value="#ff0000"/>
+      <inkml:brushProperty name="fitToCurve" value="1"/>
+    </inkml:brush>
+  </inkml:definitions>
+  <inkml:trace contextRef="#ctx0" brushRef="#br0">0 97,'88'-27,"-71"18,-8 9,0-9,0 9,-9-8,9 8,-9-9,0 0,0 0,0 0,0 1,-9 8,0 0,0 0,0 0,1 0,8 8,0 1,-9 0,0 0,9 0,-9-1,9 1,-9 0,0 26,9-26,9-9,-9 9,9-9,-9 9,18-9,-18 9,9-9,8 0,-8 0,0 0,0 0,-1 0,1 0,-9 0</inkml:trace>
+</inkml:ink>
+</file>
+
+<file path=ppt/ink/ink118.xml><?xml version="1.0" encoding="utf-8"?>
+<inkml:ink xmlns:inkml="http://www.w3.org/2003/InkML">
+  <inkml:definitions>
+    <inkml:context xml:id="ctx0">
+      <inkml:inkSource xml:id="inkSrc0">
+        <inkml:traceFormat>
+          <inkml:channel name="X" type="integer" max="3200" units="cm"/>
+          <inkml:channel name="Y" type="integer" max="1080" units="cm"/>
+        </inkml:traceFormat>
+        <inkml:channelProperties>
+          <inkml:channelProperty channel="X" name="resolution" value="66.666656" units="1/cm"/>
+          <inkml:channelProperty channel="Y" name="resolution" value="40.000000" units="1/cm"/>
+        </inkml:channelProperties>
+      </inkml:inkSource>
+    </inkml:context>
+    <inkml:brush xml:id="br0">
+      <inkml:brushProperty name="width" value="0.035278" units="cm"/>
+      <inkml:brushProperty name="height" value="0.035278" units="cm"/>
+      <inkml:brushProperty name="color" value="#ff0000"/>
+      <inkml:brushProperty name="fitToCurve" value="1"/>
+    </inkml:brush>
+  </inkml:definitions>
+  <inkml:trace contextRef="#ctx0" brushRef="#br0">105 70,'0'-9,"0"0,-8 9,-1-8,0-1,0 9,0 0,0 0,1 0,-1 0,0 0,0 9,9-1,-9 1,9 0,-8 0,8 0,0 8,0-8,0 0,0 0,8-9,10 0,-9 0,8-9,-8 0,9-8,0 8,-1-9,1 0,-1 1,-8 17,-9-18,18 1,-9 17,0 0,-18 0,9 17,0-8,0 17,-18 1,18-18,0 17,0-17,0 0,0 0,0-1,0-8</inkml:trace>
+</inkml:ink>
+</file>
+
+<file path=ppt/ink/ink119.xml><?xml version="1.0" encoding="utf-8"?>
+<inkml:ink xmlns:inkml="http://www.w3.org/2003/InkML">
+  <inkml:definitions>
+    <inkml:context xml:id="ctx0">
+      <inkml:inkSource xml:id="inkSrc0">
+        <inkml:traceFormat>
+          <inkml:channel name="X" type="integer" max="3200" units="cm"/>
+          <inkml:channel name="Y" type="integer" max="1080" units="cm"/>
+        </inkml:traceFormat>
+        <inkml:channelProperties>
+          <inkml:channelProperty channel="X" name="resolution" value="66.666656" units="1/cm"/>
+          <inkml:channelProperty channel="Y" name="resolution" value="40.000000" units="1/cm"/>
+        </inkml:channelProperties>
+      </inkml:inkSource>
+    </inkml:context>
+    <inkml:brush xml:id="br0">
+      <inkml:brushProperty name="width" value="0.035278" units="cm"/>
+      <inkml:brushProperty name="height" value="0.035278" units="cm"/>
+      <inkml:brushProperty name="color" value="#ff0000"/>
+      <inkml:brushProperty name="fitToCurve" value="1"/>
+    </inkml:brush>
+  </inkml:definitions>
+  <inkml:trace contextRef="#ctx0" brushRef="#br0">185 0,'0'17,"0"-8,0 26,0 1,0 8,-18-27,18-8,-9 18,0-1,9-8,0-10,0-16,0-1,0-9,-8 1,8 8,0-9,-9 0,0 18,0-8,9-10,-9 18,1-9,-1 0,0 9,0 0,0 0,0 9,1 0,-10-9,18 9,-18 8,10 1,8 0,0-1,0-8,0 0,0 9,8-10,1-8,-9 9,18 0,-9-9,-1 9,1 0,0 0,0-9,0 0,0 0,-1 0,-16 0,8 0</inkml:trace>
+</inkml:ink>
+</file>
+
 <file path=ppt/ink/ink12.xml><?xml version="1.0" encoding="utf-8"?>
 <inkml:ink xmlns:inkml="http://www.w3.org/2003/InkML">
   <inkml:definitions>
@@ -396,6 +916,110 @@
     </inkml:brush>
   </inkml:definitions>
   <inkml:trace contextRef="#ctx0" brushRef="#br0">0 126,'21'0,"0"0,0 0,21 0,1 0,41-21,-20 0,-43 21,21-21,43 21,-22-21,1 21,-22 0,43 0,-22 0,43 0,21 0,-84 0,20 0,1 0,-22-21,21 21,22 0,-43 0,85 0,-63 0,-22 0,1 0,84 0,-106 0,42 0,-42 0,22 0,41 0,-41-21,-1 21,22 0,-43 0,21 0,0 0,1 0,20 0,1 0,-22 0,0 0,64 0,-63 0,-1 0,21 0,1 0,-43 0,43 0,20 0,43 0,-21 0,0 0,-21 0,20 0,-41 0,42 0,-64 0,0 0,22 0,-22 0,-21 0,43 0,-1 0,43 0,-63 0,20 0,43 0,-43 0,1 0,-1 0,22 0,-21 0,-1 21,-42-21,0 0,43 0,-22 0,-21 0,43 0,-1 0,-41 0,83 0,-83 21,20-21,0 21,-21-21,22 0,-1 0,-21 0,0 0,-21 21,0-21</inkml:trace>
+</inkml:ink>
+</file>
+
+<file path=ppt/ink/ink120.xml><?xml version="1.0" encoding="utf-8"?>
+<inkml:ink xmlns:inkml="http://www.w3.org/2003/InkML">
+  <inkml:definitions>
+    <inkml:context xml:id="ctx0">
+      <inkml:inkSource xml:id="inkSrc0">
+        <inkml:traceFormat>
+          <inkml:channel name="X" type="integer" max="3200" units="cm"/>
+          <inkml:channel name="Y" type="integer" max="1080" units="cm"/>
+        </inkml:traceFormat>
+        <inkml:channelProperties>
+          <inkml:channelProperty channel="X" name="resolution" value="66.666656" units="1/cm"/>
+          <inkml:channelProperty channel="Y" name="resolution" value="40.000000" units="1/cm"/>
+        </inkml:channelProperties>
+      </inkml:inkSource>
+    </inkml:context>
+    <inkml:brush xml:id="br0">
+      <inkml:brushProperty name="width" value="0.035278" units="cm"/>
+      <inkml:brushProperty name="height" value="0.035278" units="cm"/>
+      <inkml:brushProperty name="color" value="#ff0000"/>
+      <inkml:brushProperty name="fitToCurve" value="1"/>
+    </inkml:brush>
+  </inkml:definitions>
+  <inkml:trace contextRef="#ctx0" brushRef="#br0">0 123,'8'0,"1"0,0 0,9 0,-1-9,27 0,-35 1,18 8,-10-9,-17 0,9 0,0 0,0 0,0 9,-1-8,-8-1,0 0,0 0,-8 0,-1 9,-9-8,-8 8,17 0,0 0,0 0,0 0,-8 0,-1 0,9 17,-8-17,8 18,0 8,9-17,0 18,0-10,0-8,18 9,-18-1,17-8,1 18,-9-19,0-8,-1 9,1 0,18 0,-19-9,10 0,-9 9,9-1,-10-8,1 0,0 0,0-8,-9 8</inkml:trace>
+</inkml:ink>
+</file>
+
+<file path=ppt/ink/ink121.xml><?xml version="1.0" encoding="utf-8"?>
+<inkml:ink xmlns:inkml="http://www.w3.org/2003/InkML">
+  <inkml:definitions>
+    <inkml:context xml:id="ctx0">
+      <inkml:inkSource xml:id="inkSrc0">
+        <inkml:traceFormat>
+          <inkml:channel name="X" type="integer" max="3200" units="cm"/>
+          <inkml:channel name="Y" type="integer" max="1080" units="cm"/>
+        </inkml:traceFormat>
+        <inkml:channelProperties>
+          <inkml:channelProperty channel="X" name="resolution" value="66.666656" units="1/cm"/>
+          <inkml:channelProperty channel="Y" name="resolution" value="40.000000" units="1/cm"/>
+        </inkml:channelProperties>
+      </inkml:inkSource>
+    </inkml:context>
+    <inkml:brush xml:id="br0">
+      <inkml:brushProperty name="width" value="0.035278" units="cm"/>
+      <inkml:brushProperty name="height" value="0.035278" units="cm"/>
+      <inkml:brushProperty name="color" value="#ff0000"/>
+      <inkml:brushProperty name="fitToCurve" value="1"/>
+    </inkml:brush>
+  </inkml:definitions>
+  <inkml:trace contextRef="#ctx0" brushRef="#br0">8 0,'0'17,"0"10,0-10,0 1,0 8,0-17,0 18,0-1,0-8,0-1,0 1,-8-9,8 8,0-8,0 0,0 0,0 0,0-27,0 0,8-8,10 0,-9-1,-9 9,26-26,-17 27,0 17,0-18,0 9,-1 9,1 0,0 0,0 0,0 0,-1 0,-8 0</inkml:trace>
+</inkml:ink>
+</file>
+
+<file path=ppt/ink/ink122.xml><?xml version="1.0" encoding="utf-8"?>
+<inkml:ink xmlns:inkml="http://www.w3.org/2003/InkML">
+  <inkml:definitions>
+    <inkml:context xml:id="ctx0">
+      <inkml:inkSource xml:id="inkSrc0">
+        <inkml:traceFormat>
+          <inkml:channel name="X" type="integer" max="3200" units="cm"/>
+          <inkml:channel name="Y" type="integer" max="1080" units="cm"/>
+        </inkml:traceFormat>
+        <inkml:channelProperties>
+          <inkml:channelProperty channel="X" name="resolution" value="66.666656" units="1/cm"/>
+          <inkml:channelProperty channel="Y" name="resolution" value="40.000000" units="1/cm"/>
+        </inkml:channelProperties>
+      </inkml:inkSource>
+    </inkml:context>
+    <inkml:brush xml:id="br0">
+      <inkml:brushProperty name="width" value="0.035278" units="cm"/>
+      <inkml:brushProperty name="height" value="0.035278" units="cm"/>
+      <inkml:brushProperty name="color" value="#ff0000"/>
+      <inkml:brushProperty name="fitToCurve" value="1"/>
+    </inkml:brush>
+  </inkml:definitions>
+  <inkml:trace contextRef="#ctx0" brushRef="#br0">8 0,'-8'0,"8"0</inkml:trace>
+</inkml:ink>
+</file>
+
+<file path=ppt/ink/ink123.xml><?xml version="1.0" encoding="utf-8"?>
+<inkml:ink xmlns:inkml="http://www.w3.org/2003/InkML">
+  <inkml:definitions>
+    <inkml:context xml:id="ctx0">
+      <inkml:inkSource xml:id="inkSrc0">
+        <inkml:traceFormat>
+          <inkml:channel name="X" type="integer" max="3200" units="cm"/>
+          <inkml:channel name="Y" type="integer" max="1080" units="cm"/>
+        </inkml:traceFormat>
+        <inkml:channelProperties>
+          <inkml:channelProperty channel="X" name="resolution" value="66.666656" units="1/cm"/>
+          <inkml:channelProperty channel="Y" name="resolution" value="40.000000" units="1/cm"/>
+        </inkml:channelProperties>
+      </inkml:inkSource>
+    </inkml:context>
+    <inkml:brush xml:id="br0">
+      <inkml:brushProperty name="width" value="0.035278" units="cm"/>
+      <inkml:brushProperty name="height" value="0.035278" units="cm"/>
+      <inkml:brushProperty name="color" value="#ff0000"/>
+      <inkml:brushProperty name="fitToCurve" value="1"/>
+    </inkml:brush>
+  </inkml:definitions>
+  <inkml:trace contextRef="#ctx0" brushRef="#br0">0 0,'0'0</inkml:trace>
 </inkml:ink>
 </file>
 
@@ -1227,7 +1851,7 @@
       <inkml:brushProperty name="fitToCurve" value="1"/>
     </inkml:brush>
   </inkml:definitions>
-  <inkml:trace contextRef="#ctx0" brushRef="#br0">0 0,'0'0</inkml:trace>
+  <inkml:trace contextRef="#ctx0" brushRef="#br0">90 0,'-10'0,"0"0,0 0,0 0,0 0,10 10,-10-10,0 10,0-10,0 0,10 10,0 0,0-10</inkml:trace>
 </inkml:ink>
 </file>
 
@@ -1253,7 +1877,7 @@
       <inkml:brushProperty name="fitToCurve" value="1"/>
     </inkml:brush>
   </inkml:definitions>
-  <inkml:trace contextRef="#ctx0" brushRef="#br0">1418 0,'-22'148,"1"106,-63 42,20-21,-42-63,85-149,-85 149,0 42,64-148,-64 169,22 0,-1-148,43 21,-22 85,-21 0,43-106,-43 85,22-43,42-84,-22-1,22-20,0 42,0 21,0 0,0 21,21-42,-21-22,21 22,0 42,0 0,0-42,0 64,0-1,21 0,21 22,-21 42,0-170,-21 64,21 64,1-1,20 1,0-1,22 170,-22-64,64 128,-64-234,1-42,-43-84,42 42,-21-43,43 64,-43-85,21 107,0-86,1 64,20 0,-42-63,22-22,-22 21,0 1,0-1,22 43,-22-42,0 20,0-41,-21 20,21-42,0 106,22-21,-1 42,-21-84,-21 42,0 0,21-43,-21 1,22-1,-22 43,21-21,0-22,-21 1,21-43,0 42,0 43,1-64,-1 64,-21-42,0-22,21 0,-21 1,0-22,0 21,0-42</inkml:trace>
+  <inkml:trace contextRef="#ctx0" brushRef="#br0">262 70,'-31'40,"-49"31,49-41,1 0,-10 1,20-21,10 0,10 0,-10 0,0-10,30-10,0 0,-10 10,0 0,10 0,-20-10,20 10,-10 0,11 0,-11 0,0 0,0 0,0 0,0 0,0 0,0 0,0 0,-10-10,0 0,0-11,0 11,-10 10,10-10,-20-10,10 10,0-10,0 10,10 0,-10 0,10 0,-10 10,10-11,0 1,0 0,0 20,0 0,-11 1,11-1,-10 10,10-10,-10 0,10 0,0 0,0 0,0 0,-10-10,10 10,0 0,0 0,0 1,0-1,10-10,0 10,-10 0,10 0,-10 0,0 0,0 0,0 0,0 0,0 0,0 0,0 1,11-1,-11 0,10-10,-10 10,0 0,0 0,10-10,-10-10,10 0,0 0,-10-10,10 20,0-21,0 1,-10 10,0-10,10 20,0-10,0 0,-10 0,10 0,-10 0,10-1,1 1,-11-10,10 10,0-10,0-10,10 0,-10 9,0 1,0-10,0 10,0 10,-10-10,10 20,1-10,-11 10</inkml:trace>
 </inkml:ink>
 </file>
 
@@ -1279,7 +1903,7 @@
       <inkml:brushProperty name="fitToCurve" value="1"/>
     </inkml:brush>
   </inkml:definitions>
-  <inkml:trace contextRef="#ctx0" brushRef="#br0">656 126,'-22'0,"-41"43,-22 20,1-20,-43 62,84-62,-41 41,62-41,-20-1,21 0,0-20,0-22,0 21,21 0,21-21,0 21,106 0,-64 0,43-21,-21 43,21-22,-22 0,1 21,-64-42,0 0,22 22,-22-22,0 0,0 0,0 0,-42-43,0 22,-85-106,85 64,-43-22,-20-42,41 85,1-1,21-20,0 20,0 43,-1-42,-20 0,42 21,-21 21,-21-43,20 1,22 21,-21 0,0 0,21 42,0 42,0-21,21 22,22 42,-1 42,0 21,-21-63,22 21,-43-63,21-1,0 1,-21-43,21 21,0-21,-21 0,0 1,0-1,0 0,0-42,22-22,-22 1,21-43,0 1,-21-22,21-21,21 21,-20-63,20 84,-42 64,0 0,21 0,-21-1,0 1,0 0,0 21</inkml:trace>
+  <inkml:trace contextRef="#ctx0" brushRef="#br0">3656 1289,'-193'154,"-326"134,-655 290,19-271,693-268,366-39,39 0,57 19,19-19,19 19,155 1,-97-1,289 0,365 116,97-39,-482-96,-172 0,-97-19,-77 19,1 0,-1 0,0 0,0 0,-19-19,0-1,0-18,0-20,-57-96,-20 0,-193-308,-673-500,424 424,172 133,251 290,58 77,38 76,19 0,19 59,-18 230,-20-96,0-20,-20 78,-95 384,19-288,38-19,-134 519,172-558,-37-38,37-58,1 134,0-230,19-77,0-39,19-57,77-155,424-500,19-57,-135 153,58 1,-328 423,136-97,-39 59,0 57,-39 58,-57 38,-58 39,-39-1,-38 20</inkml:trace>
 </inkml:ink>
 </file>
 
@@ -1305,7 +1929,7 @@
       <inkml:brushProperty name="fitToCurve" value="1"/>
     </inkml:brush>
   </inkml:definitions>
-  <inkml:trace contextRef="#ctx0" brushRef="#br0">0 0,'21'0,"21"0,0 0,22 0,-22 0,-21 0,64 0,-64 0,21 0,-20 0,20 0,-21 0,21 0,-20 0,-1 0,0 0,0 0,0 0,-21 21,0 0,0 21,0-21,-21 0,0 85,21-85,-21 22,21-22,0 21,0-21,0 22,0-22,0 0,0 21,-21-20,21-1,-22 0,22 0,0 0,0 0,0 1,0-1,0 0,0 0,0 0,0 0,-21-21,21 22,0-1,0 21,0-21,0 0,-21-21,0 22,0-1,-22-21,1 0,0 0,21 21,-22-21,22 21,-21-21,21 0,-1 0,1 0,0 0,21 0</inkml:trace>
+  <inkml:trace contextRef="#ctx0" brushRef="#br0">173 38,'0'19,"-116"77,59-57,76-39,19 0,39-39,19 20,-38 19,-39 0,1 0,-40 0,-18-19,-20-20,20 20,-1 19,1 0,18 0,20 19,0 1,0-1,20 0,-20 20,19-20,-19 0,19 0,0-19,1-38,-1 38,0-58,0 39,20-20,-39 1,19 19,-19 0,0 19</inkml:trace>
 </inkml:ink>
 </file>
 
@@ -1331,7 +1955,7 @@
       <inkml:brushProperty name="fitToCurve" value="1"/>
     </inkml:brush>
   </inkml:definitions>
-  <inkml:trace contextRef="#ctx0" brushRef="#br0">190 0,'42'0,"64"105,-64-62,-20-1,62 0,-63 1,-21-22,22-21,-1 21,0 21,-21-21,0 1,-21-22,0 0,-22 0,1-22,-22 22,43 0,0 0,-21 0,21 0,-1 0,1 0,0 0,0 0,0 0,0 0,-1 0,44 0,-1 0,21 0,-21 0,22 0,-22 0,21-21,-21 21,0 0,1 0,-1 0,0 0,-21 43,-42-22,-64 106,63-64,-41 43,41-64,22 1,-42-1,63-21,-21 0,0-21,42 0,-21-21,21 21,-21-21,21 0,0 21,0-21,0 0,-21-1,22 1,-1 21,-21-21,42 0,-21-21,0 42,1-22,20 22,-21-21,0 21,0-21,1 21,-1 0,0 0,0 0,0 0,0 21,-21 0,22 1,-22-1,21 0,-21 0,21 0,-21 0,0 1,0-1,0 0,21 0,-21 21,0-42</inkml:trace>
+  <inkml:trace contextRef="#ctx0" brushRef="#br0">365 115,'-38'19,"18"20,-57 18,20 1,18-39,-19 39,39-58,-19 39,19-20,38-19,0 0,19 0,1 0,-20 0,58 0,-58 0,39 0,-19 0,-20 0,-19-19,19 19,-19-20,0 1,0 0,0-20,0 20,0 0,0 0,0-20,0 1,-19 38,19-39,0 20,0 0,-19-1,-1 1,1 19,19-19,0 0,0 0,-19 19,0 0,-1 19,20 0,0 0,-19 0,0 20,19-1,-19-18,19 18,0 1,-20-1,20 1,-19-1,19-19,0 39,0-39,0 1,0-1,0 0,19-38,1 0,18-20,20-38,0 0,-39 39,0-1,0 20,-19 0,0-1,20 20,-20 0</inkml:trace>
 </inkml:ink>
 </file>
 
@@ -1357,7 +1981,7 @@
       <inkml:brushProperty name="fitToCurve" value="1"/>
     </inkml:brush>
   </inkml:definitions>
-  <inkml:trace contextRef="#ctx0" brushRef="#br0">63 0,'0'42,"0"42,-21 22,0 42,21-105,0 63,0-85,-21 0,21 21,0-21,0 1,0-1,0 0,0-42,0-22,0 22,21-85,-21 85,21-21,-21-22,42 22,-42 0,21 42,-21-43,21 22,1 0,-1 0,0 21,0-21,0 21,0 0,1 0,-1 0,0 0,0 0,-21 21,0-21</inkml:trace>
+  <inkml:trace contextRef="#ctx0" brushRef="#br0">0 0,'0'0</inkml:trace>
 </inkml:ink>
 </file>
 
@@ -1383,7 +2007,7 @@
       <inkml:brushProperty name="fitToCurve" value="1"/>
     </inkml:brush>
   </inkml:definitions>
-  <inkml:trace contextRef="#ctx0" brushRef="#br0">380 253,'-21'0,"0"0,-21 22,-22-1,-20-21,62 0,-20 0,21 0,0 0,0-21,0-1,21 1,0 0,0-42,0 41,0 1,42-42,-21 42,21 0,-21 21,1 0,20 21,-21 0,0 0,0 0,-21 0,22-21,-22 21,0 1,0-1,0-21</inkml:trace>
+  <inkml:trace contextRef="#ctx0" brushRef="#br0">1418 0,'-22'148,"1"106,-63 42,20-21,-42-63,85-149,-85 149,0 42,64-148,-64 169,22 0,-1-148,43 21,-22 85,-21 0,43-106,-43 85,22-43,42-84,-22-1,22-20,0 42,0 21,0 0,0 21,21-42,-21-22,21 22,0 42,0 0,0-42,0 64,0-1,21 0,21 22,-21 42,0-170,-21 64,21 64,1-1,20 1,0-1,22 170,-22-64,64 128,-64-234,1-42,-43-84,42 42,-21-43,43 64,-43-85,21 107,0-86,1 64,20 0,-42-63,22-22,-22 21,0 1,0-1,22 43,-22-42,0 20,0-41,-21 20,21-42,0 106,22-21,-1 42,-21-84,-21 42,0 0,21-43,-21 1,22-1,-22 43,21-21,0-22,-21 1,21-43,0 42,0 43,1-64,-1 64,-21-42,0-22,21 0,-21 1,0-22,0 21,0-42</inkml:trace>
 </inkml:ink>
 </file>
 
@@ -1409,7 +2033,7 @@
       <inkml:brushProperty name="fitToCurve" value="1"/>
     </inkml:brush>
   </inkml:definitions>
-  <inkml:trace contextRef="#ctx0" brushRef="#br0">21 0,'0'21,"0"63,0 1,0-22,0 86,0-65,0-41,0 41,0-20,0-43,0 21,0 1,0-1,0-21,0 0,0 0,0 1,0-1,0 0,0 21,0-21,0 22,0-22,-21 0,21-21</inkml:trace>
+  <inkml:trace contextRef="#ctx0" brushRef="#br0">656 126,'-22'0,"-41"43,-22 20,1-20,-43 62,84-62,-41 41,62-41,-20-1,21 0,0-20,0-22,0 21,21 0,21-21,0 21,106 0,-64 0,43-21,-21 43,21-22,-22 0,1 21,-64-42,0 0,22 22,-22-22,0 0,0 0,0 0,-42-43,0 22,-85-106,85 64,-43-22,-20-42,41 85,1-1,21-20,0 20,0 43,-1-42,-20 0,42 21,-21 21,-21-43,20 1,22 21,-21 0,0 0,21 42,0 42,0-21,21 22,22 42,-1 42,0 21,-21-63,22 21,-43-63,21-1,0 1,-21-43,21 21,0-21,-21 0,0 1,0-1,0 0,0-42,22-22,-22 1,21-43,0 1,-21-22,21-21,21 21,-20-63,20 84,-42 64,0 0,21 0,-21-1,0 1,0 0,0 21</inkml:trace>
 </inkml:ink>
 </file>
 
@@ -1435,7 +2059,7 @@
       <inkml:brushProperty name="fitToCurve" value="1"/>
     </inkml:brush>
   </inkml:definitions>
-  <inkml:trace contextRef="#ctx0" brushRef="#br0">275 84,'42'-21,"0"0,1 21,-22-21,42 0,-42 21,1 0,-1 0,-21 21,0 0,-21-21,-22 42,1 22,-85 41,63-41,22-22,0 22,-1-43,1 21,21-42,0 21,0 1,0-22,21 21,0-42,0-1,42-20,-42 21,21 0,0 0,0 21,0 0,1 0,-1 0,0 0,0 0,0 0,0 0,1 21,-1 21,21-42,0 42,-20 22,20-22,-21 1,0-1,0-21,1 21,-1-20,-21-1,0-21</inkml:trace>
+  <inkml:trace contextRef="#ctx0" brushRef="#br0">0 0,'21'0,"21"0,0 0,22 0,-22 0,-21 0,64 0,-64 0,21 0,-20 0,20 0,-21 0,21 0,-20 0,-1 0,0 0,0 0,0 0,-21 21,0 0,0 21,0-21,-21 0,0 85,21-85,-21 22,21-22,0 21,0-21,0 22,0-22,0 0,0 21,-21-20,21-1,-22 0,22 0,0 0,0 0,0 1,0-1,0 0,0 0,0 0,0 0,-21-21,21 22,0-1,0 21,0-21,0 0,-21-21,0 22,0-1,-22-21,1 0,0 0,21 21,-22-21,22 21,-21-21,21 0,-1 0,1 0,0 0,21 0</inkml:trace>
 </inkml:ink>
 </file>
 
@@ -1487,7 +2111,7 @@
       <inkml:brushProperty name="fitToCurve" value="1"/>
     </inkml:brush>
   </inkml:definitions>
-  <inkml:trace contextRef="#ctx0" brushRef="#br0">0 21,'21'0,"0"-21,0 21,0 0,21 0,-20 0,-1 0,21 0,-21 0,0 0,1 0,-1 0,-21 0</inkml:trace>
+  <inkml:trace contextRef="#ctx0" brushRef="#br0">190 0,'42'0,"64"105,-64-62,-20-1,62 0,-63 1,-21-22,22-21,-1 21,0 21,-21-21,0 1,-21-22,0 0,-22 0,1-22,-22 22,43 0,0 0,-21 0,21 0,-1 0,1 0,0 0,0 0,0 0,0 0,-1 0,44 0,-1 0,21 0,-21 0,22 0,-22 0,21-21,-21 21,0 0,1 0,-1 0,0 0,-21 43,-42-22,-64 106,63-64,-41 43,41-64,22 1,-42-1,63-21,-21 0,0-21,42 0,-21-21,21 21,-21-21,21 0,0 21,0-21,0 0,-21-1,22 1,-1 21,-21-21,42 0,-21-21,0 42,1-22,20 22,-21-21,0 21,0-21,1 21,-1 0,0 0,0 0,0 0,0 21,-21 0,22 1,-22-1,21 0,-21 0,21 0,-21 0,0 1,0-1,0 0,21 0,-21 21,0-42</inkml:trace>
 </inkml:ink>
 </file>
 
@@ -1513,7 +2137,7 @@
       <inkml:brushProperty name="fitToCurve" value="1"/>
     </inkml:brush>
   </inkml:definitions>
-  <inkml:trace contextRef="#ctx0" brushRef="#br0">84 0,'0'21,"0"42,0-21,0 22,0-22,-21-21,21 22,0-22,0 0,0 43,0-43,0 21,0 0,0-20,0-1,0 0,-21-21,21 21,0 0,0 0,-21-21,0 0,21 0</inkml:trace>
+  <inkml:trace contextRef="#ctx0" brushRef="#br0">63 0,'0'42,"0"42,-21 22,0 42,21-105,0 63,0-85,-21 0,21 21,0-21,0 1,0-1,0 0,0-42,0-22,0 22,21-85,-21 85,21-21,-21-22,42 22,-42 0,21 42,-21-43,21 22,1 0,-1 0,0 21,0-21,0 21,0 0,1 0,-1 0,0 0,0 0,-21 21,0-21</inkml:trace>
 </inkml:ink>
 </file>
 
@@ -1539,7 +2163,7 @@
       <inkml:brushProperty name="fitToCurve" value="1"/>
     </inkml:brush>
   </inkml:definitions>
-  <inkml:trace contextRef="#ctx0" brushRef="#br0">0 105,'0'21,"0"22,0-1,0-21,0 0,0 1,0-1,0 0,0-42,0-22,0 22,0 0,0-21,0 21,0-1,21 1,0 21,-21-42,0 21,21 21,0-21,-21 0,42 21,-20 0,-1 0,42 0,-42 0,43 0,-22 0,-21 0,22 21,-1-21,-21 21,0-21,1 0,-1 0,0 21,0 0,-21 0,-21-21,0 43,0-43,-22 21,22 0,-21-21,-1 21,1-21,0 0,-1 0,22 0,-21 0,21 0,0 0,-22 0,22 0,0 0,42 21,0-21,0 21,43-21,-43 0,21 22,1-22,-1 0,-21 0,0 0,1 0,-1 0,0 0,0 0,-21 0</inkml:trace>
+  <inkml:trace contextRef="#ctx0" brushRef="#br0">380 253,'-21'0,"0"0,-21 22,-22-1,-20-21,62 0,-20 0,21 0,0 0,0-21,0-1,21 1,0 0,0-42,0 41,0 1,42-42,-21 42,21 0,-21 21,1 0,20 21,-21 0,0 0,0 0,-21 0,22-21,-22 21,0 1,0-1,0-21</inkml:trace>
 </inkml:ink>
 </file>
 
@@ -1565,7 +2189,7 @@
       <inkml:brushProperty name="fitToCurve" value="1"/>
     </inkml:brush>
   </inkml:definitions>
-  <inkml:trace contextRef="#ctx0" brushRef="#br0">364 47,'0'23,"0"1,0-13,0 1,0 0,-23 11,-1-11,12 0,-35-12,12 12,0-12,23 0,0 0,-11 0,11-24,12 1,12-1,11 1,12-13,24 36,-47 0,47 12,-36 23,13-23,-36 12,11-13,-11 1,0 0,0 11,0-11,-35 12,12-13,-25 36,25-35,-12 35,-12-35,0 35,23-35,1-12,11 12,0-12,-23 0,11-24,13 12,11 1,0-1,11 0,48 0,23 1,-23 11,-24 0,-11 0,35 0,-47 0,11 0,-11-12,0 12,11-24,12-35,-23 48,0-36,0 23,11-35,-23 12,0 36,0-1,0 0,0 0,0 1,0 22,0 25,-12 22,-11 72,11-60,0 24,1-35,11-24,0 1,0-25,0 1,0 0,0 0,0-1,0 1,0-12</inkml:trace>
+  <inkml:trace contextRef="#ctx0" brushRef="#br0">21 0,'0'21,"0"63,0 1,0-22,0 86,0-65,0-41,0 41,0-20,0-43,0 21,0 1,0-1,0-21,0 0,0 0,0 1,0-1,0 0,0 21,0-21,0 22,0-22,-21 0,21-21</inkml:trace>
 </inkml:ink>
 </file>
 
@@ -1591,7 +2215,7 @@
       <inkml:brushProperty name="fitToCurve" value="1"/>
     </inkml:brush>
   </inkml:definitions>
-  <inkml:trace contextRef="#ctx0" brushRef="#br0">329 317,'-12'0,"0"0,-11 12,-13-12,-11-12,36-23,-1-24,12 35,0-46,12 23,35 0,-24 23,12 13,-11 11,0 11,-24 1,35 23,-23-23,-12 23,0-23,0 0,0 0,0-1,-36 25,13-13,-13 1,25-13,-60 13,36-24,0 0,-1 12,25-12,-36 0,35 11,0 1,0-12,1 0,11 12,23-12,-11 0,47 0,-36 12,59 11,-35 1,0-12,-35-1,12-11,-24 12,0 0,0 0,-24-12,24 11,-12-11,-11 12,11 0,0 11,-11 1,23-1,0 13,0 22,0 1,0-47,12 23,-1-35,-11 24,0-12,0-24,0 0,0 0,0-11,0-12,0 23,0-12,0 12,12 1,0-1,11-12,1 13,0-1,23-23,0 11,-24 24,1-12,-13 1,1-1,0 12,-12-12,0 0,12-23,-12-12,0 12,0-24,0 24,0-1,-12 25,12-13,0 1,0 11,0 47,-12 12,12 12,0-12,-12 71,12-83,0 35,0-46,0 11,0-11,0-13,0 1,-11-12,11 0</inkml:trace>
+  <inkml:trace contextRef="#ctx0" brushRef="#br0">275 84,'42'-21,"0"0,1 21,-22-21,42 0,-42 21,1 0,-1 0,-21 21,0 0,-21-21,-22 42,1 22,-85 41,63-41,22-22,0 22,-1-43,1 21,21-42,0 21,0 1,0-22,21 21,0-42,0-1,42-20,-42 21,21 0,0 0,0 21,0 0,1 0,-1 0,0 0,0 0,0 0,0 0,1 21,-1 21,21-42,0 42,-20 22,20-22,-21 1,0-1,0-21,1 21,-1-20,-21-1,0-21</inkml:trace>
 </inkml:ink>
 </file>
 
@@ -1617,7 +2241,7 @@
       <inkml:brushProperty name="fitToCurve" value="1"/>
     </inkml:brush>
   </inkml:definitions>
-  <inkml:trace contextRef="#ctx0" brushRef="#br0">211 176,'12'0,"11"0,-11 12,23-1,-23 1,0 12,-12-13,-12 13,-94 23,48-23,-13-1,48-11,-1 0,24-1,-12 13,1-1,11 24,11-23,1-12,12-1,-24 1,23-12,12 0,-11-23,-1 11,1 0,11-23,-11 23,11-35,-12 35,13-46,-13 22,1-23,23 1,-35 11,23 11,-35-11,12 36,-1-13,-11 12,12 12,-12-11,0 22,0 36,-12 24,-35 141,24 11,-24-58,23-95,24 1,-11-60,11 1,0 0,0-24,0 0,0-23,0-35,11 46,13-46,-1 46,24-11,-11-1,-13 25,12-1,12 12,-23 0,11-12,12 0,-23 1,-12 11,-12 0</inkml:trace>
+  <inkml:trace contextRef="#ctx0" brushRef="#br0">0 21,'21'0,"0"-21,0 21,0 0,21 0,-20 0,-1 0,21 0,-21 0,0 0,1 0,-1 0,-21 0</inkml:trace>
 </inkml:ink>
 </file>
 
@@ -1643,7 +2267,7 @@
       <inkml:brushProperty name="fitToCurve" value="1"/>
     </inkml:brush>
   </inkml:definitions>
-  <inkml:trace contextRef="#ctx0" brushRef="#br0">211 0,'0'42,"-21"-21,21 21,-21 1,0-22,-1 0,22 0,-21 0,21 0,-21 1,21-1,0 0,-21-21,0 0,21 21,-21 0,21 0,0 1,0-1,-21-21,21 21,0 0,21-21,0 0,0 0,0 0,21 0,1 0,-22-21,0 21,21 0,1 0,-1 0,0 0,-20 0,-1 0,21 0,-21 0,0 0,1 0,-1 0,0 0,0 0,0 0,0 0,1 0,-1 0,0 0,0 0,0 0,0 0,1 0,-1 0,0 0,-21-21,-21 21,0-21,-1-1,1-20,0 0,0-1,0 1,0 42,21-42,-22 21,22-1,-21 22,21-21,21 42,1-21,20 43,-21-1,21-21,-42 0,22-21,-1 0,-21 22,0-1,0 0,0 0,0 0,0 0,0 1,0-1,-21 0,-22 0,1 21,0-20,-1-1,22 21,0-42,-21 21,-1 22,43-1,-21-42,0 0,21 21,-21-21,21 21,0-21</inkml:trace>
+  <inkml:trace contextRef="#ctx0" brushRef="#br0">84 0,'0'21,"0"42,0-21,0 22,0-22,-21-21,21 22,0-22,0 0,0 43,0-43,0 21,0 0,0-20,0-1,0 0,-21-21,21 21,0 0,0 0,-21-21,0 0,21 0</inkml:trace>
 </inkml:ink>
 </file>
 
@@ -1669,7 +2293,7 @@
       <inkml:brushProperty name="fitToCurve" value="1"/>
     </inkml:brush>
   </inkml:definitions>
-  <inkml:trace contextRef="#ctx0" brushRef="#br0">305 39,'-8'8,"1"7,-17 24,8-23,-23 8,16-17,-9 9,17-8,-1-8,0 0,-7-16,7 8,0 1,1-17,-1 1,8 7,0-8,8 17,-7-1,7 0,0-8,0 8,7 1,1 7,0 0,0 0,0 0,0 0,7 7,1 9,-16-8,16-8,-9 16,1-9,0 9,0-16,-8 8,8 0,-8 0,0-8</inkml:trace>
+  <inkml:trace contextRef="#ctx0" brushRef="#br0">0 105,'0'21,"0"22,0-1,0-21,0 0,0 1,0-1,0 0,0-42,0-22,0 22,0 0,0-21,0 21,0-1,21 1,0 21,-21-42,0 21,21 21,0-21,-21 0,42 21,-20 0,-1 0,42 0,-42 0,43 0,-22 0,-21 0,22 21,-1-21,-21 21,0-21,1 0,-1 0,0 21,0 0,-21 0,-21-21,0 43,0-43,-22 21,22 0,-21-21,-1 21,1-21,0 0,-1 0,22 0,-21 0,21 0,0 0,-22 0,22 0,0 0,42 21,0-21,0 21,43-21,-43 0,21 22,1-22,-1 0,-21 0,0 0,1 0,-1 0,0 0,0 0,-21 0</inkml:trace>
 </inkml:ink>
 </file>
 
@@ -1695,7 +2319,7 @@
       <inkml:brushProperty name="fitToCurve" value="1"/>
     </inkml:brush>
   </inkml:definitions>
-  <inkml:trace contextRef="#ctx0" brushRef="#br0">0 0,'0'31,"7"24,1 54,8-14,-16-33,0-38,8-9,-8-15</inkml:trace>
+  <inkml:trace contextRef="#ctx0" brushRef="#br0">364 47,'0'23,"0"1,0-13,0 1,0 0,-23 11,-1-11,12 0,-35-12,12 12,0-12,23 0,0 0,-11 0,11-24,12 1,12-1,11 1,12-13,24 36,-47 0,47 12,-36 23,13-23,-36 12,11-13,-11 1,0 0,0 11,0-11,-35 12,12-13,-25 36,25-35,-12 35,-12-35,0 35,23-35,1-12,11 12,0-12,-23 0,11-24,13 12,11 1,0-1,11 0,48 0,23 1,-23 11,-24 0,-11 0,35 0,-47 0,11 0,-11-12,0 12,11-24,12-35,-23 48,0-36,0 23,11-35,-23 12,0 36,0-1,0 0,0 0,0 1,0 22,0 25,-12 22,-11 72,11-60,0 24,1-35,11-24,0 1,0-25,0 1,0 0,0 0,0-1,0 1,0-12</inkml:trace>
 </inkml:ink>
 </file>
 
@@ -1721,7 +2345,7 @@
       <inkml:brushProperty name="fitToCurve" value="1"/>
     </inkml:brush>
   </inkml:definitions>
-  <inkml:trace contextRef="#ctx0" brushRef="#br0">0 0,'0'31,"0"-8,7 9,1-1,0 0,16 32,-17-39,9-1,-8-7,8 15,-9-31,1 8,16 8,-9-16,1-8,0 0,-8 8,7-8,1-15,0 7,-1-7,1-9,-8 16,0-7,7-1,-7 1,8 7,-16 1,8 15,-8 0</inkml:trace>
+  <inkml:trace contextRef="#ctx0" brushRef="#br0">329 317,'-12'0,"0"0,-11 12,-13-12,-11-12,36-23,-1-24,12 35,0-46,12 23,35 0,-24 23,12 13,-11 11,0 11,-24 1,35 23,-23-23,-12 23,0-23,0 0,0 0,0-1,-36 25,13-13,-13 1,25-13,-60 13,36-24,0 0,-1 12,25-12,-36 0,35 11,0 1,0-12,1 0,11 12,23-12,-11 0,47 0,-36 12,59 11,-35 1,0-12,-35-1,12-11,-24 12,0 0,0 0,-24-12,24 11,-12-11,-11 12,11 0,0 11,-11 1,23-1,0 13,0 22,0 1,0-47,12 23,-1-35,-11 24,0-12,0-24,0 0,0 0,0-11,0-12,0 23,0-12,0 12,12 1,0-1,11-12,1 13,0-1,23-23,0 11,-24 24,1-12,-13 1,1-1,0 12,-12-12,0 0,12-23,-12-12,0 12,0-24,0 24,0-1,-12 25,12-13,0 1,0 11,0 47,-12 12,12 12,0-12,-12 71,12-83,0 35,0-46,0 11,0-11,0-13,0 1,-11-12,11 0</inkml:trace>
 </inkml:ink>
 </file>
 
@@ -1773,7 +2397,7 @@
       <inkml:brushProperty name="fitToCurve" value="1"/>
     </inkml:brush>
   </inkml:definitions>
-  <inkml:trace contextRef="#ctx0" brushRef="#br0">0 0,'7'0,"9"0,8 0,15 0,-24 0,1 0,-8 0,8 0,-9 0,1 0,0 0,0 0,-8 0</inkml:trace>
+  <inkml:trace contextRef="#ctx0" brushRef="#br0">211 176,'12'0,"11"0,-11 12,23-1,-23 1,0 12,-12-13,-12 13,-94 23,48-23,-13-1,48-11,-1 0,24-1,-12 13,1-1,11 24,11-23,1-12,12-1,-24 1,23-12,12 0,-11-23,-1 11,1 0,11-23,-11 23,11-35,-12 35,13-46,-13 22,1-23,23 1,-35 11,23 11,-35-11,12 36,-1-13,-11 12,12 12,-12-11,0 22,0 36,-12 24,-35 141,24 11,-24-58,23-95,24 1,-11-60,11 1,0 0,0-24,0 0,0-23,0-35,11 46,13-46,-1 46,24-11,-11-1,-13 25,12-1,12 12,-23 0,11-12,12 0,-23 1,-12 11,-12 0</inkml:trace>
 </inkml:ink>
 </file>
 
@@ -1799,7 +2423,7 @@
       <inkml:brushProperty name="fitToCurve" value="1"/>
     </inkml:brush>
   </inkml:definitions>
-  <inkml:trace contextRef="#ctx0" brushRef="#br0">15 0,'16'0,"0"0,-1 0,9 0,-9 0,1 0,8 0,-17 0,1 0,0 0,-8 15,0-7,0 8,0-1,-8-7,-23 24,0-9,7-7,8-1,1-7,7 0,0 0,-8-8,16 8,0 0,0-1,-7 1,7 8,0-8,0 0,0 0,0-1,0 1,7 8,1-16,0 8,-8 0,8-8,8 0,-1 0,9 0,7 0,0-8,9 0,-9 8,-15-8,-1 0,9 0,-16 8,7-7,-7 7,-8 0</inkml:trace>
+  <inkml:trace contextRef="#ctx0" brushRef="#br0">211 0,'0'42,"-21"-21,21 21,-21 1,0-22,-1 0,22 0,-21 0,21 0,-21 1,21-1,0 0,-21-21,0 0,21 21,-21 0,21 0,0 1,0-1,-21-21,21 21,0 0,21-21,0 0,0 0,0 0,21 0,1 0,-22-21,0 21,21 0,1 0,-1 0,0 0,-20 0,-1 0,21 0,-21 0,0 0,1 0,-1 0,0 0,0 0,0 0,0 0,1 0,-1 0,0 0,0 0,0 0,0 0,1 0,-1 0,0 0,-21-21,-21 21,0-21,-1-1,1-20,0 0,0-1,0 1,0 42,21-42,-22 21,22-1,-21 22,21-21,21 42,1-21,20 43,-21-1,21-21,-42 0,22-21,-1 0,-21 22,0-1,0 0,0 0,0 0,0 0,0 1,0-1,-21 0,-22 0,1 21,0-20,-1-1,22 21,0-42,-21 21,-1 22,43-1,-21-42,0 0,21 21,-21-21,21 21,0-21</inkml:trace>
 </inkml:ink>
 </file>
 
@@ -1825,7 +2449,7 @@
       <inkml:brushProperty name="fitToCurve" value="1"/>
     </inkml:brush>
   </inkml:definitions>
-  <inkml:trace contextRef="#ctx0" brushRef="#br0">54 250,'32'-7,"-17"-1,1 0,15 8,-23-8,8 8,-8 0,0 0,-1 0,1 0,-8 8,-8-8,1 8,-1-8,-16 15,1-7,15 0,0-8,0 8,0 0,1-8,-1 8,8-1,-8-7,-8 0,16 16,0-8,-8-8,-7 8,15 0,-8-1,0-7,8 8,0 0,-8-8,0 0,1 0,14 0,1 0,8 0,-8 0,15 0,1 0,-1-8,1-7,-9 7,1 0,-8 8,0 0,0 0,-8-8,7 0,-7 0,8-7,-8-9,0 1,0 7,8-8,-8 1,8-1,-8 1,8-1,-8 1,0 15,8-23,-8 23,0 0,8 8,-8-8,0 0,0 1,7 7,-7 15,8 1,-8 39,8-16,0 16,0-16,-8 8,0-8,0 0,0 1,0 15,0-16,0 16,0-16,-8 8,8-24,-8 1,8 7,-8 8,8-15,-8-1,8 1,-7 7,-1 1,0-9,8-23</inkml:trace>
+  <inkml:trace contextRef="#ctx0" brushRef="#br0">305 39,'-8'8,"1"7,-17 24,8-23,-23 8,16-17,-9 9,17-8,-1-8,0 0,-7-16,7 8,0 1,1-17,-1 1,8 7,0-8,8 17,-7-1,7 0,0-8,0 8,7 1,1 7,0 0,0 0,0 0,0 0,7 7,1 9,-16-8,16-8,-9 16,1-9,0 9,0-16,-8 8,8 0,-8 0,0-8</inkml:trace>
 </inkml:ink>
 </file>
 
@@ -1851,7 +2475,7 @@
       <inkml:brushProperty name="fitToCurve" value="1"/>
     </inkml:brush>
   </inkml:definitions>
-  <inkml:trace contextRef="#ctx0" brushRef="#br0">0 0,'15'0,"1"0,-8 0,0 0,-1 0,1 0,0 0,0 0,-8 7,8-7,-8 24,0-8,0 15,0-15,0-1,0 9,0-1,0-7,0-8,0 15,0-15,0 16,0 15,0-16,0-7,0-16</inkml:trace>
+  <inkml:trace contextRef="#ctx0" brushRef="#br0">0 0,'0'31,"7"24,1 54,8-14,-16-33,0-38,8-9,-8-15</inkml:trace>
 </inkml:ink>
 </file>
 
@@ -1877,7 +2501,7 @@
       <inkml:brushProperty name="fitToCurve" value="1"/>
     </inkml:brush>
   </inkml:definitions>
-  <inkml:trace contextRef="#ctx0" brushRef="#br0">313 0,'-16'23,"-7"24,-40 47,32-63,-8 40,15-40,-7 9,23-33,0 9,0 0,0-8,1-8,7 7,0 1,-8-8,0 8,0 0,8 0,0 0,-8-8,0 8,1-8,7 0</inkml:trace>
+  <inkml:trace contextRef="#ctx0" brushRef="#br0">0 0,'0'31,"0"-8,7 9,1-1,0 0,16 32,-17-39,9-1,-8-7,8 15,-9-31,1 8,16 8,-9-16,1-8,0 0,-8 8,7-8,1-15,0 7,-1-7,1-9,-8 16,0-7,7-1,-7 1,8 7,-16 1,8 15,-8 0</inkml:trace>
 </inkml:ink>
 </file>
 
@@ -1903,7 +2527,7 @@
       <inkml:brushProperty name="fitToCurve" value="1"/>
     </inkml:brush>
   </inkml:definitions>
-  <inkml:trace contextRef="#ctx0" brushRef="#br0">0 0,'15'31,"24"16,24 31,-24-46,-15 15,-1-8,1-23,-1 7,-7 1,0-1,-1-7,1-1,0-7,-1 8,1 0,0 7,-8-7,7 0,1-1,0 1,-8 0,-1-16,1 15,0-7,0 0,-8 0,8-8,-8 8,8-8,-8 0</inkml:trace>
+  <inkml:trace contextRef="#ctx0" brushRef="#br0">0 0,'7'0,"9"0,8 0,15 0,-24 0,1 0,-8 0,8 0,-9 0,1 0,0 0,0 0,-8 0</inkml:trace>
 </inkml:ink>
 </file>
 
@@ -1929,7 +2553,7 @@
       <inkml:brushProperty name="fitToCurve" value="1"/>
     </inkml:brush>
   </inkml:definitions>
-  <inkml:trace contextRef="#ctx0" brushRef="#br0">0 391,'7'0,"9"0,8 0,-1 0,40 0,-16 0,16 0,-1 0,9-7,7-1,-7 0,-1-16,-23 24,8-7,-23-1,-1 0,0 0,-15 8,0 0,-9-8,9 0,-8 1,0 7,0 0,0 0,-8-8,-8 0,-8-8,-8 8,-15-23,-8 7,0 1,-8-8,8-1,-31-15,54 32,1-9,7 16,8 8,1-8,7 1,7 7,1 0,8 0,-8 7,7 1,9 0,-16 0,7 0,9 0,-8-1,-9 9,25-8,-17 8,-7-9,8 1,0 8,-1-8,-7 7,8-7,0 8,7 0,-7-1,-8-7,-1 0,-7 0,8 0,0 0,-8 7,0 1,0 7,-8-15,0 16,-7-9,7 9,-8-8,8 7,1 1,-9-1,0 1,-7 7,7-15,8 7,0-7,-7 7,-1 9,-8-9,-23 56,16-40,-32 39,40-54,-16 23,23-39,16 0,-8-1,0 1,0-8,1 0,-1 0,16 0,-8-8,7 8,1-7,0 7,-8-8,8 0,0 8,0-16,-1 8,1 8,-8-7,8-1,0 8,-8 0</inkml:trace>
+  <inkml:trace contextRef="#ctx0" brushRef="#br0">15 0,'16'0,"0"0,-1 0,9 0,-9 0,1 0,8 0,-17 0,1 0,0 0,-8 15,0-7,0 8,0-1,-8-7,-23 24,0-9,7-7,8-1,1-7,7 0,0 0,-8-8,16 8,0 0,0-1,-7 1,7 8,0-8,0 0,0 0,0-1,0 1,7 8,1-16,0 8,-8 0,8-8,8 0,-1 0,9 0,7 0,0-8,9 0,-9 8,-15-8,-1 0,9 0,-16 8,7-7,-7 7,-8 0</inkml:trace>
 </inkml:ink>
 </file>
 
@@ -1955,7 +2579,7 @@
       <inkml:brushProperty name="fitToCurve" value="1"/>
     </inkml:brush>
   </inkml:definitions>
-  <inkml:trace contextRef="#ctx0" brushRef="#br0">0 0,'0'0</inkml:trace>
+  <inkml:trace contextRef="#ctx0" brushRef="#br0">54 250,'32'-7,"-17"-1,1 0,15 8,-23-8,8 8,-8 0,0 0,-1 0,1 0,-8 8,-8-8,1 8,-1-8,-16 15,1-7,15 0,0-8,0 8,0 0,1-8,-1 8,8-1,-8-7,-8 0,16 16,0-8,-8-8,-7 8,15 0,-8-1,0-7,8 8,0 0,-8-8,0 0,1 0,14 0,1 0,8 0,-8 0,15 0,1 0,-1-8,1-7,-9 7,1 0,-8 8,0 0,0 0,-8-8,7 0,-7 0,8-7,-8-9,0 1,0 7,8-8,-8 1,8-1,-8 1,8-1,-8 1,0 15,8-23,-8 23,0 0,8 8,-8-8,0 0,0 1,7 7,-7 15,8 1,-8 39,8-16,0 16,0-16,-8 8,0-8,0 0,0 1,0 15,0-16,0 16,0-16,-8 8,8-24,-8 1,8 7,-8 8,8-15,-8-1,8 1,-7 7,-1 1,0-9,8-23</inkml:trace>
 </inkml:ink>
 </file>
 
@@ -1981,7 +2605,7 @@
       <inkml:brushProperty name="fitToCurve" value="1"/>
     </inkml:brush>
   </inkml:definitions>
-  <inkml:trace contextRef="#ctx0" brushRef="#br0">7 31,'0'23,"0"32,0-39,0 0,0-1,0 17,-7-9,7 9,0-17,0 17,0-1,0 0,0-15,0 7,0 1,0-16,7 8,-7-9,8-7,-8 8,16-8,-8 0,7 0,-7-8,16-7,-16 7,7 0,9-16,-16 9,7-1,-7 0,8 1,-8 7,-1-16,9 1,-8-1,0 9,0-9,-8-7,8-1,-8-7,0 8,0 7,0 1,0 15,0 0,0 0,0 1,0 7</inkml:trace>
+  <inkml:trace contextRef="#ctx0" brushRef="#br0">0 0,'15'0,"1"0,-8 0,0 0,-1 0,1 0,0 0,0 0,-8 7,8-7,-8 24,0-8,0 15,0-15,0-1,0 9,0-1,0-7,0-8,0 15,0-15,0 16,0 15,0-16,0-7,0-16</inkml:trace>
 </inkml:ink>
 </file>
 
@@ -2007,7 +2631,7 @@
       <inkml:brushProperty name="fitToCurve" value="1"/>
     </inkml:brush>
   </inkml:definitions>
-  <inkml:trace contextRef="#ctx0" brushRef="#br0">0 407,'7'0,"1"0,16 0,-9 0,32 0,-23 0,-1 0,40-16,-31 16,-1-7,8-1,-8 8,-7 0,-8 0,7 0,-7-8,0 8,-1-8,9 8,-9 0,32-8,-31 0,8 8,-9-7,-7 7,8 0,-8 0,-1 0,1 0,0 0,0 0,-16 0,-8 0,1 0,-1 7,-39 9,32-8,-1 0,1 7,-1-7,1-8,-1 8,8-8,16 8,-15 0,-1 8,0-1,-15 17,23-32,0 7,1 9,-1-16,0 0,0 0,8 8,0 0,-8-8,24 0,-8 0,7 0,9 0,15 0,-15 0,7-8,-15 8,-8 0,-1 0,1 0,8 0,-16-8,8 8,0-8,-1 0,1 1,-8-9,8 0,0-7,-8-1,0 1,0-32,0 8,0-8,0 16,0-8,0 23,0-7,0 7,0 9,0-1,0 0,0 8,0 1,0 30,0 8,0 9,-8 14,-8 119,-31-1,40-101,-9-1,8-30,0-9,8-15,-8-1,8 1,0-8,0 0,0 0,-8-8,1 0,-1 23,-8-23,8 16,0-8,-31 15,24-15,-1 0,8-8,-8 0,1 0,-1 0,0-8,1 0,7 8,0-8,-8 0,1 1,15-1,-8 8,0 0,8-8,-8 8,8-8,-8 0,8 24,0 0,0 7,0-7,8 7,0 17,-8-25,0 9,8-16,-8 7,0-7,8-8,-8 8,7-8,-7 8,16-8,8 0,-1 0,1 0,15 0,0 0,-8 0,1 0,-17 0,9 0,-8 0,-1 0,-7 0,-8 0</inkml:trace>
+  <inkml:trace contextRef="#ctx0" brushRef="#br0">313 0,'-16'23,"-7"24,-40 47,32-63,-8 40,15-40,-7 9,23-33,0 9,0 0,0-8,1-8,7 7,0 1,-8-8,0 8,0 0,8 0,0 0,-8-8,0 8,1-8,7 0</inkml:trace>
 </inkml:ink>
 </file>
 
@@ -2059,7 +2683,7 @@
       <inkml:brushProperty name="fitToCurve" value="1"/>
     </inkml:brush>
   </inkml:definitions>
-  <inkml:trace contextRef="#ctx0" brushRef="#br0">674 54,'-32'40,"-38"38,31-39,31-15,-16-9,16-7,1-8,7-8,0 1,0-25,7-7,9-24,0 32,-1 7,-7 9,0-1,0 0,8 9,-1 7,-7 0,8 0,-1 7,1 9,-8 0,0-1,8-7,-9 0,1 8,0-1,-8 1,0 8,0 7,0-15,-16 31,-15 8,-47 54,15-62,-15 8,-9-23,17-17,7-7,-8-8,32 0,0 0,8 0,23 0,-8 0,8 0,1 0,7-8,7 0,9 8,8-7,30-1,1 8,0 0,8 0,54 8,-69-8,-33 0,9 0,-1 0,-15 0,0 0,0 0,0 0,-1 0,1 0,-8-8,-8 8,-7 0,7 0,-8-8,8 8,1 0,-1 8,0 7,-8-7,1 31,-1-7,16-9,-8-7,8 15,0-15,0 0,0-1,0-7,0 0,0 0,0 0,0-8</inkml:trace>
+  <inkml:trace contextRef="#ctx0" brushRef="#br0">0 0,'15'31,"24"16,24 31,-24-46,-15 15,-1-8,1-23,-1 7,-7 1,0-1,-1-7,1-1,0-7,-1 8,1 0,0 7,-8-7,7 0,1-1,0 1,-8 0,-1-16,1 15,0-7,0 0,-8 0,8-8,-8 8,8-8,-8 0</inkml:trace>
 </inkml:ink>
 </file>
 
@@ -2085,7 +2709,7 @@
       <inkml:brushProperty name="fitToCurve" value="1"/>
     </inkml:brush>
   </inkml:definitions>
-  <inkml:trace contextRef="#ctx0" brushRef="#br0">172 180,'0'15,"0"9,-8 0,-15 7,15-15,-8 7,8-23,0 0,-7 0,7 0,0 0,-8-8,1-15,-1-1,8 16,8-15,-8-1,1 9,7-1,0-8,7 9,17 15,-8 0,7 0,8 8,1 15,-1-7,-7-8,-9 7,-7-7,8 8,-8-16,0 8,-1-8,-7 8,8-8,8 0,-8-8,0 0,15 8,1-16,-9 0,9 9,-1-9,1-8,-8 9,-9 7,9-8,-8 1,8-1,-16 8,7-8,-7 1,0-1,0 8,0 0,0 1,-7 7,7 7,-8 9,8 15,-8 9,0 30,0-7,8-8,-8 15,1-31,-1 9,8-33,-8 9,8-16,0-1,0 1,0 0,0 8,0-8,0 7,8-7,0 0,-8 0,7 0,1-8,-8 0</inkml:trace>
+  <inkml:trace contextRef="#ctx0" brushRef="#br0">0 391,'7'0,"9"0,8 0,-1 0,40 0,-16 0,16 0,-1 0,9-7,7-1,-7 0,-1-16,-23 24,8-7,-23-1,-1 0,0 0,-15 8,0 0,-9-8,9 0,-8 1,0 7,0 0,0 0,-8-8,-8 0,-8-8,-8 8,-15-23,-8 7,0 1,-8-8,8-1,-31-15,54 32,1-9,7 16,8 8,1-8,7 1,7 7,1 0,8 0,-8 7,7 1,9 0,-16 0,7 0,9 0,-8-1,-9 9,25-8,-17 8,-7-9,8 1,0 8,-1-8,-7 7,8-7,0 8,7 0,-7-1,-8-7,-1 0,-7 0,8 0,0 0,-8 7,0 1,0 7,-8-15,0 16,-7-9,7 9,-8-8,8 7,1 1,-9-1,0 1,-7 7,7-15,8 7,0-7,-7 7,-1 9,-8-9,-23 56,16-40,-32 39,40-54,-16 23,23-39,16 0,-8-1,0 1,0-8,1 0,-1 0,16 0,-8-8,7 8,1-7,0 7,-8-8,8 0,0 8,0-16,-1 8,1 8,-8-7,8-1,0 8,-8 0</inkml:trace>
 </inkml:ink>
 </file>
 
@@ -2111,7 +2735,7 @@
       <inkml:brushProperty name="fitToCurve" value="1"/>
     </inkml:brush>
   </inkml:definitions>
-  <inkml:trace contextRef="#ctx0" brushRef="#br0">0 0,'0'15,"0"1,7-8,-7 0,0-1,0 1,0 0,0 8,0-8,0 15,0 1,-7 7,7-8,0 9,0-9,0-15,0 8,0-8,0 7,0-7,0 0,0 0,0 0,0 7,0 1,0-8,0 0,0 0,0-1,0 1,0-8</inkml:trace>
+  <inkml:trace contextRef="#ctx0" brushRef="#br0">0 0,'0'0</inkml:trace>
 </inkml:ink>
 </file>
 
@@ -2137,7 +2761,7 @@
       <inkml:brushProperty name="fitToCurve" value="1"/>
     </inkml:brush>
   </inkml:definitions>
-  <inkml:trace contextRef="#ctx0" brushRef="#br0">352 39,'8'15,"0"9,0 15,-8-23,8-1,-1 1,-7 8,0-9,0 1,8 8,0-1,-8-7,8 7,-8-7,8-8,-8 0,8-1,-8 1,0 0,0 0,0 0,0 0,0-1,0 1,0 0,0 8,0 7,0-7,0 8,8-1,-1 1,-7-9,0-7,0 0,0 0,0 0,0-24,0 0,0 1,-15-17,7-15,-31-78,7 46,17 24,7 8,0 0,0 32,8-1,0 8,-8 0,8 1,0-1,0 0,0 0,0 0,0 0,-8 8,8-7,-7 14,-1 1,0 0,0 0,0 8,-7-1,-1 1,0 7,0-15,1 16,7-1,-8-7,1-8,-1 7,-8 1,17-8,-9 0,0 0,8 0,1-8,-9 0,8 0,0 0,0 0,1 0,7 7,0-7</inkml:trace>
+  <inkml:trace contextRef="#ctx0" brushRef="#br0">7 31,'0'23,"0"32,0-39,0 0,0-1,0 17,-7-9,7 9,0-17,0 17,0-1,0 0,0-15,0 7,0 1,0-16,7 8,-7-9,8-7,-8 8,16-8,-8 0,7 0,-7-8,16-7,-16 7,7 0,9-16,-16 9,7-1,-7 0,8 1,-8 7,-1-16,9 1,-8-1,0 9,0-9,-8-7,8-1,-8-7,0 8,0 7,0 1,0 15,0 0,0 0,0 1,0 7</inkml:trace>
 </inkml:ink>
 </file>
 
@@ -2163,7 +2787,7 @@
       <inkml:brushProperty name="fitToCurve" value="1"/>
     </inkml:brush>
   </inkml:definitions>
-  <inkml:trace contextRef="#ctx0" brushRef="#br0">39 0,'15'0,"9"0,-1 0,1 0,-8 7,-1-7,-7 0,0 0,-8 8,0 0,0 0,0 0,0 7,0 9,-16-1,1 1,-1-8,-8 23,9-24,-24 25,31-25,-8 1,8-8,0 0,1 0,7-8</inkml:trace>
+  <inkml:trace contextRef="#ctx0" brushRef="#br0">0 407,'7'0,"1"0,16 0,-9 0,32 0,-23 0,-1 0,40-16,-31 16,-1-7,8-1,-8 8,-7 0,-8 0,7 0,-7-8,0 8,-1-8,9 8,-9 0,32-8,-31 0,8 8,-9-7,-7 7,8 0,-8 0,-1 0,1 0,0 0,0 0,-16 0,-8 0,1 0,-1 7,-39 9,32-8,-1 0,1 7,-1-7,1-8,-1 8,8-8,16 8,-15 0,-1 8,0-1,-15 17,23-32,0 7,1 9,-1-16,0 0,0 0,8 8,0 0,-8-8,24 0,-8 0,7 0,9 0,15 0,-15 0,7-8,-15 8,-8 0,-1 0,1 0,8 0,-16-8,8 8,0-8,-1 0,1 1,-8-9,8 0,0-7,-8-1,0 1,0-32,0 8,0-8,0 16,0-8,0 23,0-7,0 7,0 9,0-1,0 0,0 8,0 1,0 30,0 8,0 9,-8 14,-8 119,-31-1,40-101,-9-1,8-30,0-9,8-15,-8-1,8 1,0-8,0 0,0 0,-8-8,1 0,-1 23,-8-23,8 16,0-8,-31 15,24-15,-1 0,8-8,-8 0,1 0,-1 0,0-8,1 0,7 8,0-8,-8 0,1 1,15-1,-8 8,0 0,8-8,-8 8,8-8,-8 0,8 24,0 0,0 7,0-7,8 7,0 17,-8-25,0 9,8-16,-8 7,0-7,8-8,-8 8,7-8,-7 8,16-8,8 0,-1 0,1 0,15 0,0 0,-8 0,1 0,-17 0,9 0,-8 0,-1 0,-7 0,-8 0</inkml:trace>
 </inkml:ink>
 </file>
 
@@ -2189,7 +2813,7 @@
       <inkml:brushProperty name="fitToCurve" value="1"/>
     </inkml:brush>
   </inkml:definitions>
-  <inkml:trace contextRef="#ctx0" brushRef="#br0">0 0,'0'15,"0"17,0-1,0 8,0-23,0 15,0-7,0-9,0 9,0-1,0 1,7-1,-7 1,8-1,-8 9,0-24,0 7,0-7,0 0,0-24,0 1,0 7,-8-16,8 9,0 7,0 0,0 0,0 0,0 0,0 1,0-1,8 0,8 0,0 8,-9-8,1 0,0 1,0 7,0 0,0-8,-1 0,1 8,0 0,-8 0</inkml:trace>
+  <inkml:trace contextRef="#ctx0" brushRef="#br0">674 54,'-32'40,"-38"38,31-39,31-15,-16-9,16-7,1-8,7-8,0 1,0-25,7-7,9-24,0 32,-1 7,-7 9,0-1,0 0,8 9,-1 7,-7 0,8 0,-1 7,1 9,-8 0,0-1,8-7,-9 0,1 8,0-1,-8 1,0 8,0 7,0-15,-16 31,-15 8,-47 54,15-62,-15 8,-9-23,17-17,7-7,-8-8,32 0,0 0,8 0,23 0,-8 0,8 0,1 0,7-8,7 0,9 8,8-7,30-1,1 8,0 0,8 0,54 8,-69-8,-33 0,9 0,-1 0,-15 0,0 0,0 0,0 0,-1 0,1 0,-8-8,-8 8,-7 0,7 0,-8-8,8 8,1 0,-1 8,0 7,-8-7,1 31,-1-7,16-9,-8-7,8 15,0-15,0 0,0-1,0-7,0 0,0 0,0 0,0-8</inkml:trace>
 </inkml:ink>
 </file>
 
@@ -2215,7 +2839,7 @@
       <inkml:brushProperty name="fitToCurve" value="1"/>
     </inkml:brush>
   </inkml:definitions>
-  <inkml:trace contextRef="#ctx0" brushRef="#br0">0 47,'0'23,"0"8,0-15,7 15,1 9,-8-33,0 9,8-8,0-8,0 16,15-8,-7-8,0 0,-1 0,-7 0,0 0,0 0,0 0,-1-8,1 0,-8 0,0 0,8 0,-8 0,0-7,0 7,0 0,0-8,0 9,0-1,0 0,-16-8,9 8,-1 1,-8 7,8-8,0 8,1 0,-1 0,0 0,8 8,-8-8,8 7,-8 1,0 0,8 0,-7 0,-1 0,8-1,0 1,0 0,8-8,7 8,1 0,23 0,8-1,-31 1,-1-8,-7 0,0 0,8 0,-8 0,0 0,-1 0,1 0,-8-8,8 1,-8-1,0-8,0 8,0-15,0-1,0 9,0-9,0 16,0-15,0 15,0 0,0 0,0 0,0 1,0 22,-8-7,0 16,-7-1,-1 16,-8 8,17-23,7-1,-16 1,16-8,-8-9,8 1,-8 0,0 0,8 0,0-16,8 0,0-8,0-7,0 15,0-8,7 8,1-23,0 31,7 0,-15 0,16 0,-1 8,1 8,-17-9,9 1,0 8,-1-8,1 0,-8 0,0-8,-8 7,0 1,0-8</inkml:trace>
+  <inkml:trace contextRef="#ctx0" brushRef="#br0">172 180,'0'15,"0"9,-8 0,-15 7,15-15,-8 7,8-23,0 0,-7 0,7 0,0 0,-8-8,1-15,-1-1,8 16,8-15,-8-1,1 9,7-1,0-8,7 9,17 15,-8 0,7 0,8 8,1 15,-1-7,-7-8,-9 7,-7-7,8 8,-8-16,0 8,-1-8,-7 8,8-8,8 0,-8-8,0 0,15 8,1-16,-9 0,9 9,-1-9,1-8,-8 9,-9 7,9-8,-8 1,8-1,-16 8,7-8,-7 1,0-1,0 8,0 0,0 1,-7 7,7 7,-8 9,8 15,-8 9,0 30,0-7,8-8,-8 15,1-31,-1 9,8-33,-8 9,8-16,0-1,0 1,0 0,0 8,0-8,0 7,8-7,0 0,-8 0,7 0,1-8,-8 0</inkml:trace>
 </inkml:ink>
 </file>
 
@@ -2241,7 +2865,7 @@
       <inkml:brushProperty name="fitToCurve" value="1"/>
     </inkml:brush>
   </inkml:definitions>
-  <inkml:trace contextRef="#ctx0" brushRef="#br0">117 78,'16'0,"7"8,1 0,23 7,-16-7,16 0,-23-8,-1 8,1 0,7-1,-23 1,16 0,-9-8,-15 8,16-8,-8 0,-8 8,8 0,-8-1,0 9,0-8,-16 8,0 7,1 1,-9-1,-23 1,-8 15,32-23,-1-9,1 1,15-8,0 0,0 0,0 0,0-15,8 7,0-8,0-7,0 15,0-8,8 0,0 9,0-9,8 8,7 0,-15 8,8 0,-1 0,-7 0,0 0,8 0,-9 0,1 0,0 0,0 0,0 0,0 0,-1 0,1 0,-8-8,8 8,-16 0,0 0,-7 0,-1 0,-7 0,-32 8,31-8,-7 0,-1 0,17 0,-17 0,9 0,15 0,-15 0,15 0,0 0,-8 0,8 0,-7 0,7 0,0-8,0 8,8-7,-8 7,1 0,14 0,9 0,8 0,-9 0,9 0,-1 0,-7 0,15 7,-7-7,-9 0,9 8,-8-8,-1 8,-7-8,8 8,-8-8,0 0,7 8,-7-8,8 0,-8 0,-1 0,9 0,0 0,-8 0,-1 0,1 0,0 0,0 0,0 0,0 0,0 0,-1 0,1 0,0 0,0 0,0 0,0 0,-8-8,7 8,-7-8,8 8,-8-16,0 9,8-9,0 8,-8 0,8 0,-8 0,0-7,0 7,0-8,0 8,0-7,0-1,0-7,0 7,0-8,0 17,0-9,0 8,0-8,0 9,0 22,-8 1,8 15,0 1,0 7,-8-8,8 24,-8-16,8 16,-8 16,1-24,7-24,0 1,0-16,0-1,0 1,0 0,0 0,0 0,0 0,-8-8,0 0,8-8,0 0,-8-8,-8-31,16 8,0 15,0 1,0 15,0-8,0 1,8 7,-8 0,16 8,0-8,-9 8,9-8,0 8,-8-7,-1 7,9 0,-8 0,0 0,0 0,-1 0,1 0,0 0,0 0,0-8,0 8,-1 0,1 0,-16 0,1 0,-9-8,8 8,-8-8,1 8,7 0,0 0,0 0,0 0,1 0,-1 8,0 0,8 0,0-1,0 1,0 0,-8-8,8 8,0 0,0 0,0-1,-8-7,8 8,0 0,-8 0,8 0,0 0,0 7,0-7,0 0,-7 8,7-1,0-7,0 0,0 0,-8-8,8 8,-8 0,8-1,0 1,0 0,0 0,-8 0,8 0,-8-8,8 7,0 1,-8-8,8 8,0 0,-7-8,-1 8,8 0,-8-8,8 7,-8-7,8 8,-8-8,0 0,0 0,1 0,-9 0,0 0,-15 0,-32-15,16 7,24 0,-1 0,16 8,0 0,1-8,-1 8,0 0,0 0,8 8,0 0,0 0,8 7,0-7,-8 0,8-8,-1 0,1 0,8 0,-8 0,0 0,-1 0,1 0,8 0,0 0,-1-8,-7 8,8-8,7 8,-15 0,0 0,0 0,0 0,7 0,-7 0,0 0,0 0,0 0,0 0,-1 0,1 8,0 8,-8-8,8 0,0 7,-8-7,0 8,0-8,0 7,0 1,0 0,0-1,0-7,0 0,0 0,0 0,-8-8,8 8,-8-8,0 0,0 0,1 0,-1 0,0 0,0 0,0 0,0 0,1 0,-1 0,0 0,0 0,0 0,0 0,1 0,-1 0,-8 0,8 0,-15 0,7-8,-8 8,17 0,-1 0,0 0,0 0,0 0,8 8,0-1,0 1,0 0,0 0,0 0,0 0,0 7,0-7,0 0,0 0,8-8,8 8,7 7,-7-7,15 8,-7-8,-8 0,-1-1,-7-7,0 0,0 0,0 0,-1 0,1 0,0 0,0 0,0-7,-8-1,8 0,-1 8,-7-8,0 0,0 8</inkml:trace>
+  <inkml:trace contextRef="#ctx0" brushRef="#br0">0 0,'0'15,"0"1,7-8,-7 0,0-1,0 1,0 0,0 8,0-8,0 15,0 1,-7 7,7-8,0 9,0-9,0-15,0 8,0-8,0 7,0-7,0 0,0 0,0 0,0 7,0 1,0-8,0 0,0 0,0-1,0 1,0-8</inkml:trace>
 </inkml:ink>
 </file>
 
@@ -2267,7 +2891,7 @@
       <inkml:brushProperty name="fitToCurve" value="1"/>
     </inkml:brush>
   </inkml:definitions>
-  <inkml:trace contextRef="#ctx0" brushRef="#br0">101 156,'8'0,"0"0,0 0,0 0,0 0,-16 0,0 0,-8 0,8 0,-7 0,7 0,-8 0,8 0,1 0,-9 0,8 0,8 8,-8 8,0 15,8-23,0 16,0-9,0-7,-7 8,7-8,0 7,0-7,0 0,0 0,0 0,0-1,7 1,1-8,-8 8,8-8,-8 8,8-8,0 0,0 0,-1 0,1 0,0 0,0 0,0 0,0 0,-1 0,1 0,0 0,0 0,-8 8,8-8,0 0,-1 8,9-8,-8 0,0 0,0 0,-1 0,1 0,0 0,0 0,0 0,0 0,0 0,-8-8,7 8,-7-8,0 0,8 0,-8 0,8 1,-8-1,0-8,8-15,-8-24,8 31,-8 9,8-17,-8 9,0-16,0 15,0 16,0-7,0 7,0 0,0 0,0 0,0 0,0 1,0 14,0 1,0 8,0 0,0 7,0 16,0-15,0-1,0 9,-8-17,8 9,0-8,0-9,0 9,0-8,0 0,0 0,0-1,0 1,0 0,0 0,0 0,0 0,0-1,-8-7,8-7,0-9,0 8,0 0,0-7,0 7,0 0,0 0,0 0,0 0,8 1,0-1,-1 8,1 0,-8-8,8 8,0 0,0 0,0 0,-1 0,1 0,0 0,0 0,-16 0,0 0,0 0,1 0,-9 0,0 0,8 0,-7 0,7 0,0 0,-8 0,9 0,-1 0,0 0,8 8,0 0,0-1,0 1,0 0,8 0,-8 0,8 0,-8-1,0 1,0 0,0 0,0 0,0 0,0-1,0 1,0 0,0 0,0 0,0 0,0-1,0 1,0 0,0 0,0 0,0 0,0 0,7-8,1 0,0 0,-8-8,8 8,0 0,0 0,-1 0,-7-8,8 8,-8-8,8 8,0 0,0 0,7 0,-7 0,-8 8,8-8,0 8,0-8,0 0,-1 8,-7-1,8-7,-8 8,8 0,-8 0,0 8,0-9,0 9,0 0,-8-1,8-7,0 8,-8-8,8 0,-7 7,7 1,0-8,-8-8,0 8,0-1,0 1,-7 8,7-8,-8-8,0 8,9 0,-25 7,24-15,-7 0,7 0,0 0,0 0,0 0,0-8,1 8,7-7,-8-1,8 0,0 0,0 0,0 0,0 0,0 1,0-1,0-8,15 8,-7 0,8-15,0 15,-1 0,-7 8,-8-8,16 1,-8 7,0-8,-1 8,1 0,0 0,0 0,0 0,0 0,7 0,-7 0,0 0,0 0,0 0,-8 0</inkml:trace>
+  <inkml:trace contextRef="#ctx0" brushRef="#br0">352 39,'8'15,"0"9,0 15,-8-23,8-1,-1 1,-7 8,0-9,0 1,8 8,0-1,-8-7,8 7,-8-7,8-8,-8 0,8-1,-8 1,0 0,0 0,0 0,0 0,0-1,0 1,0 0,0 8,0 7,0-7,0 8,8-1,-1 1,-7-9,0-7,0 0,0 0,0 0,0-24,0 0,0 1,-15-17,7-15,-31-78,7 46,17 24,7 8,0 0,0 32,8-1,0 8,-8 0,8 1,0-1,0 0,0 0,0 0,0 0,-8 8,8-7,-7 14,-1 1,0 0,0 0,0 8,-7-1,-1 1,0 7,0-15,1 16,7-1,-8-7,1-8,-1 7,-8 1,17-8,-9 0,0 0,8 0,1-8,-9 0,8 0,0 0,0 0,1 0,7 7,0-7</inkml:trace>
 </inkml:ink>
 </file>
 
@@ -2293,7 +2917,7 @@
       <inkml:brushProperty name="fitToCurve" value="1"/>
     </inkml:brush>
   </inkml:definitions>
-  <inkml:trace contextRef="#ctx0" brushRef="#br0">0 0,'0'0</inkml:trace>
+  <inkml:trace contextRef="#ctx0" brushRef="#br0">39 0,'15'0,"9"0,-1 0,1 0,-8 7,-1-7,-7 0,0 0,-8 8,0 0,0 0,0 0,0 7,0 9,-16-1,1 1,-1-8,-8 23,9-24,-24 25,31-25,-8 1,8-8,0 0,1 0,7-8</inkml:trace>
 </inkml:ink>
 </file>
 
@@ -2345,7 +2969,7 @@
       <inkml:brushProperty name="fitToCurve" value="1"/>
     </inkml:brush>
   </inkml:definitions>
-  <inkml:trace contextRef="#ctx0" brushRef="#br0">0 0,'126'0,"488"0,-508 0,42 126,-63 107,-64-42,-42 42,-21-64,42-169</inkml:trace>
+  <inkml:trace contextRef="#ctx0" brushRef="#br0">0 0,'0'15,"0"17,0-1,0 8,0-23,0 15,0-7,0-9,0 9,0-1,0 1,7-1,-7 1,8-1,-8 9,0-24,0 7,0-7,0 0,0-24,0 1,0 7,-8-16,8 9,0 7,0 0,0 0,0 0,0 0,0 1,0-1,8 0,8 0,0 8,-9-8,1 0,0 1,0 7,0 0,0-8,-1 0,1 8,0 0,-8 0</inkml:trace>
 </inkml:ink>
 </file>
 
@@ -2371,7 +2995,7 @@
       <inkml:brushProperty name="fitToCurve" value="1"/>
     </inkml:brush>
   </inkml:definitions>
-  <inkml:trace contextRef="#ctx0" brushRef="#br0">994 0,'0'42,"0"106,0-63,0-22,0 1,-42 20,-22 1,-41-22,-149 1,63-64,43-42,0-22,106 43,84 21,85 0,381 106,42-43,-275-42,-127-21,-84 0,-64 0</inkml:trace>
+  <inkml:trace contextRef="#ctx0" brushRef="#br0">0 47,'0'23,"0"8,0-15,7 15,1 9,-8-33,0 9,8-8,0-8,0 16,15-8,-7-8,0 0,-1 0,-7 0,0 0,0 0,0 0,-1-8,1 0,-8 0,0 0,8 0,-8 0,0-7,0 7,0 0,0-8,0 9,0-1,0 0,-16-8,9 8,-1 1,-8 7,8-8,0 8,1 0,-1 0,0 0,8 8,-8-8,8 7,-8 1,0 0,8 0,-7 0,-1 0,8-1,0 1,0 0,8-8,7 8,1 0,23 0,8-1,-31 1,-1-8,-7 0,0 0,8 0,-8 0,0 0,-1 0,1 0,-8-8,8 1,-8-1,0-8,0 8,0-15,0-1,0 9,0-9,0 16,0-15,0 15,0 0,0 0,0 0,0 1,0 22,-8-7,0 16,-7-1,-1 16,-8 8,17-23,7-1,-16 1,16-8,-8-9,8 1,-8 0,0 0,8 0,0-16,8 0,0-8,0-7,0 15,0-8,7 8,1-23,0 31,7 0,-15 0,16 0,-1 8,1 8,-17-9,9 1,0 8,-1-8,1 0,-8 0,0-8,-8 7,0 1,0-8</inkml:trace>
 </inkml:ink>
 </file>
 
@@ -2397,7 +3021,7 @@
       <inkml:brushProperty name="fitToCurve" value="1"/>
     </inkml:brush>
   </inkml:definitions>
-  <inkml:trace contextRef="#ctx0" brushRef="#br0">84 0,'21'105,"85"530,-85-106,-21-253,0-86,0-126,0 41,0-20,0 0,0 21,21-43,-21-42,0 0,0-42,-42-42,-43-297,-20 106,84 148,21 21,0 64,21-21,0 42,0-21,0 21,0 0,22 0,20 0,-42 0,22 0,-22 0,21 0,0 0,-20-21,20 21,106-43,-127 43,22 0,-22 0,63-42,-20 42,-64 0</inkml:trace>
+  <inkml:trace contextRef="#ctx0" brushRef="#br0">117 78,'16'0,"7"8,1 0,23 7,-16-7,16 0,-23-8,-1 8,1 0,7-1,-23 1,16 0,-9-8,-15 8,16-8,-8 0,-8 8,8 0,-8-1,0 9,0-8,-16 8,0 7,1 1,-9-1,-23 1,-8 15,32-23,-1-9,1 1,15-8,0 0,0 0,0 0,0-15,8 7,0-8,0-7,0 15,0-8,8 0,0 9,0-9,8 8,7 0,-15 8,8 0,-1 0,-7 0,0 0,8 0,-9 0,1 0,0 0,0 0,0 0,0 0,-1 0,1 0,-8-8,8 8,-16 0,0 0,-7 0,-1 0,-7 0,-32 8,31-8,-7 0,-1 0,17 0,-17 0,9 0,15 0,-15 0,15 0,0 0,-8 0,8 0,-7 0,7 0,0-8,0 8,8-7,-8 7,1 0,14 0,9 0,8 0,-9 0,9 0,-1 0,-7 0,15 7,-7-7,-9 0,9 8,-8-8,-1 8,-7-8,8 8,-8-8,0 0,7 8,-7-8,8 0,-8 0,-1 0,9 0,0 0,-8 0,-1 0,1 0,0 0,0 0,0 0,0 0,0 0,-1 0,1 0,0 0,0 0,0 0,0 0,-8-8,7 8,-7-8,8 8,-8-16,0 9,8-9,0 8,-8 0,8 0,-8 0,0-7,0 7,0-8,0 8,0-7,0-1,0-7,0 7,0-8,0 17,0-9,0 8,0-8,0 9,0 22,-8 1,8 15,0 1,0 7,-8-8,8 24,-8-16,8 16,-8 16,1-24,7-24,0 1,0-16,0-1,0 1,0 0,0 0,0 0,0 0,-8-8,0 0,8-8,0 0,-8-8,-8-31,16 8,0 15,0 1,0 15,0-8,0 1,8 7,-8 0,16 8,0-8,-9 8,9-8,0 8,-8-7,-1 7,9 0,-8 0,0 0,0 0,-1 0,1 0,0 0,0 0,0-8,0 8,-1 0,1 0,-16 0,1 0,-9-8,8 8,-8-8,1 8,7 0,0 0,0 0,0 0,1 0,-1 8,0 0,8 0,0-1,0 1,0 0,-8-8,8 8,0 0,0 0,0-1,-8-7,8 8,0 0,-8 0,8 0,0 0,0 7,0-7,0 0,-7 8,7-1,0-7,0 0,0 0,-8-8,8 8,-8 0,8-1,0 1,0 0,0 0,-8 0,8 0,-8-8,8 7,0 1,-8-8,8 8,0 0,-7-8,-1 8,8 0,-8-8,8 7,-8-7,8 8,-8-8,0 0,0 0,1 0,-9 0,0 0,-15 0,-32-15,16 7,24 0,-1 0,16 8,0 0,1-8,-1 8,0 0,0 0,8 8,0 0,0 0,8 7,0-7,-8 0,8-8,-1 0,1 0,8 0,-8 0,0 0,-1 0,1 0,8 0,0 0,-1-8,-7 8,8-8,7 8,-15 0,0 0,0 0,0 0,7 0,-7 0,0 0,0 0,0 0,0 0,-1 0,1 8,0 8,-8-8,8 0,0 7,-8-7,0 8,0-8,0 7,0 1,0 0,0-1,0-7,0 0,0 0,0 0,-8-8,8 8,-8-8,0 0,0 0,1 0,-1 0,0 0,0 0,0 0,0 0,1 0,-1 0,0 0,0 0,0 0,0 0,1 0,-1 0,-8 0,8 0,-15 0,7-8,-8 8,17 0,-1 0,0 0,0 0,0 0,8 8,0-1,0 1,0 0,0 0,0 0,0 0,0 7,0-7,0 0,0 0,8-8,8 8,7 7,-7-7,15 8,-7-8,-8 0,-1-1,-7-7,0 0,0 0,0 0,-1 0,1 0,0 0,0 0,0-7,-8-1,8 0,-1 8,-7-8,0 0,0 8</inkml:trace>
 </inkml:ink>
 </file>
 
@@ -2423,7 +3047,7 @@
       <inkml:brushProperty name="fitToCurve" value="1"/>
     </inkml:brush>
   </inkml:definitions>
-  <inkml:trace contextRef="#ctx0" brushRef="#br0">105 0,'85'0,"-22"0,86 0,-65 0,-41 0,20 0,-42 0,0 0,-21 42,0-21,-63 85,42-22,-64 65,22-44,-1 1,43-85,-85 149,21-43,22-43,63-62,0-1,-21 0,0 21,0-42,21-21,21-21,0-1,0-62,0 83,0-83,0 62,1 1,20-22,-42 22,42-21,-21 41,-21 1,0 0,22 21,-1-21,0 21,-21-21,21 21,0 0,22 21,-1 64,21-22,64 170,-84-85,-1-42,-21-64,0 22,1-64,-22 21,0 0,0-42,0 0,-22-22,-20-20,21 21,0-1,-22-84,43 85,-21 0,-21-64,42 42,-21 64,21-42,0 21,0 0,0 21</inkml:trace>
+  <inkml:trace contextRef="#ctx0" brushRef="#br0">101 156,'8'0,"0"0,0 0,0 0,0 0,-16 0,0 0,-8 0,8 0,-7 0,7 0,-8 0,8 0,1 0,-9 0,8 0,8 8,-8 8,0 15,8-23,0 16,0-9,0-7,-7 8,7-8,0 7,0-7,0 0,0 0,0 0,0-1,7 1,1-8,-8 8,8-8,-8 8,8-8,0 0,0 0,-1 0,1 0,0 0,0 0,0 0,0 0,-1 0,1 0,0 0,0 0,-8 8,8-8,0 0,-1 8,9-8,-8 0,0 0,0 0,-1 0,1 0,0 0,0 0,0 0,0 0,0 0,-8-8,7 8,-7-8,0 0,8 0,-8 0,8 1,-8-1,0-8,8-15,-8-24,8 31,-8 9,8-17,-8 9,0-16,0 15,0 16,0-7,0 7,0 0,0 0,0 0,0 0,0 1,0 14,0 1,0 8,0 0,0 7,0 16,0-15,0-1,0 9,-8-17,8 9,0-8,0-9,0 9,0-8,0 0,0 0,0-1,0 1,0 0,0 0,0 0,0 0,0-1,-8-7,8-7,0-9,0 8,0 0,0-7,0 7,0 0,0 0,0 0,0 0,8 1,0-1,-1 8,1 0,-8-8,8 8,0 0,0 0,0 0,-1 0,1 0,0 0,0 0,-16 0,0 0,0 0,1 0,-9 0,0 0,8 0,-7 0,7 0,0 0,-8 0,9 0,-1 0,0 0,8 8,0 0,0-1,0 1,0 0,8 0,-8 0,8 0,-8-1,0 1,0 0,0 0,0 0,0 0,0-1,0 1,0 0,0 0,0 0,0 0,0-1,0 1,0 0,0 0,0 0,0 0,0 0,7-8,1 0,0 0,-8-8,8 8,0 0,0 0,-1 0,-7-8,8 8,-8-8,8 8,0 0,0 0,7 0,-7 0,-8 8,8-8,0 8,0-8,0 0,-1 8,-7-1,8-7,-8 8,8 0,-8 0,0 8,0-9,0 9,0 0,-8-1,8-7,0 8,-8-8,8 0,-7 7,7 1,0-8,-8-8,0 8,0-1,0 1,-7 8,7-8,-8-8,0 8,9 0,-25 7,24-15,-7 0,7 0,0 0,0 0,0 0,0-8,1 8,7-7,-8-1,8 0,0 0,0 0,0 0,0 0,0 1,0-1,0-8,15 8,-7 0,8-15,0 15,-1 0,-7 8,-8-8,16 1,-8 7,0-8,-1 8,1 0,0 0,0 0,0 0,0 0,7 0,-7 0,0 0,0 0,0 0,-8 0</inkml:trace>
 </inkml:ink>
 </file>
 
@@ -2449,7 +3073,7 @@
       <inkml:brushProperty name="fitToCurve" value="1"/>
     </inkml:brush>
   </inkml:definitions>
-  <inkml:trace contextRef="#ctx0" brushRef="#br0">0 0,'42'0,"21"0,-42 0,64 21,-64-21,0 0,1 0,-1 0,0 0,-21 21,21-21,0 0,0 0,22 0,-22 0,0-21,0 21,-21 0</inkml:trace>
+  <inkml:trace contextRef="#ctx0" brushRef="#br0">0 0,'0'0</inkml:trace>
 </inkml:ink>
 </file>
 
@@ -2475,7 +3099,7 @@
       <inkml:brushProperty name="fitToCurve" value="1"/>
     </inkml:brush>
   </inkml:definitions>
-  <inkml:trace contextRef="#ctx0" brushRef="#br0">63 0,'0'42,"0"0,0 106,0-21,-21-63,0 84,21-63,-21 105,21 64,0-148,21 21,0-21,-21-43,0-20,0-1,0-21,0 0,0 0,0-21</inkml:trace>
+  <inkml:trace contextRef="#ctx0" brushRef="#br0">0 0,'126'0,"488"0,-508 0,42 126,-63 107,-64-42,-42 42,-21-64,42-169</inkml:trace>
 </inkml:ink>
 </file>
 
@@ -2501,7 +3125,7 @@
       <inkml:brushProperty name="fitToCurve" value="1"/>
     </inkml:brush>
   </inkml:definitions>
-  <inkml:trace contextRef="#ctx0" brushRef="#br0">0 0,'21'105,"0"1,21 85,-21-128,-21 1,0-22,0 21,0 1,0-22,0 22,0-1,0-20,0 20,0 1,0-22,0 21,0-20,0-22,0 21,0-21,0 1,0-1,0 0,0 0,0 0,0-21</inkml:trace>
+  <inkml:trace contextRef="#ctx0" brushRef="#br0">994 0,'0'42,"0"106,0-63,0-22,0 1,-42 20,-22 1,-41-22,-149 1,63-64,43-42,0-22,106 43,84 21,85 0,381 106,42-43,-275-42,-127-21,-84 0,-64 0</inkml:trace>
 </inkml:ink>
 </file>
 
@@ -2527,7 +3151,7 @@
       <inkml:brushProperty name="fitToCurve" value="1"/>
     </inkml:brush>
   </inkml:definitions>
-  <inkml:trace contextRef="#ctx0" brushRef="#br0">90 0,'-10'0,"0"0,0 0,0 0,0 0,10 10,-10-10,0 10,0-10,0 0,10 10,0 0,0-10</inkml:trace>
+  <inkml:trace contextRef="#ctx0" brushRef="#br0">84 0,'21'105,"85"530,-85-106,-21-253,0-86,0-126,0 41,0-20,0 0,0 21,21-43,-21-42,0 0,0-42,-42-42,-43-297,-20 106,84 148,21 21,0 64,21-21,0 42,0-21,0 21,0 0,22 0,20 0,-42 0,22 0,-22 0,21 0,0 0,-20-21,20 21,106-43,-127 43,22 0,-22 0,63-42,-20 42,-64 0</inkml:trace>
 </inkml:ink>
 </file>
 
@@ -2553,7 +3177,7 @@
       <inkml:brushProperty name="fitToCurve" value="1"/>
     </inkml:brush>
   </inkml:definitions>
-  <inkml:trace contextRef="#ctx0" brushRef="#br0">262 70,'-31'40,"-49"31,49-41,1 0,-10 1,20-21,10 0,10 0,-10 0,0-10,30-10,0 0,-10 10,0 0,10 0,-20-10,20 10,-10 0,11 0,-11 0,0 0,0 0,0 0,0 0,0 0,0 0,0 0,-10-10,0 0,0-11,0 11,-10 10,10-10,-20-10,10 10,0-10,0 10,10 0,-10 0,10 0,-10 10,10-11,0 1,0 0,0 20,0 0,-11 1,11-1,-10 10,10-10,-10 0,10 0,0 0,0 0,0 0,-10-10,10 10,0 0,0 0,0 1,0-1,10-10,0 10,-10 0,10 0,-10 0,0 0,0 0,0 0,0 0,0 0,0 0,0 1,11-1,-11 0,10-10,-10 10,0 0,0 0,10-10,-10-10,10 0,0 0,-10-10,10 20,0-21,0 1,-10 10,0-10,10 20,0-10,0 0,-10 0,10 0,-10 0,10-1,1 1,-11-10,10 10,0-10,0-10,10 0,-10 9,0 1,0-10,0 10,0 10,-10-10,10 20,1-10,-11 10</inkml:trace>
+  <inkml:trace contextRef="#ctx0" brushRef="#br0">105 0,'85'0,"-22"0,86 0,-65 0,-41 0,20 0,-42 0,0 0,-21 42,0-21,-63 85,42-22,-64 65,22-44,-1 1,43-85,-85 149,21-43,22-43,63-62,0-1,-21 0,0 21,0-42,21-21,21-21,0-1,0-62,0 83,0-83,0 62,1 1,20-22,-42 22,42-21,-21 41,-21 1,0 0,22 21,-1-21,0 21,-21-21,21 21,0 0,22 21,-1 64,21-22,64 170,-84-85,-1-42,-21-64,0 22,1-64,-22 21,0 0,0-42,0 0,-22-22,-20-20,21 21,0-1,-22-84,43 85,-21 0,-21-64,42 42,-21 64,21-42,0 21,0 0,0 21</inkml:trace>
 </inkml:ink>
 </file>
 
@@ -2579,7 +3203,7 @@
       <inkml:brushProperty name="fitToCurve" value="1"/>
     </inkml:brush>
   </inkml:definitions>
-  <inkml:trace contextRef="#ctx0" brushRef="#br0">3656 1289,'-193'154,"-326"134,-655 290,19-271,693-268,366-39,39 0,57 19,19-19,19 19,155 1,-97-1,289 0,365 116,97-39,-482-96,-172 0,-97-19,-77 19,1 0,-1 0,0 0,0 0,-19-19,0-1,0-18,0-20,-57-96,-20 0,-193-308,-673-500,424 424,172 133,251 290,58 77,38 76,19 0,19 59,-18 230,-20-96,0-20,-20 78,-95 384,19-288,38-19,-134 519,172-558,-37-38,37-58,1 134,0-230,19-77,0-39,19-57,77-155,424-500,19-57,-135 153,58 1,-328 423,136-97,-39 59,0 57,-39 58,-57 38,-58 39,-39-1,-38 20</inkml:trace>
+  <inkml:trace contextRef="#ctx0" brushRef="#br0">0 0,'42'0,"21"0,-42 0,64 21,-64-21,0 0,1 0,-1 0,0 0,-21 21,21-21,0 0,0 0,22 0,-22 0,0-21,0 21,-21 0</inkml:trace>
 </inkml:ink>
 </file>
 
@@ -2631,7 +3255,7 @@
       <inkml:brushProperty name="fitToCurve" value="1"/>
     </inkml:brush>
   </inkml:definitions>
-  <inkml:trace contextRef="#ctx0" brushRef="#br0">173 38,'0'19,"-116"77,59-57,76-39,19 0,39-39,19 20,-38 19,-39 0,1 0,-40 0,-18-19,-20-20,20 20,-1 19,1 0,18 0,20 19,0 1,0-1,20 0,-20 20,19-20,-19 0,19 0,0-19,1-38,-1 38,0-58,0 39,20-20,-39 1,19 19,-19 0,0 19</inkml:trace>
+  <inkml:trace contextRef="#ctx0" brushRef="#br0">63 0,'0'42,"0"0,0 106,0-21,-21-63,0 84,21-63,-21 105,21 64,0-148,21 21,0-21,-21-43,0-20,0-1,0-21,0 0,0 0,0-21</inkml:trace>
 </inkml:ink>
 </file>
 
@@ -2657,7 +3281,215 @@
       <inkml:brushProperty name="fitToCurve" value="1"/>
     </inkml:brush>
   </inkml:definitions>
-  <inkml:trace contextRef="#ctx0" brushRef="#br0">365 115,'-38'19,"18"20,-57 18,20 1,18-39,-19 39,39-58,-19 39,19-20,38-19,0 0,19 0,1 0,-20 0,58 0,-58 0,39 0,-19 0,-20 0,-19-19,19 19,-19-20,0 1,0 0,0-20,0 20,0 0,0 0,0-20,0 1,-19 38,19-39,0 20,0 0,-19-1,-1 1,1 19,19-19,0 0,0 0,-19 19,0 0,-1 19,20 0,0 0,-19 0,0 20,19-1,-19-18,19 18,0 1,-20-1,20 1,-19-1,19-19,0 39,0-39,0 1,0-1,0 0,19-38,1 0,18-20,20-38,0 0,-39 39,0-1,0 20,-19 0,0-1,20 20,-20 0</inkml:trace>
+  <inkml:trace contextRef="#ctx0" brushRef="#br0">0 0,'21'105,"0"1,21 85,-21-128,-21 1,0-22,0 21,0 1,0-22,0 22,0-1,0-20,0 20,0 1,0-22,0 21,0-20,0-22,0 21,0-21,0 1,0-1,0 0,0 0,0 0,0-21</inkml:trace>
+</inkml:ink>
+</file>
+
+<file path=ppt/ink/ink92.xml><?xml version="1.0" encoding="utf-8"?>
+<inkml:ink xmlns:inkml="http://www.w3.org/2003/InkML">
+  <inkml:definitions>
+    <inkml:context xml:id="ctx0">
+      <inkml:inkSource xml:id="inkSrc0">
+        <inkml:traceFormat>
+          <inkml:channel name="X" type="integer" max="3200" units="cm"/>
+          <inkml:channel name="Y" type="integer" max="1080" units="cm"/>
+        </inkml:traceFormat>
+        <inkml:channelProperties>
+          <inkml:channelProperty channel="X" name="resolution" value="66.666656" units="1/cm"/>
+          <inkml:channelProperty channel="Y" name="resolution" value="40.000000" units="1/cm"/>
+        </inkml:channelProperties>
+      </inkml:inkSource>
+    </inkml:context>
+    <inkml:brush xml:id="br0">
+      <inkml:brushProperty name="width" value="0.035278" units="cm"/>
+      <inkml:brushProperty name="height" value="0.035278" units="cm"/>
+      <inkml:brushProperty name="color" value="#ff0000"/>
+      <inkml:brushProperty name="fitToCurve" value="1"/>
+    </inkml:brush>
+  </inkml:definitions>
+  <inkml:trace contextRef="#ctx0" brushRef="#br0">311 0,'-89'155,"45"-110,21-45,1 0,0 0,-45 0,23-22,44 22</inkml:trace>
+</inkml:ink>
+</file>
+
+<file path=ppt/ink/ink93.xml><?xml version="1.0" encoding="utf-8"?>
+<inkml:ink xmlns:inkml="http://www.w3.org/2003/InkML">
+  <inkml:definitions>
+    <inkml:context xml:id="ctx0">
+      <inkml:inkSource xml:id="inkSrc0">
+        <inkml:traceFormat>
+          <inkml:channel name="X" type="integer" max="3200" units="cm"/>
+          <inkml:channel name="Y" type="integer" max="1080" units="cm"/>
+        </inkml:traceFormat>
+        <inkml:channelProperties>
+          <inkml:channelProperty channel="X" name="resolution" value="66.666656" units="1/cm"/>
+          <inkml:channelProperty channel="Y" name="resolution" value="40.000000" units="1/cm"/>
+        </inkml:channelProperties>
+      </inkml:inkSource>
+    </inkml:context>
+    <inkml:brush xml:id="br0">
+      <inkml:brushProperty name="width" value="0.035278" units="cm"/>
+      <inkml:brushProperty name="height" value="0.035278" units="cm"/>
+      <inkml:brushProperty name="color" value="#ff0000"/>
+      <inkml:brushProperty name="fitToCurve" value="1"/>
+    </inkml:brush>
+  </inkml:definitions>
+  <inkml:trace contextRef="#ctx0" brushRef="#br0">22 155,'-22'-44,"22"22,0-1,44 23,1-22,-1 22,1-22,44 0,-45 22,23 0,-22 0,-1 0,1 0,0 0,-23 0,0 22,-22 0,22 0,-22 23,23-23,-23 0,0 45,0-22,0-1,0 1,-23 0,23-23,-22 0,-22 0,44 1,-23-1,1 0,0-22,-1 0,1 0,0 0,0 0,-1 0,1 0,0 0,-1 0,23-22,-22 22,22-22,0-1,-22 23,0-44,22 22,0-1,0 1,0 0,0-1,0 1,0 0,0 0,0-23,22 45,45-89,-45 67,-22 22</inkml:trace>
+</inkml:ink>
+</file>
+
+<file path=ppt/ink/ink94.xml><?xml version="1.0" encoding="utf-8"?>
+<inkml:ink xmlns:inkml="http://www.w3.org/2003/InkML">
+  <inkml:definitions>
+    <inkml:context xml:id="ctx0">
+      <inkml:inkSource xml:id="inkSrc0">
+        <inkml:traceFormat>
+          <inkml:channel name="X" type="integer" max="3200" units="cm"/>
+          <inkml:channel name="Y" type="integer" max="1080" units="cm"/>
+        </inkml:traceFormat>
+        <inkml:channelProperties>
+          <inkml:channelProperty channel="X" name="resolution" value="66.666656" units="1/cm"/>
+          <inkml:channelProperty channel="Y" name="resolution" value="40.000000" units="1/cm"/>
+        </inkml:channelProperties>
+      </inkml:inkSource>
+    </inkml:context>
+    <inkml:brush xml:id="br0">
+      <inkml:brushProperty name="width" value="0.035278" units="cm"/>
+      <inkml:brushProperty name="height" value="0.035278" units="cm"/>
+      <inkml:brushProperty name="color" value="#ff0000"/>
+      <inkml:brushProperty name="fitToCurve" value="1"/>
+    </inkml:brush>
+  </inkml:definitions>
+  <inkml:trace contextRef="#ctx0" brushRef="#br0">0 0,'0'378,"0"-222,0 0,0-44,0-23,0-22,0-23,0 23,0-22,0-1,0-44</inkml:trace>
+</inkml:ink>
+</file>
+
+<file path=ppt/ink/ink95.xml><?xml version="1.0" encoding="utf-8"?>
+<inkml:ink xmlns:inkml="http://www.w3.org/2003/InkML">
+  <inkml:definitions>
+    <inkml:context xml:id="ctx0">
+      <inkml:inkSource xml:id="inkSrc0">
+        <inkml:traceFormat>
+          <inkml:channel name="X" type="integer" max="3200" units="cm"/>
+          <inkml:channel name="Y" type="integer" max="1080" units="cm"/>
+        </inkml:traceFormat>
+        <inkml:channelProperties>
+          <inkml:channelProperty channel="X" name="resolution" value="66.666656" units="1/cm"/>
+          <inkml:channelProperty channel="Y" name="resolution" value="40.000000" units="1/cm"/>
+        </inkml:channelProperties>
+      </inkml:inkSource>
+    </inkml:context>
+    <inkml:brush xml:id="br0">
+      <inkml:brushProperty name="width" value="0.035278" units="cm"/>
+      <inkml:brushProperty name="height" value="0.035278" units="cm"/>
+      <inkml:brushProperty name="color" value="#ff0000"/>
+      <inkml:brushProperty name="fitToCurve" value="1"/>
+    </inkml:brush>
+  </inkml:definitions>
+  <inkml:trace contextRef="#ctx0" brushRef="#br0">133 0,'45'0,"-45"22,22-22,-22 22,22-22,-22 22,0 1,-22-1,0 0,-23 23,23-23,-23 23,23-23,-22 22,44-21,0-1,0 23,0-23,0 0,0 0,22-22,0 0,-22 23,22-23,1 0,21 0,-22 0,23 0,-23 0,-22 0</inkml:trace>
+</inkml:ink>
+</file>
+
+<file path=ppt/ink/ink96.xml><?xml version="1.0" encoding="utf-8"?>
+<inkml:ink xmlns:inkml="http://www.w3.org/2003/InkML">
+  <inkml:definitions>
+    <inkml:context xml:id="ctx0">
+      <inkml:inkSource xml:id="inkSrc0">
+        <inkml:traceFormat>
+          <inkml:channel name="X" type="integer" max="3200" units="cm"/>
+          <inkml:channel name="Y" type="integer" max="1080" units="cm"/>
+        </inkml:traceFormat>
+        <inkml:channelProperties>
+          <inkml:channelProperty channel="X" name="resolution" value="66.666656" units="1/cm"/>
+          <inkml:channelProperty channel="Y" name="resolution" value="40.000000" units="1/cm"/>
+        </inkml:channelProperties>
+      </inkml:inkSource>
+    </inkml:context>
+    <inkml:brush xml:id="br0">
+      <inkml:brushProperty name="width" value="0.035278" units="cm"/>
+      <inkml:brushProperty name="height" value="0.035278" units="cm"/>
+      <inkml:brushProperty name="color" value="#ff0000"/>
+      <inkml:brushProperty name="fitToCurve" value="1"/>
+    </inkml:brush>
+  </inkml:definitions>
+  <inkml:trace contextRef="#ctx0" brushRef="#br0">0 222,'44'0,"1"-22,-23 22,22-22,23-1,0-21,0-23,-22 67,21-44,-43 44,-23 44,0-22,-45 45,45 0,-22 89,-67-22,44-23,1-89,44-22</inkml:trace>
+</inkml:ink>
+</file>
+
+<file path=ppt/ink/ink97.xml><?xml version="1.0" encoding="utf-8"?>
+<inkml:ink xmlns:inkml="http://www.w3.org/2003/InkML">
+  <inkml:definitions>
+    <inkml:context xml:id="ctx0">
+      <inkml:inkSource xml:id="inkSrc0">
+        <inkml:traceFormat>
+          <inkml:channel name="X" type="integer" max="3200" units="cm"/>
+          <inkml:channel name="Y" type="integer" max="1080" units="cm"/>
+        </inkml:traceFormat>
+        <inkml:channelProperties>
+          <inkml:channelProperty channel="X" name="resolution" value="66.666656" units="1/cm"/>
+          <inkml:channelProperty channel="Y" name="resolution" value="40.000000" units="1/cm"/>
+        </inkml:channelProperties>
+      </inkml:inkSource>
+    </inkml:context>
+    <inkml:brush xml:id="br0">
+      <inkml:brushProperty name="width" value="0.035278" units="cm"/>
+      <inkml:brushProperty name="height" value="0.035278" units="cm"/>
+      <inkml:brushProperty name="color" value="#ff0000"/>
+      <inkml:brushProperty name="fitToCurve" value="1"/>
+    </inkml:brush>
+  </inkml:definitions>
+  <inkml:trace contextRef="#ctx0" brushRef="#br0">0 0,'22'0,"22"0,-21 0,43 0,24 0,-68 0,22 22,-21 0,21-22,-44 0</inkml:trace>
+</inkml:ink>
+</file>
+
+<file path=ppt/ink/ink98.xml><?xml version="1.0" encoding="utf-8"?>
+<inkml:ink xmlns:inkml="http://www.w3.org/2003/InkML">
+  <inkml:definitions>
+    <inkml:context xml:id="ctx0">
+      <inkml:inkSource xml:id="inkSrc0">
+        <inkml:traceFormat>
+          <inkml:channel name="X" type="integer" max="3200" units="cm"/>
+          <inkml:channel name="Y" type="integer" max="1080" units="cm"/>
+        </inkml:traceFormat>
+        <inkml:channelProperties>
+          <inkml:channelProperty channel="X" name="resolution" value="66.666656" units="1/cm"/>
+          <inkml:channelProperty channel="Y" name="resolution" value="40.000000" units="1/cm"/>
+        </inkml:channelProperties>
+      </inkml:inkSource>
+    </inkml:context>
+    <inkml:brush xml:id="br0">
+      <inkml:brushProperty name="width" value="0.035278" units="cm"/>
+      <inkml:brushProperty name="height" value="0.035278" units="cm"/>
+      <inkml:brushProperty name="color" value="#ff0000"/>
+      <inkml:brushProperty name="fitToCurve" value="1"/>
+    </inkml:brush>
+  </inkml:definitions>
+  <inkml:trace contextRef="#ctx0" brushRef="#br0">0 0,'44'0,"23"0,0 0,-45 22,23 0,-1-22,-22 22,-22 23,0 22,-22-45,-22 0,-46 67,46-44,22-45,-1 0,1 0,22-45,0 23,0-45,45 23,-1-1,-22 45,1 0,21 0,-21 0,-1 0,22 0,-44 22,23 1,-23-23</inkml:trace>
+</inkml:ink>
+</file>
+
+<file path=ppt/ink/ink99.xml><?xml version="1.0" encoding="utf-8"?>
+<inkml:ink xmlns:inkml="http://www.w3.org/2003/InkML">
+  <inkml:definitions>
+    <inkml:context xml:id="ctx0">
+      <inkml:inkSource xml:id="inkSrc0">
+        <inkml:traceFormat>
+          <inkml:channel name="X" type="integer" max="3200" units="cm"/>
+          <inkml:channel name="Y" type="integer" max="1080" units="cm"/>
+        </inkml:traceFormat>
+        <inkml:channelProperties>
+          <inkml:channelProperty channel="X" name="resolution" value="66.666656" units="1/cm"/>
+          <inkml:channelProperty channel="Y" name="resolution" value="40.000000" units="1/cm"/>
+        </inkml:channelProperties>
+      </inkml:inkSource>
+    </inkml:context>
+    <inkml:brush xml:id="br0">
+      <inkml:brushProperty name="width" value="0.035278" units="cm"/>
+      <inkml:brushProperty name="height" value="0.035278" units="cm"/>
+      <inkml:brushProperty name="color" value="#ff0000"/>
+      <inkml:brushProperty name="fitToCurve" value="1"/>
+    </inkml:brush>
+  </inkml:definitions>
+  <inkml:trace contextRef="#ctx0" brushRef="#br0">2852 980,'22'22,"23"45,-1-22,-21-1,44 68,-45-45,0-23,23 68,-1-68,-21-22,-23 112,44-112,-22 1,-22-46,0-21,0-1,0 1,0-23,-22-22,-22-23,21 23,1 45,22-1,0 0,-22 1,-1 22,23-1,0 46,0 21,0 45,0 0,23-22,-23-22,0-1,0 1,0-90,0 1,0-1,0-44,-23-22,1-45,-22 22,21 23,-21-90,44 179,0 44,0 0,0 45,0-22,-23 22,23-45,0-44,0-1,0-21,0-23,-22 0,-67-334,89 312,0 67,0 44,0 89,0 112,0 0,0-45,0-66,0 44,0-90,0-21,-22-23,-1 1,23-46,0-44,0-44,0-45,0 45,0-112,23 156,-1 67,0 67,23 44,-23 45,-22 0,22-44,-22 66,-22-44,-22-68,-1-66,-22 23,45-23,22-23,0-43,-22-46,-45-88,44 21,1-110,22 177,45 23,22 67,-45 22,0 0,-22 22,22 23,-22 21,0 24,-66 155,-24-134,-43-22,-291 90,45-157,-200-22,267 0,89 0,201 0,22-22,22 22,134-23,-89 1,134-23,111-21,133 21,-400 45,-1 0,23 0,-44 0,-46 0,-21 0,-45 0,-90 45,23-23,112 0,-1-22,23 0,44 0,45-44,0-23,67-45,22 45,44-22,68 0,21 22,-21 45,-246 22,-67 22,1 23,-23-1,-89 23,-111 22,-201 45,312-112,111 23,23-45,89 0,-1-22,-21-23,-23 45,45-22,89-23,156-22,-267 67,-23 0,-44 0,-112 23,-111 21,-23-44,1 0,-201 0,267 0,179 0,0-22,22 0,89-1,45 1,44-22,89-1,447 0,-202 45,-111 0,-66 0,-179 23,-156-1,-67 0,-201 1,-66-23,-602 0,245-23,-267-66,713 89,223-22,44 22,111-22,113-1,110-44,134 1,-88 21,-46 45,-22 0,-22 0,-111 0,-246 0,-21 45,-202 21,1 1,-23 0,23-45,66 1,179-1,-1 0,46-22,66 0,45 0,66 0,45 0,90 0,43 0,-21 67,-112-45,-223 1,-22-1,-111 0,-223 23,-90-45,-133 0,-111 0,21 0,625 0,0 0,66 0,135-22,110-23,135-22,88-44,-88 66,-90 23,-111 22,-201-22,-111 22,-156 66,0 1,-67-44,-112 66,-289 67,490-89,45-45,245-22,67 0,22-45,178-155,134-1,-290 134,-133 45,-68 22,-43 45,-1-1,44-22,46-22,21-44,23-23,0 22,-22 23,-90 22,-22 45,-67-1,-44 23,22-45,89-22,67 23,-22-23,0 0,44 0,67-45,179-66,-112 66,89 1,-201 21,-88 23,-112 45,-134 22,-22-45,45 45,88-45,112 23,45-45,44 0,23-45,-23 23,67 0,90-23,-90 45,-67 22,0 1,23-1,-45 0,0 0,45 45,-45-44,-23-1,1-22,44 0,-22 0</inkml:trace>
 </inkml:ink>
 </file>
 
@@ -32734,7 +33566,7 @@
       </p:pic>
       <mc:AlternateContent xmlns:mc="http://schemas.openxmlformats.org/markup-compatibility/2006" xmlns:p14="http://schemas.microsoft.com/office/powerpoint/2010/main">
         <mc:Choice Requires="p14">
-          <p:contentPart p14:bwMode="auto" r:id="rId4">
+          <p:contentPart p14:bwMode="auto" r:id="rId18">
             <p14:nvContentPartPr>
               <p14:cNvPr id="282" name="잉크 49"/>
               <p14:cNvContentPartPr/>
@@ -32754,7 +33586,7 @@
               <p:nvPr/>
             </p:nvPicPr>
             <p:blipFill>
-              <a:blip r:embed="rId5"/>
+              <a:blip r:embed="rId19"/>
               <a:stretch>
                 <a:fillRect/>
               </a:stretch>
@@ -32773,7 +33605,7 @@
       </mc:AlternateContent>
       <mc:AlternateContent xmlns:mc="http://schemas.openxmlformats.org/markup-compatibility/2006" xmlns:p14="http://schemas.microsoft.com/office/powerpoint/2010/main">
         <mc:Choice Requires="p14">
-          <p:contentPart p14:bwMode="auto" r:id="rId6">
+          <p:contentPart p14:bwMode="auto" r:id="rId20">
             <p14:nvContentPartPr>
               <p14:cNvPr id="283" name="잉크 50"/>
               <p14:cNvContentPartPr/>
@@ -32793,7 +33625,7 @@
               <p:nvPr/>
             </p:nvPicPr>
             <p:blipFill>
-              <a:blip r:embed="rId7"/>
+              <a:blip r:embed="rId21"/>
               <a:stretch>
                 <a:fillRect/>
               </a:stretch>
@@ -32812,7 +33644,7 @@
       </mc:AlternateContent>
       <mc:AlternateContent xmlns:mc="http://schemas.openxmlformats.org/markup-compatibility/2006" xmlns:p14="http://schemas.microsoft.com/office/powerpoint/2010/main">
         <mc:Choice Requires="p14">
-          <p:contentPart p14:bwMode="auto" r:id="rId8">
+          <p:contentPart p14:bwMode="auto" r:id="rId22">
             <p14:nvContentPartPr>
               <p14:cNvPr id="284" name="잉크 51"/>
               <p14:cNvContentPartPr/>
@@ -32832,7 +33664,7 @@
               <p:nvPr/>
             </p:nvPicPr>
             <p:blipFill>
-              <a:blip r:embed="rId9"/>
+              <a:blip r:embed="rId23"/>
               <a:stretch>
                 <a:fillRect/>
               </a:stretch>
@@ -32851,7 +33683,7 @@
       </mc:AlternateContent>
       <mc:AlternateContent xmlns:mc="http://schemas.openxmlformats.org/markup-compatibility/2006" xmlns:p14="http://schemas.microsoft.com/office/powerpoint/2010/main">
         <mc:Choice Requires="p14">
-          <p:contentPart p14:bwMode="auto" r:id="rId10">
+          <p:contentPart p14:bwMode="auto" r:id="rId24">
             <p14:nvContentPartPr>
               <p14:cNvPr id="285" name="잉크 52"/>
               <p14:cNvContentPartPr/>
@@ -32871,7 +33703,7 @@
               <p:nvPr/>
             </p:nvPicPr>
             <p:blipFill>
-              <a:blip r:embed="rId11"/>
+              <a:blip r:embed="rId25"/>
               <a:stretch>
                 <a:fillRect/>
               </a:stretch>
@@ -32890,7 +33722,7 @@
       </mc:AlternateContent>
       <mc:AlternateContent xmlns:mc="http://schemas.openxmlformats.org/markup-compatibility/2006" xmlns:p14="http://schemas.microsoft.com/office/powerpoint/2010/main">
         <mc:Choice Requires="p14">
-          <p:contentPart p14:bwMode="auto" r:id="rId12">
+          <p:contentPart p14:bwMode="auto" r:id="rId26">
             <p14:nvContentPartPr>
               <p14:cNvPr id="286" name="잉크 53"/>
               <p14:cNvContentPartPr/>
@@ -32910,7 +33742,7 @@
               <p:nvPr/>
             </p:nvPicPr>
             <p:blipFill>
-              <a:blip r:embed="rId13"/>
+              <a:blip r:embed="rId27"/>
               <a:stretch>
                 <a:fillRect/>
               </a:stretch>
@@ -32929,7 +33761,7 @@
       </mc:AlternateContent>
       <mc:AlternateContent xmlns:mc="http://schemas.openxmlformats.org/markup-compatibility/2006" xmlns:p14="http://schemas.microsoft.com/office/powerpoint/2010/main">
         <mc:Choice Requires="p14">
-          <p:contentPart p14:bwMode="auto" r:id="rId14">
+          <p:contentPart p14:bwMode="auto" r:id="rId28">
             <p14:nvContentPartPr>
               <p14:cNvPr id="287" name="잉크 54"/>
               <p14:cNvContentPartPr/>
@@ -32949,7 +33781,7 @@
               <p:nvPr/>
             </p:nvPicPr>
             <p:blipFill>
-              <a:blip r:embed="rId15"/>
+              <a:blip r:embed="rId29"/>
               <a:stretch>
                 <a:fillRect/>
               </a:stretch>
@@ -32968,7 +33800,7 @@
       </mc:AlternateContent>
       <mc:AlternateContent xmlns:mc="http://schemas.openxmlformats.org/markup-compatibility/2006" xmlns:p14="http://schemas.microsoft.com/office/powerpoint/2010/main">
         <mc:Choice Requires="p14">
-          <p:contentPart p14:bwMode="auto" r:id="rId16">
+          <p:contentPart p14:bwMode="auto" r:id="rId30">
             <p14:nvContentPartPr>
               <p14:cNvPr id="288" name="잉크 55"/>
               <p14:cNvContentPartPr/>
@@ -32988,7 +33820,7 @@
               <p:nvPr/>
             </p:nvPicPr>
             <p:blipFill>
-              <a:blip r:embed="rId17"/>
+              <a:blip r:embed="rId31"/>
               <a:stretch>
                 <a:fillRect/>
               </a:stretch>
@@ -32997,6 +33829,1379 @@
               <a:xfrm>
                 <a:off x="5196840" y="381000"/>
                 <a:ext cx="38100" cy="495300"/>
+              </a:xfrm>
+              <a:prstGeom prst="rect">
+                <a:avLst/>
+              </a:prstGeom>
+            </p:spPr>
+          </p:pic>
+        </mc:Fallback>
+      </mc:AlternateContent>
+      <mc:AlternateContent xmlns:mc="http://schemas.openxmlformats.org/markup-compatibility/2006" xmlns:p14="http://schemas.microsoft.com/office/powerpoint/2010/main">
+        <mc:Choice Requires="p14">
+          <p:contentPart p14:bwMode="auto" r:id="rId32">
+            <p14:nvContentPartPr>
+              <p14:cNvPr id="289" name="잉크 1"/>
+              <p14:cNvContentPartPr/>
+              <p14:nvPr/>
+            </p14:nvContentPartPr>
+            <p14:xfrm>
+              <a:off x="1748790" y="4693285"/>
+              <a:ext cx="112395" cy="72390"/>
+            </p14:xfrm>
+          </p:contentPart>
+        </mc:Choice>
+        <mc:Fallback>
+          <p:pic>
+            <p:nvPicPr>
+              <p:cNvPr id="289" name="잉크 1"/>
+              <p:cNvPicPr/>
+              <p:nvPr/>
+            </p:nvPicPr>
+            <p:blipFill>
+              <a:blip r:embed="rId33"/>
+              <a:stretch>
+                <a:fillRect/>
+              </a:stretch>
+            </p:blipFill>
+            <p:spPr>
+              <a:xfrm>
+                <a:off x="1748790" y="4693285"/>
+                <a:ext cx="112395" cy="72390"/>
+              </a:xfrm>
+              <a:prstGeom prst="rect">
+                <a:avLst/>
+              </a:prstGeom>
+            </p:spPr>
+          </p:pic>
+        </mc:Fallback>
+      </mc:AlternateContent>
+      <mc:AlternateContent xmlns:mc="http://schemas.openxmlformats.org/markup-compatibility/2006" xmlns:p14="http://schemas.microsoft.com/office/powerpoint/2010/main">
+        <mc:Choice Requires="p14">
+          <p:contentPart p14:bwMode="auto" r:id="rId34">
+            <p14:nvContentPartPr>
+              <p14:cNvPr id="290" name="잉크 2"/>
+              <p14:cNvContentPartPr/>
+              <p14:nvPr/>
+            </p14:nvContentPartPr>
+            <p14:xfrm>
+              <a:off x="1604010" y="4540885"/>
+              <a:ext cx="233045" cy="192405"/>
+            </p14:xfrm>
+          </p:contentPart>
+        </mc:Choice>
+        <mc:Fallback>
+          <p:pic>
+            <p:nvPicPr>
+              <p:cNvPr id="290" name="잉크 2"/>
+              <p:cNvPicPr/>
+              <p:nvPr/>
+            </p:nvPicPr>
+            <p:blipFill>
+              <a:blip r:embed="rId35"/>
+              <a:stretch>
+                <a:fillRect/>
+              </a:stretch>
+            </p:blipFill>
+            <p:spPr>
+              <a:xfrm>
+                <a:off x="1604010" y="4540885"/>
+                <a:ext cx="233045" cy="192405"/>
+              </a:xfrm>
+              <a:prstGeom prst="rect">
+                <a:avLst/>
+              </a:prstGeom>
+            </p:spPr>
+          </p:pic>
+        </mc:Fallback>
+      </mc:AlternateContent>
+      <mc:AlternateContent xmlns:mc="http://schemas.openxmlformats.org/markup-compatibility/2006" xmlns:p14="http://schemas.microsoft.com/office/powerpoint/2010/main">
+        <mc:Choice Requires="p14">
+          <p:contentPart p14:bwMode="auto" r:id="rId36">
+            <p14:nvContentPartPr>
+              <p14:cNvPr id="291" name="잉크 3"/>
+              <p14:cNvContentPartPr/>
+              <p14:nvPr/>
+            </p14:nvContentPartPr>
+            <p14:xfrm>
+              <a:off x="2045335" y="4492625"/>
+              <a:ext cx="0" cy="417195"/>
+            </p14:xfrm>
+          </p:contentPart>
+        </mc:Choice>
+        <mc:Fallback>
+          <p:pic>
+            <p:nvPicPr>
+              <p:cNvPr id="291" name="잉크 3"/>
+              <p:cNvPicPr/>
+              <p:nvPr/>
+            </p:nvPicPr>
+            <p:blipFill>
+              <a:blip r:embed="rId37"/>
+              <a:stretch>
+                <a:fillRect/>
+              </a:stretch>
+            </p:blipFill>
+            <p:spPr>
+              <a:xfrm>
+                <a:off x="2045335" y="4492625"/>
+                <a:ext cx="0" cy="417195"/>
+              </a:xfrm>
+              <a:prstGeom prst="rect">
+                <a:avLst/>
+              </a:prstGeom>
+            </p:spPr>
+          </p:pic>
+        </mc:Fallback>
+      </mc:AlternateContent>
+      <mc:AlternateContent xmlns:mc="http://schemas.openxmlformats.org/markup-compatibility/2006" xmlns:p14="http://schemas.microsoft.com/office/powerpoint/2010/main">
+        <mc:Choice Requires="p14">
+          <p:contentPart p14:bwMode="auto" r:id="rId38">
+            <p14:nvContentPartPr>
+              <p14:cNvPr id="292" name="잉크 4"/>
+              <p14:cNvContentPartPr/>
+              <p14:nvPr/>
+            </p14:nvContentPartPr>
+            <p14:xfrm>
+              <a:off x="2237740" y="4548505"/>
+              <a:ext cx="80645" cy="176530"/>
+            </p14:xfrm>
+          </p:contentPart>
+        </mc:Choice>
+        <mc:Fallback>
+          <p:pic>
+            <p:nvPicPr>
+              <p:cNvPr id="292" name="잉크 4"/>
+              <p:cNvPicPr/>
+              <p:nvPr/>
+            </p:nvPicPr>
+            <p:blipFill>
+              <a:blip r:embed="rId39"/>
+              <a:stretch>
+                <a:fillRect/>
+              </a:stretch>
+            </p:blipFill>
+            <p:spPr>
+              <a:xfrm>
+                <a:off x="2237740" y="4548505"/>
+                <a:ext cx="80645" cy="176530"/>
+              </a:xfrm>
+              <a:prstGeom prst="rect">
+                <a:avLst/>
+              </a:prstGeom>
+            </p:spPr>
+          </p:pic>
+        </mc:Fallback>
+      </mc:AlternateContent>
+      <mc:AlternateContent xmlns:mc="http://schemas.openxmlformats.org/markup-compatibility/2006" xmlns:p14="http://schemas.microsoft.com/office/powerpoint/2010/main">
+        <mc:Choice Requires="p14">
+          <p:contentPart p14:bwMode="auto" r:id="rId40">
+            <p14:nvContentPartPr>
+              <p14:cNvPr id="293" name="잉크 5"/>
+              <p14:cNvContentPartPr/>
+              <p14:nvPr/>
+            </p14:nvContentPartPr>
+            <p14:xfrm>
+              <a:off x="2310130" y="4556760"/>
+              <a:ext cx="176530" cy="224790"/>
+            </p14:xfrm>
+          </p:contentPart>
+        </mc:Choice>
+        <mc:Fallback>
+          <p:pic>
+            <p:nvPicPr>
+              <p:cNvPr id="293" name="잉크 5"/>
+              <p:cNvPicPr/>
+              <p:nvPr/>
+            </p:nvPicPr>
+            <p:blipFill>
+              <a:blip r:embed="rId41"/>
+              <a:stretch>
+                <a:fillRect/>
+              </a:stretch>
+            </p:blipFill>
+            <p:spPr>
+              <a:xfrm>
+                <a:off x="2310130" y="4556760"/>
+                <a:ext cx="176530" cy="224790"/>
+              </a:xfrm>
+              <a:prstGeom prst="rect">
+                <a:avLst/>
+              </a:prstGeom>
+            </p:spPr>
+          </p:pic>
+        </mc:Fallback>
+      </mc:AlternateContent>
+      <mc:AlternateContent xmlns:mc="http://schemas.openxmlformats.org/markup-compatibility/2006" xmlns:p14="http://schemas.microsoft.com/office/powerpoint/2010/main">
+        <mc:Choice Requires="p14">
+          <p:contentPart p14:bwMode="auto" r:id="rId42">
+            <p14:nvContentPartPr>
+              <p14:cNvPr id="294" name="잉크 6"/>
+              <p14:cNvContentPartPr/>
+              <p14:nvPr/>
+            </p14:nvContentPartPr>
+            <p14:xfrm>
+              <a:off x="2286000" y="4773295"/>
+              <a:ext cx="136525" cy="15875"/>
+            </p14:xfrm>
+          </p:contentPart>
+        </mc:Choice>
+        <mc:Fallback>
+          <p:pic>
+            <p:nvPicPr>
+              <p:cNvPr id="294" name="잉크 6"/>
+              <p:cNvPicPr/>
+              <p:nvPr/>
+            </p:nvPicPr>
+            <p:blipFill>
+              <a:blip r:embed="rId43"/>
+              <a:stretch>
+                <a:fillRect/>
+              </a:stretch>
+            </p:blipFill>
+            <p:spPr>
+              <a:xfrm>
+                <a:off x="2286000" y="4773295"/>
+                <a:ext cx="136525" cy="15875"/>
+              </a:xfrm>
+              <a:prstGeom prst="rect">
+                <a:avLst/>
+              </a:prstGeom>
+            </p:spPr>
+          </p:pic>
+        </mc:Fallback>
+      </mc:AlternateContent>
+      <mc:AlternateContent xmlns:mc="http://schemas.openxmlformats.org/markup-compatibility/2006" xmlns:p14="http://schemas.microsoft.com/office/powerpoint/2010/main">
+        <mc:Choice Requires="p14">
+          <p:contentPart p14:bwMode="auto" r:id="rId44">
+            <p14:nvContentPartPr>
+              <p14:cNvPr id="295" name="잉크 7"/>
+              <p14:cNvContentPartPr/>
+              <p14:nvPr/>
+            </p14:nvContentPartPr>
+            <p14:xfrm>
+              <a:off x="2318385" y="4821555"/>
+              <a:ext cx="120015" cy="128270"/>
+            </p14:xfrm>
+          </p:contentPart>
+        </mc:Choice>
+        <mc:Fallback>
+          <p:pic>
+            <p:nvPicPr>
+              <p:cNvPr id="295" name="잉크 7"/>
+              <p:cNvPicPr/>
+              <p:nvPr/>
+            </p:nvPicPr>
+            <p:blipFill>
+              <a:blip r:embed="rId45"/>
+              <a:stretch>
+                <a:fillRect/>
+              </a:stretch>
+            </p:blipFill>
+            <p:spPr>
+              <a:xfrm>
+                <a:off x="2318385" y="4821555"/>
+                <a:ext cx="120015" cy="128270"/>
+              </a:xfrm>
+              <a:prstGeom prst="rect">
+                <a:avLst/>
+              </a:prstGeom>
+            </p:spPr>
+          </p:pic>
+        </mc:Fallback>
+      </mc:AlternateContent>
+      <mc:AlternateContent xmlns:mc="http://schemas.openxmlformats.org/markup-compatibility/2006" xmlns:p14="http://schemas.microsoft.com/office/powerpoint/2010/main">
+        <mc:Choice Requires="p14">
+          <p:contentPart p14:bwMode="auto" r:id="rId46">
+            <p14:nvContentPartPr>
+              <p14:cNvPr id="296" name="잉크 8"/>
+              <p14:cNvContentPartPr/>
+              <p14:nvPr/>
+            </p14:nvContentPartPr>
+            <p14:xfrm>
+              <a:off x="1307465" y="4436745"/>
+              <a:ext cx="1267460" cy="625475"/>
+            </p14:xfrm>
+          </p:contentPart>
+        </mc:Choice>
+        <mc:Fallback>
+          <p:pic>
+            <p:nvPicPr>
+              <p:cNvPr id="296" name="잉크 8"/>
+              <p:cNvPicPr/>
+              <p:nvPr/>
+            </p:nvPicPr>
+            <p:blipFill>
+              <a:blip r:embed="rId47"/>
+              <a:stretch>
+                <a:fillRect/>
+              </a:stretch>
+            </p:blipFill>
+            <p:spPr>
+              <a:xfrm>
+                <a:off x="1307465" y="4436745"/>
+                <a:ext cx="1267460" cy="625475"/>
+              </a:xfrm>
+              <a:prstGeom prst="rect">
+                <a:avLst/>
+              </a:prstGeom>
+            </p:spPr>
+          </p:pic>
+        </mc:Fallback>
+      </mc:AlternateContent>
+      <p:sp>
+        <p:nvSpPr>
+          <p:cNvPr id="297" name="텍스트 상자 9"/>
+          <p:cNvSpPr txBox="1">
+            <a:spLocks/>
+          </p:cNvSpPr>
+          <p:nvPr/>
+        </p:nvSpPr>
+        <p:spPr>
+          <a:xfrm rot="0">
+            <a:off x="3674110" y="4660900"/>
+            <a:ext cx="2626995" cy="1200785"/>
+          </a:xfrm>
+          <a:prstGeom prst="rect"/>
+          <a:noFill/>
+          <a:ln>
+            <a:noFill/>
+            <a:prstDash/>
+          </a:ln>
+        </p:spPr>
+        <p:txBody>
+          <a:bodyPr wrap="none" lIns="89535" tIns="46355" rIns="89535" bIns="46355" vert="horz" anchor="t">
+            <a:spAutoFit/>
+          </a:bodyPr>
+          <a:lstStyle/>
+          <a:p>
+            <a:pPr marL="0" indent="0" algn="l" hangingPunct="1"/>
+            <a:r>
+              <a:rPr sz="1800">
+                <a:latin typeface="맑은 고딕" charset="0"/>
+                <a:ea typeface="맑은 고딕" charset="0"/>
+              </a:rPr>
+              <a:t>만들 </a:t>
+            </a:r>
+            <a:r>
+              <a:rPr sz="1800">
+                <a:latin typeface="맑은 고딕" charset="0"/>
+                <a:ea typeface="맑은 고딕" charset="0"/>
+              </a:rPr>
+              <a:t>때 </a:t>
+            </a:r>
+            <a:r>
+              <a:rPr lang="ko-KR" sz="1800">
+                <a:latin typeface="맑은 고딕" charset="0"/>
+                <a:ea typeface="맑은 고딕" charset="0"/>
+              </a:rPr>
+              <a:t>이런 </a:t>
+            </a:r>
+            <a:r>
+              <a:rPr lang="ko-KR" sz="1800">
+                <a:latin typeface="맑은 고딕" charset="0"/>
+                <a:ea typeface="맑은 고딕" charset="0"/>
+              </a:rPr>
+              <a:t>느낌</a:t>
+            </a:r>
+            <a:r>
+              <a:rPr lang="ko-KR" sz="1800">
+                <a:latin typeface="맑은 고딕" charset="0"/>
+                <a:ea typeface="맑은 고딕" charset="0"/>
+              </a:rPr>
+              <a:t>으로</a:t>
+            </a:r>
+            <a:endParaRPr lang="ko-KR" altLang="en-US" sz="1800">
+              <a:latin typeface="맑은 고딕" charset="0"/>
+              <a:ea typeface="맑은 고딕" charset="0"/>
+            </a:endParaRPr>
+          </a:p>
+          <a:p>
+            <a:pPr marL="0" indent="0" algn="l" hangingPunct="1"/>
+            <a:endParaRPr lang="ko-KR" altLang="en-US" sz="1800">
+              <a:latin typeface="맑은 고딕" charset="0"/>
+              <a:ea typeface="맑은 고딕" charset="0"/>
+            </a:endParaRPr>
+          </a:p>
+          <a:p>
+            <a:pPr marL="0" indent="0" algn="l" hangingPunct="1"/>
+            <a:r>
+              <a:rPr lang="ko-KR" sz="1800">
+                <a:latin typeface="맑은 고딕" charset="0"/>
+                <a:ea typeface="맑은 고딕" charset="0"/>
+              </a:rPr>
+              <a:t>두 번째 </a:t>
+            </a:r>
+            <a:r>
+              <a:rPr lang="ko-KR" sz="1800">
+                <a:latin typeface="맑은 고딕" charset="0"/>
+                <a:ea typeface="맑은 고딕" charset="0"/>
+              </a:rPr>
+              <a:t>웹페 </a:t>
+            </a:r>
+            <a:r>
+              <a:rPr lang="ko-KR" sz="1800">
+                <a:latin typeface="맑은 고딕" charset="0"/>
+                <a:ea typeface="맑은 고딕" charset="0"/>
+              </a:rPr>
+              <a:t>만들기는</a:t>
+            </a:r>
+            <a:endParaRPr lang="ko-KR" altLang="en-US" sz="1800">
+              <a:latin typeface="맑은 고딕" charset="0"/>
+              <a:ea typeface="맑은 고딕" charset="0"/>
+            </a:endParaRPr>
+          </a:p>
+          <a:p>
+            <a:pPr marL="0" indent="0" algn="l" hangingPunct="1"/>
+            <a:r>
+              <a:rPr lang="ko-KR" sz="1800">
+                <a:latin typeface="맑은 고딕" charset="0"/>
+                <a:ea typeface="맑은 고딕" charset="0"/>
+              </a:rPr>
+              <a:t>강의실에 </a:t>
+            </a:r>
+            <a:r>
+              <a:rPr lang="ko-KR" sz="1800">
+                <a:latin typeface="맑은 고딕" charset="0"/>
+                <a:ea typeface="맑은 고딕" charset="0"/>
+              </a:rPr>
+              <a:t>있는 사진으로</a:t>
+            </a:r>
+            <a:endParaRPr lang="ko-KR" altLang="en-US" sz="1800">
+              <a:latin typeface="맑은 고딕" charset="0"/>
+              <a:ea typeface="맑은 고딕" charset="0"/>
+            </a:endParaRPr>
+          </a:p>
+        </p:txBody>
+      </p:sp>
+      <mc:AlternateContent xmlns:mc="http://schemas.openxmlformats.org/markup-compatibility/2006" xmlns:p14="http://schemas.microsoft.com/office/powerpoint/2010/main">
+        <mc:Choice Requires="p14">
+          <p:contentPart p14:bwMode="auto" r:id="rId48">
+            <p14:nvContentPartPr>
+              <p14:cNvPr id="306" name="잉크 18"/>
+              <p14:cNvContentPartPr/>
+              <p14:nvPr/>
+            </p14:nvContentPartPr>
+            <p14:xfrm>
+              <a:off x="8335010" y="4219575"/>
+              <a:ext cx="8255" cy="8255"/>
+            </p14:xfrm>
+          </p:contentPart>
+        </mc:Choice>
+        <mc:Fallback>
+          <p:pic>
+            <p:nvPicPr>
+              <p:cNvPr id="306" name="잉크 18"/>
+              <p:cNvPicPr/>
+              <p:nvPr/>
+            </p:nvPicPr>
+            <p:blipFill>
+              <a:blip r:embed="rId49"/>
+              <a:stretch>
+                <a:fillRect/>
+              </a:stretch>
+            </p:blipFill>
+            <p:spPr>
+              <a:xfrm>
+                <a:off x="8335010" y="4219575"/>
+                <a:ext cx="8255" cy="8255"/>
+              </a:xfrm>
+              <a:prstGeom prst="rect">
+                <a:avLst/>
+              </a:prstGeom>
+            </p:spPr>
+          </p:pic>
+        </mc:Fallback>
+      </mc:AlternateContent>
+      <mc:AlternateContent xmlns:mc="http://schemas.openxmlformats.org/markup-compatibility/2006" xmlns:p14="http://schemas.microsoft.com/office/powerpoint/2010/main">
+        <mc:Choice Requires="p14">
+          <p:contentPart p14:bwMode="auto" r:id="rId50">
+            <p14:nvContentPartPr>
+              <p14:cNvPr id="307" name="잉크 27"/>
+              <p14:cNvContentPartPr/>
+              <p14:nvPr/>
+            </p14:nvContentPartPr>
+            <p14:xfrm>
+              <a:off x="6556375" y="4124325"/>
+              <a:ext cx="3175" cy="3175"/>
+            </p14:xfrm>
+          </p:contentPart>
+        </mc:Choice>
+        <mc:Fallback>
+          <p:pic>
+            <p:nvPicPr>
+              <p:cNvPr id="307" name="잉크 27"/>
+              <p:cNvPicPr/>
+              <p:nvPr/>
+            </p:nvPicPr>
+            <p:blipFill>
+              <a:blip r:embed="rId51"/>
+              <a:stretch>
+                <a:fillRect/>
+              </a:stretch>
+            </p:blipFill>
+            <p:spPr>
+              <a:xfrm>
+                <a:off x="6556375" y="4124325"/>
+                <a:ext cx="3175" cy="3175"/>
+              </a:xfrm>
+              <a:prstGeom prst="rect">
+                <a:avLst/>
+              </a:prstGeom>
+            </p:spPr>
+          </p:pic>
+        </mc:Fallback>
+      </mc:AlternateContent>
+      <mc:AlternateContent xmlns:mc="http://schemas.openxmlformats.org/markup-compatibility/2006" xmlns:p14="http://schemas.microsoft.com/office/powerpoint/2010/main">
+        <mc:Choice Requires="p14">
+          <p:contentPart p14:bwMode="auto" r:id="rId52">
+            <p14:nvContentPartPr>
+              <p14:cNvPr id="308" name="잉크 28"/>
+              <p14:cNvContentPartPr/>
+              <p14:nvPr/>
+            </p14:nvContentPartPr>
+            <p14:xfrm>
+              <a:off x="6619875" y="4051300"/>
+              <a:ext cx="98425" cy="88900"/>
+            </p14:xfrm>
+          </p:contentPart>
+        </mc:Choice>
+        <mc:Fallback>
+          <p:pic>
+            <p:nvPicPr>
+              <p:cNvPr id="308" name="잉크 28"/>
+              <p:cNvPicPr/>
+              <p:nvPr/>
+            </p:nvPicPr>
+            <p:blipFill>
+              <a:blip r:embed="rId53"/>
+              <a:stretch>
+                <a:fillRect/>
+              </a:stretch>
+            </p:blipFill>
+            <p:spPr>
+              <a:xfrm>
+                <a:off x="6619875" y="4051300"/>
+                <a:ext cx="98425" cy="88900"/>
+              </a:xfrm>
+              <a:prstGeom prst="rect">
+                <a:avLst/>
+              </a:prstGeom>
+            </p:spPr>
+          </p:pic>
+        </mc:Fallback>
+      </mc:AlternateContent>
+      <mc:AlternateContent xmlns:mc="http://schemas.openxmlformats.org/markup-compatibility/2006" xmlns:p14="http://schemas.microsoft.com/office/powerpoint/2010/main">
+        <mc:Choice Requires="p14">
+          <p:contentPart p14:bwMode="auto" r:id="rId54">
+            <p14:nvContentPartPr>
+              <p14:cNvPr id="309" name="잉크 29"/>
+              <p14:cNvContentPartPr/>
+              <p14:nvPr/>
+            </p14:nvContentPartPr>
+            <p14:xfrm>
+              <a:off x="6727825" y="4048125"/>
+              <a:ext cx="82550" cy="107950"/>
+            </p14:xfrm>
+          </p:contentPart>
+        </mc:Choice>
+        <mc:Fallback>
+          <p:pic>
+            <p:nvPicPr>
+              <p:cNvPr id="309" name="잉크 29"/>
+              <p:cNvPicPr/>
+              <p:nvPr/>
+            </p:nvPicPr>
+            <p:blipFill>
+              <a:blip r:embed="rId55"/>
+              <a:stretch>
+                <a:fillRect/>
+              </a:stretch>
+            </p:blipFill>
+            <p:spPr>
+              <a:xfrm>
+                <a:off x="6727825" y="4048125"/>
+                <a:ext cx="82550" cy="107950"/>
+              </a:xfrm>
+              <a:prstGeom prst="rect">
+                <a:avLst/>
+              </a:prstGeom>
+            </p:spPr>
+          </p:pic>
+        </mc:Fallback>
+      </mc:AlternateContent>
+      <mc:AlternateContent xmlns:mc="http://schemas.openxmlformats.org/markup-compatibility/2006" xmlns:p14="http://schemas.microsoft.com/office/powerpoint/2010/main">
+        <mc:Choice Requires="p14">
+          <p:contentPart p14:bwMode="auto" r:id="rId56">
+            <p14:nvContentPartPr>
+              <p14:cNvPr id="310" name="잉크 30"/>
+              <p14:cNvContentPartPr/>
+              <p14:nvPr/>
+            </p14:nvContentPartPr>
+            <p14:xfrm>
+              <a:off x="6854825" y="4060825"/>
+              <a:ext cx="66675" cy="123825"/>
+            </p14:xfrm>
+          </p:contentPart>
+        </mc:Choice>
+        <mc:Fallback>
+          <p:pic>
+            <p:nvPicPr>
+              <p:cNvPr id="310" name="잉크 30"/>
+              <p:cNvPicPr/>
+              <p:nvPr/>
+            </p:nvPicPr>
+            <p:blipFill>
+              <a:blip r:embed="rId57"/>
+              <a:stretch>
+                <a:fillRect/>
+              </a:stretch>
+            </p:blipFill>
+            <p:spPr>
+              <a:xfrm>
+                <a:off x="6854825" y="4060825"/>
+                <a:ext cx="66675" cy="123825"/>
+              </a:xfrm>
+              <a:prstGeom prst="rect">
+                <a:avLst/>
+              </a:prstGeom>
+            </p:spPr>
+          </p:pic>
+        </mc:Fallback>
+      </mc:AlternateContent>
+      <mc:AlternateContent xmlns:mc="http://schemas.openxmlformats.org/markup-compatibility/2006" xmlns:p14="http://schemas.microsoft.com/office/powerpoint/2010/main">
+        <mc:Choice Requires="p14">
+          <p:contentPart p14:bwMode="auto" r:id="rId58">
+            <p14:nvContentPartPr>
+              <p14:cNvPr id="311" name="잉크 31"/>
+              <p14:cNvContentPartPr/>
+              <p14:nvPr/>
+            </p14:nvContentPartPr>
+            <p14:xfrm>
+              <a:off x="6956425" y="4079875"/>
+              <a:ext cx="127000" cy="165100"/>
+            </p14:xfrm>
+          </p:contentPart>
+        </mc:Choice>
+        <mc:Fallback>
+          <p:pic>
+            <p:nvPicPr>
+              <p:cNvPr id="311" name="잉크 31"/>
+              <p:cNvPicPr/>
+              <p:nvPr/>
+            </p:nvPicPr>
+            <p:blipFill>
+              <a:blip r:embed="rId59"/>
+              <a:stretch>
+                <a:fillRect/>
+              </a:stretch>
+            </p:blipFill>
+            <p:spPr>
+              <a:xfrm>
+                <a:off x="6956425" y="4079875"/>
+                <a:ext cx="127000" cy="165100"/>
+              </a:xfrm>
+              <a:prstGeom prst="rect">
+                <a:avLst/>
+              </a:prstGeom>
+            </p:spPr>
+          </p:pic>
+        </mc:Fallback>
+      </mc:AlternateContent>
+      <mc:AlternateContent xmlns:mc="http://schemas.openxmlformats.org/markup-compatibility/2006" xmlns:p14="http://schemas.microsoft.com/office/powerpoint/2010/main">
+        <mc:Choice Requires="p14">
+          <p:contentPart p14:bwMode="auto" r:id="rId60">
+            <p14:nvContentPartPr>
+              <p14:cNvPr id="312" name="잉크 32"/>
+              <p14:cNvContentPartPr/>
+              <p14:nvPr/>
+            </p14:nvContentPartPr>
+            <p14:xfrm>
+              <a:off x="8448675" y="4238625"/>
+              <a:ext cx="0" cy="6350"/>
+            </p14:xfrm>
+          </p:contentPart>
+        </mc:Choice>
+        <mc:Fallback>
+          <p:pic>
+            <p:nvPicPr>
+              <p:cNvPr id="312" name="잉크 32"/>
+              <p:cNvPicPr/>
+              <p:nvPr/>
+            </p:nvPicPr>
+            <p:blipFill>
+              <a:blip r:embed="rId61"/>
+              <a:stretch>
+                <a:fillRect/>
+              </a:stretch>
+            </p:blipFill>
+            <p:spPr>
+              <a:xfrm>
+                <a:off x="8448675" y="4238625"/>
+                <a:ext cx="0" cy="6350"/>
+              </a:xfrm>
+              <a:prstGeom prst="rect">
+                <a:avLst/>
+              </a:prstGeom>
+            </p:spPr>
+          </p:pic>
+        </mc:Fallback>
+      </mc:AlternateContent>
+      <mc:AlternateContent xmlns:mc="http://schemas.openxmlformats.org/markup-compatibility/2006" xmlns:p14="http://schemas.microsoft.com/office/powerpoint/2010/main">
+        <mc:Choice Requires="p14">
+          <p:contentPart p14:bwMode="auto" r:id="rId62">
+            <p14:nvContentPartPr>
+              <p14:cNvPr id="313" name="잉크 33"/>
+              <p14:cNvContentPartPr/>
+              <p14:nvPr/>
+            </p14:nvContentPartPr>
+            <p14:xfrm>
+              <a:off x="8556625" y="4146550"/>
+              <a:ext cx="158750" cy="79375"/>
+            </p14:xfrm>
+          </p:contentPart>
+        </mc:Choice>
+        <mc:Fallback>
+          <p:pic>
+            <p:nvPicPr>
+              <p:cNvPr id="313" name="잉크 33"/>
+              <p:cNvPicPr/>
+              <p:nvPr/>
+            </p:nvPicPr>
+            <p:blipFill>
+              <a:blip r:embed="rId63"/>
+              <a:stretch>
+                <a:fillRect/>
+              </a:stretch>
+            </p:blipFill>
+            <p:spPr>
+              <a:xfrm>
+                <a:off x="8556625" y="4146550"/>
+                <a:ext cx="158750" cy="79375"/>
+              </a:xfrm>
+              <a:prstGeom prst="rect">
+                <a:avLst/>
+              </a:prstGeom>
+            </p:spPr>
+          </p:pic>
+        </mc:Fallback>
+      </mc:AlternateContent>
+      <mc:AlternateContent xmlns:mc="http://schemas.openxmlformats.org/markup-compatibility/2006" xmlns:p14="http://schemas.microsoft.com/office/powerpoint/2010/main">
+        <mc:Choice Requires="p14">
+          <p:contentPart p14:bwMode="auto" r:id="rId64">
+            <p14:nvContentPartPr>
+              <p14:cNvPr id="314" name="잉크 34"/>
+              <p14:cNvContentPartPr/>
+              <p14:nvPr/>
+            </p14:nvContentPartPr>
+            <p14:xfrm>
+              <a:off x="8740775" y="4156075"/>
+              <a:ext cx="66675" cy="79375"/>
+            </p14:xfrm>
+          </p:contentPart>
+        </mc:Choice>
+        <mc:Fallback>
+          <p:pic>
+            <p:nvPicPr>
+              <p:cNvPr id="314" name="잉크 34"/>
+              <p:cNvPicPr/>
+              <p:nvPr/>
+            </p:nvPicPr>
+            <p:blipFill>
+              <a:blip r:embed="rId65"/>
+              <a:stretch>
+                <a:fillRect/>
+              </a:stretch>
+            </p:blipFill>
+            <p:spPr>
+              <a:xfrm>
+                <a:off x="8740775" y="4156075"/>
+                <a:ext cx="66675" cy="79375"/>
+              </a:xfrm>
+              <a:prstGeom prst="rect">
+                <a:avLst/>
+              </a:prstGeom>
+            </p:spPr>
+          </p:pic>
+        </mc:Fallback>
+      </mc:AlternateContent>
+      <mc:AlternateContent xmlns:mc="http://schemas.openxmlformats.org/markup-compatibility/2006" xmlns:p14="http://schemas.microsoft.com/office/powerpoint/2010/main">
+        <mc:Choice Requires="p14">
+          <p:contentPart p14:bwMode="auto" r:id="rId66">
+            <p14:nvContentPartPr>
+              <p14:cNvPr id="315" name="잉크 35"/>
+              <p14:cNvContentPartPr/>
+              <p14:nvPr/>
+            </p14:nvContentPartPr>
+            <p14:xfrm>
+              <a:off x="8804275" y="4152900"/>
+              <a:ext cx="60325" cy="0"/>
+            </p14:xfrm>
+          </p:contentPart>
+        </mc:Choice>
+        <mc:Fallback>
+          <p:pic>
+            <p:nvPicPr>
+              <p:cNvPr id="315" name="잉크 35"/>
+              <p:cNvPicPr/>
+              <p:nvPr/>
+            </p:nvPicPr>
+            <p:blipFill>
+              <a:blip r:embed="rId67"/>
+              <a:stretch>
+                <a:fillRect/>
+              </a:stretch>
+            </p:blipFill>
+            <p:spPr>
+              <a:xfrm>
+                <a:off x="8804275" y="4152900"/>
+                <a:ext cx="60325" cy="0"/>
+              </a:xfrm>
+              <a:prstGeom prst="rect">
+                <a:avLst/>
+              </a:prstGeom>
+            </p:spPr>
+          </p:pic>
+        </mc:Fallback>
+      </mc:AlternateContent>
+      <mc:AlternateContent xmlns:mc="http://schemas.openxmlformats.org/markup-compatibility/2006" xmlns:p14="http://schemas.microsoft.com/office/powerpoint/2010/main">
+        <mc:Choice Requires="p14">
+          <p:contentPart p14:bwMode="auto" r:id="rId68">
+            <p14:nvContentPartPr>
+              <p14:cNvPr id="316" name="잉크 36"/>
+              <p14:cNvContentPartPr/>
+              <p14:nvPr/>
+            </p14:nvContentPartPr>
+            <p14:xfrm>
+              <a:off x="8829675" y="4102100"/>
+              <a:ext cx="60325" cy="136525"/>
+            </p14:xfrm>
+          </p:contentPart>
+        </mc:Choice>
+        <mc:Fallback>
+          <p:pic>
+            <p:nvPicPr>
+              <p:cNvPr id="316" name="잉크 36"/>
+              <p:cNvPicPr/>
+              <p:nvPr/>
+            </p:nvPicPr>
+            <p:blipFill>
+              <a:blip r:embed="rId69"/>
+              <a:stretch>
+                <a:fillRect/>
+              </a:stretch>
+            </p:blipFill>
+            <p:spPr>
+              <a:xfrm>
+                <a:off x="8829675" y="4102100"/>
+                <a:ext cx="60325" cy="136525"/>
+              </a:xfrm>
+              <a:prstGeom prst="rect">
+                <a:avLst/>
+              </a:prstGeom>
+            </p:spPr>
+          </p:pic>
+        </mc:Fallback>
+      </mc:AlternateContent>
+      <mc:AlternateContent xmlns:mc="http://schemas.openxmlformats.org/markup-compatibility/2006" xmlns:p14="http://schemas.microsoft.com/office/powerpoint/2010/main">
+        <mc:Choice Requires="p14">
+          <p:contentPart p14:bwMode="auto" r:id="rId70">
+            <p14:nvContentPartPr>
+              <p14:cNvPr id="317" name="잉크 37"/>
+              <p14:cNvContentPartPr/>
+              <p14:nvPr/>
+            </p14:nvContentPartPr>
+            <p14:xfrm>
+              <a:off x="8905875" y="4149725"/>
+              <a:ext cx="79375" cy="95250"/>
+            </p14:xfrm>
+          </p:contentPart>
+        </mc:Choice>
+        <mc:Fallback>
+          <p:pic>
+            <p:nvPicPr>
+              <p:cNvPr id="317" name="잉크 37"/>
+              <p:cNvPicPr/>
+              <p:nvPr/>
+            </p:nvPicPr>
+            <p:blipFill>
+              <a:blip r:embed="rId71"/>
+              <a:stretch>
+                <a:fillRect/>
+              </a:stretch>
+            </p:blipFill>
+            <p:spPr>
+              <a:xfrm>
+                <a:off x="8905875" y="4149725"/>
+                <a:ext cx="79375" cy="95250"/>
+              </a:xfrm>
+              <a:prstGeom prst="rect">
+                <a:avLst/>
+              </a:prstGeom>
+            </p:spPr>
+          </p:pic>
+        </mc:Fallback>
+      </mc:AlternateContent>
+      <mc:AlternateContent xmlns:mc="http://schemas.openxmlformats.org/markup-compatibility/2006" xmlns:p14="http://schemas.microsoft.com/office/powerpoint/2010/main">
+        <mc:Choice Requires="p14">
+          <p:contentPart p14:bwMode="auto" r:id="rId72">
+            <p14:nvContentPartPr>
+              <p14:cNvPr id="318" name="잉크 38"/>
+              <p14:cNvContentPartPr/>
+              <p14:nvPr/>
+            </p14:nvContentPartPr>
+            <p14:xfrm>
+              <a:off x="9004300" y="4133850"/>
+              <a:ext cx="85725" cy="130175"/>
+            </p14:xfrm>
+          </p:contentPart>
+        </mc:Choice>
+        <mc:Fallback>
+          <p:pic>
+            <p:nvPicPr>
+              <p:cNvPr id="318" name="잉크 38"/>
+              <p:cNvPicPr/>
+              <p:nvPr/>
+            </p:nvPicPr>
+            <p:blipFill>
+              <a:blip r:embed="rId73"/>
+              <a:stretch>
+                <a:fillRect/>
+              </a:stretch>
+            </p:blipFill>
+            <p:spPr>
+              <a:xfrm>
+                <a:off x="9004300" y="4133850"/>
+                <a:ext cx="85725" cy="130175"/>
+              </a:xfrm>
+              <a:prstGeom prst="rect">
+                <a:avLst/>
+              </a:prstGeom>
+            </p:spPr>
+          </p:pic>
+        </mc:Fallback>
+      </mc:AlternateContent>
+      <mc:AlternateContent xmlns:mc="http://schemas.openxmlformats.org/markup-compatibility/2006" xmlns:p14="http://schemas.microsoft.com/office/powerpoint/2010/main">
+        <mc:Choice Requires="p14">
+          <p:contentPart p14:bwMode="auto" r:id="rId74">
+            <p14:nvContentPartPr>
+              <p14:cNvPr id="319" name="잉크 39"/>
+              <p14:cNvContentPartPr/>
+              <p14:nvPr/>
+            </p14:nvContentPartPr>
+            <p14:xfrm>
+              <a:off x="9080500" y="4175125"/>
+              <a:ext cx="130175" cy="3175"/>
+            </p14:xfrm>
+          </p:contentPart>
+        </mc:Choice>
+        <mc:Fallback>
+          <p:pic>
+            <p:nvPicPr>
+              <p:cNvPr id="319" name="잉크 39"/>
+              <p:cNvPicPr/>
+              <p:nvPr/>
+            </p:nvPicPr>
+            <p:blipFill>
+              <a:blip r:embed="rId75"/>
+              <a:stretch>
+                <a:fillRect/>
+              </a:stretch>
+            </p:blipFill>
+            <p:spPr>
+              <a:xfrm>
+                <a:off x="9080500" y="4175125"/>
+                <a:ext cx="130175" cy="3175"/>
+              </a:xfrm>
+              <a:prstGeom prst="rect">
+                <a:avLst/>
+              </a:prstGeom>
+            </p:spPr>
+          </p:pic>
+        </mc:Fallback>
+      </mc:AlternateContent>
+      <mc:AlternateContent xmlns:mc="http://schemas.openxmlformats.org/markup-compatibility/2006" xmlns:p14="http://schemas.microsoft.com/office/powerpoint/2010/main">
+        <mc:Choice Requires="p14">
+          <p:contentPart p14:bwMode="auto" r:id="rId76">
+            <p14:nvContentPartPr>
+              <p14:cNvPr id="320" name="잉크 40"/>
+              <p14:cNvContentPartPr/>
+              <p14:nvPr/>
+            </p14:nvContentPartPr>
+            <p14:xfrm>
+              <a:off x="9144000" y="4111625"/>
+              <a:ext cx="82550" cy="206375"/>
+            </p14:xfrm>
+          </p:contentPart>
+        </mc:Choice>
+        <mc:Fallback>
+          <p:pic>
+            <p:nvPicPr>
+              <p:cNvPr id="320" name="잉크 40"/>
+              <p:cNvPicPr/>
+              <p:nvPr/>
+            </p:nvPicPr>
+            <p:blipFill>
+              <a:blip r:embed="rId77"/>
+              <a:stretch>
+                <a:fillRect/>
+              </a:stretch>
+            </p:blipFill>
+            <p:spPr>
+              <a:xfrm>
+                <a:off x="9144000" y="4111625"/>
+                <a:ext cx="82550" cy="206375"/>
+              </a:xfrm>
+              <a:prstGeom prst="rect">
+                <a:avLst/>
+              </a:prstGeom>
+            </p:spPr>
+          </p:pic>
+        </mc:Fallback>
+      </mc:AlternateContent>
+      <mc:AlternateContent xmlns:mc="http://schemas.openxmlformats.org/markup-compatibility/2006" xmlns:p14="http://schemas.microsoft.com/office/powerpoint/2010/main">
+        <mc:Choice Requires="p14">
+          <p:contentPart p14:bwMode="auto" r:id="rId78">
+            <p14:nvContentPartPr>
+              <p14:cNvPr id="321" name="잉크 41"/>
+              <p14:cNvContentPartPr/>
+              <p14:nvPr/>
+            </p14:nvContentPartPr>
+            <p14:xfrm>
+              <a:off x="9267825" y="4194175"/>
+              <a:ext cx="101600" cy="171450"/>
+            </p14:xfrm>
+          </p:contentPart>
+        </mc:Choice>
+        <mc:Fallback>
+          <p:pic>
+            <p:nvPicPr>
+              <p:cNvPr id="321" name="잉크 41"/>
+              <p:cNvPicPr/>
+              <p:nvPr/>
+            </p:nvPicPr>
+            <p:blipFill>
+              <a:blip r:embed="rId79"/>
+              <a:stretch>
+                <a:fillRect/>
+              </a:stretch>
+            </p:blipFill>
+            <p:spPr>
+              <a:xfrm>
+                <a:off x="9267825" y="4194175"/>
+                <a:ext cx="101600" cy="171450"/>
+              </a:xfrm>
+              <a:prstGeom prst="rect">
+                <a:avLst/>
+              </a:prstGeom>
+            </p:spPr>
+          </p:pic>
+        </mc:Fallback>
+      </mc:AlternateContent>
+      <mc:AlternateContent xmlns:mc="http://schemas.openxmlformats.org/markup-compatibility/2006" xmlns:p14="http://schemas.microsoft.com/office/powerpoint/2010/main">
+        <mc:Choice Requires="p14">
+          <p:contentPart p14:bwMode="auto" r:id="rId80">
+            <p14:nvContentPartPr>
+              <p14:cNvPr id="322" name="잉크 42"/>
+              <p14:cNvContentPartPr/>
+              <p14:nvPr/>
+            </p14:nvContentPartPr>
+            <p14:xfrm>
+              <a:off x="7477125" y="2120900"/>
+              <a:ext cx="47625" cy="142875"/>
+            </p14:xfrm>
+          </p:contentPart>
+        </mc:Choice>
+        <mc:Fallback>
+          <p:pic>
+            <p:nvPicPr>
+              <p:cNvPr id="322" name="잉크 42"/>
+              <p:cNvPicPr/>
+              <p:nvPr/>
+            </p:nvPicPr>
+            <p:blipFill>
+              <a:blip r:embed="rId81"/>
+              <a:stretch>
+                <a:fillRect/>
+              </a:stretch>
+            </p:blipFill>
+            <p:spPr>
+              <a:xfrm>
+                <a:off x="7477125" y="2120900"/>
+                <a:ext cx="47625" cy="142875"/>
+              </a:xfrm>
+              <a:prstGeom prst="rect">
+                <a:avLst/>
+              </a:prstGeom>
+            </p:spPr>
+          </p:pic>
+        </mc:Fallback>
+      </mc:AlternateContent>
+      <mc:AlternateContent xmlns:mc="http://schemas.openxmlformats.org/markup-compatibility/2006" xmlns:p14="http://schemas.microsoft.com/office/powerpoint/2010/main">
+        <mc:Choice Requires="p14">
+          <p:contentPart p14:bwMode="auto" r:id="rId82">
+            <p14:nvContentPartPr>
+              <p14:cNvPr id="323" name="잉크 43"/>
+              <p14:cNvContentPartPr/>
+              <p14:nvPr/>
+            </p14:nvContentPartPr>
+            <p14:xfrm>
+              <a:off x="7550150" y="2193925"/>
+              <a:ext cx="57150" cy="50800"/>
+            </p14:xfrm>
+          </p:contentPart>
+        </mc:Choice>
+        <mc:Fallback>
+          <p:pic>
+            <p:nvPicPr>
+              <p:cNvPr id="323" name="잉크 43"/>
+              <p:cNvPicPr/>
+              <p:nvPr/>
+            </p:nvPicPr>
+            <p:blipFill>
+              <a:blip r:embed="rId83"/>
+              <a:stretch>
+                <a:fillRect/>
+              </a:stretch>
+            </p:blipFill>
+            <p:spPr>
+              <a:xfrm>
+                <a:off x="7550150" y="2193925"/>
+                <a:ext cx="57150" cy="50800"/>
+              </a:xfrm>
+              <a:prstGeom prst="rect">
+                <a:avLst/>
+              </a:prstGeom>
+            </p:spPr>
+          </p:pic>
+        </mc:Fallback>
+      </mc:AlternateContent>
+      <mc:AlternateContent xmlns:mc="http://schemas.openxmlformats.org/markup-compatibility/2006" xmlns:p14="http://schemas.microsoft.com/office/powerpoint/2010/main">
+        <mc:Choice Requires="p14">
+          <p:contentPart p14:bwMode="auto" r:id="rId84">
+            <p14:nvContentPartPr>
+              <p14:cNvPr id="324" name="잉크 44"/>
+              <p14:cNvContentPartPr/>
+              <p14:nvPr/>
+            </p14:nvContentPartPr>
+            <p14:xfrm>
+              <a:off x="7626350" y="2203450"/>
+              <a:ext cx="69850" cy="53975"/>
+            </p14:xfrm>
+          </p:contentPart>
+        </mc:Choice>
+        <mc:Fallback>
+          <p:pic>
+            <p:nvPicPr>
+              <p:cNvPr id="324" name="잉크 44"/>
+              <p:cNvPicPr/>
+              <p:nvPr/>
+            </p:nvPicPr>
+            <p:blipFill>
+              <a:blip r:embed="rId85"/>
+              <a:stretch>
+                <a:fillRect/>
+              </a:stretch>
+            </p:blipFill>
+            <p:spPr>
+              <a:xfrm>
+                <a:off x="7626350" y="2203450"/>
+                <a:ext cx="69850" cy="53975"/>
+              </a:xfrm>
+              <a:prstGeom prst="rect">
+                <a:avLst/>
+              </a:prstGeom>
+            </p:spPr>
+          </p:pic>
+        </mc:Fallback>
+      </mc:AlternateContent>
+      <mc:AlternateContent xmlns:mc="http://schemas.openxmlformats.org/markup-compatibility/2006" xmlns:p14="http://schemas.microsoft.com/office/powerpoint/2010/main">
+        <mc:Choice Requires="p14">
+          <p:contentPart p14:bwMode="auto" r:id="rId86">
+            <p14:nvContentPartPr>
+              <p14:cNvPr id="325" name="잉크 45"/>
+              <p14:cNvContentPartPr/>
+              <p14:nvPr/>
+            </p14:nvContentPartPr>
+            <p14:xfrm>
+              <a:off x="7715250" y="2155825"/>
+              <a:ext cx="66675" cy="104775"/>
+            </p14:xfrm>
+          </p:contentPart>
+        </mc:Choice>
+        <mc:Fallback>
+          <p:pic>
+            <p:nvPicPr>
+              <p:cNvPr id="325" name="잉크 45"/>
+              <p:cNvPicPr/>
+              <p:nvPr/>
+            </p:nvPicPr>
+            <p:blipFill>
+              <a:blip r:embed="rId87"/>
+              <a:stretch>
+                <a:fillRect/>
+              </a:stretch>
+            </p:blipFill>
+            <p:spPr>
+              <a:xfrm>
+                <a:off x="7715250" y="2155825"/>
+                <a:ext cx="66675" cy="104775"/>
+              </a:xfrm>
+              <a:prstGeom prst="rect">
+                <a:avLst/>
+              </a:prstGeom>
+            </p:spPr>
+          </p:pic>
+        </mc:Fallback>
+      </mc:AlternateContent>
+      <mc:AlternateContent xmlns:mc="http://schemas.openxmlformats.org/markup-compatibility/2006" xmlns:p14="http://schemas.microsoft.com/office/powerpoint/2010/main">
+        <mc:Choice Requires="p14">
+          <p:contentPart p14:bwMode="auto" r:id="rId88">
+            <p14:nvContentPartPr>
+              <p14:cNvPr id="326" name="잉크 46"/>
+              <p14:cNvContentPartPr/>
+              <p14:nvPr/>
+            </p14:nvContentPartPr>
+            <p14:xfrm>
+              <a:off x="7769225" y="2193925"/>
+              <a:ext cx="82550" cy="88900"/>
+            </p14:xfrm>
+          </p:contentPart>
+        </mc:Choice>
+        <mc:Fallback>
+          <p:pic>
+            <p:nvPicPr>
+              <p:cNvPr id="326" name="잉크 46"/>
+              <p:cNvPicPr/>
+              <p:nvPr/>
+            </p:nvPicPr>
+            <p:blipFill>
+              <a:blip r:embed="rId89"/>
+              <a:stretch>
+                <a:fillRect/>
+              </a:stretch>
+            </p:blipFill>
+            <p:spPr>
+              <a:xfrm>
+                <a:off x="7769225" y="2193925"/>
+                <a:ext cx="82550" cy="88900"/>
+              </a:xfrm>
+              <a:prstGeom prst="rect">
+                <a:avLst/>
+              </a:prstGeom>
+            </p:spPr>
+          </p:pic>
+        </mc:Fallback>
+      </mc:AlternateContent>
+      <mc:AlternateContent xmlns:mc="http://schemas.openxmlformats.org/markup-compatibility/2006" xmlns:p14="http://schemas.microsoft.com/office/powerpoint/2010/main">
+        <mc:Choice Requires="p14">
+          <p:contentPart p14:bwMode="auto" r:id="rId90">
+            <p14:nvContentPartPr>
+              <p14:cNvPr id="327" name="잉크 47"/>
+              <p14:cNvContentPartPr/>
+              <p14:nvPr/>
+            </p14:nvContentPartPr>
+            <p14:xfrm>
+              <a:off x="7915275" y="2193925"/>
+              <a:ext cx="53975" cy="101600"/>
+            </p14:xfrm>
+          </p:contentPart>
+        </mc:Choice>
+        <mc:Fallback>
+          <p:pic>
+            <p:nvPicPr>
+              <p:cNvPr id="327" name="잉크 47"/>
+              <p:cNvPicPr/>
+              <p:nvPr/>
+            </p:nvPicPr>
+            <p:blipFill>
+              <a:blip r:embed="rId91"/>
+              <a:stretch>
+                <a:fillRect/>
+              </a:stretch>
+            </p:blipFill>
+            <p:spPr>
+              <a:xfrm>
+                <a:off x="7915275" y="2193925"/>
+                <a:ext cx="53975" cy="101600"/>
+              </a:xfrm>
+              <a:prstGeom prst="rect">
+                <a:avLst/>
+              </a:prstGeom>
+            </p:spPr>
+          </p:pic>
+        </mc:Fallback>
+      </mc:AlternateContent>
+      <mc:AlternateContent xmlns:mc="http://schemas.openxmlformats.org/markup-compatibility/2006" xmlns:p14="http://schemas.microsoft.com/office/powerpoint/2010/main">
+        <mc:Choice Requires="p14">
+          <p:contentPart p14:bwMode="auto" r:id="rId92">
+            <p14:nvContentPartPr>
+              <p14:cNvPr id="328" name="잉크 48"/>
+              <p14:cNvContentPartPr/>
+              <p14:nvPr/>
+            </p14:nvContentPartPr>
+            <p14:xfrm>
+              <a:off x="9382125" y="2825750"/>
+              <a:ext cx="2540" cy="0"/>
+            </p14:xfrm>
+          </p:contentPart>
+        </mc:Choice>
+        <mc:Fallback>
+          <p:pic>
+            <p:nvPicPr>
+              <p:cNvPr id="328" name="잉크 48"/>
+              <p:cNvPicPr/>
+              <p:nvPr/>
+            </p:nvPicPr>
+            <p:blipFill>
+              <a:blip r:embed="rId93"/>
+              <a:stretch>
+                <a:fillRect/>
+              </a:stretch>
+            </p:blipFill>
+            <p:spPr>
+              <a:xfrm>
+                <a:off x="9382125" y="2825750"/>
+                <a:ext cx="2540" cy="0"/>
+              </a:xfrm>
+              <a:prstGeom prst="rect">
+                <a:avLst/>
+              </a:prstGeom>
+            </p:spPr>
+          </p:pic>
+        </mc:Fallback>
+      </mc:AlternateContent>
+      <mc:AlternateContent xmlns:mc="http://schemas.openxmlformats.org/markup-compatibility/2006" xmlns:p14="http://schemas.microsoft.com/office/powerpoint/2010/main">
+        <mc:Choice Requires="p14">
+          <p:contentPart p14:bwMode="auto" r:id="rId94">
+            <p14:nvContentPartPr>
+              <p14:cNvPr id="329" name="잉크 49"/>
+              <p14:cNvContentPartPr/>
+              <p14:nvPr/>
+            </p14:nvContentPartPr>
+            <p14:xfrm>
+              <a:off x="9382125" y="2825750"/>
+              <a:ext cx="2540" cy="3175"/>
+            </p14:xfrm>
+          </p:contentPart>
+        </mc:Choice>
+        <mc:Fallback>
+          <p:pic>
+            <p:nvPicPr>
+              <p:cNvPr id="329" name="잉크 49"/>
+              <p:cNvPicPr/>
+              <p:nvPr/>
+            </p:nvPicPr>
+            <p:blipFill>
+              <a:blip r:embed="rId95"/>
+              <a:stretch>
+                <a:fillRect/>
+              </a:stretch>
+            </p:blipFill>
+            <p:spPr>
+              <a:xfrm>
+                <a:off x="9382125" y="2825750"/>
+                <a:ext cx="2540" cy="3175"/>
               </a:xfrm>
               <a:prstGeom prst="rect">
                 <a:avLst/>
